--- a/docs/HealthSOA_Presentation.pptx
+++ b/docs/HealthSOA_Presentation.pptx
@@ -1,30 +1,30 @@
 
 <file path=ppt/presentation.xml><?xml version="1.0" encoding="utf-8"?>
-<p:presentation xmlns:a="http://schemas.openxmlformats.org/drawingml/2006/main" xmlns:r="http://schemas.openxmlformats.org/officeDocument/2006/relationships" xmlns:p="http://schemas.openxmlformats.org/presentationml/2006/main" xmlns:m="http://schemas.openxmlformats.org/officeDocument/2006/math" xmlns:w="http://schemas.openxmlformats.org/wordprocessingml/2006/main" autoCompressPictures="0" saveSubsetFonts="1">
+<p:presentation xmlns:a="http://schemas.openxmlformats.org/drawingml/2006/main" xmlns:r="http://schemas.openxmlformats.org/officeDocument/2006/relationships" xmlns:p="http://schemas.openxmlformats.org/presentationml/2006/main" saveSubsetFonts="1" autoCompressPictures="0">
   <p:sldMasterIdLst>
     <p:sldMasterId id="2147483648" r:id="rId1"/>
   </p:sldMasterIdLst>
   <p:notesMasterIdLst>
-    <p:notesMasterId r:id="rId21"/>
+    <p:notesMasterId r:id="rId19"/>
   </p:notesMasterIdLst>
   <p:sldIdLst>
-    <p:sldId id="256" r:id="rId4"/>
-    <p:sldId id="257" r:id="rId5"/>
-    <p:sldId id="258" r:id="rId6"/>
-    <p:sldId id="259" r:id="rId7"/>
-    <p:sldId id="260" r:id="rId8"/>
-    <p:sldId id="261" r:id="rId9"/>
-    <p:sldId id="262" r:id="rId10"/>
-    <p:sldId id="263" r:id="rId11"/>
-    <p:sldId id="264" r:id="rId12"/>
-    <p:sldId id="265" r:id="rId13"/>
-    <p:sldId id="266" r:id="rId14"/>
-    <p:sldId id="267" r:id="rId15"/>
-    <p:sldId id="268" r:id="rId16"/>
-    <p:sldId id="269" r:id="rId17"/>
-    <p:sldId id="270" r:id="rId18"/>
-    <p:sldId id="271" r:id="rId19"/>
-    <p:sldId id="272" r:id="rId20"/>
+    <p:sldId id="256" r:id="rId2"/>
+    <p:sldId id="257" r:id="rId3"/>
+    <p:sldId id="258" r:id="rId4"/>
+    <p:sldId id="259" r:id="rId5"/>
+    <p:sldId id="260" r:id="rId6"/>
+    <p:sldId id="261" r:id="rId7"/>
+    <p:sldId id="262" r:id="rId8"/>
+    <p:sldId id="263" r:id="rId9"/>
+    <p:sldId id="264" r:id="rId10"/>
+    <p:sldId id="265" r:id="rId11"/>
+    <p:sldId id="266" r:id="rId12"/>
+    <p:sldId id="267" r:id="rId13"/>
+    <p:sldId id="274" r:id="rId14"/>
+    <p:sldId id="275" r:id="rId15"/>
+    <p:sldId id="277" r:id="rId16"/>
+    <p:sldId id="276" r:id="rId17"/>
+    <p:sldId id="272" r:id="rId18"/>
   </p:sldIdLst>
   <p:sldSz cx="9144000" cy="5143500" type="screen16x9"/>
   <p:notesSz cx="5143500" cy="9144000"/>
@@ -120,12 +120,28 @@
       </a:defRPr>
     </a:lvl9pPr>
   </p:defaultTextStyle>
+  <p:extLst>
+    <p:ext uri="{EFAFB233-063F-42B5-8137-9DF3F51BA10A}">
+      <p15:sldGuideLst xmlns:p15="http://schemas.microsoft.com/office/powerpoint/2012/main">
+        <p15:guide id="1" pos="2880">
+          <p15:clr>
+            <a:srgbClr val="A4A3A4"/>
+          </p15:clr>
+        </p15:guide>
+        <p15:guide id="2" orient="horz" pos="1620">
+          <p15:clr>
+            <a:srgbClr val="A4A3A4"/>
+          </p15:clr>
+        </p15:guide>
+      </p15:sldGuideLst>
+    </p:ext>
+  </p:extLst>
 </p:presentation>
 </file>
 
 <file path=ppt/notesMasters/notesMaster1.xml><?xml version="1.0" encoding="utf-8"?>
 <p:notesMaster xmlns:a="http://schemas.openxmlformats.org/drawingml/2006/main" xmlns:r="http://schemas.openxmlformats.org/officeDocument/2006/relationships" xmlns:p="http://schemas.openxmlformats.org/presentationml/2006/main">
-  <p:cSld name="">
+  <p:cSld>
     <p:bg>
       <p:bgRef idx="1001">
         <a:schemeClr val="bg1"/>
@@ -244,8 +260,8 @@
 </file>
 
 <file path=ppt/notesSlides/notesSlide1.xml><?xml version="1.0" encoding="utf-8"?>
-<p:notes xmlns:a="http://schemas.openxmlformats.org/drawingml/2006/main" xmlns:r="http://schemas.openxmlformats.org/officeDocument/2006/relationships" xmlns:p="http://schemas.openxmlformats.org/presentationml/2006/main" xmlns:m="http://schemas.openxmlformats.org/officeDocument/2006/math" xmlns:w="http://schemas.openxmlformats.org/wordprocessingml/2006/main">
-  <p:cSld name="">
+<p:notes xmlns:a="http://schemas.openxmlformats.org/drawingml/2006/main" xmlns:r="http://schemas.openxmlformats.org/officeDocument/2006/relationships" xmlns:p="http://schemas.openxmlformats.org/presentationml/2006/main">
+  <p:cSld>
     <p:spTree>
       <p:nvGrpSpPr>
         <p:cNvPr id="1" name=""/>
@@ -264,7 +280,7 @@
         <p:nvSpPr>
           <p:cNvPr id="1345810463" name="Slide Image Placeholder 1"/>
           <p:cNvSpPr>
-            <a:spLocks noChangeAspect="1" noGrp="1" noRot="1"/>
+            <a:spLocks noGrp="1" noRot="1" noChangeAspect="1"/>
           </p:cNvSpPr>
           <p:nvPr>
             <p:ph type="sldImg"/>
@@ -329,8 +345,8 @@
 </file>
 
 <file path=ppt/notesSlides/notesSlide10.xml><?xml version="1.0" encoding="utf-8"?>
-<p:notes xmlns:a="http://schemas.openxmlformats.org/drawingml/2006/main" xmlns:r="http://schemas.openxmlformats.org/officeDocument/2006/relationships" xmlns:p="http://schemas.openxmlformats.org/presentationml/2006/main" xmlns:m="http://schemas.openxmlformats.org/officeDocument/2006/math" xmlns:w="http://schemas.openxmlformats.org/wordprocessingml/2006/main">
-  <p:cSld name="">
+<p:notes xmlns:a="http://schemas.openxmlformats.org/drawingml/2006/main" xmlns:r="http://schemas.openxmlformats.org/officeDocument/2006/relationships" xmlns:p="http://schemas.openxmlformats.org/presentationml/2006/main">
+  <p:cSld>
     <p:spTree>
       <p:nvGrpSpPr>
         <p:cNvPr id="1" name=""/>
@@ -349,7 +365,7 @@
         <p:nvSpPr>
           <p:cNvPr id="788235895" name="Slide Image Placeholder 1"/>
           <p:cNvSpPr>
-            <a:spLocks noChangeAspect="1" noGrp="1" noRot="1"/>
+            <a:spLocks noGrp="1" noRot="1" noChangeAspect="1"/>
           </p:cNvSpPr>
           <p:nvPr>
             <p:ph type="sldImg"/>
@@ -414,8 +430,8 @@
 </file>
 
 <file path=ppt/notesSlides/notesSlide11.xml><?xml version="1.0" encoding="utf-8"?>
-<p:notes xmlns:a="http://schemas.openxmlformats.org/drawingml/2006/main" xmlns:r="http://schemas.openxmlformats.org/officeDocument/2006/relationships" xmlns:p="http://schemas.openxmlformats.org/presentationml/2006/main" xmlns:m="http://schemas.openxmlformats.org/officeDocument/2006/math" xmlns:w="http://schemas.openxmlformats.org/wordprocessingml/2006/main">
-  <p:cSld name="">
+<p:notes xmlns:a="http://schemas.openxmlformats.org/drawingml/2006/main" xmlns:r="http://schemas.openxmlformats.org/officeDocument/2006/relationships" xmlns:p="http://schemas.openxmlformats.org/presentationml/2006/main">
+  <p:cSld>
     <p:spTree>
       <p:nvGrpSpPr>
         <p:cNvPr id="1" name=""/>
@@ -434,7 +450,7 @@
         <p:nvSpPr>
           <p:cNvPr id="1771393040" name="Slide Image Placeholder 1"/>
           <p:cNvSpPr>
-            <a:spLocks noChangeAspect="1" noGrp="1" noRot="1"/>
+            <a:spLocks noGrp="1" noRot="1" noChangeAspect="1"/>
           </p:cNvSpPr>
           <p:nvPr>
             <p:ph type="sldImg"/>
@@ -499,8 +515,8 @@
 </file>
 
 <file path=ppt/notesSlides/notesSlide12.xml><?xml version="1.0" encoding="utf-8"?>
-<p:notes xmlns:a="http://schemas.openxmlformats.org/drawingml/2006/main" xmlns:r="http://schemas.openxmlformats.org/officeDocument/2006/relationships" xmlns:p="http://schemas.openxmlformats.org/presentationml/2006/main" xmlns:m="http://schemas.openxmlformats.org/officeDocument/2006/math" xmlns:w="http://schemas.openxmlformats.org/wordprocessingml/2006/main">
-  <p:cSld name="">
+<p:notes xmlns:a="http://schemas.openxmlformats.org/drawingml/2006/main" xmlns:r="http://schemas.openxmlformats.org/officeDocument/2006/relationships" xmlns:p="http://schemas.openxmlformats.org/presentationml/2006/main">
+  <p:cSld>
     <p:spTree>
       <p:nvGrpSpPr>
         <p:cNvPr id="1" name=""/>
@@ -519,7 +535,7 @@
         <p:nvSpPr>
           <p:cNvPr id="695824920" name="Slide Image Placeholder 1"/>
           <p:cNvSpPr>
-            <a:spLocks noChangeAspect="1" noGrp="1" noRot="1"/>
+            <a:spLocks noGrp="1" noRot="1" noChangeAspect="1"/>
           </p:cNvSpPr>
           <p:nvPr>
             <p:ph type="sldImg"/>
@@ -584,8 +600,8 @@
 </file>
 
 <file path=ppt/notesSlides/notesSlide13.xml><?xml version="1.0" encoding="utf-8"?>
-<p:notes xmlns:a="http://schemas.openxmlformats.org/drawingml/2006/main" xmlns:r="http://schemas.openxmlformats.org/officeDocument/2006/relationships" xmlns:p="http://schemas.openxmlformats.org/presentationml/2006/main" xmlns:m="http://schemas.openxmlformats.org/officeDocument/2006/math" xmlns:w="http://schemas.openxmlformats.org/wordprocessingml/2006/main">
-  <p:cSld name="">
+<p:notes xmlns:a="http://schemas.openxmlformats.org/drawingml/2006/main" xmlns:r="http://schemas.openxmlformats.org/officeDocument/2006/relationships" xmlns:p="http://schemas.openxmlformats.org/presentationml/2006/main">
+  <p:cSld>
     <p:spTree>
       <p:nvGrpSpPr>
         <p:cNvPr id="1" name=""/>
@@ -604,7 +620,7 @@
         <p:nvSpPr>
           <p:cNvPr id="2" name="Slide Image Placeholder 1"/>
           <p:cNvSpPr>
-            <a:spLocks noChangeAspect="1" noGrp="1" noRot="1"/>
+            <a:spLocks noGrp="1" noRot="1" noChangeAspect="1"/>
           </p:cNvSpPr>
           <p:nvPr>
             <p:ph type="sldImg"/>
@@ -654,7 +670,7 @@
             </a:pPr>
             <a:fld id="{C9242196-202C-F19F-E59B-19A0C2A48E0E}" type="slidenum">
               <a:rPr/>
-              <a:t/>
+              <a:t>13</a:t>
             </a:fld>
             <a:endParaRPr/>
           </a:p>
@@ -669,8 +685,8 @@
 </file>
 
 <file path=ppt/notesSlides/notesSlide14.xml><?xml version="1.0" encoding="utf-8"?>
-<p:notes xmlns:a="http://schemas.openxmlformats.org/drawingml/2006/main" xmlns:r="http://schemas.openxmlformats.org/officeDocument/2006/relationships" xmlns:p="http://schemas.openxmlformats.org/presentationml/2006/main" xmlns:m="http://schemas.openxmlformats.org/officeDocument/2006/math" xmlns:w="http://schemas.openxmlformats.org/wordprocessingml/2006/main">
-  <p:cSld name="">
+<p:notes xmlns:a="http://schemas.openxmlformats.org/drawingml/2006/main" xmlns:r="http://schemas.openxmlformats.org/officeDocument/2006/relationships" xmlns:p="http://schemas.openxmlformats.org/presentationml/2006/main">
+  <p:cSld>
     <p:spTree>
       <p:nvGrpSpPr>
         <p:cNvPr id="1" name=""/>
@@ -689,7 +705,7 @@
         <p:nvSpPr>
           <p:cNvPr id="2" name="Slide Image Placeholder 1"/>
           <p:cNvSpPr>
-            <a:spLocks noChangeAspect="1" noGrp="1" noRot="1"/>
+            <a:spLocks noGrp="1" noRot="1" noChangeAspect="1"/>
           </p:cNvSpPr>
           <p:nvPr>
             <p:ph type="sldImg"/>
@@ -739,7 +755,7 @@
             </a:pPr>
             <a:fld id="{9F8B224E-5401-2944-BD9E-177ABE848A1D}" type="slidenum">
               <a:rPr/>
-              <a:t/>
+              <a:t>14</a:t>
             </a:fld>
             <a:endParaRPr/>
           </a:p>
@@ -754,8 +770,8 @@
 </file>
 
 <file path=ppt/notesSlides/notesSlide15.xml><?xml version="1.0" encoding="utf-8"?>
-<p:notes xmlns:a="http://schemas.openxmlformats.org/drawingml/2006/main" xmlns:r="http://schemas.openxmlformats.org/officeDocument/2006/relationships" xmlns:p="http://schemas.openxmlformats.org/presentationml/2006/main" xmlns:m="http://schemas.openxmlformats.org/officeDocument/2006/math" xmlns:w="http://schemas.openxmlformats.org/wordprocessingml/2006/main">
-  <p:cSld name="">
+<p:notes xmlns:a="http://schemas.openxmlformats.org/drawingml/2006/main" xmlns:r="http://schemas.openxmlformats.org/officeDocument/2006/relationships" xmlns:p="http://schemas.openxmlformats.org/presentationml/2006/main">
+  <p:cSld>
     <p:spTree>
       <p:nvGrpSpPr>
         <p:cNvPr id="1" name=""/>
@@ -774,7 +790,7 @@
         <p:nvSpPr>
           <p:cNvPr id="2" name="Slide Image Placeholder 1"/>
           <p:cNvSpPr>
-            <a:spLocks noChangeAspect="1" noGrp="1" noRot="1"/>
+            <a:spLocks noGrp="1" noRot="1" noChangeAspect="1"/>
           </p:cNvSpPr>
           <p:nvPr>
             <p:ph type="sldImg"/>
@@ -824,7 +840,7 @@
             </a:pPr>
             <a:fld id="{77D4132B-99D2-A016-0E8A-93AF35626232}" type="slidenum">
               <a:rPr/>
-              <a:t/>
+              <a:t>15</a:t>
             </a:fld>
             <a:endParaRPr/>
           </a:p>
@@ -839,8 +855,8 @@
 </file>
 
 <file path=ppt/notesSlides/notesSlide16.xml><?xml version="1.0" encoding="utf-8"?>
-<p:notes xmlns:a="http://schemas.openxmlformats.org/drawingml/2006/main" xmlns:r="http://schemas.openxmlformats.org/officeDocument/2006/relationships" xmlns:p="http://schemas.openxmlformats.org/presentationml/2006/main" xmlns:m="http://schemas.openxmlformats.org/officeDocument/2006/math" xmlns:w="http://schemas.openxmlformats.org/wordprocessingml/2006/main">
-  <p:cSld name="">
+<p:notes xmlns:a="http://schemas.openxmlformats.org/drawingml/2006/main" xmlns:r="http://schemas.openxmlformats.org/officeDocument/2006/relationships" xmlns:p="http://schemas.openxmlformats.org/presentationml/2006/main">
+  <p:cSld>
     <p:spTree>
       <p:nvGrpSpPr>
         <p:cNvPr id="1" name=""/>
@@ -859,7 +875,7 @@
         <p:nvSpPr>
           <p:cNvPr id="2" name="Slide Image Placeholder 1"/>
           <p:cNvSpPr>
-            <a:spLocks noChangeAspect="1" noGrp="1" noRot="1"/>
+            <a:spLocks noGrp="1" noRot="1" noChangeAspect="1"/>
           </p:cNvSpPr>
           <p:nvPr>
             <p:ph type="sldImg"/>
@@ -909,7 +925,7 @@
             </a:pPr>
             <a:fld id="{82EBE06E-E069-3376-C5E3-792169FA5BE7}" type="slidenum">
               <a:rPr/>
-              <a:t/>
+              <a:t>16</a:t>
             </a:fld>
             <a:endParaRPr/>
           </a:p>
@@ -924,8 +940,8 @@
 </file>
 
 <file path=ppt/notesSlides/notesSlide17.xml><?xml version="1.0" encoding="utf-8"?>
-<p:notes xmlns:a="http://schemas.openxmlformats.org/drawingml/2006/main" xmlns:r="http://schemas.openxmlformats.org/officeDocument/2006/relationships" xmlns:p="http://schemas.openxmlformats.org/presentationml/2006/main" xmlns:m="http://schemas.openxmlformats.org/officeDocument/2006/math" xmlns:w="http://schemas.openxmlformats.org/wordprocessingml/2006/main">
-  <p:cSld name="">
+<p:notes xmlns:a="http://schemas.openxmlformats.org/drawingml/2006/main" xmlns:r="http://schemas.openxmlformats.org/officeDocument/2006/relationships" xmlns:p="http://schemas.openxmlformats.org/presentationml/2006/main">
+  <p:cSld>
     <p:spTree>
       <p:nvGrpSpPr>
         <p:cNvPr id="1" name=""/>
@@ -944,7 +960,7 @@
         <p:nvSpPr>
           <p:cNvPr id="79359749" name="Slide Image Placeholder 1"/>
           <p:cNvSpPr>
-            <a:spLocks noChangeAspect="1" noGrp="1" noRot="1"/>
+            <a:spLocks noGrp="1" noRot="1" noChangeAspect="1"/>
           </p:cNvSpPr>
           <p:nvPr>
             <p:ph type="sldImg"/>
@@ -1009,8 +1025,8 @@
 </file>
 
 <file path=ppt/notesSlides/notesSlide2.xml><?xml version="1.0" encoding="utf-8"?>
-<p:notes xmlns:a="http://schemas.openxmlformats.org/drawingml/2006/main" xmlns:r="http://schemas.openxmlformats.org/officeDocument/2006/relationships" xmlns:p="http://schemas.openxmlformats.org/presentationml/2006/main" xmlns:m="http://schemas.openxmlformats.org/officeDocument/2006/math" xmlns:w="http://schemas.openxmlformats.org/wordprocessingml/2006/main">
-  <p:cSld name="">
+<p:notes xmlns:a="http://schemas.openxmlformats.org/drawingml/2006/main" xmlns:r="http://schemas.openxmlformats.org/officeDocument/2006/relationships" xmlns:p="http://schemas.openxmlformats.org/presentationml/2006/main">
+  <p:cSld>
     <p:spTree>
       <p:nvGrpSpPr>
         <p:cNvPr id="1" name=""/>
@@ -1029,7 +1045,7 @@
         <p:nvSpPr>
           <p:cNvPr id="1047584888" name="Slide Image Placeholder 1"/>
           <p:cNvSpPr>
-            <a:spLocks noChangeAspect="1" noGrp="1" noRot="1"/>
+            <a:spLocks noGrp="1" noRot="1" noChangeAspect="1"/>
           </p:cNvSpPr>
           <p:nvPr>
             <p:ph type="sldImg"/>
@@ -1094,8 +1110,8 @@
 </file>
 
 <file path=ppt/notesSlides/notesSlide3.xml><?xml version="1.0" encoding="utf-8"?>
-<p:notes xmlns:a="http://schemas.openxmlformats.org/drawingml/2006/main" xmlns:r="http://schemas.openxmlformats.org/officeDocument/2006/relationships" xmlns:p="http://schemas.openxmlformats.org/presentationml/2006/main" xmlns:m="http://schemas.openxmlformats.org/officeDocument/2006/math" xmlns:w="http://schemas.openxmlformats.org/wordprocessingml/2006/main">
-  <p:cSld name="">
+<p:notes xmlns:a="http://schemas.openxmlformats.org/drawingml/2006/main" xmlns:r="http://schemas.openxmlformats.org/officeDocument/2006/relationships" xmlns:p="http://schemas.openxmlformats.org/presentationml/2006/main">
+  <p:cSld>
     <p:spTree>
       <p:nvGrpSpPr>
         <p:cNvPr id="1" name=""/>
@@ -1114,7 +1130,7 @@
         <p:nvSpPr>
           <p:cNvPr id="466787875" name="Slide Image Placeholder 1"/>
           <p:cNvSpPr>
-            <a:spLocks noChangeAspect="1" noGrp="1" noRot="1"/>
+            <a:spLocks noGrp="1" noRot="1" noChangeAspect="1"/>
           </p:cNvSpPr>
           <p:nvPr>
             <p:ph type="sldImg"/>
@@ -1179,8 +1195,8 @@
 </file>
 
 <file path=ppt/notesSlides/notesSlide4.xml><?xml version="1.0" encoding="utf-8"?>
-<p:notes xmlns:a="http://schemas.openxmlformats.org/drawingml/2006/main" xmlns:r="http://schemas.openxmlformats.org/officeDocument/2006/relationships" xmlns:p="http://schemas.openxmlformats.org/presentationml/2006/main" xmlns:m="http://schemas.openxmlformats.org/officeDocument/2006/math" xmlns:w="http://schemas.openxmlformats.org/wordprocessingml/2006/main">
-  <p:cSld name="">
+<p:notes xmlns:a="http://schemas.openxmlformats.org/drawingml/2006/main" xmlns:r="http://schemas.openxmlformats.org/officeDocument/2006/relationships" xmlns:p="http://schemas.openxmlformats.org/presentationml/2006/main">
+  <p:cSld>
     <p:spTree>
       <p:nvGrpSpPr>
         <p:cNvPr id="1" name=""/>
@@ -1199,7 +1215,7 @@
         <p:nvSpPr>
           <p:cNvPr id="1527289893" name="Slide Image Placeholder 1"/>
           <p:cNvSpPr>
-            <a:spLocks noChangeAspect="1" noGrp="1" noRot="1"/>
+            <a:spLocks noGrp="1" noRot="1" noChangeAspect="1"/>
           </p:cNvSpPr>
           <p:nvPr>
             <p:ph type="sldImg"/>
@@ -1264,8 +1280,8 @@
 </file>
 
 <file path=ppt/notesSlides/notesSlide5.xml><?xml version="1.0" encoding="utf-8"?>
-<p:notes xmlns:a="http://schemas.openxmlformats.org/drawingml/2006/main" xmlns:r="http://schemas.openxmlformats.org/officeDocument/2006/relationships" xmlns:p="http://schemas.openxmlformats.org/presentationml/2006/main" xmlns:m="http://schemas.openxmlformats.org/officeDocument/2006/math" xmlns:w="http://schemas.openxmlformats.org/wordprocessingml/2006/main">
-  <p:cSld name="">
+<p:notes xmlns:a="http://schemas.openxmlformats.org/drawingml/2006/main" xmlns:r="http://schemas.openxmlformats.org/officeDocument/2006/relationships" xmlns:p="http://schemas.openxmlformats.org/presentationml/2006/main">
+  <p:cSld>
     <p:spTree>
       <p:nvGrpSpPr>
         <p:cNvPr id="1" name=""/>
@@ -1284,7 +1300,7 @@
         <p:nvSpPr>
           <p:cNvPr id="215184204" name="Slide Image Placeholder 1"/>
           <p:cNvSpPr>
-            <a:spLocks noChangeAspect="1" noGrp="1" noRot="1"/>
+            <a:spLocks noGrp="1" noRot="1" noChangeAspect="1"/>
           </p:cNvSpPr>
           <p:nvPr>
             <p:ph type="sldImg"/>
@@ -1349,8 +1365,8 @@
 </file>
 
 <file path=ppt/notesSlides/notesSlide6.xml><?xml version="1.0" encoding="utf-8"?>
-<p:notes xmlns:a="http://schemas.openxmlformats.org/drawingml/2006/main" xmlns:r="http://schemas.openxmlformats.org/officeDocument/2006/relationships" xmlns:p="http://schemas.openxmlformats.org/presentationml/2006/main" xmlns:m="http://schemas.openxmlformats.org/officeDocument/2006/math" xmlns:w="http://schemas.openxmlformats.org/wordprocessingml/2006/main">
-  <p:cSld name="">
+<p:notes xmlns:a="http://schemas.openxmlformats.org/drawingml/2006/main" xmlns:r="http://schemas.openxmlformats.org/officeDocument/2006/relationships" xmlns:p="http://schemas.openxmlformats.org/presentationml/2006/main">
+  <p:cSld>
     <p:spTree>
       <p:nvGrpSpPr>
         <p:cNvPr id="1" name=""/>
@@ -1369,7 +1385,7 @@
         <p:nvSpPr>
           <p:cNvPr id="1921161018" name="Slide Image Placeholder 1"/>
           <p:cNvSpPr>
-            <a:spLocks noChangeAspect="1" noGrp="1" noRot="1"/>
+            <a:spLocks noGrp="1" noRot="1" noChangeAspect="1"/>
           </p:cNvSpPr>
           <p:nvPr>
             <p:ph type="sldImg"/>
@@ -1434,8 +1450,8 @@
 </file>
 
 <file path=ppt/notesSlides/notesSlide7.xml><?xml version="1.0" encoding="utf-8"?>
-<p:notes xmlns:a="http://schemas.openxmlformats.org/drawingml/2006/main" xmlns:r="http://schemas.openxmlformats.org/officeDocument/2006/relationships" xmlns:p="http://schemas.openxmlformats.org/presentationml/2006/main" xmlns:m="http://schemas.openxmlformats.org/officeDocument/2006/math" xmlns:w="http://schemas.openxmlformats.org/wordprocessingml/2006/main">
-  <p:cSld name="">
+<p:notes xmlns:a="http://schemas.openxmlformats.org/drawingml/2006/main" xmlns:r="http://schemas.openxmlformats.org/officeDocument/2006/relationships" xmlns:p="http://schemas.openxmlformats.org/presentationml/2006/main">
+  <p:cSld>
     <p:spTree>
       <p:nvGrpSpPr>
         <p:cNvPr id="1" name=""/>
@@ -1454,7 +1470,7 @@
         <p:nvSpPr>
           <p:cNvPr id="1985780889" name="Slide Image Placeholder 1"/>
           <p:cNvSpPr>
-            <a:spLocks noChangeAspect="1" noGrp="1" noRot="1"/>
+            <a:spLocks noGrp="1" noRot="1" noChangeAspect="1"/>
           </p:cNvSpPr>
           <p:nvPr>
             <p:ph type="sldImg"/>
@@ -1519,8 +1535,8 @@
 </file>
 
 <file path=ppt/notesSlides/notesSlide8.xml><?xml version="1.0" encoding="utf-8"?>
-<p:notes xmlns:a="http://schemas.openxmlformats.org/drawingml/2006/main" xmlns:r="http://schemas.openxmlformats.org/officeDocument/2006/relationships" xmlns:p="http://schemas.openxmlformats.org/presentationml/2006/main" xmlns:m="http://schemas.openxmlformats.org/officeDocument/2006/math" xmlns:w="http://schemas.openxmlformats.org/wordprocessingml/2006/main">
-  <p:cSld name="">
+<p:notes xmlns:a="http://schemas.openxmlformats.org/drawingml/2006/main" xmlns:r="http://schemas.openxmlformats.org/officeDocument/2006/relationships" xmlns:p="http://schemas.openxmlformats.org/presentationml/2006/main">
+  <p:cSld>
     <p:spTree>
       <p:nvGrpSpPr>
         <p:cNvPr id="1" name=""/>
@@ -1539,7 +1555,7 @@
         <p:nvSpPr>
           <p:cNvPr id="564359789" name="Slide Image Placeholder 1"/>
           <p:cNvSpPr>
-            <a:spLocks noChangeAspect="1" noGrp="1" noRot="1"/>
+            <a:spLocks noGrp="1" noRot="1" noChangeAspect="1"/>
           </p:cNvSpPr>
           <p:nvPr>
             <p:ph type="sldImg"/>
@@ -1604,8 +1620,8 @@
 </file>
 
 <file path=ppt/notesSlides/notesSlide9.xml><?xml version="1.0" encoding="utf-8"?>
-<p:notes xmlns:a="http://schemas.openxmlformats.org/drawingml/2006/main" xmlns:r="http://schemas.openxmlformats.org/officeDocument/2006/relationships" xmlns:p="http://schemas.openxmlformats.org/presentationml/2006/main" xmlns:m="http://schemas.openxmlformats.org/officeDocument/2006/math" xmlns:w="http://schemas.openxmlformats.org/wordprocessingml/2006/main">
-  <p:cSld name="">
+<p:notes xmlns:a="http://schemas.openxmlformats.org/drawingml/2006/main" xmlns:r="http://schemas.openxmlformats.org/officeDocument/2006/relationships" xmlns:p="http://schemas.openxmlformats.org/presentationml/2006/main">
+  <p:cSld>
     <p:spTree>
       <p:nvGrpSpPr>
         <p:cNvPr id="1" name=""/>
@@ -1624,7 +1640,7 @@
         <p:nvSpPr>
           <p:cNvPr id="1105169936" name="Slide Image Placeholder 1"/>
           <p:cNvSpPr>
-            <a:spLocks noChangeAspect="1" noGrp="1" noRot="1"/>
+            <a:spLocks noGrp="1" noRot="1" noChangeAspect="1"/>
           </p:cNvSpPr>
           <p:nvPr>
             <p:ph type="sldImg"/>
@@ -1689,7 +1705,7 @@
 </file>
 
 <file path=ppt/slideLayouts/slideLayout1.xml><?xml version="1.0" encoding="utf-8"?>
-<p:sldLayout xmlns:a="http://schemas.openxmlformats.org/drawingml/2006/main" xmlns:r="http://schemas.openxmlformats.org/officeDocument/2006/relationships" xmlns:p="http://schemas.openxmlformats.org/presentationml/2006/main" xmlns:m="http://schemas.openxmlformats.org/officeDocument/2006/math" xmlns:w="http://schemas.openxmlformats.org/wordprocessingml/2006/main" matchingName="" preserve="1" showMasterPhAnim="0" showMasterSp="1" userDrawn="1">
+<p:sldLayout xmlns:a="http://schemas.openxmlformats.org/drawingml/2006/main" xmlns:r="http://schemas.openxmlformats.org/officeDocument/2006/relationships" xmlns:p="http://schemas.openxmlformats.org/presentationml/2006/main" showMasterPhAnim="0" preserve="1" userDrawn="1">
   <p:cSld name="DEFAULT">
     <p:bg>
       <p:bgRef idx="1001">
@@ -1719,8 +1735,8 @@
 </file>
 
 <file path=ppt/slideMasters/slideMaster1.xml><?xml version="1.0" encoding="utf-8"?>
-<p:sldMaster xmlns:a="http://schemas.openxmlformats.org/drawingml/2006/main" xmlns:r="http://schemas.openxmlformats.org/officeDocument/2006/relationships" xmlns:p="http://schemas.openxmlformats.org/presentationml/2006/main" xmlns:m="http://schemas.openxmlformats.org/officeDocument/2006/math" xmlns:w="http://schemas.openxmlformats.org/wordprocessingml/2006/main" preserve="0">
-  <p:cSld name="">
+<p:sldMaster xmlns:a="http://schemas.openxmlformats.org/drawingml/2006/main" xmlns:r="http://schemas.openxmlformats.org/officeDocument/2006/relationships" xmlns:p="http://schemas.openxmlformats.org/presentationml/2006/main">
+  <p:cSld>
     <p:bg>
       <p:bgRef idx="1001">
         <a:schemeClr val="bg1"/>
@@ -1746,7 +1762,7 @@
   <p:sldLayoutIdLst>
     <p:sldLayoutId id="2147483649" r:id="rId1"/>
   </p:sldLayoutIdLst>
-  <p:hf dt="0" ftr="0" hdr="0" sldNum="0"/>
+  <p:hf sldNum="0" hdr="0" ftr="0" dt="0"/>
   <p:txStyles>
     <p:titleStyle>
       <a:lvl1pPr algn="ctr" defTabSz="914400" rtl="0">
@@ -2001,13 +2017,14 @@
 </file>
 
 <file path=ppt/slides/slide1.xml><?xml version="1.0" encoding="utf-8"?>
-<p:sld xmlns:a="http://schemas.openxmlformats.org/drawingml/2006/main" xmlns:r="http://schemas.openxmlformats.org/officeDocument/2006/relationships" xmlns:p="http://schemas.openxmlformats.org/presentationml/2006/main" xmlns:m="http://schemas.openxmlformats.org/officeDocument/2006/math" xmlns:w="http://schemas.openxmlformats.org/wordprocessingml/2006/main" xmlns:mc="http://schemas.openxmlformats.org/markup-compatibility/2006" showMasterPhAnim="0" showMasterSp="1" show="1">
+<p:sld xmlns:a="http://schemas.openxmlformats.org/drawingml/2006/main" xmlns:r="http://schemas.openxmlformats.org/officeDocument/2006/relationships" xmlns:p="http://schemas.openxmlformats.org/presentationml/2006/main" showMasterPhAnim="0">
   <p:cSld name="Slide 1">
     <p:bg>
-      <p:bgPr shadeToTitle="0">
+      <p:bgPr>
         <a:solidFill>
           <a:srgbClr val="1F4E79"/>
         </a:solidFill>
+        <a:effectLst/>
       </p:bgPr>
     </p:bg>
     <p:spTree>
@@ -2237,11 +2254,11 @@
   <p:clrMapOvr>
     <a:masterClrMapping/>
   </p:clrMapOvr>
-  <mc:AlternateContent xmlns:mc="http://schemas.openxmlformats.org/markup-compatibility/2006">
-    <mc:Choice xmlns:p159="http://schemas.microsoft.com/office/powerpoint/2015/09/main" xmlns:p14="http://schemas.microsoft.com/office/powerpoint/2010/main" Requires="p159">
-      <p:transition p14:dur="500" advClick="1"/>
+  <mc:AlternateContent xmlns:mc="http://schemas.openxmlformats.org/markup-compatibility/2006" xmlns:p159="http://schemas.microsoft.com/office/powerpoint/2015/09/main">
+    <mc:Choice Requires="p159">
+      <p:transition/>
     </mc:Choice>
-    <mc:Fallback>
+    <mc:Fallback xmlns:w="http://schemas.openxmlformats.org/wordprocessingml/2006/main" xmlns:m="http://schemas.openxmlformats.org/officeDocument/2006/math" xmlns="">
       <p:transition advClick="1"/>
     </mc:Fallback>
   </mc:AlternateContent>
@@ -2249,13 +2266,14 @@
 </file>
 
 <file path=ppt/slides/slide10.xml><?xml version="1.0" encoding="utf-8"?>
-<p:sld xmlns:a="http://schemas.openxmlformats.org/drawingml/2006/main" xmlns:r="http://schemas.openxmlformats.org/officeDocument/2006/relationships" xmlns:p="http://schemas.openxmlformats.org/presentationml/2006/main" xmlns:m="http://schemas.openxmlformats.org/officeDocument/2006/math" xmlns:w="http://schemas.openxmlformats.org/wordprocessingml/2006/main" xmlns:mc="http://schemas.openxmlformats.org/markup-compatibility/2006" showMasterPhAnim="0" showMasterSp="1" show="1">
+<p:sld xmlns:a="http://schemas.openxmlformats.org/drawingml/2006/main" xmlns:r="http://schemas.openxmlformats.org/officeDocument/2006/relationships" xmlns:p="http://schemas.openxmlformats.org/presentationml/2006/main" showMasterPhAnim="0">
   <p:cSld name="Slide 11">
     <p:bg>
-      <p:bgPr shadeToTitle="0">
+      <p:bgPr>
         <a:solidFill>
           <a:srgbClr val="F5F8FA"/>
         </a:solidFill>
+        <a:effectLst/>
       </p:bgPr>
     </p:bg>
     <p:spTree>
@@ -3431,11 +3449,11 @@
   <p:clrMapOvr>
     <a:masterClrMapping/>
   </p:clrMapOvr>
-  <mc:AlternateContent xmlns:mc="http://schemas.openxmlformats.org/markup-compatibility/2006">
-    <mc:Choice xmlns:p159="http://schemas.microsoft.com/office/powerpoint/2015/09/main" xmlns:p14="http://schemas.microsoft.com/office/powerpoint/2010/main" Requires="p159">
-      <p:transition p14:dur="500" advClick="1"/>
+  <mc:AlternateContent xmlns:mc="http://schemas.openxmlformats.org/markup-compatibility/2006" xmlns:p159="http://schemas.microsoft.com/office/powerpoint/2015/09/main">
+    <mc:Choice Requires="p159">
+      <p:transition/>
     </mc:Choice>
-    <mc:Fallback>
+    <mc:Fallback xmlns:w="http://schemas.openxmlformats.org/wordprocessingml/2006/main" xmlns:m="http://schemas.openxmlformats.org/officeDocument/2006/math" xmlns="">
       <p:transition advClick="1"/>
     </mc:Fallback>
   </mc:AlternateContent>
@@ -3443,13 +3461,14 @@
 </file>
 
 <file path=ppt/slides/slide11.xml><?xml version="1.0" encoding="utf-8"?>
-<p:sld xmlns:a="http://schemas.openxmlformats.org/drawingml/2006/main" xmlns:r="http://schemas.openxmlformats.org/officeDocument/2006/relationships" xmlns:p="http://schemas.openxmlformats.org/presentationml/2006/main" xmlns:m="http://schemas.openxmlformats.org/officeDocument/2006/math" xmlns:w="http://schemas.openxmlformats.org/wordprocessingml/2006/main" xmlns:mc="http://schemas.openxmlformats.org/markup-compatibility/2006" showMasterPhAnim="0" showMasterSp="1" show="1">
+<p:sld xmlns:a="http://schemas.openxmlformats.org/drawingml/2006/main" xmlns:r="http://schemas.openxmlformats.org/officeDocument/2006/relationships" xmlns:p="http://schemas.openxmlformats.org/presentationml/2006/main" showMasterPhAnim="0">
   <p:cSld name="Slide 12">
     <p:bg>
-      <p:bgPr shadeToTitle="0">
+      <p:bgPr>
         <a:solidFill>
           <a:srgbClr val="1F4E79"/>
         </a:solidFill>
+        <a:effectLst/>
       </p:bgPr>
     </p:bg>
     <p:spTree>
@@ -3569,11 +3588,11 @@
   <p:clrMapOvr>
     <a:masterClrMapping/>
   </p:clrMapOvr>
-  <mc:AlternateContent xmlns:mc="http://schemas.openxmlformats.org/markup-compatibility/2006">
-    <mc:Choice xmlns:p159="http://schemas.microsoft.com/office/powerpoint/2015/09/main" xmlns:p14="http://schemas.microsoft.com/office/powerpoint/2010/main" Requires="p159">
-      <p:transition p14:dur="500" advClick="1"/>
+  <mc:AlternateContent xmlns:mc="http://schemas.openxmlformats.org/markup-compatibility/2006" xmlns:p159="http://schemas.microsoft.com/office/powerpoint/2015/09/main">
+    <mc:Choice Requires="p159">
+      <p:transition/>
     </mc:Choice>
-    <mc:Fallback>
+    <mc:Fallback xmlns:w="http://schemas.openxmlformats.org/wordprocessingml/2006/main" xmlns:m="http://schemas.openxmlformats.org/officeDocument/2006/math" xmlns="">
       <p:transition advClick="1"/>
     </mc:Fallback>
   </mc:AlternateContent>
@@ -3581,13 +3600,14 @@
 </file>
 
 <file path=ppt/slides/slide12.xml><?xml version="1.0" encoding="utf-8"?>
-<p:sld xmlns:a="http://schemas.openxmlformats.org/drawingml/2006/main" xmlns:r="http://schemas.openxmlformats.org/officeDocument/2006/relationships" xmlns:p="http://schemas.openxmlformats.org/presentationml/2006/main" xmlns:m="http://schemas.openxmlformats.org/officeDocument/2006/math" xmlns:w="http://schemas.openxmlformats.org/wordprocessingml/2006/main" xmlns:mc="http://schemas.openxmlformats.org/markup-compatibility/2006" showMasterPhAnim="0" showMasterSp="1" show="1">
+<p:sld xmlns:a="http://schemas.openxmlformats.org/drawingml/2006/main" xmlns:r="http://schemas.openxmlformats.org/officeDocument/2006/relationships" xmlns:p="http://schemas.openxmlformats.org/presentationml/2006/main" showMasterPhAnim="0">
   <p:cSld name="Slide 13">
     <p:bg>
-      <p:bgPr shadeToTitle="0">
+      <p:bgPr>
         <a:solidFill>
           <a:srgbClr val="F5F8FA"/>
         </a:solidFill>
+        <a:effectLst/>
       </p:bgPr>
     </p:bg>
     <p:spTree>
@@ -5004,7 +5024,7 @@
               <a:defRPr/>
             </a:pPr>
             <a:r>
-              <a:rPr lang="en-US" sz="1100">
+              <a:rPr lang="en-US" sz="1100" dirty="0">
                 <a:solidFill>
                   <a:srgbClr val="595959"/>
                 </a:solidFill>
@@ -5014,15 +5034,15 @@
               </a:rPr>
               <a:t>Async request-reply</a:t>
             </a:r>
-            <a:endParaRPr lang="en-US" sz="1100"/>
-          </a:p>
-          <a:p>
-            <a:pPr marL="0" indent="0">
-              <a:buNone/>
-              <a:defRPr/>
-            </a:pPr>
-            <a:r>
-              <a:rPr lang="en-US" sz="1100">
+            <a:endParaRPr lang="en-US" sz="1100" dirty="0"/>
+          </a:p>
+          <a:p>
+            <a:pPr marL="0" indent="0">
+              <a:buNone/>
+              <a:defRPr/>
+            </a:pPr>
+            <a:r>
+              <a:rPr lang="en-US" sz="1100" dirty="0">
                 <a:solidFill>
                   <a:srgbClr val="595959"/>
                 </a:solidFill>
@@ -5032,7 +5052,7 @@
               </a:rPr>
               <a:t>with polling/callback</a:t>
             </a:r>
-            <a:endParaRPr lang="en-US" sz="1100"/>
+            <a:endParaRPr lang="en-US" sz="1100" dirty="0"/>
           </a:p>
         </p:txBody>
       </p:sp>
@@ -5265,7 +5285,7 @@
               <a:defRPr/>
             </a:pPr>
             <a:r>
-              <a:rPr lang="en-US" sz="1050">
+              <a:rPr lang="en-US" sz="1050" dirty="0">
                 <a:solidFill>
                   <a:srgbClr val="595959"/>
                 </a:solidFill>
@@ -5275,15 +5295,15 @@
               </a:rPr>
               <a:t>Client → Gateway → Farmacia</a:t>
             </a:r>
-            <a:endParaRPr lang="en-US" sz="1050"/>
-          </a:p>
-          <a:p>
-            <a:pPr marL="0" indent="0">
-              <a:buNone/>
-              <a:defRPr/>
-            </a:pPr>
-            <a:r>
-              <a:rPr lang="en-US" sz="1050">
+            <a:endParaRPr lang="en-US" sz="1050" dirty="0"/>
+          </a:p>
+          <a:p>
+            <a:pPr marL="0" indent="0">
+              <a:buNone/>
+              <a:defRPr/>
+            </a:pPr>
+            <a:r>
+              <a:rPr lang="en-US" sz="1050" dirty="0">
                 <a:solidFill>
                   <a:srgbClr val="595959"/>
                 </a:solidFill>
@@ -5293,7 +5313,7 @@
               </a:rPr>
               <a:t>(no prosumer involved)</a:t>
             </a:r>
-            <a:endParaRPr lang="en-US" sz="1050"/>
+            <a:endParaRPr lang="en-US" sz="1050" dirty="0"/>
           </a:p>
         </p:txBody>
       </p:sp>
@@ -5395,11 +5415,11 @@
   <p:clrMapOvr>
     <a:masterClrMapping/>
   </p:clrMapOvr>
-  <mc:AlternateContent xmlns:mc="http://schemas.openxmlformats.org/markup-compatibility/2006">
-    <mc:Choice xmlns:p159="http://schemas.microsoft.com/office/powerpoint/2015/09/main" xmlns:p14="http://schemas.microsoft.com/office/powerpoint/2010/main" Requires="p159">
-      <p:transition p14:dur="500" advClick="1"/>
+  <mc:AlternateContent xmlns:mc="http://schemas.openxmlformats.org/markup-compatibility/2006" xmlns:p159="http://schemas.microsoft.com/office/powerpoint/2015/09/main">
+    <mc:Choice Requires="p159">
+      <p:transition/>
     </mc:Choice>
-    <mc:Fallback>
+    <mc:Fallback xmlns:w="http://schemas.openxmlformats.org/wordprocessingml/2006/main" xmlns:m="http://schemas.openxmlformats.org/officeDocument/2006/math" xmlns="">
       <p:transition advClick="1"/>
     </mc:Fallback>
   </mc:AlternateContent>
@@ -5407,8 +5427,8 @@
 </file>
 
 <file path=ppt/slides/slide13.xml><?xml version="1.0" encoding="utf-8"?>
-<p:sld xmlns:a="http://schemas.openxmlformats.org/drawingml/2006/main" xmlns:r="http://schemas.openxmlformats.org/officeDocument/2006/relationships" xmlns:p="http://schemas.openxmlformats.org/presentationml/2006/main" xmlns:m="http://schemas.openxmlformats.org/officeDocument/2006/math" xmlns:w="http://schemas.openxmlformats.org/wordprocessingml/2006/main" xmlns:mc="http://schemas.openxmlformats.org/markup-compatibility/2006" showMasterPhAnim="0" showMasterSp="1" show="1">
-  <p:cSld name="">
+<p:sld xmlns:a="http://schemas.openxmlformats.org/drawingml/2006/main" xmlns:r="http://schemas.openxmlformats.org/officeDocument/2006/relationships" xmlns:p="http://schemas.openxmlformats.org/presentationml/2006/main" showMasterPhAnim="0">
+  <p:cSld>
     <p:spTree>
       <p:nvGrpSpPr>
         <p:cNvPr id="1" name=""/>
@@ -5423,117 +5443,955 @@
           <a:chExt cx="0" cy="0"/>
         </a:xfrm>
       </p:grpSpPr>
-      <p:pic>
-        <p:nvPicPr>
-          <p:cNvPr id="1030056585" name="Immagine 1"/>
-          <p:cNvPicPr>
-            <a:picLocks noChangeAspect="1"/>
-          </p:cNvPicPr>
-          <p:nvPr/>
-        </p:nvPicPr>
-        <p:blipFill rotWithShape="1">
-          <a:blip r:embed="rId3"/>
-          <a:stretch/>
-        </p:blipFill>
-        <p:spPr bwMode="auto">
-          <a:xfrm>
-            <a:off x="372684" y="271681"/>
-            <a:ext cx="8249513" cy="4600136"/>
-          </a:xfrm>
-          <a:prstGeom prst="rect">
-            <a:avLst/>
-          </a:prstGeom>
+      <p:sp>
+        <p:nvSpPr>
+          <p:cNvPr id="100" name="Title"/>
+          <p:cNvSpPr/>
+          <p:nvPr/>
+        </p:nvSpPr>
+        <p:spPr bwMode="auto">
+          <a:xfrm>
+            <a:off x="457200" y="201168"/>
+            <a:ext cx="8229600" cy="566928"/>
+          </a:xfrm>
+          <a:prstGeom prst="rect">
+            <a:avLst/>
+          </a:prstGeom>
+          <a:noFill/>
           <a:ln>
+            <a:noFill/>
+          </a:ln>
+        </p:spPr>
+        <p:txBody>
+          <a:bodyPr wrap="square" lIns="91440" tIns="45720" rIns="91440" bIns="45720" rtlCol="0" anchor="ctr"/>
+          <a:lstStyle/>
+          <a:p>
+            <a:pPr marL="0" indent="0" algn="l">
+              <a:buNone/>
+              <a:defRPr/>
+            </a:pPr>
+            <a:r>
+              <a:rPr lang="en-US" sz="3400" b="1" dirty="0">
+                <a:solidFill>
+                  <a:srgbClr val="1F4E79"/>
+                </a:solidFill>
+                <a:latin typeface="Calibri"/>
+              </a:rPr>
+              <a:t>UC-1  Full Fitness Assessment</a:t>
+            </a:r>
+          </a:p>
+        </p:txBody>
+      </p:sp>
+      <p:sp>
+        <p:nvSpPr>
+          <p:cNvPr id="200" name="ScenCard"/>
+          <p:cNvSpPr/>
+          <p:nvPr/>
+        </p:nvSpPr>
+        <p:spPr bwMode="auto">
+          <a:xfrm>
+            <a:off x="457200" y="1508760"/>
+            <a:ext cx="3566160" cy="3108960"/>
+          </a:xfrm>
+          <a:prstGeom prst="rect">
+            <a:avLst/>
+          </a:prstGeom>
+          <a:solidFill>
+            <a:srgbClr val="FFFFFF"/>
+          </a:solidFill>
+          <a:ln w="12700">
             <a:solidFill>
-              <a:schemeClr val="tx1"/>
+              <a:srgbClr val="E8EEF2"/>
             </a:solidFill>
           </a:ln>
         </p:spPr>
-      </p:pic>
-      <p:sp>
-        <p:nvSpPr>
-          <p:cNvPr id="2117903470" name="Text 11"/>
-          <p:cNvSpPr/>
-          <p:nvPr/>
-        </p:nvSpPr>
-        <p:spPr bwMode="auto">
-          <a:xfrm>
-            <a:off x="464937" y="84406"/>
-            <a:ext cx="566928" cy="914400"/>
-          </a:xfrm>
-          <a:prstGeom prst="rect">
-            <a:avLst/>
-          </a:prstGeom>
-          <a:noFill/>
-          <a:ln/>
-        </p:spPr>
-        <p:txBody>
-          <a:bodyPr wrap="square" rtlCol="0" anchor="ctr"/>
-          <a:lstStyle/>
-          <a:p>
-            <a:pPr marL="0" indent="0">
-              <a:buNone/>
-              <a:defRPr/>
-            </a:pPr>
-            <a:endParaRPr lang="en-US" sz="1300"/>
-          </a:p>
-        </p:txBody>
-      </p:sp>
-      <p:sp>
-        <p:nvSpPr>
-          <p:cNvPr id="1587231795" name="Text 13"/>
-          <p:cNvSpPr/>
-          <p:nvPr/>
-        </p:nvSpPr>
-        <p:spPr bwMode="auto">
-          <a:xfrm>
-            <a:off x="1105017" y="84406"/>
-            <a:ext cx="1298448" cy="914400"/>
-          </a:xfrm>
-          <a:prstGeom prst="rect">
-            <a:avLst/>
-          </a:prstGeom>
-          <a:noFill/>
-          <a:ln/>
-        </p:spPr>
-        <p:txBody>
-          <a:bodyPr wrap="square" rtlCol="0" anchor="ctr"/>
-          <a:lstStyle/>
-          <a:p>
-            <a:pPr marL="0" indent="0">
-              <a:buNone/>
-              <a:defRPr/>
-            </a:pPr>
-            <a:endParaRPr lang="en-US" sz="1050"/>
-          </a:p>
-        </p:txBody>
-      </p:sp>
-      <p:sp>
-        <p:nvSpPr>
-          <p:cNvPr id="735403444" name="Text 15"/>
-          <p:cNvSpPr/>
-          <p:nvPr/>
-        </p:nvSpPr>
-        <p:spPr bwMode="auto">
-          <a:xfrm>
-            <a:off x="2476617" y="84406"/>
-            <a:ext cx="4041648" cy="914400"/>
-          </a:xfrm>
-          <a:prstGeom prst="rect">
-            <a:avLst/>
-          </a:prstGeom>
-          <a:noFill/>
-          <a:ln/>
-        </p:spPr>
-        <p:txBody>
-          <a:bodyPr wrap="square" rtlCol="0" anchor="ctr"/>
-          <a:lstStyle/>
-          <a:p>
-            <a:pPr marL="0" indent="0">
-              <a:buNone/>
-              <a:defRPr/>
-            </a:pPr>
-            <a:endParaRPr lang="en-US" sz="1050"/>
+        <p:txBody>
+          <a:bodyPr wrap="square" lIns="130000" tIns="91440" rIns="91440" bIns="45720" rtlCol="0" anchor="t"/>
+          <a:lstStyle/>
+          <a:p>
+            <a:pPr marL="0" indent="0" algn="l">
+              <a:buNone/>
+              <a:defRPr/>
+            </a:pPr>
+            <a:r>
+              <a:rPr lang="en-US" sz="1500" b="1" dirty="0">
+                <a:solidFill>
+                  <a:srgbClr val="1F4E79"/>
+                </a:solidFill>
+                <a:latin typeface="Calibri"/>
+              </a:rPr>
+              <a:t>The Physician Requests</a:t>
+            </a:r>
+          </a:p>
+          <a:p>
+            <a:pPr marL="0" indent="0" algn="l">
+              <a:buNone/>
+              <a:defRPr/>
+            </a:pPr>
+            <a:r>
+              <a:rPr lang="en-US" sz="1250" dirty="0">
+                <a:solidFill>
+                  <a:srgbClr val="595959"/>
+                </a:solidFill>
+                <a:latin typeface="Calibri"/>
+              </a:rPr>
+              <a:t>A complete fitness assessment for a surgical or medical procedure.</a:t>
+            </a:r>
+          </a:p>
+          <a:p>
+            <a:pPr marL="0" indent="0" algn="l">
+              <a:buNone/>
+              <a:defRPr/>
+            </a:pPr>
+            <a:r>
+              <a:rPr lang="en-US" sz="1250" dirty="0">
+                <a:solidFill>
+                  <a:srgbClr val="595959"/>
+                </a:solidFill>
+                <a:latin typeface="Calibri"/>
+              </a:rPr>
+              <a:t>The system collects data from multiple services in parallel and aggregates them into a single clinical response.</a:t>
+            </a:r>
+          </a:p>
+          <a:p>
+            <a:pPr marL="0" indent="0" algn="l">
+              <a:buNone/>
+              <a:defRPr/>
+            </a:pPr>
+            <a:r>
+              <a:rPr lang="en-US" sz="1300" b="1" dirty="0">
+                <a:solidFill>
+                  <a:srgbClr val="0F6E56"/>
+                </a:solidFill>
+                <a:latin typeface="Calibri"/>
+              </a:rPr>
+              <a:t>Assessment outcome:</a:t>
+            </a:r>
+          </a:p>
+        </p:txBody>
+      </p:sp>
+      <p:sp>
+        <p:nvSpPr>
+          <p:cNvPr id="201" name="Bar201"/>
+          <p:cNvSpPr/>
+          <p:nvPr/>
+        </p:nvSpPr>
+        <p:spPr bwMode="auto">
+          <a:xfrm>
+            <a:off x="457200" y="1508760"/>
+            <a:ext cx="64008" cy="3108960"/>
+          </a:xfrm>
+          <a:prstGeom prst="rect">
+            <a:avLst/>
+          </a:prstGeom>
+          <a:solidFill>
+            <a:srgbClr val="0F6E56"/>
+          </a:solidFill>
+          <a:ln/>
+        </p:spPr>
+        <p:txBody>
+          <a:bodyPr/>
+          <a:lstStyle/>
+          <a:p>
+            <a:endParaRPr lang="en-US"/>
+          </a:p>
+        </p:txBody>
+      </p:sp>
+      <p:sp>
+        <p:nvSpPr>
+          <p:cNvPr id="210" name="Badge210"/>
+          <p:cNvSpPr/>
+          <p:nvPr/>
+        </p:nvSpPr>
+        <p:spPr bwMode="auto">
+          <a:xfrm>
+            <a:off x="640080" y="3383279"/>
+            <a:ext cx="583387" cy="384048"/>
+          </a:xfrm>
+          <a:prstGeom prst="rect">
+            <a:avLst/>
+          </a:prstGeom>
+          <a:solidFill>
+            <a:srgbClr val="2E7D32"/>
+          </a:solidFill>
+          <a:ln>
+            <a:noFill/>
+          </a:ln>
+        </p:spPr>
+        <p:txBody>
+          <a:bodyPr wrap="square" lIns="91440" tIns="45720" rIns="91440" bIns="45720" rtlCol="0" anchor="ctr"/>
+          <a:lstStyle/>
+          <a:p>
+            <a:pPr marL="0" indent="0" algn="l">
+              <a:buNone/>
+              <a:defRPr/>
+            </a:pPr>
+            <a:r>
+              <a:rPr lang="en-US" sz="1300" b="1" dirty="0">
+                <a:solidFill>
+                  <a:srgbClr val="FFFFFF"/>
+                </a:solidFill>
+                <a:latin typeface="Calibri"/>
+              </a:rPr>
+              <a:t>FIT</a:t>
+            </a:r>
+          </a:p>
+        </p:txBody>
+      </p:sp>
+      <p:sp>
+        <p:nvSpPr>
+          <p:cNvPr id="211" name="Badge211"/>
+          <p:cNvSpPr/>
+          <p:nvPr/>
+        </p:nvSpPr>
+        <p:spPr bwMode="auto">
+          <a:xfrm>
+            <a:off x="1600200" y="3394525"/>
+            <a:ext cx="1133856" cy="384048"/>
+          </a:xfrm>
+          <a:prstGeom prst="rect">
+            <a:avLst/>
+          </a:prstGeom>
+          <a:solidFill>
+            <a:srgbClr val="7B5EA7"/>
+          </a:solidFill>
+          <a:ln>
+            <a:noFill/>
+          </a:ln>
+        </p:spPr>
+        <p:txBody>
+          <a:bodyPr wrap="square" lIns="91440" tIns="45720" rIns="91440" bIns="45720" rtlCol="0" anchor="ctr"/>
+          <a:lstStyle/>
+          <a:p>
+            <a:pPr marL="0" indent="0" algn="l">
+              <a:buNone/>
+              <a:defRPr/>
+            </a:pPr>
+            <a:r>
+              <a:rPr lang="en-US" sz="1050" b="1" dirty="0">
+                <a:solidFill>
+                  <a:srgbClr val="FFFFFF"/>
+                </a:solidFill>
+                <a:latin typeface="Calibri"/>
+              </a:rPr>
+              <a:t>FIT WITH RESERVATION</a:t>
+            </a:r>
+          </a:p>
+        </p:txBody>
+      </p:sp>
+      <p:sp>
+        <p:nvSpPr>
+          <p:cNvPr id="212" name="Badge212"/>
+          <p:cNvSpPr/>
+          <p:nvPr/>
+        </p:nvSpPr>
+        <p:spPr bwMode="auto">
+          <a:xfrm>
+            <a:off x="3148279" y="3383279"/>
+            <a:ext cx="652882" cy="384048"/>
+          </a:xfrm>
+          <a:prstGeom prst="rect">
+            <a:avLst/>
+          </a:prstGeom>
+          <a:solidFill>
+            <a:srgbClr val="C62828"/>
+          </a:solidFill>
+          <a:ln>
+            <a:noFill/>
+          </a:ln>
+        </p:spPr>
+        <p:txBody>
+          <a:bodyPr wrap="square" lIns="91440" tIns="45720" rIns="91440" bIns="45720" rtlCol="0" anchor="ctr"/>
+          <a:lstStyle/>
+          <a:p>
+            <a:pPr marL="0" indent="0" algn="l">
+              <a:buNone/>
+              <a:defRPr/>
+            </a:pPr>
+            <a:r>
+              <a:rPr lang="en-US" sz="1300" b="1" dirty="0">
+                <a:solidFill>
+                  <a:srgbClr val="FFFFFF"/>
+                </a:solidFill>
+                <a:latin typeface="Calibri"/>
+              </a:rPr>
+              <a:t>UNFIT</a:t>
+            </a:r>
+          </a:p>
+        </p:txBody>
+      </p:sp>
+      <p:sp>
+        <p:nvSpPr>
+          <p:cNvPr id="220" name="RepLbl"/>
+          <p:cNvSpPr/>
+          <p:nvPr/>
+        </p:nvSpPr>
+        <p:spPr bwMode="auto">
+          <a:xfrm>
+            <a:off x="4572000" y="834205"/>
+            <a:ext cx="4343400" cy="384048"/>
+          </a:xfrm>
+          <a:prstGeom prst="rect">
+            <a:avLst/>
+          </a:prstGeom>
+          <a:solidFill>
+            <a:srgbClr val="D6E4F0"/>
+          </a:solidFill>
+          <a:ln w="12700">
+            <a:solidFill>
+              <a:srgbClr val="1F4E79"/>
+            </a:solidFill>
+          </a:ln>
+        </p:spPr>
+        <p:txBody>
+          <a:bodyPr wrap="square" lIns="130000" tIns="45720" rIns="91440" bIns="45720" rtlCol="0" anchor="ctr"/>
+          <a:lstStyle/>
+          <a:p>
+            <a:pPr marL="0" indent="0" algn="l">
+              <a:buNone/>
+              <a:defRPr/>
+            </a:pPr>
+            <a:r>
+              <a:rPr lang="en-US" sz="1350" b="1" dirty="0">
+                <a:solidFill>
+                  <a:srgbClr val="1F4E79"/>
+                </a:solidFill>
+                <a:latin typeface="Calibri"/>
+              </a:rPr>
+              <a:t>FitnessReport · Response Contents</a:t>
+            </a:r>
+          </a:p>
+        </p:txBody>
+      </p:sp>
+      <p:sp>
+        <p:nvSpPr>
+          <p:cNvPr id="300" name="Bar300"/>
+          <p:cNvSpPr/>
+          <p:nvPr/>
+        </p:nvSpPr>
+        <p:spPr bwMode="auto">
+          <a:xfrm>
+            <a:off x="4572000" y="1291405"/>
+            <a:ext cx="64008" cy="402336"/>
+          </a:xfrm>
+          <a:prstGeom prst="rect">
+            <a:avLst/>
+          </a:prstGeom>
+          <a:solidFill>
+            <a:srgbClr val="0F6E56"/>
+          </a:solidFill>
+          <a:ln/>
+        </p:spPr>
+        <p:txBody>
+          <a:bodyPr/>
+          <a:lstStyle/>
+          <a:p>
+            <a:endParaRPr lang="en-US"/>
+          </a:p>
+        </p:txBody>
+      </p:sp>
+      <p:sp>
+        <p:nvSpPr>
+          <p:cNvPr id="301" name="Item0"/>
+          <p:cNvSpPr/>
+          <p:nvPr/>
+        </p:nvSpPr>
+        <p:spPr bwMode="auto">
+          <a:xfrm>
+            <a:off x="4572000" y="1291405"/>
+            <a:ext cx="4343400" cy="402336"/>
+          </a:xfrm>
+          <a:prstGeom prst="rect">
+            <a:avLst/>
+          </a:prstGeom>
+          <a:solidFill>
+            <a:srgbClr val="FFFFFF"/>
+          </a:solidFill>
+          <a:ln w="12700">
+            <a:solidFill>
+              <a:srgbClr val="E8EEF2"/>
+            </a:solidFill>
+          </a:ln>
+        </p:spPr>
+        <p:txBody>
+          <a:bodyPr wrap="square" lIns="130000" tIns="27432" rIns="91440" bIns="27432" rtlCol="0" anchor="ctr"/>
+          <a:lstStyle/>
+          <a:p>
+            <a:pPr marL="0" indent="0" algn="l">
+              <a:buNone/>
+              <a:defRPr/>
+            </a:pPr>
+            <a:r>
+              <a:rPr lang="en-US" sz="1250" b="1" dirty="0">
+                <a:solidFill>
+                  <a:srgbClr val="1F4E79"/>
+                </a:solidFill>
+                <a:latin typeface="Calibri"/>
+              </a:rPr>
+              <a:t>Overall outcome</a:t>
+            </a:r>
+            <a:r>
+              <a:rPr lang="en-US" sz="1150" dirty="0">
+                <a:solidFill>
+                  <a:srgbClr val="595959"/>
+                </a:solidFill>
+                <a:latin typeface="Calibri"/>
+              </a:rPr>
+              <a:t>  FIT / FIT WITH RESERVATION / UNFIT</a:t>
+            </a:r>
+          </a:p>
+        </p:txBody>
+      </p:sp>
+      <p:sp>
+        <p:nvSpPr>
+          <p:cNvPr id="310" name="Bar310"/>
+          <p:cNvSpPr/>
+          <p:nvPr/>
+        </p:nvSpPr>
+        <p:spPr bwMode="auto">
+          <a:xfrm>
+            <a:off x="4572000" y="1748605"/>
+            <a:ext cx="64008" cy="402336"/>
+          </a:xfrm>
+          <a:prstGeom prst="rect">
+            <a:avLst/>
+          </a:prstGeom>
+          <a:solidFill>
+            <a:srgbClr val="0F6E56"/>
+          </a:solidFill>
+          <a:ln/>
+        </p:spPr>
+        <p:txBody>
+          <a:bodyPr/>
+          <a:lstStyle/>
+          <a:p>
+            <a:endParaRPr lang="en-US"/>
+          </a:p>
+        </p:txBody>
+      </p:sp>
+      <p:sp>
+        <p:nvSpPr>
+          <p:cNvPr id="311" name="Item1"/>
+          <p:cNvSpPr/>
+          <p:nvPr/>
+        </p:nvSpPr>
+        <p:spPr bwMode="auto">
+          <a:xfrm>
+            <a:off x="4572000" y="1748605"/>
+            <a:ext cx="4343400" cy="402336"/>
+          </a:xfrm>
+          <a:prstGeom prst="rect">
+            <a:avLst/>
+          </a:prstGeom>
+          <a:solidFill>
+            <a:srgbClr val="FFFFFF"/>
+          </a:solidFill>
+          <a:ln w="12700">
+            <a:solidFill>
+              <a:srgbClr val="E8EEF2"/>
+            </a:solidFill>
+          </a:ln>
+        </p:spPr>
+        <p:txBody>
+          <a:bodyPr wrap="square" lIns="130000" tIns="27432" rIns="91440" bIns="27432" rtlCol="0" anchor="ctr"/>
+          <a:lstStyle/>
+          <a:p>
+            <a:pPr marL="0" indent="0" algn="l">
+              <a:buNone/>
+              <a:defRPr/>
+            </a:pPr>
+            <a:r>
+              <a:rPr lang="en-US" sz="1250" b="1" dirty="0">
+                <a:solidFill>
+                  <a:srgbClr val="1F4E79"/>
+                </a:solidFill>
+                <a:latin typeface="Calibri"/>
+              </a:rPr>
+              <a:t>Patient summary</a:t>
+            </a:r>
+            <a:r>
+              <a:rPr lang="en-US" sz="1150" dirty="0">
+                <a:solidFill>
+                  <a:srgbClr val="595959"/>
+                </a:solidFill>
+                <a:latin typeface="Calibri"/>
+              </a:rPr>
+              <a:t>  Identifying data of the patient</a:t>
+            </a:r>
+          </a:p>
+        </p:txBody>
+      </p:sp>
+      <p:sp>
+        <p:nvSpPr>
+          <p:cNvPr id="320" name="Bar320"/>
+          <p:cNvSpPr/>
+          <p:nvPr/>
+        </p:nvSpPr>
+        <p:spPr bwMode="auto">
+          <a:xfrm>
+            <a:off x="4572000" y="2205805"/>
+            <a:ext cx="64008" cy="402336"/>
+          </a:xfrm>
+          <a:prstGeom prst="rect">
+            <a:avLst/>
+          </a:prstGeom>
+          <a:solidFill>
+            <a:srgbClr val="1F4E79"/>
+          </a:solidFill>
+          <a:ln/>
+        </p:spPr>
+        <p:txBody>
+          <a:bodyPr/>
+          <a:lstStyle/>
+          <a:p>
+            <a:endParaRPr lang="en-US"/>
+          </a:p>
+        </p:txBody>
+      </p:sp>
+      <p:sp>
+        <p:nvSpPr>
+          <p:cNvPr id="321" name="Item2"/>
+          <p:cNvSpPr/>
+          <p:nvPr/>
+        </p:nvSpPr>
+        <p:spPr bwMode="auto">
+          <a:xfrm>
+            <a:off x="4572000" y="2205805"/>
+            <a:ext cx="4343400" cy="402336"/>
+          </a:xfrm>
+          <a:prstGeom prst="rect">
+            <a:avLst/>
+          </a:prstGeom>
+          <a:solidFill>
+            <a:srgbClr val="FFFFFF"/>
+          </a:solidFill>
+          <a:ln w="12700">
+            <a:solidFill>
+              <a:srgbClr val="E8EEF2"/>
+            </a:solidFill>
+          </a:ln>
+        </p:spPr>
+        <p:txBody>
+          <a:bodyPr wrap="square" lIns="130000" tIns="27432" rIns="91440" bIns="27432" rtlCol="0" anchor="ctr"/>
+          <a:lstStyle/>
+          <a:p>
+            <a:pPr marL="0" indent="0" algn="l">
+              <a:buNone/>
+              <a:defRPr/>
+            </a:pPr>
+            <a:r>
+              <a:rPr lang="en-US" sz="1250" b="1" dirty="0">
+                <a:solidFill>
+                  <a:srgbClr val="1F4E79"/>
+                </a:solidFill>
+                <a:latin typeface="Calibri"/>
+              </a:rPr>
+              <a:t>Known conditions</a:t>
+            </a:r>
+            <a:r>
+              <a:rPr lang="en-US" sz="1150" dirty="0">
+                <a:solidFill>
+                  <a:srgbClr val="595959"/>
+                </a:solidFill>
+                <a:latin typeface="Calibri"/>
+              </a:rPr>
+              <a:t>  Active and past diagnoses (ICD codes)</a:t>
+            </a:r>
+          </a:p>
+        </p:txBody>
+      </p:sp>
+      <p:sp>
+        <p:nvSpPr>
+          <p:cNvPr id="330" name="Bar330"/>
+          <p:cNvSpPr/>
+          <p:nvPr/>
+        </p:nvSpPr>
+        <p:spPr bwMode="auto">
+          <a:xfrm>
+            <a:off x="4572000" y="2663005"/>
+            <a:ext cx="64008" cy="402336"/>
+          </a:xfrm>
+          <a:prstGeom prst="rect">
+            <a:avLst/>
+          </a:prstGeom>
+          <a:solidFill>
+            <a:srgbClr val="1F4E79"/>
+          </a:solidFill>
+          <a:ln/>
+        </p:spPr>
+        <p:txBody>
+          <a:bodyPr/>
+          <a:lstStyle/>
+          <a:p>
+            <a:endParaRPr lang="en-US"/>
+          </a:p>
+        </p:txBody>
+      </p:sp>
+      <p:sp>
+        <p:nvSpPr>
+          <p:cNvPr id="331" name="Item3"/>
+          <p:cNvSpPr/>
+          <p:nvPr/>
+        </p:nvSpPr>
+        <p:spPr bwMode="auto">
+          <a:xfrm>
+            <a:off x="4572000" y="2663005"/>
+            <a:ext cx="4343400" cy="402336"/>
+          </a:xfrm>
+          <a:prstGeom prst="rect">
+            <a:avLst/>
+          </a:prstGeom>
+          <a:solidFill>
+            <a:srgbClr val="FFFFFF"/>
+          </a:solidFill>
+          <a:ln w="12700">
+            <a:solidFill>
+              <a:srgbClr val="E8EEF2"/>
+            </a:solidFill>
+          </a:ln>
+        </p:spPr>
+        <p:txBody>
+          <a:bodyPr wrap="square" lIns="130000" tIns="27432" rIns="91440" bIns="27432" rtlCol="0" anchor="ctr"/>
+          <a:lstStyle/>
+          <a:p>
+            <a:pPr marL="0" indent="0" algn="l">
+              <a:buNone/>
+              <a:defRPr/>
+            </a:pPr>
+            <a:r>
+              <a:rPr lang="en-US" sz="1250" b="1" dirty="0">
+                <a:solidFill>
+                  <a:srgbClr val="1F4E79"/>
+                </a:solidFill>
+                <a:latin typeface="Calibri"/>
+              </a:rPr>
+              <a:t>Registered allergies</a:t>
+            </a:r>
+            <a:r>
+              <a:rPr lang="en-US" sz="1150" dirty="0">
+                <a:solidFill>
+                  <a:srgbClr val="595959"/>
+                </a:solidFill>
+                <a:latin typeface="Calibri"/>
+              </a:rPr>
+              <a:t>  Allergen, severity, date detected</a:t>
+            </a:r>
+          </a:p>
+        </p:txBody>
+      </p:sp>
+      <p:sp>
+        <p:nvSpPr>
+          <p:cNvPr id="340" name="Bar340"/>
+          <p:cNvSpPr/>
+          <p:nvPr/>
+        </p:nvSpPr>
+        <p:spPr bwMode="auto">
+          <a:xfrm>
+            <a:off x="4572000" y="3120205"/>
+            <a:ext cx="64008" cy="402336"/>
+          </a:xfrm>
+          <a:prstGeom prst="rect">
+            <a:avLst/>
+          </a:prstGeom>
+          <a:solidFill>
+            <a:srgbClr val="1F4E79"/>
+          </a:solidFill>
+          <a:ln/>
+        </p:spPr>
+        <p:txBody>
+          <a:bodyPr/>
+          <a:lstStyle/>
+          <a:p>
+            <a:endParaRPr lang="en-US"/>
+          </a:p>
+        </p:txBody>
+      </p:sp>
+      <p:sp>
+        <p:nvSpPr>
+          <p:cNvPr id="341" name="Item4"/>
+          <p:cNvSpPr/>
+          <p:nvPr/>
+        </p:nvSpPr>
+        <p:spPr bwMode="auto">
+          <a:xfrm>
+            <a:off x="4572000" y="3120205"/>
+            <a:ext cx="4343400" cy="402336"/>
+          </a:xfrm>
+          <a:prstGeom prst="rect">
+            <a:avLst/>
+          </a:prstGeom>
+          <a:solidFill>
+            <a:srgbClr val="FFFFFF"/>
+          </a:solidFill>
+          <a:ln w="12700">
+            <a:solidFill>
+              <a:srgbClr val="E8EEF2"/>
+            </a:solidFill>
+          </a:ln>
+        </p:spPr>
+        <p:txBody>
+          <a:bodyPr wrap="square" lIns="130000" tIns="27432" rIns="91440" bIns="27432" rtlCol="0" anchor="ctr"/>
+          <a:lstStyle/>
+          <a:p>
+            <a:pPr marL="0" indent="0" algn="l">
+              <a:buNone/>
+              <a:defRPr/>
+            </a:pPr>
+            <a:r>
+              <a:rPr lang="en-US" sz="1250" b="1" dirty="0">
+                <a:solidFill>
+                  <a:srgbClr val="1F4E79"/>
+                </a:solidFill>
+                <a:latin typeface="Calibri"/>
+              </a:rPr>
+              <a:t>Active prescriptions</a:t>
+            </a:r>
+            <a:r>
+              <a:rPr lang="en-US" sz="1150" dirty="0">
+                <a:solidFill>
+                  <a:srgbClr val="595959"/>
+                </a:solidFill>
+                <a:latin typeface="Calibri"/>
+              </a:rPr>
+              <a:t>  Drug, dosage, frequency</a:t>
+            </a:r>
+          </a:p>
+        </p:txBody>
+      </p:sp>
+      <p:sp>
+        <p:nvSpPr>
+          <p:cNvPr id="350" name="Bar350"/>
+          <p:cNvSpPr/>
+          <p:nvPr/>
+        </p:nvSpPr>
+        <p:spPr bwMode="auto">
+          <a:xfrm>
+            <a:off x="4572000" y="3577405"/>
+            <a:ext cx="64008" cy="402336"/>
+          </a:xfrm>
+          <a:prstGeom prst="rect">
+            <a:avLst/>
+          </a:prstGeom>
+          <a:solidFill>
+            <a:srgbClr val="534AB7"/>
+          </a:solidFill>
+          <a:ln/>
+        </p:spPr>
+        <p:txBody>
+          <a:bodyPr/>
+          <a:lstStyle/>
+          <a:p>
+            <a:endParaRPr lang="en-US"/>
+          </a:p>
+        </p:txBody>
+      </p:sp>
+      <p:sp>
+        <p:nvSpPr>
+          <p:cNvPr id="351" name="Item5"/>
+          <p:cNvSpPr/>
+          <p:nvPr/>
+        </p:nvSpPr>
+        <p:spPr bwMode="auto">
+          <a:xfrm>
+            <a:off x="4572000" y="3577405"/>
+            <a:ext cx="4343400" cy="402336"/>
+          </a:xfrm>
+          <a:prstGeom prst="rect">
+            <a:avLst/>
+          </a:prstGeom>
+          <a:solidFill>
+            <a:srgbClr val="FFFFFF"/>
+          </a:solidFill>
+          <a:ln w="12700">
+            <a:solidFill>
+              <a:srgbClr val="E8EEF2"/>
+            </a:solidFill>
+          </a:ln>
+        </p:spPr>
+        <p:txBody>
+          <a:bodyPr wrap="square" lIns="130000" tIns="27432" rIns="91440" bIns="27432" rtlCol="0" anchor="ctr"/>
+          <a:lstStyle/>
+          <a:p>
+            <a:pPr marL="0" indent="0" algn="l">
+              <a:buNone/>
+              <a:defRPr/>
+            </a:pPr>
+            <a:r>
+              <a:rPr lang="en-US" sz="1250" b="1" dirty="0">
+                <a:solidFill>
+                  <a:srgbClr val="1F4E79"/>
+                </a:solidFill>
+                <a:latin typeface="Calibri"/>
+              </a:rPr>
+              <a:t>Laboratory results</a:t>
+            </a:r>
+            <a:r>
+              <a:rPr lang="en-US" sz="1150" dirty="0">
+                <a:solidFill>
+                  <a:srgbClr val="595959"/>
+                </a:solidFill>
+                <a:latin typeface="Calibri"/>
+              </a:rPr>
+              <a:t>  Measurements with anomalyFlag</a:t>
+            </a:r>
+          </a:p>
+        </p:txBody>
+      </p:sp>
+      <p:sp>
+        <p:nvSpPr>
+          <p:cNvPr id="360" name="Bar360"/>
+          <p:cNvSpPr/>
+          <p:nvPr/>
+        </p:nvSpPr>
+        <p:spPr bwMode="auto">
+          <a:xfrm>
+            <a:off x="4572000" y="4034605"/>
+            <a:ext cx="64008" cy="402336"/>
+          </a:xfrm>
+          <a:prstGeom prst="rect">
+            <a:avLst/>
+          </a:prstGeom>
+          <a:solidFill>
+            <a:srgbClr val="534AB7"/>
+          </a:solidFill>
+          <a:ln/>
+        </p:spPr>
+        <p:txBody>
+          <a:bodyPr/>
+          <a:lstStyle/>
+          <a:p>
+            <a:endParaRPr lang="en-US"/>
+          </a:p>
+        </p:txBody>
+      </p:sp>
+      <p:sp>
+        <p:nvSpPr>
+          <p:cNvPr id="361" name="Item6"/>
+          <p:cNvSpPr/>
+          <p:nvPr/>
+        </p:nvSpPr>
+        <p:spPr bwMode="auto">
+          <a:xfrm>
+            <a:off x="4572000" y="4034605"/>
+            <a:ext cx="4343400" cy="402336"/>
+          </a:xfrm>
+          <a:prstGeom prst="rect">
+            <a:avLst/>
+          </a:prstGeom>
+          <a:solidFill>
+            <a:srgbClr val="FFFFFF"/>
+          </a:solidFill>
+          <a:ln w="12700">
+            <a:solidFill>
+              <a:srgbClr val="E8EEF2"/>
+            </a:solidFill>
+          </a:ln>
+        </p:spPr>
+        <p:txBody>
+          <a:bodyPr wrap="square" lIns="130000" tIns="27432" rIns="91440" bIns="27432" rtlCol="0" anchor="ctr"/>
+          <a:lstStyle/>
+          <a:p>
+            <a:pPr marL="0" indent="0" algn="l">
+              <a:buNone/>
+              <a:defRPr/>
+            </a:pPr>
+            <a:r>
+              <a:rPr lang="en-US" sz="1250" b="1" dirty="0">
+                <a:solidFill>
+                  <a:srgbClr val="1F4E79"/>
+                </a:solidFill>
+                <a:latin typeface="Calibri"/>
+              </a:rPr>
+              <a:t>Diagnostic reports</a:t>
+            </a:r>
+            <a:r>
+              <a:rPr lang="en-US" sz="1150" dirty="0">
+                <a:solidFill>
+                  <a:srgbClr val="595959"/>
+                </a:solidFill>
+                <a:latin typeface="Calibri"/>
+              </a:rPr>
+              <a:t>  Imaging: findings, criticalFlag</a:t>
+            </a:r>
+          </a:p>
+        </p:txBody>
+      </p:sp>
+      <p:sp>
+        <p:nvSpPr>
+          <p:cNvPr id="370" name="Bar370"/>
+          <p:cNvSpPr/>
+          <p:nvPr/>
+        </p:nvSpPr>
+        <p:spPr bwMode="auto">
+          <a:xfrm>
+            <a:off x="4572000" y="4491805"/>
+            <a:ext cx="64008" cy="402336"/>
+          </a:xfrm>
+          <a:prstGeom prst="rect">
+            <a:avLst/>
+          </a:prstGeom>
+          <a:solidFill>
+            <a:srgbClr val="C55A11"/>
+          </a:solidFill>
+          <a:ln/>
+        </p:spPr>
+        <p:txBody>
+          <a:bodyPr/>
+          <a:lstStyle/>
+          <a:p>
+            <a:endParaRPr lang="en-US"/>
+          </a:p>
+        </p:txBody>
+      </p:sp>
+      <p:sp>
+        <p:nvSpPr>
+          <p:cNvPr id="371" name="Item7"/>
+          <p:cNvSpPr/>
+          <p:nvPr/>
+        </p:nvSpPr>
+        <p:spPr bwMode="auto">
+          <a:xfrm>
+            <a:off x="4572000" y="4491805"/>
+            <a:ext cx="4343400" cy="402336"/>
+          </a:xfrm>
+          <a:prstGeom prst="rect">
+            <a:avLst/>
+          </a:prstGeom>
+          <a:solidFill>
+            <a:srgbClr val="FFFFFF"/>
+          </a:solidFill>
+          <a:ln w="12700">
+            <a:solidFill>
+              <a:srgbClr val="E8EEF2"/>
+            </a:solidFill>
+          </a:ln>
+        </p:spPr>
+        <p:txBody>
+          <a:bodyPr wrap="square" lIns="130000" tIns="27432" rIns="91440" bIns="27432" rtlCol="0" anchor="ctr"/>
+          <a:lstStyle/>
+          <a:p>
+            <a:pPr marL="0" indent="0" algn="l">
+              <a:buNone/>
+              <a:defRPr/>
+            </a:pPr>
+            <a:r>
+              <a:rPr lang="en-US" sz="1250" b="1" dirty="0">
+                <a:solidFill>
+                  <a:srgbClr val="1F4E79"/>
+                </a:solidFill>
+                <a:latin typeface="Calibri"/>
+              </a:rPr>
+              <a:t>Risk factors</a:t>
+            </a:r>
+            <a:r>
+              <a:rPr lang="en-US" sz="1150" dirty="0">
+                <a:solidFill>
+                  <a:srgbClr val="595959"/>
+                </a:solidFill>
+                <a:latin typeface="Calibri"/>
+              </a:rPr>
+              <a:t>  Drug contraindication · Critical value · Allergy</a:t>
+            </a:r>
           </a:p>
         </p:txBody>
       </p:sp>
@@ -5542,20 +6400,12 @@
   <p:clrMapOvr>
     <a:masterClrMapping/>
   </p:clrMapOvr>
-  <mc:AlternateContent xmlns:mc="http://schemas.openxmlformats.org/markup-compatibility/2006">
-    <mc:Choice xmlns:p159="http://schemas.microsoft.com/office/powerpoint/2015/09/main" xmlns:p14="http://schemas.microsoft.com/office/powerpoint/2010/main" Requires="p159">
-      <p:transition p14:dur="500" advClick="1"/>
-    </mc:Choice>
-    <mc:Fallback>
-      <p:transition advClick="1"/>
-    </mc:Fallback>
-  </mc:AlternateContent>
 </p:sld>
 </file>
 
 <file path=ppt/slides/slide14.xml><?xml version="1.0" encoding="utf-8"?>
-<p:sld xmlns:a="http://schemas.openxmlformats.org/drawingml/2006/main" xmlns:r="http://schemas.openxmlformats.org/officeDocument/2006/relationships" xmlns:p="http://schemas.openxmlformats.org/presentationml/2006/main" xmlns:m="http://schemas.openxmlformats.org/officeDocument/2006/math" xmlns:w="http://schemas.openxmlformats.org/wordprocessingml/2006/main" xmlns:mc="http://schemas.openxmlformats.org/markup-compatibility/2006" showMasterPhAnim="0" showMasterSp="1" show="1">
-  <p:cSld name="">
+<p:sld xmlns:a="http://schemas.openxmlformats.org/drawingml/2006/main" xmlns:r="http://schemas.openxmlformats.org/officeDocument/2006/relationships" xmlns:p="http://schemas.openxmlformats.org/presentationml/2006/main" showMasterPhAnim="0">
+  <p:cSld>
     <p:spTree>
       <p:nvGrpSpPr>
         <p:cNvPr id="1" name=""/>
@@ -5570,53 +6420,736 @@
           <a:chExt cx="0" cy="0"/>
         </a:xfrm>
       </p:grpSpPr>
-      <p:pic>
-        <p:nvPicPr>
-          <p:cNvPr id="1253414864" name="Immagine 1"/>
-          <p:cNvPicPr>
-            <a:picLocks noChangeAspect="1"/>
-          </p:cNvPicPr>
-          <p:nvPr/>
-        </p:nvPicPr>
-        <p:blipFill rotWithShape="1">
-          <a:blip r:embed="rId3"/>
-          <a:stretch/>
-        </p:blipFill>
-        <p:spPr bwMode="auto">
-          <a:xfrm>
-            <a:off x="1775901" y="248323"/>
-            <a:ext cx="5531679" cy="4646853"/>
+      <p:sp>
+        <p:nvSpPr>
+          <p:cNvPr id="100" name="Title"/>
+          <p:cNvSpPr/>
+          <p:nvPr/>
+        </p:nvSpPr>
+        <p:spPr bwMode="auto">
+          <a:xfrm>
+            <a:off x="457200" y="201168"/>
+            <a:ext cx="8229600" cy="566928"/>
           </a:xfrm>
           <a:prstGeom prst="rect">
             <a:avLst/>
           </a:prstGeom>
           <a:noFill/>
           <a:ln>
+            <a:noFill/>
+          </a:ln>
+        </p:spPr>
+        <p:txBody>
+          <a:bodyPr wrap="square" lIns="91440" tIns="45720" rIns="91440" bIns="45720" rtlCol="0" anchor="ctr"/>
+          <a:lstStyle/>
+          <a:p>
+            <a:pPr marL="0" indent="0" algn="l">
+              <a:buNone/>
+              <a:defRPr/>
+            </a:pPr>
+            <a:r>
+              <a:rPr lang="en-US" sz="3400" b="1" dirty="0">
+                <a:solidFill>
+                  <a:srgbClr val="1F4E79"/>
+                </a:solidFill>
+                <a:latin typeface="Calibri"/>
+              </a:rPr>
+              <a:t>UC-2  Clinical History Consultation</a:t>
+            </a:r>
+          </a:p>
+        </p:txBody>
+      </p:sp>
+      <p:sp>
+        <p:nvSpPr>
+          <p:cNvPr id="200" name="Intro"/>
+          <p:cNvSpPr/>
+          <p:nvPr/>
+        </p:nvSpPr>
+        <p:spPr bwMode="auto">
+          <a:xfrm>
+            <a:off x="457200" y="959996"/>
+            <a:ext cx="2743200" cy="1051560"/>
+          </a:xfrm>
+          <a:prstGeom prst="rect">
+            <a:avLst/>
+          </a:prstGeom>
+          <a:solidFill>
+            <a:srgbClr val="FFFFFF"/>
+          </a:solidFill>
+          <a:ln w="12700">
             <a:solidFill>
-              <a:schemeClr val="tx1"/>
+              <a:srgbClr val="E8EEF2"/>
             </a:solidFill>
           </a:ln>
         </p:spPr>
-      </p:pic>
+        <p:txBody>
+          <a:bodyPr wrap="square" lIns="130000" tIns="91440" rIns="91440" bIns="45720" rtlCol="0" anchor="t"/>
+          <a:lstStyle/>
+          <a:p>
+            <a:pPr marL="0" indent="0" algn="l">
+              <a:buNone/>
+              <a:defRPr/>
+            </a:pPr>
+            <a:r>
+              <a:rPr lang="en-US" sz="1400" b="1" dirty="0">
+                <a:solidFill>
+                  <a:srgbClr val="1F4E79"/>
+                </a:solidFill>
+                <a:latin typeface="Calibri"/>
+              </a:rPr>
+              <a:t>Scenario</a:t>
+            </a:r>
+          </a:p>
+          <a:p>
+            <a:pPr marL="0" indent="0" algn="l">
+              <a:buNone/>
+              <a:defRPr/>
+            </a:pPr>
+            <a:r>
+              <a:rPr lang="en-US" sz="1200" dirty="0">
+                <a:solidFill>
+                  <a:srgbClr val="595959"/>
+                </a:solidFill>
+                <a:latin typeface="Calibri"/>
+              </a:rPr>
+              <a:t>The physician needs to review the patient's medical history without requesting a full fitness assessment.</a:t>
+            </a:r>
+          </a:p>
+        </p:txBody>
+      </p:sp>
+      <p:sp>
+        <p:nvSpPr>
+          <p:cNvPr id="201" name="Bar201"/>
+          <p:cNvSpPr/>
+          <p:nvPr/>
+        </p:nvSpPr>
+        <p:spPr bwMode="auto">
+          <a:xfrm>
+            <a:off x="457200" y="959996"/>
+            <a:ext cx="45719" cy="1051560"/>
+          </a:xfrm>
+          <a:prstGeom prst="rect">
+            <a:avLst/>
+          </a:prstGeom>
+          <a:solidFill>
+            <a:srgbClr val="0F6E56"/>
+          </a:solidFill>
+          <a:ln/>
+        </p:spPr>
+        <p:txBody>
+          <a:bodyPr/>
+          <a:lstStyle/>
+          <a:p>
+            <a:endParaRPr lang="en-US"/>
+          </a:p>
+        </p:txBody>
+      </p:sp>
+      <p:sp>
+        <p:nvSpPr>
+          <p:cNvPr id="210" name="CPLbl"/>
+          <p:cNvSpPr/>
+          <p:nvPr/>
+        </p:nvSpPr>
+        <p:spPr bwMode="auto">
+          <a:xfrm>
+            <a:off x="3680460" y="1497639"/>
+            <a:ext cx="5166360" cy="384048"/>
+          </a:xfrm>
+          <a:prstGeom prst="rect">
+            <a:avLst/>
+          </a:prstGeom>
+          <a:solidFill>
+            <a:srgbClr val="D6EFE8"/>
+          </a:solidFill>
+          <a:ln w="12700">
+            <a:solidFill>
+              <a:srgbClr val="0F6E56"/>
+            </a:solidFill>
+          </a:ln>
+        </p:spPr>
+        <p:txBody>
+          <a:bodyPr wrap="square" lIns="130000" tIns="45720" rIns="91440" bIns="45720" rtlCol="0" anchor="ctr"/>
+          <a:lstStyle/>
+          <a:p>
+            <a:pPr marL="0" indent="0" algn="l">
+              <a:buNone/>
+              <a:defRPr/>
+            </a:pPr>
+            <a:r>
+              <a:rPr lang="en-US" sz="1350" b="1" dirty="0">
+                <a:solidFill>
+                  <a:srgbClr val="1F4E79"/>
+                </a:solidFill>
+                <a:latin typeface="Calibri"/>
+              </a:rPr>
+              <a:t>ClinicalProfile · Object returned to the physician</a:t>
+            </a:r>
+          </a:p>
+        </p:txBody>
+      </p:sp>
+      <p:sp>
+        <p:nvSpPr>
+          <p:cNvPr id="220" name="Bar220"/>
+          <p:cNvSpPr/>
+          <p:nvPr/>
+        </p:nvSpPr>
+        <p:spPr bwMode="auto">
+          <a:xfrm>
+            <a:off x="3680460" y="1954839"/>
+            <a:ext cx="64008" cy="457200"/>
+          </a:xfrm>
+          <a:prstGeom prst="rect">
+            <a:avLst/>
+          </a:prstGeom>
+          <a:solidFill>
+            <a:srgbClr val="0F6E56"/>
+          </a:solidFill>
+          <a:ln/>
+        </p:spPr>
+        <p:txBody>
+          <a:bodyPr/>
+          <a:lstStyle/>
+          <a:p>
+            <a:endParaRPr lang="en-US"/>
+          </a:p>
+        </p:txBody>
+      </p:sp>
+      <p:sp>
+        <p:nvSpPr>
+          <p:cNvPr id="221" name="CP0"/>
+          <p:cNvSpPr/>
+          <p:nvPr/>
+        </p:nvSpPr>
+        <p:spPr bwMode="auto">
+          <a:xfrm>
+            <a:off x="3680460" y="1954839"/>
+            <a:ext cx="5166360" cy="457200"/>
+          </a:xfrm>
+          <a:prstGeom prst="rect">
+            <a:avLst/>
+          </a:prstGeom>
+          <a:solidFill>
+            <a:srgbClr val="FFFFFF"/>
+          </a:solidFill>
+          <a:ln w="12700">
+            <a:solidFill>
+              <a:srgbClr val="E8EEF2"/>
+            </a:solidFill>
+          </a:ln>
+        </p:spPr>
+        <p:txBody>
+          <a:bodyPr wrap="square" lIns="130000" tIns="27432" rIns="91440" bIns="27432" rtlCol="0" anchor="ctr"/>
+          <a:lstStyle/>
+          <a:p>
+            <a:pPr marL="0" indent="0" algn="l">
+              <a:buNone/>
+              <a:defRPr/>
+            </a:pPr>
+            <a:r>
+              <a:rPr lang="en-US" sz="1250" b="1" dirty="0">
+                <a:solidFill>
+                  <a:srgbClr val="1F4E79"/>
+                </a:solidFill>
+                <a:latin typeface="Calibri"/>
+              </a:rPr>
+              <a:t>Patient data</a:t>
+            </a:r>
+            <a:r>
+              <a:rPr lang="en-US" sz="1150" dirty="0">
+                <a:solidFill>
+                  <a:srgbClr val="595959"/>
+                </a:solidFill>
+                <a:latin typeface="Calibri"/>
+              </a:rPr>
+              <a:t>  —  id, name, fiscal code, date of birth, gender</a:t>
+            </a:r>
+          </a:p>
+        </p:txBody>
+      </p:sp>
+      <p:sp>
+        <p:nvSpPr>
+          <p:cNvPr id="230" name="Bar230"/>
+          <p:cNvSpPr/>
+          <p:nvPr/>
+        </p:nvSpPr>
+        <p:spPr bwMode="auto">
+          <a:xfrm>
+            <a:off x="3680460" y="2476047"/>
+            <a:ext cx="64008" cy="457200"/>
+          </a:xfrm>
+          <a:prstGeom prst="rect">
+            <a:avLst/>
+          </a:prstGeom>
+          <a:solidFill>
+            <a:srgbClr val="0F6E56"/>
+          </a:solidFill>
+          <a:ln/>
+        </p:spPr>
+        <p:txBody>
+          <a:bodyPr/>
+          <a:lstStyle/>
+          <a:p>
+            <a:endParaRPr lang="en-US"/>
+          </a:p>
+        </p:txBody>
+      </p:sp>
+      <p:sp>
+        <p:nvSpPr>
+          <p:cNvPr id="231" name="CP1"/>
+          <p:cNvSpPr/>
+          <p:nvPr/>
+        </p:nvSpPr>
+        <p:spPr bwMode="auto">
+          <a:xfrm>
+            <a:off x="3680460" y="2476047"/>
+            <a:ext cx="5166360" cy="457200"/>
+          </a:xfrm>
+          <a:prstGeom prst="rect">
+            <a:avLst/>
+          </a:prstGeom>
+          <a:solidFill>
+            <a:srgbClr val="FFFFFF"/>
+          </a:solidFill>
+          <a:ln w="12700">
+            <a:solidFill>
+              <a:srgbClr val="E8EEF2"/>
+            </a:solidFill>
+          </a:ln>
+        </p:spPr>
+        <p:txBody>
+          <a:bodyPr wrap="square" lIns="130000" tIns="27432" rIns="91440" bIns="27432" rtlCol="0" anchor="ctr"/>
+          <a:lstStyle/>
+          <a:p>
+            <a:pPr marL="0" indent="0" algn="l">
+              <a:buNone/>
+              <a:defRPr/>
+            </a:pPr>
+            <a:r>
+              <a:rPr lang="en-US" sz="1250" b="1" dirty="0">
+                <a:solidFill>
+                  <a:srgbClr val="1F4E79"/>
+                </a:solidFill>
+                <a:latin typeface="Calibri"/>
+              </a:rPr>
+              <a:t>Past diagnoses</a:t>
+            </a:r>
+            <a:r>
+              <a:rPr lang="en-US" sz="1150" dirty="0">
+                <a:solidFill>
+                  <a:srgbClr val="595959"/>
+                </a:solidFill>
+                <a:latin typeface="Calibri"/>
+              </a:rPr>
+              <a:t>  —  List of ICD conditions — status ACTIVE / RESOLVED</a:t>
+            </a:r>
+          </a:p>
+        </p:txBody>
+      </p:sp>
+      <p:sp>
+        <p:nvSpPr>
+          <p:cNvPr id="240" name="Bar240"/>
+          <p:cNvSpPr/>
+          <p:nvPr/>
+        </p:nvSpPr>
+        <p:spPr bwMode="auto">
+          <a:xfrm>
+            <a:off x="3680460" y="2997255"/>
+            <a:ext cx="64008" cy="457200"/>
+          </a:xfrm>
+          <a:prstGeom prst="rect">
+            <a:avLst/>
+          </a:prstGeom>
+          <a:solidFill>
+            <a:srgbClr val="1F4E79"/>
+          </a:solidFill>
+          <a:ln/>
+        </p:spPr>
+        <p:txBody>
+          <a:bodyPr/>
+          <a:lstStyle/>
+          <a:p>
+            <a:endParaRPr lang="en-US"/>
+          </a:p>
+        </p:txBody>
+      </p:sp>
+      <p:sp>
+        <p:nvSpPr>
+          <p:cNvPr id="241" name="CP2"/>
+          <p:cNvSpPr/>
+          <p:nvPr/>
+        </p:nvSpPr>
+        <p:spPr bwMode="auto">
+          <a:xfrm>
+            <a:off x="3680460" y="2997255"/>
+            <a:ext cx="5166360" cy="457200"/>
+          </a:xfrm>
+          <a:prstGeom prst="rect">
+            <a:avLst/>
+          </a:prstGeom>
+          <a:solidFill>
+            <a:srgbClr val="FFFFFF"/>
+          </a:solidFill>
+          <a:ln w="12700">
+            <a:solidFill>
+              <a:srgbClr val="E8EEF2"/>
+            </a:solidFill>
+          </a:ln>
+        </p:spPr>
+        <p:txBody>
+          <a:bodyPr wrap="square" lIns="130000" tIns="27432" rIns="91440" bIns="27432" rtlCol="0" anchor="ctr"/>
+          <a:lstStyle/>
+          <a:p>
+            <a:pPr marL="0" indent="0" algn="l">
+              <a:buNone/>
+              <a:defRPr/>
+            </a:pPr>
+            <a:r>
+              <a:rPr lang="en-US" sz="1250" b="1" dirty="0">
+                <a:solidFill>
+                  <a:srgbClr val="1F4E79"/>
+                </a:solidFill>
+                <a:latin typeface="Calibri"/>
+              </a:rPr>
+              <a:t>Known allergies</a:t>
+            </a:r>
+            <a:r>
+              <a:rPr lang="en-US" sz="1150" dirty="0">
+                <a:solidFill>
+                  <a:srgbClr val="595959"/>
+                </a:solidFill>
+                <a:latin typeface="Calibri"/>
+              </a:rPr>
+              <a:t>  —  Allergen, severity (MILD / SEVERE / ANAPHYLACTIC)</a:t>
+            </a:r>
+          </a:p>
+        </p:txBody>
+      </p:sp>
+      <p:sp>
+        <p:nvSpPr>
+          <p:cNvPr id="250" name="Bar250"/>
+          <p:cNvSpPr/>
+          <p:nvPr/>
+        </p:nvSpPr>
+        <p:spPr bwMode="auto">
+          <a:xfrm>
+            <a:off x="3680460" y="3518463"/>
+            <a:ext cx="64008" cy="457200"/>
+          </a:xfrm>
+          <a:prstGeom prst="rect">
+            <a:avLst/>
+          </a:prstGeom>
+          <a:solidFill>
+            <a:srgbClr val="1F4E79"/>
+          </a:solidFill>
+          <a:ln/>
+        </p:spPr>
+        <p:txBody>
+          <a:bodyPr/>
+          <a:lstStyle/>
+          <a:p>
+            <a:endParaRPr lang="en-US"/>
+          </a:p>
+        </p:txBody>
+      </p:sp>
+      <p:sp>
+        <p:nvSpPr>
+          <p:cNvPr id="251" name="CP3"/>
+          <p:cNvSpPr/>
+          <p:nvPr/>
+        </p:nvSpPr>
+        <p:spPr bwMode="auto">
+          <a:xfrm>
+            <a:off x="3680460" y="3518463"/>
+            <a:ext cx="5166360" cy="457200"/>
+          </a:xfrm>
+          <a:prstGeom prst="rect">
+            <a:avLst/>
+          </a:prstGeom>
+          <a:solidFill>
+            <a:srgbClr val="FFFFFF"/>
+          </a:solidFill>
+          <a:ln w="12700">
+            <a:solidFill>
+              <a:srgbClr val="E8EEF2"/>
+            </a:solidFill>
+          </a:ln>
+        </p:spPr>
+        <p:txBody>
+          <a:bodyPr wrap="square" lIns="130000" tIns="27432" rIns="91440" bIns="27432" rtlCol="0" anchor="ctr"/>
+          <a:lstStyle/>
+          <a:p>
+            <a:pPr marL="0" indent="0" algn="l">
+              <a:buNone/>
+              <a:defRPr/>
+            </a:pPr>
+            <a:r>
+              <a:rPr lang="en-US" sz="1250" b="1" dirty="0">
+                <a:solidFill>
+                  <a:srgbClr val="1F4E79"/>
+                </a:solidFill>
+                <a:latin typeface="Calibri"/>
+              </a:rPr>
+              <a:t>Active prescriptions</a:t>
+            </a:r>
+            <a:r>
+              <a:rPr lang="en-US" sz="1150" dirty="0">
+                <a:solidFill>
+                  <a:srgbClr val="595959"/>
+                </a:solidFill>
+                <a:latin typeface="Calibri"/>
+              </a:rPr>
+              <a:t>  —  Drug, ATC code, dosage, frequency, dates</a:t>
+            </a:r>
+          </a:p>
+        </p:txBody>
+      </p:sp>
+      <p:sp>
+        <p:nvSpPr>
+          <p:cNvPr id="290" name="HR290"/>
+          <p:cNvSpPr/>
+          <p:nvPr/>
+        </p:nvSpPr>
+        <p:spPr bwMode="auto">
+          <a:xfrm>
+            <a:off x="457200" y="3063240"/>
+            <a:ext cx="8229600" cy="18288"/>
+          </a:xfrm>
+          <a:prstGeom prst="rect">
+            <a:avLst/>
+          </a:prstGeom>
+          <a:solidFill>
+            <a:srgbClr val="E8EEF2"/>
+          </a:solidFill>
+          <a:ln/>
+        </p:spPr>
+        <p:txBody>
+          <a:bodyPr/>
+          <a:lstStyle/>
+          <a:p>
+            <a:endParaRPr lang="en-US"/>
+          </a:p>
+        </p:txBody>
+      </p:sp>
+      <p:sp>
+        <p:nvSpPr>
+          <p:cNvPr id="300" name="AnaSource"/>
+          <p:cNvSpPr/>
+          <p:nvPr/>
+        </p:nvSpPr>
+        <p:spPr bwMode="auto">
+          <a:xfrm>
+            <a:off x="457200" y="2370520"/>
+            <a:ext cx="2743200" cy="1051560"/>
+          </a:xfrm>
+          <a:prstGeom prst="rect">
+            <a:avLst/>
+          </a:prstGeom>
+          <a:solidFill>
+            <a:srgbClr val="D6EFE8"/>
+          </a:solidFill>
+          <a:ln w="12700">
+            <a:solidFill>
+              <a:srgbClr val="0F6E56"/>
+            </a:solidFill>
+          </a:ln>
+        </p:spPr>
+        <p:txBody>
+          <a:bodyPr wrap="square" lIns="130000" tIns="91440" rIns="91440" bIns="45720" rtlCol="0" anchor="t"/>
+          <a:lstStyle/>
+          <a:p>
+            <a:pPr marL="0" indent="0" algn="l">
+              <a:buNone/>
+              <a:defRPr/>
+            </a:pPr>
+            <a:r>
+              <a:rPr lang="en-US" sz="1400" b="1" dirty="0" err="1">
+                <a:solidFill>
+                  <a:srgbClr val="0F6E56"/>
+                </a:solidFill>
+                <a:latin typeface="Calibri"/>
+              </a:rPr>
+              <a:t>Anagrafe</a:t>
+            </a:r>
+            <a:r>
+              <a:rPr lang="en-US" sz="1400" b="1" dirty="0">
+                <a:solidFill>
+                  <a:srgbClr val="0F6E56"/>
+                </a:solidFill>
+                <a:latin typeface="Calibri"/>
+              </a:rPr>
+              <a:t> Service</a:t>
+            </a:r>
+          </a:p>
+          <a:p>
+            <a:pPr marL="0" indent="0" algn="l">
+              <a:buNone/>
+              <a:defRPr/>
+            </a:pPr>
+            <a:r>
+              <a:rPr lang="en-US" sz="1200" b="1" dirty="0">
+                <a:solidFill>
+                  <a:srgbClr val="1F4E79"/>
+                </a:solidFill>
+                <a:latin typeface="Calibri"/>
+              </a:rPr>
+              <a:t>Protocol: SOAP / CXF  ·  :9101</a:t>
+            </a:r>
+          </a:p>
+          <a:p>
+            <a:pPr marL="0" indent="0" algn="l">
+              <a:buNone/>
+              <a:defRPr/>
+            </a:pPr>
+            <a:r>
+              <a:rPr lang="en-US" sz="1200" dirty="0">
+                <a:solidFill>
+                  <a:srgbClr val="595959"/>
+                </a:solidFill>
+                <a:latin typeface="Calibri"/>
+              </a:rPr>
+              <a:t>Patient data · medical history · allergies</a:t>
+            </a:r>
+          </a:p>
+        </p:txBody>
+      </p:sp>
+      <p:sp>
+        <p:nvSpPr>
+          <p:cNvPr id="301" name="Bar301"/>
+          <p:cNvSpPr/>
+          <p:nvPr/>
+        </p:nvSpPr>
+        <p:spPr bwMode="auto">
+          <a:xfrm>
+            <a:off x="457200" y="2370520"/>
+            <a:ext cx="64008" cy="1051560"/>
+          </a:xfrm>
+          <a:prstGeom prst="rect">
+            <a:avLst/>
+          </a:prstGeom>
+          <a:solidFill>
+            <a:srgbClr val="0F6E56"/>
+          </a:solidFill>
+          <a:ln/>
+        </p:spPr>
+        <p:txBody>
+          <a:bodyPr/>
+          <a:lstStyle/>
+          <a:p>
+            <a:endParaRPr lang="en-US"/>
+          </a:p>
+        </p:txBody>
+      </p:sp>
+      <p:sp>
+        <p:nvSpPr>
+          <p:cNvPr id="310" name="FarmSource"/>
+          <p:cNvSpPr/>
+          <p:nvPr/>
+        </p:nvSpPr>
+        <p:spPr bwMode="auto">
+          <a:xfrm>
+            <a:off x="489204" y="3813172"/>
+            <a:ext cx="2711196" cy="1051560"/>
+          </a:xfrm>
+          <a:prstGeom prst="rect">
+            <a:avLst/>
+          </a:prstGeom>
+          <a:solidFill>
+            <a:srgbClr val="FCE4D6"/>
+          </a:solidFill>
+          <a:ln w="12700">
+            <a:solidFill>
+              <a:srgbClr val="C55A11"/>
+            </a:solidFill>
+          </a:ln>
+        </p:spPr>
+        <p:txBody>
+          <a:bodyPr wrap="square" lIns="130000" tIns="91440" rIns="91440" bIns="45720" rtlCol="0" anchor="t"/>
+          <a:lstStyle/>
+          <a:p>
+            <a:pPr marL="0" indent="0" algn="l">
+              <a:buNone/>
+              <a:defRPr/>
+            </a:pPr>
+            <a:r>
+              <a:rPr lang="en-US" sz="1400" b="1" dirty="0">
+                <a:solidFill>
+                  <a:srgbClr val="C55A11"/>
+                </a:solidFill>
+                <a:latin typeface="Calibri"/>
+              </a:rPr>
+              <a:t>Farmacia Service</a:t>
+            </a:r>
+          </a:p>
+          <a:p>
+            <a:pPr marL="0" indent="0" algn="l">
+              <a:buNone/>
+              <a:defRPr/>
+            </a:pPr>
+            <a:r>
+              <a:rPr lang="en-US" sz="1200" b="1" dirty="0">
+                <a:solidFill>
+                  <a:srgbClr val="1F4E79"/>
+                </a:solidFill>
+                <a:latin typeface="Calibri"/>
+              </a:rPr>
+              <a:t>Protocol: REST  ·  :9103</a:t>
+            </a:r>
+          </a:p>
+          <a:p>
+            <a:pPr marL="0" indent="0" algn="l">
+              <a:buNone/>
+              <a:defRPr/>
+            </a:pPr>
+            <a:r>
+              <a:rPr lang="en-US" sz="1200" dirty="0">
+                <a:solidFill>
+                  <a:srgbClr val="595959"/>
+                </a:solidFill>
+                <a:latin typeface="Calibri"/>
+              </a:rPr>
+              <a:t>Active prescriptions per patient</a:t>
+            </a:r>
+          </a:p>
+        </p:txBody>
+      </p:sp>
+      <p:sp>
+        <p:nvSpPr>
+          <p:cNvPr id="311" name="Bar311"/>
+          <p:cNvSpPr/>
+          <p:nvPr/>
+        </p:nvSpPr>
+        <p:spPr bwMode="auto">
+          <a:xfrm>
+            <a:off x="457200" y="3813172"/>
+            <a:ext cx="65556" cy="1051560"/>
+          </a:xfrm>
+          <a:prstGeom prst="rect">
+            <a:avLst/>
+          </a:prstGeom>
+          <a:solidFill>
+            <a:srgbClr val="C55A11"/>
+          </a:solidFill>
+          <a:ln/>
+        </p:spPr>
+        <p:txBody>
+          <a:bodyPr/>
+          <a:lstStyle/>
+          <a:p>
+            <a:endParaRPr lang="en-US"/>
+          </a:p>
+        </p:txBody>
+      </p:sp>
     </p:spTree>
   </p:cSld>
   <p:clrMapOvr>
     <a:masterClrMapping/>
   </p:clrMapOvr>
-  <mc:AlternateContent xmlns:mc="http://schemas.openxmlformats.org/markup-compatibility/2006">
-    <mc:Choice xmlns:p159="http://schemas.microsoft.com/office/powerpoint/2015/09/main" xmlns:p14="http://schemas.microsoft.com/office/powerpoint/2010/main" Requires="p159">
-      <p:transition p14:dur="500" advClick="1"/>
-    </mc:Choice>
-    <mc:Fallback>
-      <p:transition advClick="1"/>
-    </mc:Fallback>
-  </mc:AlternateContent>
 </p:sld>
 </file>
 
 <file path=ppt/slides/slide15.xml><?xml version="1.0" encoding="utf-8"?>
-<p:sld xmlns:a="http://schemas.openxmlformats.org/drawingml/2006/main" xmlns:r="http://schemas.openxmlformats.org/officeDocument/2006/relationships" xmlns:p="http://schemas.openxmlformats.org/presentationml/2006/main" xmlns:m="http://schemas.openxmlformats.org/officeDocument/2006/math" xmlns:w="http://schemas.openxmlformats.org/wordprocessingml/2006/main" xmlns:mc="http://schemas.openxmlformats.org/markup-compatibility/2006" showMasterPhAnim="0" showMasterSp="1" show="1">
-  <p:cSld name="">
+<p:sld xmlns:a="http://schemas.openxmlformats.org/drawingml/2006/main" xmlns:r="http://schemas.openxmlformats.org/officeDocument/2006/relationships" xmlns:p="http://schemas.openxmlformats.org/presentationml/2006/main" showMasterPhAnim="0">
+  <p:cSld>
     <p:spTree>
       <p:nvGrpSpPr>
         <p:cNvPr id="1" name=""/>
@@ -5631,52 +7164,584 @@
           <a:chExt cx="0" cy="0"/>
         </a:xfrm>
       </p:grpSpPr>
-      <p:pic>
-        <p:nvPicPr>
-          <p:cNvPr id="364954886" name="Immagine 2"/>
-          <p:cNvPicPr>
-            <a:picLocks noChangeAspect="1"/>
-          </p:cNvPicPr>
-          <p:nvPr/>
-        </p:nvPicPr>
-        <p:blipFill rotWithShape="1">
-          <a:blip r:embed="rId3"/>
-          <a:stretch/>
-        </p:blipFill>
-        <p:spPr bwMode="auto">
-          <a:xfrm>
-            <a:off x="1684276" y="250678"/>
-            <a:ext cx="6103363" cy="4642143"/>
-          </a:xfrm>
-          <a:prstGeom prst="rect">
-            <a:avLst/>
-          </a:prstGeom>
+      <p:sp>
+        <p:nvSpPr>
+          <p:cNvPr id="100" name="Title"/>
+          <p:cNvSpPr/>
+          <p:nvPr/>
+        </p:nvSpPr>
+        <p:spPr bwMode="auto">
+          <a:xfrm>
+            <a:off x="457200" y="201168"/>
+            <a:ext cx="8229600" cy="566928"/>
+          </a:xfrm>
+          <a:prstGeom prst="rect">
+            <a:avLst/>
+          </a:prstGeom>
+          <a:noFill/>
           <a:ln>
+            <a:noFill/>
+          </a:ln>
+        </p:spPr>
+        <p:txBody>
+          <a:bodyPr wrap="square" lIns="91440" tIns="45720" rIns="91440" bIns="45720" rtlCol="0" anchor="ctr"/>
+          <a:lstStyle/>
+          <a:p>
+            <a:pPr marL="0" indent="0" algn="l">
+              <a:buNone/>
+              <a:defRPr/>
+            </a:pPr>
+            <a:r>
+              <a:rPr lang="en-US" sz="3400" b="1" dirty="0">
+                <a:solidFill>
+                  <a:srgbClr val="1F4E79"/>
+                </a:solidFill>
+                <a:latin typeface="Calibri"/>
+              </a:rPr>
+              <a:t>UC-3  Diagnostic Test Order &amp; Monitoring</a:t>
+            </a:r>
+          </a:p>
+        </p:txBody>
+      </p:sp>
+      <p:sp>
+        <p:nvSpPr>
+          <p:cNvPr id="200" name="Badge200"/>
+          <p:cNvSpPr/>
+          <p:nvPr/>
+        </p:nvSpPr>
+        <p:spPr bwMode="auto">
+          <a:xfrm>
+            <a:off x="685800" y="1508760"/>
+            <a:ext cx="2468880" cy="411480"/>
+          </a:xfrm>
+          <a:prstGeom prst="rect">
+            <a:avLst/>
+          </a:prstGeom>
+          <a:solidFill>
+            <a:srgbClr val="1F4E79"/>
+          </a:solidFill>
+          <a:ln>
+            <a:noFill/>
+          </a:ln>
+        </p:spPr>
+        <p:txBody>
+          <a:bodyPr wrap="square" lIns="91440" tIns="45720" rIns="91440" bIns="45720" rtlCol="0" anchor="ctr"/>
+          <a:lstStyle/>
+          <a:p>
+            <a:pPr marL="0" indent="0" algn="l">
+              <a:buNone/>
+              <a:defRPr/>
+            </a:pPr>
+            <a:r>
+              <a:rPr lang="en-US" sz="1350" b="1" dirty="0">
+                <a:solidFill>
+                  <a:srgbClr val="FFFFFF"/>
+                </a:solidFill>
+                <a:latin typeface="Calibri"/>
+              </a:rPr>
+              <a:t>① Order</a:t>
+            </a:r>
+          </a:p>
+        </p:txBody>
+      </p:sp>
+      <p:sp>
+        <p:nvSpPr>
+          <p:cNvPr id="201" name="P1"/>
+          <p:cNvSpPr/>
+          <p:nvPr/>
+        </p:nvSpPr>
+        <p:spPr bwMode="auto">
+          <a:xfrm>
+            <a:off x="685800" y="1920240"/>
+            <a:ext cx="2468880" cy="2331720"/>
+          </a:xfrm>
+          <a:prstGeom prst="rect">
+            <a:avLst/>
+          </a:prstGeom>
+          <a:solidFill>
+            <a:srgbClr val="FFFFFF"/>
+          </a:solidFill>
+          <a:ln w="12700">
             <a:solidFill>
-              <a:schemeClr val="tx1"/>
+              <a:srgbClr val="E8EEF2"/>
             </a:solidFill>
           </a:ln>
         </p:spPr>
-      </p:pic>
+        <p:txBody>
+          <a:bodyPr wrap="square" lIns="130000" tIns="91440" rIns="91440" bIns="45720" rtlCol="0" anchor="t"/>
+          <a:lstStyle/>
+          <a:p>
+            <a:pPr marL="0" indent="0" algn="l">
+              <a:buNone/>
+              <a:defRPr/>
+            </a:pPr>
+            <a:r>
+              <a:rPr lang="en-US" sz="1200" dirty="0">
+                <a:solidFill>
+                  <a:srgbClr val="595959"/>
+                </a:solidFill>
+                <a:latin typeface="Calibri"/>
+              </a:rPr>
+              <a:t>The physician requests a diagnostic panel (e.g. renal panel, metabolic panel).</a:t>
+            </a:r>
+          </a:p>
+          <a:p>
+            <a:pPr marL="0" indent="0" algn="l">
+              <a:buNone/>
+              <a:defRPr/>
+            </a:pPr>
+            <a:r>
+              <a:rPr lang="en-US" sz="1250" b="1" dirty="0">
+                <a:solidFill>
+                  <a:srgbClr val="1F4E79"/>
+                </a:solidFill>
+                <a:latin typeface="Calibri"/>
+              </a:rPr>
+              <a:t>The system responds immediately:</a:t>
+            </a:r>
+          </a:p>
+          <a:p>
+            <a:pPr marL="0" indent="0" algn="l">
+              <a:buNone/>
+              <a:defRPr/>
+            </a:pPr>
+            <a:r>
+              <a:rPr lang="en-US" sz="1200" dirty="0">
+                <a:solidFill>
+                  <a:srgbClr val="0F6E56"/>
+                </a:solidFill>
+                <a:latin typeface="Calibri"/>
+              </a:rPr>
+              <a:t>• trackingId  (tracking code)</a:t>
+            </a:r>
+          </a:p>
+          <a:p>
+            <a:pPr marL="0" indent="0" algn="l">
+              <a:buNone/>
+              <a:defRPr/>
+            </a:pPr>
+            <a:r>
+              <a:rPr lang="en-US" sz="1200" dirty="0">
+                <a:solidFill>
+                  <a:srgbClr val="0F6E56"/>
+                </a:solidFill>
+                <a:latin typeface="Calibri"/>
+              </a:rPr>
+              <a:t>• HTTP 202 Accepted</a:t>
+            </a:r>
+          </a:p>
+          <a:p>
+            <a:pPr marL="0" indent="0" algn="l">
+              <a:buNone/>
+              <a:defRPr/>
+            </a:pPr>
+            <a:r>
+              <a:rPr lang="en-US" sz="1200" i="1" dirty="0">
+                <a:solidFill>
+                  <a:srgbClr val="595959"/>
+                </a:solidFill>
+                <a:latin typeface="Calibri"/>
+              </a:rPr>
+              <a:t>The physician can continue working without waiting.</a:t>
+            </a:r>
+          </a:p>
+        </p:txBody>
+      </p:sp>
+      <p:sp>
+        <p:nvSpPr>
+          <p:cNvPr id="202" name="Bar202"/>
+          <p:cNvSpPr/>
+          <p:nvPr/>
+        </p:nvSpPr>
+        <p:spPr bwMode="auto">
+          <a:xfrm>
+            <a:off x="685800" y="1920240"/>
+            <a:ext cx="64008" cy="2331720"/>
+          </a:xfrm>
+          <a:prstGeom prst="rect">
+            <a:avLst/>
+          </a:prstGeom>
+          <a:solidFill>
+            <a:srgbClr val="1F4E79"/>
+          </a:solidFill>
+          <a:ln/>
+        </p:spPr>
+        <p:txBody>
+          <a:bodyPr/>
+          <a:lstStyle/>
+          <a:p>
+            <a:endParaRPr lang="en-US"/>
+          </a:p>
+        </p:txBody>
+      </p:sp>
+      <p:sp>
+        <p:nvSpPr>
+          <p:cNvPr id="210" name="Badge210"/>
+          <p:cNvSpPr/>
+          <p:nvPr/>
+        </p:nvSpPr>
+        <p:spPr bwMode="auto">
+          <a:xfrm>
+            <a:off x="3337560" y="1508760"/>
+            <a:ext cx="2468880" cy="411480"/>
+          </a:xfrm>
+          <a:prstGeom prst="rect">
+            <a:avLst/>
+          </a:prstGeom>
+          <a:solidFill>
+            <a:srgbClr val="C55A11"/>
+          </a:solidFill>
+          <a:ln>
+            <a:noFill/>
+          </a:ln>
+        </p:spPr>
+        <p:txBody>
+          <a:bodyPr wrap="square" lIns="91440" tIns="45720" rIns="91440" bIns="45720" rtlCol="0" anchor="ctr"/>
+          <a:lstStyle/>
+          <a:p>
+            <a:pPr marL="0" indent="0" algn="l">
+              <a:buNone/>
+              <a:defRPr/>
+            </a:pPr>
+            <a:r>
+              <a:rPr lang="en-US" sz="1350" b="1" dirty="0">
+                <a:solidFill>
+                  <a:srgbClr val="FFFFFF"/>
+                </a:solidFill>
+                <a:latin typeface="Calibri"/>
+              </a:rPr>
+              <a:t>② Processing</a:t>
+            </a:r>
+          </a:p>
+        </p:txBody>
+      </p:sp>
+      <p:sp>
+        <p:nvSpPr>
+          <p:cNvPr id="211" name="P2"/>
+          <p:cNvSpPr/>
+          <p:nvPr/>
+        </p:nvSpPr>
+        <p:spPr bwMode="auto">
+          <a:xfrm>
+            <a:off x="3337560" y="1920240"/>
+            <a:ext cx="2468880" cy="2331720"/>
+          </a:xfrm>
+          <a:prstGeom prst="rect">
+            <a:avLst/>
+          </a:prstGeom>
+          <a:solidFill>
+            <a:srgbClr val="FFFFFF"/>
+          </a:solidFill>
+          <a:ln w="12700">
+            <a:solidFill>
+              <a:srgbClr val="E8EEF2"/>
+            </a:solidFill>
+          </a:ln>
+        </p:spPr>
+        <p:txBody>
+          <a:bodyPr wrap="square" lIns="130000" tIns="91440" rIns="91440" bIns="45720" rtlCol="0" anchor="t"/>
+          <a:lstStyle/>
+          <a:p>
+            <a:pPr marL="0" indent="0" algn="l">
+              <a:buNone/>
+              <a:defRPr/>
+            </a:pPr>
+            <a:r>
+              <a:rPr lang="en-US" sz="1200" dirty="0">
+                <a:solidFill>
+                  <a:srgbClr val="595959"/>
+                </a:solidFill>
+                <a:latin typeface="Calibri"/>
+              </a:rPr>
+              <a:t>The client polls the system using the trackingId.</a:t>
+            </a:r>
+          </a:p>
+          <a:p>
+            <a:pPr marL="0" indent="0" algn="l">
+              <a:buNone/>
+              <a:defRPr/>
+            </a:pPr>
+            <a:r>
+              <a:rPr lang="en-US" sz="1250" b="1" dirty="0">
+                <a:solidFill>
+                  <a:srgbClr val="1F4E79"/>
+                </a:solidFill>
+                <a:latin typeface="Calibri"/>
+              </a:rPr>
+              <a:t>While processing, the response shows:</a:t>
+            </a:r>
+          </a:p>
+          <a:p>
+            <a:pPr marL="0" indent="0" algn="l">
+              <a:buNone/>
+              <a:defRPr/>
+            </a:pPr>
+            <a:r>
+              <a:rPr lang="en-US" sz="1250" b="1" dirty="0">
+                <a:solidFill>
+                  <a:srgbClr val="C55A11"/>
+                </a:solidFill>
+                <a:latin typeface="Calibri"/>
+              </a:rPr>
+              <a:t>status: PROCESSING</a:t>
+            </a:r>
+          </a:p>
+          <a:p>
+            <a:pPr marL="0" indent="0" algn="l">
+              <a:buNone/>
+              <a:defRPr/>
+            </a:pPr>
+            <a:r>
+              <a:rPr lang="en-US" sz="1200" b="1" dirty="0">
+                <a:solidFill>
+                  <a:srgbClr val="1F4E79"/>
+                </a:solidFill>
+                <a:latin typeface="Calibri"/>
+              </a:rPr>
+              <a:t>In the background:</a:t>
+            </a:r>
+          </a:p>
+          <a:p>
+            <a:pPr marL="0" indent="0" algn="l">
+              <a:buNone/>
+              <a:defRPr/>
+            </a:pPr>
+            <a:r>
+              <a:rPr lang="en-US" sz="1200" dirty="0">
+                <a:solidFill>
+                  <a:srgbClr val="595959"/>
+                </a:solidFill>
+                <a:latin typeface="Calibri"/>
+              </a:rPr>
+              <a:t>• Laboratorio :9102  processes lab tests</a:t>
+            </a:r>
+          </a:p>
+          <a:p>
+            <a:pPr marL="0" indent="0" algn="l">
+              <a:buNone/>
+              <a:defRPr/>
+            </a:pPr>
+            <a:r>
+              <a:rPr lang="en-US" sz="1200" dirty="0">
+                <a:solidFill>
+                  <a:srgbClr val="595959"/>
+                </a:solidFill>
+                <a:latin typeface="Calibri"/>
+              </a:rPr>
+              <a:t>• Imaging :9104  processes radiology reports</a:t>
+            </a:r>
+          </a:p>
+        </p:txBody>
+      </p:sp>
+      <p:sp>
+        <p:nvSpPr>
+          <p:cNvPr id="212" name="Bar212"/>
+          <p:cNvSpPr/>
+          <p:nvPr/>
+        </p:nvSpPr>
+        <p:spPr bwMode="auto">
+          <a:xfrm>
+            <a:off x="3337560" y="1920240"/>
+            <a:ext cx="64008" cy="2331720"/>
+          </a:xfrm>
+          <a:prstGeom prst="rect">
+            <a:avLst/>
+          </a:prstGeom>
+          <a:solidFill>
+            <a:srgbClr val="C55A11"/>
+          </a:solidFill>
+          <a:ln/>
+        </p:spPr>
+        <p:txBody>
+          <a:bodyPr/>
+          <a:lstStyle/>
+          <a:p>
+            <a:endParaRPr lang="en-US"/>
+          </a:p>
+        </p:txBody>
+      </p:sp>
+      <p:sp>
+        <p:nvSpPr>
+          <p:cNvPr id="220" name="Badge220"/>
+          <p:cNvSpPr/>
+          <p:nvPr/>
+        </p:nvSpPr>
+        <p:spPr bwMode="auto">
+          <a:xfrm>
+            <a:off x="5989320" y="1508760"/>
+            <a:ext cx="2468880" cy="411480"/>
+          </a:xfrm>
+          <a:prstGeom prst="rect">
+            <a:avLst/>
+          </a:prstGeom>
+          <a:solidFill>
+            <a:srgbClr val="0F6E56"/>
+          </a:solidFill>
+          <a:ln>
+            <a:noFill/>
+          </a:ln>
+        </p:spPr>
+        <p:txBody>
+          <a:bodyPr wrap="square" lIns="91440" tIns="45720" rIns="91440" bIns="45720" rtlCol="0" anchor="ctr"/>
+          <a:lstStyle/>
+          <a:p>
+            <a:pPr marL="0" indent="0" algn="l">
+              <a:buNone/>
+              <a:defRPr/>
+            </a:pPr>
+            <a:r>
+              <a:rPr lang="en-US" sz="1350" b="1" dirty="0">
+                <a:solidFill>
+                  <a:srgbClr val="FFFFFF"/>
+                </a:solidFill>
+                <a:latin typeface="Calibri"/>
+              </a:rPr>
+              <a:t>③ Final Result</a:t>
+            </a:r>
+          </a:p>
+        </p:txBody>
+      </p:sp>
+      <p:sp>
+        <p:nvSpPr>
+          <p:cNvPr id="221" name="P3"/>
+          <p:cNvSpPr/>
+          <p:nvPr/>
+        </p:nvSpPr>
+        <p:spPr bwMode="auto">
+          <a:xfrm>
+            <a:off x="5989320" y="1920240"/>
+            <a:ext cx="2468880" cy="2331720"/>
+          </a:xfrm>
+          <a:prstGeom prst="rect">
+            <a:avLst/>
+          </a:prstGeom>
+          <a:solidFill>
+            <a:srgbClr val="FFFFFF"/>
+          </a:solidFill>
+          <a:ln w="12700">
+            <a:solidFill>
+              <a:srgbClr val="E8EEF2"/>
+            </a:solidFill>
+          </a:ln>
+        </p:spPr>
+        <p:txBody>
+          <a:bodyPr wrap="square" lIns="130000" tIns="91440" rIns="91440" bIns="45720" rtlCol="0" anchor="t"/>
+          <a:lstStyle/>
+          <a:p>
+            <a:pPr marL="0" indent="0" algn="l">
+              <a:buNone/>
+              <a:defRPr/>
+            </a:pPr>
+            <a:r>
+              <a:rPr lang="en-US" sz="1200" dirty="0">
+                <a:solidFill>
+                  <a:srgbClr val="595959"/>
+                </a:solidFill>
+                <a:latin typeface="Calibri"/>
+              </a:rPr>
+              <a:t>Once processing is complete, the system returns the DiagnosticBundle:</a:t>
+            </a:r>
+          </a:p>
+          <a:p>
+            <a:pPr marL="0" indent="0" algn="l">
+              <a:buNone/>
+              <a:defRPr/>
+            </a:pPr>
+            <a:r>
+              <a:rPr lang="en-US" sz="1300" b="1" dirty="0">
+                <a:solidFill>
+                  <a:srgbClr val="0F6E56"/>
+                </a:solidFill>
+                <a:latin typeface="Calibri"/>
+              </a:rPr>
+              <a:t>DiagnosticBundle</a:t>
+            </a:r>
+          </a:p>
+          <a:p>
+            <a:pPr marL="0" indent="0" algn="l">
+              <a:buNone/>
+              <a:defRPr/>
+            </a:pPr>
+            <a:r>
+              <a:rPr lang="en-US" sz="1200" dirty="0">
+                <a:solidFill>
+                  <a:srgbClr val="595959"/>
+                </a:solidFill>
+                <a:latin typeface="Calibri"/>
+              </a:rPr>
+              <a:t>• List&lt;TestResult&gt;  (lab results)</a:t>
+            </a:r>
+          </a:p>
+          <a:p>
+            <a:pPr marL="0" indent="0" algn="l">
+              <a:buNone/>
+              <a:defRPr/>
+            </a:pPr>
+            <a:r>
+              <a:rPr lang="en-US" sz="1200" dirty="0">
+                <a:solidFill>
+                  <a:srgbClr val="595959"/>
+                </a:solidFill>
+                <a:latin typeface="Calibri"/>
+              </a:rPr>
+              <a:t>• List&lt;ImagingReport&gt;  (diagnostic reports)</a:t>
+            </a:r>
+          </a:p>
+          <a:p>
+            <a:pPr marL="0" indent="0" algn="l">
+              <a:buNone/>
+              <a:defRPr/>
+            </a:pPr>
+            <a:r>
+              <a:rPr lang="en-US" sz="1200" i="1" dirty="0">
+                <a:solidFill>
+                  <a:srgbClr val="595959"/>
+                </a:solidFill>
+                <a:latin typeface="Calibri"/>
+              </a:rPr>
+              <a:t>The physician always interacts with a single entry point and receives an aggregated response.</a:t>
+            </a:r>
+          </a:p>
+        </p:txBody>
+      </p:sp>
+      <p:sp>
+        <p:nvSpPr>
+          <p:cNvPr id="222" name="Bar222"/>
+          <p:cNvSpPr/>
+          <p:nvPr/>
+        </p:nvSpPr>
+        <p:spPr bwMode="auto">
+          <a:xfrm>
+            <a:off x="5989320" y="1920240"/>
+            <a:ext cx="64008" cy="2331720"/>
+          </a:xfrm>
+          <a:prstGeom prst="rect">
+            <a:avLst/>
+          </a:prstGeom>
+          <a:solidFill>
+            <a:srgbClr val="0F6E56"/>
+          </a:solidFill>
+          <a:ln/>
+        </p:spPr>
+        <p:txBody>
+          <a:bodyPr/>
+          <a:lstStyle/>
+          <a:p>
+            <a:endParaRPr lang="en-US"/>
+          </a:p>
+        </p:txBody>
+      </p:sp>
     </p:spTree>
   </p:cSld>
   <p:clrMapOvr>
     <a:masterClrMapping/>
   </p:clrMapOvr>
-  <mc:AlternateContent xmlns:mc="http://schemas.openxmlformats.org/markup-compatibility/2006">
-    <mc:Choice xmlns:p159="http://schemas.microsoft.com/office/powerpoint/2015/09/main" xmlns:p14="http://schemas.microsoft.com/office/powerpoint/2010/main" Requires="p159">
-      <p:transition p14:dur="500" advClick="1"/>
-    </mc:Choice>
-    <mc:Fallback>
-      <p:transition advClick="1"/>
-    </mc:Fallback>
-  </mc:AlternateContent>
 </p:sld>
 </file>
 
 <file path=ppt/slides/slide16.xml><?xml version="1.0" encoding="utf-8"?>
-<p:sld xmlns:a="http://schemas.openxmlformats.org/drawingml/2006/main" xmlns:r="http://schemas.openxmlformats.org/officeDocument/2006/relationships" xmlns:p="http://schemas.openxmlformats.org/presentationml/2006/main" xmlns:m="http://schemas.openxmlformats.org/officeDocument/2006/math" xmlns:w="http://schemas.openxmlformats.org/wordprocessingml/2006/main" xmlns:mc="http://schemas.openxmlformats.org/markup-compatibility/2006" showMasterPhAnim="0" showMasterSp="1" show="1">
-  <p:cSld name="">
+<p:sld xmlns:a="http://schemas.openxmlformats.org/drawingml/2006/main" xmlns:r="http://schemas.openxmlformats.org/officeDocument/2006/relationships" xmlns:p="http://schemas.openxmlformats.org/presentationml/2006/main" showMasterPhAnim="0">
+  <p:cSld>
     <p:spTree>
       <p:nvGrpSpPr>
         <p:cNvPr id="1" name=""/>
@@ -5691,58 +7756,754 @@
           <a:chExt cx="0" cy="0"/>
         </a:xfrm>
       </p:grpSpPr>
-      <p:pic>
-        <p:nvPicPr>
-          <p:cNvPr id="438674418" name="Immagine 1"/>
-          <p:cNvPicPr>
-            <a:picLocks noChangeAspect="1"/>
-          </p:cNvPicPr>
-          <p:nvPr/>
-        </p:nvPicPr>
-        <p:blipFill rotWithShape="1">
-          <a:blip r:embed="rId3"/>
-          <a:stretch/>
-        </p:blipFill>
-        <p:spPr bwMode="auto">
-          <a:xfrm>
-            <a:off x="1168737" y="513576"/>
-            <a:ext cx="6924338" cy="3997643"/>
+      <p:sp>
+        <p:nvSpPr>
+          <p:cNvPr id="100" name="Title"/>
+          <p:cNvSpPr/>
+          <p:nvPr/>
+        </p:nvSpPr>
+        <p:spPr bwMode="auto">
+          <a:xfrm>
+            <a:off x="457200" y="201168"/>
+            <a:ext cx="8229600" cy="566928"/>
           </a:xfrm>
           <a:prstGeom prst="rect">
             <a:avLst/>
           </a:prstGeom>
           <a:noFill/>
           <a:ln>
+            <a:noFill/>
+          </a:ln>
+        </p:spPr>
+        <p:txBody>
+          <a:bodyPr wrap="square" lIns="91440" tIns="45720" rIns="91440" bIns="45720" rtlCol="0" anchor="ctr"/>
+          <a:lstStyle/>
+          <a:p>
+            <a:pPr marL="0" indent="0" algn="l">
+              <a:buNone/>
+              <a:defRPr/>
+            </a:pPr>
+            <a:r>
+              <a:rPr lang="en-US" sz="3400" b="1" dirty="0">
+                <a:solidFill>
+                  <a:srgbClr val="1F4E79"/>
+                </a:solidFill>
+                <a:latin typeface="Calibri"/>
+              </a:rPr>
+              <a:t>UC-4  New Prescription</a:t>
+            </a:r>
+          </a:p>
+        </p:txBody>
+      </p:sp>
+      <p:sp>
+        <p:nvSpPr>
+          <p:cNvPr id="102" name="Sub"/>
+          <p:cNvSpPr/>
+          <p:nvPr/>
+        </p:nvSpPr>
+        <p:spPr bwMode="auto">
+          <a:xfrm>
+            <a:off x="345989" y="4700016"/>
+            <a:ext cx="8229600" cy="292608"/>
+          </a:xfrm>
+          <a:prstGeom prst="rect">
+            <a:avLst/>
+          </a:prstGeom>
+          <a:noFill/>
+          <a:ln>
+            <a:noFill/>
+          </a:ln>
+        </p:spPr>
+        <p:txBody>
+          <a:bodyPr wrap="square" lIns="91440" tIns="45720" rIns="91440" bIns="45720" rtlCol="0" anchor="ctr"/>
+          <a:lstStyle/>
+          <a:p>
+            <a:pPr marL="0" indent="0" algn="l">
+              <a:buNone/>
+              <a:defRPr/>
+            </a:pPr>
+            <a:r>
+              <a:rPr lang="en-US" sz="1250" i="1" dirty="0">
+                <a:solidFill>
+                  <a:srgbClr val="595959"/>
+                </a:solidFill>
+                <a:latin typeface="Calibri"/>
+              </a:rPr>
+              <a:t>Direct client → provider interaction: not every operation requires an aggregator</a:t>
+            </a:r>
+          </a:p>
+        </p:txBody>
+      </p:sp>
+      <p:sp>
+        <p:nvSpPr>
+          <p:cNvPr id="200" name="Scenario"/>
+          <p:cNvSpPr/>
+          <p:nvPr/>
+        </p:nvSpPr>
+        <p:spPr bwMode="auto">
+          <a:xfrm>
+            <a:off x="457200" y="1042416"/>
+            <a:ext cx="3108960" cy="2083843"/>
+          </a:xfrm>
+          <a:prstGeom prst="rect">
+            <a:avLst/>
+          </a:prstGeom>
+          <a:solidFill>
+            <a:srgbClr val="FFFFFF"/>
+          </a:solidFill>
+          <a:ln w="12700">
             <a:solidFill>
-              <a:schemeClr val="tx1"/>
+              <a:srgbClr val="E8EEF2"/>
             </a:solidFill>
           </a:ln>
         </p:spPr>
-      </p:pic>
+        <p:txBody>
+          <a:bodyPr wrap="square" lIns="130000" tIns="91440" rIns="91440" bIns="45720" rtlCol="0" anchor="t"/>
+          <a:lstStyle/>
+          <a:p>
+            <a:pPr marL="0" indent="0" algn="l">
+              <a:buNone/>
+              <a:defRPr/>
+            </a:pPr>
+            <a:r>
+              <a:rPr lang="en-US" sz="1450" b="1" dirty="0">
+                <a:solidFill>
+                  <a:srgbClr val="1F4E79"/>
+                </a:solidFill>
+                <a:latin typeface="Calibri"/>
+              </a:rPr>
+              <a:t>Scenario</a:t>
+            </a:r>
+          </a:p>
+          <a:p>
+            <a:pPr marL="0" indent="0" algn="l">
+              <a:buNone/>
+              <a:defRPr/>
+            </a:pPr>
+            <a:r>
+              <a:rPr lang="en-US" sz="1200" dirty="0">
+                <a:solidFill>
+                  <a:srgbClr val="595959"/>
+                </a:solidFill>
+                <a:latin typeface="Calibri"/>
+              </a:rPr>
+              <a:t>The physician enters a new pharmacological prescription for a patient.</a:t>
+            </a:r>
+          </a:p>
+          <a:p>
+            <a:pPr marL="0" indent="0" algn="l">
+              <a:buNone/>
+              <a:defRPr/>
+            </a:pPr>
+            <a:r>
+              <a:rPr lang="en-US" sz="1300" b="1" dirty="0">
+                <a:solidFill>
+                  <a:srgbClr val="C55A11"/>
+                </a:solidFill>
+                <a:latin typeface="Calibri"/>
+              </a:rPr>
+              <a:t>No prosumer involved:</a:t>
+            </a:r>
+          </a:p>
+          <a:p>
+            <a:pPr marL="0" indent="0" algn="l">
+              <a:buNone/>
+              <a:defRPr/>
+            </a:pPr>
+            <a:r>
+              <a:rPr lang="en-US" sz="1200" dirty="0">
+                <a:solidFill>
+                  <a:srgbClr val="595959"/>
+                </a:solidFill>
+                <a:latin typeface="Calibri"/>
+              </a:rPr>
+              <a:t>Farmacia is the direct provider, responsible for its own domain.</a:t>
+            </a:r>
+          </a:p>
+          <a:p>
+            <a:pPr marL="0" indent="0" algn="l">
+              <a:buNone/>
+              <a:defRPr/>
+            </a:pPr>
+            <a:r>
+              <a:rPr lang="en-US" sz="1200" i="1" dirty="0">
+                <a:solidFill>
+                  <a:srgbClr val="595959"/>
+                </a:solidFill>
+                <a:latin typeface="Calibri"/>
+              </a:rPr>
+              <a:t>This use case shows that SOA does not always mandate aggregation: when an operation belongs to a single domain, the client reaches that provider directly.</a:t>
+            </a:r>
+          </a:p>
+        </p:txBody>
+      </p:sp>
+      <p:sp>
+        <p:nvSpPr>
+          <p:cNvPr id="201" name="Bar201"/>
+          <p:cNvSpPr/>
+          <p:nvPr/>
+        </p:nvSpPr>
+        <p:spPr bwMode="auto">
+          <a:xfrm>
+            <a:off x="457200" y="1042416"/>
+            <a:ext cx="64008" cy="2083843"/>
+          </a:xfrm>
+          <a:prstGeom prst="rect">
+            <a:avLst/>
+          </a:prstGeom>
+          <a:solidFill>
+            <a:srgbClr val="C55A11"/>
+          </a:solidFill>
+          <a:ln/>
+        </p:spPr>
+        <p:txBody>
+          <a:bodyPr/>
+          <a:lstStyle/>
+          <a:p>
+            <a:endParaRPr lang="en-US"/>
+          </a:p>
+        </p:txBody>
+      </p:sp>
+      <p:sp>
+        <p:nvSpPr>
+          <p:cNvPr id="210" name="ReqLbl"/>
+          <p:cNvSpPr/>
+          <p:nvPr/>
+        </p:nvSpPr>
+        <p:spPr bwMode="auto">
+          <a:xfrm>
+            <a:off x="3886200" y="1431036"/>
+            <a:ext cx="4800600" cy="384048"/>
+          </a:xfrm>
+          <a:prstGeom prst="rect">
+            <a:avLst/>
+          </a:prstGeom>
+          <a:solidFill>
+            <a:srgbClr val="FCE4D6"/>
+          </a:solidFill>
+          <a:ln w="12700">
+            <a:solidFill>
+              <a:srgbClr val="C55A11"/>
+            </a:solidFill>
+          </a:ln>
+        </p:spPr>
+        <p:txBody>
+          <a:bodyPr wrap="square" lIns="130000" tIns="45720" rIns="91440" bIns="45720" rtlCol="0" anchor="ctr"/>
+          <a:lstStyle/>
+          <a:p>
+            <a:pPr marL="0" indent="0" algn="l">
+              <a:buNone/>
+              <a:defRPr/>
+            </a:pPr>
+            <a:r>
+              <a:rPr lang="en-US" sz="1350" b="1" dirty="0">
+                <a:solidFill>
+                  <a:srgbClr val="1F4E79"/>
+                </a:solidFill>
+                <a:latin typeface="Calibri"/>
+              </a:rPr>
+              <a:t>Request Payload</a:t>
+            </a:r>
+          </a:p>
+        </p:txBody>
+      </p:sp>
+      <p:sp>
+        <p:nvSpPr>
+          <p:cNvPr id="220" name="Bar220"/>
+          <p:cNvSpPr/>
+          <p:nvPr/>
+        </p:nvSpPr>
+        <p:spPr bwMode="auto">
+          <a:xfrm>
+            <a:off x="3886200" y="1888236"/>
+            <a:ext cx="64008" cy="393192"/>
+          </a:xfrm>
+          <a:prstGeom prst="rect">
+            <a:avLst/>
+          </a:prstGeom>
+          <a:solidFill>
+            <a:srgbClr val="C55A11"/>
+          </a:solidFill>
+          <a:ln/>
+        </p:spPr>
+        <p:txBody>
+          <a:bodyPr/>
+          <a:lstStyle/>
+          <a:p>
+            <a:endParaRPr lang="en-US"/>
+          </a:p>
+        </p:txBody>
+      </p:sp>
+      <p:sp>
+        <p:nvSpPr>
+          <p:cNvPr id="221" name="Req0"/>
+          <p:cNvSpPr/>
+          <p:nvPr/>
+        </p:nvSpPr>
+        <p:spPr bwMode="auto">
+          <a:xfrm>
+            <a:off x="3886200" y="1888236"/>
+            <a:ext cx="4800600" cy="393192"/>
+          </a:xfrm>
+          <a:prstGeom prst="rect">
+            <a:avLst/>
+          </a:prstGeom>
+          <a:solidFill>
+            <a:srgbClr val="FFFFFF"/>
+          </a:solidFill>
+          <a:ln w="12700">
+            <a:solidFill>
+              <a:srgbClr val="E8EEF2"/>
+            </a:solidFill>
+          </a:ln>
+        </p:spPr>
+        <p:txBody>
+          <a:bodyPr wrap="square" lIns="130000" tIns="27432" rIns="91440" bIns="27432" rtlCol="0" anchor="ctr"/>
+          <a:lstStyle/>
+          <a:p>
+            <a:pPr marL="0" indent="0" algn="l">
+              <a:buNone/>
+              <a:defRPr/>
+            </a:pPr>
+            <a:r>
+              <a:rPr lang="en-US" sz="1250" b="1" dirty="0">
+                <a:solidFill>
+                  <a:srgbClr val="C55A11"/>
+                </a:solidFill>
+                <a:latin typeface="Calibri"/>
+              </a:rPr>
+              <a:t>drug</a:t>
+            </a:r>
+            <a:r>
+              <a:rPr lang="en-US" sz="1200" dirty="0">
+                <a:solidFill>
+                  <a:srgbClr val="595959"/>
+                </a:solidFill>
+                <a:latin typeface="Calibri"/>
+              </a:rPr>
+              <a:t>  —  Drug name + ATC code</a:t>
+            </a:r>
+          </a:p>
+        </p:txBody>
+      </p:sp>
+      <p:sp>
+        <p:nvSpPr>
+          <p:cNvPr id="230" name="Bar230"/>
+          <p:cNvSpPr/>
+          <p:nvPr/>
+        </p:nvSpPr>
+        <p:spPr bwMode="auto">
+          <a:xfrm>
+            <a:off x="3886200" y="2327148"/>
+            <a:ext cx="64008" cy="393192"/>
+          </a:xfrm>
+          <a:prstGeom prst="rect">
+            <a:avLst/>
+          </a:prstGeom>
+          <a:solidFill>
+            <a:srgbClr val="C55A11"/>
+          </a:solidFill>
+          <a:ln/>
+        </p:spPr>
+        <p:txBody>
+          <a:bodyPr/>
+          <a:lstStyle/>
+          <a:p>
+            <a:endParaRPr lang="en-US"/>
+          </a:p>
+        </p:txBody>
+      </p:sp>
+      <p:sp>
+        <p:nvSpPr>
+          <p:cNvPr id="231" name="Req1"/>
+          <p:cNvSpPr/>
+          <p:nvPr/>
+        </p:nvSpPr>
+        <p:spPr bwMode="auto">
+          <a:xfrm>
+            <a:off x="3886200" y="2327148"/>
+            <a:ext cx="4800600" cy="393192"/>
+          </a:xfrm>
+          <a:prstGeom prst="rect">
+            <a:avLst/>
+          </a:prstGeom>
+          <a:solidFill>
+            <a:srgbClr val="FFFFFF"/>
+          </a:solidFill>
+          <a:ln w="12700">
+            <a:solidFill>
+              <a:srgbClr val="E8EEF2"/>
+            </a:solidFill>
+          </a:ln>
+        </p:spPr>
+        <p:txBody>
+          <a:bodyPr wrap="square" lIns="130000" tIns="27432" rIns="91440" bIns="27432" rtlCol="0" anchor="ctr"/>
+          <a:lstStyle/>
+          <a:p>
+            <a:pPr marL="0" indent="0" algn="l">
+              <a:buNone/>
+              <a:defRPr/>
+            </a:pPr>
+            <a:r>
+              <a:rPr lang="en-US" sz="1250" b="1" dirty="0">
+                <a:solidFill>
+                  <a:srgbClr val="C55A11"/>
+                </a:solidFill>
+                <a:latin typeface="Calibri"/>
+              </a:rPr>
+              <a:t>dosage</a:t>
+            </a:r>
+            <a:r>
+              <a:rPr lang="en-US" sz="1200" dirty="0">
+                <a:solidFill>
+                  <a:srgbClr val="595959"/>
+                </a:solidFill>
+                <a:latin typeface="Calibri"/>
+              </a:rPr>
+              <a:t>  —  Quantity per administration</a:t>
+            </a:r>
+          </a:p>
+        </p:txBody>
+      </p:sp>
+      <p:sp>
+        <p:nvSpPr>
+          <p:cNvPr id="240" name="Bar240"/>
+          <p:cNvSpPr/>
+          <p:nvPr/>
+        </p:nvSpPr>
+        <p:spPr bwMode="auto">
+          <a:xfrm>
+            <a:off x="3886200" y="2766060"/>
+            <a:ext cx="64008" cy="393192"/>
+          </a:xfrm>
+          <a:prstGeom prst="rect">
+            <a:avLst/>
+          </a:prstGeom>
+          <a:solidFill>
+            <a:srgbClr val="C55A11"/>
+          </a:solidFill>
+          <a:ln/>
+        </p:spPr>
+        <p:txBody>
+          <a:bodyPr/>
+          <a:lstStyle/>
+          <a:p>
+            <a:endParaRPr lang="en-US"/>
+          </a:p>
+        </p:txBody>
+      </p:sp>
+      <p:sp>
+        <p:nvSpPr>
+          <p:cNvPr id="241" name="Req2"/>
+          <p:cNvSpPr/>
+          <p:nvPr/>
+        </p:nvSpPr>
+        <p:spPr bwMode="auto">
+          <a:xfrm>
+            <a:off x="3886200" y="2766060"/>
+            <a:ext cx="4800600" cy="393192"/>
+          </a:xfrm>
+          <a:prstGeom prst="rect">
+            <a:avLst/>
+          </a:prstGeom>
+          <a:solidFill>
+            <a:srgbClr val="FFFFFF"/>
+          </a:solidFill>
+          <a:ln w="12700">
+            <a:solidFill>
+              <a:srgbClr val="E8EEF2"/>
+            </a:solidFill>
+          </a:ln>
+        </p:spPr>
+        <p:txBody>
+          <a:bodyPr wrap="square" lIns="130000" tIns="27432" rIns="91440" bIns="27432" rtlCol="0" anchor="ctr"/>
+          <a:lstStyle/>
+          <a:p>
+            <a:pPr marL="0" indent="0" algn="l">
+              <a:buNone/>
+              <a:defRPr/>
+            </a:pPr>
+            <a:r>
+              <a:rPr lang="en-US" sz="1250" b="1" dirty="0">
+                <a:solidFill>
+                  <a:srgbClr val="C55A11"/>
+                </a:solidFill>
+                <a:latin typeface="Calibri"/>
+              </a:rPr>
+              <a:t>frequency</a:t>
+            </a:r>
+            <a:r>
+              <a:rPr lang="en-US" sz="1200" dirty="0">
+                <a:solidFill>
+                  <a:srgbClr val="595959"/>
+                </a:solidFill>
+                <a:latin typeface="Calibri"/>
+              </a:rPr>
+              <a:t>  —  Administration schedule</a:t>
+            </a:r>
+          </a:p>
+        </p:txBody>
+      </p:sp>
+      <p:sp>
+        <p:nvSpPr>
+          <p:cNvPr id="250" name="Bar250"/>
+          <p:cNvSpPr/>
+          <p:nvPr/>
+        </p:nvSpPr>
+        <p:spPr bwMode="auto">
+          <a:xfrm>
+            <a:off x="3886200" y="3204972"/>
+            <a:ext cx="64008" cy="393192"/>
+          </a:xfrm>
+          <a:prstGeom prst="rect">
+            <a:avLst/>
+          </a:prstGeom>
+          <a:solidFill>
+            <a:srgbClr val="C55A11"/>
+          </a:solidFill>
+          <a:ln/>
+        </p:spPr>
+        <p:txBody>
+          <a:bodyPr/>
+          <a:lstStyle/>
+          <a:p>
+            <a:endParaRPr lang="en-US"/>
+          </a:p>
+        </p:txBody>
+      </p:sp>
+      <p:sp>
+        <p:nvSpPr>
+          <p:cNvPr id="251" name="Req3"/>
+          <p:cNvSpPr/>
+          <p:nvPr/>
+        </p:nvSpPr>
+        <p:spPr bwMode="auto">
+          <a:xfrm>
+            <a:off x="3886200" y="3204972"/>
+            <a:ext cx="4800600" cy="393192"/>
+          </a:xfrm>
+          <a:prstGeom prst="rect">
+            <a:avLst/>
+          </a:prstGeom>
+          <a:solidFill>
+            <a:srgbClr val="FFFFFF"/>
+          </a:solidFill>
+          <a:ln w="12700">
+            <a:solidFill>
+              <a:srgbClr val="E8EEF2"/>
+            </a:solidFill>
+          </a:ln>
+        </p:spPr>
+        <p:txBody>
+          <a:bodyPr wrap="square" lIns="130000" tIns="27432" rIns="91440" bIns="27432" rtlCol="0" anchor="ctr"/>
+          <a:lstStyle/>
+          <a:p>
+            <a:pPr marL="0" indent="0" algn="l">
+              <a:buNone/>
+              <a:defRPr/>
+            </a:pPr>
+            <a:r>
+              <a:rPr lang="en-US" sz="1250" b="1" dirty="0">
+                <a:solidFill>
+                  <a:srgbClr val="C55A11"/>
+                </a:solidFill>
+                <a:latin typeface="Calibri"/>
+              </a:rPr>
+              <a:t>validity dates</a:t>
+            </a:r>
+            <a:r>
+              <a:rPr lang="en-US" sz="1200" dirty="0">
+                <a:solidFill>
+                  <a:srgbClr val="595959"/>
+                </a:solidFill>
+                <a:latin typeface="Calibri"/>
+              </a:rPr>
+              <a:t>  —  startDate · endDate</a:t>
+            </a:r>
+          </a:p>
+        </p:txBody>
+      </p:sp>
+      <p:sp>
+        <p:nvSpPr>
+          <p:cNvPr id="260" name="Bar260"/>
+          <p:cNvSpPr/>
+          <p:nvPr/>
+        </p:nvSpPr>
+        <p:spPr bwMode="auto">
+          <a:xfrm>
+            <a:off x="3886200" y="3643884"/>
+            <a:ext cx="64008" cy="393192"/>
+          </a:xfrm>
+          <a:prstGeom prst="rect">
+            <a:avLst/>
+          </a:prstGeom>
+          <a:solidFill>
+            <a:srgbClr val="C55A11"/>
+          </a:solidFill>
+          <a:ln/>
+        </p:spPr>
+        <p:txBody>
+          <a:bodyPr/>
+          <a:lstStyle/>
+          <a:p>
+            <a:endParaRPr lang="en-US"/>
+          </a:p>
+        </p:txBody>
+      </p:sp>
+      <p:sp>
+        <p:nvSpPr>
+          <p:cNvPr id="261" name="Req4"/>
+          <p:cNvSpPr/>
+          <p:nvPr/>
+        </p:nvSpPr>
+        <p:spPr bwMode="auto">
+          <a:xfrm>
+            <a:off x="3886200" y="3643884"/>
+            <a:ext cx="4800600" cy="393192"/>
+          </a:xfrm>
+          <a:prstGeom prst="rect">
+            <a:avLst/>
+          </a:prstGeom>
+          <a:solidFill>
+            <a:srgbClr val="FFFFFF"/>
+          </a:solidFill>
+          <a:ln w="12700">
+            <a:solidFill>
+              <a:srgbClr val="E8EEF2"/>
+            </a:solidFill>
+          </a:ln>
+        </p:spPr>
+        <p:txBody>
+          <a:bodyPr wrap="square" lIns="130000" tIns="27432" rIns="91440" bIns="27432" rtlCol="0" anchor="ctr"/>
+          <a:lstStyle/>
+          <a:p>
+            <a:pPr marL="0" indent="0" algn="l">
+              <a:buNone/>
+              <a:defRPr/>
+            </a:pPr>
+            <a:r>
+              <a:rPr lang="en-US" sz="1250" b="1" dirty="0">
+                <a:solidFill>
+                  <a:srgbClr val="C55A11"/>
+                </a:solidFill>
+                <a:latin typeface="Calibri"/>
+              </a:rPr>
+              <a:t>prescribing physician</a:t>
+            </a:r>
+            <a:r>
+              <a:rPr lang="en-US" sz="1200" dirty="0">
+                <a:solidFill>
+                  <a:srgbClr val="595959"/>
+                </a:solidFill>
+                <a:latin typeface="Calibri"/>
+              </a:rPr>
+              <a:t>  —  Physician identifier</a:t>
+            </a:r>
+          </a:p>
+        </p:txBody>
+      </p:sp>
+      <p:sp>
+        <p:nvSpPr>
+          <p:cNvPr id="270" name="ResLbl"/>
+          <p:cNvSpPr/>
+          <p:nvPr/>
+        </p:nvSpPr>
+        <p:spPr bwMode="auto">
+          <a:xfrm>
+            <a:off x="457199" y="3451860"/>
+            <a:ext cx="3108961" cy="918972"/>
+          </a:xfrm>
+          <a:prstGeom prst="rect">
+            <a:avLst/>
+          </a:prstGeom>
+          <a:solidFill>
+            <a:srgbClr val="D6EFE8"/>
+          </a:solidFill>
+          <a:ln w="12700">
+            <a:solidFill>
+              <a:srgbClr val="0F6E56"/>
+            </a:solidFill>
+          </a:ln>
+        </p:spPr>
+        <p:txBody>
+          <a:bodyPr wrap="square" lIns="130000" tIns="64008" rIns="91440" bIns="64008" rtlCol="0" anchor="ctr"/>
+          <a:lstStyle/>
+          <a:p>
+            <a:pPr marL="0" indent="0" algn="l">
+              <a:buNone/>
+              <a:defRPr/>
+            </a:pPr>
+            <a:r>
+              <a:rPr lang="en-US" sz="1350" b="1" dirty="0">
+                <a:solidFill>
+                  <a:srgbClr val="0F6E56"/>
+                </a:solidFill>
+                <a:latin typeface="Calibri"/>
+              </a:rPr>
+              <a:t>HTTP 201 Created  →  Prescription saved</a:t>
+            </a:r>
+          </a:p>
+          <a:p>
+            <a:pPr marL="0" indent="0" algn="l">
+              <a:buNone/>
+              <a:defRPr/>
+            </a:pPr>
+            <a:r>
+              <a:rPr lang="en-US" sz="1150" dirty="0">
+                <a:solidFill>
+                  <a:srgbClr val="595959"/>
+                </a:solidFill>
+                <a:latin typeface="Calibri"/>
+              </a:rPr>
+              <a:t>id · drugName · atcCode · dosage · frequency · startDate · endDate · prescribingPhysician</a:t>
+            </a:r>
+          </a:p>
+        </p:txBody>
+      </p:sp>
+      <p:sp>
+        <p:nvSpPr>
+          <p:cNvPr id="271" name="Bar271"/>
+          <p:cNvSpPr/>
+          <p:nvPr/>
+        </p:nvSpPr>
+        <p:spPr bwMode="auto">
+          <a:xfrm>
+            <a:off x="457199" y="3451860"/>
+            <a:ext cx="45719" cy="918972"/>
+          </a:xfrm>
+          <a:prstGeom prst="rect">
+            <a:avLst/>
+          </a:prstGeom>
+          <a:solidFill>
+            <a:srgbClr val="0F6E56"/>
+          </a:solidFill>
+          <a:ln/>
+        </p:spPr>
+        <p:txBody>
+          <a:bodyPr/>
+          <a:lstStyle/>
+          <a:p>
+            <a:endParaRPr lang="en-US"/>
+          </a:p>
+        </p:txBody>
+      </p:sp>
     </p:spTree>
   </p:cSld>
   <p:clrMapOvr>
     <a:masterClrMapping/>
   </p:clrMapOvr>
-  <mc:AlternateContent xmlns:mc="http://schemas.openxmlformats.org/markup-compatibility/2006">
-    <mc:Choice xmlns:p159="http://schemas.microsoft.com/office/powerpoint/2015/09/main" xmlns:p14="http://schemas.microsoft.com/office/powerpoint/2010/main" Requires="p159">
-      <p:transition p14:dur="500" advClick="1"/>
-    </mc:Choice>
-    <mc:Fallback>
-      <p:transition advClick="1"/>
-    </mc:Fallback>
-  </mc:AlternateContent>
 </p:sld>
 </file>
 
 <file path=ppt/slides/slide17.xml><?xml version="1.0" encoding="utf-8"?>
-<p:sld xmlns:a="http://schemas.openxmlformats.org/drawingml/2006/main" xmlns:r="http://schemas.openxmlformats.org/officeDocument/2006/relationships" xmlns:p="http://schemas.openxmlformats.org/presentationml/2006/main" xmlns:m="http://schemas.openxmlformats.org/officeDocument/2006/math" xmlns:w="http://schemas.openxmlformats.org/wordprocessingml/2006/main" xmlns:mc="http://schemas.openxmlformats.org/markup-compatibility/2006" showMasterPhAnim="0" showMasterSp="1" show="1">
+<p:sld xmlns:a="http://schemas.openxmlformats.org/drawingml/2006/main" xmlns:r="http://schemas.openxmlformats.org/officeDocument/2006/relationships" xmlns:p="http://schemas.openxmlformats.org/presentationml/2006/main" showMasterPhAnim="0">
   <p:cSld name="Slide 16">
     <p:bg>
-      <p:bgPr shadeToTitle="0">
+      <p:bgPr>
         <a:solidFill>
           <a:srgbClr val="F5F8FA"/>
         </a:solidFill>
+        <a:effectLst/>
       </p:bgPr>
     </p:bg>
     <p:spTree>
@@ -7264,11 +10025,11 @@
   <p:clrMapOvr>
     <a:masterClrMapping/>
   </p:clrMapOvr>
-  <mc:AlternateContent xmlns:mc="http://schemas.openxmlformats.org/markup-compatibility/2006">
-    <mc:Choice xmlns:p159="http://schemas.microsoft.com/office/powerpoint/2015/09/main" xmlns:p14="http://schemas.microsoft.com/office/powerpoint/2010/main" Requires="p159">
-      <p:transition p14:dur="500" advClick="1"/>
+  <mc:AlternateContent xmlns:mc="http://schemas.openxmlformats.org/markup-compatibility/2006" xmlns:p159="http://schemas.microsoft.com/office/powerpoint/2015/09/main">
+    <mc:Choice Requires="p159">
+      <p:transition/>
     </mc:Choice>
-    <mc:Fallback>
+    <mc:Fallback xmlns:w="http://schemas.openxmlformats.org/wordprocessingml/2006/main" xmlns:m="http://schemas.openxmlformats.org/officeDocument/2006/math" xmlns="">
       <p:transition advClick="1"/>
     </mc:Fallback>
   </mc:AlternateContent>
@@ -7276,13 +10037,14 @@
 </file>
 
 <file path=ppt/slides/slide2.xml><?xml version="1.0" encoding="utf-8"?>
-<p:sld xmlns:a="http://schemas.openxmlformats.org/drawingml/2006/main" xmlns:r="http://schemas.openxmlformats.org/officeDocument/2006/relationships" xmlns:p="http://schemas.openxmlformats.org/presentationml/2006/main" xmlns:m="http://schemas.openxmlformats.org/officeDocument/2006/math" xmlns:w="http://schemas.openxmlformats.org/wordprocessingml/2006/main" xmlns:mc="http://schemas.openxmlformats.org/markup-compatibility/2006" showMasterPhAnim="0" showMasterSp="1" show="1">
+<p:sld xmlns:a="http://schemas.openxmlformats.org/drawingml/2006/main" xmlns:r="http://schemas.openxmlformats.org/officeDocument/2006/relationships" xmlns:p="http://schemas.openxmlformats.org/presentationml/2006/main" showMasterPhAnim="0">
   <p:cSld name="Slide 2">
     <p:bg>
-      <p:bgPr shadeToTitle="0">
+      <p:bgPr>
         <a:solidFill>
           <a:srgbClr val="1F4E79"/>
         </a:solidFill>
+        <a:effectLst/>
       </p:bgPr>
     </p:bg>
     <p:spTree>
@@ -7424,11 +10186,11 @@
   <p:clrMapOvr>
     <a:masterClrMapping/>
   </p:clrMapOvr>
-  <mc:AlternateContent xmlns:mc="http://schemas.openxmlformats.org/markup-compatibility/2006">
-    <mc:Choice xmlns:p159="http://schemas.microsoft.com/office/powerpoint/2015/09/main" xmlns:p14="http://schemas.microsoft.com/office/powerpoint/2010/main" Requires="p159">
-      <p:transition p14:dur="500" advClick="1"/>
+  <mc:AlternateContent xmlns:mc="http://schemas.openxmlformats.org/markup-compatibility/2006" xmlns:p159="http://schemas.microsoft.com/office/powerpoint/2015/09/main">
+    <mc:Choice Requires="p159">
+      <p:transition/>
     </mc:Choice>
-    <mc:Fallback>
+    <mc:Fallback xmlns:w="http://schemas.openxmlformats.org/wordprocessingml/2006/main" xmlns:m="http://schemas.openxmlformats.org/officeDocument/2006/math" xmlns="">
       <p:transition advClick="1"/>
     </mc:Fallback>
   </mc:AlternateContent>
@@ -7436,13 +10198,14 @@
 </file>
 
 <file path=ppt/slides/slide3.xml><?xml version="1.0" encoding="utf-8"?>
-<p:sld xmlns:a="http://schemas.openxmlformats.org/drawingml/2006/main" xmlns:r="http://schemas.openxmlformats.org/officeDocument/2006/relationships" xmlns:p="http://schemas.openxmlformats.org/presentationml/2006/main" xmlns:m="http://schemas.openxmlformats.org/officeDocument/2006/math" xmlns:w="http://schemas.openxmlformats.org/wordprocessingml/2006/main" xmlns:mc="http://schemas.openxmlformats.org/markup-compatibility/2006" showMasterPhAnim="0" showMasterSp="1" show="1">
+<p:sld xmlns:a="http://schemas.openxmlformats.org/drawingml/2006/main" xmlns:r="http://schemas.openxmlformats.org/officeDocument/2006/relationships" xmlns:p="http://schemas.openxmlformats.org/presentationml/2006/main" showMasterPhAnim="0">
   <p:cSld name="Slide 3">
     <p:bg>
-      <p:bgPr shadeToTitle="0">
+      <p:bgPr>
         <a:solidFill>
           <a:srgbClr val="F5F8FA"/>
         </a:solidFill>
+        <a:effectLst/>
       </p:bgPr>
     </p:bg>
     <p:spTree>
@@ -8114,11 +10877,11 @@
   <p:clrMapOvr>
     <a:masterClrMapping/>
   </p:clrMapOvr>
-  <mc:AlternateContent xmlns:mc="http://schemas.openxmlformats.org/markup-compatibility/2006">
-    <mc:Choice xmlns:p159="http://schemas.microsoft.com/office/powerpoint/2015/09/main" xmlns:p14="http://schemas.microsoft.com/office/powerpoint/2010/main" Requires="p159">
-      <p:transition p14:dur="500" advClick="1"/>
+  <mc:AlternateContent xmlns:mc="http://schemas.openxmlformats.org/markup-compatibility/2006" xmlns:p159="http://schemas.microsoft.com/office/powerpoint/2015/09/main">
+    <mc:Choice Requires="p159">
+      <p:transition/>
     </mc:Choice>
-    <mc:Fallback>
+    <mc:Fallback xmlns:w="http://schemas.openxmlformats.org/wordprocessingml/2006/main" xmlns:m="http://schemas.openxmlformats.org/officeDocument/2006/math" xmlns="">
       <p:transition advClick="1"/>
     </mc:Fallback>
   </mc:AlternateContent>
@@ -8126,13 +10889,14 @@
 </file>
 
 <file path=ppt/slides/slide4.xml><?xml version="1.0" encoding="utf-8"?>
-<p:sld xmlns:a="http://schemas.openxmlformats.org/drawingml/2006/main" xmlns:r="http://schemas.openxmlformats.org/officeDocument/2006/relationships" xmlns:p="http://schemas.openxmlformats.org/presentationml/2006/main" xmlns:m="http://schemas.openxmlformats.org/officeDocument/2006/math" xmlns:w="http://schemas.openxmlformats.org/wordprocessingml/2006/main" xmlns:mc="http://schemas.openxmlformats.org/markup-compatibility/2006" showMasterPhAnim="0" showMasterSp="1" show="1">
+<p:sld xmlns:a="http://schemas.openxmlformats.org/drawingml/2006/main" xmlns:r="http://schemas.openxmlformats.org/officeDocument/2006/relationships" xmlns:p="http://schemas.openxmlformats.org/presentationml/2006/main" showMasterPhAnim="0">
   <p:cSld name="Slide 4">
     <p:bg>
-      <p:bgPr shadeToTitle="0">
+      <p:bgPr>
         <a:solidFill>
           <a:srgbClr val="F5F8FA"/>
         </a:solidFill>
+        <a:effectLst/>
       </p:bgPr>
     </p:bg>
     <p:spTree>
@@ -8279,11 +11043,11 @@
   <p:clrMapOvr>
     <a:masterClrMapping/>
   </p:clrMapOvr>
-  <mc:AlternateContent xmlns:mc="http://schemas.openxmlformats.org/markup-compatibility/2006">
-    <mc:Choice xmlns:p159="http://schemas.microsoft.com/office/powerpoint/2015/09/main" xmlns:p14="http://schemas.microsoft.com/office/powerpoint/2010/main" Requires="p159">
-      <p:transition p14:dur="500" advClick="1"/>
+  <mc:AlternateContent xmlns:mc="http://schemas.openxmlformats.org/markup-compatibility/2006" xmlns:p159="http://schemas.microsoft.com/office/powerpoint/2015/09/main">
+    <mc:Choice Requires="p159">
+      <p:transition/>
     </mc:Choice>
-    <mc:Fallback>
+    <mc:Fallback xmlns:w="http://schemas.openxmlformats.org/wordprocessingml/2006/main" xmlns:m="http://schemas.openxmlformats.org/officeDocument/2006/math" xmlns="">
       <p:transition advClick="1"/>
     </mc:Fallback>
   </mc:AlternateContent>
@@ -8291,13 +11055,14 @@
 </file>
 
 <file path=ppt/slides/slide5.xml><?xml version="1.0" encoding="utf-8"?>
-<p:sld xmlns:a="http://schemas.openxmlformats.org/drawingml/2006/main" xmlns:r="http://schemas.openxmlformats.org/officeDocument/2006/relationships" xmlns:p="http://schemas.openxmlformats.org/presentationml/2006/main" xmlns:m="http://schemas.openxmlformats.org/officeDocument/2006/math" xmlns:w="http://schemas.openxmlformats.org/wordprocessingml/2006/main" xmlns:mc="http://schemas.openxmlformats.org/markup-compatibility/2006" showMasterPhAnim="0" showMasterSp="1" show="1">
+<p:sld xmlns:a="http://schemas.openxmlformats.org/drawingml/2006/main" xmlns:r="http://schemas.openxmlformats.org/officeDocument/2006/relationships" xmlns:p="http://schemas.openxmlformats.org/presentationml/2006/main" showMasterPhAnim="0">
   <p:cSld name="Slide 5">
     <p:bg>
-      <p:bgPr shadeToTitle="0">
+      <p:bgPr>
         <a:solidFill>
           <a:srgbClr val="F5F8FA"/>
         </a:solidFill>
+        <a:effectLst/>
       </p:bgPr>
     </p:bg>
     <p:spTree>
@@ -9173,11 +11938,11 @@
   <p:clrMapOvr>
     <a:masterClrMapping/>
   </p:clrMapOvr>
-  <mc:AlternateContent xmlns:mc="http://schemas.openxmlformats.org/markup-compatibility/2006">
-    <mc:Choice xmlns:p159="http://schemas.microsoft.com/office/powerpoint/2015/09/main" xmlns:p14="http://schemas.microsoft.com/office/powerpoint/2010/main" Requires="p159">
-      <p:transition p14:dur="500" advClick="1"/>
+  <mc:AlternateContent xmlns:mc="http://schemas.openxmlformats.org/markup-compatibility/2006" xmlns:p159="http://schemas.microsoft.com/office/powerpoint/2015/09/main">
+    <mc:Choice Requires="p159">
+      <p:transition/>
     </mc:Choice>
-    <mc:Fallback>
+    <mc:Fallback xmlns:w="http://schemas.openxmlformats.org/wordprocessingml/2006/main" xmlns:m="http://schemas.openxmlformats.org/officeDocument/2006/math" xmlns="">
       <p:transition advClick="1"/>
     </mc:Fallback>
   </mc:AlternateContent>
@@ -9185,13 +11950,14 @@
 </file>
 
 <file path=ppt/slides/slide6.xml><?xml version="1.0" encoding="utf-8"?>
-<p:sld xmlns:a="http://schemas.openxmlformats.org/drawingml/2006/main" xmlns:r="http://schemas.openxmlformats.org/officeDocument/2006/relationships" xmlns:p="http://schemas.openxmlformats.org/presentationml/2006/main" xmlns:m="http://schemas.openxmlformats.org/officeDocument/2006/math" xmlns:w="http://schemas.openxmlformats.org/wordprocessingml/2006/main" xmlns:mc="http://schemas.openxmlformats.org/markup-compatibility/2006" showMasterPhAnim="0" showMasterSp="1" show="1">
+<p:sld xmlns:a="http://schemas.openxmlformats.org/drawingml/2006/main" xmlns:r="http://schemas.openxmlformats.org/officeDocument/2006/relationships" xmlns:p="http://schemas.openxmlformats.org/presentationml/2006/main" showMasterPhAnim="0">
   <p:cSld name="Slide 6">
     <p:bg>
-      <p:bgPr shadeToTitle="0">
+      <p:bgPr>
         <a:solidFill>
           <a:srgbClr val="F5F8FA"/>
         </a:solidFill>
+        <a:effectLst/>
       </p:bgPr>
     </p:bg>
     <p:spTree>
@@ -10189,11 +12955,11 @@
   <p:clrMapOvr>
     <a:masterClrMapping/>
   </p:clrMapOvr>
-  <mc:AlternateContent xmlns:mc="http://schemas.openxmlformats.org/markup-compatibility/2006">
-    <mc:Choice xmlns:p159="http://schemas.microsoft.com/office/powerpoint/2015/09/main" xmlns:p14="http://schemas.microsoft.com/office/powerpoint/2010/main" Requires="p159">
-      <p:transition p14:dur="500" advClick="1"/>
+  <mc:AlternateContent xmlns:mc="http://schemas.openxmlformats.org/markup-compatibility/2006" xmlns:p159="http://schemas.microsoft.com/office/powerpoint/2015/09/main">
+    <mc:Choice Requires="p159">
+      <p:transition/>
     </mc:Choice>
-    <mc:Fallback>
+    <mc:Fallback xmlns:w="http://schemas.openxmlformats.org/wordprocessingml/2006/main" xmlns:m="http://schemas.openxmlformats.org/officeDocument/2006/math" xmlns="">
       <p:transition advClick="1"/>
     </mc:Fallback>
   </mc:AlternateContent>
@@ -10201,13 +12967,14 @@
 </file>
 
 <file path=ppt/slides/slide7.xml><?xml version="1.0" encoding="utf-8"?>
-<p:sld xmlns:a="http://schemas.openxmlformats.org/drawingml/2006/main" xmlns:r="http://schemas.openxmlformats.org/officeDocument/2006/relationships" xmlns:p="http://schemas.openxmlformats.org/presentationml/2006/main" xmlns:m="http://schemas.openxmlformats.org/officeDocument/2006/math" xmlns:w="http://schemas.openxmlformats.org/wordprocessingml/2006/main" xmlns:mc="http://schemas.openxmlformats.org/markup-compatibility/2006" showMasterPhAnim="0" showMasterSp="1" show="1">
+<p:sld xmlns:a="http://schemas.openxmlformats.org/drawingml/2006/main" xmlns:r="http://schemas.openxmlformats.org/officeDocument/2006/relationships" xmlns:p="http://schemas.openxmlformats.org/presentationml/2006/main" showMasterPhAnim="0">
   <p:cSld name="Slide 7">
     <p:bg>
-      <p:bgPr shadeToTitle="0">
+      <p:bgPr>
         <a:solidFill>
           <a:srgbClr val="1F4E79"/>
         </a:solidFill>
+        <a:effectLst/>
       </p:bgPr>
     </p:bg>
     <p:spTree>
@@ -10327,11 +13094,11 @@
   <p:clrMapOvr>
     <a:masterClrMapping/>
   </p:clrMapOvr>
-  <mc:AlternateContent xmlns:mc="http://schemas.openxmlformats.org/markup-compatibility/2006">
-    <mc:Choice xmlns:p159="http://schemas.microsoft.com/office/powerpoint/2015/09/main" xmlns:p14="http://schemas.microsoft.com/office/powerpoint/2010/main" Requires="p159">
-      <p:transition p14:dur="500" advClick="1"/>
+  <mc:AlternateContent xmlns:mc="http://schemas.openxmlformats.org/markup-compatibility/2006" xmlns:p159="http://schemas.microsoft.com/office/powerpoint/2015/09/main">
+    <mc:Choice Requires="p159">
+      <p:transition/>
     </mc:Choice>
-    <mc:Fallback>
+    <mc:Fallback xmlns:w="http://schemas.openxmlformats.org/wordprocessingml/2006/main" xmlns:m="http://schemas.openxmlformats.org/officeDocument/2006/math" xmlns="">
       <p:transition advClick="1"/>
     </mc:Fallback>
   </mc:AlternateContent>
@@ -10339,13 +13106,14 @@
 </file>
 
 <file path=ppt/slides/slide8.xml><?xml version="1.0" encoding="utf-8"?>
-<p:sld xmlns:a="http://schemas.openxmlformats.org/drawingml/2006/main" xmlns:r="http://schemas.openxmlformats.org/officeDocument/2006/relationships" xmlns:p="http://schemas.openxmlformats.org/presentationml/2006/main" xmlns:m="http://schemas.openxmlformats.org/officeDocument/2006/math" xmlns:w="http://schemas.openxmlformats.org/wordprocessingml/2006/main" xmlns:mc="http://schemas.openxmlformats.org/markup-compatibility/2006" showMasterPhAnim="0" showMasterSp="1" show="1">
+<p:sld xmlns:a="http://schemas.openxmlformats.org/drawingml/2006/main" xmlns:r="http://schemas.openxmlformats.org/officeDocument/2006/relationships" xmlns:p="http://schemas.openxmlformats.org/presentationml/2006/main" showMasterPhAnim="0">
   <p:cSld name="Slide 8">
     <p:bg>
-      <p:bgPr shadeToTitle="0">
+      <p:bgPr>
         <a:solidFill>
           <a:srgbClr val="F5F8FA"/>
         </a:solidFill>
+        <a:effectLst/>
       </p:bgPr>
     </p:bg>
     <p:spTree>
@@ -11966,11 +14734,11 @@
   <p:clrMapOvr>
     <a:masterClrMapping/>
   </p:clrMapOvr>
-  <mc:AlternateContent xmlns:mc="http://schemas.openxmlformats.org/markup-compatibility/2006">
-    <mc:Choice xmlns:p159="http://schemas.microsoft.com/office/powerpoint/2015/09/main" xmlns:p14="http://schemas.microsoft.com/office/powerpoint/2010/main" Requires="p159">
-      <p:transition p14:dur="500" advClick="1"/>
+  <mc:AlternateContent xmlns:mc="http://schemas.openxmlformats.org/markup-compatibility/2006" xmlns:p159="http://schemas.microsoft.com/office/powerpoint/2015/09/main">
+    <mc:Choice Requires="p159">
+      <p:transition/>
     </mc:Choice>
-    <mc:Fallback>
+    <mc:Fallback xmlns:w="http://schemas.openxmlformats.org/wordprocessingml/2006/main" xmlns:m="http://schemas.openxmlformats.org/officeDocument/2006/math" xmlns="">
       <p:transition advClick="1"/>
     </mc:Fallback>
   </mc:AlternateContent>
@@ -11978,13 +14746,14 @@
 </file>
 
 <file path=ppt/slides/slide9.xml><?xml version="1.0" encoding="utf-8"?>
-<p:sld xmlns:a="http://schemas.openxmlformats.org/drawingml/2006/main" xmlns:r="http://schemas.openxmlformats.org/officeDocument/2006/relationships" xmlns:p="http://schemas.openxmlformats.org/presentationml/2006/main" xmlns:m="http://schemas.openxmlformats.org/officeDocument/2006/math" xmlns:w="http://schemas.openxmlformats.org/wordprocessingml/2006/main" xmlns:mc="http://schemas.openxmlformats.org/markup-compatibility/2006" showMasterPhAnim="0" showMasterSp="1" show="1">
+<p:sld xmlns:a="http://schemas.openxmlformats.org/drawingml/2006/main" xmlns:r="http://schemas.openxmlformats.org/officeDocument/2006/relationships" xmlns:p="http://schemas.openxmlformats.org/presentationml/2006/main" showMasterPhAnim="0">
   <p:cSld name="Slide 9">
     <p:bg>
-      <p:bgPr shadeToTitle="0">
+      <p:bgPr>
         <a:solidFill>
           <a:srgbClr val="F5F8FA"/>
         </a:solidFill>
+        <a:effectLst/>
       </p:bgPr>
     </p:bg>
     <p:spTree>
@@ -13413,11 +16182,11 @@
   <p:clrMapOvr>
     <a:masterClrMapping/>
   </p:clrMapOvr>
-  <mc:AlternateContent xmlns:mc="http://schemas.openxmlformats.org/markup-compatibility/2006">
-    <mc:Choice xmlns:p159="http://schemas.microsoft.com/office/powerpoint/2015/09/main" xmlns:p14="http://schemas.microsoft.com/office/powerpoint/2010/main" Requires="p159">
-      <p:transition p14:dur="500" advClick="1"/>
+  <mc:AlternateContent xmlns:mc="http://schemas.openxmlformats.org/markup-compatibility/2006" xmlns:p159="http://schemas.microsoft.com/office/powerpoint/2015/09/main">
+    <mc:Choice Requires="p159">
+      <p:transition/>
     </mc:Choice>
-    <mc:Fallback>
+    <mc:Fallback xmlns:w="http://schemas.openxmlformats.org/wordprocessingml/2006/main" xmlns:m="http://schemas.openxmlformats.org/officeDocument/2006/math" xmlns="">
       <p:transition advClick="1"/>
     </mc:Fallback>
   </mc:AlternateContent>
@@ -13425,7 +16194,7 @@
 </file>
 
 <file path=ppt/theme/theme1.xml><?xml version="1.0" encoding="utf-8"?>
-<a:theme xmlns:a="http://schemas.openxmlformats.org/drawingml/2006/main" xmlns:r="http://schemas.openxmlformats.org/officeDocument/2006/relationships" xmlns:p="http://schemas.openxmlformats.org/presentationml/2006/main" name="Office Theme">
+<a:theme xmlns:a="http://schemas.openxmlformats.org/drawingml/2006/main" name="Office Theme">
   <a:themeElements>
     <a:clrScheme name="Office">
       <a:dk1>
@@ -13616,11 +16385,12 @@
     </a:fmtScheme>
   </a:themeElements>
   <a:objectDefaults/>
+  <a:extraClrSchemeLst/>
 </a:theme>
 </file>
 
 <file path=ppt/theme/theme2.xml><?xml version="1.0" encoding="utf-8"?>
-<a:theme xmlns:a="http://schemas.openxmlformats.org/drawingml/2006/main" xmlns:r="http://schemas.openxmlformats.org/officeDocument/2006/relationships" xmlns:p="http://schemas.openxmlformats.org/presentationml/2006/main" name="Tema di Office">
+<a:theme xmlns:a="http://schemas.openxmlformats.org/drawingml/2006/main" name="Tema di Office">
   <a:themeElements>
     <a:clrScheme name="Office">
       <a:dk1>
@@ -13831,5 +16601,6 @@
       </a:style>
     </a:lnDef>
   </a:objectDefaults>
+  <a:extraClrSchemeLst/>
 </a:theme>
 </file>
--- a/docs/HealthSOA_Presentation.pptx
+++ b/docs/HealthSOA_Presentation.pptx
@@ -262,7 +262,7 @@
       </p:grpSpPr>
       <p:sp>
         <p:nvSpPr>
-          <p:cNvPr id="169744986" name="Slide Image Placeholder 1"/>
+          <p:cNvPr id="626679027" name="Slide Image Placeholder 1"/>
           <p:cNvSpPr>
             <a:spLocks noChangeAspect="1" noGrp="1" noRot="1"/>
           </p:cNvSpPr>
@@ -274,7 +274,7 @@
       </p:sp>
       <p:sp>
         <p:nvSpPr>
-          <p:cNvPr id="859972606" name="Notes Placeholder 2"/>
+          <p:cNvPr id="2059495477" name="Notes Placeholder 2"/>
           <p:cNvSpPr>
             <a:spLocks noGrp="1"/>
           </p:cNvSpPr>
@@ -296,7 +296,7 @@
       </p:sp>
       <p:sp>
         <p:nvSpPr>
-          <p:cNvPr id="144314081" name="Slide Number Placeholder 3"/>
+          <p:cNvPr id="1587746254" name="Slide Number Placeholder 3"/>
           <p:cNvSpPr>
             <a:spLocks noGrp="1"/>
           </p:cNvSpPr>
@@ -347,7 +347,7 @@
       </p:grpSpPr>
       <p:sp>
         <p:nvSpPr>
-          <p:cNvPr id="1175474767" name="Slide Image Placeholder 1"/>
+          <p:cNvPr id="612980227" name="Slide Image Placeholder 1"/>
           <p:cNvSpPr>
             <a:spLocks noChangeAspect="1" noGrp="1" noRot="1"/>
           </p:cNvSpPr>
@@ -359,7 +359,7 @@
       </p:sp>
       <p:sp>
         <p:nvSpPr>
-          <p:cNvPr id="828845072" name="Notes Placeholder 2"/>
+          <p:cNvPr id="234317152" name="Notes Placeholder 2"/>
           <p:cNvSpPr>
             <a:spLocks noGrp="1"/>
           </p:cNvSpPr>
@@ -375,13 +375,289 @@
             <a:pPr>
               <a:defRPr/>
             </a:pPr>
+            <a:r>
+              <a:rPr lang="it-IT" sz="1400"/>
+              <a:t>Now l</a:t>
+            </a:r>
+            <a:r>
+              <a:rPr sz="1400"/>
+              <a:t>et’s look at our Key Data Structures to see how our data is managed by </a:t>
+            </a:r>
+            <a:r>
+              <a:rPr lang="it-IT" sz="1400"/>
+              <a:t>all </a:t>
+            </a:r>
+            <a:r>
+              <a:rPr sz="1400"/>
+              <a:t>the components I just described.</a:t>
+            </a:r>
+            <a:endParaRPr sz="1400"/>
+          </a:p>
+          <a:p>
+            <a:pPr marL="239821" indent="-239821">
+              <a:buFont typeface="Arial"/>
+              <a:buChar char="•"/>
+              <a:defRPr/>
+            </a:pPr>
+            <a:r>
+              <a:rPr sz="1400"/>
+              <a:t>On the left side we </a:t>
+            </a:r>
+            <a:r>
+              <a:rPr lang="it-IT" sz="1400"/>
+              <a:t>can see</a:t>
+            </a:r>
+            <a:r>
+              <a:rPr lang="it-IT" sz="1400"/>
+              <a:t> </a:t>
+            </a:r>
+            <a:r>
+              <a:rPr sz="1400"/>
+              <a:t>the </a:t>
+            </a:r>
+            <a:r>
+              <a:rPr sz="1400" b="1"/>
+              <a:t>Domain Objects</a:t>
+            </a:r>
+            <a:r>
+              <a:rPr lang="it-IT" sz="1400"/>
+              <a:t>, t</a:t>
+            </a:r>
+            <a:r>
+              <a:rPr sz="1400"/>
+              <a:t>hese are the simple data units managed by our providers, such as patient</a:t>
+            </a:r>
+            <a:r>
+              <a:rPr lang="it-IT" sz="1400"/>
+              <a:t>s</a:t>
+            </a:r>
+            <a:r>
+              <a:rPr sz="1400"/>
+              <a:t>, conditions, allergies a</a:t>
+            </a:r>
+            <a:r>
+              <a:rPr lang="it-IT" sz="1400"/>
+              <a:t>nd </a:t>
+            </a:r>
+            <a:r>
+              <a:rPr sz="1400"/>
+              <a:t>measurements, </a:t>
+            </a:r>
+            <a:r>
+              <a:rPr lang="it-IT" sz="1400"/>
+              <a:t>each one of them with all of their</a:t>
+            </a:r>
+            <a:r>
+              <a:rPr lang="it-IT" sz="1400"/>
+              <a:t> </a:t>
+            </a:r>
+            <a:r>
+              <a:rPr sz="1400"/>
+              <a:t>attributes on screen.</a:t>
+            </a:r>
+            <a:endParaRPr sz="1400"/>
+          </a:p>
+          <a:p>
+            <a:pPr marL="239821" indent="-239821">
+              <a:buFont typeface="Arial"/>
+              <a:buChar char="•"/>
+              <a:defRPr/>
+            </a:pPr>
+            <a:r>
+              <a:rPr sz="1400"/>
+              <a:t>On the right side we have the </a:t>
+            </a:r>
+            <a:r>
+              <a:rPr sz="1400" b="1"/>
+              <a:t>Composed Objects</a:t>
+            </a:r>
+            <a:r>
+              <a:rPr sz="1400"/>
+              <a:t> created by our Prosumers.</a:t>
+            </a:r>
+            <a:r>
+              <a:rPr lang="it-IT" sz="1400"/>
+              <a:t> </a:t>
+            </a:r>
+            <a:r>
+              <a:rPr lang="it-IT" sz="1400"/>
+              <a:t>T</a:t>
+            </a:r>
+            <a:r>
+              <a:rPr sz="1400"/>
+              <a:t>he Diagnostic Bundle and the Clinical Profile represent the first level of </a:t>
+            </a:r>
+            <a:r>
+              <a:rPr lang="it-IT" sz="1400"/>
+              <a:t>composed</a:t>
+            </a:r>
+            <a:r>
+              <a:rPr lang="it-IT" sz="1400"/>
+              <a:t> data</a:t>
+            </a:r>
+            <a:r>
+              <a:rPr lang="it-IT" sz="1400"/>
+              <a:t>, respectively managed by the Diagnostic and Clinical aggregators.</a:t>
+            </a:r>
+            <a:endParaRPr sz="1400"/>
+          </a:p>
+          <a:p>
+            <a:pPr marL="239821" indent="-239821">
+              <a:buFont typeface="Arial"/>
+              <a:buChar char="•"/>
+              <a:defRPr/>
+            </a:pPr>
+            <a:r>
+              <a:rPr sz="1400"/>
+              <a:t>A</a:t>
+            </a:r>
+            <a:r>
+              <a:rPr lang="it-IT" sz="1400"/>
+              <a:t>nother</a:t>
+            </a:r>
+            <a:r>
+              <a:rPr sz="1400"/>
+              <a:t> important </a:t>
+            </a:r>
+            <a:r>
+              <a:rPr lang="it-IT" sz="1400"/>
+              <a:t>data </a:t>
+            </a:r>
+            <a:r>
+              <a:rPr sz="1400"/>
+              <a:t>structure</a:t>
+            </a:r>
+            <a:r>
+              <a:rPr lang="it-IT" sz="1400"/>
+              <a:t> </a:t>
+            </a:r>
+            <a:r>
+              <a:rPr sz="1400"/>
+              <a:t>is the Risk Flag</a:t>
+            </a:r>
+            <a:r>
+              <a:rPr lang="it-IT" sz="1400"/>
+              <a:t>, they ar</a:t>
+            </a:r>
+            <a:r>
+              <a:rPr sz="1400"/>
+              <a:t>e </a:t>
+            </a:r>
+            <a:r>
+              <a:rPr lang="it-IT" sz="1400"/>
+              <a:t> managed by the </a:t>
+            </a:r>
+            <a:r>
+              <a:rPr sz="1400"/>
+              <a:t>Care Coordinator</a:t>
+            </a:r>
+            <a:r>
+              <a:rPr lang="it-IT" sz="1400"/>
+              <a:t>, which </a:t>
+            </a:r>
+            <a:r>
+              <a:rPr sz="1400"/>
+              <a:t>creates these flags automatically if it detects a dangerous situation. For example, if a doctor prescribes a drug that conflicts with a patient's allergy, or if a lab</a:t>
+            </a:r>
+            <a:r>
+              <a:rPr lang="it-IT" sz="1400"/>
+              <a:t>oratory</a:t>
+            </a:r>
+            <a:r>
+              <a:rPr sz="1400"/>
+              <a:t> test value is criti</a:t>
+            </a:r>
+            <a:r>
+              <a:rPr sz="1400"/>
+              <a:t>cally bad, the system generates a warning flag.</a:t>
+            </a:r>
+            <a:endParaRPr sz="1400"/>
+          </a:p>
+          <a:p>
+            <a:pPr marL="239821" indent="-239821">
+              <a:buFont typeface="Arial"/>
+              <a:buChar char="•"/>
+              <a:defRPr/>
+            </a:pPr>
+            <a:r>
+              <a:rPr sz="1400"/>
+              <a:t>All of this information is packed into the final Fitness Report</a:t>
+            </a:r>
+            <a:r>
+              <a:rPr lang="it-IT" sz="1400"/>
+              <a:t>, which gives</a:t>
+            </a:r>
+            <a:r>
+              <a:rPr lang="it-IT" sz="1400"/>
+              <a:t> to </a:t>
+            </a:r>
+            <a:r>
+              <a:rPr sz="1400"/>
+              <a:t>the doctor a clear evaluation summary</a:t>
+            </a:r>
+            <a:r>
+              <a:rPr lang="it-IT" sz="1400"/>
+              <a:t>, and it can assume 3 values</a:t>
+            </a:r>
+            <a:r>
+              <a:rPr lang="it-IT" sz="1400"/>
+              <a:t>: “</a:t>
+            </a:r>
+            <a:r>
+              <a:rPr sz="1400"/>
+              <a:t>Fit</a:t>
+            </a:r>
+            <a:r>
+              <a:rPr lang="it-IT" sz="1400"/>
+              <a:t>”</a:t>
+            </a:r>
+            <a:r>
+              <a:rPr sz="1400"/>
+              <a:t>, </a:t>
+            </a:r>
+            <a:r>
+              <a:rPr lang="it-IT" sz="1400"/>
+              <a:t>“</a:t>
+            </a:r>
+            <a:r>
+              <a:rPr sz="1400"/>
+              <a:t>Fit with Reservation</a:t>
+            </a:r>
+            <a:r>
+              <a:rPr lang="it-IT" sz="1400"/>
+              <a:t>”</a:t>
+            </a:r>
+            <a:r>
+              <a:rPr sz="1400"/>
+              <a:t> or </a:t>
+            </a:r>
+            <a:r>
+              <a:rPr lang="it-IT" sz="1400"/>
+              <a:t>“</a:t>
+            </a:r>
+            <a:r>
+              <a:rPr sz="1400"/>
+              <a:t>Unfit</a:t>
+            </a:r>
+            <a:r>
+              <a:rPr lang="it-IT" sz="1400"/>
+              <a:t>”</a:t>
+            </a:r>
+            <a:r>
+              <a:rPr lang="it-IT" sz="1400"/>
+              <a:t>,</a:t>
+            </a:r>
+            <a:r>
+              <a:rPr sz="1400"/>
+              <a:t> along with the patient summary and the list of risk factors.</a:t>
+            </a:r>
             <a:endParaRPr lang="en-US"/>
           </a:p>
         </p:txBody>
       </p:sp>
       <p:sp>
         <p:nvSpPr>
-          <p:cNvPr id="1975221014" name="Slide Number Placeholder 3"/>
+          <p:cNvPr id="701688697" name="Slide Number Placeholder 3"/>
           <p:cNvSpPr>
             <a:spLocks noGrp="1"/>
           </p:cNvSpPr>
@@ -432,7 +708,7 @@
       </p:grpSpPr>
       <p:sp>
         <p:nvSpPr>
-          <p:cNvPr id="1098218929" name="Slide Image Placeholder 1"/>
+          <p:cNvPr id="789519722" name="Slide Image Placeholder 1"/>
           <p:cNvSpPr>
             <a:spLocks noChangeAspect="1" noGrp="1" noRot="1"/>
           </p:cNvSpPr>
@@ -444,7 +720,7 @@
       </p:sp>
       <p:sp>
         <p:nvSpPr>
-          <p:cNvPr id="1815162250" name="Notes Placeholder 2"/>
+          <p:cNvPr id="2114689095" name="Notes Placeholder 2"/>
           <p:cNvSpPr>
             <a:spLocks noGrp="1"/>
           </p:cNvSpPr>
@@ -466,7 +742,7 @@
       </p:sp>
       <p:sp>
         <p:nvSpPr>
-          <p:cNvPr id="153293252" name="Slide Number Placeholder 3"/>
+          <p:cNvPr id="1954071644" name="Slide Number Placeholder 3"/>
           <p:cNvSpPr>
             <a:spLocks noGrp="1"/>
           </p:cNvSpPr>
@@ -517,7 +793,7 @@
       </p:grpSpPr>
       <p:sp>
         <p:nvSpPr>
-          <p:cNvPr id="985719266" name="Slide Image Placeholder 1"/>
+          <p:cNvPr id="1583176935" name="Slide Image Placeholder 1"/>
           <p:cNvSpPr>
             <a:spLocks noChangeAspect="1" noGrp="1" noRot="1"/>
           </p:cNvSpPr>
@@ -529,7 +805,7 @@
       </p:sp>
       <p:sp>
         <p:nvSpPr>
-          <p:cNvPr id="1457928295" name="Notes Placeholder 2"/>
+          <p:cNvPr id="681379675" name="Notes Placeholder 2"/>
           <p:cNvSpPr>
             <a:spLocks noGrp="1"/>
           </p:cNvSpPr>
@@ -551,7 +827,7 @@
       </p:sp>
       <p:sp>
         <p:nvSpPr>
-          <p:cNvPr id="2116678357" name="Slide Number Placeholder 3"/>
+          <p:cNvPr id="753898833" name="Slide Number Placeholder 3"/>
           <p:cNvSpPr>
             <a:spLocks noGrp="1"/>
           </p:cNvSpPr>
@@ -602,7 +878,7 @@
       </p:grpSpPr>
       <p:sp>
         <p:nvSpPr>
-          <p:cNvPr id="668930231" name="Slide Image Placeholder 1"/>
+          <p:cNvPr id="64590185" name="Slide Image Placeholder 1"/>
           <p:cNvSpPr>
             <a:spLocks noChangeAspect="1" noGrp="1" noRot="1"/>
           </p:cNvSpPr>
@@ -614,7 +890,7 @@
       </p:sp>
       <p:sp>
         <p:nvSpPr>
-          <p:cNvPr id="726185584" name="Notes Placeholder 2"/>
+          <p:cNvPr id="267710022" name="Notes Placeholder 2"/>
           <p:cNvSpPr>
             <a:spLocks noGrp="1"/>
           </p:cNvSpPr>
@@ -636,7 +912,7 @@
       </p:sp>
       <p:sp>
         <p:nvSpPr>
-          <p:cNvPr id="549223016" name="Slide Number Placeholder 3"/>
+          <p:cNvPr id="917500280" name="Slide Number Placeholder 3"/>
           <p:cNvSpPr>
             <a:spLocks noGrp="1"/>
           </p:cNvSpPr>
@@ -687,7 +963,7 @@
       </p:grpSpPr>
       <p:sp>
         <p:nvSpPr>
-          <p:cNvPr id="903353342" name="Slide Image Placeholder 1"/>
+          <p:cNvPr id="1802872693" name="Slide Image Placeholder 1"/>
           <p:cNvSpPr>
             <a:spLocks noChangeAspect="1" noGrp="1" noRot="1"/>
           </p:cNvSpPr>
@@ -699,7 +975,7 @@
       </p:sp>
       <p:sp>
         <p:nvSpPr>
-          <p:cNvPr id="1630318219" name="Notes Placeholder 2"/>
+          <p:cNvPr id="674082157" name="Notes Placeholder 2"/>
           <p:cNvSpPr>
             <a:spLocks noGrp="1"/>
           </p:cNvSpPr>
@@ -721,7 +997,7 @@
       </p:sp>
       <p:sp>
         <p:nvSpPr>
-          <p:cNvPr id="1566126721" name="Slide Number Placeholder 3"/>
+          <p:cNvPr id="1623866983" name="Slide Number Placeholder 3"/>
           <p:cNvSpPr>
             <a:spLocks noGrp="1"/>
           </p:cNvSpPr>
@@ -772,7 +1048,7 @@
       </p:grpSpPr>
       <p:sp>
         <p:nvSpPr>
-          <p:cNvPr id="209091067" name="Slide Image Placeholder 1"/>
+          <p:cNvPr id="1884681035" name="Slide Image Placeholder 1"/>
           <p:cNvSpPr>
             <a:spLocks noChangeAspect="1" noGrp="1" noRot="1"/>
           </p:cNvSpPr>
@@ -784,7 +1060,7 @@
       </p:sp>
       <p:sp>
         <p:nvSpPr>
-          <p:cNvPr id="1049321311" name="Notes Placeholder 2"/>
+          <p:cNvPr id="1232315033" name="Notes Placeholder 2"/>
           <p:cNvSpPr>
             <a:spLocks noGrp="1"/>
           </p:cNvSpPr>
@@ -806,7 +1082,7 @@
       </p:sp>
       <p:sp>
         <p:nvSpPr>
-          <p:cNvPr id="1573553245" name="Slide Number Placeholder 3"/>
+          <p:cNvPr id="1606916827" name="Slide Number Placeholder 3"/>
           <p:cNvSpPr>
             <a:spLocks noGrp="1"/>
           </p:cNvSpPr>
@@ -857,7 +1133,7 @@
       </p:grpSpPr>
       <p:sp>
         <p:nvSpPr>
-          <p:cNvPr id="1195364731" name="Slide Image Placeholder 1"/>
+          <p:cNvPr id="46362586" name="Slide Image Placeholder 1"/>
           <p:cNvSpPr>
             <a:spLocks noChangeAspect="1" noGrp="1" noRot="1"/>
           </p:cNvSpPr>
@@ -869,7 +1145,7 @@
       </p:sp>
       <p:sp>
         <p:nvSpPr>
-          <p:cNvPr id="32560299" name="Notes Placeholder 2"/>
+          <p:cNvPr id="1321213556" name="Notes Placeholder 2"/>
           <p:cNvSpPr>
             <a:spLocks noGrp="1"/>
           </p:cNvSpPr>
@@ -891,7 +1167,7 @@
       </p:sp>
       <p:sp>
         <p:nvSpPr>
-          <p:cNvPr id="1319718078" name="Slide Number Placeholder 3"/>
+          <p:cNvPr id="1085766808" name="Slide Number Placeholder 3"/>
           <p:cNvSpPr>
             <a:spLocks noGrp="1"/>
           </p:cNvSpPr>
@@ -942,7 +1218,7 @@
       </p:grpSpPr>
       <p:sp>
         <p:nvSpPr>
-          <p:cNvPr id="1387332819" name="Slide Image Placeholder 1"/>
+          <p:cNvPr id="1476715194" name="Slide Image Placeholder 1"/>
           <p:cNvSpPr>
             <a:spLocks noChangeAspect="1" noGrp="1" noRot="1"/>
           </p:cNvSpPr>
@@ -954,7 +1230,7 @@
       </p:sp>
       <p:sp>
         <p:nvSpPr>
-          <p:cNvPr id="1074250308" name="Notes Placeholder 2"/>
+          <p:cNvPr id="1254638864" name="Notes Placeholder 2"/>
           <p:cNvSpPr>
             <a:spLocks noGrp="1"/>
           </p:cNvSpPr>
@@ -976,7 +1252,7 @@
       </p:sp>
       <p:sp>
         <p:nvSpPr>
-          <p:cNvPr id="488472410" name="Slide Number Placeholder 3"/>
+          <p:cNvPr id="1335885569" name="Slide Number Placeholder 3"/>
           <p:cNvSpPr>
             <a:spLocks noGrp="1"/>
           </p:cNvSpPr>
@@ -1027,7 +1303,7 @@
       </p:grpSpPr>
       <p:sp>
         <p:nvSpPr>
-          <p:cNvPr id="816500414" name="Slide Image Placeholder 1"/>
+          <p:cNvPr id="588945216" name="Slide Image Placeholder 1"/>
           <p:cNvSpPr>
             <a:spLocks noChangeAspect="1" noGrp="1" noRot="1"/>
           </p:cNvSpPr>
@@ -1039,7 +1315,7 @@
       </p:sp>
       <p:sp>
         <p:nvSpPr>
-          <p:cNvPr id="406529995" name="Notes Placeholder 2"/>
+          <p:cNvPr id="1314490418" name="Notes Placeholder 2"/>
           <p:cNvSpPr>
             <a:spLocks noGrp="1"/>
           </p:cNvSpPr>
@@ -1061,7 +1337,7 @@
       </p:sp>
       <p:sp>
         <p:nvSpPr>
-          <p:cNvPr id="330512381" name="Slide Number Placeholder 3"/>
+          <p:cNvPr id="1207404741" name="Slide Number Placeholder 3"/>
           <p:cNvSpPr>
             <a:spLocks noGrp="1"/>
           </p:cNvSpPr>
@@ -1112,7 +1388,7 @@
       </p:grpSpPr>
       <p:sp>
         <p:nvSpPr>
-          <p:cNvPr id="866668698" name="Slide Image Placeholder 1"/>
+          <p:cNvPr id="2009097908" name="Slide Image Placeholder 1"/>
           <p:cNvSpPr>
             <a:spLocks noChangeAspect="1" noGrp="1" noRot="1"/>
           </p:cNvSpPr>
@@ -1124,7 +1400,7 @@
       </p:sp>
       <p:sp>
         <p:nvSpPr>
-          <p:cNvPr id="2010899150" name="Notes Placeholder 2"/>
+          <p:cNvPr id="11270481" name="Notes Placeholder 2"/>
           <p:cNvSpPr>
             <a:spLocks noGrp="1"/>
           </p:cNvSpPr>
@@ -1146,7 +1422,7 @@
       </p:sp>
       <p:sp>
         <p:nvSpPr>
-          <p:cNvPr id="1571960396" name="Slide Number Placeholder 3"/>
+          <p:cNvPr id="272092279" name="Slide Number Placeholder 3"/>
           <p:cNvSpPr>
             <a:spLocks noGrp="1"/>
           </p:cNvSpPr>
@@ -1197,7 +1473,7 @@
       </p:grpSpPr>
       <p:sp>
         <p:nvSpPr>
-          <p:cNvPr id="245553608" name="Slide Image Placeholder 1"/>
+          <p:cNvPr id="1949798686" name="Slide Image Placeholder 1"/>
           <p:cNvSpPr>
             <a:spLocks noChangeAspect="1" noGrp="1" noRot="1"/>
           </p:cNvSpPr>
@@ -1209,7 +1485,7 @@
       </p:sp>
       <p:sp>
         <p:nvSpPr>
-          <p:cNvPr id="755334815" name="Notes Placeholder 2"/>
+          <p:cNvPr id="523295485" name="Notes Placeholder 2"/>
           <p:cNvSpPr>
             <a:spLocks noGrp="1"/>
           </p:cNvSpPr>
@@ -1231,7 +1507,7 @@
       </p:sp>
       <p:sp>
         <p:nvSpPr>
-          <p:cNvPr id="1091391081" name="Slide Number Placeholder 3"/>
+          <p:cNvPr id="880832283" name="Slide Number Placeholder 3"/>
           <p:cNvSpPr>
             <a:spLocks noGrp="1"/>
           </p:cNvSpPr>
@@ -1282,7 +1558,7 @@
       </p:grpSpPr>
       <p:sp>
         <p:nvSpPr>
-          <p:cNvPr id="2128484596" name="Slide Image Placeholder 1"/>
+          <p:cNvPr id="1329736853" name="Slide Image Placeholder 1"/>
           <p:cNvSpPr>
             <a:spLocks noChangeAspect="1" noGrp="1" noRot="1"/>
           </p:cNvSpPr>
@@ -1294,7 +1570,7 @@
       </p:sp>
       <p:sp>
         <p:nvSpPr>
-          <p:cNvPr id="1964816182" name="Notes Placeholder 2"/>
+          <p:cNvPr id="1972648332" name="Notes Placeholder 2"/>
           <p:cNvSpPr>
             <a:spLocks noGrp="1"/>
           </p:cNvSpPr>
@@ -1316,7 +1592,7 @@
       </p:sp>
       <p:sp>
         <p:nvSpPr>
-          <p:cNvPr id="1977112393" name="Slide Number Placeholder 3"/>
+          <p:cNvPr id="1082747887" name="Slide Number Placeholder 3"/>
           <p:cNvSpPr>
             <a:spLocks noGrp="1"/>
           </p:cNvSpPr>
@@ -1367,7 +1643,7 @@
       </p:grpSpPr>
       <p:sp>
         <p:nvSpPr>
-          <p:cNvPr id="1698628116" name="Slide Image Placeholder 1"/>
+          <p:cNvPr id="1094231523" name="Slide Image Placeholder 1"/>
           <p:cNvSpPr>
             <a:spLocks noChangeAspect="1" noGrp="1" noRot="1"/>
           </p:cNvSpPr>
@@ -1379,7 +1655,7 @@
       </p:sp>
       <p:sp>
         <p:nvSpPr>
-          <p:cNvPr id="1593560299" name="Notes Placeholder 2"/>
+          <p:cNvPr id="1629396721" name="Notes Placeholder 2"/>
           <p:cNvSpPr>
             <a:spLocks noGrp="1"/>
           </p:cNvSpPr>
@@ -1401,7 +1677,7 @@
       </p:sp>
       <p:sp>
         <p:nvSpPr>
-          <p:cNvPr id="1678338695" name="Slide Number Placeholder 3"/>
+          <p:cNvPr id="1005857041" name="Slide Number Placeholder 3"/>
           <p:cNvSpPr>
             <a:spLocks noGrp="1"/>
           </p:cNvSpPr>
@@ -1452,7 +1728,7 @@
       </p:grpSpPr>
       <p:sp>
         <p:nvSpPr>
-          <p:cNvPr id="677839712" name="Slide Image Placeholder 1"/>
+          <p:cNvPr id="976210321" name="Slide Image Placeholder 1"/>
           <p:cNvSpPr>
             <a:spLocks noChangeAspect="1" noGrp="1" noRot="1"/>
           </p:cNvSpPr>
@@ -1464,7 +1740,7 @@
       </p:sp>
       <p:sp>
         <p:nvSpPr>
-          <p:cNvPr id="1147920620" name="Notes Placeholder 2"/>
+          <p:cNvPr id="1819560302" name="Notes Placeholder 2"/>
           <p:cNvSpPr>
             <a:spLocks noGrp="1"/>
           </p:cNvSpPr>
@@ -1480,13 +1756,53 @@
             <a:pPr>
               <a:defRPr/>
             </a:pPr>
+            <a:r>
+              <a:rPr sz="1400"/>
+              <a:t>Thank you, Edoardo.</a:t>
+            </a:r>
+            <a:r>
+              <a:rPr lang="it-IT" sz="1400"/>
+              <a:t> </a:t>
+            </a:r>
+            <a:r>
+              <a:rPr sz="1400"/>
+              <a:t>Now, we will now look at</a:t>
+            </a:r>
+            <a:r>
+              <a:rPr lang="it-IT" sz="1400"/>
+              <a:t> the second block</a:t>
+            </a:r>
+            <a:r>
+              <a:rPr sz="1400"/>
+              <a:t> of our presentation. In this section, I will explain the business components of our system</a:t>
+            </a:r>
+            <a:r>
+              <a:rPr lang="it-IT" sz="1400"/>
+              <a:t>, w</a:t>
+            </a:r>
+            <a:r>
+              <a:rPr lang="it-IT" sz="1400"/>
+              <a:t>e’</a:t>
+            </a:r>
+            <a:r>
+              <a:rPr sz="1400"/>
+              <a:t>ll see who are the main </a:t>
+            </a:r>
+            <a:r>
+              <a:rPr lang="it-IT" sz="1400"/>
+              <a:t>software a</a:t>
+            </a:r>
+            <a:r>
+              <a:rPr sz="1400"/>
+              <a:t>ctors, what responsibilities they have and how our data is structured.</a:t>
+            </a:r>
             <a:endParaRPr lang="en-US"/>
           </a:p>
         </p:txBody>
       </p:sp>
       <p:sp>
         <p:nvSpPr>
-          <p:cNvPr id="435891178" name="Slide Number Placeholder 3"/>
+          <p:cNvPr id="393895242" name="Slide Number Placeholder 3"/>
           <p:cNvSpPr>
             <a:spLocks noGrp="1"/>
           </p:cNvSpPr>
@@ -1537,7 +1853,7 @@
       </p:grpSpPr>
       <p:sp>
         <p:nvSpPr>
-          <p:cNvPr id="1078368908" name="Slide Image Placeholder 1"/>
+          <p:cNvPr id="1680558425" name="Slide Image Placeholder 1"/>
           <p:cNvSpPr>
             <a:spLocks noChangeAspect="1" noGrp="1" noRot="1"/>
           </p:cNvSpPr>
@@ -1549,7 +1865,7 @@
       </p:sp>
       <p:sp>
         <p:nvSpPr>
-          <p:cNvPr id="665071754" name="Notes Placeholder 2"/>
+          <p:cNvPr id="613564763" name="Notes Placeholder 2"/>
           <p:cNvSpPr>
             <a:spLocks noGrp="1"/>
           </p:cNvSpPr>
@@ -1565,13 +1881,305 @@
             <a:pPr>
               <a:defRPr/>
             </a:pPr>
+            <a:r>
+              <a:rPr sz="1400"/>
+              <a:t>On this slide, we have the Service Providers</a:t>
+            </a:r>
+            <a:r>
+              <a:rPr lang="it-IT" sz="1400"/>
+              <a:t> which </a:t>
+            </a:r>
+            <a:r>
+              <a:rPr sz="1400"/>
+              <a:t>are the foundational services of our platform. Each provider is independent</a:t>
+            </a:r>
+            <a:r>
+              <a:rPr lang="it-IT" sz="1400"/>
+              <a:t> from the others</a:t>
+            </a:r>
+            <a:r>
+              <a:rPr sz="1400"/>
+              <a:t>, manages its own specific da</a:t>
+            </a:r>
+            <a:r>
+              <a:rPr lang="it-IT" sz="1400"/>
+              <a:t>ta </a:t>
+            </a:r>
+            <a:r>
+              <a:rPr sz="1400"/>
+              <a:t>and has its own separate database to ensure decoupling.</a:t>
+            </a:r>
+            <a:endParaRPr sz="1400"/>
+          </a:p>
+          <a:p>
+            <a:pPr>
+              <a:defRPr/>
+            </a:pPr>
+            <a:r>
+              <a:rPr sz="1400"/>
+              <a:t>We have </a:t>
+            </a:r>
+            <a:r>
+              <a:rPr lang="it-IT" sz="1400" b="1"/>
+              <a:t>4</a:t>
+            </a:r>
+            <a:r>
+              <a:rPr sz="1400" b="1"/>
+              <a:t> providers</a:t>
+            </a:r>
+            <a:r>
+              <a:rPr sz="1400"/>
+              <a:t> in total:</a:t>
+            </a:r>
+            <a:endParaRPr/>
+          </a:p>
+          <a:p>
+            <a:pPr marL="239821" indent="-239821">
+              <a:buFont typeface="Arial"/>
+              <a:buChar char="•"/>
+              <a:defRPr/>
+            </a:pPr>
+            <a:r>
+              <a:rPr sz="1400"/>
+              <a:t>First</a:t>
+            </a:r>
+            <a:r>
+              <a:rPr lang="it-IT" sz="1400"/>
+              <a:t> we have</a:t>
+            </a:r>
+            <a:r>
+              <a:rPr sz="1400"/>
+              <a:t> the </a:t>
+            </a:r>
+            <a:r>
+              <a:rPr sz="1400" b="1"/>
+              <a:t>Anagrafe Service</a:t>
+            </a:r>
+            <a:r>
+              <a:rPr lang="it-IT" sz="1400"/>
+              <a:t>, which </a:t>
+            </a:r>
+            <a:r>
+              <a:rPr sz="1400"/>
+              <a:t>simulates an external registry</a:t>
+            </a:r>
+            <a:r>
+              <a:rPr lang="it-IT" sz="1400"/>
+              <a:t> </a:t>
+            </a:r>
+            <a:r>
+              <a:rPr sz="1400"/>
+              <a:t>manag</a:t>
+            </a:r>
+            <a:r>
+              <a:rPr lang="it-IT" sz="1400"/>
+              <a:t>ing</a:t>
+            </a:r>
+            <a:r>
+              <a:rPr sz="1400"/>
+              <a:t> patient details, medical history and allergies. Because it simulates a real-world legacy system, it uses the SOAP protocol instead of the more modern REST</a:t>
+            </a:r>
+            <a:r>
+              <a:rPr lang="it-IT" sz="1400"/>
+              <a:t> to send its data.</a:t>
+            </a:r>
+            <a:endParaRPr sz="1400"/>
+          </a:p>
+          <a:p>
+            <a:pPr marL="239821" indent="-239821">
+              <a:buFont typeface="Arial"/>
+              <a:buChar char="•"/>
+              <a:defRPr/>
+            </a:pPr>
+            <a:r>
+              <a:rPr sz="1400"/>
+              <a:t>Next, we have three modern REST services. </a:t>
+            </a:r>
+            <a:r>
+              <a:rPr lang="it-IT" sz="1400"/>
+              <a:t>Starting from the</a:t>
+            </a:r>
+            <a:r>
+              <a:rPr lang="it-IT" sz="1400"/>
+              <a:t> </a:t>
+            </a:r>
+            <a:r>
+              <a:rPr sz="1400" b="1"/>
+              <a:t>Laboratorio Service</a:t>
+            </a:r>
+            <a:r>
+              <a:rPr sz="1400"/>
+              <a:t> </a:t>
+            </a:r>
+            <a:r>
+              <a:rPr lang="it-IT" sz="1400"/>
+              <a:t>which </a:t>
+            </a:r>
+            <a:r>
+              <a:rPr sz="1400"/>
+              <a:t>handles medical test orders and results. In the real world, processing a biological sample takes time</a:t>
+            </a:r>
+            <a:r>
+              <a:rPr lang="it-IT" sz="1400"/>
+              <a:t>, t</a:t>
+            </a:r>
+            <a:r>
+              <a:rPr sz="1400"/>
+              <a:t>herefore this service works asynchronously</a:t>
+            </a:r>
+            <a:r>
+              <a:rPr lang="it-IT" sz="1400"/>
+              <a:t>, </a:t>
+            </a:r>
+            <a:r>
+              <a:rPr sz="1400"/>
+              <a:t>accept</a:t>
+            </a:r>
+            <a:r>
+              <a:rPr lang="it-IT" sz="1400"/>
+              <a:t>ing </a:t>
+            </a:r>
+            <a:r>
+              <a:rPr sz="1400"/>
+              <a:t>order</a:t>
+            </a:r>
+            <a:r>
+              <a:rPr lang="it-IT" sz="1400"/>
+              <a:t>s</a:t>
+            </a:r>
+            <a:r>
+              <a:rPr sz="1400"/>
+              <a:t> immediatel</a:t>
+            </a:r>
+            <a:r>
+              <a:rPr lang="it-IT" sz="1400"/>
+              <a:t>y</a:t>
+            </a:r>
+            <a:r>
+              <a:rPr sz="1400"/>
+              <a:t> and deliver</a:t>
+            </a:r>
+            <a:r>
+              <a:rPr lang="it-IT" sz="1400"/>
+              <a:t>ing</a:t>
+            </a:r>
+            <a:r>
+              <a:rPr sz="1400"/>
+              <a:t> the results</a:t>
+            </a:r>
+            <a:r>
+              <a:rPr lang="it-IT" sz="1400"/>
+              <a:t> at a</a:t>
+            </a:r>
+            <a:r>
+              <a:rPr sz="1400"/>
+              <a:t> later</a:t>
+            </a:r>
+            <a:r>
+              <a:rPr lang="it-IT" sz="1400"/>
+              <a:t> time</a:t>
+            </a:r>
+            <a:r>
+              <a:rPr sz="1400"/>
+              <a:t>.</a:t>
+            </a:r>
+            <a:endParaRPr/>
+          </a:p>
+          <a:p>
+            <a:pPr marL="239821" indent="-239821">
+              <a:buFont typeface="Arial"/>
+              <a:buChar char="•"/>
+              <a:defRPr/>
+            </a:pPr>
+            <a:r>
+              <a:rPr sz="1400"/>
+              <a:t>The </a:t>
+            </a:r>
+            <a:r>
+              <a:rPr sz="1400" b="1"/>
+              <a:t>Imaging Service</a:t>
+            </a:r>
+            <a:r>
+              <a:rPr sz="1400"/>
+              <a:t> works exactly the same way</a:t>
+            </a:r>
+            <a:r>
+              <a:rPr lang="it-IT" sz="1400"/>
+              <a:t> as the Laboratorio Service</a:t>
+            </a:r>
+            <a:r>
+              <a:rPr sz="1400"/>
+              <a:t>, but </a:t>
+            </a:r>
+            <a:r>
+              <a:rPr lang="it-IT" sz="1400"/>
+              <a:t>instead it</a:t>
+            </a:r>
+            <a:r>
+              <a:rPr sz="1400"/>
+              <a:t> manages </a:t>
+            </a:r>
+            <a:r>
+              <a:rPr lang="it-IT" sz="1400"/>
+              <a:t>very different data such as </a:t>
+            </a:r>
+            <a:r>
+              <a:rPr sz="1400"/>
+              <a:t>radiology reports</a:t>
+            </a:r>
+            <a:r>
+              <a:rPr lang="it-IT" sz="1400"/>
+              <a:t>, X-Rays and MRI scans.</a:t>
+            </a:r>
+            <a:endParaRPr sz="1400"/>
+          </a:p>
+          <a:p>
+            <a:pPr marL="239821" indent="-239821">
+              <a:buFont typeface="Arial"/>
+              <a:buChar char="•"/>
+              <a:defRPr/>
+            </a:pPr>
+            <a:r>
+              <a:rPr sz="1400"/>
+              <a:t>Finally, the </a:t>
+            </a:r>
+            <a:r>
+              <a:rPr sz="1400" b="1"/>
+              <a:t>Farmacia Service</a:t>
+            </a:r>
+            <a:r>
+              <a:rPr sz="1400"/>
+              <a:t> manages active drug prescriptions and includes a</a:t>
+            </a:r>
+            <a:r>
+              <a:rPr lang="it-IT" sz="1400"/>
+              <a:t>n endpoint </a:t>
+            </a:r>
+            <a:r>
+              <a:rPr sz="1400"/>
+              <a:t>to check for dangerous drug interactions.</a:t>
+            </a:r>
+            <a:endParaRPr/>
+          </a:p>
+          <a:p>
+            <a:pPr>
+              <a:defRPr/>
+            </a:pPr>
+            <a:r>
+              <a:rPr sz="1400"/>
+              <a:t>Now, let’s see how we combine all this information</a:t>
+            </a:r>
+            <a:r>
+              <a:rPr lang="it-IT" sz="1400"/>
+              <a:t>s</a:t>
+            </a:r>
             <a:endParaRPr lang="en-US"/>
           </a:p>
         </p:txBody>
       </p:sp>
       <p:sp>
         <p:nvSpPr>
-          <p:cNvPr id="21859012" name="Slide Number Placeholder 3"/>
+          <p:cNvPr id="1748045876" name="Slide Number Placeholder 3"/>
           <p:cNvSpPr>
             <a:spLocks noGrp="1"/>
           </p:cNvSpPr>
@@ -1622,7 +2230,7 @@
       </p:grpSpPr>
       <p:sp>
         <p:nvSpPr>
-          <p:cNvPr id="1849141129" name="Slide Image Placeholder 1"/>
+          <p:cNvPr id="1428978981" name="Slide Image Placeholder 1"/>
           <p:cNvSpPr>
             <a:spLocks noChangeAspect="1" noGrp="1" noRot="1"/>
           </p:cNvSpPr>
@@ -1634,7 +2242,7 @@
       </p:sp>
       <p:sp>
         <p:nvSpPr>
-          <p:cNvPr id="1449431738" name="Notes Placeholder 2"/>
+          <p:cNvPr id="57913864" name="Notes Placeholder 2"/>
           <p:cNvSpPr>
             <a:spLocks noGrp="1"/>
           </p:cNvSpPr>
@@ -1650,13 +2258,233 @@
             <a:pPr>
               <a:defRPr/>
             </a:pPr>
+            <a:r>
+              <a:rPr lang="it-IT" sz="1400"/>
+              <a:t>Here are </a:t>
+            </a:r>
+            <a:r>
+              <a:rPr lang="it-IT" sz="1400"/>
+              <a:t>the</a:t>
+            </a:r>
+            <a:r>
+              <a:rPr sz="1400"/>
+              <a:t> Service Prosumers</a:t>
+            </a:r>
+            <a:r>
+              <a:rPr lang="it-IT" sz="1400"/>
+              <a:t>, </a:t>
+            </a:r>
+            <a:r>
+              <a:rPr lang="it-IT" sz="1400"/>
+              <a:t>we use them t</a:t>
+            </a:r>
+            <a:r>
+              <a:rPr sz="1400"/>
+              <a:t>o create a complete view for the clinical staff, </a:t>
+            </a:r>
+            <a:r>
+              <a:rPr lang="it-IT" sz="1400"/>
+              <a:t>therefore these</a:t>
+            </a:r>
+            <a:r>
+              <a:rPr sz="1400"/>
+              <a:t> components do not just store data but they consume data from the providers and aggregate it.</a:t>
+            </a:r>
+            <a:endParaRPr sz="1400"/>
+          </a:p>
+          <a:p>
+            <a:pPr marL="239821" indent="-239821">
+              <a:buFont typeface="Arial"/>
+              <a:buChar char="•"/>
+              <a:defRPr/>
+            </a:pPr>
+            <a:r>
+              <a:rPr sz="1400"/>
+              <a:t>The first one is the </a:t>
+            </a:r>
+            <a:r>
+              <a:rPr sz="1400" b="1"/>
+              <a:t>Diagnostic Aggregator</a:t>
+            </a:r>
+            <a:r>
+              <a:rPr lang="it-IT" sz="1400"/>
+              <a:t>, which </a:t>
+            </a:r>
+            <a:r>
+              <a:rPr sz="1400"/>
+              <a:t>communicates with the Laboratorio </a:t>
+            </a:r>
+            <a:r>
+              <a:rPr lang="it-IT" sz="1400"/>
+              <a:t>service </a:t>
+            </a:r>
+            <a:r>
+              <a:rPr sz="1400"/>
+              <a:t>and </a:t>
+            </a:r>
+            <a:r>
+              <a:rPr lang="it-IT" sz="1400"/>
+              <a:t>the </a:t>
+            </a:r>
+            <a:r>
+              <a:rPr sz="1400"/>
+              <a:t>Imaging service. It collects the asynchronous test results and combines them into a single complete Diagnostic Bundle</a:t>
+            </a:r>
+            <a:r>
+              <a:rPr lang="it-IT" sz="1400"/>
+              <a:t>, it can be customized based on the panel value selectable from the index page.</a:t>
+            </a:r>
+            <a:endParaRPr sz="1400"/>
+          </a:p>
+          <a:p>
+            <a:pPr marL="239821" indent="-239821">
+              <a:buFont typeface="Arial"/>
+              <a:buChar char="•"/>
+              <a:defRPr/>
+            </a:pPr>
+            <a:r>
+              <a:rPr sz="1400"/>
+              <a:t>The second one is the </a:t>
+            </a:r>
+            <a:r>
+              <a:rPr sz="1400" b="1"/>
+              <a:t>Clinical Aggregator</a:t>
+            </a:r>
+            <a:r>
+              <a:rPr lang="it-IT" sz="1400"/>
+              <a:t>, which</a:t>
+            </a:r>
+            <a:r>
+              <a:rPr sz="1400"/>
+              <a:t> acts as a technological bridge</a:t>
+            </a:r>
+            <a:r>
+              <a:rPr lang="it-IT" sz="1400"/>
+              <a:t> because i</a:t>
+            </a:r>
+            <a:r>
+              <a:rPr sz="1400"/>
+              <a:t>t talks to </a:t>
+            </a:r>
+            <a:r>
+              <a:rPr lang="it-IT" sz="1400"/>
+              <a:t>both t</a:t>
+            </a:r>
+            <a:r>
+              <a:rPr sz="1400"/>
+              <a:t>he SOAP Anagrafe service and the REST Farmacia service, </a:t>
+            </a:r>
+            <a:r>
+              <a:rPr lang="it-IT" sz="1400"/>
+              <a:t>unifying</a:t>
+            </a:r>
+            <a:r>
+              <a:rPr lang="it-IT" sz="1400"/>
+              <a:t> </a:t>
+            </a:r>
+            <a:r>
+              <a:rPr sz="1400"/>
+              <a:t>the</a:t>
+            </a:r>
+            <a:r>
+              <a:rPr lang="it-IT" sz="1400"/>
+              <a:t>ir</a:t>
+            </a:r>
+            <a:r>
+              <a:rPr sz="1400"/>
+              <a:t> data and return</a:t>
+            </a:r>
+            <a:r>
+              <a:rPr lang="it-IT" sz="1400"/>
+              <a:t>ing</a:t>
+            </a:r>
+            <a:r>
+              <a:rPr sz="1400"/>
+              <a:t> a full Clinical Profile of the patient.</a:t>
+            </a:r>
+            <a:endParaRPr sz="1400"/>
+          </a:p>
+          <a:p>
+            <a:pPr marL="239821" indent="-239821">
+              <a:buFont typeface="Arial"/>
+              <a:buChar char="•"/>
+              <a:defRPr/>
+            </a:pPr>
+            <a:r>
+              <a:rPr sz="1400"/>
+              <a:t>At the very </a:t>
+            </a:r>
+            <a:r>
+              <a:rPr lang="it-IT" sz="1400"/>
+              <a:t>end</a:t>
+            </a:r>
+            <a:r>
+              <a:rPr sz="1400"/>
+              <a:t> we have the </a:t>
+            </a:r>
+            <a:r>
+              <a:rPr sz="1400" b="1"/>
+              <a:t>Care Coordinator</a:t>
+            </a:r>
+            <a:r>
+              <a:rPr lang="it-IT" sz="1400"/>
+              <a:t>, which</a:t>
+            </a:r>
+            <a:r>
+              <a:rPr sz="1400"/>
+              <a:t> is the main orchestrator of our platform. It calls both the Clinical and Diagnostic aggregators in parallel, it waits for both </a:t>
+            </a:r>
+            <a:r>
+              <a:rPr lang="it-IT" sz="1400"/>
+              <a:t>of them t</a:t>
+            </a:r>
+            <a:r>
+              <a:rPr sz="1400"/>
+              <a:t>o finish</a:t>
+            </a:r>
+            <a:r>
+              <a:rPr lang="it-IT" sz="1400"/>
+              <a:t> and then </a:t>
+            </a:r>
+            <a:r>
+              <a:rPr sz="1400"/>
+              <a:t>cross-references all the data</a:t>
+            </a:r>
+            <a:r>
+              <a:rPr lang="it-IT" sz="1400"/>
+              <a:t> </a:t>
+            </a:r>
+            <a:r>
+              <a:rPr sz="1400"/>
+              <a:t>applies </a:t>
+            </a:r>
+            <a:r>
+              <a:rPr lang="it-IT" sz="1400"/>
+              <a:t>its own </a:t>
+            </a:r>
+            <a:r>
+              <a:rPr sz="1400"/>
+              <a:t>business rules to </a:t>
+            </a:r>
+            <a:r>
+              <a:rPr sz="1400"/>
+              <a:t>generate</a:t>
+            </a:r>
+            <a:r>
+              <a:rPr lang="it-IT" sz="1400"/>
+              <a:t> </a:t>
+            </a:r>
+            <a:r>
+              <a:rPr sz="1400"/>
+              <a:t>the final report.</a:t>
+            </a:r>
             <a:endParaRPr lang="en-US"/>
           </a:p>
         </p:txBody>
       </p:sp>
       <p:sp>
         <p:nvSpPr>
-          <p:cNvPr id="1014053192" name="Slide Number Placeholder 3"/>
+          <p:cNvPr id="201728757" name="Slide Number Placeholder 3"/>
           <p:cNvSpPr>
             <a:spLocks noGrp="1"/>
           </p:cNvSpPr>
@@ -2026,7 +2854,7 @@
       </p:grpSpPr>
       <p:sp>
         <p:nvSpPr>
-          <p:cNvPr id="1263609355" name="Shape 0"/>
+          <p:cNvPr id="2070417838" name="Shape 0"/>
           <p:cNvSpPr/>
           <p:nvPr/>
         </p:nvSpPr>
@@ -2056,7 +2884,7 @@
       </p:sp>
       <p:sp>
         <p:nvSpPr>
-          <p:cNvPr id="662459104" name="Text 1"/>
+          <p:cNvPr id="914044834" name="Text 1"/>
           <p:cNvSpPr/>
           <p:nvPr/>
         </p:nvSpPr>
@@ -2096,7 +2924,7 @@
       </p:sp>
       <p:sp>
         <p:nvSpPr>
-          <p:cNvPr id="988031572" name="Text 2"/>
+          <p:cNvPr id="1999010290" name="Text 2"/>
           <p:cNvSpPr/>
           <p:nvPr/>
         </p:nvSpPr>
@@ -2154,7 +2982,7 @@
       </p:sp>
       <p:sp>
         <p:nvSpPr>
-          <p:cNvPr id="1912741677" name="Text 3"/>
+          <p:cNvPr id="1718697966" name="Text 3"/>
           <p:cNvSpPr/>
           <p:nvPr/>
         </p:nvSpPr>
@@ -2194,7 +3022,7 @@
       </p:sp>
       <p:sp>
         <p:nvSpPr>
-          <p:cNvPr id="1598873837" name="Text 4"/>
+          <p:cNvPr id="213551221" name="Text 4"/>
           <p:cNvSpPr/>
           <p:nvPr/>
         </p:nvSpPr>
@@ -2274,7 +3102,7 @@
       </p:grpSpPr>
       <p:sp>
         <p:nvSpPr>
-          <p:cNvPr id="1588246309" name="Text 0"/>
+          <p:cNvPr id="1398045218" name="Text 0"/>
           <p:cNvSpPr/>
           <p:nvPr/>
         </p:nvSpPr>
@@ -2314,7 +3142,7 @@
       </p:sp>
       <p:sp>
         <p:nvSpPr>
-          <p:cNvPr id="1824875483" name="Shape 1"/>
+          <p:cNvPr id="528561758" name="Shape 1"/>
           <p:cNvSpPr/>
           <p:nvPr/>
         </p:nvSpPr>
@@ -2344,7 +3172,7 @@
       </p:sp>
       <p:sp>
         <p:nvSpPr>
-          <p:cNvPr id="232659384" name="Shape 2"/>
+          <p:cNvPr id="672568622" name="Shape 2"/>
           <p:cNvSpPr/>
           <p:nvPr/>
         </p:nvSpPr>
@@ -2379,7 +3207,7 @@
       </p:sp>
       <p:sp>
         <p:nvSpPr>
-          <p:cNvPr id="1729682513" name="Text 3"/>
+          <p:cNvPr id="899474782" name="Text 3"/>
           <p:cNvSpPr/>
           <p:nvPr/>
         </p:nvSpPr>
@@ -2419,7 +3247,7 @@
       </p:sp>
       <p:sp>
         <p:nvSpPr>
-          <p:cNvPr id="34955336" name="Text 4"/>
+          <p:cNvPr id="1179412029" name="Text 4"/>
           <p:cNvSpPr/>
           <p:nvPr/>
         </p:nvSpPr>
@@ -2459,7 +3287,7 @@
       </p:sp>
       <p:sp>
         <p:nvSpPr>
-          <p:cNvPr id="550678214" name="Text 5"/>
+          <p:cNvPr id="1616332113" name="Text 5"/>
           <p:cNvSpPr/>
           <p:nvPr/>
         </p:nvSpPr>
@@ -2664,7 +3492,7 @@
       </p:sp>
       <p:sp>
         <p:nvSpPr>
-          <p:cNvPr id="187787055" name="Text 6"/>
+          <p:cNvPr id="1198445622" name="Text 6"/>
           <p:cNvSpPr/>
           <p:nvPr/>
         </p:nvSpPr>
@@ -2704,7 +3532,7 @@
       </p:sp>
       <p:sp>
         <p:nvSpPr>
-          <p:cNvPr id="749895548" name="Text 7"/>
+          <p:cNvPr id="982274871" name="Text 7"/>
           <p:cNvSpPr/>
           <p:nvPr/>
         </p:nvSpPr>
@@ -2799,7 +3627,7 @@
       </p:sp>
       <p:sp>
         <p:nvSpPr>
-          <p:cNvPr id="1936635098" name="Text 8"/>
+          <p:cNvPr id="1804010435" name="Text 8"/>
           <p:cNvSpPr/>
           <p:nvPr/>
         </p:nvSpPr>
@@ -2839,7 +3667,7 @@
       </p:sp>
       <p:sp>
         <p:nvSpPr>
-          <p:cNvPr id="827034460" name="Text 9"/>
+          <p:cNvPr id="1876287052" name="Text 9"/>
           <p:cNvSpPr/>
           <p:nvPr/>
         </p:nvSpPr>
@@ -2912,7 +3740,7 @@
       </p:sp>
       <p:sp>
         <p:nvSpPr>
-          <p:cNvPr id="481102714" name="Text 10"/>
+          <p:cNvPr id="1800540494" name="Text 10"/>
           <p:cNvSpPr/>
           <p:nvPr/>
         </p:nvSpPr>
@@ -2952,7 +3780,7 @@
       </p:sp>
       <p:sp>
         <p:nvSpPr>
-          <p:cNvPr id="1121331854" name="Text 11"/>
+          <p:cNvPr id="970207017" name="Text 11"/>
           <p:cNvSpPr/>
           <p:nvPr/>
         </p:nvSpPr>
@@ -3102,7 +3930,7 @@
       </p:sp>
       <p:sp>
         <p:nvSpPr>
-          <p:cNvPr id="1412929629" name="Text 12"/>
+          <p:cNvPr id="984372768" name="Text 12"/>
           <p:cNvSpPr/>
           <p:nvPr/>
         </p:nvSpPr>
@@ -3164,7 +3992,7 @@
       </p:sp>
       <p:sp>
         <p:nvSpPr>
-          <p:cNvPr id="857153640" name="Text 13"/>
+          <p:cNvPr id="1047005773" name="Text 13"/>
           <p:cNvSpPr/>
           <p:nvPr/>
         </p:nvSpPr>
@@ -3344,7 +4172,7 @@
       </p:sp>
       <p:sp>
         <p:nvSpPr>
-          <p:cNvPr id="1073115331" name="Text 14"/>
+          <p:cNvPr id="2101665279" name="Text 14"/>
           <p:cNvSpPr/>
           <p:nvPr/>
         </p:nvSpPr>
@@ -3384,7 +4212,7 @@
       </p:sp>
       <p:sp>
         <p:nvSpPr>
-          <p:cNvPr id="1600018877" name="Text 15"/>
+          <p:cNvPr id="898521247" name="Text 15"/>
           <p:cNvSpPr/>
           <p:nvPr/>
         </p:nvSpPr>
@@ -3512,7 +4340,7 @@
       </p:sp>
       <p:sp>
         <p:nvSpPr>
-          <p:cNvPr id="1272750507" name="Text 16"/>
+          <p:cNvPr id="1310731210" name="Text 16"/>
           <p:cNvSpPr/>
           <p:nvPr/>
         </p:nvSpPr>
@@ -3574,7 +4402,7 @@
       </p:sp>
       <p:sp>
         <p:nvSpPr>
-          <p:cNvPr id="1749162605" name="Text 17"/>
+          <p:cNvPr id="1312369041" name="Text 17"/>
           <p:cNvSpPr/>
           <p:nvPr/>
         </p:nvSpPr>
@@ -3768,7 +4596,7 @@
       </p:sp>
       <p:sp>
         <p:nvSpPr>
-          <p:cNvPr id="219959867" name="Shape 18"/>
+          <p:cNvPr id="82846198" name="Shape 18"/>
           <p:cNvSpPr/>
           <p:nvPr/>
         </p:nvSpPr>
@@ -3803,7 +4631,7 @@
       </p:sp>
       <p:sp>
         <p:nvSpPr>
-          <p:cNvPr id="1063126096" name="Text 19"/>
+          <p:cNvPr id="114130720" name="Text 19"/>
           <p:cNvSpPr/>
           <p:nvPr/>
         </p:nvSpPr>
@@ -3843,7 +4671,7 @@
       </p:sp>
       <p:sp>
         <p:nvSpPr>
-          <p:cNvPr id="692715945" name="Text 20"/>
+          <p:cNvPr id="2094211923" name="Text 20"/>
           <p:cNvSpPr/>
           <p:nvPr/>
         </p:nvSpPr>
@@ -3905,7 +4733,7 @@
       </p:sp>
       <p:sp>
         <p:nvSpPr>
-          <p:cNvPr id="1066592790" name="Text 21"/>
+          <p:cNvPr id="2136243752" name="Text 21"/>
           <p:cNvSpPr/>
           <p:nvPr/>
         </p:nvSpPr>
@@ -4011,13 +4839,13 @@
       </p:sp>
       <p:sp>
         <p:nvSpPr>
-          <p:cNvPr id="2079416436" name="Text 22"/>
-          <p:cNvSpPr/>
-          <p:nvPr/>
-        </p:nvSpPr>
-        <p:spPr bwMode="auto">
-          <a:xfrm>
-            <a:off x="4937760" y="2551174"/>
+          <p:cNvPr id="1364632384" name="Text 22"/>
+          <p:cNvSpPr/>
+          <p:nvPr/>
+        </p:nvSpPr>
+        <p:spPr bwMode="auto">
+          <a:xfrm>
+            <a:off x="4937760" y="2551173"/>
             <a:ext cx="1417320" cy="256032"/>
           </a:xfrm>
           <a:prstGeom prst="rect">
@@ -4073,7 +4901,7 @@
       </p:sp>
       <p:sp>
         <p:nvSpPr>
-          <p:cNvPr id="1978049385" name="Text 23"/>
+          <p:cNvPr id="573045302" name="Text 23"/>
           <p:cNvSpPr/>
           <p:nvPr/>
         </p:nvSpPr>
@@ -4245,7 +5073,7 @@
       </p:sp>
       <p:sp>
         <p:nvSpPr>
-          <p:cNvPr id="1843961760" name="Text 24"/>
+          <p:cNvPr id="1593153168" name="Text 24"/>
           <p:cNvSpPr/>
           <p:nvPr/>
         </p:nvSpPr>
@@ -4307,7 +5135,7 @@
       </p:sp>
       <p:sp>
         <p:nvSpPr>
-          <p:cNvPr id="1094088269" name="Text 25"/>
+          <p:cNvPr id="1009765390" name="Text 25"/>
           <p:cNvSpPr/>
           <p:nvPr/>
         </p:nvSpPr>
@@ -4472,7 +5300,7 @@
       </p:sp>
       <p:sp>
         <p:nvSpPr>
-          <p:cNvPr id="1474400512" name="Text 26"/>
+          <p:cNvPr id="1139423510" name="Text 26"/>
           <p:cNvSpPr/>
           <p:nvPr/>
         </p:nvSpPr>
@@ -4534,7 +5362,7 @@
       </p:sp>
       <p:sp>
         <p:nvSpPr>
-          <p:cNvPr id="678084511" name="Text 27"/>
+          <p:cNvPr id="263103992" name="Text 27"/>
           <p:cNvSpPr/>
           <p:nvPr/>
         </p:nvSpPr>
@@ -4896,7 +5724,7 @@
       </p:grpSpPr>
       <p:sp>
         <p:nvSpPr>
-          <p:cNvPr id="2055134899" name="Text 0"/>
+          <p:cNvPr id="1562884865" name="Text 0"/>
           <p:cNvSpPr/>
           <p:nvPr/>
         </p:nvSpPr>
@@ -4958,7 +5786,7 @@
       </p:sp>
       <p:sp>
         <p:nvSpPr>
-          <p:cNvPr id="1869229557" name="Text 1"/>
+          <p:cNvPr id="2011369957" name="Text 1"/>
           <p:cNvSpPr/>
           <p:nvPr/>
         </p:nvSpPr>
@@ -4987,7 +5815,7 @@
       </p:sp>
       <p:sp>
         <p:nvSpPr>
-          <p:cNvPr id="933419180" name="Text 2"/>
+          <p:cNvPr id="354141629" name="Text 2"/>
           <p:cNvSpPr/>
           <p:nvPr/>
         </p:nvSpPr>
@@ -5016,7 +5844,7 @@
       </p:sp>
       <p:sp>
         <p:nvSpPr>
-          <p:cNvPr id="2048996188" name="Text 1"/>
+          <p:cNvPr id="979448960" name="Text 1"/>
           <p:cNvSpPr/>
           <p:nvPr/>
         </p:nvSpPr>
@@ -5096,7 +5924,7 @@
       </p:grpSpPr>
       <p:sp>
         <p:nvSpPr>
-          <p:cNvPr id="1056757296" name="Text 0"/>
+          <p:cNvPr id="441270449" name="Text 0"/>
           <p:cNvSpPr/>
           <p:nvPr/>
         </p:nvSpPr>
@@ -5136,7 +5964,7 @@
       </p:sp>
       <p:sp>
         <p:nvSpPr>
-          <p:cNvPr id="1195601032" name="Shape 1"/>
+          <p:cNvPr id="239086865" name="Shape 1"/>
           <p:cNvSpPr/>
           <p:nvPr/>
         </p:nvSpPr>
@@ -5166,7 +5994,7 @@
       </p:sp>
       <p:sp>
         <p:nvSpPr>
-          <p:cNvPr id="623881914" name="Shape 2"/>
+          <p:cNvPr id="1943988369" name="Shape 2"/>
           <p:cNvSpPr/>
           <p:nvPr/>
         </p:nvSpPr>
@@ -5201,7 +6029,7 @@
       </p:sp>
       <p:sp>
         <p:nvSpPr>
-          <p:cNvPr id="20248635" name="Text 3"/>
+          <p:cNvPr id="211753355" name="Text 3"/>
           <p:cNvSpPr/>
           <p:nvPr/>
         </p:nvSpPr>
@@ -5241,7 +6069,7 @@
       </p:sp>
       <p:sp>
         <p:nvSpPr>
-          <p:cNvPr id="1120712151" name="Shape 4"/>
+          <p:cNvPr id="743039172" name="Shape 4"/>
           <p:cNvSpPr/>
           <p:nvPr/>
         </p:nvSpPr>
@@ -5276,7 +6104,7 @@
       </p:sp>
       <p:sp>
         <p:nvSpPr>
-          <p:cNvPr id="1729867459" name="Text 5"/>
+          <p:cNvPr id="1836545836" name="Text 5"/>
           <p:cNvSpPr/>
           <p:nvPr/>
         </p:nvSpPr>
@@ -5316,7 +6144,7 @@
       </p:sp>
       <p:sp>
         <p:nvSpPr>
-          <p:cNvPr id="1236913493" name="Shape 6"/>
+          <p:cNvPr id="1556289881" name="Shape 6"/>
           <p:cNvSpPr/>
           <p:nvPr/>
         </p:nvSpPr>
@@ -5351,7 +6179,7 @@
       </p:sp>
       <p:sp>
         <p:nvSpPr>
-          <p:cNvPr id="953098044" name="Text 7"/>
+          <p:cNvPr id="910579087" name="Text 7"/>
           <p:cNvSpPr/>
           <p:nvPr/>
         </p:nvSpPr>
@@ -5391,7 +6219,7 @@
       </p:sp>
       <p:sp>
         <p:nvSpPr>
-          <p:cNvPr id="1599030380" name="Shape 8"/>
+          <p:cNvPr id="1966812803" name="Shape 8"/>
           <p:cNvSpPr/>
           <p:nvPr/>
         </p:nvSpPr>
@@ -5426,7 +6254,7 @@
       </p:sp>
       <p:sp>
         <p:nvSpPr>
-          <p:cNvPr id="976743476" name="Text 9"/>
+          <p:cNvPr id="330468040" name="Text 9"/>
           <p:cNvSpPr/>
           <p:nvPr/>
         </p:nvSpPr>
@@ -5466,7 +6294,7 @@
       </p:sp>
       <p:sp>
         <p:nvSpPr>
-          <p:cNvPr id="646209530" name="Shape 10"/>
+          <p:cNvPr id="757610092" name="Shape 10"/>
           <p:cNvSpPr/>
           <p:nvPr/>
         </p:nvSpPr>
@@ -5501,7 +6329,7 @@
       </p:sp>
       <p:sp>
         <p:nvSpPr>
-          <p:cNvPr id="444883570" name="Text 11"/>
+          <p:cNvPr id="854248781" name="Text 11"/>
           <p:cNvSpPr/>
           <p:nvPr/>
         </p:nvSpPr>
@@ -5541,7 +6369,7 @@
       </p:sp>
       <p:sp>
         <p:nvSpPr>
-          <p:cNvPr id="539506443" name="Shape 12"/>
+          <p:cNvPr id="732765097" name="Shape 12"/>
           <p:cNvSpPr/>
           <p:nvPr/>
         </p:nvSpPr>
@@ -5576,7 +6404,7 @@
       </p:sp>
       <p:sp>
         <p:nvSpPr>
-          <p:cNvPr id="913983652" name="Text 13"/>
+          <p:cNvPr id="1022694411" name="Text 13"/>
           <p:cNvSpPr/>
           <p:nvPr/>
         </p:nvSpPr>
@@ -5634,7 +6462,7 @@
       </p:sp>
       <p:sp>
         <p:nvSpPr>
-          <p:cNvPr id="2127979057" name="Shape 14"/>
+          <p:cNvPr id="1433185698" name="Shape 14"/>
           <p:cNvSpPr/>
           <p:nvPr/>
         </p:nvSpPr>
@@ -5669,7 +6497,7 @@
       </p:sp>
       <p:sp>
         <p:nvSpPr>
-          <p:cNvPr id="1698662191" name="Text 15"/>
+          <p:cNvPr id="1301922626" name="Text 15"/>
           <p:cNvSpPr/>
           <p:nvPr/>
         </p:nvSpPr>
@@ -5727,7 +6555,7 @@
       </p:sp>
       <p:sp>
         <p:nvSpPr>
-          <p:cNvPr id="947104760" name="Shape 16"/>
+          <p:cNvPr id="600438132" name="Shape 16"/>
           <p:cNvSpPr/>
           <p:nvPr/>
         </p:nvSpPr>
@@ -5762,7 +6590,7 @@
       </p:sp>
       <p:sp>
         <p:nvSpPr>
-          <p:cNvPr id="1829544700" name="Text 17"/>
+          <p:cNvPr id="976313300" name="Text 17"/>
           <p:cNvSpPr/>
           <p:nvPr/>
         </p:nvSpPr>
@@ -5820,7 +6648,7 @@
       </p:sp>
       <p:sp>
         <p:nvSpPr>
-          <p:cNvPr id="1801666776" name="Shape 18"/>
+          <p:cNvPr id="541108036" name="Shape 18"/>
           <p:cNvSpPr/>
           <p:nvPr/>
         </p:nvSpPr>
@@ -5855,7 +6683,7 @@
       </p:sp>
       <p:sp>
         <p:nvSpPr>
-          <p:cNvPr id="403445539" name="Text 19"/>
+          <p:cNvPr id="1644156800" name="Text 19"/>
           <p:cNvSpPr/>
           <p:nvPr/>
         </p:nvSpPr>
@@ -5895,7 +6723,7 @@
       </p:sp>
       <p:sp>
         <p:nvSpPr>
-          <p:cNvPr id="1194113241" name="Shape 20"/>
+          <p:cNvPr id="1614775461" name="Shape 20"/>
           <p:cNvSpPr/>
           <p:nvPr/>
         </p:nvSpPr>
@@ -5930,7 +6758,7 @@
       </p:sp>
       <p:sp>
         <p:nvSpPr>
-          <p:cNvPr id="219439261" name="Text 21"/>
+          <p:cNvPr id="642527269" name="Text 21"/>
           <p:cNvSpPr/>
           <p:nvPr/>
         </p:nvSpPr>
@@ -5988,7 +6816,7 @@
       </p:sp>
       <p:sp>
         <p:nvSpPr>
-          <p:cNvPr id="1291029697" name="Shape 22"/>
+          <p:cNvPr id="451656741" name="Shape 22"/>
           <p:cNvSpPr/>
           <p:nvPr/>
         </p:nvSpPr>
@@ -6023,7 +6851,7 @@
       </p:sp>
       <p:sp>
         <p:nvSpPr>
-          <p:cNvPr id="2052561001" name="Text 23"/>
+          <p:cNvPr id="898853599" name="Text 23"/>
           <p:cNvSpPr/>
           <p:nvPr/>
         </p:nvSpPr>
@@ -6081,7 +6909,7 @@
       </p:sp>
       <p:sp>
         <p:nvSpPr>
-          <p:cNvPr id="21751088" name="Shape 24"/>
+          <p:cNvPr id="1850147867" name="Shape 24"/>
           <p:cNvSpPr/>
           <p:nvPr/>
         </p:nvSpPr>
@@ -6116,7 +6944,7 @@
       </p:sp>
       <p:sp>
         <p:nvSpPr>
-          <p:cNvPr id="575292821" name="Text 25"/>
+          <p:cNvPr id="519393112" name="Text 25"/>
           <p:cNvSpPr/>
           <p:nvPr/>
         </p:nvSpPr>
@@ -6174,7 +7002,7 @@
       </p:sp>
       <p:sp>
         <p:nvSpPr>
-          <p:cNvPr id="1078358900" name="Shape 26"/>
+          <p:cNvPr id="786489560" name="Shape 26"/>
           <p:cNvSpPr/>
           <p:nvPr/>
         </p:nvSpPr>
@@ -6209,7 +7037,7 @@
       </p:sp>
       <p:sp>
         <p:nvSpPr>
-          <p:cNvPr id="1888473139" name="Text 27"/>
+          <p:cNvPr id="1275470612" name="Text 27"/>
           <p:cNvSpPr/>
           <p:nvPr/>
         </p:nvSpPr>
@@ -6249,7 +7077,7 @@
       </p:sp>
       <p:sp>
         <p:nvSpPr>
-          <p:cNvPr id="1179105899" name="Shape 28"/>
+          <p:cNvPr id="5613338" name="Shape 28"/>
           <p:cNvSpPr/>
           <p:nvPr/>
         </p:nvSpPr>
@@ -6284,7 +7112,7 @@
       </p:sp>
       <p:sp>
         <p:nvSpPr>
-          <p:cNvPr id="458685782" name="Text 29"/>
+          <p:cNvPr id="2093359866" name="Text 29"/>
           <p:cNvSpPr/>
           <p:nvPr/>
         </p:nvSpPr>
@@ -6342,7 +7170,7 @@
       </p:sp>
       <p:sp>
         <p:nvSpPr>
-          <p:cNvPr id="1664567122" name="Shape 30"/>
+          <p:cNvPr id="1365823250" name="Shape 30"/>
           <p:cNvSpPr/>
           <p:nvPr/>
         </p:nvSpPr>
@@ -6377,7 +7205,7 @@
       </p:sp>
       <p:sp>
         <p:nvSpPr>
-          <p:cNvPr id="1109717894" name="Text 31"/>
+          <p:cNvPr id="1209187585" name="Text 31"/>
           <p:cNvSpPr/>
           <p:nvPr/>
         </p:nvSpPr>
@@ -6435,7 +7263,7 @@
       </p:sp>
       <p:sp>
         <p:nvSpPr>
-          <p:cNvPr id="1921411719" name="Shape 32"/>
+          <p:cNvPr id="1187795662" name="Shape 32"/>
           <p:cNvSpPr/>
           <p:nvPr/>
         </p:nvSpPr>
@@ -6470,7 +7298,7 @@
       </p:sp>
       <p:sp>
         <p:nvSpPr>
-          <p:cNvPr id="1731122928" name="Text 33"/>
+          <p:cNvPr id="111568521" name="Text 33"/>
           <p:cNvSpPr/>
           <p:nvPr/>
         </p:nvSpPr>
@@ -6528,7 +7356,7 @@
       </p:sp>
       <p:sp>
         <p:nvSpPr>
-          <p:cNvPr id="997138386" name="Shape 34"/>
+          <p:cNvPr id="2142760624" name="Shape 34"/>
           <p:cNvSpPr/>
           <p:nvPr/>
         </p:nvSpPr>
@@ -6563,7 +7391,7 @@
       </p:sp>
       <p:sp>
         <p:nvSpPr>
-          <p:cNvPr id="899753875" name="Text 35"/>
+          <p:cNvPr id="469353674" name="Text 35"/>
           <p:cNvSpPr/>
           <p:nvPr/>
         </p:nvSpPr>
@@ -6603,7 +7431,7 @@
       </p:sp>
       <p:sp>
         <p:nvSpPr>
-          <p:cNvPr id="1161603452" name="Shape 36"/>
+          <p:cNvPr id="1322996023" name="Shape 36"/>
           <p:cNvSpPr/>
           <p:nvPr/>
         </p:nvSpPr>
@@ -6638,7 +7466,7 @@
       </p:sp>
       <p:sp>
         <p:nvSpPr>
-          <p:cNvPr id="120198860" name="Text 37"/>
+          <p:cNvPr id="1845894158" name="Text 37"/>
           <p:cNvSpPr/>
           <p:nvPr/>
         </p:nvSpPr>
@@ -6696,7 +7524,7 @@
       </p:sp>
       <p:sp>
         <p:nvSpPr>
-          <p:cNvPr id="293646157" name="Shape 38"/>
+          <p:cNvPr id="113395887" name="Shape 38"/>
           <p:cNvSpPr/>
           <p:nvPr/>
         </p:nvSpPr>
@@ -6731,7 +7559,7 @@
       </p:sp>
       <p:sp>
         <p:nvSpPr>
-          <p:cNvPr id="1918160903" name="Text 39"/>
+          <p:cNvPr id="1887708606" name="Text 39"/>
           <p:cNvSpPr/>
           <p:nvPr/>
         </p:nvSpPr>
@@ -6789,7 +7617,7 @@
       </p:sp>
       <p:sp>
         <p:nvSpPr>
-          <p:cNvPr id="1212730521" name="Shape 40"/>
+          <p:cNvPr id="1204647646" name="Shape 40"/>
           <p:cNvSpPr/>
           <p:nvPr/>
         </p:nvSpPr>
@@ -6824,7 +7652,7 @@
       </p:sp>
       <p:sp>
         <p:nvSpPr>
-          <p:cNvPr id="992854883" name="Text 41"/>
+          <p:cNvPr id="221381015" name="Text 41"/>
           <p:cNvSpPr/>
           <p:nvPr/>
         </p:nvSpPr>
@@ -6915,7 +7743,7 @@
       </p:grpSpPr>
       <p:sp>
         <p:nvSpPr>
-          <p:cNvPr id="1302682028" name="Title"/>
+          <p:cNvPr id="1397286025" name="Title"/>
           <p:cNvSpPr/>
           <p:nvPr/>
         </p:nvSpPr>
@@ -6955,7 +7783,7 @@
       </p:sp>
       <p:sp>
         <p:nvSpPr>
-          <p:cNvPr id="1601214952" name="ScenCard"/>
+          <p:cNvPr id="1421835661" name="ScenCard"/>
           <p:cNvSpPr/>
           <p:nvPr/>
         </p:nvSpPr>
@@ -7047,7 +7875,7 @@
       </p:sp>
       <p:sp>
         <p:nvSpPr>
-          <p:cNvPr id="909134023" name="Bar201"/>
+          <p:cNvPr id="1930392493" name="Bar201"/>
           <p:cNvSpPr/>
           <p:nvPr/>
         </p:nvSpPr>
@@ -7077,7 +7905,7 @@
       </p:sp>
       <p:sp>
         <p:nvSpPr>
-          <p:cNvPr id="1409818390" name="Badge210"/>
+          <p:cNvPr id="129233469" name="Badge210"/>
           <p:cNvSpPr/>
           <p:nvPr/>
         </p:nvSpPr>
@@ -7119,7 +7947,7 @@
       </p:sp>
       <p:sp>
         <p:nvSpPr>
-          <p:cNvPr id="1412116955" name="Badge211"/>
+          <p:cNvPr id="1366409342" name="Badge211"/>
           <p:cNvSpPr/>
           <p:nvPr/>
         </p:nvSpPr>
@@ -7161,7 +7989,7 @@
       </p:sp>
       <p:sp>
         <p:nvSpPr>
-          <p:cNvPr id="585601824" name="Badge212"/>
+          <p:cNvPr id="1214170491" name="Badge212"/>
           <p:cNvSpPr/>
           <p:nvPr/>
         </p:nvSpPr>
@@ -7203,7 +8031,7 @@
       </p:sp>
       <p:sp>
         <p:nvSpPr>
-          <p:cNvPr id="1320170426" name="RepLbl"/>
+          <p:cNvPr id="413471440" name="RepLbl"/>
           <p:cNvSpPr/>
           <p:nvPr/>
         </p:nvSpPr>
@@ -7247,7 +8075,7 @@
       </p:sp>
       <p:sp>
         <p:nvSpPr>
-          <p:cNvPr id="1955280604" name="Bar300"/>
+          <p:cNvPr id="1467829419" name="Bar300"/>
           <p:cNvSpPr/>
           <p:nvPr/>
         </p:nvSpPr>
@@ -7277,7 +8105,7 @@
       </p:sp>
       <p:sp>
         <p:nvSpPr>
-          <p:cNvPr id="960472641" name="Item0"/>
+          <p:cNvPr id="971415296" name="Item0"/>
           <p:cNvSpPr/>
           <p:nvPr/>
         </p:nvSpPr>
@@ -7330,7 +8158,7 @@
       </p:sp>
       <p:sp>
         <p:nvSpPr>
-          <p:cNvPr id="620022881" name="Bar310"/>
+          <p:cNvPr id="1359186866" name="Bar310"/>
           <p:cNvSpPr/>
           <p:nvPr/>
         </p:nvSpPr>
@@ -7360,7 +8188,7 @@
       </p:sp>
       <p:sp>
         <p:nvSpPr>
-          <p:cNvPr id="1723564729" name="Item1"/>
+          <p:cNvPr id="1270941768" name="Item1"/>
           <p:cNvSpPr/>
           <p:nvPr/>
         </p:nvSpPr>
@@ -7413,7 +8241,7 @@
       </p:sp>
       <p:sp>
         <p:nvSpPr>
-          <p:cNvPr id="1141761693" name="Bar320"/>
+          <p:cNvPr id="450975496" name="Bar320"/>
           <p:cNvSpPr/>
           <p:nvPr/>
         </p:nvSpPr>
@@ -7443,7 +8271,7 @@
       </p:sp>
       <p:sp>
         <p:nvSpPr>
-          <p:cNvPr id="1664611480" name="Item2"/>
+          <p:cNvPr id="1209902861" name="Item2"/>
           <p:cNvSpPr/>
           <p:nvPr/>
         </p:nvSpPr>
@@ -7496,7 +8324,7 @@
       </p:sp>
       <p:sp>
         <p:nvSpPr>
-          <p:cNvPr id="829461806" name="Bar330"/>
+          <p:cNvPr id="1988246180" name="Bar330"/>
           <p:cNvSpPr/>
           <p:nvPr/>
         </p:nvSpPr>
@@ -7526,7 +8354,7 @@
       </p:sp>
       <p:sp>
         <p:nvSpPr>
-          <p:cNvPr id="1132983962" name="Item3"/>
+          <p:cNvPr id="418514895" name="Item3"/>
           <p:cNvSpPr/>
           <p:nvPr/>
         </p:nvSpPr>
@@ -7579,7 +8407,7 @@
       </p:sp>
       <p:sp>
         <p:nvSpPr>
-          <p:cNvPr id="1269621806" name="Bar340"/>
+          <p:cNvPr id="1549000662" name="Bar340"/>
           <p:cNvSpPr/>
           <p:nvPr/>
         </p:nvSpPr>
@@ -7609,7 +8437,7 @@
       </p:sp>
       <p:sp>
         <p:nvSpPr>
-          <p:cNvPr id="668685023" name="Item4"/>
+          <p:cNvPr id="1310319022" name="Item4"/>
           <p:cNvSpPr/>
           <p:nvPr/>
         </p:nvSpPr>
@@ -7662,7 +8490,7 @@
       </p:sp>
       <p:sp>
         <p:nvSpPr>
-          <p:cNvPr id="1142343804" name="Bar350"/>
+          <p:cNvPr id="1489279917" name="Bar350"/>
           <p:cNvSpPr/>
           <p:nvPr/>
         </p:nvSpPr>
@@ -7692,7 +8520,7 @@
       </p:sp>
       <p:sp>
         <p:nvSpPr>
-          <p:cNvPr id="1019337209" name="Item5"/>
+          <p:cNvPr id="1242335510" name="Item5"/>
           <p:cNvSpPr/>
           <p:nvPr/>
         </p:nvSpPr>
@@ -7745,7 +8573,7 @@
       </p:sp>
       <p:sp>
         <p:nvSpPr>
-          <p:cNvPr id="594397559" name="Bar360"/>
+          <p:cNvPr id="836103717" name="Bar360"/>
           <p:cNvSpPr/>
           <p:nvPr/>
         </p:nvSpPr>
@@ -7775,7 +8603,7 @@
       </p:sp>
       <p:sp>
         <p:nvSpPr>
-          <p:cNvPr id="1138464183" name="Item6"/>
+          <p:cNvPr id="1364946491" name="Item6"/>
           <p:cNvSpPr/>
           <p:nvPr/>
         </p:nvSpPr>
@@ -7828,7 +8656,7 @@
       </p:sp>
       <p:sp>
         <p:nvSpPr>
-          <p:cNvPr id="1834196050" name="Bar370"/>
+          <p:cNvPr id="1246057316" name="Bar370"/>
           <p:cNvSpPr/>
           <p:nvPr/>
         </p:nvSpPr>
@@ -7858,7 +8686,7 @@
       </p:sp>
       <p:sp>
         <p:nvSpPr>
-          <p:cNvPr id="1794973188" name="Item7"/>
+          <p:cNvPr id="1227247808" name="Item7"/>
           <p:cNvSpPr/>
           <p:nvPr/>
         </p:nvSpPr>
@@ -7911,7 +8739,7 @@
       </p:sp>
       <p:sp>
         <p:nvSpPr>
-          <p:cNvPr id="1675361685" name="Shape 1"/>
+          <p:cNvPr id="476045766" name="Shape 1"/>
           <p:cNvSpPr/>
           <p:nvPr/>
         </p:nvSpPr>
@@ -7974,7 +8802,7 @@
       </p:grpSpPr>
       <p:sp>
         <p:nvSpPr>
-          <p:cNvPr id="1065360871" name="Title"/>
+          <p:cNvPr id="508822546" name="Title"/>
           <p:cNvSpPr/>
           <p:nvPr/>
         </p:nvSpPr>
@@ -8014,7 +8842,7 @@
       </p:sp>
       <p:sp>
         <p:nvSpPr>
-          <p:cNvPr id="738320584" name="Intro"/>
+          <p:cNvPr id="575728984" name="Intro"/>
           <p:cNvSpPr/>
           <p:nvPr/>
         </p:nvSpPr>
@@ -8074,7 +8902,7 @@
       </p:sp>
       <p:sp>
         <p:nvSpPr>
-          <p:cNvPr id="1246954513" name="Bar201"/>
+          <p:cNvPr id="1710733905" name="Bar201"/>
           <p:cNvSpPr/>
           <p:nvPr/>
         </p:nvSpPr>
@@ -8104,7 +8932,7 @@
       </p:sp>
       <p:sp>
         <p:nvSpPr>
-          <p:cNvPr id="2085487342" name="CPLbl"/>
+          <p:cNvPr id="1889445841" name="CPLbl"/>
           <p:cNvSpPr/>
           <p:nvPr/>
         </p:nvSpPr>
@@ -8148,7 +8976,7 @@
       </p:sp>
       <p:sp>
         <p:nvSpPr>
-          <p:cNvPr id="300396354" name="Bar220"/>
+          <p:cNvPr id="2123672444" name="Bar220"/>
           <p:cNvSpPr/>
           <p:nvPr/>
         </p:nvSpPr>
@@ -8178,7 +9006,7 @@
       </p:sp>
       <p:sp>
         <p:nvSpPr>
-          <p:cNvPr id="1038072732" name="CP0"/>
+          <p:cNvPr id="180780339" name="CP0"/>
           <p:cNvSpPr/>
           <p:nvPr/>
         </p:nvSpPr>
@@ -8249,7 +9077,7 @@
       </p:sp>
       <p:sp>
         <p:nvSpPr>
-          <p:cNvPr id="1606292326" name="Bar230"/>
+          <p:cNvPr id="462185069" name="Bar230"/>
           <p:cNvSpPr/>
           <p:nvPr/>
         </p:nvSpPr>
@@ -8279,7 +9107,7 @@
       </p:sp>
       <p:sp>
         <p:nvSpPr>
-          <p:cNvPr id="264389041" name="CP1"/>
+          <p:cNvPr id="1001300255" name="CP1"/>
           <p:cNvSpPr/>
           <p:nvPr/>
         </p:nvSpPr>
@@ -8368,7 +9196,7 @@
       </p:sp>
       <p:sp>
         <p:nvSpPr>
-          <p:cNvPr id="485187591" name="Bar240"/>
+          <p:cNvPr id="1286140208" name="Bar240"/>
           <p:cNvSpPr/>
           <p:nvPr/>
         </p:nvSpPr>
@@ -8398,7 +9226,7 @@
       </p:sp>
       <p:sp>
         <p:nvSpPr>
-          <p:cNvPr id="1417750489" name="CP2"/>
+          <p:cNvPr id="1375622928" name="CP2"/>
           <p:cNvSpPr/>
           <p:nvPr/>
         </p:nvSpPr>
@@ -8469,7 +9297,7 @@
       </p:sp>
       <p:sp>
         <p:nvSpPr>
-          <p:cNvPr id="266605900" name="Bar250"/>
+          <p:cNvPr id="1342651641" name="Bar250"/>
           <p:cNvSpPr/>
           <p:nvPr/>
         </p:nvSpPr>
@@ -8499,7 +9327,7 @@
       </p:sp>
       <p:sp>
         <p:nvSpPr>
-          <p:cNvPr id="1601281695" name="CP3"/>
+          <p:cNvPr id="481396400" name="CP3"/>
           <p:cNvSpPr/>
           <p:nvPr/>
         </p:nvSpPr>
@@ -8570,7 +9398,7 @@
       </p:sp>
       <p:sp>
         <p:nvSpPr>
-          <p:cNvPr id="521730879" name="AnaSource"/>
+          <p:cNvPr id="681690867" name="AnaSource"/>
           <p:cNvSpPr/>
           <p:nvPr/>
         </p:nvSpPr>
@@ -8655,7 +9483,7 @@
       </p:sp>
       <p:sp>
         <p:nvSpPr>
-          <p:cNvPr id="1929669236" name="Bar301"/>
+          <p:cNvPr id="4012424" name="Bar301"/>
           <p:cNvSpPr/>
           <p:nvPr/>
         </p:nvSpPr>
@@ -8685,7 +9513,7 @@
       </p:sp>
       <p:sp>
         <p:nvSpPr>
-          <p:cNvPr id="2047908432" name="FarmSource"/>
+          <p:cNvPr id="1749460551" name="FarmSource"/>
           <p:cNvSpPr/>
           <p:nvPr/>
         </p:nvSpPr>
@@ -8761,7 +9589,7 @@
       </p:sp>
       <p:sp>
         <p:nvSpPr>
-          <p:cNvPr id="130435541" name="Bar311"/>
+          <p:cNvPr id="1352972437" name="Bar311"/>
           <p:cNvSpPr/>
           <p:nvPr/>
         </p:nvSpPr>
@@ -8791,7 +9619,7 @@
       </p:sp>
       <p:sp>
         <p:nvSpPr>
-          <p:cNvPr id="663461844" name="Shape 1"/>
+          <p:cNvPr id="1695943537" name="Shape 1"/>
           <p:cNvSpPr/>
           <p:nvPr/>
         </p:nvSpPr>
@@ -8854,7 +9682,7 @@
       </p:grpSpPr>
       <p:sp>
         <p:nvSpPr>
-          <p:cNvPr id="2055621425" name="Title"/>
+          <p:cNvPr id="192533327" name="Title"/>
           <p:cNvSpPr/>
           <p:nvPr/>
         </p:nvSpPr>
@@ -8894,7 +9722,7 @@
       </p:sp>
       <p:sp>
         <p:nvSpPr>
-          <p:cNvPr id="1218914124" name="Badge200"/>
+          <p:cNvPr id="1562723977" name="Badge200"/>
           <p:cNvSpPr/>
           <p:nvPr/>
         </p:nvSpPr>
@@ -8936,7 +9764,7 @@
       </p:sp>
       <p:sp>
         <p:nvSpPr>
-          <p:cNvPr id="628674602" name="P1"/>
+          <p:cNvPr id="1543848608" name="P1"/>
           <p:cNvSpPr/>
           <p:nvPr/>
         </p:nvSpPr>
@@ -9044,7 +9872,7 @@
       </p:sp>
       <p:sp>
         <p:nvSpPr>
-          <p:cNvPr id="1778966857" name="Bar202"/>
+          <p:cNvPr id="1999305319" name="Bar202"/>
           <p:cNvSpPr/>
           <p:nvPr/>
         </p:nvSpPr>
@@ -9074,7 +9902,7 @@
       </p:sp>
       <p:sp>
         <p:nvSpPr>
-          <p:cNvPr id="1700498822" name="Badge210"/>
+          <p:cNvPr id="889416768" name="Badge210"/>
           <p:cNvSpPr/>
           <p:nvPr/>
         </p:nvSpPr>
@@ -9116,7 +9944,7 @@
       </p:sp>
       <p:sp>
         <p:nvSpPr>
-          <p:cNvPr id="372012440" name="P2"/>
+          <p:cNvPr id="809163280" name="P2"/>
           <p:cNvSpPr/>
           <p:nvPr/>
         </p:nvSpPr>
@@ -9240,7 +10068,7 @@
       </p:sp>
       <p:sp>
         <p:nvSpPr>
-          <p:cNvPr id="1670384765" name="Bar212"/>
+          <p:cNvPr id="1501742551" name="Bar212"/>
           <p:cNvSpPr/>
           <p:nvPr/>
         </p:nvSpPr>
@@ -9270,7 +10098,7 @@
       </p:sp>
       <p:sp>
         <p:nvSpPr>
-          <p:cNvPr id="958237866" name="Badge220"/>
+          <p:cNvPr id="1734907444" name="Badge220"/>
           <p:cNvSpPr/>
           <p:nvPr/>
         </p:nvSpPr>
@@ -9312,7 +10140,7 @@
       </p:sp>
       <p:sp>
         <p:nvSpPr>
-          <p:cNvPr id="1084611589" name="P3"/>
+          <p:cNvPr id="169018707" name="P3"/>
           <p:cNvSpPr/>
           <p:nvPr/>
         </p:nvSpPr>
@@ -9420,7 +10248,7 @@
       </p:sp>
       <p:sp>
         <p:nvSpPr>
-          <p:cNvPr id="33679111" name="Bar222"/>
+          <p:cNvPr id="1396611504" name="Bar222"/>
           <p:cNvSpPr/>
           <p:nvPr/>
         </p:nvSpPr>
@@ -9450,7 +10278,7 @@
       </p:sp>
       <p:sp>
         <p:nvSpPr>
-          <p:cNvPr id="1590939465" name="Shape 1"/>
+          <p:cNvPr id="1554537125" name="Shape 1"/>
           <p:cNvSpPr/>
           <p:nvPr/>
         </p:nvSpPr>
@@ -9513,7 +10341,7 @@
       </p:grpSpPr>
       <p:sp>
         <p:nvSpPr>
-          <p:cNvPr id="1228661166" name="Title"/>
+          <p:cNvPr id="177794633" name="Title"/>
           <p:cNvSpPr/>
           <p:nvPr/>
         </p:nvSpPr>
@@ -9553,7 +10381,7 @@
       </p:sp>
       <p:sp>
         <p:nvSpPr>
-          <p:cNvPr id="915457805" name="Sub"/>
+          <p:cNvPr id="595674928" name="Sub"/>
           <p:cNvSpPr/>
           <p:nvPr/>
         </p:nvSpPr>
@@ -9593,7 +10421,7 @@
       </p:sp>
       <p:sp>
         <p:nvSpPr>
-          <p:cNvPr id="77819215" name="Scenario"/>
+          <p:cNvPr id="1244323525" name="Scenario"/>
           <p:cNvSpPr/>
           <p:nvPr/>
         </p:nvSpPr>
@@ -9701,7 +10529,7 @@
       </p:sp>
       <p:sp>
         <p:nvSpPr>
-          <p:cNvPr id="1018449744" name="Bar201"/>
+          <p:cNvPr id="1231025550" name="Bar201"/>
           <p:cNvSpPr/>
           <p:nvPr/>
         </p:nvSpPr>
@@ -9731,7 +10559,7 @@
       </p:sp>
       <p:sp>
         <p:nvSpPr>
-          <p:cNvPr id="27570022" name="ReqLbl"/>
+          <p:cNvPr id="974394125" name="ReqLbl"/>
           <p:cNvSpPr/>
           <p:nvPr/>
         </p:nvSpPr>
@@ -9775,7 +10603,7 @@
       </p:sp>
       <p:sp>
         <p:nvSpPr>
-          <p:cNvPr id="922366890" name="Bar220"/>
+          <p:cNvPr id="1593882287" name="Bar220"/>
           <p:cNvSpPr/>
           <p:nvPr/>
         </p:nvSpPr>
@@ -9805,7 +10633,7 @@
       </p:sp>
       <p:sp>
         <p:nvSpPr>
-          <p:cNvPr id="100516816" name="Req0"/>
+          <p:cNvPr id="474702653" name="Req0"/>
           <p:cNvSpPr/>
           <p:nvPr/>
         </p:nvSpPr>
@@ -9876,7 +10704,7 @@
       </p:sp>
       <p:sp>
         <p:nvSpPr>
-          <p:cNvPr id="823073694" name="Bar230"/>
+          <p:cNvPr id="1759763204" name="Bar230"/>
           <p:cNvSpPr/>
           <p:nvPr/>
         </p:nvSpPr>
@@ -9906,7 +10734,7 @@
       </p:sp>
       <p:sp>
         <p:nvSpPr>
-          <p:cNvPr id="63770174" name="Req1"/>
+          <p:cNvPr id="197503896" name="Req1"/>
           <p:cNvSpPr/>
           <p:nvPr/>
         </p:nvSpPr>
@@ -9977,7 +10805,7 @@
       </p:sp>
       <p:sp>
         <p:nvSpPr>
-          <p:cNvPr id="1301970076" name="Bar240"/>
+          <p:cNvPr id="474446606" name="Bar240"/>
           <p:cNvSpPr/>
           <p:nvPr/>
         </p:nvSpPr>
@@ -10007,7 +10835,7 @@
       </p:sp>
       <p:sp>
         <p:nvSpPr>
-          <p:cNvPr id="2020376230" name="Req2"/>
+          <p:cNvPr id="1607304285" name="Req2"/>
           <p:cNvSpPr/>
           <p:nvPr/>
         </p:nvSpPr>
@@ -10078,7 +10906,7 @@
       </p:sp>
       <p:sp>
         <p:nvSpPr>
-          <p:cNvPr id="2136749983" name="Bar250"/>
+          <p:cNvPr id="334461986" name="Bar250"/>
           <p:cNvSpPr/>
           <p:nvPr/>
         </p:nvSpPr>
@@ -10108,7 +10936,7 @@
       </p:sp>
       <p:sp>
         <p:nvSpPr>
-          <p:cNvPr id="1521817228" name="Req3"/>
+          <p:cNvPr id="401150336" name="Req3"/>
           <p:cNvSpPr/>
           <p:nvPr/>
         </p:nvSpPr>
@@ -10179,7 +11007,7 @@
       </p:sp>
       <p:sp>
         <p:nvSpPr>
-          <p:cNvPr id="847706606" name="Bar260"/>
+          <p:cNvPr id="528733309" name="Bar260"/>
           <p:cNvSpPr/>
           <p:nvPr/>
         </p:nvSpPr>
@@ -10209,7 +11037,7 @@
       </p:sp>
       <p:sp>
         <p:nvSpPr>
-          <p:cNvPr id="751036182" name="Req4"/>
+          <p:cNvPr id="1696296807" name="Req4"/>
           <p:cNvSpPr/>
           <p:nvPr/>
         </p:nvSpPr>
@@ -10280,7 +11108,7 @@
       </p:sp>
       <p:sp>
         <p:nvSpPr>
-          <p:cNvPr id="886382587" name="ResLbl"/>
+          <p:cNvPr id="1913034046" name="ResLbl"/>
           <p:cNvSpPr/>
           <p:nvPr/>
         </p:nvSpPr>
@@ -10340,7 +11168,7 @@
       </p:sp>
       <p:sp>
         <p:nvSpPr>
-          <p:cNvPr id="1193256000" name="Bar271"/>
+          <p:cNvPr id="2046650576" name="Bar271"/>
           <p:cNvSpPr/>
           <p:nvPr/>
         </p:nvSpPr>
@@ -10370,7 +11198,7 @@
       </p:sp>
       <p:sp>
         <p:nvSpPr>
-          <p:cNvPr id="1443385099" name="Shape 1"/>
+          <p:cNvPr id="575193771" name="Shape 1"/>
           <p:cNvSpPr/>
           <p:nvPr/>
         </p:nvSpPr>
@@ -10440,7 +11268,7 @@
       </p:grpSpPr>
       <p:sp>
         <p:nvSpPr>
-          <p:cNvPr id="732129685" name="Text 0"/>
+          <p:cNvPr id="942902283" name="Text 0"/>
           <p:cNvSpPr/>
           <p:nvPr/>
         </p:nvSpPr>
@@ -10480,7 +11308,7 @@
       </p:sp>
       <p:sp>
         <p:nvSpPr>
-          <p:cNvPr id="803058277" name="Shape 1"/>
+          <p:cNvPr id="1576252707" name="Shape 1"/>
           <p:cNvSpPr/>
           <p:nvPr/>
         </p:nvSpPr>
@@ -10510,7 +11338,7 @@
       </p:sp>
       <p:sp>
         <p:nvSpPr>
-          <p:cNvPr id="885362309" name="Shape 2"/>
+          <p:cNvPr id="1444117341" name="Shape 2"/>
           <p:cNvSpPr/>
           <p:nvPr/>
         </p:nvSpPr>
@@ -10545,7 +11373,7 @@
       </p:sp>
       <p:sp>
         <p:nvSpPr>
-          <p:cNvPr id="565527624" name="Text 3"/>
+          <p:cNvPr id="1590158738" name="Text 3"/>
           <p:cNvSpPr/>
           <p:nvPr/>
         </p:nvSpPr>
@@ -10585,7 +11413,7 @@
       </p:sp>
       <p:sp>
         <p:nvSpPr>
-          <p:cNvPr id="750621232" name="Text 4"/>
+          <p:cNvPr id="2048938242" name="Text 4"/>
           <p:cNvSpPr/>
           <p:nvPr/>
         </p:nvSpPr>
@@ -10625,7 +11453,7 @@
       </p:sp>
       <p:sp>
         <p:nvSpPr>
-          <p:cNvPr id="1296734704" name="Text 5"/>
+          <p:cNvPr id="1879387966" name="Text 5"/>
           <p:cNvSpPr/>
           <p:nvPr/>
         </p:nvSpPr>
@@ -10665,7 +11493,7 @@
       </p:sp>
       <p:sp>
         <p:nvSpPr>
-          <p:cNvPr id="1080750099" name="Text 6"/>
+          <p:cNvPr id="881824758" name="Text 6"/>
           <p:cNvSpPr/>
           <p:nvPr/>
         </p:nvSpPr>
@@ -10705,7 +11533,7 @@
       </p:sp>
       <p:sp>
         <p:nvSpPr>
-          <p:cNvPr id="24431550" name="Text 7"/>
+          <p:cNvPr id="66031605" name="Text 7"/>
           <p:cNvSpPr/>
           <p:nvPr/>
         </p:nvSpPr>
@@ -10745,7 +11573,7 @@
       </p:sp>
       <p:sp>
         <p:nvSpPr>
-          <p:cNvPr id="1205950976" name="Text 8"/>
+          <p:cNvPr id="2110858569" name="Text 8"/>
           <p:cNvSpPr/>
           <p:nvPr/>
         </p:nvSpPr>
@@ -10785,7 +11613,7 @@
       </p:sp>
       <p:sp>
         <p:nvSpPr>
-          <p:cNvPr id="1847813204" name="Text 9"/>
+          <p:cNvPr id="1703333498" name="Text 9"/>
           <p:cNvSpPr/>
           <p:nvPr/>
         </p:nvSpPr>
@@ -10825,7 +11653,7 @@
       </p:sp>
       <p:sp>
         <p:nvSpPr>
-          <p:cNvPr id="1142090439" name="Text 10"/>
+          <p:cNvPr id="1643504856" name="Text 10"/>
           <p:cNvSpPr/>
           <p:nvPr/>
         </p:nvSpPr>
@@ -10865,7 +11693,7 @@
       </p:sp>
       <p:sp>
         <p:nvSpPr>
-          <p:cNvPr id="1473383431" name="Text 11"/>
+          <p:cNvPr id="304343089" name="Text 11"/>
           <p:cNvSpPr/>
           <p:nvPr/>
         </p:nvSpPr>
@@ -10927,7 +11755,7 @@
       </p:sp>
       <p:sp>
         <p:nvSpPr>
-          <p:cNvPr id="181993726" name="Text 12"/>
+          <p:cNvPr id="1849736477" name="Text 12"/>
           <p:cNvSpPr/>
           <p:nvPr/>
         </p:nvSpPr>
@@ -10967,7 +11795,7 @@
       </p:sp>
       <p:sp>
         <p:nvSpPr>
-          <p:cNvPr id="2022176471" name="Text 13"/>
+          <p:cNvPr id="2358694" name="Text 13"/>
           <p:cNvSpPr/>
           <p:nvPr/>
         </p:nvSpPr>
@@ -11007,7 +11835,7 @@
       </p:sp>
       <p:sp>
         <p:nvSpPr>
-          <p:cNvPr id="677287216" name="Text 14"/>
+          <p:cNvPr id="661138088" name="Text 14"/>
           <p:cNvSpPr/>
           <p:nvPr/>
         </p:nvSpPr>
@@ -11047,7 +11875,7 @@
       </p:sp>
       <p:sp>
         <p:nvSpPr>
-          <p:cNvPr id="317310610" name="Text 15"/>
+          <p:cNvPr id="1328220930" name="Text 15"/>
           <p:cNvSpPr/>
           <p:nvPr/>
         </p:nvSpPr>
@@ -11087,7 +11915,7 @@
       </p:sp>
       <p:sp>
         <p:nvSpPr>
-          <p:cNvPr id="1477969521" name="Text 16"/>
+          <p:cNvPr id="1591208370" name="Text 16"/>
           <p:cNvSpPr/>
           <p:nvPr/>
         </p:nvSpPr>
@@ -11127,7 +11955,7 @@
       </p:sp>
       <p:sp>
         <p:nvSpPr>
-          <p:cNvPr id="1977658205" name="Text 17"/>
+          <p:cNvPr id="2090644537" name="Text 17"/>
           <p:cNvSpPr/>
           <p:nvPr/>
         </p:nvSpPr>
@@ -11167,7 +11995,7 @@
       </p:sp>
       <p:sp>
         <p:nvSpPr>
-          <p:cNvPr id="589535997" name="Text 18"/>
+          <p:cNvPr id="1168628607" name="Text 18"/>
           <p:cNvSpPr/>
           <p:nvPr/>
         </p:nvSpPr>
@@ -11207,7 +12035,7 @@
       </p:sp>
       <p:sp>
         <p:nvSpPr>
-          <p:cNvPr id="553477625" name="Text 19"/>
+          <p:cNvPr id="1942331930" name="Text 19"/>
           <p:cNvSpPr/>
           <p:nvPr/>
         </p:nvSpPr>
@@ -11269,7 +12097,7 @@
       </p:sp>
       <p:sp>
         <p:nvSpPr>
-          <p:cNvPr id="969181286" name="Shape 20"/>
+          <p:cNvPr id="1302998145" name="Shape 20"/>
           <p:cNvSpPr/>
           <p:nvPr/>
         </p:nvSpPr>
@@ -11304,7 +12132,7 @@
       </p:sp>
       <p:sp>
         <p:nvSpPr>
-          <p:cNvPr id="1384428883" name="Text 21"/>
+          <p:cNvPr id="114568905" name="Text 21"/>
           <p:cNvSpPr/>
           <p:nvPr/>
         </p:nvSpPr>
@@ -11344,7 +12172,7 @@
       </p:sp>
       <p:sp>
         <p:nvSpPr>
-          <p:cNvPr id="408136883" name="Text 22"/>
+          <p:cNvPr id="574275712" name="Text 22"/>
           <p:cNvSpPr/>
           <p:nvPr/>
         </p:nvSpPr>
@@ -11384,7 +12212,7 @@
       </p:sp>
       <p:sp>
         <p:nvSpPr>
-          <p:cNvPr id="484841196" name="Text 23"/>
+          <p:cNvPr id="1838380879" name="Text 23"/>
           <p:cNvSpPr/>
           <p:nvPr/>
         </p:nvSpPr>
@@ -11424,7 +12252,7 @@
       </p:sp>
       <p:sp>
         <p:nvSpPr>
-          <p:cNvPr id="524191160" name="Text 24"/>
+          <p:cNvPr id="2088746885" name="Text 24"/>
           <p:cNvSpPr/>
           <p:nvPr/>
         </p:nvSpPr>
@@ -11464,7 +12292,7 @@
       </p:sp>
       <p:sp>
         <p:nvSpPr>
-          <p:cNvPr id="701382912" name="Text 25"/>
+          <p:cNvPr id="1631888377" name="Text 25"/>
           <p:cNvSpPr/>
           <p:nvPr/>
         </p:nvSpPr>
@@ -11504,7 +12332,7 @@
       </p:sp>
       <p:sp>
         <p:nvSpPr>
-          <p:cNvPr id="548564824" name="Text 26"/>
+          <p:cNvPr id="253916533" name="Text 26"/>
           <p:cNvSpPr/>
           <p:nvPr/>
         </p:nvSpPr>
@@ -11544,7 +12372,7 @@
       </p:sp>
       <p:sp>
         <p:nvSpPr>
-          <p:cNvPr id="770420087" name="Text 27"/>
+          <p:cNvPr id="2105186432" name="Text 27"/>
           <p:cNvSpPr/>
           <p:nvPr/>
         </p:nvSpPr>
@@ -11584,7 +12412,7 @@
       </p:sp>
       <p:sp>
         <p:nvSpPr>
-          <p:cNvPr id="91447575" name="Text 28"/>
+          <p:cNvPr id="1888621471" name="Text 28"/>
           <p:cNvSpPr/>
           <p:nvPr/>
         </p:nvSpPr>
@@ -11624,7 +12452,7 @@
       </p:sp>
       <p:sp>
         <p:nvSpPr>
-          <p:cNvPr id="620244370" name="Text 29"/>
+          <p:cNvPr id="1527153187" name="Text 29"/>
           <p:cNvSpPr/>
           <p:nvPr/>
         </p:nvSpPr>
@@ -11664,7 +12492,7 @@
       </p:sp>
       <p:sp>
         <p:nvSpPr>
-          <p:cNvPr id="583423648" name="Text 30"/>
+          <p:cNvPr id="406897330" name="Text 30"/>
           <p:cNvSpPr/>
           <p:nvPr/>
         </p:nvSpPr>
@@ -11704,7 +12532,7 @@
       </p:sp>
       <p:sp>
         <p:nvSpPr>
-          <p:cNvPr id="1065855262" name="Text 31"/>
+          <p:cNvPr id="80037235" name="Text 31"/>
           <p:cNvSpPr/>
           <p:nvPr/>
         </p:nvSpPr>
@@ -11744,7 +12572,7 @@
       </p:sp>
       <p:sp>
         <p:nvSpPr>
-          <p:cNvPr id="1989512319" name="Text 32"/>
+          <p:cNvPr id="573348028" name="Text 32"/>
           <p:cNvSpPr/>
           <p:nvPr/>
         </p:nvSpPr>
@@ -11784,7 +12612,7 @@
       </p:sp>
       <p:sp>
         <p:nvSpPr>
-          <p:cNvPr id="113178271" name="Text 33"/>
+          <p:cNvPr id="1746185146" name="Text 33"/>
           <p:cNvSpPr/>
           <p:nvPr/>
         </p:nvSpPr>
@@ -11824,7 +12652,7 @@
       </p:sp>
       <p:sp>
         <p:nvSpPr>
-          <p:cNvPr id="1179089663" name="Text 34"/>
+          <p:cNvPr id="210228818" name="Text 34"/>
           <p:cNvSpPr/>
           <p:nvPr/>
         </p:nvSpPr>
@@ -11864,7 +12692,7 @@
       </p:sp>
       <p:sp>
         <p:nvSpPr>
-          <p:cNvPr id="1518467148" name="Text 35"/>
+          <p:cNvPr id="127168271" name="Text 35"/>
           <p:cNvSpPr/>
           <p:nvPr/>
         </p:nvSpPr>
@@ -11904,7 +12732,7 @@
       </p:sp>
       <p:sp>
         <p:nvSpPr>
-          <p:cNvPr id="1228571991" name="Text 36"/>
+          <p:cNvPr id="1934151850" name="Text 36"/>
           <p:cNvSpPr/>
           <p:nvPr/>
         </p:nvSpPr>
@@ -11944,7 +12772,7 @@
       </p:sp>
       <p:sp>
         <p:nvSpPr>
-          <p:cNvPr id="1225883340" name="Text 37"/>
+          <p:cNvPr id="1217625303" name="Text 37"/>
           <p:cNvSpPr/>
           <p:nvPr/>
         </p:nvSpPr>
@@ -12024,7 +12852,7 @@
       </p:grpSpPr>
       <p:sp>
         <p:nvSpPr>
-          <p:cNvPr id="281577105" name="Text 0"/>
+          <p:cNvPr id="119730830" name="Text 0"/>
           <p:cNvSpPr/>
           <p:nvPr/>
         </p:nvSpPr>
@@ -12086,7 +12914,7 @@
       </p:sp>
       <p:sp>
         <p:nvSpPr>
-          <p:cNvPr id="487988286" name="Text 1"/>
+          <p:cNvPr id="107575423" name="Text 1"/>
           <p:cNvSpPr/>
           <p:nvPr/>
         </p:nvSpPr>
@@ -12126,7 +12954,7 @@
       </p:sp>
       <p:sp>
         <p:nvSpPr>
-          <p:cNvPr id="1634479877" name="Text 2"/>
+          <p:cNvPr id="63731328" name="Text 2"/>
           <p:cNvSpPr/>
           <p:nvPr/>
         </p:nvSpPr>
@@ -12206,7 +13034,7 @@
       </p:grpSpPr>
       <p:sp>
         <p:nvSpPr>
-          <p:cNvPr id="461394365" name="Text 0"/>
+          <p:cNvPr id="9820579" name="Text 0"/>
           <p:cNvSpPr/>
           <p:nvPr/>
         </p:nvSpPr>
@@ -12246,7 +13074,7 @@
       </p:sp>
       <p:sp>
         <p:nvSpPr>
-          <p:cNvPr id="1900350656" name="Shape 1"/>
+          <p:cNvPr id="95681206" name="Shape 1"/>
           <p:cNvSpPr/>
           <p:nvPr/>
         </p:nvSpPr>
@@ -12276,7 +13104,7 @@
       </p:sp>
       <p:sp>
         <p:nvSpPr>
-          <p:cNvPr id="1667755624" name="Shape 2"/>
+          <p:cNvPr id="730525047" name="Shape 2"/>
           <p:cNvSpPr/>
           <p:nvPr/>
         </p:nvSpPr>
@@ -12311,7 +13139,7 @@
       </p:sp>
       <p:sp>
         <p:nvSpPr>
-          <p:cNvPr id="1943028196" name="Shape 3"/>
+          <p:cNvPr id="682491536" name="Shape 3"/>
           <p:cNvSpPr/>
           <p:nvPr/>
         </p:nvSpPr>
@@ -12341,7 +13169,7 @@
       </p:sp>
       <p:sp>
         <p:nvSpPr>
-          <p:cNvPr id="485610850" name="Text 4"/>
+          <p:cNvPr id="812050244" name="Text 4"/>
           <p:cNvSpPr/>
           <p:nvPr/>
         </p:nvSpPr>
@@ -12381,7 +13209,7 @@
       </p:sp>
       <p:sp>
         <p:nvSpPr>
-          <p:cNvPr id="1373247604" name="Text 5"/>
+          <p:cNvPr id="104652036" name="Text 5"/>
           <p:cNvSpPr/>
           <p:nvPr/>
         </p:nvSpPr>
@@ -12443,7 +13271,7 @@
       </p:sp>
       <p:sp>
         <p:nvSpPr>
-          <p:cNvPr id="1158560829" name="Shape 6"/>
+          <p:cNvPr id="1670982810" name="Shape 6"/>
           <p:cNvSpPr/>
           <p:nvPr/>
         </p:nvSpPr>
@@ -12478,7 +13306,7 @@
       </p:sp>
       <p:sp>
         <p:nvSpPr>
-          <p:cNvPr id="5160309" name="Shape 7"/>
+          <p:cNvPr id="2044524862" name="Shape 7"/>
           <p:cNvSpPr/>
           <p:nvPr/>
         </p:nvSpPr>
@@ -12508,7 +13336,7 @@
       </p:sp>
       <p:sp>
         <p:nvSpPr>
-          <p:cNvPr id="2011722169" name="Text 8"/>
+          <p:cNvPr id="404947914" name="Text 8"/>
           <p:cNvSpPr/>
           <p:nvPr/>
         </p:nvSpPr>
@@ -12548,7 +13376,7 @@
       </p:sp>
       <p:sp>
         <p:nvSpPr>
-          <p:cNvPr id="1957992795" name="Text 9"/>
+          <p:cNvPr id="122175728" name="Text 9"/>
           <p:cNvSpPr/>
           <p:nvPr/>
         </p:nvSpPr>
@@ -12588,7 +13416,7 @@
       </p:sp>
       <p:sp>
         <p:nvSpPr>
-          <p:cNvPr id="417314114" name="Shape 10"/>
+          <p:cNvPr id="709816053" name="Shape 10"/>
           <p:cNvSpPr/>
           <p:nvPr/>
         </p:nvSpPr>
@@ -12623,7 +13451,7 @@
       </p:sp>
       <p:sp>
         <p:nvSpPr>
-          <p:cNvPr id="2020693363" name="Shape 11"/>
+          <p:cNvPr id="1047946382" name="Shape 11"/>
           <p:cNvSpPr/>
           <p:nvPr/>
         </p:nvSpPr>
@@ -12653,7 +13481,7 @@
       </p:sp>
       <p:sp>
         <p:nvSpPr>
-          <p:cNvPr id="1932328590" name="Text 12"/>
+          <p:cNvPr id="910499697" name="Text 12"/>
           <p:cNvSpPr/>
           <p:nvPr/>
         </p:nvSpPr>
@@ -12693,7 +13521,7 @@
       </p:sp>
       <p:sp>
         <p:nvSpPr>
-          <p:cNvPr id="1978256449" name="Text 13"/>
+          <p:cNvPr id="1590825534" name="Text 13"/>
           <p:cNvSpPr/>
           <p:nvPr/>
         </p:nvSpPr>
@@ -12733,7 +13561,7 @@
       </p:sp>
       <p:sp>
         <p:nvSpPr>
-          <p:cNvPr id="1395231843" name="Shape 14"/>
+          <p:cNvPr id="465905597" name="Shape 14"/>
           <p:cNvSpPr/>
           <p:nvPr/>
         </p:nvSpPr>
@@ -12768,7 +13596,7 @@
       </p:sp>
       <p:sp>
         <p:nvSpPr>
-          <p:cNvPr id="186504672" name="Shape 15"/>
+          <p:cNvPr id="1388013962" name="Shape 15"/>
           <p:cNvSpPr/>
           <p:nvPr/>
         </p:nvSpPr>
@@ -12798,7 +13626,7 @@
       </p:sp>
       <p:sp>
         <p:nvSpPr>
-          <p:cNvPr id="1978488594" name="Text 16"/>
+          <p:cNvPr id="1220532244" name="Text 16"/>
           <p:cNvSpPr/>
           <p:nvPr/>
         </p:nvSpPr>
@@ -12838,7 +13666,7 @@
       </p:sp>
       <p:sp>
         <p:nvSpPr>
-          <p:cNvPr id="558111998" name="Text 17"/>
+          <p:cNvPr id="490003497" name="Text 17"/>
           <p:cNvSpPr/>
           <p:nvPr/>
         </p:nvSpPr>
@@ -12940,7 +13768,7 @@
       </p:grpSpPr>
       <p:sp>
         <p:nvSpPr>
-          <p:cNvPr id="1746469816" name="Text 0"/>
+          <p:cNvPr id="1005638091" name="Text 0"/>
           <p:cNvSpPr/>
           <p:nvPr/>
         </p:nvSpPr>
@@ -12980,7 +13808,7 @@
       </p:sp>
       <p:sp>
         <p:nvSpPr>
-          <p:cNvPr id="1176327787" name="Text 24"/>
+          <p:cNvPr id="1724946929" name="Text 24"/>
           <p:cNvSpPr/>
           <p:nvPr/>
         </p:nvSpPr>
@@ -13009,7 +13837,7 @@
       </p:sp>
       <p:sp>
         <p:nvSpPr>
-          <p:cNvPr id="924502360" name="Text 30"/>
+          <p:cNvPr id="1951069133" name="Text 30"/>
           <p:cNvSpPr/>
           <p:nvPr/>
         </p:nvSpPr>
@@ -13038,7 +13866,7 @@
       </p:sp>
       <p:pic>
         <p:nvPicPr>
-          <p:cNvPr id="1903858315" name="Immagine 41"/>
+          <p:cNvPr id="375641513" name="Immagine 41"/>
           <p:cNvPicPr>
             <a:picLocks noChangeAspect="1"/>
           </p:cNvPicPr>
@@ -13065,7 +13893,7 @@
       </p:pic>
       <p:sp>
         <p:nvSpPr>
-          <p:cNvPr id="349647592" name="Shape 1"/>
+          <p:cNvPr id="211978560" name="Shape 1"/>
           <p:cNvSpPr/>
           <p:nvPr/>
         </p:nvSpPr>
@@ -13135,7 +13963,7 @@
       </p:grpSpPr>
       <p:sp>
         <p:nvSpPr>
-          <p:cNvPr id="1094482528" name="Text 0"/>
+          <p:cNvPr id="743577363" name="Text 0"/>
           <p:cNvSpPr/>
           <p:nvPr/>
         </p:nvSpPr>
@@ -13175,7 +14003,7 @@
       </p:sp>
       <p:sp>
         <p:nvSpPr>
-          <p:cNvPr id="1649982452" name="Shape 1"/>
+          <p:cNvPr id="30562354" name="Shape 1"/>
           <p:cNvSpPr/>
           <p:nvPr/>
         </p:nvSpPr>
@@ -13205,7 +14033,7 @@
       </p:sp>
       <p:sp>
         <p:nvSpPr>
-          <p:cNvPr id="988217934" name="Shape 2"/>
+          <p:cNvPr id="1795519111" name="Shape 2"/>
           <p:cNvSpPr/>
           <p:nvPr/>
         </p:nvSpPr>
@@ -13240,7 +14068,7 @@
       </p:sp>
       <p:sp>
         <p:nvSpPr>
-          <p:cNvPr id="150158632" name="Text 3"/>
+          <p:cNvPr id="1327476990" name="Text 3"/>
           <p:cNvSpPr/>
           <p:nvPr/>
         </p:nvSpPr>
@@ -13280,7 +14108,7 @@
       </p:sp>
       <p:sp>
         <p:nvSpPr>
-          <p:cNvPr id="1806641122" name="Shape 4"/>
+          <p:cNvPr id="1657618406" name="Shape 4"/>
           <p:cNvSpPr/>
           <p:nvPr/>
         </p:nvSpPr>
@@ -13310,7 +14138,7 @@
       </p:sp>
       <p:sp>
         <p:nvSpPr>
-          <p:cNvPr id="784332633" name="Text 5"/>
+          <p:cNvPr id="351880698" name="Text 5"/>
           <p:cNvSpPr/>
           <p:nvPr/>
         </p:nvSpPr>
@@ -13350,7 +14178,7 @@
       </p:sp>
       <p:sp>
         <p:nvSpPr>
-          <p:cNvPr id="849953566" name="Text 6"/>
+          <p:cNvPr id="1088173630" name="Text 6"/>
           <p:cNvSpPr/>
           <p:nvPr/>
         </p:nvSpPr>
@@ -13390,7 +14218,7 @@
       </p:sp>
       <p:sp>
         <p:nvSpPr>
-          <p:cNvPr id="1542192565" name="Text 7"/>
+          <p:cNvPr id="1109583465" name="Text 7"/>
           <p:cNvSpPr/>
           <p:nvPr/>
         </p:nvSpPr>
@@ -13452,7 +14280,7 @@
       </p:sp>
       <p:sp>
         <p:nvSpPr>
-          <p:cNvPr id="1712664326" name="Text 8"/>
+          <p:cNvPr id="1358789866" name="Text 8"/>
           <p:cNvSpPr/>
           <p:nvPr/>
         </p:nvSpPr>
@@ -13492,7 +14320,7 @@
       </p:sp>
       <p:sp>
         <p:nvSpPr>
-          <p:cNvPr id="1113106052" name="Shape 9"/>
+          <p:cNvPr id="1820282680" name="Shape 9"/>
           <p:cNvSpPr/>
           <p:nvPr/>
         </p:nvSpPr>
@@ -13527,7 +14355,7 @@
       </p:sp>
       <p:sp>
         <p:nvSpPr>
-          <p:cNvPr id="550388562" name="Text 10"/>
+          <p:cNvPr id="191132456" name="Text 10"/>
           <p:cNvSpPr/>
           <p:nvPr/>
         </p:nvSpPr>
@@ -13567,7 +14395,7 @@
       </p:sp>
       <p:sp>
         <p:nvSpPr>
-          <p:cNvPr id="932231587" name="Shape 11"/>
+          <p:cNvPr id="1186187687" name="Shape 11"/>
           <p:cNvSpPr/>
           <p:nvPr/>
         </p:nvSpPr>
@@ -13597,7 +14425,7 @@
       </p:sp>
       <p:sp>
         <p:nvSpPr>
-          <p:cNvPr id="1275870114" name="Text 12"/>
+          <p:cNvPr id="2108596220" name="Text 12"/>
           <p:cNvSpPr/>
           <p:nvPr/>
         </p:nvSpPr>
@@ -13637,7 +14465,7 @@
       </p:sp>
       <p:sp>
         <p:nvSpPr>
-          <p:cNvPr id="1820941199" name="Text 13"/>
+          <p:cNvPr id="1254891635" name="Text 13"/>
           <p:cNvSpPr/>
           <p:nvPr/>
         </p:nvSpPr>
@@ -13699,7 +14527,7 @@
       </p:sp>
       <p:sp>
         <p:nvSpPr>
-          <p:cNvPr id="1914107210" name="Text 14"/>
+          <p:cNvPr id="342921176" name="Text 14"/>
           <p:cNvSpPr/>
           <p:nvPr/>
         </p:nvSpPr>
@@ -13739,7 +14567,7 @@
       </p:sp>
       <p:sp>
         <p:nvSpPr>
-          <p:cNvPr id="157053710" name="Text 15"/>
+          <p:cNvPr id="1005370097" name="Text 15"/>
           <p:cNvSpPr/>
           <p:nvPr/>
         </p:nvSpPr>
@@ -13779,7 +14607,7 @@
       </p:sp>
       <p:sp>
         <p:nvSpPr>
-          <p:cNvPr id="1393005208" name="Shape 16"/>
+          <p:cNvPr id="2121887939" name="Shape 16"/>
           <p:cNvSpPr/>
           <p:nvPr/>
         </p:nvSpPr>
@@ -13814,7 +14642,7 @@
       </p:sp>
       <p:sp>
         <p:nvSpPr>
-          <p:cNvPr id="1985947292" name="Text 17"/>
+          <p:cNvPr id="975900348" name="Text 17"/>
           <p:cNvSpPr/>
           <p:nvPr/>
         </p:nvSpPr>
@@ -13854,7 +14682,7 @@
       </p:sp>
       <p:sp>
         <p:nvSpPr>
-          <p:cNvPr id="1765900123" name="Shape 18"/>
+          <p:cNvPr id="1744271713" name="Shape 18"/>
           <p:cNvSpPr/>
           <p:nvPr/>
         </p:nvSpPr>
@@ -13884,7 +14712,7 @@
       </p:sp>
       <p:sp>
         <p:nvSpPr>
-          <p:cNvPr id="1656719686" name="Text 19"/>
+          <p:cNvPr id="391210902" name="Text 19"/>
           <p:cNvSpPr/>
           <p:nvPr/>
         </p:nvSpPr>
@@ -13924,7 +14752,7 @@
       </p:sp>
       <p:sp>
         <p:nvSpPr>
-          <p:cNvPr id="1422598258" name="Text 20"/>
+          <p:cNvPr id="1392476972" name="Text 20"/>
           <p:cNvSpPr/>
           <p:nvPr/>
         </p:nvSpPr>
@@ -13986,7 +14814,7 @@
       </p:sp>
       <p:sp>
         <p:nvSpPr>
-          <p:cNvPr id="863069521" name="Text 21"/>
+          <p:cNvPr id="676738367" name="Text 21"/>
           <p:cNvSpPr/>
           <p:nvPr/>
         </p:nvSpPr>
@@ -14026,7 +14854,7 @@
       </p:sp>
       <p:sp>
         <p:nvSpPr>
-          <p:cNvPr id="975244002" name="Text 22"/>
+          <p:cNvPr id="1507461996" name="Text 22"/>
           <p:cNvSpPr/>
           <p:nvPr/>
         </p:nvSpPr>
@@ -14095,7 +14923,7 @@
       </p:grpSpPr>
       <p:sp>
         <p:nvSpPr>
-          <p:cNvPr id="1398437339" name="Text 0"/>
+          <p:cNvPr id="1402797603" name="Text 0"/>
           <p:cNvSpPr/>
           <p:nvPr/>
         </p:nvSpPr>
@@ -14135,7 +14963,7 @@
       </p:sp>
       <p:sp>
         <p:nvSpPr>
-          <p:cNvPr id="186724845" name="Shape 1"/>
+          <p:cNvPr id="829249830" name="Shape 1"/>
           <p:cNvSpPr/>
           <p:nvPr/>
         </p:nvSpPr>
@@ -14165,7 +14993,7 @@
       </p:sp>
       <p:sp>
         <p:nvSpPr>
-          <p:cNvPr id="1925172333" name="Shape 2"/>
+          <p:cNvPr id="1836823967" name="Shape 2"/>
           <p:cNvSpPr/>
           <p:nvPr/>
         </p:nvSpPr>
@@ -14200,7 +15028,7 @@
       </p:sp>
       <p:sp>
         <p:nvSpPr>
-          <p:cNvPr id="914944195" name="Text 3"/>
+          <p:cNvPr id="1964008049" name="Text 3"/>
           <p:cNvSpPr/>
           <p:nvPr/>
         </p:nvSpPr>
@@ -14240,7 +15068,7 @@
       </p:sp>
       <p:sp>
         <p:nvSpPr>
-          <p:cNvPr id="1851155111" name="Text 4"/>
+          <p:cNvPr id="2054126594" name="Text 4"/>
           <p:cNvSpPr/>
           <p:nvPr/>
         </p:nvSpPr>
@@ -14280,7 +15108,7 @@
       </p:sp>
       <p:sp>
         <p:nvSpPr>
-          <p:cNvPr id="491969961" name="Text 5"/>
+          <p:cNvPr id="390164850" name="Text 5"/>
           <p:cNvSpPr/>
           <p:nvPr/>
         </p:nvSpPr>
@@ -14342,7 +15170,7 @@
       </p:sp>
       <p:sp>
         <p:nvSpPr>
-          <p:cNvPr id="1211467931" name="Text 6"/>
+          <p:cNvPr id="1296381110" name="Text 6"/>
           <p:cNvSpPr/>
           <p:nvPr/>
         </p:nvSpPr>
@@ -14382,7 +15210,7 @@
       </p:sp>
       <p:sp>
         <p:nvSpPr>
-          <p:cNvPr id="1070622327" name="Text 7"/>
+          <p:cNvPr id="742701073" name="Text 7"/>
           <p:cNvSpPr/>
           <p:nvPr/>
         </p:nvSpPr>
@@ -14422,7 +15250,7 @@
       </p:sp>
       <p:sp>
         <p:nvSpPr>
-          <p:cNvPr id="1625928749" name="Text 8"/>
+          <p:cNvPr id="1463013701" name="Text 8"/>
           <p:cNvSpPr/>
           <p:nvPr/>
         </p:nvSpPr>
@@ -14462,7 +15290,7 @@
       </p:sp>
       <p:sp>
         <p:nvSpPr>
-          <p:cNvPr id="1355860306" name="Text 9"/>
+          <p:cNvPr id="669968490" name="Text 9"/>
           <p:cNvSpPr/>
           <p:nvPr/>
         </p:nvSpPr>
@@ -14524,7 +15352,7 @@
       </p:sp>
       <p:sp>
         <p:nvSpPr>
-          <p:cNvPr id="1918753949" name="Text 10"/>
+          <p:cNvPr id="1972141548" name="Text 10"/>
           <p:cNvSpPr/>
           <p:nvPr/>
         </p:nvSpPr>
@@ -14564,7 +15392,7 @@
       </p:sp>
       <p:sp>
         <p:nvSpPr>
-          <p:cNvPr id="1650094975" name="Text 11"/>
+          <p:cNvPr id="104052548" name="Text 11"/>
           <p:cNvSpPr/>
           <p:nvPr/>
         </p:nvSpPr>
@@ -14604,7 +15432,7 @@
       </p:sp>
       <p:sp>
         <p:nvSpPr>
-          <p:cNvPr id="143683962" name="Text 12"/>
+          <p:cNvPr id="1564560463" name="Text 12"/>
           <p:cNvSpPr/>
           <p:nvPr/>
         </p:nvSpPr>
@@ -14633,7 +15461,7 @@
       </p:sp>
       <p:sp>
         <p:nvSpPr>
-          <p:cNvPr id="356990458" name="Shape 13"/>
+          <p:cNvPr id="2139003122" name="Shape 13"/>
           <p:cNvSpPr/>
           <p:nvPr/>
         </p:nvSpPr>
@@ -14668,7 +15496,7 @@
       </p:sp>
       <p:sp>
         <p:nvSpPr>
-          <p:cNvPr id="1133299970" name="Text 14"/>
+          <p:cNvPr id="2085747817" name="Text 14"/>
           <p:cNvSpPr/>
           <p:nvPr/>
         </p:nvSpPr>
@@ -14708,7 +15536,7 @@
       </p:sp>
       <p:sp>
         <p:nvSpPr>
-          <p:cNvPr id="992495700" name="Text 15"/>
+          <p:cNvPr id="750999019" name="Text 15"/>
           <p:cNvSpPr/>
           <p:nvPr/>
         </p:nvSpPr>
@@ -14748,7 +15576,7 @@
       </p:sp>
       <p:sp>
         <p:nvSpPr>
-          <p:cNvPr id="1640365445" name="Text 16"/>
+          <p:cNvPr id="1040812025" name="Text 16"/>
           <p:cNvSpPr/>
           <p:nvPr/>
         </p:nvSpPr>
@@ -14810,7 +15638,7 @@
       </p:sp>
       <p:sp>
         <p:nvSpPr>
-          <p:cNvPr id="146915764" name="Text 17"/>
+          <p:cNvPr id="720982071" name="Text 17"/>
           <p:cNvSpPr/>
           <p:nvPr/>
         </p:nvSpPr>
@@ -14850,7 +15678,7 @@
       </p:sp>
       <p:sp>
         <p:nvSpPr>
-          <p:cNvPr id="1005160688" name="Text 18"/>
+          <p:cNvPr id="93218318" name="Text 18"/>
           <p:cNvSpPr/>
           <p:nvPr/>
         </p:nvSpPr>
@@ -14890,7 +15718,7 @@
       </p:sp>
       <p:sp>
         <p:nvSpPr>
-          <p:cNvPr id="1662667618" name="Text 19"/>
+          <p:cNvPr id="1744517707" name="Text 19"/>
           <p:cNvSpPr/>
           <p:nvPr/>
         </p:nvSpPr>
@@ -14930,7 +15758,7 @@
       </p:sp>
       <p:sp>
         <p:nvSpPr>
-          <p:cNvPr id="1243196519" name="Text 20"/>
+          <p:cNvPr id="1476473062" name="Text 20"/>
           <p:cNvSpPr/>
           <p:nvPr/>
         </p:nvSpPr>
@@ -14992,7 +15820,7 @@
       </p:sp>
       <p:sp>
         <p:nvSpPr>
-          <p:cNvPr id="2060036309" name="Text 21"/>
+          <p:cNvPr id="570344958" name="Text 21"/>
           <p:cNvSpPr/>
           <p:nvPr/>
         </p:nvSpPr>
@@ -15032,7 +15860,7 @@
       </p:sp>
       <p:sp>
         <p:nvSpPr>
-          <p:cNvPr id="973880422" name="Text 22"/>
+          <p:cNvPr id="532804055" name="Text 22"/>
           <p:cNvSpPr/>
           <p:nvPr/>
         </p:nvSpPr>
@@ -15072,7 +15900,7 @@
       </p:sp>
       <p:sp>
         <p:nvSpPr>
-          <p:cNvPr id="891610182" name="Text 23"/>
+          <p:cNvPr id="816072832" name="Text 23"/>
           <p:cNvSpPr/>
           <p:nvPr/>
         </p:nvSpPr>
@@ -15101,7 +15929,7 @@
       </p:sp>
       <p:sp>
         <p:nvSpPr>
-          <p:cNvPr id="843253482" name="Text 24"/>
+          <p:cNvPr id="1200861142" name="Text 24"/>
           <p:cNvSpPr/>
           <p:nvPr/>
         </p:nvSpPr>
@@ -15130,7 +15958,7 @@
       </p:sp>
       <p:sp>
         <p:nvSpPr>
-          <p:cNvPr id="1666471183" name="Text 25"/>
+          <p:cNvPr id="601266230" name="Text 25"/>
           <p:cNvSpPr/>
           <p:nvPr/>
         </p:nvSpPr>
@@ -15199,7 +16027,7 @@
       </p:grpSpPr>
       <p:sp>
         <p:nvSpPr>
-          <p:cNvPr id="973589494" name="Text 0"/>
+          <p:cNvPr id="337836505" name="Text 0"/>
           <p:cNvSpPr/>
           <p:nvPr/>
         </p:nvSpPr>
@@ -15261,7 +16089,7 @@
       </p:sp>
       <p:sp>
         <p:nvSpPr>
-          <p:cNvPr id="686837681" name="Text 1"/>
+          <p:cNvPr id="529519752" name="Text 1"/>
           <p:cNvSpPr/>
           <p:nvPr/>
         </p:nvSpPr>
@@ -15290,7 +16118,7 @@
       </p:sp>
       <p:sp>
         <p:nvSpPr>
-          <p:cNvPr id="665896384" name="Text 2"/>
+          <p:cNvPr id="636357855" name="Text 2"/>
           <p:cNvSpPr/>
           <p:nvPr/>
         </p:nvSpPr>
@@ -15319,7 +16147,7 @@
       </p:sp>
       <p:sp>
         <p:nvSpPr>
-          <p:cNvPr id="1059677004" name="Text 1"/>
+          <p:cNvPr id="1860872839" name="Text 1"/>
           <p:cNvSpPr/>
           <p:nvPr/>
         </p:nvSpPr>
@@ -15399,7 +16227,7 @@
       </p:grpSpPr>
       <p:sp>
         <p:nvSpPr>
-          <p:cNvPr id="1493995874" name="Text 0"/>
+          <p:cNvPr id="1186763659" name="Text 0"/>
           <p:cNvSpPr/>
           <p:nvPr/>
         </p:nvSpPr>
@@ -15439,7 +16267,7 @@
       </p:sp>
       <p:sp>
         <p:nvSpPr>
-          <p:cNvPr id="1970596405" name="Shape 1"/>
+          <p:cNvPr id="683329230" name="Shape 1"/>
           <p:cNvSpPr/>
           <p:nvPr/>
         </p:nvSpPr>
@@ -15469,7 +16297,7 @@
       </p:sp>
       <p:sp>
         <p:nvSpPr>
-          <p:cNvPr id="884374650" name="Shape 2"/>
+          <p:cNvPr id="1574855460" name="Shape 2"/>
           <p:cNvSpPr/>
           <p:nvPr/>
         </p:nvSpPr>
@@ -15504,7 +16332,7 @@
       </p:sp>
       <p:sp>
         <p:nvSpPr>
-          <p:cNvPr id="1132638475" name="Text 3"/>
+          <p:cNvPr id="1118558619" name="Text 3"/>
           <p:cNvSpPr/>
           <p:nvPr/>
         </p:nvSpPr>
@@ -15544,7 +16372,7 @@
       </p:sp>
       <p:sp>
         <p:nvSpPr>
-          <p:cNvPr id="1800032250" name="Shape 4"/>
+          <p:cNvPr id="1974748444" name="Shape 4"/>
           <p:cNvSpPr/>
           <p:nvPr/>
         </p:nvSpPr>
@@ -15579,7 +16407,7 @@
       </p:sp>
       <p:sp>
         <p:nvSpPr>
-          <p:cNvPr id="215608562" name="Text 5"/>
+          <p:cNvPr id="677872573" name="Text 5"/>
           <p:cNvSpPr/>
           <p:nvPr/>
         </p:nvSpPr>
@@ -15619,7 +16447,7 @@
       </p:sp>
       <p:sp>
         <p:nvSpPr>
-          <p:cNvPr id="2146447765" name="Shape 6"/>
+          <p:cNvPr id="706276269" name="Shape 6"/>
           <p:cNvSpPr/>
           <p:nvPr/>
         </p:nvSpPr>
@@ -15654,7 +16482,7 @@
       </p:sp>
       <p:sp>
         <p:nvSpPr>
-          <p:cNvPr id="1483189010" name="Text 7"/>
+          <p:cNvPr id="641165888" name="Text 7"/>
           <p:cNvSpPr/>
           <p:nvPr/>
         </p:nvSpPr>
@@ -15694,7 +16522,7 @@
       </p:sp>
       <p:sp>
         <p:nvSpPr>
-          <p:cNvPr id="503798662" name="Shape 8"/>
+          <p:cNvPr id="528790195" name="Shape 8"/>
           <p:cNvSpPr/>
           <p:nvPr/>
         </p:nvSpPr>
@@ -15729,7 +16557,7 @@
       </p:sp>
       <p:sp>
         <p:nvSpPr>
-          <p:cNvPr id="118316378" name="Text 9"/>
+          <p:cNvPr id="1559443354" name="Text 9"/>
           <p:cNvSpPr/>
           <p:nvPr/>
         </p:nvSpPr>
@@ -15769,7 +16597,7 @@
       </p:sp>
       <p:sp>
         <p:nvSpPr>
-          <p:cNvPr id="848728131" name="Shape 10"/>
+          <p:cNvPr id="1287625416" name="Shape 10"/>
           <p:cNvSpPr/>
           <p:nvPr/>
         </p:nvSpPr>
@@ -15804,7 +16632,7 @@
       </p:sp>
       <p:sp>
         <p:nvSpPr>
-          <p:cNvPr id="20374975" name="Text 11"/>
+          <p:cNvPr id="1275835630" name="Text 11"/>
           <p:cNvSpPr/>
           <p:nvPr/>
         </p:nvSpPr>
@@ -15855,7 +16683,7 @@
       </p:sp>
       <p:sp>
         <p:nvSpPr>
-          <p:cNvPr id="2107660052" name="Shape 12"/>
+          <p:cNvPr id="1939995725" name="Shape 12"/>
           <p:cNvSpPr/>
           <p:nvPr/>
         </p:nvSpPr>
@@ -15890,7 +16718,7 @@
       </p:sp>
       <p:sp>
         <p:nvSpPr>
-          <p:cNvPr id="160888194" name="Text 13"/>
+          <p:cNvPr id="1450278526" name="Text 13"/>
           <p:cNvSpPr/>
           <p:nvPr/>
         </p:nvSpPr>
@@ -15930,7 +16758,7 @@
       </p:sp>
       <p:sp>
         <p:nvSpPr>
-          <p:cNvPr id="844653865" name="Shape 14"/>
+          <p:cNvPr id="2019155346" name="Shape 14"/>
           <p:cNvSpPr/>
           <p:nvPr/>
         </p:nvSpPr>
@@ -15965,7 +16793,7 @@
       </p:sp>
       <p:sp>
         <p:nvSpPr>
-          <p:cNvPr id="864422381" name="Text 15"/>
+          <p:cNvPr id="112967426" name="Text 15"/>
           <p:cNvSpPr/>
           <p:nvPr/>
         </p:nvSpPr>
@@ -16005,7 +16833,7 @@
       </p:sp>
       <p:sp>
         <p:nvSpPr>
-          <p:cNvPr id="1411719487" name="Shape 16"/>
+          <p:cNvPr id="90152017" name="Shape 16"/>
           <p:cNvSpPr/>
           <p:nvPr/>
         </p:nvSpPr>
@@ -16040,7 +16868,7 @@
       </p:sp>
       <p:sp>
         <p:nvSpPr>
-          <p:cNvPr id="1117896585" name="Text 17"/>
+          <p:cNvPr id="742755974" name="Text 17"/>
           <p:cNvSpPr/>
           <p:nvPr/>
         </p:nvSpPr>
@@ -16156,7 +16984,7 @@
       </p:sp>
       <p:sp>
         <p:nvSpPr>
-          <p:cNvPr id="1436421761" name="Shape 18"/>
+          <p:cNvPr id="933986529" name="Shape 18"/>
           <p:cNvSpPr/>
           <p:nvPr/>
         </p:nvSpPr>
@@ -16191,7 +17019,7 @@
       </p:sp>
       <p:sp>
         <p:nvSpPr>
-          <p:cNvPr id="65027380" name="Text 19"/>
+          <p:cNvPr id="359088664" name="Text 19"/>
           <p:cNvSpPr/>
           <p:nvPr/>
         </p:nvSpPr>
@@ -16242,7 +17070,7 @@
       </p:sp>
       <p:sp>
         <p:nvSpPr>
-          <p:cNvPr id="1562729340" name="Shape 20"/>
+          <p:cNvPr id="1616532796" name="Shape 20"/>
           <p:cNvSpPr/>
           <p:nvPr/>
         </p:nvSpPr>
@@ -16277,7 +17105,7 @@
       </p:sp>
       <p:sp>
         <p:nvSpPr>
-          <p:cNvPr id="825361042" name="Text 21"/>
+          <p:cNvPr id="304395104" name="Text 21"/>
           <p:cNvSpPr/>
           <p:nvPr/>
         </p:nvSpPr>
@@ -16317,7 +17145,7 @@
       </p:sp>
       <p:sp>
         <p:nvSpPr>
-          <p:cNvPr id="1374775926" name="Shape 22"/>
+          <p:cNvPr id="539501800" name="Shape 22"/>
           <p:cNvSpPr/>
           <p:nvPr/>
         </p:nvSpPr>
@@ -16352,7 +17180,7 @@
       </p:sp>
       <p:sp>
         <p:nvSpPr>
-          <p:cNvPr id="39678532" name="Text 23"/>
+          <p:cNvPr id="1029669388" name="Text 23"/>
           <p:cNvSpPr/>
           <p:nvPr/>
         </p:nvSpPr>
@@ -16392,7 +17220,7 @@
       </p:sp>
       <p:sp>
         <p:nvSpPr>
-          <p:cNvPr id="1927098430" name="Shape 24"/>
+          <p:cNvPr id="508220233" name="Shape 24"/>
           <p:cNvSpPr/>
           <p:nvPr/>
         </p:nvSpPr>
@@ -16427,7 +17255,7 @@
       </p:sp>
       <p:sp>
         <p:nvSpPr>
-          <p:cNvPr id="395382761" name="Text 25"/>
+          <p:cNvPr id="1952965512" name="Text 25"/>
           <p:cNvSpPr/>
           <p:nvPr/>
         </p:nvSpPr>
@@ -16522,7 +17350,7 @@
       </p:sp>
       <p:sp>
         <p:nvSpPr>
-          <p:cNvPr id="119208180" name="Shape 26"/>
+          <p:cNvPr id="1148059192" name="Shape 26"/>
           <p:cNvSpPr/>
           <p:nvPr/>
         </p:nvSpPr>
@@ -16557,7 +17385,7 @@
       </p:sp>
       <p:sp>
         <p:nvSpPr>
-          <p:cNvPr id="1821684620" name="Text 27"/>
+          <p:cNvPr id="639441960" name="Text 27"/>
           <p:cNvSpPr/>
           <p:nvPr/>
         </p:nvSpPr>
@@ -16608,7 +17436,7 @@
       </p:sp>
       <p:sp>
         <p:nvSpPr>
-          <p:cNvPr id="1629134471" name="Shape 28"/>
+          <p:cNvPr id="1111193462" name="Shape 28"/>
           <p:cNvSpPr/>
           <p:nvPr/>
         </p:nvSpPr>
@@ -16643,7 +17471,7 @@
       </p:sp>
       <p:sp>
         <p:nvSpPr>
-          <p:cNvPr id="83508160" name="Text 29"/>
+          <p:cNvPr id="1211020085" name="Text 29"/>
           <p:cNvSpPr/>
           <p:nvPr/>
         </p:nvSpPr>
@@ -16683,7 +17511,7 @@
       </p:sp>
       <p:sp>
         <p:nvSpPr>
-          <p:cNvPr id="144503953" name="Shape 30"/>
+          <p:cNvPr id="873825360" name="Shape 30"/>
           <p:cNvSpPr/>
           <p:nvPr/>
         </p:nvSpPr>
@@ -16718,7 +17546,7 @@
       </p:sp>
       <p:sp>
         <p:nvSpPr>
-          <p:cNvPr id="1641496016" name="Text 31"/>
+          <p:cNvPr id="76924756" name="Text 31"/>
           <p:cNvSpPr/>
           <p:nvPr/>
         </p:nvSpPr>
@@ -16758,7 +17586,7 @@
       </p:sp>
       <p:sp>
         <p:nvSpPr>
-          <p:cNvPr id="210614835" name="Shape 32"/>
+          <p:cNvPr id="208197850" name="Shape 32"/>
           <p:cNvSpPr/>
           <p:nvPr/>
         </p:nvSpPr>
@@ -16793,7 +17621,7 @@
       </p:sp>
       <p:sp>
         <p:nvSpPr>
-          <p:cNvPr id="1067469889" name="Text 33"/>
+          <p:cNvPr id="1632757933" name="Text 33"/>
           <p:cNvSpPr/>
           <p:nvPr/>
         </p:nvSpPr>
@@ -16844,7 +17672,7 @@
       </p:sp>
       <p:sp>
         <p:nvSpPr>
-          <p:cNvPr id="313316586" name="Shape 34"/>
+          <p:cNvPr id="139730003" name="Shape 34"/>
           <p:cNvSpPr/>
           <p:nvPr/>
         </p:nvSpPr>
@@ -16879,7 +17707,7 @@
       </p:sp>
       <p:sp>
         <p:nvSpPr>
-          <p:cNvPr id="733820799" name="Text 35"/>
+          <p:cNvPr id="568035595" name="Text 35"/>
           <p:cNvSpPr/>
           <p:nvPr/>
         </p:nvSpPr>
@@ -16919,7 +17747,7 @@
       </p:sp>
       <p:sp>
         <p:nvSpPr>
-          <p:cNvPr id="1022002167" name="Shape 36"/>
+          <p:cNvPr id="1801335460" name="Shape 36"/>
           <p:cNvSpPr/>
           <p:nvPr/>
         </p:nvSpPr>
@@ -16954,7 +17782,7 @@
       </p:sp>
       <p:sp>
         <p:nvSpPr>
-          <p:cNvPr id="893667956" name="Text 37"/>
+          <p:cNvPr id="573431458" name="Text 37"/>
           <p:cNvSpPr/>
           <p:nvPr/>
         </p:nvSpPr>
@@ -17005,7 +17833,7 @@
       </p:sp>
       <p:sp>
         <p:nvSpPr>
-          <p:cNvPr id="2025872863" name="Shape 38"/>
+          <p:cNvPr id="165053705" name="Shape 38"/>
           <p:cNvSpPr/>
           <p:nvPr/>
         </p:nvSpPr>
@@ -17040,7 +17868,7 @@
       </p:sp>
       <p:sp>
         <p:nvSpPr>
-          <p:cNvPr id="765387054" name="Text 39"/>
+          <p:cNvPr id="2100197340" name="Text 39"/>
           <p:cNvSpPr/>
           <p:nvPr/>
         </p:nvSpPr>
@@ -17080,7 +17908,7 @@
       </p:sp>
       <p:sp>
         <p:nvSpPr>
-          <p:cNvPr id="907031996" name="Shape 40"/>
+          <p:cNvPr id="470374539" name="Shape 40"/>
           <p:cNvSpPr/>
           <p:nvPr/>
         </p:nvSpPr>
@@ -17115,7 +17943,7 @@
       </p:sp>
       <p:sp>
         <p:nvSpPr>
-          <p:cNvPr id="1593478844" name="Text 41"/>
+          <p:cNvPr id="2065506043" name="Text 41"/>
           <p:cNvSpPr/>
           <p:nvPr/>
         </p:nvSpPr>
@@ -17188,7 +18016,7 @@
       </p:sp>
       <p:sp>
         <p:nvSpPr>
-          <p:cNvPr id="1075885197" name="Text 42"/>
+          <p:cNvPr id="1039207794" name="Text 42"/>
           <p:cNvSpPr/>
           <p:nvPr/>
         </p:nvSpPr>
@@ -17257,7 +18085,7 @@
       </p:grpSpPr>
       <p:sp>
         <p:nvSpPr>
-          <p:cNvPr id="1391316665" name="Text 0"/>
+          <p:cNvPr id="1627412332" name="Text 0"/>
           <p:cNvSpPr/>
           <p:nvPr/>
         </p:nvSpPr>
@@ -17297,7 +18125,7 @@
       </p:sp>
       <p:sp>
         <p:nvSpPr>
-          <p:cNvPr id="1912535661" name="Shape 1"/>
+          <p:cNvPr id="868705947" name="Shape 1"/>
           <p:cNvSpPr/>
           <p:nvPr/>
         </p:nvSpPr>
@@ -17327,7 +18155,7 @@
       </p:sp>
       <p:sp>
         <p:nvSpPr>
-          <p:cNvPr id="775100229" name="Shape 2"/>
+          <p:cNvPr id="67592993" name="Shape 2"/>
           <p:cNvSpPr/>
           <p:nvPr/>
         </p:nvSpPr>
@@ -17362,7 +18190,7 @@
       </p:sp>
       <p:sp>
         <p:nvSpPr>
-          <p:cNvPr id="1621738107" name="Text 3"/>
+          <p:cNvPr id="782769866" name="Text 3"/>
           <p:cNvSpPr/>
           <p:nvPr/>
         </p:nvSpPr>
@@ -17402,7 +18230,7 @@
       </p:sp>
       <p:sp>
         <p:nvSpPr>
-          <p:cNvPr id="1148442585" name="Shape 4"/>
+          <p:cNvPr id="223052451" name="Shape 4"/>
           <p:cNvSpPr/>
           <p:nvPr/>
         </p:nvSpPr>
@@ -17437,7 +18265,7 @@
       </p:sp>
       <p:sp>
         <p:nvSpPr>
-          <p:cNvPr id="1744501253" name="Text 5"/>
+          <p:cNvPr id="1745903175" name="Text 5"/>
           <p:cNvSpPr/>
           <p:nvPr/>
         </p:nvSpPr>
@@ -17477,7 +18305,7 @@
       </p:sp>
       <p:sp>
         <p:nvSpPr>
-          <p:cNvPr id="460695486" name="Shape 6"/>
+          <p:cNvPr id="1709248165" name="Shape 6"/>
           <p:cNvSpPr/>
           <p:nvPr/>
         </p:nvSpPr>
@@ -17512,7 +18340,7 @@
       </p:sp>
       <p:sp>
         <p:nvSpPr>
-          <p:cNvPr id="2050961320" name="Text 7"/>
+          <p:cNvPr id="543400296" name="Text 7"/>
           <p:cNvSpPr/>
           <p:nvPr/>
         </p:nvSpPr>
@@ -17552,7 +18380,7 @@
       </p:sp>
       <p:sp>
         <p:nvSpPr>
-          <p:cNvPr id="218509527" name="Shape 8"/>
+          <p:cNvPr id="451302702" name="Shape 8"/>
           <p:cNvSpPr/>
           <p:nvPr/>
         </p:nvSpPr>
@@ -17587,7 +18415,7 @@
       </p:sp>
       <p:sp>
         <p:nvSpPr>
-          <p:cNvPr id="2138283786" name="Text 9"/>
+          <p:cNvPr id="854330110" name="Text 9"/>
           <p:cNvSpPr/>
           <p:nvPr/>
         </p:nvSpPr>
@@ -17627,7 +18455,7 @@
       </p:sp>
       <p:sp>
         <p:nvSpPr>
-          <p:cNvPr id="414677884" name="Shape 10"/>
+          <p:cNvPr id="1769544355" name="Shape 10"/>
           <p:cNvSpPr/>
           <p:nvPr/>
         </p:nvSpPr>
@@ -17662,7 +18490,7 @@
       </p:sp>
       <p:sp>
         <p:nvSpPr>
-          <p:cNvPr id="2124037517" name="Text 11"/>
+          <p:cNvPr id="26793059" name="Text 11"/>
           <p:cNvSpPr/>
           <p:nvPr/>
         </p:nvSpPr>
@@ -17720,7 +18548,7 @@
       </p:sp>
       <p:sp>
         <p:nvSpPr>
-          <p:cNvPr id="700739712" name="Shape 12"/>
+          <p:cNvPr id="268969913" name="Shape 12"/>
           <p:cNvSpPr/>
           <p:nvPr/>
         </p:nvSpPr>
@@ -17755,7 +18583,7 @@
       </p:sp>
       <p:sp>
         <p:nvSpPr>
-          <p:cNvPr id="2015214618" name="Text 13"/>
+          <p:cNvPr id="924979861" name="Text 13"/>
           <p:cNvSpPr/>
           <p:nvPr/>
         </p:nvSpPr>
@@ -17795,7 +18623,7 @@
       </p:sp>
       <p:sp>
         <p:nvSpPr>
-          <p:cNvPr id="1657540169" name="Shape 14"/>
+          <p:cNvPr id="13798968" name="Shape 14"/>
           <p:cNvSpPr/>
           <p:nvPr/>
         </p:nvSpPr>
@@ -17830,7 +18658,7 @@
       </p:sp>
       <p:sp>
         <p:nvSpPr>
-          <p:cNvPr id="298935552" name="Text 15"/>
+          <p:cNvPr id="1655464366" name="Text 15"/>
           <p:cNvSpPr/>
           <p:nvPr/>
         </p:nvSpPr>
@@ -17932,7 +18760,7 @@
       </p:sp>
       <p:sp>
         <p:nvSpPr>
-          <p:cNvPr id="1580608229" name="Shape 16"/>
+          <p:cNvPr id="1561890535" name="Shape 16"/>
           <p:cNvSpPr/>
           <p:nvPr/>
         </p:nvSpPr>
@@ -17967,7 +18795,7 @@
       </p:sp>
       <p:sp>
         <p:nvSpPr>
-          <p:cNvPr id="1792191284" name="Text 17"/>
+          <p:cNvPr id="1074169007" name="Text 17"/>
           <p:cNvSpPr/>
           <p:nvPr/>
         </p:nvSpPr>
@@ -18192,7 +19020,7 @@
       </p:sp>
       <p:sp>
         <p:nvSpPr>
-          <p:cNvPr id="292895066" name="Shape 18"/>
+          <p:cNvPr id="2097580143" name="Shape 18"/>
           <p:cNvSpPr/>
           <p:nvPr/>
         </p:nvSpPr>
@@ -18227,7 +19055,7 @@
       </p:sp>
       <p:sp>
         <p:nvSpPr>
-          <p:cNvPr id="614841042" name="Text 19"/>
+          <p:cNvPr id="1253515629" name="Text 19"/>
           <p:cNvSpPr/>
           <p:nvPr/>
         </p:nvSpPr>
@@ -18285,7 +19113,7 @@
       </p:sp>
       <p:sp>
         <p:nvSpPr>
-          <p:cNvPr id="954542394" name="Shape 20"/>
+          <p:cNvPr id="272988781" name="Shape 20"/>
           <p:cNvSpPr/>
           <p:nvPr/>
         </p:nvSpPr>
@@ -18320,7 +19148,7 @@
       </p:sp>
       <p:sp>
         <p:nvSpPr>
-          <p:cNvPr id="1290429031" name="Text 21"/>
+          <p:cNvPr id="774070349" name="Text 21"/>
           <p:cNvSpPr/>
           <p:nvPr/>
         </p:nvSpPr>
@@ -18360,7 +19188,7 @@
       </p:sp>
       <p:sp>
         <p:nvSpPr>
-          <p:cNvPr id="1426431664" name="Shape 22"/>
+          <p:cNvPr id="948098601" name="Shape 22"/>
           <p:cNvSpPr/>
           <p:nvPr/>
         </p:nvSpPr>
@@ -18395,7 +19223,7 @@
       </p:sp>
       <p:sp>
         <p:nvSpPr>
-          <p:cNvPr id="621825463" name="Text 23"/>
+          <p:cNvPr id="1789141154" name="Text 23"/>
           <p:cNvSpPr/>
           <p:nvPr/>
         </p:nvSpPr>
@@ -18497,7 +19325,7 @@
       </p:sp>
       <p:sp>
         <p:nvSpPr>
-          <p:cNvPr id="919098144" name="Shape 24"/>
+          <p:cNvPr id="639852824" name="Shape 24"/>
           <p:cNvSpPr/>
           <p:nvPr/>
         </p:nvSpPr>
@@ -18532,7 +19360,7 @@
       </p:sp>
       <p:sp>
         <p:nvSpPr>
-          <p:cNvPr id="1961581113" name="Text 25"/>
+          <p:cNvPr id="1294596966" name="Text 25"/>
           <p:cNvSpPr/>
           <p:nvPr/>
         </p:nvSpPr>
@@ -18627,7 +19455,7 @@
       </p:sp>
       <p:sp>
         <p:nvSpPr>
-          <p:cNvPr id="880568188" name="Shape 26"/>
+          <p:cNvPr id="980807932" name="Shape 26"/>
           <p:cNvSpPr/>
           <p:nvPr/>
         </p:nvSpPr>
@@ -18662,7 +19490,7 @@
       </p:sp>
       <p:sp>
         <p:nvSpPr>
-          <p:cNvPr id="180675057" name="Text 27"/>
+          <p:cNvPr id="188754047" name="Text 27"/>
           <p:cNvSpPr/>
           <p:nvPr/>
         </p:nvSpPr>
@@ -18720,7 +19548,7 @@
       </p:sp>
       <p:sp>
         <p:nvSpPr>
-          <p:cNvPr id="831128443" name="Shape 28"/>
+          <p:cNvPr id="1608839020" name="Shape 28"/>
           <p:cNvSpPr/>
           <p:nvPr/>
         </p:nvSpPr>
@@ -18755,7 +19583,7 @@
       </p:sp>
       <p:sp>
         <p:nvSpPr>
-          <p:cNvPr id="671258179" name="Text 29"/>
+          <p:cNvPr id="1000283240" name="Text 29"/>
           <p:cNvSpPr/>
           <p:nvPr/>
         </p:nvSpPr>
@@ -18795,7 +19623,7 @@
       </p:sp>
       <p:sp>
         <p:nvSpPr>
-          <p:cNvPr id="768014270" name="Shape 30"/>
+          <p:cNvPr id="200263514" name="Shape 30"/>
           <p:cNvSpPr/>
           <p:nvPr/>
         </p:nvSpPr>
@@ -18830,7 +19658,7 @@
       </p:sp>
       <p:sp>
         <p:nvSpPr>
-          <p:cNvPr id="2134279098" name="Text 31"/>
+          <p:cNvPr id="388554372" name="Text 31"/>
           <p:cNvSpPr/>
           <p:nvPr/>
         </p:nvSpPr>
@@ -18920,7 +19748,7 @@
       </p:sp>
       <p:sp>
         <p:nvSpPr>
-          <p:cNvPr id="2124889806" name="Shape 32"/>
+          <p:cNvPr id="353512486" name="Shape 32"/>
           <p:cNvSpPr/>
           <p:nvPr/>
         </p:nvSpPr>
@@ -18955,7 +19783,7 @@
       </p:sp>
       <p:sp>
         <p:nvSpPr>
-          <p:cNvPr id="1472575847" name="Text 33"/>
+          <p:cNvPr id="546983195" name="Text 33"/>
           <p:cNvSpPr/>
           <p:nvPr/>
         </p:nvSpPr>
@@ -19192,7 +20020,7 @@
       </p:sp>
       <p:sp>
         <p:nvSpPr>
-          <p:cNvPr id="1152855111" name="Text 34"/>
+          <p:cNvPr id="69191390" name="Text 34"/>
           <p:cNvSpPr/>
           <p:nvPr/>
         </p:nvSpPr>

--- a/docs/HealthSOA_Presentation.pptx
+++ b/docs/HealthSOA_Presentation.pptx
@@ -262,7 +262,7 @@
       </p:grpSpPr>
       <p:sp>
         <p:nvSpPr>
-          <p:cNvPr id="626679027" name="Slide Image Placeholder 1"/>
+          <p:cNvPr id="2089954372" name="Slide Image Placeholder 1"/>
           <p:cNvSpPr>
             <a:spLocks noChangeAspect="1" noGrp="1" noRot="1"/>
           </p:cNvSpPr>
@@ -274,7 +274,7 @@
       </p:sp>
       <p:sp>
         <p:nvSpPr>
-          <p:cNvPr id="2059495477" name="Notes Placeholder 2"/>
+          <p:cNvPr id="1945867802" name="Notes Placeholder 2"/>
           <p:cNvSpPr>
             <a:spLocks noGrp="1"/>
           </p:cNvSpPr>
@@ -296,7 +296,7 @@
       </p:sp>
       <p:sp>
         <p:nvSpPr>
-          <p:cNvPr id="1587746254" name="Slide Number Placeholder 3"/>
+          <p:cNvPr id="1212729718" name="Slide Number Placeholder 3"/>
           <p:cNvSpPr>
             <a:spLocks noGrp="1"/>
           </p:cNvSpPr>
@@ -347,7 +347,7 @@
       </p:grpSpPr>
       <p:sp>
         <p:nvSpPr>
-          <p:cNvPr id="612980227" name="Slide Image Placeholder 1"/>
+          <p:cNvPr id="1153086361" name="Slide Image Placeholder 1"/>
           <p:cNvSpPr>
             <a:spLocks noChangeAspect="1" noGrp="1" noRot="1"/>
           </p:cNvSpPr>
@@ -359,7 +359,7 @@
       </p:sp>
       <p:sp>
         <p:nvSpPr>
-          <p:cNvPr id="234317152" name="Notes Placeholder 2"/>
+          <p:cNvPr id="962132368" name="Notes Placeholder 2"/>
           <p:cNvSpPr>
             <a:spLocks noGrp="1"/>
           </p:cNvSpPr>
@@ -657,7 +657,7 @@
       </p:sp>
       <p:sp>
         <p:nvSpPr>
-          <p:cNvPr id="701688697" name="Slide Number Placeholder 3"/>
+          <p:cNvPr id="127304977" name="Slide Number Placeholder 3"/>
           <p:cNvSpPr>
             <a:spLocks noGrp="1"/>
           </p:cNvSpPr>
@@ -708,7 +708,7 @@
       </p:grpSpPr>
       <p:sp>
         <p:nvSpPr>
-          <p:cNvPr id="789519722" name="Slide Image Placeholder 1"/>
+          <p:cNvPr id="1249998501" name="Slide Image Placeholder 1"/>
           <p:cNvSpPr>
             <a:spLocks noChangeAspect="1" noGrp="1" noRot="1"/>
           </p:cNvSpPr>
@@ -720,7 +720,7 @@
       </p:sp>
       <p:sp>
         <p:nvSpPr>
-          <p:cNvPr id="2114689095" name="Notes Placeholder 2"/>
+          <p:cNvPr id="903716592" name="Notes Placeholder 2"/>
           <p:cNvSpPr>
             <a:spLocks noGrp="1"/>
           </p:cNvSpPr>
@@ -742,7 +742,7 @@
       </p:sp>
       <p:sp>
         <p:nvSpPr>
-          <p:cNvPr id="1954071644" name="Slide Number Placeholder 3"/>
+          <p:cNvPr id="157050398" name="Slide Number Placeholder 3"/>
           <p:cNvSpPr>
             <a:spLocks noGrp="1"/>
           </p:cNvSpPr>
@@ -793,7 +793,7 @@
       </p:grpSpPr>
       <p:sp>
         <p:nvSpPr>
-          <p:cNvPr id="1583176935" name="Slide Image Placeholder 1"/>
+          <p:cNvPr id="451148523" name="Slide Image Placeholder 1"/>
           <p:cNvSpPr>
             <a:spLocks noChangeAspect="1" noGrp="1" noRot="1"/>
           </p:cNvSpPr>
@@ -805,7 +805,7 @@
       </p:sp>
       <p:sp>
         <p:nvSpPr>
-          <p:cNvPr id="681379675" name="Notes Placeholder 2"/>
+          <p:cNvPr id="69493313" name="Notes Placeholder 2"/>
           <p:cNvSpPr>
             <a:spLocks noGrp="1"/>
           </p:cNvSpPr>
@@ -827,7 +827,7 @@
       </p:sp>
       <p:sp>
         <p:nvSpPr>
-          <p:cNvPr id="753898833" name="Slide Number Placeholder 3"/>
+          <p:cNvPr id="451758105" name="Slide Number Placeholder 3"/>
           <p:cNvSpPr>
             <a:spLocks noGrp="1"/>
           </p:cNvSpPr>
@@ -878,7 +878,7 @@
       </p:grpSpPr>
       <p:sp>
         <p:nvSpPr>
-          <p:cNvPr id="64590185" name="Slide Image Placeholder 1"/>
+          <p:cNvPr id="1079805678" name="Slide Image Placeholder 1"/>
           <p:cNvSpPr>
             <a:spLocks noChangeAspect="1" noGrp="1" noRot="1"/>
           </p:cNvSpPr>
@@ -890,7 +890,7 @@
       </p:sp>
       <p:sp>
         <p:nvSpPr>
-          <p:cNvPr id="267710022" name="Notes Placeholder 2"/>
+          <p:cNvPr id="344749749" name="Notes Placeholder 2"/>
           <p:cNvSpPr>
             <a:spLocks noGrp="1"/>
           </p:cNvSpPr>
@@ -912,7 +912,7 @@
       </p:sp>
       <p:sp>
         <p:nvSpPr>
-          <p:cNvPr id="917500280" name="Slide Number Placeholder 3"/>
+          <p:cNvPr id="1697768686" name="Slide Number Placeholder 3"/>
           <p:cNvSpPr>
             <a:spLocks noGrp="1"/>
           </p:cNvSpPr>
@@ -963,7 +963,7 @@
       </p:grpSpPr>
       <p:sp>
         <p:nvSpPr>
-          <p:cNvPr id="1802872693" name="Slide Image Placeholder 1"/>
+          <p:cNvPr id="1380820192" name="Slide Image Placeholder 1"/>
           <p:cNvSpPr>
             <a:spLocks noChangeAspect="1" noGrp="1" noRot="1"/>
           </p:cNvSpPr>
@@ -975,7 +975,7 @@
       </p:sp>
       <p:sp>
         <p:nvSpPr>
-          <p:cNvPr id="674082157" name="Notes Placeholder 2"/>
+          <p:cNvPr id="1942604599" name="Notes Placeholder 2"/>
           <p:cNvSpPr>
             <a:spLocks noGrp="1"/>
           </p:cNvSpPr>
@@ -997,7 +997,7 @@
       </p:sp>
       <p:sp>
         <p:nvSpPr>
-          <p:cNvPr id="1623866983" name="Slide Number Placeholder 3"/>
+          <p:cNvPr id="1693957689" name="Slide Number Placeholder 3"/>
           <p:cNvSpPr>
             <a:spLocks noGrp="1"/>
           </p:cNvSpPr>
@@ -1048,7 +1048,7 @@
       </p:grpSpPr>
       <p:sp>
         <p:nvSpPr>
-          <p:cNvPr id="1884681035" name="Slide Image Placeholder 1"/>
+          <p:cNvPr id="611054497" name="Slide Image Placeholder 1"/>
           <p:cNvSpPr>
             <a:spLocks noChangeAspect="1" noGrp="1" noRot="1"/>
           </p:cNvSpPr>
@@ -1060,7 +1060,7 @@
       </p:sp>
       <p:sp>
         <p:nvSpPr>
-          <p:cNvPr id="1232315033" name="Notes Placeholder 2"/>
+          <p:cNvPr id="581164057" name="Notes Placeholder 2"/>
           <p:cNvSpPr>
             <a:spLocks noGrp="1"/>
           </p:cNvSpPr>
@@ -1082,7 +1082,7 @@
       </p:sp>
       <p:sp>
         <p:nvSpPr>
-          <p:cNvPr id="1606916827" name="Slide Number Placeholder 3"/>
+          <p:cNvPr id="1202247768" name="Slide Number Placeholder 3"/>
           <p:cNvSpPr>
             <a:spLocks noGrp="1"/>
           </p:cNvSpPr>
@@ -1133,7 +1133,7 @@
       </p:grpSpPr>
       <p:sp>
         <p:nvSpPr>
-          <p:cNvPr id="46362586" name="Slide Image Placeholder 1"/>
+          <p:cNvPr id="275533039" name="Slide Image Placeholder 1"/>
           <p:cNvSpPr>
             <a:spLocks noChangeAspect="1" noGrp="1" noRot="1"/>
           </p:cNvSpPr>
@@ -1145,7 +1145,7 @@
       </p:sp>
       <p:sp>
         <p:nvSpPr>
-          <p:cNvPr id="1321213556" name="Notes Placeholder 2"/>
+          <p:cNvPr id="127138029" name="Notes Placeholder 2"/>
           <p:cNvSpPr>
             <a:spLocks noGrp="1"/>
           </p:cNvSpPr>
@@ -1167,7 +1167,7 @@
       </p:sp>
       <p:sp>
         <p:nvSpPr>
-          <p:cNvPr id="1085766808" name="Slide Number Placeholder 3"/>
+          <p:cNvPr id="1441390876" name="Slide Number Placeholder 3"/>
           <p:cNvSpPr>
             <a:spLocks noGrp="1"/>
           </p:cNvSpPr>
@@ -1218,7 +1218,7 @@
       </p:grpSpPr>
       <p:sp>
         <p:nvSpPr>
-          <p:cNvPr id="1476715194" name="Slide Image Placeholder 1"/>
+          <p:cNvPr id="315404110" name="Slide Image Placeholder 1"/>
           <p:cNvSpPr>
             <a:spLocks noChangeAspect="1" noGrp="1" noRot="1"/>
           </p:cNvSpPr>
@@ -1230,7 +1230,7 @@
       </p:sp>
       <p:sp>
         <p:nvSpPr>
-          <p:cNvPr id="1254638864" name="Notes Placeholder 2"/>
+          <p:cNvPr id="686736717" name="Notes Placeholder 2"/>
           <p:cNvSpPr>
             <a:spLocks noGrp="1"/>
           </p:cNvSpPr>
@@ -1252,7 +1252,7 @@
       </p:sp>
       <p:sp>
         <p:nvSpPr>
-          <p:cNvPr id="1335885569" name="Slide Number Placeholder 3"/>
+          <p:cNvPr id="1915283589" name="Slide Number Placeholder 3"/>
           <p:cNvSpPr>
             <a:spLocks noGrp="1"/>
           </p:cNvSpPr>
@@ -1303,7 +1303,7 @@
       </p:grpSpPr>
       <p:sp>
         <p:nvSpPr>
-          <p:cNvPr id="588945216" name="Slide Image Placeholder 1"/>
+          <p:cNvPr id="373018027" name="Slide Image Placeholder 1"/>
           <p:cNvSpPr>
             <a:spLocks noChangeAspect="1" noGrp="1" noRot="1"/>
           </p:cNvSpPr>
@@ -1315,7 +1315,7 @@
       </p:sp>
       <p:sp>
         <p:nvSpPr>
-          <p:cNvPr id="1314490418" name="Notes Placeholder 2"/>
+          <p:cNvPr id="352786472" name="Notes Placeholder 2"/>
           <p:cNvSpPr>
             <a:spLocks noGrp="1"/>
           </p:cNvSpPr>
@@ -1337,7 +1337,7 @@
       </p:sp>
       <p:sp>
         <p:nvSpPr>
-          <p:cNvPr id="1207404741" name="Slide Number Placeholder 3"/>
+          <p:cNvPr id="1232097058" name="Slide Number Placeholder 3"/>
           <p:cNvSpPr>
             <a:spLocks noGrp="1"/>
           </p:cNvSpPr>
@@ -1388,7 +1388,7 @@
       </p:grpSpPr>
       <p:sp>
         <p:nvSpPr>
-          <p:cNvPr id="2009097908" name="Slide Image Placeholder 1"/>
+          <p:cNvPr id="40508627" name="Slide Image Placeholder 1"/>
           <p:cNvSpPr>
             <a:spLocks noChangeAspect="1" noGrp="1" noRot="1"/>
           </p:cNvSpPr>
@@ -1400,7 +1400,7 @@
       </p:sp>
       <p:sp>
         <p:nvSpPr>
-          <p:cNvPr id="11270481" name="Notes Placeholder 2"/>
+          <p:cNvPr id="1539930360" name="Notes Placeholder 2"/>
           <p:cNvSpPr>
             <a:spLocks noGrp="1"/>
           </p:cNvSpPr>
@@ -1422,7 +1422,7 @@
       </p:sp>
       <p:sp>
         <p:nvSpPr>
-          <p:cNvPr id="272092279" name="Slide Number Placeholder 3"/>
+          <p:cNvPr id="171536102" name="Slide Number Placeholder 3"/>
           <p:cNvSpPr>
             <a:spLocks noGrp="1"/>
           </p:cNvSpPr>
@@ -1473,7 +1473,7 @@
       </p:grpSpPr>
       <p:sp>
         <p:nvSpPr>
-          <p:cNvPr id="1949798686" name="Slide Image Placeholder 1"/>
+          <p:cNvPr id="330152906" name="Slide Image Placeholder 1"/>
           <p:cNvSpPr>
             <a:spLocks noChangeAspect="1" noGrp="1" noRot="1"/>
           </p:cNvSpPr>
@@ -1485,7 +1485,7 @@
       </p:sp>
       <p:sp>
         <p:nvSpPr>
-          <p:cNvPr id="523295485" name="Notes Placeholder 2"/>
+          <p:cNvPr id="938633596" name="Notes Placeholder 2"/>
           <p:cNvSpPr>
             <a:spLocks noGrp="1"/>
           </p:cNvSpPr>
@@ -1507,7 +1507,7 @@
       </p:sp>
       <p:sp>
         <p:nvSpPr>
-          <p:cNvPr id="880832283" name="Slide Number Placeholder 3"/>
+          <p:cNvPr id="1364965392" name="Slide Number Placeholder 3"/>
           <p:cNvSpPr>
             <a:spLocks noGrp="1"/>
           </p:cNvSpPr>
@@ -1558,7 +1558,7 @@
       </p:grpSpPr>
       <p:sp>
         <p:nvSpPr>
-          <p:cNvPr id="1329736853" name="Slide Image Placeholder 1"/>
+          <p:cNvPr id="1142717333" name="Slide Image Placeholder 1"/>
           <p:cNvSpPr>
             <a:spLocks noChangeAspect="1" noGrp="1" noRot="1"/>
           </p:cNvSpPr>
@@ -1570,7 +1570,7 @@
       </p:sp>
       <p:sp>
         <p:nvSpPr>
-          <p:cNvPr id="1972648332" name="Notes Placeholder 2"/>
+          <p:cNvPr id="1394996200" name="Notes Placeholder 2"/>
           <p:cNvSpPr>
             <a:spLocks noGrp="1"/>
           </p:cNvSpPr>
@@ -1592,7 +1592,7 @@
       </p:sp>
       <p:sp>
         <p:nvSpPr>
-          <p:cNvPr id="1082747887" name="Slide Number Placeholder 3"/>
+          <p:cNvPr id="1539916380" name="Slide Number Placeholder 3"/>
           <p:cNvSpPr>
             <a:spLocks noGrp="1"/>
           </p:cNvSpPr>
@@ -1643,7 +1643,7 @@
       </p:grpSpPr>
       <p:sp>
         <p:nvSpPr>
-          <p:cNvPr id="1094231523" name="Slide Image Placeholder 1"/>
+          <p:cNvPr id="2025343503" name="Slide Image Placeholder 1"/>
           <p:cNvSpPr>
             <a:spLocks noChangeAspect="1" noGrp="1" noRot="1"/>
           </p:cNvSpPr>
@@ -1655,7 +1655,7 @@
       </p:sp>
       <p:sp>
         <p:nvSpPr>
-          <p:cNvPr id="1629396721" name="Notes Placeholder 2"/>
+          <p:cNvPr id="1272939152" name="Notes Placeholder 2"/>
           <p:cNvSpPr>
             <a:spLocks noGrp="1"/>
           </p:cNvSpPr>
@@ -1677,7 +1677,7 @@
       </p:sp>
       <p:sp>
         <p:nvSpPr>
-          <p:cNvPr id="1005857041" name="Slide Number Placeholder 3"/>
+          <p:cNvPr id="483958534" name="Slide Number Placeholder 3"/>
           <p:cNvSpPr>
             <a:spLocks noGrp="1"/>
           </p:cNvSpPr>
@@ -1728,7 +1728,7 @@
       </p:grpSpPr>
       <p:sp>
         <p:nvSpPr>
-          <p:cNvPr id="976210321" name="Slide Image Placeholder 1"/>
+          <p:cNvPr id="2122075297" name="Slide Image Placeholder 1"/>
           <p:cNvSpPr>
             <a:spLocks noChangeAspect="1" noGrp="1" noRot="1"/>
           </p:cNvSpPr>
@@ -1740,7 +1740,7 @@
       </p:sp>
       <p:sp>
         <p:nvSpPr>
-          <p:cNvPr id="1819560302" name="Notes Placeholder 2"/>
+          <p:cNvPr id="893260755" name="Notes Placeholder 2"/>
           <p:cNvSpPr>
             <a:spLocks noGrp="1"/>
           </p:cNvSpPr>
@@ -1802,7 +1802,7 @@
       </p:sp>
       <p:sp>
         <p:nvSpPr>
-          <p:cNvPr id="393895242" name="Slide Number Placeholder 3"/>
+          <p:cNvPr id="579846947" name="Slide Number Placeholder 3"/>
           <p:cNvSpPr>
             <a:spLocks noGrp="1"/>
           </p:cNvSpPr>
@@ -1853,7 +1853,7 @@
       </p:grpSpPr>
       <p:sp>
         <p:nvSpPr>
-          <p:cNvPr id="1680558425" name="Slide Image Placeholder 1"/>
+          <p:cNvPr id="1853481794" name="Slide Image Placeholder 1"/>
           <p:cNvSpPr>
             <a:spLocks noChangeAspect="1" noGrp="1" noRot="1"/>
           </p:cNvSpPr>
@@ -1865,7 +1865,7 @@
       </p:sp>
       <p:sp>
         <p:nvSpPr>
-          <p:cNvPr id="613564763" name="Notes Placeholder 2"/>
+          <p:cNvPr id="1343360001" name="Notes Placeholder 2"/>
           <p:cNvSpPr>
             <a:spLocks noGrp="1"/>
           </p:cNvSpPr>
@@ -2179,7 +2179,7 @@
       </p:sp>
       <p:sp>
         <p:nvSpPr>
-          <p:cNvPr id="1748045876" name="Slide Number Placeholder 3"/>
+          <p:cNvPr id="1602620562" name="Slide Number Placeholder 3"/>
           <p:cNvSpPr>
             <a:spLocks noGrp="1"/>
           </p:cNvSpPr>
@@ -2230,7 +2230,7 @@
       </p:grpSpPr>
       <p:sp>
         <p:nvSpPr>
-          <p:cNvPr id="1428978981" name="Slide Image Placeholder 1"/>
+          <p:cNvPr id="1037500825" name="Slide Image Placeholder 1"/>
           <p:cNvSpPr>
             <a:spLocks noChangeAspect="1" noGrp="1" noRot="1"/>
           </p:cNvSpPr>
@@ -2242,7 +2242,7 @@
       </p:sp>
       <p:sp>
         <p:nvSpPr>
-          <p:cNvPr id="57913864" name="Notes Placeholder 2"/>
+          <p:cNvPr id="1830375914" name="Notes Placeholder 2"/>
           <p:cNvSpPr>
             <a:spLocks noGrp="1"/>
           </p:cNvSpPr>
@@ -2484,7 +2484,7 @@
       </p:sp>
       <p:sp>
         <p:nvSpPr>
-          <p:cNvPr id="201728757" name="Slide Number Placeholder 3"/>
+          <p:cNvPr id="213619260" name="Slide Number Placeholder 3"/>
           <p:cNvSpPr>
             <a:spLocks noGrp="1"/>
           </p:cNvSpPr>
@@ -2854,7 +2854,7 @@
       </p:grpSpPr>
       <p:sp>
         <p:nvSpPr>
-          <p:cNvPr id="2070417838" name="Shape 0"/>
+          <p:cNvPr id="492001506" name="Shape 0"/>
           <p:cNvSpPr/>
           <p:nvPr/>
         </p:nvSpPr>
@@ -2884,7 +2884,7 @@
       </p:sp>
       <p:sp>
         <p:nvSpPr>
-          <p:cNvPr id="914044834" name="Text 1"/>
+          <p:cNvPr id="71148955" name="Text 1"/>
           <p:cNvSpPr/>
           <p:nvPr/>
         </p:nvSpPr>
@@ -2924,7 +2924,7 @@
       </p:sp>
       <p:sp>
         <p:nvSpPr>
-          <p:cNvPr id="1999010290" name="Text 2"/>
+          <p:cNvPr id="1784113037" name="Text 2"/>
           <p:cNvSpPr/>
           <p:nvPr/>
         </p:nvSpPr>
@@ -2982,7 +2982,7 @@
       </p:sp>
       <p:sp>
         <p:nvSpPr>
-          <p:cNvPr id="1718697966" name="Text 3"/>
+          <p:cNvPr id="1575819432" name="Text 3"/>
           <p:cNvSpPr/>
           <p:nvPr/>
         </p:nvSpPr>
@@ -3022,7 +3022,7 @@
       </p:sp>
       <p:sp>
         <p:nvSpPr>
-          <p:cNvPr id="213551221" name="Text 4"/>
+          <p:cNvPr id="1246749169" name="Text 4"/>
           <p:cNvSpPr/>
           <p:nvPr/>
         </p:nvSpPr>
@@ -3102,7 +3102,7 @@
       </p:grpSpPr>
       <p:sp>
         <p:nvSpPr>
-          <p:cNvPr id="1398045218" name="Text 0"/>
+          <p:cNvPr id="278927272" name="Text 0"/>
           <p:cNvSpPr/>
           <p:nvPr/>
         </p:nvSpPr>
@@ -3142,7 +3142,7 @@
       </p:sp>
       <p:sp>
         <p:nvSpPr>
-          <p:cNvPr id="528561758" name="Shape 1"/>
+          <p:cNvPr id="1053630615" name="Shape 1"/>
           <p:cNvSpPr/>
           <p:nvPr/>
         </p:nvSpPr>
@@ -3172,7 +3172,7 @@
       </p:sp>
       <p:sp>
         <p:nvSpPr>
-          <p:cNvPr id="672568622" name="Shape 2"/>
+          <p:cNvPr id="93106968" name="Shape 2"/>
           <p:cNvSpPr/>
           <p:nvPr/>
         </p:nvSpPr>
@@ -3207,7 +3207,7 @@
       </p:sp>
       <p:sp>
         <p:nvSpPr>
-          <p:cNvPr id="899474782" name="Text 3"/>
+          <p:cNvPr id="1679145593" name="Text 3"/>
           <p:cNvSpPr/>
           <p:nvPr/>
         </p:nvSpPr>
@@ -3247,7 +3247,7 @@
       </p:sp>
       <p:sp>
         <p:nvSpPr>
-          <p:cNvPr id="1179412029" name="Text 4"/>
+          <p:cNvPr id="1444576854" name="Text 4"/>
           <p:cNvSpPr/>
           <p:nvPr/>
         </p:nvSpPr>
@@ -3287,7 +3287,7 @@
       </p:sp>
       <p:sp>
         <p:nvSpPr>
-          <p:cNvPr id="1616332113" name="Text 5"/>
+          <p:cNvPr id="1093471643" name="Text 5"/>
           <p:cNvSpPr/>
           <p:nvPr/>
         </p:nvSpPr>
@@ -3492,7 +3492,7 @@
       </p:sp>
       <p:sp>
         <p:nvSpPr>
-          <p:cNvPr id="1198445622" name="Text 6"/>
+          <p:cNvPr id="2105237510" name="Text 6"/>
           <p:cNvSpPr/>
           <p:nvPr/>
         </p:nvSpPr>
@@ -3532,7 +3532,7 @@
       </p:sp>
       <p:sp>
         <p:nvSpPr>
-          <p:cNvPr id="982274871" name="Text 7"/>
+          <p:cNvPr id="122594552" name="Text 7"/>
           <p:cNvSpPr/>
           <p:nvPr/>
         </p:nvSpPr>
@@ -3627,7 +3627,7 @@
       </p:sp>
       <p:sp>
         <p:nvSpPr>
-          <p:cNvPr id="1804010435" name="Text 8"/>
+          <p:cNvPr id="3092876" name="Text 8"/>
           <p:cNvSpPr/>
           <p:nvPr/>
         </p:nvSpPr>
@@ -3667,7 +3667,7 @@
       </p:sp>
       <p:sp>
         <p:nvSpPr>
-          <p:cNvPr id="1876287052" name="Text 9"/>
+          <p:cNvPr id="1745477001" name="Text 9"/>
           <p:cNvSpPr/>
           <p:nvPr/>
         </p:nvSpPr>
@@ -3740,7 +3740,7 @@
       </p:sp>
       <p:sp>
         <p:nvSpPr>
-          <p:cNvPr id="1800540494" name="Text 10"/>
+          <p:cNvPr id="943954462" name="Text 10"/>
           <p:cNvSpPr/>
           <p:nvPr/>
         </p:nvSpPr>
@@ -3780,7 +3780,7 @@
       </p:sp>
       <p:sp>
         <p:nvSpPr>
-          <p:cNvPr id="970207017" name="Text 11"/>
+          <p:cNvPr id="73571647" name="Text 11"/>
           <p:cNvSpPr/>
           <p:nvPr/>
         </p:nvSpPr>
@@ -3930,7 +3930,7 @@
       </p:sp>
       <p:sp>
         <p:nvSpPr>
-          <p:cNvPr id="984372768" name="Text 12"/>
+          <p:cNvPr id="660818060" name="Text 12"/>
           <p:cNvSpPr/>
           <p:nvPr/>
         </p:nvSpPr>
@@ -3992,7 +3992,7 @@
       </p:sp>
       <p:sp>
         <p:nvSpPr>
-          <p:cNvPr id="1047005773" name="Text 13"/>
+          <p:cNvPr id="392295263" name="Text 13"/>
           <p:cNvSpPr/>
           <p:nvPr/>
         </p:nvSpPr>
@@ -4172,7 +4172,7 @@
       </p:sp>
       <p:sp>
         <p:nvSpPr>
-          <p:cNvPr id="2101665279" name="Text 14"/>
+          <p:cNvPr id="1346706004" name="Text 14"/>
           <p:cNvSpPr/>
           <p:nvPr/>
         </p:nvSpPr>
@@ -4212,7 +4212,7 @@
       </p:sp>
       <p:sp>
         <p:nvSpPr>
-          <p:cNvPr id="898521247" name="Text 15"/>
+          <p:cNvPr id="1651755503" name="Text 15"/>
           <p:cNvSpPr/>
           <p:nvPr/>
         </p:nvSpPr>
@@ -4340,7 +4340,7 @@
       </p:sp>
       <p:sp>
         <p:nvSpPr>
-          <p:cNvPr id="1310731210" name="Text 16"/>
+          <p:cNvPr id="1355242964" name="Text 16"/>
           <p:cNvSpPr/>
           <p:nvPr/>
         </p:nvSpPr>
@@ -4402,7 +4402,7 @@
       </p:sp>
       <p:sp>
         <p:nvSpPr>
-          <p:cNvPr id="1312369041" name="Text 17"/>
+          <p:cNvPr id="1422741477" name="Text 17"/>
           <p:cNvSpPr/>
           <p:nvPr/>
         </p:nvSpPr>
@@ -4596,7 +4596,7 @@
       </p:sp>
       <p:sp>
         <p:nvSpPr>
-          <p:cNvPr id="82846198" name="Shape 18"/>
+          <p:cNvPr id="1245351748" name="Shape 18"/>
           <p:cNvSpPr/>
           <p:nvPr/>
         </p:nvSpPr>
@@ -4631,7 +4631,7 @@
       </p:sp>
       <p:sp>
         <p:nvSpPr>
-          <p:cNvPr id="114130720" name="Text 19"/>
+          <p:cNvPr id="822465975" name="Text 19"/>
           <p:cNvSpPr/>
           <p:nvPr/>
         </p:nvSpPr>
@@ -4671,7 +4671,7 @@
       </p:sp>
       <p:sp>
         <p:nvSpPr>
-          <p:cNvPr id="2094211923" name="Text 20"/>
+          <p:cNvPr id="208934186" name="Text 20"/>
           <p:cNvSpPr/>
           <p:nvPr/>
         </p:nvSpPr>
@@ -4733,7 +4733,7 @@
       </p:sp>
       <p:sp>
         <p:nvSpPr>
-          <p:cNvPr id="2136243752" name="Text 21"/>
+          <p:cNvPr id="1346707400" name="Text 21"/>
           <p:cNvSpPr/>
           <p:nvPr/>
         </p:nvSpPr>
@@ -4839,7 +4839,7 @@
       </p:sp>
       <p:sp>
         <p:nvSpPr>
-          <p:cNvPr id="1364632384" name="Text 22"/>
+          <p:cNvPr id="311330918" name="Text 22"/>
           <p:cNvSpPr/>
           <p:nvPr/>
         </p:nvSpPr>
@@ -4901,7 +4901,7 @@
       </p:sp>
       <p:sp>
         <p:nvSpPr>
-          <p:cNvPr id="573045302" name="Text 23"/>
+          <p:cNvPr id="214026803" name="Text 23"/>
           <p:cNvSpPr/>
           <p:nvPr/>
         </p:nvSpPr>
@@ -5073,7 +5073,7 @@
       </p:sp>
       <p:sp>
         <p:nvSpPr>
-          <p:cNvPr id="1593153168" name="Text 24"/>
+          <p:cNvPr id="2046467529" name="Text 24"/>
           <p:cNvSpPr/>
           <p:nvPr/>
         </p:nvSpPr>
@@ -5135,7 +5135,7 @@
       </p:sp>
       <p:sp>
         <p:nvSpPr>
-          <p:cNvPr id="1009765390" name="Text 25"/>
+          <p:cNvPr id="569182435" name="Text 25"/>
           <p:cNvSpPr/>
           <p:nvPr/>
         </p:nvSpPr>
@@ -5300,7 +5300,7 @@
       </p:sp>
       <p:sp>
         <p:nvSpPr>
-          <p:cNvPr id="1139423510" name="Text 26"/>
+          <p:cNvPr id="2061953715" name="Text 26"/>
           <p:cNvSpPr/>
           <p:nvPr/>
         </p:nvSpPr>
@@ -5362,7 +5362,7 @@
       </p:sp>
       <p:sp>
         <p:nvSpPr>
-          <p:cNvPr id="263103992" name="Text 27"/>
+          <p:cNvPr id="2112306945" name="Text 27"/>
           <p:cNvSpPr/>
           <p:nvPr/>
         </p:nvSpPr>
@@ -5724,7 +5724,7 @@
       </p:grpSpPr>
       <p:sp>
         <p:nvSpPr>
-          <p:cNvPr id="1562884865" name="Text 0"/>
+          <p:cNvPr id="576005669" name="Text 0"/>
           <p:cNvSpPr/>
           <p:nvPr/>
         </p:nvSpPr>
@@ -5786,7 +5786,7 @@
       </p:sp>
       <p:sp>
         <p:nvSpPr>
-          <p:cNvPr id="2011369957" name="Text 1"/>
+          <p:cNvPr id="2081088791" name="Text 1"/>
           <p:cNvSpPr/>
           <p:nvPr/>
         </p:nvSpPr>
@@ -5815,7 +5815,7 @@
       </p:sp>
       <p:sp>
         <p:nvSpPr>
-          <p:cNvPr id="354141629" name="Text 2"/>
+          <p:cNvPr id="1638746806" name="Text 2"/>
           <p:cNvSpPr/>
           <p:nvPr/>
         </p:nvSpPr>
@@ -5844,7 +5844,7 @@
       </p:sp>
       <p:sp>
         <p:nvSpPr>
-          <p:cNvPr id="979448960" name="Text 1"/>
+          <p:cNvPr id="1843853955" name="Text 1"/>
           <p:cNvSpPr/>
           <p:nvPr/>
         </p:nvSpPr>
@@ -5924,7 +5924,7 @@
       </p:grpSpPr>
       <p:sp>
         <p:nvSpPr>
-          <p:cNvPr id="441270449" name="Text 0"/>
+          <p:cNvPr id="1112175942" name="Text 0"/>
           <p:cNvSpPr/>
           <p:nvPr/>
         </p:nvSpPr>
@@ -5964,7 +5964,7 @@
       </p:sp>
       <p:sp>
         <p:nvSpPr>
-          <p:cNvPr id="239086865" name="Shape 1"/>
+          <p:cNvPr id="1798459174" name="Shape 1"/>
           <p:cNvSpPr/>
           <p:nvPr/>
         </p:nvSpPr>
@@ -5994,7 +5994,7 @@
       </p:sp>
       <p:sp>
         <p:nvSpPr>
-          <p:cNvPr id="1943988369" name="Shape 2"/>
+          <p:cNvPr id="1319262052" name="Shape 2"/>
           <p:cNvSpPr/>
           <p:nvPr/>
         </p:nvSpPr>
@@ -6029,7 +6029,7 @@
       </p:sp>
       <p:sp>
         <p:nvSpPr>
-          <p:cNvPr id="211753355" name="Text 3"/>
+          <p:cNvPr id="1218550469" name="Text 3"/>
           <p:cNvSpPr/>
           <p:nvPr/>
         </p:nvSpPr>
@@ -6069,7 +6069,7 @@
       </p:sp>
       <p:sp>
         <p:nvSpPr>
-          <p:cNvPr id="743039172" name="Shape 4"/>
+          <p:cNvPr id="1268273366" name="Shape 4"/>
           <p:cNvSpPr/>
           <p:nvPr/>
         </p:nvSpPr>
@@ -6104,7 +6104,7 @@
       </p:sp>
       <p:sp>
         <p:nvSpPr>
-          <p:cNvPr id="1836545836" name="Text 5"/>
+          <p:cNvPr id="1196382805" name="Text 5"/>
           <p:cNvSpPr/>
           <p:nvPr/>
         </p:nvSpPr>
@@ -6144,7 +6144,7 @@
       </p:sp>
       <p:sp>
         <p:nvSpPr>
-          <p:cNvPr id="1556289881" name="Shape 6"/>
+          <p:cNvPr id="1661001019" name="Shape 6"/>
           <p:cNvSpPr/>
           <p:nvPr/>
         </p:nvSpPr>
@@ -6179,7 +6179,7 @@
       </p:sp>
       <p:sp>
         <p:nvSpPr>
-          <p:cNvPr id="910579087" name="Text 7"/>
+          <p:cNvPr id="1341706491" name="Text 7"/>
           <p:cNvSpPr/>
           <p:nvPr/>
         </p:nvSpPr>
@@ -6219,7 +6219,7 @@
       </p:sp>
       <p:sp>
         <p:nvSpPr>
-          <p:cNvPr id="1966812803" name="Shape 8"/>
+          <p:cNvPr id="1898871514" name="Shape 8"/>
           <p:cNvSpPr/>
           <p:nvPr/>
         </p:nvSpPr>
@@ -6254,7 +6254,7 @@
       </p:sp>
       <p:sp>
         <p:nvSpPr>
-          <p:cNvPr id="330468040" name="Text 9"/>
+          <p:cNvPr id="219597653" name="Text 9"/>
           <p:cNvSpPr/>
           <p:nvPr/>
         </p:nvSpPr>
@@ -6294,7 +6294,7 @@
       </p:sp>
       <p:sp>
         <p:nvSpPr>
-          <p:cNvPr id="757610092" name="Shape 10"/>
+          <p:cNvPr id="1723815750" name="Shape 10"/>
           <p:cNvSpPr/>
           <p:nvPr/>
         </p:nvSpPr>
@@ -6329,7 +6329,7 @@
       </p:sp>
       <p:sp>
         <p:nvSpPr>
-          <p:cNvPr id="854248781" name="Text 11"/>
+          <p:cNvPr id="204816083" name="Text 11"/>
           <p:cNvSpPr/>
           <p:nvPr/>
         </p:nvSpPr>
@@ -6369,7 +6369,7 @@
       </p:sp>
       <p:sp>
         <p:nvSpPr>
-          <p:cNvPr id="732765097" name="Shape 12"/>
+          <p:cNvPr id="658631555" name="Shape 12"/>
           <p:cNvSpPr/>
           <p:nvPr/>
         </p:nvSpPr>
@@ -6404,7 +6404,7 @@
       </p:sp>
       <p:sp>
         <p:nvSpPr>
-          <p:cNvPr id="1022694411" name="Text 13"/>
+          <p:cNvPr id="1474363514" name="Text 13"/>
           <p:cNvSpPr/>
           <p:nvPr/>
         </p:nvSpPr>
@@ -6462,7 +6462,7 @@
       </p:sp>
       <p:sp>
         <p:nvSpPr>
-          <p:cNvPr id="1433185698" name="Shape 14"/>
+          <p:cNvPr id="832125226" name="Shape 14"/>
           <p:cNvSpPr/>
           <p:nvPr/>
         </p:nvSpPr>
@@ -6497,7 +6497,7 @@
       </p:sp>
       <p:sp>
         <p:nvSpPr>
-          <p:cNvPr id="1301922626" name="Text 15"/>
+          <p:cNvPr id="2111693043" name="Text 15"/>
           <p:cNvSpPr/>
           <p:nvPr/>
         </p:nvSpPr>
@@ -6555,7 +6555,7 @@
       </p:sp>
       <p:sp>
         <p:nvSpPr>
-          <p:cNvPr id="600438132" name="Shape 16"/>
+          <p:cNvPr id="925834947" name="Shape 16"/>
           <p:cNvSpPr/>
           <p:nvPr/>
         </p:nvSpPr>
@@ -6590,7 +6590,7 @@
       </p:sp>
       <p:sp>
         <p:nvSpPr>
-          <p:cNvPr id="976313300" name="Text 17"/>
+          <p:cNvPr id="2013906049" name="Text 17"/>
           <p:cNvSpPr/>
           <p:nvPr/>
         </p:nvSpPr>
@@ -6648,7 +6648,7 @@
       </p:sp>
       <p:sp>
         <p:nvSpPr>
-          <p:cNvPr id="541108036" name="Shape 18"/>
+          <p:cNvPr id="410651869" name="Shape 18"/>
           <p:cNvSpPr/>
           <p:nvPr/>
         </p:nvSpPr>
@@ -6683,7 +6683,7 @@
       </p:sp>
       <p:sp>
         <p:nvSpPr>
-          <p:cNvPr id="1644156800" name="Text 19"/>
+          <p:cNvPr id="1894977388" name="Text 19"/>
           <p:cNvSpPr/>
           <p:nvPr/>
         </p:nvSpPr>
@@ -6723,7 +6723,7 @@
       </p:sp>
       <p:sp>
         <p:nvSpPr>
-          <p:cNvPr id="1614775461" name="Shape 20"/>
+          <p:cNvPr id="524374096" name="Shape 20"/>
           <p:cNvSpPr/>
           <p:nvPr/>
         </p:nvSpPr>
@@ -6758,7 +6758,7 @@
       </p:sp>
       <p:sp>
         <p:nvSpPr>
-          <p:cNvPr id="642527269" name="Text 21"/>
+          <p:cNvPr id="57667107" name="Text 21"/>
           <p:cNvSpPr/>
           <p:nvPr/>
         </p:nvSpPr>
@@ -6816,7 +6816,7 @@
       </p:sp>
       <p:sp>
         <p:nvSpPr>
-          <p:cNvPr id="451656741" name="Shape 22"/>
+          <p:cNvPr id="1072652990" name="Shape 22"/>
           <p:cNvSpPr/>
           <p:nvPr/>
         </p:nvSpPr>
@@ -6851,7 +6851,7 @@
       </p:sp>
       <p:sp>
         <p:nvSpPr>
-          <p:cNvPr id="898853599" name="Text 23"/>
+          <p:cNvPr id="2122991507" name="Text 23"/>
           <p:cNvSpPr/>
           <p:nvPr/>
         </p:nvSpPr>
@@ -6909,7 +6909,7 @@
       </p:sp>
       <p:sp>
         <p:nvSpPr>
-          <p:cNvPr id="1850147867" name="Shape 24"/>
+          <p:cNvPr id="141888254" name="Shape 24"/>
           <p:cNvSpPr/>
           <p:nvPr/>
         </p:nvSpPr>
@@ -6944,7 +6944,7 @@
       </p:sp>
       <p:sp>
         <p:nvSpPr>
-          <p:cNvPr id="519393112" name="Text 25"/>
+          <p:cNvPr id="1068288281" name="Text 25"/>
           <p:cNvSpPr/>
           <p:nvPr/>
         </p:nvSpPr>
@@ -7002,7 +7002,7 @@
       </p:sp>
       <p:sp>
         <p:nvSpPr>
-          <p:cNvPr id="786489560" name="Shape 26"/>
+          <p:cNvPr id="1890285658" name="Shape 26"/>
           <p:cNvSpPr/>
           <p:nvPr/>
         </p:nvSpPr>
@@ -7037,7 +7037,7 @@
       </p:sp>
       <p:sp>
         <p:nvSpPr>
-          <p:cNvPr id="1275470612" name="Text 27"/>
+          <p:cNvPr id="1989226932" name="Text 27"/>
           <p:cNvSpPr/>
           <p:nvPr/>
         </p:nvSpPr>
@@ -7077,7 +7077,7 @@
       </p:sp>
       <p:sp>
         <p:nvSpPr>
-          <p:cNvPr id="5613338" name="Shape 28"/>
+          <p:cNvPr id="296217693" name="Shape 28"/>
           <p:cNvSpPr/>
           <p:nvPr/>
         </p:nvSpPr>
@@ -7112,7 +7112,7 @@
       </p:sp>
       <p:sp>
         <p:nvSpPr>
-          <p:cNvPr id="2093359866" name="Text 29"/>
+          <p:cNvPr id="1720496298" name="Text 29"/>
           <p:cNvSpPr/>
           <p:nvPr/>
         </p:nvSpPr>
@@ -7170,7 +7170,7 @@
       </p:sp>
       <p:sp>
         <p:nvSpPr>
-          <p:cNvPr id="1365823250" name="Shape 30"/>
+          <p:cNvPr id="1575242563" name="Shape 30"/>
           <p:cNvSpPr/>
           <p:nvPr/>
         </p:nvSpPr>
@@ -7205,7 +7205,7 @@
       </p:sp>
       <p:sp>
         <p:nvSpPr>
-          <p:cNvPr id="1209187585" name="Text 31"/>
+          <p:cNvPr id="595066852" name="Text 31"/>
           <p:cNvSpPr/>
           <p:nvPr/>
         </p:nvSpPr>
@@ -7263,7 +7263,7 @@
       </p:sp>
       <p:sp>
         <p:nvSpPr>
-          <p:cNvPr id="1187795662" name="Shape 32"/>
+          <p:cNvPr id="2031371518" name="Shape 32"/>
           <p:cNvSpPr/>
           <p:nvPr/>
         </p:nvSpPr>
@@ -7298,7 +7298,7 @@
       </p:sp>
       <p:sp>
         <p:nvSpPr>
-          <p:cNvPr id="111568521" name="Text 33"/>
+          <p:cNvPr id="2081259456" name="Text 33"/>
           <p:cNvSpPr/>
           <p:nvPr/>
         </p:nvSpPr>
@@ -7356,7 +7356,7 @@
       </p:sp>
       <p:sp>
         <p:nvSpPr>
-          <p:cNvPr id="2142760624" name="Shape 34"/>
+          <p:cNvPr id="1170374085" name="Shape 34"/>
           <p:cNvSpPr/>
           <p:nvPr/>
         </p:nvSpPr>
@@ -7391,7 +7391,7 @@
       </p:sp>
       <p:sp>
         <p:nvSpPr>
-          <p:cNvPr id="469353674" name="Text 35"/>
+          <p:cNvPr id="257981033" name="Text 35"/>
           <p:cNvSpPr/>
           <p:nvPr/>
         </p:nvSpPr>
@@ -7431,7 +7431,7 @@
       </p:sp>
       <p:sp>
         <p:nvSpPr>
-          <p:cNvPr id="1322996023" name="Shape 36"/>
+          <p:cNvPr id="442488177" name="Shape 36"/>
           <p:cNvSpPr/>
           <p:nvPr/>
         </p:nvSpPr>
@@ -7466,7 +7466,7 @@
       </p:sp>
       <p:sp>
         <p:nvSpPr>
-          <p:cNvPr id="1845894158" name="Text 37"/>
+          <p:cNvPr id="516981697" name="Text 37"/>
           <p:cNvSpPr/>
           <p:nvPr/>
         </p:nvSpPr>
@@ -7524,7 +7524,7 @@
       </p:sp>
       <p:sp>
         <p:nvSpPr>
-          <p:cNvPr id="113395887" name="Shape 38"/>
+          <p:cNvPr id="1518044408" name="Shape 38"/>
           <p:cNvSpPr/>
           <p:nvPr/>
         </p:nvSpPr>
@@ -7559,7 +7559,7 @@
       </p:sp>
       <p:sp>
         <p:nvSpPr>
-          <p:cNvPr id="1887708606" name="Text 39"/>
+          <p:cNvPr id="582299284" name="Text 39"/>
           <p:cNvSpPr/>
           <p:nvPr/>
         </p:nvSpPr>
@@ -7617,7 +7617,7 @@
       </p:sp>
       <p:sp>
         <p:nvSpPr>
-          <p:cNvPr id="1204647646" name="Shape 40"/>
+          <p:cNvPr id="667300535" name="Shape 40"/>
           <p:cNvSpPr/>
           <p:nvPr/>
         </p:nvSpPr>
@@ -7652,7 +7652,7 @@
       </p:sp>
       <p:sp>
         <p:nvSpPr>
-          <p:cNvPr id="221381015" name="Text 41"/>
+          <p:cNvPr id="1276036917" name="Text 41"/>
           <p:cNvSpPr/>
           <p:nvPr/>
         </p:nvSpPr>
@@ -7743,7 +7743,7 @@
       </p:grpSpPr>
       <p:sp>
         <p:nvSpPr>
-          <p:cNvPr id="1397286025" name="Title"/>
+          <p:cNvPr id="1063057536" name="Title"/>
           <p:cNvSpPr/>
           <p:nvPr/>
         </p:nvSpPr>
@@ -7783,7 +7783,7 @@
       </p:sp>
       <p:sp>
         <p:nvSpPr>
-          <p:cNvPr id="1421835661" name="ScenCard"/>
+          <p:cNvPr id="1453032393" name="ScenCard"/>
           <p:cNvSpPr/>
           <p:nvPr/>
         </p:nvSpPr>
@@ -7875,7 +7875,7 @@
       </p:sp>
       <p:sp>
         <p:nvSpPr>
-          <p:cNvPr id="1930392493" name="Bar201"/>
+          <p:cNvPr id="2073971474" name="Bar201"/>
           <p:cNvSpPr/>
           <p:nvPr/>
         </p:nvSpPr>
@@ -7905,7 +7905,7 @@
       </p:sp>
       <p:sp>
         <p:nvSpPr>
-          <p:cNvPr id="129233469" name="Badge210"/>
+          <p:cNvPr id="619381537" name="Badge210"/>
           <p:cNvSpPr/>
           <p:nvPr/>
         </p:nvSpPr>
@@ -7947,7 +7947,7 @@
       </p:sp>
       <p:sp>
         <p:nvSpPr>
-          <p:cNvPr id="1366409342" name="Badge211"/>
+          <p:cNvPr id="1913585551" name="Badge211"/>
           <p:cNvSpPr/>
           <p:nvPr/>
         </p:nvSpPr>
@@ -7989,7 +7989,7 @@
       </p:sp>
       <p:sp>
         <p:nvSpPr>
-          <p:cNvPr id="1214170491" name="Badge212"/>
+          <p:cNvPr id="1819318748" name="Badge212"/>
           <p:cNvSpPr/>
           <p:nvPr/>
         </p:nvSpPr>
@@ -8031,7 +8031,7 @@
       </p:sp>
       <p:sp>
         <p:nvSpPr>
-          <p:cNvPr id="413471440" name="RepLbl"/>
+          <p:cNvPr id="1276114264" name="RepLbl"/>
           <p:cNvSpPr/>
           <p:nvPr/>
         </p:nvSpPr>
@@ -8075,7 +8075,7 @@
       </p:sp>
       <p:sp>
         <p:nvSpPr>
-          <p:cNvPr id="1467829419" name="Bar300"/>
+          <p:cNvPr id="779360615" name="Bar300"/>
           <p:cNvSpPr/>
           <p:nvPr/>
         </p:nvSpPr>
@@ -8105,7 +8105,7 @@
       </p:sp>
       <p:sp>
         <p:nvSpPr>
-          <p:cNvPr id="971415296" name="Item0"/>
+          <p:cNvPr id="57531394" name="Item0"/>
           <p:cNvSpPr/>
           <p:nvPr/>
         </p:nvSpPr>
@@ -8158,7 +8158,7 @@
       </p:sp>
       <p:sp>
         <p:nvSpPr>
-          <p:cNvPr id="1359186866" name="Bar310"/>
+          <p:cNvPr id="818596165" name="Bar310"/>
           <p:cNvSpPr/>
           <p:nvPr/>
         </p:nvSpPr>
@@ -8188,7 +8188,7 @@
       </p:sp>
       <p:sp>
         <p:nvSpPr>
-          <p:cNvPr id="1270941768" name="Item1"/>
+          <p:cNvPr id="1146919533" name="Item1"/>
           <p:cNvSpPr/>
           <p:nvPr/>
         </p:nvSpPr>
@@ -8241,7 +8241,7 @@
       </p:sp>
       <p:sp>
         <p:nvSpPr>
-          <p:cNvPr id="450975496" name="Bar320"/>
+          <p:cNvPr id="2056726085" name="Bar320"/>
           <p:cNvSpPr/>
           <p:nvPr/>
         </p:nvSpPr>
@@ -8271,7 +8271,7 @@
       </p:sp>
       <p:sp>
         <p:nvSpPr>
-          <p:cNvPr id="1209902861" name="Item2"/>
+          <p:cNvPr id="2137642694" name="Item2"/>
           <p:cNvSpPr/>
           <p:nvPr/>
         </p:nvSpPr>
@@ -8324,7 +8324,7 @@
       </p:sp>
       <p:sp>
         <p:nvSpPr>
-          <p:cNvPr id="1988246180" name="Bar330"/>
+          <p:cNvPr id="2022535330" name="Bar330"/>
           <p:cNvSpPr/>
           <p:nvPr/>
         </p:nvSpPr>
@@ -8354,7 +8354,7 @@
       </p:sp>
       <p:sp>
         <p:nvSpPr>
-          <p:cNvPr id="418514895" name="Item3"/>
+          <p:cNvPr id="1749092401" name="Item3"/>
           <p:cNvSpPr/>
           <p:nvPr/>
         </p:nvSpPr>
@@ -8407,7 +8407,7 @@
       </p:sp>
       <p:sp>
         <p:nvSpPr>
-          <p:cNvPr id="1549000662" name="Bar340"/>
+          <p:cNvPr id="1666431322" name="Bar340"/>
           <p:cNvSpPr/>
           <p:nvPr/>
         </p:nvSpPr>
@@ -8437,7 +8437,7 @@
       </p:sp>
       <p:sp>
         <p:nvSpPr>
-          <p:cNvPr id="1310319022" name="Item4"/>
+          <p:cNvPr id="588853890" name="Item4"/>
           <p:cNvSpPr/>
           <p:nvPr/>
         </p:nvSpPr>
@@ -8490,7 +8490,7 @@
       </p:sp>
       <p:sp>
         <p:nvSpPr>
-          <p:cNvPr id="1489279917" name="Bar350"/>
+          <p:cNvPr id="1400640189" name="Bar350"/>
           <p:cNvSpPr/>
           <p:nvPr/>
         </p:nvSpPr>
@@ -8520,7 +8520,7 @@
       </p:sp>
       <p:sp>
         <p:nvSpPr>
-          <p:cNvPr id="1242335510" name="Item5"/>
+          <p:cNvPr id="1106057623" name="Item5"/>
           <p:cNvSpPr/>
           <p:nvPr/>
         </p:nvSpPr>
@@ -8573,7 +8573,7 @@
       </p:sp>
       <p:sp>
         <p:nvSpPr>
-          <p:cNvPr id="836103717" name="Bar360"/>
+          <p:cNvPr id="734939828" name="Bar360"/>
           <p:cNvSpPr/>
           <p:nvPr/>
         </p:nvSpPr>
@@ -8603,7 +8603,7 @@
       </p:sp>
       <p:sp>
         <p:nvSpPr>
-          <p:cNvPr id="1364946491" name="Item6"/>
+          <p:cNvPr id="682319963" name="Item6"/>
           <p:cNvSpPr/>
           <p:nvPr/>
         </p:nvSpPr>
@@ -8656,7 +8656,7 @@
       </p:sp>
       <p:sp>
         <p:nvSpPr>
-          <p:cNvPr id="1246057316" name="Bar370"/>
+          <p:cNvPr id="562650861" name="Bar370"/>
           <p:cNvSpPr/>
           <p:nvPr/>
         </p:nvSpPr>
@@ -8686,7 +8686,7 @@
       </p:sp>
       <p:sp>
         <p:nvSpPr>
-          <p:cNvPr id="1227247808" name="Item7"/>
+          <p:cNvPr id="1918785004" name="Item7"/>
           <p:cNvSpPr/>
           <p:nvPr/>
         </p:nvSpPr>
@@ -8739,7 +8739,7 @@
       </p:sp>
       <p:sp>
         <p:nvSpPr>
-          <p:cNvPr id="476045766" name="Shape 1"/>
+          <p:cNvPr id="1955037965" name="Shape 1"/>
           <p:cNvSpPr/>
           <p:nvPr/>
         </p:nvSpPr>
@@ -8802,7 +8802,7 @@
       </p:grpSpPr>
       <p:sp>
         <p:nvSpPr>
-          <p:cNvPr id="508822546" name="Title"/>
+          <p:cNvPr id="1246378228" name="Title"/>
           <p:cNvSpPr/>
           <p:nvPr/>
         </p:nvSpPr>
@@ -8842,7 +8842,7 @@
       </p:sp>
       <p:sp>
         <p:nvSpPr>
-          <p:cNvPr id="575728984" name="Intro"/>
+          <p:cNvPr id="988175346" name="Intro"/>
           <p:cNvSpPr/>
           <p:nvPr/>
         </p:nvSpPr>
@@ -8902,7 +8902,7 @@
       </p:sp>
       <p:sp>
         <p:nvSpPr>
-          <p:cNvPr id="1710733905" name="Bar201"/>
+          <p:cNvPr id="1287813341" name="Bar201"/>
           <p:cNvSpPr/>
           <p:nvPr/>
         </p:nvSpPr>
@@ -8932,7 +8932,7 @@
       </p:sp>
       <p:sp>
         <p:nvSpPr>
-          <p:cNvPr id="1889445841" name="CPLbl"/>
+          <p:cNvPr id="1965726613" name="CPLbl"/>
           <p:cNvSpPr/>
           <p:nvPr/>
         </p:nvSpPr>
@@ -8976,7 +8976,7 @@
       </p:sp>
       <p:sp>
         <p:nvSpPr>
-          <p:cNvPr id="2123672444" name="Bar220"/>
+          <p:cNvPr id="187499558" name="Bar220"/>
           <p:cNvSpPr/>
           <p:nvPr/>
         </p:nvSpPr>
@@ -9006,7 +9006,7 @@
       </p:sp>
       <p:sp>
         <p:nvSpPr>
-          <p:cNvPr id="180780339" name="CP0"/>
+          <p:cNvPr id="1558253251" name="CP0"/>
           <p:cNvSpPr/>
           <p:nvPr/>
         </p:nvSpPr>
@@ -9077,7 +9077,7 @@
       </p:sp>
       <p:sp>
         <p:nvSpPr>
-          <p:cNvPr id="462185069" name="Bar230"/>
+          <p:cNvPr id="244759577" name="Bar230"/>
           <p:cNvSpPr/>
           <p:nvPr/>
         </p:nvSpPr>
@@ -9107,7 +9107,7 @@
       </p:sp>
       <p:sp>
         <p:nvSpPr>
-          <p:cNvPr id="1001300255" name="CP1"/>
+          <p:cNvPr id="357446168" name="CP1"/>
           <p:cNvSpPr/>
           <p:nvPr/>
         </p:nvSpPr>
@@ -9196,7 +9196,7 @@
       </p:sp>
       <p:sp>
         <p:nvSpPr>
-          <p:cNvPr id="1286140208" name="Bar240"/>
+          <p:cNvPr id="1566816841" name="Bar240"/>
           <p:cNvSpPr/>
           <p:nvPr/>
         </p:nvSpPr>
@@ -9226,7 +9226,7 @@
       </p:sp>
       <p:sp>
         <p:nvSpPr>
-          <p:cNvPr id="1375622928" name="CP2"/>
+          <p:cNvPr id="60857568" name="CP2"/>
           <p:cNvSpPr/>
           <p:nvPr/>
         </p:nvSpPr>
@@ -9297,7 +9297,7 @@
       </p:sp>
       <p:sp>
         <p:nvSpPr>
-          <p:cNvPr id="1342651641" name="Bar250"/>
+          <p:cNvPr id="406814731" name="Bar250"/>
           <p:cNvSpPr/>
           <p:nvPr/>
         </p:nvSpPr>
@@ -9327,7 +9327,7 @@
       </p:sp>
       <p:sp>
         <p:nvSpPr>
-          <p:cNvPr id="481396400" name="CP3"/>
+          <p:cNvPr id="1761755411" name="CP3"/>
           <p:cNvSpPr/>
           <p:nvPr/>
         </p:nvSpPr>
@@ -9398,7 +9398,7 @@
       </p:sp>
       <p:sp>
         <p:nvSpPr>
-          <p:cNvPr id="681690867" name="AnaSource"/>
+          <p:cNvPr id="1926806801" name="AnaSource"/>
           <p:cNvSpPr/>
           <p:nvPr/>
         </p:nvSpPr>
@@ -9483,7 +9483,7 @@
       </p:sp>
       <p:sp>
         <p:nvSpPr>
-          <p:cNvPr id="4012424" name="Bar301"/>
+          <p:cNvPr id="1245132609" name="Bar301"/>
           <p:cNvSpPr/>
           <p:nvPr/>
         </p:nvSpPr>
@@ -9513,7 +9513,7 @@
       </p:sp>
       <p:sp>
         <p:nvSpPr>
-          <p:cNvPr id="1749460551" name="FarmSource"/>
+          <p:cNvPr id="33928862" name="FarmSource"/>
           <p:cNvSpPr/>
           <p:nvPr/>
         </p:nvSpPr>
@@ -9589,7 +9589,7 @@
       </p:sp>
       <p:sp>
         <p:nvSpPr>
-          <p:cNvPr id="1352972437" name="Bar311"/>
+          <p:cNvPr id="1526456874" name="Bar311"/>
           <p:cNvSpPr/>
           <p:nvPr/>
         </p:nvSpPr>
@@ -9619,7 +9619,7 @@
       </p:sp>
       <p:sp>
         <p:nvSpPr>
-          <p:cNvPr id="1695943537" name="Shape 1"/>
+          <p:cNvPr id="572794734" name="Shape 1"/>
           <p:cNvSpPr/>
           <p:nvPr/>
         </p:nvSpPr>
@@ -9682,7 +9682,7 @@
       </p:grpSpPr>
       <p:sp>
         <p:nvSpPr>
-          <p:cNvPr id="192533327" name="Title"/>
+          <p:cNvPr id="684346003" name="Title"/>
           <p:cNvSpPr/>
           <p:nvPr/>
         </p:nvSpPr>
@@ -9722,7 +9722,7 @@
       </p:sp>
       <p:sp>
         <p:nvSpPr>
-          <p:cNvPr id="1562723977" name="Badge200"/>
+          <p:cNvPr id="117678732" name="Badge200"/>
           <p:cNvSpPr/>
           <p:nvPr/>
         </p:nvSpPr>
@@ -9764,7 +9764,7 @@
       </p:sp>
       <p:sp>
         <p:nvSpPr>
-          <p:cNvPr id="1543848608" name="P1"/>
+          <p:cNvPr id="1327677566" name="P1"/>
           <p:cNvSpPr/>
           <p:nvPr/>
         </p:nvSpPr>
@@ -9872,7 +9872,7 @@
       </p:sp>
       <p:sp>
         <p:nvSpPr>
-          <p:cNvPr id="1999305319" name="Bar202"/>
+          <p:cNvPr id="1113847698" name="Bar202"/>
           <p:cNvSpPr/>
           <p:nvPr/>
         </p:nvSpPr>
@@ -9902,7 +9902,7 @@
       </p:sp>
       <p:sp>
         <p:nvSpPr>
-          <p:cNvPr id="889416768" name="Badge210"/>
+          <p:cNvPr id="1410533519" name="Badge210"/>
           <p:cNvSpPr/>
           <p:nvPr/>
         </p:nvSpPr>
@@ -9944,7 +9944,7 @@
       </p:sp>
       <p:sp>
         <p:nvSpPr>
-          <p:cNvPr id="809163280" name="P2"/>
+          <p:cNvPr id="1576662058" name="P2"/>
           <p:cNvSpPr/>
           <p:nvPr/>
         </p:nvSpPr>
@@ -10068,7 +10068,7 @@
       </p:sp>
       <p:sp>
         <p:nvSpPr>
-          <p:cNvPr id="1501742551" name="Bar212"/>
+          <p:cNvPr id="161514497" name="Bar212"/>
           <p:cNvSpPr/>
           <p:nvPr/>
         </p:nvSpPr>
@@ -10098,7 +10098,7 @@
       </p:sp>
       <p:sp>
         <p:nvSpPr>
-          <p:cNvPr id="1734907444" name="Badge220"/>
+          <p:cNvPr id="376351374" name="Badge220"/>
           <p:cNvSpPr/>
           <p:nvPr/>
         </p:nvSpPr>
@@ -10140,7 +10140,7 @@
       </p:sp>
       <p:sp>
         <p:nvSpPr>
-          <p:cNvPr id="169018707" name="P3"/>
+          <p:cNvPr id="767810756" name="P3"/>
           <p:cNvSpPr/>
           <p:nvPr/>
         </p:nvSpPr>
@@ -10248,7 +10248,7 @@
       </p:sp>
       <p:sp>
         <p:nvSpPr>
-          <p:cNvPr id="1396611504" name="Bar222"/>
+          <p:cNvPr id="1244192367" name="Bar222"/>
           <p:cNvSpPr/>
           <p:nvPr/>
         </p:nvSpPr>
@@ -10278,7 +10278,7 @@
       </p:sp>
       <p:sp>
         <p:nvSpPr>
-          <p:cNvPr id="1554537125" name="Shape 1"/>
+          <p:cNvPr id="1827932541" name="Shape 1"/>
           <p:cNvSpPr/>
           <p:nvPr/>
         </p:nvSpPr>
@@ -10341,7 +10341,7 @@
       </p:grpSpPr>
       <p:sp>
         <p:nvSpPr>
-          <p:cNvPr id="177794633" name="Title"/>
+          <p:cNvPr id="361765551" name="Title"/>
           <p:cNvSpPr/>
           <p:nvPr/>
         </p:nvSpPr>
@@ -10381,7 +10381,7 @@
       </p:sp>
       <p:sp>
         <p:nvSpPr>
-          <p:cNvPr id="595674928" name="Sub"/>
+          <p:cNvPr id="1381433079" name="Sub"/>
           <p:cNvSpPr/>
           <p:nvPr/>
         </p:nvSpPr>
@@ -10421,7 +10421,7 @@
       </p:sp>
       <p:sp>
         <p:nvSpPr>
-          <p:cNvPr id="1244323525" name="Scenario"/>
+          <p:cNvPr id="1438284202" name="Scenario"/>
           <p:cNvSpPr/>
           <p:nvPr/>
         </p:nvSpPr>
@@ -10529,7 +10529,7 @@
       </p:sp>
       <p:sp>
         <p:nvSpPr>
-          <p:cNvPr id="1231025550" name="Bar201"/>
+          <p:cNvPr id="1692182694" name="Bar201"/>
           <p:cNvSpPr/>
           <p:nvPr/>
         </p:nvSpPr>
@@ -10559,7 +10559,7 @@
       </p:sp>
       <p:sp>
         <p:nvSpPr>
-          <p:cNvPr id="974394125" name="ReqLbl"/>
+          <p:cNvPr id="108772723" name="ReqLbl"/>
           <p:cNvSpPr/>
           <p:nvPr/>
         </p:nvSpPr>
@@ -10603,7 +10603,7 @@
       </p:sp>
       <p:sp>
         <p:nvSpPr>
-          <p:cNvPr id="1593882287" name="Bar220"/>
+          <p:cNvPr id="669428482" name="Bar220"/>
           <p:cNvSpPr/>
           <p:nvPr/>
         </p:nvSpPr>
@@ -10633,7 +10633,7 @@
       </p:sp>
       <p:sp>
         <p:nvSpPr>
-          <p:cNvPr id="474702653" name="Req0"/>
+          <p:cNvPr id="1645413131" name="Req0"/>
           <p:cNvSpPr/>
           <p:nvPr/>
         </p:nvSpPr>
@@ -10704,7 +10704,7 @@
       </p:sp>
       <p:sp>
         <p:nvSpPr>
-          <p:cNvPr id="1759763204" name="Bar230"/>
+          <p:cNvPr id="1492641186" name="Bar230"/>
           <p:cNvSpPr/>
           <p:nvPr/>
         </p:nvSpPr>
@@ -10734,7 +10734,7 @@
       </p:sp>
       <p:sp>
         <p:nvSpPr>
-          <p:cNvPr id="197503896" name="Req1"/>
+          <p:cNvPr id="2039235060" name="Req1"/>
           <p:cNvSpPr/>
           <p:nvPr/>
         </p:nvSpPr>
@@ -10805,7 +10805,7 @@
       </p:sp>
       <p:sp>
         <p:nvSpPr>
-          <p:cNvPr id="474446606" name="Bar240"/>
+          <p:cNvPr id="1989232472" name="Bar240"/>
           <p:cNvSpPr/>
           <p:nvPr/>
         </p:nvSpPr>
@@ -10835,7 +10835,7 @@
       </p:sp>
       <p:sp>
         <p:nvSpPr>
-          <p:cNvPr id="1607304285" name="Req2"/>
+          <p:cNvPr id="849005001" name="Req2"/>
           <p:cNvSpPr/>
           <p:nvPr/>
         </p:nvSpPr>
@@ -10906,7 +10906,7 @@
       </p:sp>
       <p:sp>
         <p:nvSpPr>
-          <p:cNvPr id="334461986" name="Bar250"/>
+          <p:cNvPr id="1983213880" name="Bar250"/>
           <p:cNvSpPr/>
           <p:nvPr/>
         </p:nvSpPr>
@@ -10936,7 +10936,7 @@
       </p:sp>
       <p:sp>
         <p:nvSpPr>
-          <p:cNvPr id="401150336" name="Req3"/>
+          <p:cNvPr id="522959436" name="Req3"/>
           <p:cNvSpPr/>
           <p:nvPr/>
         </p:nvSpPr>
@@ -11007,7 +11007,7 @@
       </p:sp>
       <p:sp>
         <p:nvSpPr>
-          <p:cNvPr id="528733309" name="Bar260"/>
+          <p:cNvPr id="698288763" name="Bar260"/>
           <p:cNvSpPr/>
           <p:nvPr/>
         </p:nvSpPr>
@@ -11037,7 +11037,7 @@
       </p:sp>
       <p:sp>
         <p:nvSpPr>
-          <p:cNvPr id="1696296807" name="Req4"/>
+          <p:cNvPr id="316170545" name="Req4"/>
           <p:cNvSpPr/>
           <p:nvPr/>
         </p:nvSpPr>
@@ -11108,7 +11108,7 @@
       </p:sp>
       <p:sp>
         <p:nvSpPr>
-          <p:cNvPr id="1913034046" name="ResLbl"/>
+          <p:cNvPr id="640934663" name="ResLbl"/>
           <p:cNvSpPr/>
           <p:nvPr/>
         </p:nvSpPr>
@@ -11168,7 +11168,7 @@
       </p:sp>
       <p:sp>
         <p:nvSpPr>
-          <p:cNvPr id="2046650576" name="Bar271"/>
+          <p:cNvPr id="178442577" name="Bar271"/>
           <p:cNvSpPr/>
           <p:nvPr/>
         </p:nvSpPr>
@@ -11198,7 +11198,7 @@
       </p:sp>
       <p:sp>
         <p:nvSpPr>
-          <p:cNvPr id="575193771" name="Shape 1"/>
+          <p:cNvPr id="426885622" name="Shape 1"/>
           <p:cNvSpPr/>
           <p:nvPr/>
         </p:nvSpPr>
@@ -11268,7 +11268,7 @@
       </p:grpSpPr>
       <p:sp>
         <p:nvSpPr>
-          <p:cNvPr id="942902283" name="Text 0"/>
+          <p:cNvPr id="2030716437" name="Text 0"/>
           <p:cNvSpPr/>
           <p:nvPr/>
         </p:nvSpPr>
@@ -11308,7 +11308,7 @@
       </p:sp>
       <p:sp>
         <p:nvSpPr>
-          <p:cNvPr id="1576252707" name="Shape 1"/>
+          <p:cNvPr id="934984186" name="Shape 1"/>
           <p:cNvSpPr/>
           <p:nvPr/>
         </p:nvSpPr>
@@ -11338,7 +11338,7 @@
       </p:sp>
       <p:sp>
         <p:nvSpPr>
-          <p:cNvPr id="1444117341" name="Shape 2"/>
+          <p:cNvPr id="947149792" name="Shape 2"/>
           <p:cNvSpPr/>
           <p:nvPr/>
         </p:nvSpPr>
@@ -11373,7 +11373,7 @@
       </p:sp>
       <p:sp>
         <p:nvSpPr>
-          <p:cNvPr id="1590158738" name="Text 3"/>
+          <p:cNvPr id="393319810" name="Text 3"/>
           <p:cNvSpPr/>
           <p:nvPr/>
         </p:nvSpPr>
@@ -11413,7 +11413,7 @@
       </p:sp>
       <p:sp>
         <p:nvSpPr>
-          <p:cNvPr id="2048938242" name="Text 4"/>
+          <p:cNvPr id="302704488" name="Text 4"/>
           <p:cNvSpPr/>
           <p:nvPr/>
         </p:nvSpPr>
@@ -11453,7 +11453,7 @@
       </p:sp>
       <p:sp>
         <p:nvSpPr>
-          <p:cNvPr id="1879387966" name="Text 5"/>
+          <p:cNvPr id="1428402717" name="Text 5"/>
           <p:cNvSpPr/>
           <p:nvPr/>
         </p:nvSpPr>
@@ -11493,7 +11493,7 @@
       </p:sp>
       <p:sp>
         <p:nvSpPr>
-          <p:cNvPr id="881824758" name="Text 6"/>
+          <p:cNvPr id="215642386" name="Text 6"/>
           <p:cNvSpPr/>
           <p:nvPr/>
         </p:nvSpPr>
@@ -11533,7 +11533,7 @@
       </p:sp>
       <p:sp>
         <p:nvSpPr>
-          <p:cNvPr id="66031605" name="Text 7"/>
+          <p:cNvPr id="1202159032" name="Text 7"/>
           <p:cNvSpPr/>
           <p:nvPr/>
         </p:nvSpPr>
@@ -11573,7 +11573,7 @@
       </p:sp>
       <p:sp>
         <p:nvSpPr>
-          <p:cNvPr id="2110858569" name="Text 8"/>
+          <p:cNvPr id="396953811" name="Text 8"/>
           <p:cNvSpPr/>
           <p:nvPr/>
         </p:nvSpPr>
@@ -11613,7 +11613,7 @@
       </p:sp>
       <p:sp>
         <p:nvSpPr>
-          <p:cNvPr id="1703333498" name="Text 9"/>
+          <p:cNvPr id="514214300" name="Text 9"/>
           <p:cNvSpPr/>
           <p:nvPr/>
         </p:nvSpPr>
@@ -11653,7 +11653,7 @@
       </p:sp>
       <p:sp>
         <p:nvSpPr>
-          <p:cNvPr id="1643504856" name="Text 10"/>
+          <p:cNvPr id="1342055705" name="Text 10"/>
           <p:cNvSpPr/>
           <p:nvPr/>
         </p:nvSpPr>
@@ -11693,7 +11693,7 @@
       </p:sp>
       <p:sp>
         <p:nvSpPr>
-          <p:cNvPr id="304343089" name="Text 11"/>
+          <p:cNvPr id="294574654" name="Text 11"/>
           <p:cNvSpPr/>
           <p:nvPr/>
         </p:nvSpPr>
@@ -11755,7 +11755,7 @@
       </p:sp>
       <p:sp>
         <p:nvSpPr>
-          <p:cNvPr id="1849736477" name="Text 12"/>
+          <p:cNvPr id="1168650952" name="Text 12"/>
           <p:cNvSpPr/>
           <p:nvPr/>
         </p:nvSpPr>
@@ -11795,7 +11795,7 @@
       </p:sp>
       <p:sp>
         <p:nvSpPr>
-          <p:cNvPr id="2358694" name="Text 13"/>
+          <p:cNvPr id="1003086493" name="Text 13"/>
           <p:cNvSpPr/>
           <p:nvPr/>
         </p:nvSpPr>
@@ -11835,7 +11835,7 @@
       </p:sp>
       <p:sp>
         <p:nvSpPr>
-          <p:cNvPr id="661138088" name="Text 14"/>
+          <p:cNvPr id="292881521" name="Text 14"/>
           <p:cNvSpPr/>
           <p:nvPr/>
         </p:nvSpPr>
@@ -11875,7 +11875,7 @@
       </p:sp>
       <p:sp>
         <p:nvSpPr>
-          <p:cNvPr id="1328220930" name="Text 15"/>
+          <p:cNvPr id="2068147868" name="Text 15"/>
           <p:cNvSpPr/>
           <p:nvPr/>
         </p:nvSpPr>
@@ -11915,7 +11915,7 @@
       </p:sp>
       <p:sp>
         <p:nvSpPr>
-          <p:cNvPr id="1591208370" name="Text 16"/>
+          <p:cNvPr id="145320871" name="Text 16"/>
           <p:cNvSpPr/>
           <p:nvPr/>
         </p:nvSpPr>
@@ -11955,7 +11955,7 @@
       </p:sp>
       <p:sp>
         <p:nvSpPr>
-          <p:cNvPr id="2090644537" name="Text 17"/>
+          <p:cNvPr id="1271254835" name="Text 17"/>
           <p:cNvSpPr/>
           <p:nvPr/>
         </p:nvSpPr>
@@ -11995,7 +11995,7 @@
       </p:sp>
       <p:sp>
         <p:nvSpPr>
-          <p:cNvPr id="1168628607" name="Text 18"/>
+          <p:cNvPr id="1971914246" name="Text 18"/>
           <p:cNvSpPr/>
           <p:nvPr/>
         </p:nvSpPr>
@@ -12035,7 +12035,7 @@
       </p:sp>
       <p:sp>
         <p:nvSpPr>
-          <p:cNvPr id="1942331930" name="Text 19"/>
+          <p:cNvPr id="368269614" name="Text 19"/>
           <p:cNvSpPr/>
           <p:nvPr/>
         </p:nvSpPr>
@@ -12097,7 +12097,7 @@
       </p:sp>
       <p:sp>
         <p:nvSpPr>
-          <p:cNvPr id="1302998145" name="Shape 20"/>
+          <p:cNvPr id="1492593805" name="Shape 20"/>
           <p:cNvSpPr/>
           <p:nvPr/>
         </p:nvSpPr>
@@ -12132,7 +12132,7 @@
       </p:sp>
       <p:sp>
         <p:nvSpPr>
-          <p:cNvPr id="114568905" name="Text 21"/>
+          <p:cNvPr id="2085505115" name="Text 21"/>
           <p:cNvSpPr/>
           <p:nvPr/>
         </p:nvSpPr>
@@ -12172,7 +12172,7 @@
       </p:sp>
       <p:sp>
         <p:nvSpPr>
-          <p:cNvPr id="574275712" name="Text 22"/>
+          <p:cNvPr id="942715663" name="Text 22"/>
           <p:cNvSpPr/>
           <p:nvPr/>
         </p:nvSpPr>
@@ -12212,7 +12212,7 @@
       </p:sp>
       <p:sp>
         <p:nvSpPr>
-          <p:cNvPr id="1838380879" name="Text 23"/>
+          <p:cNvPr id="812053831" name="Text 23"/>
           <p:cNvSpPr/>
           <p:nvPr/>
         </p:nvSpPr>
@@ -12252,7 +12252,7 @@
       </p:sp>
       <p:sp>
         <p:nvSpPr>
-          <p:cNvPr id="2088746885" name="Text 24"/>
+          <p:cNvPr id="1167855798" name="Text 24"/>
           <p:cNvSpPr/>
           <p:nvPr/>
         </p:nvSpPr>
@@ -12292,7 +12292,7 @@
       </p:sp>
       <p:sp>
         <p:nvSpPr>
-          <p:cNvPr id="1631888377" name="Text 25"/>
+          <p:cNvPr id="1356975714" name="Text 25"/>
           <p:cNvSpPr/>
           <p:nvPr/>
         </p:nvSpPr>
@@ -12332,7 +12332,7 @@
       </p:sp>
       <p:sp>
         <p:nvSpPr>
-          <p:cNvPr id="253916533" name="Text 26"/>
+          <p:cNvPr id="1499500837" name="Text 26"/>
           <p:cNvSpPr/>
           <p:nvPr/>
         </p:nvSpPr>
@@ -12372,7 +12372,7 @@
       </p:sp>
       <p:sp>
         <p:nvSpPr>
-          <p:cNvPr id="2105186432" name="Text 27"/>
+          <p:cNvPr id="334194542" name="Text 27"/>
           <p:cNvSpPr/>
           <p:nvPr/>
         </p:nvSpPr>
@@ -12412,7 +12412,7 @@
       </p:sp>
       <p:sp>
         <p:nvSpPr>
-          <p:cNvPr id="1888621471" name="Text 28"/>
+          <p:cNvPr id="245702325" name="Text 28"/>
           <p:cNvSpPr/>
           <p:nvPr/>
         </p:nvSpPr>
@@ -12452,7 +12452,7 @@
       </p:sp>
       <p:sp>
         <p:nvSpPr>
-          <p:cNvPr id="1527153187" name="Text 29"/>
+          <p:cNvPr id="734368084" name="Text 29"/>
           <p:cNvSpPr/>
           <p:nvPr/>
         </p:nvSpPr>
@@ -12492,7 +12492,7 @@
       </p:sp>
       <p:sp>
         <p:nvSpPr>
-          <p:cNvPr id="406897330" name="Text 30"/>
+          <p:cNvPr id="12822807" name="Text 30"/>
           <p:cNvSpPr/>
           <p:nvPr/>
         </p:nvSpPr>
@@ -12532,7 +12532,7 @@
       </p:sp>
       <p:sp>
         <p:nvSpPr>
-          <p:cNvPr id="80037235" name="Text 31"/>
+          <p:cNvPr id="16845815" name="Text 31"/>
           <p:cNvSpPr/>
           <p:nvPr/>
         </p:nvSpPr>
@@ -12572,7 +12572,7 @@
       </p:sp>
       <p:sp>
         <p:nvSpPr>
-          <p:cNvPr id="573348028" name="Text 32"/>
+          <p:cNvPr id="130216726" name="Text 32"/>
           <p:cNvSpPr/>
           <p:nvPr/>
         </p:nvSpPr>
@@ -12612,7 +12612,7 @@
       </p:sp>
       <p:sp>
         <p:nvSpPr>
-          <p:cNvPr id="1746185146" name="Text 33"/>
+          <p:cNvPr id="1708941806" name="Text 33"/>
           <p:cNvSpPr/>
           <p:nvPr/>
         </p:nvSpPr>
@@ -12652,7 +12652,7 @@
       </p:sp>
       <p:sp>
         <p:nvSpPr>
-          <p:cNvPr id="210228818" name="Text 34"/>
+          <p:cNvPr id="560963437" name="Text 34"/>
           <p:cNvSpPr/>
           <p:nvPr/>
         </p:nvSpPr>
@@ -12692,7 +12692,7 @@
       </p:sp>
       <p:sp>
         <p:nvSpPr>
-          <p:cNvPr id="127168271" name="Text 35"/>
+          <p:cNvPr id="1734938894" name="Text 35"/>
           <p:cNvSpPr/>
           <p:nvPr/>
         </p:nvSpPr>
@@ -12732,7 +12732,7 @@
       </p:sp>
       <p:sp>
         <p:nvSpPr>
-          <p:cNvPr id="1934151850" name="Text 36"/>
+          <p:cNvPr id="1418217081" name="Text 36"/>
           <p:cNvSpPr/>
           <p:nvPr/>
         </p:nvSpPr>
@@ -12772,7 +12772,7 @@
       </p:sp>
       <p:sp>
         <p:nvSpPr>
-          <p:cNvPr id="1217625303" name="Text 37"/>
+          <p:cNvPr id="1952290762" name="Text 37"/>
           <p:cNvSpPr/>
           <p:nvPr/>
         </p:nvSpPr>
@@ -12852,7 +12852,7 @@
       </p:grpSpPr>
       <p:sp>
         <p:nvSpPr>
-          <p:cNvPr id="119730830" name="Text 0"/>
+          <p:cNvPr id="914748557" name="Text 0"/>
           <p:cNvSpPr/>
           <p:nvPr/>
         </p:nvSpPr>
@@ -12914,7 +12914,7 @@
       </p:sp>
       <p:sp>
         <p:nvSpPr>
-          <p:cNvPr id="107575423" name="Text 1"/>
+          <p:cNvPr id="1433401756" name="Text 1"/>
           <p:cNvSpPr/>
           <p:nvPr/>
         </p:nvSpPr>
@@ -12954,7 +12954,7 @@
       </p:sp>
       <p:sp>
         <p:nvSpPr>
-          <p:cNvPr id="63731328" name="Text 2"/>
+          <p:cNvPr id="1767308691" name="Text 2"/>
           <p:cNvSpPr/>
           <p:nvPr/>
         </p:nvSpPr>
@@ -13034,7 +13034,7 @@
       </p:grpSpPr>
       <p:sp>
         <p:nvSpPr>
-          <p:cNvPr id="9820579" name="Text 0"/>
+          <p:cNvPr id="395892787" name="Text 0"/>
           <p:cNvSpPr/>
           <p:nvPr/>
         </p:nvSpPr>
@@ -13074,7 +13074,7 @@
       </p:sp>
       <p:sp>
         <p:nvSpPr>
-          <p:cNvPr id="95681206" name="Shape 1"/>
+          <p:cNvPr id="1259720397" name="Shape 1"/>
           <p:cNvSpPr/>
           <p:nvPr/>
         </p:nvSpPr>
@@ -13104,7 +13104,7 @@
       </p:sp>
       <p:sp>
         <p:nvSpPr>
-          <p:cNvPr id="730525047" name="Shape 2"/>
+          <p:cNvPr id="1025988146" name="Shape 2"/>
           <p:cNvSpPr/>
           <p:nvPr/>
         </p:nvSpPr>
@@ -13139,7 +13139,7 @@
       </p:sp>
       <p:sp>
         <p:nvSpPr>
-          <p:cNvPr id="682491536" name="Shape 3"/>
+          <p:cNvPr id="770271263" name="Shape 3"/>
           <p:cNvSpPr/>
           <p:nvPr/>
         </p:nvSpPr>
@@ -13169,7 +13169,7 @@
       </p:sp>
       <p:sp>
         <p:nvSpPr>
-          <p:cNvPr id="812050244" name="Text 4"/>
+          <p:cNvPr id="1754271626" name="Text 4"/>
           <p:cNvSpPr/>
           <p:nvPr/>
         </p:nvSpPr>
@@ -13209,7 +13209,7 @@
       </p:sp>
       <p:sp>
         <p:nvSpPr>
-          <p:cNvPr id="104652036" name="Text 5"/>
+          <p:cNvPr id="1241509289" name="Text 5"/>
           <p:cNvSpPr/>
           <p:nvPr/>
         </p:nvSpPr>
@@ -13271,7 +13271,7 @@
       </p:sp>
       <p:sp>
         <p:nvSpPr>
-          <p:cNvPr id="1670982810" name="Shape 6"/>
+          <p:cNvPr id="879541719" name="Shape 6"/>
           <p:cNvSpPr/>
           <p:nvPr/>
         </p:nvSpPr>
@@ -13306,7 +13306,7 @@
       </p:sp>
       <p:sp>
         <p:nvSpPr>
-          <p:cNvPr id="2044524862" name="Shape 7"/>
+          <p:cNvPr id="1501424140" name="Shape 7"/>
           <p:cNvSpPr/>
           <p:nvPr/>
         </p:nvSpPr>
@@ -13336,7 +13336,7 @@
       </p:sp>
       <p:sp>
         <p:nvSpPr>
-          <p:cNvPr id="404947914" name="Text 8"/>
+          <p:cNvPr id="362542725" name="Text 8"/>
           <p:cNvSpPr/>
           <p:nvPr/>
         </p:nvSpPr>
@@ -13376,7 +13376,7 @@
       </p:sp>
       <p:sp>
         <p:nvSpPr>
-          <p:cNvPr id="122175728" name="Text 9"/>
+          <p:cNvPr id="652901147" name="Text 9"/>
           <p:cNvSpPr/>
           <p:nvPr/>
         </p:nvSpPr>
@@ -13416,7 +13416,7 @@
       </p:sp>
       <p:sp>
         <p:nvSpPr>
-          <p:cNvPr id="709816053" name="Shape 10"/>
+          <p:cNvPr id="1716865706" name="Shape 10"/>
           <p:cNvSpPr/>
           <p:nvPr/>
         </p:nvSpPr>
@@ -13451,7 +13451,7 @@
       </p:sp>
       <p:sp>
         <p:nvSpPr>
-          <p:cNvPr id="1047946382" name="Shape 11"/>
+          <p:cNvPr id="2001320953" name="Shape 11"/>
           <p:cNvSpPr/>
           <p:nvPr/>
         </p:nvSpPr>
@@ -13481,7 +13481,7 @@
       </p:sp>
       <p:sp>
         <p:nvSpPr>
-          <p:cNvPr id="910499697" name="Text 12"/>
+          <p:cNvPr id="302004070" name="Text 12"/>
           <p:cNvSpPr/>
           <p:nvPr/>
         </p:nvSpPr>
@@ -13521,7 +13521,7 @@
       </p:sp>
       <p:sp>
         <p:nvSpPr>
-          <p:cNvPr id="1590825534" name="Text 13"/>
+          <p:cNvPr id="744299733" name="Text 13"/>
           <p:cNvSpPr/>
           <p:nvPr/>
         </p:nvSpPr>
@@ -13561,7 +13561,7 @@
       </p:sp>
       <p:sp>
         <p:nvSpPr>
-          <p:cNvPr id="465905597" name="Shape 14"/>
+          <p:cNvPr id="2057949646" name="Shape 14"/>
           <p:cNvSpPr/>
           <p:nvPr/>
         </p:nvSpPr>
@@ -13596,7 +13596,7 @@
       </p:sp>
       <p:sp>
         <p:nvSpPr>
-          <p:cNvPr id="1388013962" name="Shape 15"/>
+          <p:cNvPr id="685364382" name="Shape 15"/>
           <p:cNvSpPr/>
           <p:nvPr/>
         </p:nvSpPr>
@@ -13626,7 +13626,7 @@
       </p:sp>
       <p:sp>
         <p:nvSpPr>
-          <p:cNvPr id="1220532244" name="Text 16"/>
+          <p:cNvPr id="740120458" name="Text 16"/>
           <p:cNvSpPr/>
           <p:nvPr/>
         </p:nvSpPr>
@@ -13666,7 +13666,7 @@
       </p:sp>
       <p:sp>
         <p:nvSpPr>
-          <p:cNvPr id="490003497" name="Text 17"/>
+          <p:cNvPr id="1255426119" name="Text 17"/>
           <p:cNvSpPr/>
           <p:nvPr/>
         </p:nvSpPr>
@@ -13768,7 +13768,7 @@
       </p:grpSpPr>
       <p:sp>
         <p:nvSpPr>
-          <p:cNvPr id="1005638091" name="Text 0"/>
+          <p:cNvPr id="1867665248" name="Text 0"/>
           <p:cNvSpPr/>
           <p:nvPr/>
         </p:nvSpPr>
@@ -13808,7 +13808,7 @@
       </p:sp>
       <p:sp>
         <p:nvSpPr>
-          <p:cNvPr id="1724946929" name="Text 24"/>
+          <p:cNvPr id="1331820508" name="Text 24"/>
           <p:cNvSpPr/>
           <p:nvPr/>
         </p:nvSpPr>
@@ -13837,7 +13837,7 @@
       </p:sp>
       <p:sp>
         <p:nvSpPr>
-          <p:cNvPr id="1951069133" name="Text 30"/>
+          <p:cNvPr id="776595656" name="Text 30"/>
           <p:cNvSpPr/>
           <p:nvPr/>
         </p:nvSpPr>
@@ -13866,7 +13866,7 @@
       </p:sp>
       <p:pic>
         <p:nvPicPr>
-          <p:cNvPr id="375641513" name="Immagine 41"/>
+          <p:cNvPr id="1911935427" name="Immagine 41"/>
           <p:cNvPicPr>
             <a:picLocks noChangeAspect="1"/>
           </p:cNvPicPr>
@@ -13893,7 +13893,7 @@
       </p:pic>
       <p:sp>
         <p:nvSpPr>
-          <p:cNvPr id="211978560" name="Shape 1"/>
+          <p:cNvPr id="178053156" name="Shape 1"/>
           <p:cNvSpPr/>
           <p:nvPr/>
         </p:nvSpPr>
@@ -13963,7 +13963,7 @@
       </p:grpSpPr>
       <p:sp>
         <p:nvSpPr>
-          <p:cNvPr id="743577363" name="Text 0"/>
+          <p:cNvPr id="71708873" name="Text 0"/>
           <p:cNvSpPr/>
           <p:nvPr/>
         </p:nvSpPr>
@@ -14003,7 +14003,7 @@
       </p:sp>
       <p:sp>
         <p:nvSpPr>
-          <p:cNvPr id="30562354" name="Shape 1"/>
+          <p:cNvPr id="1197931347" name="Shape 1"/>
           <p:cNvSpPr/>
           <p:nvPr/>
         </p:nvSpPr>
@@ -14033,7 +14033,7 @@
       </p:sp>
       <p:sp>
         <p:nvSpPr>
-          <p:cNvPr id="1795519111" name="Shape 2"/>
+          <p:cNvPr id="159170958" name="Shape 2"/>
           <p:cNvSpPr/>
           <p:nvPr/>
         </p:nvSpPr>
@@ -14068,7 +14068,7 @@
       </p:sp>
       <p:sp>
         <p:nvSpPr>
-          <p:cNvPr id="1327476990" name="Text 3"/>
+          <p:cNvPr id="1879739907" name="Text 3"/>
           <p:cNvSpPr/>
           <p:nvPr/>
         </p:nvSpPr>
@@ -14108,7 +14108,7 @@
       </p:sp>
       <p:sp>
         <p:nvSpPr>
-          <p:cNvPr id="1657618406" name="Shape 4"/>
+          <p:cNvPr id="788056825" name="Shape 4"/>
           <p:cNvSpPr/>
           <p:nvPr/>
         </p:nvSpPr>
@@ -14138,7 +14138,7 @@
       </p:sp>
       <p:sp>
         <p:nvSpPr>
-          <p:cNvPr id="351880698" name="Text 5"/>
+          <p:cNvPr id="1165931998" name="Text 5"/>
           <p:cNvSpPr/>
           <p:nvPr/>
         </p:nvSpPr>
@@ -14178,7 +14178,7 @@
       </p:sp>
       <p:sp>
         <p:nvSpPr>
-          <p:cNvPr id="1088173630" name="Text 6"/>
+          <p:cNvPr id="1668379135" name="Text 6"/>
           <p:cNvSpPr/>
           <p:nvPr/>
         </p:nvSpPr>
@@ -14218,7 +14218,7 @@
       </p:sp>
       <p:sp>
         <p:nvSpPr>
-          <p:cNvPr id="1109583465" name="Text 7"/>
+          <p:cNvPr id="875235895" name="Text 7"/>
           <p:cNvSpPr/>
           <p:nvPr/>
         </p:nvSpPr>
@@ -14280,7 +14280,7 @@
       </p:sp>
       <p:sp>
         <p:nvSpPr>
-          <p:cNvPr id="1358789866" name="Text 8"/>
+          <p:cNvPr id="1284851336" name="Text 8"/>
           <p:cNvSpPr/>
           <p:nvPr/>
         </p:nvSpPr>
@@ -14320,7 +14320,7 @@
       </p:sp>
       <p:sp>
         <p:nvSpPr>
-          <p:cNvPr id="1820282680" name="Shape 9"/>
+          <p:cNvPr id="1697803353" name="Shape 9"/>
           <p:cNvSpPr/>
           <p:nvPr/>
         </p:nvSpPr>
@@ -14355,7 +14355,7 @@
       </p:sp>
       <p:sp>
         <p:nvSpPr>
-          <p:cNvPr id="191132456" name="Text 10"/>
+          <p:cNvPr id="1180040161" name="Text 10"/>
           <p:cNvSpPr/>
           <p:nvPr/>
         </p:nvSpPr>
@@ -14395,7 +14395,7 @@
       </p:sp>
       <p:sp>
         <p:nvSpPr>
-          <p:cNvPr id="1186187687" name="Shape 11"/>
+          <p:cNvPr id="887312277" name="Shape 11"/>
           <p:cNvSpPr/>
           <p:nvPr/>
         </p:nvSpPr>
@@ -14425,7 +14425,7 @@
       </p:sp>
       <p:sp>
         <p:nvSpPr>
-          <p:cNvPr id="2108596220" name="Text 12"/>
+          <p:cNvPr id="1938818333" name="Text 12"/>
           <p:cNvSpPr/>
           <p:nvPr/>
         </p:nvSpPr>
@@ -14465,7 +14465,7 @@
       </p:sp>
       <p:sp>
         <p:nvSpPr>
-          <p:cNvPr id="1254891635" name="Text 13"/>
+          <p:cNvPr id="291932360" name="Text 13"/>
           <p:cNvSpPr/>
           <p:nvPr/>
         </p:nvSpPr>
@@ -14527,7 +14527,7 @@
       </p:sp>
       <p:sp>
         <p:nvSpPr>
-          <p:cNvPr id="342921176" name="Text 14"/>
+          <p:cNvPr id="467750437" name="Text 14"/>
           <p:cNvSpPr/>
           <p:nvPr/>
         </p:nvSpPr>
@@ -14567,7 +14567,7 @@
       </p:sp>
       <p:sp>
         <p:nvSpPr>
-          <p:cNvPr id="1005370097" name="Text 15"/>
+          <p:cNvPr id="694368951" name="Text 15"/>
           <p:cNvSpPr/>
           <p:nvPr/>
         </p:nvSpPr>
@@ -14607,7 +14607,7 @@
       </p:sp>
       <p:sp>
         <p:nvSpPr>
-          <p:cNvPr id="2121887939" name="Shape 16"/>
+          <p:cNvPr id="631558275" name="Shape 16"/>
           <p:cNvSpPr/>
           <p:nvPr/>
         </p:nvSpPr>
@@ -14642,7 +14642,7 @@
       </p:sp>
       <p:sp>
         <p:nvSpPr>
-          <p:cNvPr id="975900348" name="Text 17"/>
+          <p:cNvPr id="2085671503" name="Text 17"/>
           <p:cNvSpPr/>
           <p:nvPr/>
         </p:nvSpPr>
@@ -14682,7 +14682,7 @@
       </p:sp>
       <p:sp>
         <p:nvSpPr>
-          <p:cNvPr id="1744271713" name="Shape 18"/>
+          <p:cNvPr id="576649361" name="Shape 18"/>
           <p:cNvSpPr/>
           <p:nvPr/>
         </p:nvSpPr>
@@ -14712,7 +14712,7 @@
       </p:sp>
       <p:sp>
         <p:nvSpPr>
-          <p:cNvPr id="391210902" name="Text 19"/>
+          <p:cNvPr id="513596235" name="Text 19"/>
           <p:cNvSpPr/>
           <p:nvPr/>
         </p:nvSpPr>
@@ -14752,7 +14752,7 @@
       </p:sp>
       <p:sp>
         <p:nvSpPr>
-          <p:cNvPr id="1392476972" name="Text 20"/>
+          <p:cNvPr id="1999993931" name="Text 20"/>
           <p:cNvSpPr/>
           <p:nvPr/>
         </p:nvSpPr>
@@ -14814,7 +14814,7 @@
       </p:sp>
       <p:sp>
         <p:nvSpPr>
-          <p:cNvPr id="676738367" name="Text 21"/>
+          <p:cNvPr id="331582945" name="Text 21"/>
           <p:cNvSpPr/>
           <p:nvPr/>
         </p:nvSpPr>
@@ -14854,7 +14854,7 @@
       </p:sp>
       <p:sp>
         <p:nvSpPr>
-          <p:cNvPr id="1507461996" name="Text 22"/>
+          <p:cNvPr id="1525141202" name="Text 22"/>
           <p:cNvSpPr/>
           <p:nvPr/>
         </p:nvSpPr>
@@ -14923,7 +14923,7 @@
       </p:grpSpPr>
       <p:sp>
         <p:nvSpPr>
-          <p:cNvPr id="1402797603" name="Text 0"/>
+          <p:cNvPr id="1555613175" name="Text 0"/>
           <p:cNvSpPr/>
           <p:nvPr/>
         </p:nvSpPr>
@@ -14963,7 +14963,7 @@
       </p:sp>
       <p:sp>
         <p:nvSpPr>
-          <p:cNvPr id="829249830" name="Shape 1"/>
+          <p:cNvPr id="2121298302" name="Shape 1"/>
           <p:cNvSpPr/>
           <p:nvPr/>
         </p:nvSpPr>
@@ -14993,7 +14993,7 @@
       </p:sp>
       <p:sp>
         <p:nvSpPr>
-          <p:cNvPr id="1836823967" name="Shape 2"/>
+          <p:cNvPr id="452324551" name="Shape 2"/>
           <p:cNvSpPr/>
           <p:nvPr/>
         </p:nvSpPr>
@@ -15028,7 +15028,7 @@
       </p:sp>
       <p:sp>
         <p:nvSpPr>
-          <p:cNvPr id="1964008049" name="Text 3"/>
+          <p:cNvPr id="784254031" name="Text 3"/>
           <p:cNvSpPr/>
           <p:nvPr/>
         </p:nvSpPr>
@@ -15068,7 +15068,7 @@
       </p:sp>
       <p:sp>
         <p:nvSpPr>
-          <p:cNvPr id="2054126594" name="Text 4"/>
+          <p:cNvPr id="288063391" name="Text 4"/>
           <p:cNvSpPr/>
           <p:nvPr/>
         </p:nvSpPr>
@@ -15108,7 +15108,7 @@
       </p:sp>
       <p:sp>
         <p:nvSpPr>
-          <p:cNvPr id="390164850" name="Text 5"/>
+          <p:cNvPr id="608398427" name="Text 5"/>
           <p:cNvSpPr/>
           <p:nvPr/>
         </p:nvSpPr>
@@ -15170,7 +15170,7 @@
       </p:sp>
       <p:sp>
         <p:nvSpPr>
-          <p:cNvPr id="1296381110" name="Text 6"/>
+          <p:cNvPr id="648839190" name="Text 6"/>
           <p:cNvSpPr/>
           <p:nvPr/>
         </p:nvSpPr>
@@ -15210,7 +15210,7 @@
       </p:sp>
       <p:sp>
         <p:nvSpPr>
-          <p:cNvPr id="742701073" name="Text 7"/>
+          <p:cNvPr id="1634155472" name="Text 7"/>
           <p:cNvSpPr/>
           <p:nvPr/>
         </p:nvSpPr>
@@ -15250,7 +15250,7 @@
       </p:sp>
       <p:sp>
         <p:nvSpPr>
-          <p:cNvPr id="1463013701" name="Text 8"/>
+          <p:cNvPr id="121878393" name="Text 8"/>
           <p:cNvSpPr/>
           <p:nvPr/>
         </p:nvSpPr>
@@ -15290,7 +15290,7 @@
       </p:sp>
       <p:sp>
         <p:nvSpPr>
-          <p:cNvPr id="669968490" name="Text 9"/>
+          <p:cNvPr id="2037370456" name="Text 9"/>
           <p:cNvSpPr/>
           <p:nvPr/>
         </p:nvSpPr>
@@ -15352,7 +15352,7 @@
       </p:sp>
       <p:sp>
         <p:nvSpPr>
-          <p:cNvPr id="1972141548" name="Text 10"/>
+          <p:cNvPr id="1935061337" name="Text 10"/>
           <p:cNvSpPr/>
           <p:nvPr/>
         </p:nvSpPr>
@@ -15392,7 +15392,7 @@
       </p:sp>
       <p:sp>
         <p:nvSpPr>
-          <p:cNvPr id="104052548" name="Text 11"/>
+          <p:cNvPr id="852526698" name="Text 11"/>
           <p:cNvSpPr/>
           <p:nvPr/>
         </p:nvSpPr>
@@ -15432,7 +15432,7 @@
       </p:sp>
       <p:sp>
         <p:nvSpPr>
-          <p:cNvPr id="1564560463" name="Text 12"/>
+          <p:cNvPr id="1199571013" name="Text 12"/>
           <p:cNvSpPr/>
           <p:nvPr/>
         </p:nvSpPr>
@@ -15461,7 +15461,7 @@
       </p:sp>
       <p:sp>
         <p:nvSpPr>
-          <p:cNvPr id="2139003122" name="Shape 13"/>
+          <p:cNvPr id="1195896249" name="Shape 13"/>
           <p:cNvSpPr/>
           <p:nvPr/>
         </p:nvSpPr>
@@ -15496,7 +15496,7 @@
       </p:sp>
       <p:sp>
         <p:nvSpPr>
-          <p:cNvPr id="2085747817" name="Text 14"/>
+          <p:cNvPr id="1928219505" name="Text 14"/>
           <p:cNvSpPr/>
           <p:nvPr/>
         </p:nvSpPr>
@@ -15536,7 +15536,7 @@
       </p:sp>
       <p:sp>
         <p:nvSpPr>
-          <p:cNvPr id="750999019" name="Text 15"/>
+          <p:cNvPr id="1577828112" name="Text 15"/>
           <p:cNvSpPr/>
           <p:nvPr/>
         </p:nvSpPr>
@@ -15576,7 +15576,7 @@
       </p:sp>
       <p:sp>
         <p:nvSpPr>
-          <p:cNvPr id="1040812025" name="Text 16"/>
+          <p:cNvPr id="273737969" name="Text 16"/>
           <p:cNvSpPr/>
           <p:nvPr/>
         </p:nvSpPr>
@@ -15638,7 +15638,7 @@
       </p:sp>
       <p:sp>
         <p:nvSpPr>
-          <p:cNvPr id="720982071" name="Text 17"/>
+          <p:cNvPr id="935012986" name="Text 17"/>
           <p:cNvSpPr/>
           <p:nvPr/>
         </p:nvSpPr>
@@ -15678,7 +15678,7 @@
       </p:sp>
       <p:sp>
         <p:nvSpPr>
-          <p:cNvPr id="93218318" name="Text 18"/>
+          <p:cNvPr id="923688833" name="Text 18"/>
           <p:cNvSpPr/>
           <p:nvPr/>
         </p:nvSpPr>
@@ -15718,7 +15718,7 @@
       </p:sp>
       <p:sp>
         <p:nvSpPr>
-          <p:cNvPr id="1744517707" name="Text 19"/>
+          <p:cNvPr id="1989017945" name="Text 19"/>
           <p:cNvSpPr/>
           <p:nvPr/>
         </p:nvSpPr>
@@ -15758,7 +15758,7 @@
       </p:sp>
       <p:sp>
         <p:nvSpPr>
-          <p:cNvPr id="1476473062" name="Text 20"/>
+          <p:cNvPr id="342098500" name="Text 20"/>
           <p:cNvSpPr/>
           <p:nvPr/>
         </p:nvSpPr>
@@ -15820,7 +15820,7 @@
       </p:sp>
       <p:sp>
         <p:nvSpPr>
-          <p:cNvPr id="570344958" name="Text 21"/>
+          <p:cNvPr id="1532234787" name="Text 21"/>
           <p:cNvSpPr/>
           <p:nvPr/>
         </p:nvSpPr>
@@ -15860,7 +15860,7 @@
       </p:sp>
       <p:sp>
         <p:nvSpPr>
-          <p:cNvPr id="532804055" name="Text 22"/>
+          <p:cNvPr id="1025123975" name="Text 22"/>
           <p:cNvSpPr/>
           <p:nvPr/>
         </p:nvSpPr>
@@ -15900,7 +15900,7 @@
       </p:sp>
       <p:sp>
         <p:nvSpPr>
-          <p:cNvPr id="816072832" name="Text 23"/>
+          <p:cNvPr id="1164747125" name="Text 23"/>
           <p:cNvSpPr/>
           <p:nvPr/>
         </p:nvSpPr>
@@ -15929,7 +15929,7 @@
       </p:sp>
       <p:sp>
         <p:nvSpPr>
-          <p:cNvPr id="1200861142" name="Text 24"/>
+          <p:cNvPr id="528608956" name="Text 24"/>
           <p:cNvSpPr/>
           <p:nvPr/>
         </p:nvSpPr>
@@ -15958,7 +15958,7 @@
       </p:sp>
       <p:sp>
         <p:nvSpPr>
-          <p:cNvPr id="601266230" name="Text 25"/>
+          <p:cNvPr id="737505904" name="Text 25"/>
           <p:cNvSpPr/>
           <p:nvPr/>
         </p:nvSpPr>
@@ -16027,7 +16027,7 @@
       </p:grpSpPr>
       <p:sp>
         <p:nvSpPr>
-          <p:cNvPr id="337836505" name="Text 0"/>
+          <p:cNvPr id="1098383139" name="Text 0"/>
           <p:cNvSpPr/>
           <p:nvPr/>
         </p:nvSpPr>
@@ -16089,7 +16089,7 @@
       </p:sp>
       <p:sp>
         <p:nvSpPr>
-          <p:cNvPr id="529519752" name="Text 1"/>
+          <p:cNvPr id="619736058" name="Text 1"/>
           <p:cNvSpPr/>
           <p:nvPr/>
         </p:nvSpPr>
@@ -16118,7 +16118,7 @@
       </p:sp>
       <p:sp>
         <p:nvSpPr>
-          <p:cNvPr id="636357855" name="Text 2"/>
+          <p:cNvPr id="1577645029" name="Text 2"/>
           <p:cNvSpPr/>
           <p:nvPr/>
         </p:nvSpPr>
@@ -16147,7 +16147,7 @@
       </p:sp>
       <p:sp>
         <p:nvSpPr>
-          <p:cNvPr id="1860872839" name="Text 1"/>
+          <p:cNvPr id="273665243" name="Text 1"/>
           <p:cNvSpPr/>
           <p:nvPr/>
         </p:nvSpPr>
@@ -16227,7 +16227,7 @@
       </p:grpSpPr>
       <p:sp>
         <p:nvSpPr>
-          <p:cNvPr id="1186763659" name="Text 0"/>
+          <p:cNvPr id="1991367668" name="Text 0"/>
           <p:cNvSpPr/>
           <p:nvPr/>
         </p:nvSpPr>
@@ -16267,7 +16267,7 @@
       </p:sp>
       <p:sp>
         <p:nvSpPr>
-          <p:cNvPr id="683329230" name="Shape 1"/>
+          <p:cNvPr id="2000650378" name="Shape 1"/>
           <p:cNvSpPr/>
           <p:nvPr/>
         </p:nvSpPr>
@@ -16297,7 +16297,7 @@
       </p:sp>
       <p:sp>
         <p:nvSpPr>
-          <p:cNvPr id="1574855460" name="Shape 2"/>
+          <p:cNvPr id="1895423857" name="Shape 2"/>
           <p:cNvSpPr/>
           <p:nvPr/>
         </p:nvSpPr>
@@ -16332,7 +16332,7 @@
       </p:sp>
       <p:sp>
         <p:nvSpPr>
-          <p:cNvPr id="1118558619" name="Text 3"/>
+          <p:cNvPr id="268940391" name="Text 3"/>
           <p:cNvSpPr/>
           <p:nvPr/>
         </p:nvSpPr>
@@ -16372,7 +16372,7 @@
       </p:sp>
       <p:sp>
         <p:nvSpPr>
-          <p:cNvPr id="1974748444" name="Shape 4"/>
+          <p:cNvPr id="1107890406" name="Shape 4"/>
           <p:cNvSpPr/>
           <p:nvPr/>
         </p:nvSpPr>
@@ -16407,7 +16407,7 @@
       </p:sp>
       <p:sp>
         <p:nvSpPr>
-          <p:cNvPr id="677872573" name="Text 5"/>
+          <p:cNvPr id="855727428" name="Text 5"/>
           <p:cNvSpPr/>
           <p:nvPr/>
         </p:nvSpPr>
@@ -16447,7 +16447,7 @@
       </p:sp>
       <p:sp>
         <p:nvSpPr>
-          <p:cNvPr id="706276269" name="Shape 6"/>
+          <p:cNvPr id="1728231110" name="Shape 6"/>
           <p:cNvSpPr/>
           <p:nvPr/>
         </p:nvSpPr>
@@ -16482,7 +16482,7 @@
       </p:sp>
       <p:sp>
         <p:nvSpPr>
-          <p:cNvPr id="641165888" name="Text 7"/>
+          <p:cNvPr id="1775270186" name="Text 7"/>
           <p:cNvSpPr/>
           <p:nvPr/>
         </p:nvSpPr>
@@ -16522,7 +16522,7 @@
       </p:sp>
       <p:sp>
         <p:nvSpPr>
-          <p:cNvPr id="528790195" name="Shape 8"/>
+          <p:cNvPr id="872965948" name="Shape 8"/>
           <p:cNvSpPr/>
           <p:nvPr/>
         </p:nvSpPr>
@@ -16557,7 +16557,7 @@
       </p:sp>
       <p:sp>
         <p:nvSpPr>
-          <p:cNvPr id="1559443354" name="Text 9"/>
+          <p:cNvPr id="1628237846" name="Text 9"/>
           <p:cNvSpPr/>
           <p:nvPr/>
         </p:nvSpPr>
@@ -16597,7 +16597,7 @@
       </p:sp>
       <p:sp>
         <p:nvSpPr>
-          <p:cNvPr id="1287625416" name="Shape 10"/>
+          <p:cNvPr id="2044333791" name="Shape 10"/>
           <p:cNvSpPr/>
           <p:nvPr/>
         </p:nvSpPr>
@@ -16632,7 +16632,7 @@
       </p:sp>
       <p:sp>
         <p:nvSpPr>
-          <p:cNvPr id="1275835630" name="Text 11"/>
+          <p:cNvPr id="1595979857" name="Text 11"/>
           <p:cNvSpPr/>
           <p:nvPr/>
         </p:nvSpPr>
@@ -16683,7 +16683,7 @@
       </p:sp>
       <p:sp>
         <p:nvSpPr>
-          <p:cNvPr id="1939995725" name="Shape 12"/>
+          <p:cNvPr id="315641068" name="Shape 12"/>
           <p:cNvSpPr/>
           <p:nvPr/>
         </p:nvSpPr>
@@ -16718,7 +16718,7 @@
       </p:sp>
       <p:sp>
         <p:nvSpPr>
-          <p:cNvPr id="1450278526" name="Text 13"/>
+          <p:cNvPr id="1858984854" name="Text 13"/>
           <p:cNvSpPr/>
           <p:nvPr/>
         </p:nvSpPr>
@@ -16758,7 +16758,7 @@
       </p:sp>
       <p:sp>
         <p:nvSpPr>
-          <p:cNvPr id="2019155346" name="Shape 14"/>
+          <p:cNvPr id="2071702848" name="Shape 14"/>
           <p:cNvSpPr/>
           <p:nvPr/>
         </p:nvSpPr>
@@ -16793,7 +16793,7 @@
       </p:sp>
       <p:sp>
         <p:nvSpPr>
-          <p:cNvPr id="112967426" name="Text 15"/>
+          <p:cNvPr id="1744364552" name="Text 15"/>
           <p:cNvSpPr/>
           <p:nvPr/>
         </p:nvSpPr>
@@ -16833,7 +16833,7 @@
       </p:sp>
       <p:sp>
         <p:nvSpPr>
-          <p:cNvPr id="90152017" name="Shape 16"/>
+          <p:cNvPr id="859679778" name="Shape 16"/>
           <p:cNvSpPr/>
           <p:nvPr/>
         </p:nvSpPr>
@@ -16868,7 +16868,7 @@
       </p:sp>
       <p:sp>
         <p:nvSpPr>
-          <p:cNvPr id="742755974" name="Text 17"/>
+          <p:cNvPr id="604310073" name="Text 17"/>
           <p:cNvSpPr/>
           <p:nvPr/>
         </p:nvSpPr>
@@ -16984,7 +16984,7 @@
       </p:sp>
       <p:sp>
         <p:nvSpPr>
-          <p:cNvPr id="933986529" name="Shape 18"/>
+          <p:cNvPr id="899174146" name="Shape 18"/>
           <p:cNvSpPr/>
           <p:nvPr/>
         </p:nvSpPr>
@@ -17019,7 +17019,7 @@
       </p:sp>
       <p:sp>
         <p:nvSpPr>
-          <p:cNvPr id="359088664" name="Text 19"/>
+          <p:cNvPr id="1166726598" name="Text 19"/>
           <p:cNvSpPr/>
           <p:nvPr/>
         </p:nvSpPr>
@@ -17070,7 +17070,7 @@
       </p:sp>
       <p:sp>
         <p:nvSpPr>
-          <p:cNvPr id="1616532796" name="Shape 20"/>
+          <p:cNvPr id="276814742" name="Shape 20"/>
           <p:cNvSpPr/>
           <p:nvPr/>
         </p:nvSpPr>
@@ -17105,7 +17105,7 @@
       </p:sp>
       <p:sp>
         <p:nvSpPr>
-          <p:cNvPr id="304395104" name="Text 21"/>
+          <p:cNvPr id="1262699013" name="Text 21"/>
           <p:cNvSpPr/>
           <p:nvPr/>
         </p:nvSpPr>
@@ -17145,7 +17145,7 @@
       </p:sp>
       <p:sp>
         <p:nvSpPr>
-          <p:cNvPr id="539501800" name="Shape 22"/>
+          <p:cNvPr id="1346816014" name="Shape 22"/>
           <p:cNvSpPr/>
           <p:nvPr/>
         </p:nvSpPr>
@@ -17180,7 +17180,7 @@
       </p:sp>
       <p:sp>
         <p:nvSpPr>
-          <p:cNvPr id="1029669388" name="Text 23"/>
+          <p:cNvPr id="526710619" name="Text 23"/>
           <p:cNvSpPr/>
           <p:nvPr/>
         </p:nvSpPr>
@@ -17220,7 +17220,7 @@
       </p:sp>
       <p:sp>
         <p:nvSpPr>
-          <p:cNvPr id="508220233" name="Shape 24"/>
+          <p:cNvPr id="1675955335" name="Shape 24"/>
           <p:cNvSpPr/>
           <p:nvPr/>
         </p:nvSpPr>
@@ -17255,7 +17255,7 @@
       </p:sp>
       <p:sp>
         <p:nvSpPr>
-          <p:cNvPr id="1952965512" name="Text 25"/>
+          <p:cNvPr id="530345915" name="Text 25"/>
           <p:cNvSpPr/>
           <p:nvPr/>
         </p:nvSpPr>
@@ -17331,7 +17331,7 @@
                 <a:ea typeface="Calibri"/>
                 <a:cs typeface="Calibri"/>
               </a:rPr>
-              <a:t>result retrieval, callback/webhook support</a:t>
+              <a:t>result retrieval</a:t>
             </a:r>
             <a:r>
               <a:rPr lang="it-IT" sz="1100">
@@ -17350,7 +17350,7 @@
       </p:sp>
       <p:sp>
         <p:nvSpPr>
-          <p:cNvPr id="1148059192" name="Shape 26"/>
+          <p:cNvPr id="1665574160" name="Shape 26"/>
           <p:cNvSpPr/>
           <p:nvPr/>
         </p:nvSpPr>
@@ -17385,7 +17385,7 @@
       </p:sp>
       <p:sp>
         <p:nvSpPr>
-          <p:cNvPr id="639441960" name="Text 27"/>
+          <p:cNvPr id="1413122723" name="Text 27"/>
           <p:cNvSpPr/>
           <p:nvPr/>
         </p:nvSpPr>
@@ -17436,7 +17436,7 @@
       </p:sp>
       <p:sp>
         <p:nvSpPr>
-          <p:cNvPr id="1111193462" name="Shape 28"/>
+          <p:cNvPr id="744823054" name="Shape 28"/>
           <p:cNvSpPr/>
           <p:nvPr/>
         </p:nvSpPr>
@@ -17471,7 +17471,7 @@
       </p:sp>
       <p:sp>
         <p:nvSpPr>
-          <p:cNvPr id="1211020085" name="Text 29"/>
+          <p:cNvPr id="486835652" name="Text 29"/>
           <p:cNvSpPr/>
           <p:nvPr/>
         </p:nvSpPr>
@@ -17511,7 +17511,7 @@
       </p:sp>
       <p:sp>
         <p:nvSpPr>
-          <p:cNvPr id="873825360" name="Shape 30"/>
+          <p:cNvPr id="250903888" name="Shape 30"/>
           <p:cNvSpPr/>
           <p:nvPr/>
         </p:nvSpPr>
@@ -17546,7 +17546,7 @@
       </p:sp>
       <p:sp>
         <p:nvSpPr>
-          <p:cNvPr id="76924756" name="Text 31"/>
+          <p:cNvPr id="1222167120" name="Text 31"/>
           <p:cNvSpPr/>
           <p:nvPr/>
         </p:nvSpPr>
@@ -17586,7 +17586,7 @@
       </p:sp>
       <p:sp>
         <p:nvSpPr>
-          <p:cNvPr id="208197850" name="Shape 32"/>
+          <p:cNvPr id="209717801" name="Shape 32"/>
           <p:cNvSpPr/>
           <p:nvPr/>
         </p:nvSpPr>
@@ -17621,7 +17621,7 @@
       </p:sp>
       <p:sp>
         <p:nvSpPr>
-          <p:cNvPr id="1632757933" name="Text 33"/>
+          <p:cNvPr id="1163556941" name="Text 33"/>
           <p:cNvSpPr/>
           <p:nvPr/>
         </p:nvSpPr>
@@ -17672,7 +17672,7 @@
       </p:sp>
       <p:sp>
         <p:nvSpPr>
-          <p:cNvPr id="139730003" name="Shape 34"/>
+          <p:cNvPr id="1350583074" name="Shape 34"/>
           <p:cNvSpPr/>
           <p:nvPr/>
         </p:nvSpPr>
@@ -17707,7 +17707,7 @@
       </p:sp>
       <p:sp>
         <p:nvSpPr>
-          <p:cNvPr id="568035595" name="Text 35"/>
+          <p:cNvPr id="1160569138" name="Text 35"/>
           <p:cNvSpPr/>
           <p:nvPr/>
         </p:nvSpPr>
@@ -17747,7 +17747,7 @@
       </p:sp>
       <p:sp>
         <p:nvSpPr>
-          <p:cNvPr id="1801335460" name="Shape 36"/>
+          <p:cNvPr id="645155426" name="Shape 36"/>
           <p:cNvSpPr/>
           <p:nvPr/>
         </p:nvSpPr>
@@ -17782,7 +17782,7 @@
       </p:sp>
       <p:sp>
         <p:nvSpPr>
-          <p:cNvPr id="573431458" name="Text 37"/>
+          <p:cNvPr id="373941413" name="Text 37"/>
           <p:cNvSpPr/>
           <p:nvPr/>
         </p:nvSpPr>
@@ -17833,7 +17833,7 @@
       </p:sp>
       <p:sp>
         <p:nvSpPr>
-          <p:cNvPr id="165053705" name="Shape 38"/>
+          <p:cNvPr id="842330806" name="Shape 38"/>
           <p:cNvSpPr/>
           <p:nvPr/>
         </p:nvSpPr>
@@ -17868,7 +17868,7 @@
       </p:sp>
       <p:sp>
         <p:nvSpPr>
-          <p:cNvPr id="2100197340" name="Text 39"/>
+          <p:cNvPr id="1770419986" name="Text 39"/>
           <p:cNvSpPr/>
           <p:nvPr/>
         </p:nvSpPr>
@@ -17908,7 +17908,7 @@
       </p:sp>
       <p:sp>
         <p:nvSpPr>
-          <p:cNvPr id="470374539" name="Shape 40"/>
+          <p:cNvPr id="558879650" name="Shape 40"/>
           <p:cNvSpPr/>
           <p:nvPr/>
         </p:nvSpPr>
@@ -17943,7 +17943,7 @@
       </p:sp>
       <p:sp>
         <p:nvSpPr>
-          <p:cNvPr id="2065506043" name="Text 41"/>
+          <p:cNvPr id="1136388467" name="Text 41"/>
           <p:cNvSpPr/>
           <p:nvPr/>
         </p:nvSpPr>
@@ -18016,7 +18016,7 @@
       </p:sp>
       <p:sp>
         <p:nvSpPr>
-          <p:cNvPr id="1039207794" name="Text 42"/>
+          <p:cNvPr id="432627972" name="Text 42"/>
           <p:cNvSpPr/>
           <p:nvPr/>
         </p:nvSpPr>
@@ -18085,7 +18085,7 @@
       </p:grpSpPr>
       <p:sp>
         <p:nvSpPr>
-          <p:cNvPr id="1627412332" name="Text 0"/>
+          <p:cNvPr id="1458725894" name="Text 0"/>
           <p:cNvSpPr/>
           <p:nvPr/>
         </p:nvSpPr>
@@ -18125,7 +18125,7 @@
       </p:sp>
       <p:sp>
         <p:nvSpPr>
-          <p:cNvPr id="868705947" name="Shape 1"/>
+          <p:cNvPr id="2097708445" name="Shape 1"/>
           <p:cNvSpPr/>
           <p:nvPr/>
         </p:nvSpPr>
@@ -18155,7 +18155,7 @@
       </p:sp>
       <p:sp>
         <p:nvSpPr>
-          <p:cNvPr id="67592993" name="Shape 2"/>
+          <p:cNvPr id="1829470638" name="Shape 2"/>
           <p:cNvSpPr/>
           <p:nvPr/>
         </p:nvSpPr>
@@ -18190,7 +18190,7 @@
       </p:sp>
       <p:sp>
         <p:nvSpPr>
-          <p:cNvPr id="782769866" name="Text 3"/>
+          <p:cNvPr id="1704213276" name="Text 3"/>
           <p:cNvSpPr/>
           <p:nvPr/>
         </p:nvSpPr>
@@ -18230,7 +18230,7 @@
       </p:sp>
       <p:sp>
         <p:nvSpPr>
-          <p:cNvPr id="223052451" name="Shape 4"/>
+          <p:cNvPr id="1310798287" name="Shape 4"/>
           <p:cNvSpPr/>
           <p:nvPr/>
         </p:nvSpPr>
@@ -18265,7 +18265,7 @@
       </p:sp>
       <p:sp>
         <p:nvSpPr>
-          <p:cNvPr id="1745903175" name="Text 5"/>
+          <p:cNvPr id="1776446068" name="Text 5"/>
           <p:cNvSpPr/>
           <p:nvPr/>
         </p:nvSpPr>
@@ -18305,7 +18305,7 @@
       </p:sp>
       <p:sp>
         <p:nvSpPr>
-          <p:cNvPr id="1709248165" name="Shape 6"/>
+          <p:cNvPr id="1692948499" name="Shape 6"/>
           <p:cNvSpPr/>
           <p:nvPr/>
         </p:nvSpPr>
@@ -18340,7 +18340,7 @@
       </p:sp>
       <p:sp>
         <p:nvSpPr>
-          <p:cNvPr id="543400296" name="Text 7"/>
+          <p:cNvPr id="1527936962" name="Text 7"/>
           <p:cNvSpPr/>
           <p:nvPr/>
         </p:nvSpPr>
@@ -18380,7 +18380,7 @@
       </p:sp>
       <p:sp>
         <p:nvSpPr>
-          <p:cNvPr id="451302702" name="Shape 8"/>
+          <p:cNvPr id="146450562" name="Shape 8"/>
           <p:cNvSpPr/>
           <p:nvPr/>
         </p:nvSpPr>
@@ -18415,7 +18415,7 @@
       </p:sp>
       <p:sp>
         <p:nvSpPr>
-          <p:cNvPr id="854330110" name="Text 9"/>
+          <p:cNvPr id="2017804515" name="Text 9"/>
           <p:cNvSpPr/>
           <p:nvPr/>
         </p:nvSpPr>
@@ -18455,7 +18455,7 @@
       </p:sp>
       <p:sp>
         <p:nvSpPr>
-          <p:cNvPr id="1769544355" name="Shape 10"/>
+          <p:cNvPr id="1851710657" name="Shape 10"/>
           <p:cNvSpPr/>
           <p:nvPr/>
         </p:nvSpPr>
@@ -18490,7 +18490,7 @@
       </p:sp>
       <p:sp>
         <p:nvSpPr>
-          <p:cNvPr id="26793059" name="Text 11"/>
+          <p:cNvPr id="943248749" name="Text 11"/>
           <p:cNvSpPr/>
           <p:nvPr/>
         </p:nvSpPr>
@@ -18548,7 +18548,7 @@
       </p:sp>
       <p:sp>
         <p:nvSpPr>
-          <p:cNvPr id="268969913" name="Shape 12"/>
+          <p:cNvPr id="1701708771" name="Shape 12"/>
           <p:cNvSpPr/>
           <p:nvPr/>
         </p:nvSpPr>
@@ -18583,7 +18583,7 @@
       </p:sp>
       <p:sp>
         <p:nvSpPr>
-          <p:cNvPr id="924979861" name="Text 13"/>
+          <p:cNvPr id="1057433080" name="Text 13"/>
           <p:cNvSpPr/>
           <p:nvPr/>
         </p:nvSpPr>
@@ -18623,7 +18623,7 @@
       </p:sp>
       <p:sp>
         <p:nvSpPr>
-          <p:cNvPr id="13798968" name="Shape 14"/>
+          <p:cNvPr id="774918762" name="Shape 14"/>
           <p:cNvSpPr/>
           <p:nvPr/>
         </p:nvSpPr>
@@ -18658,7 +18658,7 @@
       </p:sp>
       <p:sp>
         <p:nvSpPr>
-          <p:cNvPr id="1655464366" name="Text 15"/>
+          <p:cNvPr id="1495825899" name="Text 15"/>
           <p:cNvSpPr/>
           <p:nvPr/>
         </p:nvSpPr>
@@ -18760,7 +18760,7 @@
       </p:sp>
       <p:sp>
         <p:nvSpPr>
-          <p:cNvPr id="1561890535" name="Shape 16"/>
+          <p:cNvPr id="448807774" name="Shape 16"/>
           <p:cNvSpPr/>
           <p:nvPr/>
         </p:nvSpPr>
@@ -18795,7 +18795,7 @@
       </p:sp>
       <p:sp>
         <p:nvSpPr>
-          <p:cNvPr id="1074169007" name="Text 17"/>
+          <p:cNvPr id="962394464" name="Text 17"/>
           <p:cNvSpPr/>
           <p:nvPr/>
         </p:nvSpPr>
@@ -19020,7 +19020,7 @@
       </p:sp>
       <p:sp>
         <p:nvSpPr>
-          <p:cNvPr id="2097580143" name="Shape 18"/>
+          <p:cNvPr id="499975514" name="Shape 18"/>
           <p:cNvSpPr/>
           <p:nvPr/>
         </p:nvSpPr>
@@ -19055,7 +19055,7 @@
       </p:sp>
       <p:sp>
         <p:nvSpPr>
-          <p:cNvPr id="1253515629" name="Text 19"/>
+          <p:cNvPr id="468469552" name="Text 19"/>
           <p:cNvSpPr/>
           <p:nvPr/>
         </p:nvSpPr>
@@ -19113,7 +19113,7 @@
       </p:sp>
       <p:sp>
         <p:nvSpPr>
-          <p:cNvPr id="272988781" name="Shape 20"/>
+          <p:cNvPr id="973835694" name="Shape 20"/>
           <p:cNvSpPr/>
           <p:nvPr/>
         </p:nvSpPr>
@@ -19148,7 +19148,7 @@
       </p:sp>
       <p:sp>
         <p:nvSpPr>
-          <p:cNvPr id="774070349" name="Text 21"/>
+          <p:cNvPr id="134332666" name="Text 21"/>
           <p:cNvSpPr/>
           <p:nvPr/>
         </p:nvSpPr>
@@ -19188,7 +19188,7 @@
       </p:sp>
       <p:sp>
         <p:nvSpPr>
-          <p:cNvPr id="948098601" name="Shape 22"/>
+          <p:cNvPr id="1147797485" name="Shape 22"/>
           <p:cNvSpPr/>
           <p:nvPr/>
         </p:nvSpPr>
@@ -19223,7 +19223,7 @@
       </p:sp>
       <p:sp>
         <p:nvSpPr>
-          <p:cNvPr id="1789141154" name="Text 23"/>
+          <p:cNvPr id="2121505319" name="Text 23"/>
           <p:cNvSpPr/>
           <p:nvPr/>
         </p:nvSpPr>
@@ -19325,7 +19325,7 @@
       </p:sp>
       <p:sp>
         <p:nvSpPr>
-          <p:cNvPr id="639852824" name="Shape 24"/>
+          <p:cNvPr id="1582092092" name="Shape 24"/>
           <p:cNvSpPr/>
           <p:nvPr/>
         </p:nvSpPr>
@@ -19360,7 +19360,7 @@
       </p:sp>
       <p:sp>
         <p:nvSpPr>
-          <p:cNvPr id="1294596966" name="Text 25"/>
+          <p:cNvPr id="680633928" name="Text 25"/>
           <p:cNvSpPr/>
           <p:nvPr/>
         </p:nvSpPr>
@@ -19455,7 +19455,7 @@
       </p:sp>
       <p:sp>
         <p:nvSpPr>
-          <p:cNvPr id="980807932" name="Shape 26"/>
+          <p:cNvPr id="1471890208" name="Shape 26"/>
           <p:cNvSpPr/>
           <p:nvPr/>
         </p:nvSpPr>
@@ -19490,7 +19490,7 @@
       </p:sp>
       <p:sp>
         <p:nvSpPr>
-          <p:cNvPr id="188754047" name="Text 27"/>
+          <p:cNvPr id="717618246" name="Text 27"/>
           <p:cNvSpPr/>
           <p:nvPr/>
         </p:nvSpPr>
@@ -19548,7 +19548,7 @@
       </p:sp>
       <p:sp>
         <p:nvSpPr>
-          <p:cNvPr id="1608839020" name="Shape 28"/>
+          <p:cNvPr id="176276464" name="Shape 28"/>
           <p:cNvSpPr/>
           <p:nvPr/>
         </p:nvSpPr>
@@ -19583,7 +19583,7 @@
       </p:sp>
       <p:sp>
         <p:nvSpPr>
-          <p:cNvPr id="1000283240" name="Text 29"/>
+          <p:cNvPr id="1219470732" name="Text 29"/>
           <p:cNvSpPr/>
           <p:nvPr/>
         </p:nvSpPr>
@@ -19623,7 +19623,7 @@
       </p:sp>
       <p:sp>
         <p:nvSpPr>
-          <p:cNvPr id="200263514" name="Shape 30"/>
+          <p:cNvPr id="1962946022" name="Shape 30"/>
           <p:cNvSpPr/>
           <p:nvPr/>
         </p:nvSpPr>
@@ -19658,7 +19658,7 @@
       </p:sp>
       <p:sp>
         <p:nvSpPr>
-          <p:cNvPr id="388554372" name="Text 31"/>
+          <p:cNvPr id="1099422827" name="Text 31"/>
           <p:cNvSpPr/>
           <p:nvPr/>
         </p:nvSpPr>
@@ -19748,7 +19748,7 @@
       </p:sp>
       <p:sp>
         <p:nvSpPr>
-          <p:cNvPr id="353512486" name="Shape 32"/>
+          <p:cNvPr id="273236138" name="Shape 32"/>
           <p:cNvSpPr/>
           <p:nvPr/>
         </p:nvSpPr>
@@ -19783,7 +19783,7 @@
       </p:sp>
       <p:sp>
         <p:nvSpPr>
-          <p:cNvPr id="546983195" name="Text 33"/>
+          <p:cNvPr id="192052362" name="Text 33"/>
           <p:cNvSpPr/>
           <p:nvPr/>
         </p:nvSpPr>
@@ -20020,7 +20020,7 @@
       </p:sp>
       <p:sp>
         <p:nvSpPr>
-          <p:cNvPr id="69191390" name="Text 34"/>
+          <p:cNvPr id="1329106677" name="Text 34"/>
           <p:cNvSpPr/>
           <p:nvPr/>
         </p:nvSpPr>

--- a/docs/HealthSOA_Presentation.pptx
+++ b/docs/HealthSOA_Presentation.pptx
@@ -262,7 +262,7 @@
       </p:grpSpPr>
       <p:sp>
         <p:nvSpPr>
-          <p:cNvPr id="2089954372" name="Slide Image Placeholder 1"/>
+          <p:cNvPr id="334693278" name="Slide Image Placeholder 1"/>
           <p:cNvSpPr>
             <a:spLocks noChangeAspect="1" noGrp="1" noRot="1"/>
           </p:cNvSpPr>
@@ -274,7 +274,7 @@
       </p:sp>
       <p:sp>
         <p:nvSpPr>
-          <p:cNvPr id="1945867802" name="Notes Placeholder 2"/>
+          <p:cNvPr id="723563794" name="Notes Placeholder 2"/>
           <p:cNvSpPr>
             <a:spLocks noGrp="1"/>
           </p:cNvSpPr>
@@ -296,7 +296,7 @@
       </p:sp>
       <p:sp>
         <p:nvSpPr>
-          <p:cNvPr id="1212729718" name="Slide Number Placeholder 3"/>
+          <p:cNvPr id="1074709343" name="Slide Number Placeholder 3"/>
           <p:cNvSpPr>
             <a:spLocks noGrp="1"/>
           </p:cNvSpPr>
@@ -347,7 +347,7 @@
       </p:grpSpPr>
       <p:sp>
         <p:nvSpPr>
-          <p:cNvPr id="1153086361" name="Slide Image Placeholder 1"/>
+          <p:cNvPr id="5829018" name="Slide Image Placeholder 1"/>
           <p:cNvSpPr>
             <a:spLocks noChangeAspect="1" noGrp="1" noRot="1"/>
           </p:cNvSpPr>
@@ -359,7 +359,7 @@
       </p:sp>
       <p:sp>
         <p:nvSpPr>
-          <p:cNvPr id="962132368" name="Notes Placeholder 2"/>
+          <p:cNvPr id="1266786754" name="Notes Placeholder 2"/>
           <p:cNvSpPr>
             <a:spLocks noGrp="1"/>
           </p:cNvSpPr>
@@ -657,7 +657,7 @@
       </p:sp>
       <p:sp>
         <p:nvSpPr>
-          <p:cNvPr id="127304977" name="Slide Number Placeholder 3"/>
+          <p:cNvPr id="1740447021" name="Slide Number Placeholder 3"/>
           <p:cNvSpPr>
             <a:spLocks noGrp="1"/>
           </p:cNvSpPr>
@@ -708,7 +708,7 @@
       </p:grpSpPr>
       <p:sp>
         <p:nvSpPr>
-          <p:cNvPr id="1249998501" name="Slide Image Placeholder 1"/>
+          <p:cNvPr id="2007319037" name="Slide Image Placeholder 1"/>
           <p:cNvSpPr>
             <a:spLocks noChangeAspect="1" noGrp="1" noRot="1"/>
           </p:cNvSpPr>
@@ -720,7 +720,7 @@
       </p:sp>
       <p:sp>
         <p:nvSpPr>
-          <p:cNvPr id="903716592" name="Notes Placeholder 2"/>
+          <p:cNvPr id="1019216178" name="Notes Placeholder 2"/>
           <p:cNvSpPr>
             <a:spLocks noGrp="1"/>
           </p:cNvSpPr>
@@ -742,7 +742,7 @@
       </p:sp>
       <p:sp>
         <p:nvSpPr>
-          <p:cNvPr id="157050398" name="Slide Number Placeholder 3"/>
+          <p:cNvPr id="1432829086" name="Slide Number Placeholder 3"/>
           <p:cNvSpPr>
             <a:spLocks noGrp="1"/>
           </p:cNvSpPr>
@@ -793,7 +793,7 @@
       </p:grpSpPr>
       <p:sp>
         <p:nvSpPr>
-          <p:cNvPr id="451148523" name="Slide Image Placeholder 1"/>
+          <p:cNvPr id="1527010174" name="Slide Image Placeholder 1"/>
           <p:cNvSpPr>
             <a:spLocks noChangeAspect="1" noGrp="1" noRot="1"/>
           </p:cNvSpPr>
@@ -805,7 +805,7 @@
       </p:sp>
       <p:sp>
         <p:nvSpPr>
-          <p:cNvPr id="69493313" name="Notes Placeholder 2"/>
+          <p:cNvPr id="1074528870" name="Notes Placeholder 2"/>
           <p:cNvSpPr>
             <a:spLocks noGrp="1"/>
           </p:cNvSpPr>
@@ -827,7 +827,7 @@
       </p:sp>
       <p:sp>
         <p:nvSpPr>
-          <p:cNvPr id="451758105" name="Slide Number Placeholder 3"/>
+          <p:cNvPr id="1823016142" name="Slide Number Placeholder 3"/>
           <p:cNvSpPr>
             <a:spLocks noGrp="1"/>
           </p:cNvSpPr>
@@ -878,7 +878,7 @@
       </p:grpSpPr>
       <p:sp>
         <p:nvSpPr>
-          <p:cNvPr id="1079805678" name="Slide Image Placeholder 1"/>
+          <p:cNvPr id="1928051901" name="Slide Image Placeholder 1"/>
           <p:cNvSpPr>
             <a:spLocks noChangeAspect="1" noGrp="1" noRot="1"/>
           </p:cNvSpPr>
@@ -890,7 +890,7 @@
       </p:sp>
       <p:sp>
         <p:nvSpPr>
-          <p:cNvPr id="344749749" name="Notes Placeholder 2"/>
+          <p:cNvPr id="1854810482" name="Notes Placeholder 2"/>
           <p:cNvSpPr>
             <a:spLocks noGrp="1"/>
           </p:cNvSpPr>
@@ -912,7 +912,7 @@
       </p:sp>
       <p:sp>
         <p:nvSpPr>
-          <p:cNvPr id="1697768686" name="Slide Number Placeholder 3"/>
+          <p:cNvPr id="1774813182" name="Slide Number Placeholder 3"/>
           <p:cNvSpPr>
             <a:spLocks noGrp="1"/>
           </p:cNvSpPr>
@@ -963,7 +963,7 @@
       </p:grpSpPr>
       <p:sp>
         <p:nvSpPr>
-          <p:cNvPr id="1380820192" name="Slide Image Placeholder 1"/>
+          <p:cNvPr id="1368255645" name="Slide Image Placeholder 1"/>
           <p:cNvSpPr>
             <a:spLocks noChangeAspect="1" noGrp="1" noRot="1"/>
           </p:cNvSpPr>
@@ -975,7 +975,7 @@
       </p:sp>
       <p:sp>
         <p:nvSpPr>
-          <p:cNvPr id="1942604599" name="Notes Placeholder 2"/>
+          <p:cNvPr id="2066397538" name="Notes Placeholder 2"/>
           <p:cNvSpPr>
             <a:spLocks noGrp="1"/>
           </p:cNvSpPr>
@@ -997,7 +997,7 @@
       </p:sp>
       <p:sp>
         <p:nvSpPr>
-          <p:cNvPr id="1693957689" name="Slide Number Placeholder 3"/>
+          <p:cNvPr id="964123621" name="Slide Number Placeholder 3"/>
           <p:cNvSpPr>
             <a:spLocks noGrp="1"/>
           </p:cNvSpPr>
@@ -1048,7 +1048,7 @@
       </p:grpSpPr>
       <p:sp>
         <p:nvSpPr>
-          <p:cNvPr id="611054497" name="Slide Image Placeholder 1"/>
+          <p:cNvPr id="1354030178" name="Slide Image Placeholder 1"/>
           <p:cNvSpPr>
             <a:spLocks noChangeAspect="1" noGrp="1" noRot="1"/>
           </p:cNvSpPr>
@@ -1060,7 +1060,7 @@
       </p:sp>
       <p:sp>
         <p:nvSpPr>
-          <p:cNvPr id="581164057" name="Notes Placeholder 2"/>
+          <p:cNvPr id="523626013" name="Notes Placeholder 2"/>
           <p:cNvSpPr>
             <a:spLocks noGrp="1"/>
           </p:cNvSpPr>
@@ -1082,7 +1082,7 @@
       </p:sp>
       <p:sp>
         <p:nvSpPr>
-          <p:cNvPr id="1202247768" name="Slide Number Placeholder 3"/>
+          <p:cNvPr id="835117002" name="Slide Number Placeholder 3"/>
           <p:cNvSpPr>
             <a:spLocks noGrp="1"/>
           </p:cNvSpPr>
@@ -1133,7 +1133,7 @@
       </p:grpSpPr>
       <p:sp>
         <p:nvSpPr>
-          <p:cNvPr id="275533039" name="Slide Image Placeholder 1"/>
+          <p:cNvPr id="700367680" name="Slide Image Placeholder 1"/>
           <p:cNvSpPr>
             <a:spLocks noChangeAspect="1" noGrp="1" noRot="1"/>
           </p:cNvSpPr>
@@ -1145,7 +1145,7 @@
       </p:sp>
       <p:sp>
         <p:nvSpPr>
-          <p:cNvPr id="127138029" name="Notes Placeholder 2"/>
+          <p:cNvPr id="1073414701" name="Notes Placeholder 2"/>
           <p:cNvSpPr>
             <a:spLocks noGrp="1"/>
           </p:cNvSpPr>
@@ -1167,7 +1167,7 @@
       </p:sp>
       <p:sp>
         <p:nvSpPr>
-          <p:cNvPr id="1441390876" name="Slide Number Placeholder 3"/>
+          <p:cNvPr id="482636732" name="Slide Number Placeholder 3"/>
           <p:cNvSpPr>
             <a:spLocks noGrp="1"/>
           </p:cNvSpPr>
@@ -1218,7 +1218,7 @@
       </p:grpSpPr>
       <p:sp>
         <p:nvSpPr>
-          <p:cNvPr id="315404110" name="Slide Image Placeholder 1"/>
+          <p:cNvPr id="1108187708" name="Slide Image Placeholder 1"/>
           <p:cNvSpPr>
             <a:spLocks noChangeAspect="1" noGrp="1" noRot="1"/>
           </p:cNvSpPr>
@@ -1230,7 +1230,7 @@
       </p:sp>
       <p:sp>
         <p:nvSpPr>
-          <p:cNvPr id="686736717" name="Notes Placeholder 2"/>
+          <p:cNvPr id="1840440046" name="Notes Placeholder 2"/>
           <p:cNvSpPr>
             <a:spLocks noGrp="1"/>
           </p:cNvSpPr>
@@ -1252,7 +1252,7 @@
       </p:sp>
       <p:sp>
         <p:nvSpPr>
-          <p:cNvPr id="1915283589" name="Slide Number Placeholder 3"/>
+          <p:cNvPr id="390629624" name="Slide Number Placeholder 3"/>
           <p:cNvSpPr>
             <a:spLocks noGrp="1"/>
           </p:cNvSpPr>
@@ -1303,7 +1303,7 @@
       </p:grpSpPr>
       <p:sp>
         <p:nvSpPr>
-          <p:cNvPr id="373018027" name="Slide Image Placeholder 1"/>
+          <p:cNvPr id="1251358101" name="Slide Image Placeholder 1"/>
           <p:cNvSpPr>
             <a:spLocks noChangeAspect="1" noGrp="1" noRot="1"/>
           </p:cNvSpPr>
@@ -1315,7 +1315,7 @@
       </p:sp>
       <p:sp>
         <p:nvSpPr>
-          <p:cNvPr id="352786472" name="Notes Placeholder 2"/>
+          <p:cNvPr id="1761548745" name="Notes Placeholder 2"/>
           <p:cNvSpPr>
             <a:spLocks noGrp="1"/>
           </p:cNvSpPr>
@@ -1337,7 +1337,7 @@
       </p:sp>
       <p:sp>
         <p:nvSpPr>
-          <p:cNvPr id="1232097058" name="Slide Number Placeholder 3"/>
+          <p:cNvPr id="632449751" name="Slide Number Placeholder 3"/>
           <p:cNvSpPr>
             <a:spLocks noGrp="1"/>
           </p:cNvSpPr>
@@ -1388,7 +1388,7 @@
       </p:grpSpPr>
       <p:sp>
         <p:nvSpPr>
-          <p:cNvPr id="40508627" name="Slide Image Placeholder 1"/>
+          <p:cNvPr id="502903208" name="Slide Image Placeholder 1"/>
           <p:cNvSpPr>
             <a:spLocks noChangeAspect="1" noGrp="1" noRot="1"/>
           </p:cNvSpPr>
@@ -1400,7 +1400,7 @@
       </p:sp>
       <p:sp>
         <p:nvSpPr>
-          <p:cNvPr id="1539930360" name="Notes Placeholder 2"/>
+          <p:cNvPr id="1228858584" name="Notes Placeholder 2"/>
           <p:cNvSpPr>
             <a:spLocks noGrp="1"/>
           </p:cNvSpPr>
@@ -1422,7 +1422,7 @@
       </p:sp>
       <p:sp>
         <p:nvSpPr>
-          <p:cNvPr id="171536102" name="Slide Number Placeholder 3"/>
+          <p:cNvPr id="682396296" name="Slide Number Placeholder 3"/>
           <p:cNvSpPr>
             <a:spLocks noGrp="1"/>
           </p:cNvSpPr>
@@ -1473,7 +1473,7 @@
       </p:grpSpPr>
       <p:sp>
         <p:nvSpPr>
-          <p:cNvPr id="330152906" name="Slide Image Placeholder 1"/>
+          <p:cNvPr id="362545275" name="Slide Image Placeholder 1"/>
           <p:cNvSpPr>
             <a:spLocks noChangeAspect="1" noGrp="1" noRot="1"/>
           </p:cNvSpPr>
@@ -1485,7 +1485,7 @@
       </p:sp>
       <p:sp>
         <p:nvSpPr>
-          <p:cNvPr id="938633596" name="Notes Placeholder 2"/>
+          <p:cNvPr id="413829793" name="Notes Placeholder 2"/>
           <p:cNvSpPr>
             <a:spLocks noGrp="1"/>
           </p:cNvSpPr>
@@ -1507,7 +1507,7 @@
       </p:sp>
       <p:sp>
         <p:nvSpPr>
-          <p:cNvPr id="1364965392" name="Slide Number Placeholder 3"/>
+          <p:cNvPr id="2083457807" name="Slide Number Placeholder 3"/>
           <p:cNvSpPr>
             <a:spLocks noGrp="1"/>
           </p:cNvSpPr>
@@ -1558,7 +1558,7 @@
       </p:grpSpPr>
       <p:sp>
         <p:nvSpPr>
-          <p:cNvPr id="1142717333" name="Slide Image Placeholder 1"/>
+          <p:cNvPr id="1595805299" name="Slide Image Placeholder 1"/>
           <p:cNvSpPr>
             <a:spLocks noChangeAspect="1" noGrp="1" noRot="1"/>
           </p:cNvSpPr>
@@ -1570,7 +1570,7 @@
       </p:sp>
       <p:sp>
         <p:nvSpPr>
-          <p:cNvPr id="1394996200" name="Notes Placeholder 2"/>
+          <p:cNvPr id="1777477327" name="Notes Placeholder 2"/>
           <p:cNvSpPr>
             <a:spLocks noGrp="1"/>
           </p:cNvSpPr>
@@ -1592,7 +1592,7 @@
       </p:sp>
       <p:sp>
         <p:nvSpPr>
-          <p:cNvPr id="1539916380" name="Slide Number Placeholder 3"/>
+          <p:cNvPr id="937172823" name="Slide Number Placeholder 3"/>
           <p:cNvSpPr>
             <a:spLocks noGrp="1"/>
           </p:cNvSpPr>
@@ -1643,7 +1643,7 @@
       </p:grpSpPr>
       <p:sp>
         <p:nvSpPr>
-          <p:cNvPr id="2025343503" name="Slide Image Placeholder 1"/>
+          <p:cNvPr id="54403413" name="Slide Image Placeholder 1"/>
           <p:cNvSpPr>
             <a:spLocks noChangeAspect="1" noGrp="1" noRot="1"/>
           </p:cNvSpPr>
@@ -1655,7 +1655,7 @@
       </p:sp>
       <p:sp>
         <p:nvSpPr>
-          <p:cNvPr id="1272939152" name="Notes Placeholder 2"/>
+          <p:cNvPr id="424308723" name="Notes Placeholder 2"/>
           <p:cNvSpPr>
             <a:spLocks noGrp="1"/>
           </p:cNvSpPr>
@@ -1677,7 +1677,7 @@
       </p:sp>
       <p:sp>
         <p:nvSpPr>
-          <p:cNvPr id="483958534" name="Slide Number Placeholder 3"/>
+          <p:cNvPr id="1967267635" name="Slide Number Placeholder 3"/>
           <p:cNvSpPr>
             <a:spLocks noGrp="1"/>
           </p:cNvSpPr>
@@ -1728,7 +1728,7 @@
       </p:grpSpPr>
       <p:sp>
         <p:nvSpPr>
-          <p:cNvPr id="2122075297" name="Slide Image Placeholder 1"/>
+          <p:cNvPr id="1288205320" name="Slide Image Placeholder 1"/>
           <p:cNvSpPr>
             <a:spLocks noChangeAspect="1" noGrp="1" noRot="1"/>
           </p:cNvSpPr>
@@ -1740,7 +1740,7 @@
       </p:sp>
       <p:sp>
         <p:nvSpPr>
-          <p:cNvPr id="893260755" name="Notes Placeholder 2"/>
+          <p:cNvPr id="1932362724" name="Notes Placeholder 2"/>
           <p:cNvSpPr>
             <a:spLocks noGrp="1"/>
           </p:cNvSpPr>
@@ -1802,7 +1802,7 @@
       </p:sp>
       <p:sp>
         <p:nvSpPr>
-          <p:cNvPr id="579846947" name="Slide Number Placeholder 3"/>
+          <p:cNvPr id="432381480" name="Slide Number Placeholder 3"/>
           <p:cNvSpPr>
             <a:spLocks noGrp="1"/>
           </p:cNvSpPr>
@@ -1853,7 +1853,7 @@
       </p:grpSpPr>
       <p:sp>
         <p:nvSpPr>
-          <p:cNvPr id="1853481794" name="Slide Image Placeholder 1"/>
+          <p:cNvPr id="1900562257" name="Slide Image Placeholder 1"/>
           <p:cNvSpPr>
             <a:spLocks noChangeAspect="1" noGrp="1" noRot="1"/>
           </p:cNvSpPr>
@@ -1865,7 +1865,7 @@
       </p:sp>
       <p:sp>
         <p:nvSpPr>
-          <p:cNvPr id="1343360001" name="Notes Placeholder 2"/>
+          <p:cNvPr id="1917729818" name="Notes Placeholder 2"/>
           <p:cNvSpPr>
             <a:spLocks noGrp="1"/>
           </p:cNvSpPr>
@@ -2101,11 +2101,11 @@
             </a:r>
             <a:r>
               <a:rPr sz="1400"/>
-              <a:t> works exactly the same way</a:t>
+              <a:t> works </a:t>
             </a:r>
             <a:r>
               <a:rPr lang="it-IT" sz="1400"/>
-              <a:t> as the Laboratorio Service</a:t>
+              <a:t>in a similar way to Laboratorio Service</a:t>
             </a:r>
             <a:r>
               <a:rPr sz="1400"/>
@@ -2179,7 +2179,7 @@
       </p:sp>
       <p:sp>
         <p:nvSpPr>
-          <p:cNvPr id="1602620562" name="Slide Number Placeholder 3"/>
+          <p:cNvPr id="729589978" name="Slide Number Placeholder 3"/>
           <p:cNvSpPr>
             <a:spLocks noGrp="1"/>
           </p:cNvSpPr>
@@ -2230,7 +2230,7 @@
       </p:grpSpPr>
       <p:sp>
         <p:nvSpPr>
-          <p:cNvPr id="1037500825" name="Slide Image Placeholder 1"/>
+          <p:cNvPr id="1382429202" name="Slide Image Placeholder 1"/>
           <p:cNvSpPr>
             <a:spLocks noChangeAspect="1" noGrp="1" noRot="1"/>
           </p:cNvSpPr>
@@ -2242,7 +2242,7 @@
       </p:sp>
       <p:sp>
         <p:nvSpPr>
-          <p:cNvPr id="1830375914" name="Notes Placeholder 2"/>
+          <p:cNvPr id="658866955" name="Notes Placeholder 2"/>
           <p:cNvSpPr>
             <a:spLocks noGrp="1"/>
           </p:cNvSpPr>
@@ -2484,7 +2484,7 @@
       </p:sp>
       <p:sp>
         <p:nvSpPr>
-          <p:cNvPr id="213619260" name="Slide Number Placeholder 3"/>
+          <p:cNvPr id="1917116148" name="Slide Number Placeholder 3"/>
           <p:cNvSpPr>
             <a:spLocks noGrp="1"/>
           </p:cNvSpPr>
@@ -2854,7 +2854,7 @@
       </p:grpSpPr>
       <p:sp>
         <p:nvSpPr>
-          <p:cNvPr id="492001506" name="Shape 0"/>
+          <p:cNvPr id="957745164" name="Shape 0"/>
           <p:cNvSpPr/>
           <p:nvPr/>
         </p:nvSpPr>
@@ -2884,7 +2884,7 @@
       </p:sp>
       <p:sp>
         <p:nvSpPr>
-          <p:cNvPr id="71148955" name="Text 1"/>
+          <p:cNvPr id="1419513447" name="Text 1"/>
           <p:cNvSpPr/>
           <p:nvPr/>
         </p:nvSpPr>
@@ -2924,7 +2924,7 @@
       </p:sp>
       <p:sp>
         <p:nvSpPr>
-          <p:cNvPr id="1784113037" name="Text 2"/>
+          <p:cNvPr id="112793722" name="Text 2"/>
           <p:cNvSpPr/>
           <p:nvPr/>
         </p:nvSpPr>
@@ -2982,7 +2982,7 @@
       </p:sp>
       <p:sp>
         <p:nvSpPr>
-          <p:cNvPr id="1575819432" name="Text 3"/>
+          <p:cNvPr id="1955276649" name="Text 3"/>
           <p:cNvSpPr/>
           <p:nvPr/>
         </p:nvSpPr>
@@ -3022,7 +3022,7 @@
       </p:sp>
       <p:sp>
         <p:nvSpPr>
-          <p:cNvPr id="1246749169" name="Text 4"/>
+          <p:cNvPr id="1337536795" name="Text 4"/>
           <p:cNvSpPr/>
           <p:nvPr/>
         </p:nvSpPr>
@@ -3102,7 +3102,7 @@
       </p:grpSpPr>
       <p:sp>
         <p:nvSpPr>
-          <p:cNvPr id="278927272" name="Text 0"/>
+          <p:cNvPr id="131847374" name="Text 0"/>
           <p:cNvSpPr/>
           <p:nvPr/>
         </p:nvSpPr>
@@ -3142,7 +3142,7 @@
       </p:sp>
       <p:sp>
         <p:nvSpPr>
-          <p:cNvPr id="1053630615" name="Shape 1"/>
+          <p:cNvPr id="2137556125" name="Shape 1"/>
           <p:cNvSpPr/>
           <p:nvPr/>
         </p:nvSpPr>
@@ -3172,7 +3172,7 @@
       </p:sp>
       <p:sp>
         <p:nvSpPr>
-          <p:cNvPr id="93106968" name="Shape 2"/>
+          <p:cNvPr id="680087060" name="Shape 2"/>
           <p:cNvSpPr/>
           <p:nvPr/>
         </p:nvSpPr>
@@ -3207,7 +3207,7 @@
       </p:sp>
       <p:sp>
         <p:nvSpPr>
-          <p:cNvPr id="1679145593" name="Text 3"/>
+          <p:cNvPr id="1191118332" name="Text 3"/>
           <p:cNvSpPr/>
           <p:nvPr/>
         </p:nvSpPr>
@@ -3247,7 +3247,7 @@
       </p:sp>
       <p:sp>
         <p:nvSpPr>
-          <p:cNvPr id="1444576854" name="Text 4"/>
+          <p:cNvPr id="1325316868" name="Text 4"/>
           <p:cNvSpPr/>
           <p:nvPr/>
         </p:nvSpPr>
@@ -3287,7 +3287,7 @@
       </p:sp>
       <p:sp>
         <p:nvSpPr>
-          <p:cNvPr id="1093471643" name="Text 5"/>
+          <p:cNvPr id="1670157430" name="Text 5"/>
           <p:cNvSpPr/>
           <p:nvPr/>
         </p:nvSpPr>
@@ -3492,7 +3492,7 @@
       </p:sp>
       <p:sp>
         <p:nvSpPr>
-          <p:cNvPr id="2105237510" name="Text 6"/>
+          <p:cNvPr id="718084211" name="Text 6"/>
           <p:cNvSpPr/>
           <p:nvPr/>
         </p:nvSpPr>
@@ -3532,7 +3532,7 @@
       </p:sp>
       <p:sp>
         <p:nvSpPr>
-          <p:cNvPr id="122594552" name="Text 7"/>
+          <p:cNvPr id="886733041" name="Text 7"/>
           <p:cNvSpPr/>
           <p:nvPr/>
         </p:nvSpPr>
@@ -3627,7 +3627,7 @@
       </p:sp>
       <p:sp>
         <p:nvSpPr>
-          <p:cNvPr id="3092876" name="Text 8"/>
+          <p:cNvPr id="1594125820" name="Text 8"/>
           <p:cNvSpPr/>
           <p:nvPr/>
         </p:nvSpPr>
@@ -3667,7 +3667,7 @@
       </p:sp>
       <p:sp>
         <p:nvSpPr>
-          <p:cNvPr id="1745477001" name="Text 9"/>
+          <p:cNvPr id="761286737" name="Text 9"/>
           <p:cNvSpPr/>
           <p:nvPr/>
         </p:nvSpPr>
@@ -3740,7 +3740,7 @@
       </p:sp>
       <p:sp>
         <p:nvSpPr>
-          <p:cNvPr id="943954462" name="Text 10"/>
+          <p:cNvPr id="1903468509" name="Text 10"/>
           <p:cNvSpPr/>
           <p:nvPr/>
         </p:nvSpPr>
@@ -3780,7 +3780,7 @@
       </p:sp>
       <p:sp>
         <p:nvSpPr>
-          <p:cNvPr id="73571647" name="Text 11"/>
+          <p:cNvPr id="115460444" name="Text 11"/>
           <p:cNvSpPr/>
           <p:nvPr/>
         </p:nvSpPr>
@@ -3930,7 +3930,7 @@
       </p:sp>
       <p:sp>
         <p:nvSpPr>
-          <p:cNvPr id="660818060" name="Text 12"/>
+          <p:cNvPr id="147024531" name="Text 12"/>
           <p:cNvSpPr/>
           <p:nvPr/>
         </p:nvSpPr>
@@ -3992,7 +3992,7 @@
       </p:sp>
       <p:sp>
         <p:nvSpPr>
-          <p:cNvPr id="392295263" name="Text 13"/>
+          <p:cNvPr id="1664330928" name="Text 13"/>
           <p:cNvSpPr/>
           <p:nvPr/>
         </p:nvSpPr>
@@ -4172,7 +4172,7 @@
       </p:sp>
       <p:sp>
         <p:nvSpPr>
-          <p:cNvPr id="1346706004" name="Text 14"/>
+          <p:cNvPr id="1992890284" name="Text 14"/>
           <p:cNvSpPr/>
           <p:nvPr/>
         </p:nvSpPr>
@@ -4212,7 +4212,7 @@
       </p:sp>
       <p:sp>
         <p:nvSpPr>
-          <p:cNvPr id="1651755503" name="Text 15"/>
+          <p:cNvPr id="2109959783" name="Text 15"/>
           <p:cNvSpPr/>
           <p:nvPr/>
         </p:nvSpPr>
@@ -4340,7 +4340,7 @@
       </p:sp>
       <p:sp>
         <p:nvSpPr>
-          <p:cNvPr id="1355242964" name="Text 16"/>
+          <p:cNvPr id="1701322343" name="Text 16"/>
           <p:cNvSpPr/>
           <p:nvPr/>
         </p:nvSpPr>
@@ -4402,7 +4402,7 @@
       </p:sp>
       <p:sp>
         <p:nvSpPr>
-          <p:cNvPr id="1422741477" name="Text 17"/>
+          <p:cNvPr id="1128807738" name="Text 17"/>
           <p:cNvSpPr/>
           <p:nvPr/>
         </p:nvSpPr>
@@ -4596,7 +4596,7 @@
       </p:sp>
       <p:sp>
         <p:nvSpPr>
-          <p:cNvPr id="1245351748" name="Shape 18"/>
+          <p:cNvPr id="1159709559" name="Shape 18"/>
           <p:cNvSpPr/>
           <p:nvPr/>
         </p:nvSpPr>
@@ -4631,7 +4631,7 @@
       </p:sp>
       <p:sp>
         <p:nvSpPr>
-          <p:cNvPr id="822465975" name="Text 19"/>
+          <p:cNvPr id="526301823" name="Text 19"/>
           <p:cNvSpPr/>
           <p:nvPr/>
         </p:nvSpPr>
@@ -4671,7 +4671,7 @@
       </p:sp>
       <p:sp>
         <p:nvSpPr>
-          <p:cNvPr id="208934186" name="Text 20"/>
+          <p:cNvPr id="439593587" name="Text 20"/>
           <p:cNvSpPr/>
           <p:nvPr/>
         </p:nvSpPr>
@@ -4733,7 +4733,7 @@
       </p:sp>
       <p:sp>
         <p:nvSpPr>
-          <p:cNvPr id="1346707400" name="Text 21"/>
+          <p:cNvPr id="1538956681" name="Text 21"/>
           <p:cNvSpPr/>
           <p:nvPr/>
         </p:nvSpPr>
@@ -4839,7 +4839,7 @@
       </p:sp>
       <p:sp>
         <p:nvSpPr>
-          <p:cNvPr id="311330918" name="Text 22"/>
+          <p:cNvPr id="298263151" name="Text 22"/>
           <p:cNvSpPr/>
           <p:nvPr/>
         </p:nvSpPr>
@@ -4901,7 +4901,7 @@
       </p:sp>
       <p:sp>
         <p:nvSpPr>
-          <p:cNvPr id="214026803" name="Text 23"/>
+          <p:cNvPr id="348936049" name="Text 23"/>
           <p:cNvSpPr/>
           <p:nvPr/>
         </p:nvSpPr>
@@ -5073,7 +5073,7 @@
       </p:sp>
       <p:sp>
         <p:nvSpPr>
-          <p:cNvPr id="2046467529" name="Text 24"/>
+          <p:cNvPr id="1889142803" name="Text 24"/>
           <p:cNvSpPr/>
           <p:nvPr/>
         </p:nvSpPr>
@@ -5135,7 +5135,7 @@
       </p:sp>
       <p:sp>
         <p:nvSpPr>
-          <p:cNvPr id="569182435" name="Text 25"/>
+          <p:cNvPr id="1627524843" name="Text 25"/>
           <p:cNvSpPr/>
           <p:nvPr/>
         </p:nvSpPr>
@@ -5300,7 +5300,7 @@
       </p:sp>
       <p:sp>
         <p:nvSpPr>
-          <p:cNvPr id="2061953715" name="Text 26"/>
+          <p:cNvPr id="1634535085" name="Text 26"/>
           <p:cNvSpPr/>
           <p:nvPr/>
         </p:nvSpPr>
@@ -5362,7 +5362,7 @@
       </p:sp>
       <p:sp>
         <p:nvSpPr>
-          <p:cNvPr id="2112306945" name="Text 27"/>
+          <p:cNvPr id="1930249170" name="Text 27"/>
           <p:cNvSpPr/>
           <p:nvPr/>
         </p:nvSpPr>
@@ -5724,7 +5724,7 @@
       </p:grpSpPr>
       <p:sp>
         <p:nvSpPr>
-          <p:cNvPr id="576005669" name="Text 0"/>
+          <p:cNvPr id="2055051946" name="Text 0"/>
           <p:cNvSpPr/>
           <p:nvPr/>
         </p:nvSpPr>
@@ -5786,7 +5786,7 @@
       </p:sp>
       <p:sp>
         <p:nvSpPr>
-          <p:cNvPr id="2081088791" name="Text 1"/>
+          <p:cNvPr id="2003933322" name="Text 1"/>
           <p:cNvSpPr/>
           <p:nvPr/>
         </p:nvSpPr>
@@ -5815,7 +5815,7 @@
       </p:sp>
       <p:sp>
         <p:nvSpPr>
-          <p:cNvPr id="1638746806" name="Text 2"/>
+          <p:cNvPr id="235280107" name="Text 2"/>
           <p:cNvSpPr/>
           <p:nvPr/>
         </p:nvSpPr>
@@ -5844,7 +5844,7 @@
       </p:sp>
       <p:sp>
         <p:nvSpPr>
-          <p:cNvPr id="1843853955" name="Text 1"/>
+          <p:cNvPr id="14985771" name="Text 1"/>
           <p:cNvSpPr/>
           <p:nvPr/>
         </p:nvSpPr>
@@ -5924,7 +5924,7 @@
       </p:grpSpPr>
       <p:sp>
         <p:nvSpPr>
-          <p:cNvPr id="1112175942" name="Text 0"/>
+          <p:cNvPr id="1952025056" name="Text 0"/>
           <p:cNvSpPr/>
           <p:nvPr/>
         </p:nvSpPr>
@@ -5964,7 +5964,7 @@
       </p:sp>
       <p:sp>
         <p:nvSpPr>
-          <p:cNvPr id="1798459174" name="Shape 1"/>
+          <p:cNvPr id="1021384031" name="Shape 1"/>
           <p:cNvSpPr/>
           <p:nvPr/>
         </p:nvSpPr>
@@ -5994,7 +5994,7 @@
       </p:sp>
       <p:sp>
         <p:nvSpPr>
-          <p:cNvPr id="1319262052" name="Shape 2"/>
+          <p:cNvPr id="691337330" name="Shape 2"/>
           <p:cNvSpPr/>
           <p:nvPr/>
         </p:nvSpPr>
@@ -6029,7 +6029,7 @@
       </p:sp>
       <p:sp>
         <p:nvSpPr>
-          <p:cNvPr id="1218550469" name="Text 3"/>
+          <p:cNvPr id="1920729173" name="Text 3"/>
           <p:cNvSpPr/>
           <p:nvPr/>
         </p:nvSpPr>
@@ -6069,7 +6069,7 @@
       </p:sp>
       <p:sp>
         <p:nvSpPr>
-          <p:cNvPr id="1268273366" name="Shape 4"/>
+          <p:cNvPr id="1253027048" name="Shape 4"/>
           <p:cNvSpPr/>
           <p:nvPr/>
         </p:nvSpPr>
@@ -6104,7 +6104,7 @@
       </p:sp>
       <p:sp>
         <p:nvSpPr>
-          <p:cNvPr id="1196382805" name="Text 5"/>
+          <p:cNvPr id="473526277" name="Text 5"/>
           <p:cNvSpPr/>
           <p:nvPr/>
         </p:nvSpPr>
@@ -6144,7 +6144,7 @@
       </p:sp>
       <p:sp>
         <p:nvSpPr>
-          <p:cNvPr id="1661001019" name="Shape 6"/>
+          <p:cNvPr id="75932926" name="Shape 6"/>
           <p:cNvSpPr/>
           <p:nvPr/>
         </p:nvSpPr>
@@ -6179,7 +6179,7 @@
       </p:sp>
       <p:sp>
         <p:nvSpPr>
-          <p:cNvPr id="1341706491" name="Text 7"/>
+          <p:cNvPr id="1810921141" name="Text 7"/>
           <p:cNvSpPr/>
           <p:nvPr/>
         </p:nvSpPr>
@@ -6219,7 +6219,7 @@
       </p:sp>
       <p:sp>
         <p:nvSpPr>
-          <p:cNvPr id="1898871514" name="Shape 8"/>
+          <p:cNvPr id="1486102034" name="Shape 8"/>
           <p:cNvSpPr/>
           <p:nvPr/>
         </p:nvSpPr>
@@ -6254,7 +6254,7 @@
       </p:sp>
       <p:sp>
         <p:nvSpPr>
-          <p:cNvPr id="219597653" name="Text 9"/>
+          <p:cNvPr id="272161934" name="Text 9"/>
           <p:cNvSpPr/>
           <p:nvPr/>
         </p:nvSpPr>
@@ -6294,7 +6294,7 @@
       </p:sp>
       <p:sp>
         <p:nvSpPr>
-          <p:cNvPr id="1723815750" name="Shape 10"/>
+          <p:cNvPr id="522801725" name="Shape 10"/>
           <p:cNvSpPr/>
           <p:nvPr/>
         </p:nvSpPr>
@@ -6329,7 +6329,7 @@
       </p:sp>
       <p:sp>
         <p:nvSpPr>
-          <p:cNvPr id="204816083" name="Text 11"/>
+          <p:cNvPr id="1903523318" name="Text 11"/>
           <p:cNvSpPr/>
           <p:nvPr/>
         </p:nvSpPr>
@@ -6369,7 +6369,7 @@
       </p:sp>
       <p:sp>
         <p:nvSpPr>
-          <p:cNvPr id="658631555" name="Shape 12"/>
+          <p:cNvPr id="1314626706" name="Shape 12"/>
           <p:cNvSpPr/>
           <p:nvPr/>
         </p:nvSpPr>
@@ -6404,7 +6404,7 @@
       </p:sp>
       <p:sp>
         <p:nvSpPr>
-          <p:cNvPr id="1474363514" name="Text 13"/>
+          <p:cNvPr id="2077297217" name="Text 13"/>
           <p:cNvSpPr/>
           <p:nvPr/>
         </p:nvSpPr>
@@ -6462,7 +6462,7 @@
       </p:sp>
       <p:sp>
         <p:nvSpPr>
-          <p:cNvPr id="832125226" name="Shape 14"/>
+          <p:cNvPr id="789014618" name="Shape 14"/>
           <p:cNvSpPr/>
           <p:nvPr/>
         </p:nvSpPr>
@@ -6497,7 +6497,7 @@
       </p:sp>
       <p:sp>
         <p:nvSpPr>
-          <p:cNvPr id="2111693043" name="Text 15"/>
+          <p:cNvPr id="832696397" name="Text 15"/>
           <p:cNvSpPr/>
           <p:nvPr/>
         </p:nvSpPr>
@@ -6555,7 +6555,7 @@
       </p:sp>
       <p:sp>
         <p:nvSpPr>
-          <p:cNvPr id="925834947" name="Shape 16"/>
+          <p:cNvPr id="348355898" name="Shape 16"/>
           <p:cNvSpPr/>
           <p:nvPr/>
         </p:nvSpPr>
@@ -6590,7 +6590,7 @@
       </p:sp>
       <p:sp>
         <p:nvSpPr>
-          <p:cNvPr id="2013906049" name="Text 17"/>
+          <p:cNvPr id="1064252173" name="Text 17"/>
           <p:cNvSpPr/>
           <p:nvPr/>
         </p:nvSpPr>
@@ -6648,7 +6648,7 @@
       </p:sp>
       <p:sp>
         <p:nvSpPr>
-          <p:cNvPr id="410651869" name="Shape 18"/>
+          <p:cNvPr id="314756233" name="Shape 18"/>
           <p:cNvSpPr/>
           <p:nvPr/>
         </p:nvSpPr>
@@ -6683,7 +6683,7 @@
       </p:sp>
       <p:sp>
         <p:nvSpPr>
-          <p:cNvPr id="1894977388" name="Text 19"/>
+          <p:cNvPr id="233481160" name="Text 19"/>
           <p:cNvSpPr/>
           <p:nvPr/>
         </p:nvSpPr>
@@ -6723,7 +6723,7 @@
       </p:sp>
       <p:sp>
         <p:nvSpPr>
-          <p:cNvPr id="524374096" name="Shape 20"/>
+          <p:cNvPr id="2118415004" name="Shape 20"/>
           <p:cNvSpPr/>
           <p:nvPr/>
         </p:nvSpPr>
@@ -6758,7 +6758,7 @@
       </p:sp>
       <p:sp>
         <p:nvSpPr>
-          <p:cNvPr id="57667107" name="Text 21"/>
+          <p:cNvPr id="421333666" name="Text 21"/>
           <p:cNvSpPr/>
           <p:nvPr/>
         </p:nvSpPr>
@@ -6816,7 +6816,7 @@
       </p:sp>
       <p:sp>
         <p:nvSpPr>
-          <p:cNvPr id="1072652990" name="Shape 22"/>
+          <p:cNvPr id="567553336" name="Shape 22"/>
           <p:cNvSpPr/>
           <p:nvPr/>
         </p:nvSpPr>
@@ -6851,7 +6851,7 @@
       </p:sp>
       <p:sp>
         <p:nvSpPr>
-          <p:cNvPr id="2122991507" name="Text 23"/>
+          <p:cNvPr id="1286713247" name="Text 23"/>
           <p:cNvSpPr/>
           <p:nvPr/>
         </p:nvSpPr>
@@ -6909,7 +6909,7 @@
       </p:sp>
       <p:sp>
         <p:nvSpPr>
-          <p:cNvPr id="141888254" name="Shape 24"/>
+          <p:cNvPr id="249215135" name="Shape 24"/>
           <p:cNvSpPr/>
           <p:nvPr/>
         </p:nvSpPr>
@@ -6944,7 +6944,7 @@
       </p:sp>
       <p:sp>
         <p:nvSpPr>
-          <p:cNvPr id="1068288281" name="Text 25"/>
+          <p:cNvPr id="1480215555" name="Text 25"/>
           <p:cNvSpPr/>
           <p:nvPr/>
         </p:nvSpPr>
@@ -7002,7 +7002,7 @@
       </p:sp>
       <p:sp>
         <p:nvSpPr>
-          <p:cNvPr id="1890285658" name="Shape 26"/>
+          <p:cNvPr id="2022485336" name="Shape 26"/>
           <p:cNvSpPr/>
           <p:nvPr/>
         </p:nvSpPr>
@@ -7037,7 +7037,7 @@
       </p:sp>
       <p:sp>
         <p:nvSpPr>
-          <p:cNvPr id="1989226932" name="Text 27"/>
+          <p:cNvPr id="1848937077" name="Text 27"/>
           <p:cNvSpPr/>
           <p:nvPr/>
         </p:nvSpPr>
@@ -7077,7 +7077,7 @@
       </p:sp>
       <p:sp>
         <p:nvSpPr>
-          <p:cNvPr id="296217693" name="Shape 28"/>
+          <p:cNvPr id="1846376369" name="Shape 28"/>
           <p:cNvSpPr/>
           <p:nvPr/>
         </p:nvSpPr>
@@ -7112,7 +7112,7 @@
       </p:sp>
       <p:sp>
         <p:nvSpPr>
-          <p:cNvPr id="1720496298" name="Text 29"/>
+          <p:cNvPr id="1311274543" name="Text 29"/>
           <p:cNvSpPr/>
           <p:nvPr/>
         </p:nvSpPr>
@@ -7170,7 +7170,7 @@
       </p:sp>
       <p:sp>
         <p:nvSpPr>
-          <p:cNvPr id="1575242563" name="Shape 30"/>
+          <p:cNvPr id="61876493" name="Shape 30"/>
           <p:cNvSpPr/>
           <p:nvPr/>
         </p:nvSpPr>
@@ -7205,7 +7205,7 @@
       </p:sp>
       <p:sp>
         <p:nvSpPr>
-          <p:cNvPr id="595066852" name="Text 31"/>
+          <p:cNvPr id="883421092" name="Text 31"/>
           <p:cNvSpPr/>
           <p:nvPr/>
         </p:nvSpPr>
@@ -7263,7 +7263,7 @@
       </p:sp>
       <p:sp>
         <p:nvSpPr>
-          <p:cNvPr id="2031371518" name="Shape 32"/>
+          <p:cNvPr id="1549276971" name="Shape 32"/>
           <p:cNvSpPr/>
           <p:nvPr/>
         </p:nvSpPr>
@@ -7298,7 +7298,7 @@
       </p:sp>
       <p:sp>
         <p:nvSpPr>
-          <p:cNvPr id="2081259456" name="Text 33"/>
+          <p:cNvPr id="685513421" name="Text 33"/>
           <p:cNvSpPr/>
           <p:nvPr/>
         </p:nvSpPr>
@@ -7356,7 +7356,7 @@
       </p:sp>
       <p:sp>
         <p:nvSpPr>
-          <p:cNvPr id="1170374085" name="Shape 34"/>
+          <p:cNvPr id="607899001" name="Shape 34"/>
           <p:cNvSpPr/>
           <p:nvPr/>
         </p:nvSpPr>
@@ -7391,7 +7391,7 @@
       </p:sp>
       <p:sp>
         <p:nvSpPr>
-          <p:cNvPr id="257981033" name="Text 35"/>
+          <p:cNvPr id="1661318975" name="Text 35"/>
           <p:cNvSpPr/>
           <p:nvPr/>
         </p:nvSpPr>
@@ -7431,7 +7431,7 @@
       </p:sp>
       <p:sp>
         <p:nvSpPr>
-          <p:cNvPr id="442488177" name="Shape 36"/>
+          <p:cNvPr id="248161501" name="Shape 36"/>
           <p:cNvSpPr/>
           <p:nvPr/>
         </p:nvSpPr>
@@ -7466,7 +7466,7 @@
       </p:sp>
       <p:sp>
         <p:nvSpPr>
-          <p:cNvPr id="516981697" name="Text 37"/>
+          <p:cNvPr id="1266584464" name="Text 37"/>
           <p:cNvSpPr/>
           <p:nvPr/>
         </p:nvSpPr>
@@ -7524,7 +7524,7 @@
       </p:sp>
       <p:sp>
         <p:nvSpPr>
-          <p:cNvPr id="1518044408" name="Shape 38"/>
+          <p:cNvPr id="1492377677" name="Shape 38"/>
           <p:cNvSpPr/>
           <p:nvPr/>
         </p:nvSpPr>
@@ -7559,7 +7559,7 @@
       </p:sp>
       <p:sp>
         <p:nvSpPr>
-          <p:cNvPr id="582299284" name="Text 39"/>
+          <p:cNvPr id="1560376079" name="Text 39"/>
           <p:cNvSpPr/>
           <p:nvPr/>
         </p:nvSpPr>
@@ -7617,7 +7617,7 @@
       </p:sp>
       <p:sp>
         <p:nvSpPr>
-          <p:cNvPr id="667300535" name="Shape 40"/>
+          <p:cNvPr id="1626812102" name="Shape 40"/>
           <p:cNvSpPr/>
           <p:nvPr/>
         </p:nvSpPr>
@@ -7652,7 +7652,7 @@
       </p:sp>
       <p:sp>
         <p:nvSpPr>
-          <p:cNvPr id="1276036917" name="Text 41"/>
+          <p:cNvPr id="551966093" name="Text 41"/>
           <p:cNvSpPr/>
           <p:nvPr/>
         </p:nvSpPr>
@@ -7743,7 +7743,7 @@
       </p:grpSpPr>
       <p:sp>
         <p:nvSpPr>
-          <p:cNvPr id="1063057536" name="Title"/>
+          <p:cNvPr id="1724422908" name="Title"/>
           <p:cNvSpPr/>
           <p:nvPr/>
         </p:nvSpPr>
@@ -7783,7 +7783,7 @@
       </p:sp>
       <p:sp>
         <p:nvSpPr>
-          <p:cNvPr id="1453032393" name="ScenCard"/>
+          <p:cNvPr id="204397218" name="ScenCard"/>
           <p:cNvSpPr/>
           <p:nvPr/>
         </p:nvSpPr>
@@ -7875,7 +7875,7 @@
       </p:sp>
       <p:sp>
         <p:nvSpPr>
-          <p:cNvPr id="2073971474" name="Bar201"/>
+          <p:cNvPr id="1027789461" name="Bar201"/>
           <p:cNvSpPr/>
           <p:nvPr/>
         </p:nvSpPr>
@@ -7905,7 +7905,7 @@
       </p:sp>
       <p:sp>
         <p:nvSpPr>
-          <p:cNvPr id="619381537" name="Badge210"/>
+          <p:cNvPr id="1974855329" name="Badge210"/>
           <p:cNvSpPr/>
           <p:nvPr/>
         </p:nvSpPr>
@@ -7947,7 +7947,7 @@
       </p:sp>
       <p:sp>
         <p:nvSpPr>
-          <p:cNvPr id="1913585551" name="Badge211"/>
+          <p:cNvPr id="178468896" name="Badge211"/>
           <p:cNvSpPr/>
           <p:nvPr/>
         </p:nvSpPr>
@@ -7989,7 +7989,7 @@
       </p:sp>
       <p:sp>
         <p:nvSpPr>
-          <p:cNvPr id="1819318748" name="Badge212"/>
+          <p:cNvPr id="1834907050" name="Badge212"/>
           <p:cNvSpPr/>
           <p:nvPr/>
         </p:nvSpPr>
@@ -8031,7 +8031,7 @@
       </p:sp>
       <p:sp>
         <p:nvSpPr>
-          <p:cNvPr id="1276114264" name="RepLbl"/>
+          <p:cNvPr id="415075463" name="RepLbl"/>
           <p:cNvSpPr/>
           <p:nvPr/>
         </p:nvSpPr>
@@ -8075,7 +8075,7 @@
       </p:sp>
       <p:sp>
         <p:nvSpPr>
-          <p:cNvPr id="779360615" name="Bar300"/>
+          <p:cNvPr id="425028407" name="Bar300"/>
           <p:cNvSpPr/>
           <p:nvPr/>
         </p:nvSpPr>
@@ -8105,7 +8105,7 @@
       </p:sp>
       <p:sp>
         <p:nvSpPr>
-          <p:cNvPr id="57531394" name="Item0"/>
+          <p:cNvPr id="1830424554" name="Item0"/>
           <p:cNvSpPr/>
           <p:nvPr/>
         </p:nvSpPr>
@@ -8158,7 +8158,7 @@
       </p:sp>
       <p:sp>
         <p:nvSpPr>
-          <p:cNvPr id="818596165" name="Bar310"/>
+          <p:cNvPr id="1585409575" name="Bar310"/>
           <p:cNvSpPr/>
           <p:nvPr/>
         </p:nvSpPr>
@@ -8188,7 +8188,7 @@
       </p:sp>
       <p:sp>
         <p:nvSpPr>
-          <p:cNvPr id="1146919533" name="Item1"/>
+          <p:cNvPr id="1144026917" name="Item1"/>
           <p:cNvSpPr/>
           <p:nvPr/>
         </p:nvSpPr>
@@ -8241,7 +8241,7 @@
       </p:sp>
       <p:sp>
         <p:nvSpPr>
-          <p:cNvPr id="2056726085" name="Bar320"/>
+          <p:cNvPr id="1714208993" name="Bar320"/>
           <p:cNvSpPr/>
           <p:nvPr/>
         </p:nvSpPr>
@@ -8271,7 +8271,7 @@
       </p:sp>
       <p:sp>
         <p:nvSpPr>
-          <p:cNvPr id="2137642694" name="Item2"/>
+          <p:cNvPr id="495863985" name="Item2"/>
           <p:cNvSpPr/>
           <p:nvPr/>
         </p:nvSpPr>
@@ -8324,7 +8324,7 @@
       </p:sp>
       <p:sp>
         <p:nvSpPr>
-          <p:cNvPr id="2022535330" name="Bar330"/>
+          <p:cNvPr id="1597143911" name="Bar330"/>
           <p:cNvSpPr/>
           <p:nvPr/>
         </p:nvSpPr>
@@ -8354,7 +8354,7 @@
       </p:sp>
       <p:sp>
         <p:nvSpPr>
-          <p:cNvPr id="1749092401" name="Item3"/>
+          <p:cNvPr id="735070040" name="Item3"/>
           <p:cNvSpPr/>
           <p:nvPr/>
         </p:nvSpPr>
@@ -8407,7 +8407,7 @@
       </p:sp>
       <p:sp>
         <p:nvSpPr>
-          <p:cNvPr id="1666431322" name="Bar340"/>
+          <p:cNvPr id="939999941" name="Bar340"/>
           <p:cNvSpPr/>
           <p:nvPr/>
         </p:nvSpPr>
@@ -8437,7 +8437,7 @@
       </p:sp>
       <p:sp>
         <p:nvSpPr>
-          <p:cNvPr id="588853890" name="Item4"/>
+          <p:cNvPr id="1955951461" name="Item4"/>
           <p:cNvSpPr/>
           <p:nvPr/>
         </p:nvSpPr>
@@ -8490,7 +8490,7 @@
       </p:sp>
       <p:sp>
         <p:nvSpPr>
-          <p:cNvPr id="1400640189" name="Bar350"/>
+          <p:cNvPr id="1889586287" name="Bar350"/>
           <p:cNvSpPr/>
           <p:nvPr/>
         </p:nvSpPr>
@@ -8520,7 +8520,7 @@
       </p:sp>
       <p:sp>
         <p:nvSpPr>
-          <p:cNvPr id="1106057623" name="Item5"/>
+          <p:cNvPr id="2015654094" name="Item5"/>
           <p:cNvSpPr/>
           <p:nvPr/>
         </p:nvSpPr>
@@ -8573,7 +8573,7 @@
       </p:sp>
       <p:sp>
         <p:nvSpPr>
-          <p:cNvPr id="734939828" name="Bar360"/>
+          <p:cNvPr id="52608156" name="Bar360"/>
           <p:cNvSpPr/>
           <p:nvPr/>
         </p:nvSpPr>
@@ -8603,7 +8603,7 @@
       </p:sp>
       <p:sp>
         <p:nvSpPr>
-          <p:cNvPr id="682319963" name="Item6"/>
+          <p:cNvPr id="2136402326" name="Item6"/>
           <p:cNvSpPr/>
           <p:nvPr/>
         </p:nvSpPr>
@@ -8656,7 +8656,7 @@
       </p:sp>
       <p:sp>
         <p:nvSpPr>
-          <p:cNvPr id="562650861" name="Bar370"/>
+          <p:cNvPr id="1235032826" name="Bar370"/>
           <p:cNvSpPr/>
           <p:nvPr/>
         </p:nvSpPr>
@@ -8686,7 +8686,7 @@
       </p:sp>
       <p:sp>
         <p:nvSpPr>
-          <p:cNvPr id="1918785004" name="Item7"/>
+          <p:cNvPr id="375724230" name="Item7"/>
           <p:cNvSpPr/>
           <p:nvPr/>
         </p:nvSpPr>
@@ -8739,7 +8739,7 @@
       </p:sp>
       <p:sp>
         <p:nvSpPr>
-          <p:cNvPr id="1955037965" name="Shape 1"/>
+          <p:cNvPr id="545919216" name="Shape 1"/>
           <p:cNvSpPr/>
           <p:nvPr/>
         </p:nvSpPr>
@@ -8802,7 +8802,7 @@
       </p:grpSpPr>
       <p:sp>
         <p:nvSpPr>
-          <p:cNvPr id="1246378228" name="Title"/>
+          <p:cNvPr id="1868681599" name="Title"/>
           <p:cNvSpPr/>
           <p:nvPr/>
         </p:nvSpPr>
@@ -8842,7 +8842,7 @@
       </p:sp>
       <p:sp>
         <p:nvSpPr>
-          <p:cNvPr id="988175346" name="Intro"/>
+          <p:cNvPr id="1140428880" name="Intro"/>
           <p:cNvSpPr/>
           <p:nvPr/>
         </p:nvSpPr>
@@ -8902,7 +8902,7 @@
       </p:sp>
       <p:sp>
         <p:nvSpPr>
-          <p:cNvPr id="1287813341" name="Bar201"/>
+          <p:cNvPr id="1467143748" name="Bar201"/>
           <p:cNvSpPr/>
           <p:nvPr/>
         </p:nvSpPr>
@@ -8932,7 +8932,7 @@
       </p:sp>
       <p:sp>
         <p:nvSpPr>
-          <p:cNvPr id="1965726613" name="CPLbl"/>
+          <p:cNvPr id="95966380" name="CPLbl"/>
           <p:cNvSpPr/>
           <p:nvPr/>
         </p:nvSpPr>
@@ -8976,7 +8976,7 @@
       </p:sp>
       <p:sp>
         <p:nvSpPr>
-          <p:cNvPr id="187499558" name="Bar220"/>
+          <p:cNvPr id="1882278904" name="Bar220"/>
           <p:cNvSpPr/>
           <p:nvPr/>
         </p:nvSpPr>
@@ -9006,7 +9006,7 @@
       </p:sp>
       <p:sp>
         <p:nvSpPr>
-          <p:cNvPr id="1558253251" name="CP0"/>
+          <p:cNvPr id="2022937949" name="CP0"/>
           <p:cNvSpPr/>
           <p:nvPr/>
         </p:nvSpPr>
@@ -9077,7 +9077,7 @@
       </p:sp>
       <p:sp>
         <p:nvSpPr>
-          <p:cNvPr id="244759577" name="Bar230"/>
+          <p:cNvPr id="1990898482" name="Bar230"/>
           <p:cNvSpPr/>
           <p:nvPr/>
         </p:nvSpPr>
@@ -9107,7 +9107,7 @@
       </p:sp>
       <p:sp>
         <p:nvSpPr>
-          <p:cNvPr id="357446168" name="CP1"/>
+          <p:cNvPr id="1919480267" name="CP1"/>
           <p:cNvSpPr/>
           <p:nvPr/>
         </p:nvSpPr>
@@ -9196,7 +9196,7 @@
       </p:sp>
       <p:sp>
         <p:nvSpPr>
-          <p:cNvPr id="1566816841" name="Bar240"/>
+          <p:cNvPr id="1922477869" name="Bar240"/>
           <p:cNvSpPr/>
           <p:nvPr/>
         </p:nvSpPr>
@@ -9226,7 +9226,7 @@
       </p:sp>
       <p:sp>
         <p:nvSpPr>
-          <p:cNvPr id="60857568" name="CP2"/>
+          <p:cNvPr id="178183464" name="CP2"/>
           <p:cNvSpPr/>
           <p:nvPr/>
         </p:nvSpPr>
@@ -9297,7 +9297,7 @@
       </p:sp>
       <p:sp>
         <p:nvSpPr>
-          <p:cNvPr id="406814731" name="Bar250"/>
+          <p:cNvPr id="1703821285" name="Bar250"/>
           <p:cNvSpPr/>
           <p:nvPr/>
         </p:nvSpPr>
@@ -9327,7 +9327,7 @@
       </p:sp>
       <p:sp>
         <p:nvSpPr>
-          <p:cNvPr id="1761755411" name="CP3"/>
+          <p:cNvPr id="577284513" name="CP3"/>
           <p:cNvSpPr/>
           <p:nvPr/>
         </p:nvSpPr>
@@ -9398,7 +9398,7 @@
       </p:sp>
       <p:sp>
         <p:nvSpPr>
-          <p:cNvPr id="1926806801" name="AnaSource"/>
+          <p:cNvPr id="1242798587" name="AnaSource"/>
           <p:cNvSpPr/>
           <p:nvPr/>
         </p:nvSpPr>
@@ -9483,7 +9483,7 @@
       </p:sp>
       <p:sp>
         <p:nvSpPr>
-          <p:cNvPr id="1245132609" name="Bar301"/>
+          <p:cNvPr id="2055385961" name="Bar301"/>
           <p:cNvSpPr/>
           <p:nvPr/>
         </p:nvSpPr>
@@ -9513,7 +9513,7 @@
       </p:sp>
       <p:sp>
         <p:nvSpPr>
-          <p:cNvPr id="33928862" name="FarmSource"/>
+          <p:cNvPr id="2029057849" name="FarmSource"/>
           <p:cNvSpPr/>
           <p:nvPr/>
         </p:nvSpPr>
@@ -9589,7 +9589,7 @@
       </p:sp>
       <p:sp>
         <p:nvSpPr>
-          <p:cNvPr id="1526456874" name="Bar311"/>
+          <p:cNvPr id="231931231" name="Bar311"/>
           <p:cNvSpPr/>
           <p:nvPr/>
         </p:nvSpPr>
@@ -9619,7 +9619,7 @@
       </p:sp>
       <p:sp>
         <p:nvSpPr>
-          <p:cNvPr id="572794734" name="Shape 1"/>
+          <p:cNvPr id="1539108736" name="Shape 1"/>
           <p:cNvSpPr/>
           <p:nvPr/>
         </p:nvSpPr>
@@ -9682,7 +9682,7 @@
       </p:grpSpPr>
       <p:sp>
         <p:nvSpPr>
-          <p:cNvPr id="684346003" name="Title"/>
+          <p:cNvPr id="575326499" name="Title"/>
           <p:cNvSpPr/>
           <p:nvPr/>
         </p:nvSpPr>
@@ -9722,7 +9722,7 @@
       </p:sp>
       <p:sp>
         <p:nvSpPr>
-          <p:cNvPr id="117678732" name="Badge200"/>
+          <p:cNvPr id="25953993" name="Badge200"/>
           <p:cNvSpPr/>
           <p:nvPr/>
         </p:nvSpPr>
@@ -9764,7 +9764,7 @@
       </p:sp>
       <p:sp>
         <p:nvSpPr>
-          <p:cNvPr id="1327677566" name="P1"/>
+          <p:cNvPr id="878201385" name="P1"/>
           <p:cNvSpPr/>
           <p:nvPr/>
         </p:nvSpPr>
@@ -9872,7 +9872,7 @@
       </p:sp>
       <p:sp>
         <p:nvSpPr>
-          <p:cNvPr id="1113847698" name="Bar202"/>
+          <p:cNvPr id="1929516839" name="Bar202"/>
           <p:cNvSpPr/>
           <p:nvPr/>
         </p:nvSpPr>
@@ -9902,7 +9902,7 @@
       </p:sp>
       <p:sp>
         <p:nvSpPr>
-          <p:cNvPr id="1410533519" name="Badge210"/>
+          <p:cNvPr id="1781577733" name="Badge210"/>
           <p:cNvSpPr/>
           <p:nvPr/>
         </p:nvSpPr>
@@ -9944,7 +9944,7 @@
       </p:sp>
       <p:sp>
         <p:nvSpPr>
-          <p:cNvPr id="1576662058" name="P2"/>
+          <p:cNvPr id="29191181" name="P2"/>
           <p:cNvSpPr/>
           <p:nvPr/>
         </p:nvSpPr>
@@ -10068,7 +10068,7 @@
       </p:sp>
       <p:sp>
         <p:nvSpPr>
-          <p:cNvPr id="161514497" name="Bar212"/>
+          <p:cNvPr id="569810369" name="Bar212"/>
           <p:cNvSpPr/>
           <p:nvPr/>
         </p:nvSpPr>
@@ -10098,7 +10098,7 @@
       </p:sp>
       <p:sp>
         <p:nvSpPr>
-          <p:cNvPr id="376351374" name="Badge220"/>
+          <p:cNvPr id="222364054" name="Badge220"/>
           <p:cNvSpPr/>
           <p:nvPr/>
         </p:nvSpPr>
@@ -10140,7 +10140,7 @@
       </p:sp>
       <p:sp>
         <p:nvSpPr>
-          <p:cNvPr id="767810756" name="P3"/>
+          <p:cNvPr id="1864247687" name="P3"/>
           <p:cNvSpPr/>
           <p:nvPr/>
         </p:nvSpPr>
@@ -10248,7 +10248,7 @@
       </p:sp>
       <p:sp>
         <p:nvSpPr>
-          <p:cNvPr id="1244192367" name="Bar222"/>
+          <p:cNvPr id="1306511378" name="Bar222"/>
           <p:cNvSpPr/>
           <p:nvPr/>
         </p:nvSpPr>
@@ -10278,7 +10278,7 @@
       </p:sp>
       <p:sp>
         <p:nvSpPr>
-          <p:cNvPr id="1827932541" name="Shape 1"/>
+          <p:cNvPr id="1285891651" name="Shape 1"/>
           <p:cNvSpPr/>
           <p:nvPr/>
         </p:nvSpPr>
@@ -10341,7 +10341,7 @@
       </p:grpSpPr>
       <p:sp>
         <p:nvSpPr>
-          <p:cNvPr id="361765551" name="Title"/>
+          <p:cNvPr id="272429126" name="Title"/>
           <p:cNvSpPr/>
           <p:nvPr/>
         </p:nvSpPr>
@@ -10381,7 +10381,7 @@
       </p:sp>
       <p:sp>
         <p:nvSpPr>
-          <p:cNvPr id="1381433079" name="Sub"/>
+          <p:cNvPr id="732291632" name="Sub"/>
           <p:cNvSpPr/>
           <p:nvPr/>
         </p:nvSpPr>
@@ -10421,7 +10421,7 @@
       </p:sp>
       <p:sp>
         <p:nvSpPr>
-          <p:cNvPr id="1438284202" name="Scenario"/>
+          <p:cNvPr id="794666655" name="Scenario"/>
           <p:cNvSpPr/>
           <p:nvPr/>
         </p:nvSpPr>
@@ -10529,7 +10529,7 @@
       </p:sp>
       <p:sp>
         <p:nvSpPr>
-          <p:cNvPr id="1692182694" name="Bar201"/>
+          <p:cNvPr id="1814618674" name="Bar201"/>
           <p:cNvSpPr/>
           <p:nvPr/>
         </p:nvSpPr>
@@ -10559,7 +10559,7 @@
       </p:sp>
       <p:sp>
         <p:nvSpPr>
-          <p:cNvPr id="108772723" name="ReqLbl"/>
+          <p:cNvPr id="767229316" name="ReqLbl"/>
           <p:cNvSpPr/>
           <p:nvPr/>
         </p:nvSpPr>
@@ -10603,7 +10603,7 @@
       </p:sp>
       <p:sp>
         <p:nvSpPr>
-          <p:cNvPr id="669428482" name="Bar220"/>
+          <p:cNvPr id="251699905" name="Bar220"/>
           <p:cNvSpPr/>
           <p:nvPr/>
         </p:nvSpPr>
@@ -10633,7 +10633,7 @@
       </p:sp>
       <p:sp>
         <p:nvSpPr>
-          <p:cNvPr id="1645413131" name="Req0"/>
+          <p:cNvPr id="565738074" name="Req0"/>
           <p:cNvSpPr/>
           <p:nvPr/>
         </p:nvSpPr>
@@ -10704,7 +10704,7 @@
       </p:sp>
       <p:sp>
         <p:nvSpPr>
-          <p:cNvPr id="1492641186" name="Bar230"/>
+          <p:cNvPr id="434371286" name="Bar230"/>
           <p:cNvSpPr/>
           <p:nvPr/>
         </p:nvSpPr>
@@ -10734,7 +10734,7 @@
       </p:sp>
       <p:sp>
         <p:nvSpPr>
-          <p:cNvPr id="2039235060" name="Req1"/>
+          <p:cNvPr id="2026923635" name="Req1"/>
           <p:cNvSpPr/>
           <p:nvPr/>
         </p:nvSpPr>
@@ -10805,7 +10805,7 @@
       </p:sp>
       <p:sp>
         <p:nvSpPr>
-          <p:cNvPr id="1989232472" name="Bar240"/>
+          <p:cNvPr id="871970449" name="Bar240"/>
           <p:cNvSpPr/>
           <p:nvPr/>
         </p:nvSpPr>
@@ -10835,7 +10835,7 @@
       </p:sp>
       <p:sp>
         <p:nvSpPr>
-          <p:cNvPr id="849005001" name="Req2"/>
+          <p:cNvPr id="372759391" name="Req2"/>
           <p:cNvSpPr/>
           <p:nvPr/>
         </p:nvSpPr>
@@ -10906,7 +10906,7 @@
       </p:sp>
       <p:sp>
         <p:nvSpPr>
-          <p:cNvPr id="1983213880" name="Bar250"/>
+          <p:cNvPr id="1264866459" name="Bar250"/>
           <p:cNvSpPr/>
           <p:nvPr/>
         </p:nvSpPr>
@@ -10936,7 +10936,7 @@
       </p:sp>
       <p:sp>
         <p:nvSpPr>
-          <p:cNvPr id="522959436" name="Req3"/>
+          <p:cNvPr id="726506058" name="Req3"/>
           <p:cNvSpPr/>
           <p:nvPr/>
         </p:nvSpPr>
@@ -11007,7 +11007,7 @@
       </p:sp>
       <p:sp>
         <p:nvSpPr>
-          <p:cNvPr id="698288763" name="Bar260"/>
+          <p:cNvPr id="194780076" name="Bar260"/>
           <p:cNvSpPr/>
           <p:nvPr/>
         </p:nvSpPr>
@@ -11037,7 +11037,7 @@
       </p:sp>
       <p:sp>
         <p:nvSpPr>
-          <p:cNvPr id="316170545" name="Req4"/>
+          <p:cNvPr id="1668360633" name="Req4"/>
           <p:cNvSpPr/>
           <p:nvPr/>
         </p:nvSpPr>
@@ -11108,7 +11108,7 @@
       </p:sp>
       <p:sp>
         <p:nvSpPr>
-          <p:cNvPr id="640934663" name="ResLbl"/>
+          <p:cNvPr id="1659365323" name="ResLbl"/>
           <p:cNvSpPr/>
           <p:nvPr/>
         </p:nvSpPr>
@@ -11168,7 +11168,7 @@
       </p:sp>
       <p:sp>
         <p:nvSpPr>
-          <p:cNvPr id="178442577" name="Bar271"/>
+          <p:cNvPr id="919671354" name="Bar271"/>
           <p:cNvSpPr/>
           <p:nvPr/>
         </p:nvSpPr>
@@ -11198,7 +11198,7 @@
       </p:sp>
       <p:sp>
         <p:nvSpPr>
-          <p:cNvPr id="426885622" name="Shape 1"/>
+          <p:cNvPr id="651324361" name="Shape 1"/>
           <p:cNvSpPr/>
           <p:nvPr/>
         </p:nvSpPr>
@@ -11268,7 +11268,7 @@
       </p:grpSpPr>
       <p:sp>
         <p:nvSpPr>
-          <p:cNvPr id="2030716437" name="Text 0"/>
+          <p:cNvPr id="1084980441" name="Text 0"/>
           <p:cNvSpPr/>
           <p:nvPr/>
         </p:nvSpPr>
@@ -11308,7 +11308,7 @@
       </p:sp>
       <p:sp>
         <p:nvSpPr>
-          <p:cNvPr id="934984186" name="Shape 1"/>
+          <p:cNvPr id="333238327" name="Shape 1"/>
           <p:cNvSpPr/>
           <p:nvPr/>
         </p:nvSpPr>
@@ -11338,7 +11338,7 @@
       </p:sp>
       <p:sp>
         <p:nvSpPr>
-          <p:cNvPr id="947149792" name="Shape 2"/>
+          <p:cNvPr id="866008298" name="Shape 2"/>
           <p:cNvSpPr/>
           <p:nvPr/>
         </p:nvSpPr>
@@ -11373,7 +11373,7 @@
       </p:sp>
       <p:sp>
         <p:nvSpPr>
-          <p:cNvPr id="393319810" name="Text 3"/>
+          <p:cNvPr id="1483277173" name="Text 3"/>
           <p:cNvSpPr/>
           <p:nvPr/>
         </p:nvSpPr>
@@ -11413,7 +11413,7 @@
       </p:sp>
       <p:sp>
         <p:nvSpPr>
-          <p:cNvPr id="302704488" name="Text 4"/>
+          <p:cNvPr id="321387175" name="Text 4"/>
           <p:cNvSpPr/>
           <p:nvPr/>
         </p:nvSpPr>
@@ -11453,7 +11453,7 @@
       </p:sp>
       <p:sp>
         <p:nvSpPr>
-          <p:cNvPr id="1428402717" name="Text 5"/>
+          <p:cNvPr id="1792217205" name="Text 5"/>
           <p:cNvSpPr/>
           <p:nvPr/>
         </p:nvSpPr>
@@ -11493,7 +11493,7 @@
       </p:sp>
       <p:sp>
         <p:nvSpPr>
-          <p:cNvPr id="215642386" name="Text 6"/>
+          <p:cNvPr id="721417858" name="Text 6"/>
           <p:cNvSpPr/>
           <p:nvPr/>
         </p:nvSpPr>
@@ -11533,7 +11533,7 @@
       </p:sp>
       <p:sp>
         <p:nvSpPr>
-          <p:cNvPr id="1202159032" name="Text 7"/>
+          <p:cNvPr id="49059321" name="Text 7"/>
           <p:cNvSpPr/>
           <p:nvPr/>
         </p:nvSpPr>
@@ -11573,7 +11573,7 @@
       </p:sp>
       <p:sp>
         <p:nvSpPr>
-          <p:cNvPr id="396953811" name="Text 8"/>
+          <p:cNvPr id="2030495927" name="Text 8"/>
           <p:cNvSpPr/>
           <p:nvPr/>
         </p:nvSpPr>
@@ -11613,7 +11613,7 @@
       </p:sp>
       <p:sp>
         <p:nvSpPr>
-          <p:cNvPr id="514214300" name="Text 9"/>
+          <p:cNvPr id="1422511919" name="Text 9"/>
           <p:cNvSpPr/>
           <p:nvPr/>
         </p:nvSpPr>
@@ -11653,7 +11653,7 @@
       </p:sp>
       <p:sp>
         <p:nvSpPr>
-          <p:cNvPr id="1342055705" name="Text 10"/>
+          <p:cNvPr id="2096332356" name="Text 10"/>
           <p:cNvSpPr/>
           <p:nvPr/>
         </p:nvSpPr>
@@ -11693,7 +11693,7 @@
       </p:sp>
       <p:sp>
         <p:nvSpPr>
-          <p:cNvPr id="294574654" name="Text 11"/>
+          <p:cNvPr id="2013434564" name="Text 11"/>
           <p:cNvSpPr/>
           <p:nvPr/>
         </p:nvSpPr>
@@ -11755,7 +11755,7 @@
       </p:sp>
       <p:sp>
         <p:nvSpPr>
-          <p:cNvPr id="1168650952" name="Text 12"/>
+          <p:cNvPr id="905922035" name="Text 12"/>
           <p:cNvSpPr/>
           <p:nvPr/>
         </p:nvSpPr>
@@ -11795,7 +11795,7 @@
       </p:sp>
       <p:sp>
         <p:nvSpPr>
-          <p:cNvPr id="1003086493" name="Text 13"/>
+          <p:cNvPr id="413620988" name="Text 13"/>
           <p:cNvSpPr/>
           <p:nvPr/>
         </p:nvSpPr>
@@ -11835,7 +11835,7 @@
       </p:sp>
       <p:sp>
         <p:nvSpPr>
-          <p:cNvPr id="292881521" name="Text 14"/>
+          <p:cNvPr id="559749752" name="Text 14"/>
           <p:cNvSpPr/>
           <p:nvPr/>
         </p:nvSpPr>
@@ -11875,7 +11875,7 @@
       </p:sp>
       <p:sp>
         <p:nvSpPr>
-          <p:cNvPr id="2068147868" name="Text 15"/>
+          <p:cNvPr id="796655424" name="Text 15"/>
           <p:cNvSpPr/>
           <p:nvPr/>
         </p:nvSpPr>
@@ -11915,7 +11915,7 @@
       </p:sp>
       <p:sp>
         <p:nvSpPr>
-          <p:cNvPr id="145320871" name="Text 16"/>
+          <p:cNvPr id="1847716724" name="Text 16"/>
           <p:cNvSpPr/>
           <p:nvPr/>
         </p:nvSpPr>
@@ -11955,7 +11955,7 @@
       </p:sp>
       <p:sp>
         <p:nvSpPr>
-          <p:cNvPr id="1271254835" name="Text 17"/>
+          <p:cNvPr id="1488905443" name="Text 17"/>
           <p:cNvSpPr/>
           <p:nvPr/>
         </p:nvSpPr>
@@ -11995,7 +11995,7 @@
       </p:sp>
       <p:sp>
         <p:nvSpPr>
-          <p:cNvPr id="1971914246" name="Text 18"/>
+          <p:cNvPr id="1432138741" name="Text 18"/>
           <p:cNvSpPr/>
           <p:nvPr/>
         </p:nvSpPr>
@@ -12035,7 +12035,7 @@
       </p:sp>
       <p:sp>
         <p:nvSpPr>
-          <p:cNvPr id="368269614" name="Text 19"/>
+          <p:cNvPr id="1198148959" name="Text 19"/>
           <p:cNvSpPr/>
           <p:nvPr/>
         </p:nvSpPr>
@@ -12097,7 +12097,7 @@
       </p:sp>
       <p:sp>
         <p:nvSpPr>
-          <p:cNvPr id="1492593805" name="Shape 20"/>
+          <p:cNvPr id="1590169495" name="Shape 20"/>
           <p:cNvSpPr/>
           <p:nvPr/>
         </p:nvSpPr>
@@ -12132,7 +12132,7 @@
       </p:sp>
       <p:sp>
         <p:nvSpPr>
-          <p:cNvPr id="2085505115" name="Text 21"/>
+          <p:cNvPr id="889808219" name="Text 21"/>
           <p:cNvSpPr/>
           <p:nvPr/>
         </p:nvSpPr>
@@ -12172,7 +12172,7 @@
       </p:sp>
       <p:sp>
         <p:nvSpPr>
-          <p:cNvPr id="942715663" name="Text 22"/>
+          <p:cNvPr id="1498539066" name="Text 22"/>
           <p:cNvSpPr/>
           <p:nvPr/>
         </p:nvSpPr>
@@ -12212,7 +12212,7 @@
       </p:sp>
       <p:sp>
         <p:nvSpPr>
-          <p:cNvPr id="812053831" name="Text 23"/>
+          <p:cNvPr id="728869698" name="Text 23"/>
           <p:cNvSpPr/>
           <p:nvPr/>
         </p:nvSpPr>
@@ -12252,7 +12252,7 @@
       </p:sp>
       <p:sp>
         <p:nvSpPr>
-          <p:cNvPr id="1167855798" name="Text 24"/>
+          <p:cNvPr id="1595193990" name="Text 24"/>
           <p:cNvSpPr/>
           <p:nvPr/>
         </p:nvSpPr>
@@ -12292,7 +12292,7 @@
       </p:sp>
       <p:sp>
         <p:nvSpPr>
-          <p:cNvPr id="1356975714" name="Text 25"/>
+          <p:cNvPr id="1662932179" name="Text 25"/>
           <p:cNvSpPr/>
           <p:nvPr/>
         </p:nvSpPr>
@@ -12332,7 +12332,7 @@
       </p:sp>
       <p:sp>
         <p:nvSpPr>
-          <p:cNvPr id="1499500837" name="Text 26"/>
+          <p:cNvPr id="1874014832" name="Text 26"/>
           <p:cNvSpPr/>
           <p:nvPr/>
         </p:nvSpPr>
@@ -12372,7 +12372,7 @@
       </p:sp>
       <p:sp>
         <p:nvSpPr>
-          <p:cNvPr id="334194542" name="Text 27"/>
+          <p:cNvPr id="2117966298" name="Text 27"/>
           <p:cNvSpPr/>
           <p:nvPr/>
         </p:nvSpPr>
@@ -12412,7 +12412,7 @@
       </p:sp>
       <p:sp>
         <p:nvSpPr>
-          <p:cNvPr id="245702325" name="Text 28"/>
+          <p:cNvPr id="744791851" name="Text 28"/>
           <p:cNvSpPr/>
           <p:nvPr/>
         </p:nvSpPr>
@@ -12452,7 +12452,7 @@
       </p:sp>
       <p:sp>
         <p:nvSpPr>
-          <p:cNvPr id="734368084" name="Text 29"/>
+          <p:cNvPr id="866198386" name="Text 29"/>
           <p:cNvSpPr/>
           <p:nvPr/>
         </p:nvSpPr>
@@ -12492,7 +12492,7 @@
       </p:sp>
       <p:sp>
         <p:nvSpPr>
-          <p:cNvPr id="12822807" name="Text 30"/>
+          <p:cNvPr id="1009849347" name="Text 30"/>
           <p:cNvSpPr/>
           <p:nvPr/>
         </p:nvSpPr>
@@ -12532,7 +12532,7 @@
       </p:sp>
       <p:sp>
         <p:nvSpPr>
-          <p:cNvPr id="16845815" name="Text 31"/>
+          <p:cNvPr id="1412941927" name="Text 31"/>
           <p:cNvSpPr/>
           <p:nvPr/>
         </p:nvSpPr>
@@ -12572,7 +12572,7 @@
       </p:sp>
       <p:sp>
         <p:nvSpPr>
-          <p:cNvPr id="130216726" name="Text 32"/>
+          <p:cNvPr id="780563061" name="Text 32"/>
           <p:cNvSpPr/>
           <p:nvPr/>
         </p:nvSpPr>
@@ -12612,7 +12612,7 @@
       </p:sp>
       <p:sp>
         <p:nvSpPr>
-          <p:cNvPr id="1708941806" name="Text 33"/>
+          <p:cNvPr id="521087871" name="Text 33"/>
           <p:cNvSpPr/>
           <p:nvPr/>
         </p:nvSpPr>
@@ -12652,7 +12652,7 @@
       </p:sp>
       <p:sp>
         <p:nvSpPr>
-          <p:cNvPr id="560963437" name="Text 34"/>
+          <p:cNvPr id="1503602723" name="Text 34"/>
           <p:cNvSpPr/>
           <p:nvPr/>
         </p:nvSpPr>
@@ -12692,7 +12692,7 @@
       </p:sp>
       <p:sp>
         <p:nvSpPr>
-          <p:cNvPr id="1734938894" name="Text 35"/>
+          <p:cNvPr id="1700143982" name="Text 35"/>
           <p:cNvSpPr/>
           <p:nvPr/>
         </p:nvSpPr>
@@ -12732,7 +12732,7 @@
       </p:sp>
       <p:sp>
         <p:nvSpPr>
-          <p:cNvPr id="1418217081" name="Text 36"/>
+          <p:cNvPr id="1438413903" name="Text 36"/>
           <p:cNvSpPr/>
           <p:nvPr/>
         </p:nvSpPr>
@@ -12772,7 +12772,7 @@
       </p:sp>
       <p:sp>
         <p:nvSpPr>
-          <p:cNvPr id="1952290762" name="Text 37"/>
+          <p:cNvPr id="1863198634" name="Text 37"/>
           <p:cNvSpPr/>
           <p:nvPr/>
         </p:nvSpPr>
@@ -12852,7 +12852,7 @@
       </p:grpSpPr>
       <p:sp>
         <p:nvSpPr>
-          <p:cNvPr id="914748557" name="Text 0"/>
+          <p:cNvPr id="70825708" name="Text 0"/>
           <p:cNvSpPr/>
           <p:nvPr/>
         </p:nvSpPr>
@@ -12914,7 +12914,7 @@
       </p:sp>
       <p:sp>
         <p:nvSpPr>
-          <p:cNvPr id="1433401756" name="Text 1"/>
+          <p:cNvPr id="1367794536" name="Text 1"/>
           <p:cNvSpPr/>
           <p:nvPr/>
         </p:nvSpPr>
@@ -12954,7 +12954,7 @@
       </p:sp>
       <p:sp>
         <p:nvSpPr>
-          <p:cNvPr id="1767308691" name="Text 2"/>
+          <p:cNvPr id="501967184" name="Text 2"/>
           <p:cNvSpPr/>
           <p:nvPr/>
         </p:nvSpPr>
@@ -13034,7 +13034,7 @@
       </p:grpSpPr>
       <p:sp>
         <p:nvSpPr>
-          <p:cNvPr id="395892787" name="Text 0"/>
+          <p:cNvPr id="1689217766" name="Text 0"/>
           <p:cNvSpPr/>
           <p:nvPr/>
         </p:nvSpPr>
@@ -13074,7 +13074,7 @@
       </p:sp>
       <p:sp>
         <p:nvSpPr>
-          <p:cNvPr id="1259720397" name="Shape 1"/>
+          <p:cNvPr id="62703146" name="Shape 1"/>
           <p:cNvSpPr/>
           <p:nvPr/>
         </p:nvSpPr>
@@ -13104,7 +13104,7 @@
       </p:sp>
       <p:sp>
         <p:nvSpPr>
-          <p:cNvPr id="1025988146" name="Shape 2"/>
+          <p:cNvPr id="332809763" name="Shape 2"/>
           <p:cNvSpPr/>
           <p:nvPr/>
         </p:nvSpPr>
@@ -13139,7 +13139,7 @@
       </p:sp>
       <p:sp>
         <p:nvSpPr>
-          <p:cNvPr id="770271263" name="Shape 3"/>
+          <p:cNvPr id="717612818" name="Shape 3"/>
           <p:cNvSpPr/>
           <p:nvPr/>
         </p:nvSpPr>
@@ -13169,7 +13169,7 @@
       </p:sp>
       <p:sp>
         <p:nvSpPr>
-          <p:cNvPr id="1754271626" name="Text 4"/>
+          <p:cNvPr id="956933044" name="Text 4"/>
           <p:cNvSpPr/>
           <p:nvPr/>
         </p:nvSpPr>
@@ -13209,7 +13209,7 @@
       </p:sp>
       <p:sp>
         <p:nvSpPr>
-          <p:cNvPr id="1241509289" name="Text 5"/>
+          <p:cNvPr id="321071507" name="Text 5"/>
           <p:cNvSpPr/>
           <p:nvPr/>
         </p:nvSpPr>
@@ -13271,7 +13271,7 @@
       </p:sp>
       <p:sp>
         <p:nvSpPr>
-          <p:cNvPr id="879541719" name="Shape 6"/>
+          <p:cNvPr id="1952491662" name="Shape 6"/>
           <p:cNvSpPr/>
           <p:nvPr/>
         </p:nvSpPr>
@@ -13306,7 +13306,7 @@
       </p:sp>
       <p:sp>
         <p:nvSpPr>
-          <p:cNvPr id="1501424140" name="Shape 7"/>
+          <p:cNvPr id="390575094" name="Shape 7"/>
           <p:cNvSpPr/>
           <p:nvPr/>
         </p:nvSpPr>
@@ -13336,7 +13336,7 @@
       </p:sp>
       <p:sp>
         <p:nvSpPr>
-          <p:cNvPr id="362542725" name="Text 8"/>
+          <p:cNvPr id="1681114873" name="Text 8"/>
           <p:cNvSpPr/>
           <p:nvPr/>
         </p:nvSpPr>
@@ -13376,7 +13376,7 @@
       </p:sp>
       <p:sp>
         <p:nvSpPr>
-          <p:cNvPr id="652901147" name="Text 9"/>
+          <p:cNvPr id="2124738382" name="Text 9"/>
           <p:cNvSpPr/>
           <p:nvPr/>
         </p:nvSpPr>
@@ -13416,7 +13416,7 @@
       </p:sp>
       <p:sp>
         <p:nvSpPr>
-          <p:cNvPr id="1716865706" name="Shape 10"/>
+          <p:cNvPr id="1730341385" name="Shape 10"/>
           <p:cNvSpPr/>
           <p:nvPr/>
         </p:nvSpPr>
@@ -13451,7 +13451,7 @@
       </p:sp>
       <p:sp>
         <p:nvSpPr>
-          <p:cNvPr id="2001320953" name="Shape 11"/>
+          <p:cNvPr id="1530854464" name="Shape 11"/>
           <p:cNvSpPr/>
           <p:nvPr/>
         </p:nvSpPr>
@@ -13481,7 +13481,7 @@
       </p:sp>
       <p:sp>
         <p:nvSpPr>
-          <p:cNvPr id="302004070" name="Text 12"/>
+          <p:cNvPr id="886366172" name="Text 12"/>
           <p:cNvSpPr/>
           <p:nvPr/>
         </p:nvSpPr>
@@ -13521,7 +13521,7 @@
       </p:sp>
       <p:sp>
         <p:nvSpPr>
-          <p:cNvPr id="744299733" name="Text 13"/>
+          <p:cNvPr id="1085189321" name="Text 13"/>
           <p:cNvSpPr/>
           <p:nvPr/>
         </p:nvSpPr>
@@ -13561,7 +13561,7 @@
       </p:sp>
       <p:sp>
         <p:nvSpPr>
-          <p:cNvPr id="2057949646" name="Shape 14"/>
+          <p:cNvPr id="1851638565" name="Shape 14"/>
           <p:cNvSpPr/>
           <p:nvPr/>
         </p:nvSpPr>
@@ -13596,7 +13596,7 @@
       </p:sp>
       <p:sp>
         <p:nvSpPr>
-          <p:cNvPr id="685364382" name="Shape 15"/>
+          <p:cNvPr id="2122729063" name="Shape 15"/>
           <p:cNvSpPr/>
           <p:nvPr/>
         </p:nvSpPr>
@@ -13626,7 +13626,7 @@
       </p:sp>
       <p:sp>
         <p:nvSpPr>
-          <p:cNvPr id="740120458" name="Text 16"/>
+          <p:cNvPr id="1317684366" name="Text 16"/>
           <p:cNvSpPr/>
           <p:nvPr/>
         </p:nvSpPr>
@@ -13666,7 +13666,7 @@
       </p:sp>
       <p:sp>
         <p:nvSpPr>
-          <p:cNvPr id="1255426119" name="Text 17"/>
+          <p:cNvPr id="1175995587" name="Text 17"/>
           <p:cNvSpPr/>
           <p:nvPr/>
         </p:nvSpPr>
@@ -13768,7 +13768,7 @@
       </p:grpSpPr>
       <p:sp>
         <p:nvSpPr>
-          <p:cNvPr id="1867665248" name="Text 0"/>
+          <p:cNvPr id="1026415183" name="Text 0"/>
           <p:cNvSpPr/>
           <p:nvPr/>
         </p:nvSpPr>
@@ -13808,7 +13808,7 @@
       </p:sp>
       <p:sp>
         <p:nvSpPr>
-          <p:cNvPr id="1331820508" name="Text 24"/>
+          <p:cNvPr id="808524785" name="Text 24"/>
           <p:cNvSpPr/>
           <p:nvPr/>
         </p:nvSpPr>
@@ -13837,7 +13837,7 @@
       </p:sp>
       <p:sp>
         <p:nvSpPr>
-          <p:cNvPr id="776595656" name="Text 30"/>
+          <p:cNvPr id="74208601" name="Text 30"/>
           <p:cNvSpPr/>
           <p:nvPr/>
         </p:nvSpPr>
@@ -13866,7 +13866,7 @@
       </p:sp>
       <p:pic>
         <p:nvPicPr>
-          <p:cNvPr id="1911935427" name="Immagine 41"/>
+          <p:cNvPr id="1504138775" name="Immagine 41"/>
           <p:cNvPicPr>
             <a:picLocks noChangeAspect="1"/>
           </p:cNvPicPr>
@@ -13893,7 +13893,7 @@
       </p:pic>
       <p:sp>
         <p:nvSpPr>
-          <p:cNvPr id="178053156" name="Shape 1"/>
+          <p:cNvPr id="1566032785" name="Shape 1"/>
           <p:cNvSpPr/>
           <p:nvPr/>
         </p:nvSpPr>
@@ -13963,7 +13963,7 @@
       </p:grpSpPr>
       <p:sp>
         <p:nvSpPr>
-          <p:cNvPr id="71708873" name="Text 0"/>
+          <p:cNvPr id="1197620112" name="Text 0"/>
           <p:cNvSpPr/>
           <p:nvPr/>
         </p:nvSpPr>
@@ -14003,7 +14003,7 @@
       </p:sp>
       <p:sp>
         <p:nvSpPr>
-          <p:cNvPr id="1197931347" name="Shape 1"/>
+          <p:cNvPr id="1326310714" name="Shape 1"/>
           <p:cNvSpPr/>
           <p:nvPr/>
         </p:nvSpPr>
@@ -14033,7 +14033,7 @@
       </p:sp>
       <p:sp>
         <p:nvSpPr>
-          <p:cNvPr id="159170958" name="Shape 2"/>
+          <p:cNvPr id="31893726" name="Shape 2"/>
           <p:cNvSpPr/>
           <p:nvPr/>
         </p:nvSpPr>
@@ -14068,7 +14068,7 @@
       </p:sp>
       <p:sp>
         <p:nvSpPr>
-          <p:cNvPr id="1879739907" name="Text 3"/>
+          <p:cNvPr id="2022696462" name="Text 3"/>
           <p:cNvSpPr/>
           <p:nvPr/>
         </p:nvSpPr>
@@ -14108,7 +14108,7 @@
       </p:sp>
       <p:sp>
         <p:nvSpPr>
-          <p:cNvPr id="788056825" name="Shape 4"/>
+          <p:cNvPr id="729065759" name="Shape 4"/>
           <p:cNvSpPr/>
           <p:nvPr/>
         </p:nvSpPr>
@@ -14138,7 +14138,7 @@
       </p:sp>
       <p:sp>
         <p:nvSpPr>
-          <p:cNvPr id="1165931998" name="Text 5"/>
+          <p:cNvPr id="630781031" name="Text 5"/>
           <p:cNvSpPr/>
           <p:nvPr/>
         </p:nvSpPr>
@@ -14178,7 +14178,7 @@
       </p:sp>
       <p:sp>
         <p:nvSpPr>
-          <p:cNvPr id="1668379135" name="Text 6"/>
+          <p:cNvPr id="179566774" name="Text 6"/>
           <p:cNvSpPr/>
           <p:nvPr/>
         </p:nvSpPr>
@@ -14218,7 +14218,7 @@
       </p:sp>
       <p:sp>
         <p:nvSpPr>
-          <p:cNvPr id="875235895" name="Text 7"/>
+          <p:cNvPr id="468570463" name="Text 7"/>
           <p:cNvSpPr/>
           <p:nvPr/>
         </p:nvSpPr>
@@ -14280,7 +14280,7 @@
       </p:sp>
       <p:sp>
         <p:nvSpPr>
-          <p:cNvPr id="1284851336" name="Text 8"/>
+          <p:cNvPr id="1484132550" name="Text 8"/>
           <p:cNvSpPr/>
           <p:nvPr/>
         </p:nvSpPr>
@@ -14320,7 +14320,7 @@
       </p:sp>
       <p:sp>
         <p:nvSpPr>
-          <p:cNvPr id="1697803353" name="Shape 9"/>
+          <p:cNvPr id="166989186" name="Shape 9"/>
           <p:cNvSpPr/>
           <p:nvPr/>
         </p:nvSpPr>
@@ -14355,7 +14355,7 @@
       </p:sp>
       <p:sp>
         <p:nvSpPr>
-          <p:cNvPr id="1180040161" name="Text 10"/>
+          <p:cNvPr id="1096763448" name="Text 10"/>
           <p:cNvSpPr/>
           <p:nvPr/>
         </p:nvSpPr>
@@ -14395,7 +14395,7 @@
       </p:sp>
       <p:sp>
         <p:nvSpPr>
-          <p:cNvPr id="887312277" name="Shape 11"/>
+          <p:cNvPr id="1565240535" name="Shape 11"/>
           <p:cNvSpPr/>
           <p:nvPr/>
         </p:nvSpPr>
@@ -14425,7 +14425,7 @@
       </p:sp>
       <p:sp>
         <p:nvSpPr>
-          <p:cNvPr id="1938818333" name="Text 12"/>
+          <p:cNvPr id="1243981433" name="Text 12"/>
           <p:cNvSpPr/>
           <p:nvPr/>
         </p:nvSpPr>
@@ -14465,7 +14465,7 @@
       </p:sp>
       <p:sp>
         <p:nvSpPr>
-          <p:cNvPr id="291932360" name="Text 13"/>
+          <p:cNvPr id="874732665" name="Text 13"/>
           <p:cNvSpPr/>
           <p:nvPr/>
         </p:nvSpPr>
@@ -14527,7 +14527,7 @@
       </p:sp>
       <p:sp>
         <p:nvSpPr>
-          <p:cNvPr id="467750437" name="Text 14"/>
+          <p:cNvPr id="686187129" name="Text 14"/>
           <p:cNvSpPr/>
           <p:nvPr/>
         </p:nvSpPr>
@@ -14567,7 +14567,7 @@
       </p:sp>
       <p:sp>
         <p:nvSpPr>
-          <p:cNvPr id="694368951" name="Text 15"/>
+          <p:cNvPr id="1292157611" name="Text 15"/>
           <p:cNvSpPr/>
           <p:nvPr/>
         </p:nvSpPr>
@@ -14607,7 +14607,7 @@
       </p:sp>
       <p:sp>
         <p:nvSpPr>
-          <p:cNvPr id="631558275" name="Shape 16"/>
+          <p:cNvPr id="1878846985" name="Shape 16"/>
           <p:cNvSpPr/>
           <p:nvPr/>
         </p:nvSpPr>
@@ -14642,7 +14642,7 @@
       </p:sp>
       <p:sp>
         <p:nvSpPr>
-          <p:cNvPr id="2085671503" name="Text 17"/>
+          <p:cNvPr id="1378861419" name="Text 17"/>
           <p:cNvSpPr/>
           <p:nvPr/>
         </p:nvSpPr>
@@ -14682,7 +14682,7 @@
       </p:sp>
       <p:sp>
         <p:nvSpPr>
-          <p:cNvPr id="576649361" name="Shape 18"/>
+          <p:cNvPr id="2090059345" name="Shape 18"/>
           <p:cNvSpPr/>
           <p:nvPr/>
         </p:nvSpPr>
@@ -14712,7 +14712,7 @@
       </p:sp>
       <p:sp>
         <p:nvSpPr>
-          <p:cNvPr id="513596235" name="Text 19"/>
+          <p:cNvPr id="1979603525" name="Text 19"/>
           <p:cNvSpPr/>
           <p:nvPr/>
         </p:nvSpPr>
@@ -14752,7 +14752,7 @@
       </p:sp>
       <p:sp>
         <p:nvSpPr>
-          <p:cNvPr id="1999993931" name="Text 20"/>
+          <p:cNvPr id="1236029111" name="Text 20"/>
           <p:cNvSpPr/>
           <p:nvPr/>
         </p:nvSpPr>
@@ -14814,7 +14814,7 @@
       </p:sp>
       <p:sp>
         <p:nvSpPr>
-          <p:cNvPr id="331582945" name="Text 21"/>
+          <p:cNvPr id="1480185824" name="Text 21"/>
           <p:cNvSpPr/>
           <p:nvPr/>
         </p:nvSpPr>
@@ -14854,7 +14854,7 @@
       </p:sp>
       <p:sp>
         <p:nvSpPr>
-          <p:cNvPr id="1525141202" name="Text 22"/>
+          <p:cNvPr id="560972177" name="Text 22"/>
           <p:cNvSpPr/>
           <p:nvPr/>
         </p:nvSpPr>
@@ -14923,7 +14923,7 @@
       </p:grpSpPr>
       <p:sp>
         <p:nvSpPr>
-          <p:cNvPr id="1555613175" name="Text 0"/>
+          <p:cNvPr id="1886448971" name="Text 0"/>
           <p:cNvSpPr/>
           <p:nvPr/>
         </p:nvSpPr>
@@ -14963,7 +14963,7 @@
       </p:sp>
       <p:sp>
         <p:nvSpPr>
-          <p:cNvPr id="2121298302" name="Shape 1"/>
+          <p:cNvPr id="723011967" name="Shape 1"/>
           <p:cNvSpPr/>
           <p:nvPr/>
         </p:nvSpPr>
@@ -14993,7 +14993,7 @@
       </p:sp>
       <p:sp>
         <p:nvSpPr>
-          <p:cNvPr id="452324551" name="Shape 2"/>
+          <p:cNvPr id="1026311" name="Shape 2"/>
           <p:cNvSpPr/>
           <p:nvPr/>
         </p:nvSpPr>
@@ -15028,7 +15028,7 @@
       </p:sp>
       <p:sp>
         <p:nvSpPr>
-          <p:cNvPr id="784254031" name="Text 3"/>
+          <p:cNvPr id="28147540" name="Text 3"/>
           <p:cNvSpPr/>
           <p:nvPr/>
         </p:nvSpPr>
@@ -15068,7 +15068,7 @@
       </p:sp>
       <p:sp>
         <p:nvSpPr>
-          <p:cNvPr id="288063391" name="Text 4"/>
+          <p:cNvPr id="1541723198" name="Text 4"/>
           <p:cNvSpPr/>
           <p:nvPr/>
         </p:nvSpPr>
@@ -15108,7 +15108,7 @@
       </p:sp>
       <p:sp>
         <p:nvSpPr>
-          <p:cNvPr id="608398427" name="Text 5"/>
+          <p:cNvPr id="1779607353" name="Text 5"/>
           <p:cNvSpPr/>
           <p:nvPr/>
         </p:nvSpPr>
@@ -15170,7 +15170,7 @@
       </p:sp>
       <p:sp>
         <p:nvSpPr>
-          <p:cNvPr id="648839190" name="Text 6"/>
+          <p:cNvPr id="1220317585" name="Text 6"/>
           <p:cNvSpPr/>
           <p:nvPr/>
         </p:nvSpPr>
@@ -15210,7 +15210,7 @@
       </p:sp>
       <p:sp>
         <p:nvSpPr>
-          <p:cNvPr id="1634155472" name="Text 7"/>
+          <p:cNvPr id="141158084" name="Text 7"/>
           <p:cNvSpPr/>
           <p:nvPr/>
         </p:nvSpPr>
@@ -15250,7 +15250,7 @@
       </p:sp>
       <p:sp>
         <p:nvSpPr>
-          <p:cNvPr id="121878393" name="Text 8"/>
+          <p:cNvPr id="1140621748" name="Text 8"/>
           <p:cNvSpPr/>
           <p:nvPr/>
         </p:nvSpPr>
@@ -15290,7 +15290,7 @@
       </p:sp>
       <p:sp>
         <p:nvSpPr>
-          <p:cNvPr id="2037370456" name="Text 9"/>
+          <p:cNvPr id="71966449" name="Text 9"/>
           <p:cNvSpPr/>
           <p:nvPr/>
         </p:nvSpPr>
@@ -15352,7 +15352,7 @@
       </p:sp>
       <p:sp>
         <p:nvSpPr>
-          <p:cNvPr id="1935061337" name="Text 10"/>
+          <p:cNvPr id="882421602" name="Text 10"/>
           <p:cNvSpPr/>
           <p:nvPr/>
         </p:nvSpPr>
@@ -15392,7 +15392,7 @@
       </p:sp>
       <p:sp>
         <p:nvSpPr>
-          <p:cNvPr id="852526698" name="Text 11"/>
+          <p:cNvPr id="1885066637" name="Text 11"/>
           <p:cNvSpPr/>
           <p:nvPr/>
         </p:nvSpPr>
@@ -15432,7 +15432,7 @@
       </p:sp>
       <p:sp>
         <p:nvSpPr>
-          <p:cNvPr id="1199571013" name="Text 12"/>
+          <p:cNvPr id="1475900742" name="Text 12"/>
           <p:cNvSpPr/>
           <p:nvPr/>
         </p:nvSpPr>
@@ -15461,7 +15461,7 @@
       </p:sp>
       <p:sp>
         <p:nvSpPr>
-          <p:cNvPr id="1195896249" name="Shape 13"/>
+          <p:cNvPr id="2081137157" name="Shape 13"/>
           <p:cNvSpPr/>
           <p:nvPr/>
         </p:nvSpPr>
@@ -15496,7 +15496,7 @@
       </p:sp>
       <p:sp>
         <p:nvSpPr>
-          <p:cNvPr id="1928219505" name="Text 14"/>
+          <p:cNvPr id="1505168977" name="Text 14"/>
           <p:cNvSpPr/>
           <p:nvPr/>
         </p:nvSpPr>
@@ -15536,7 +15536,7 @@
       </p:sp>
       <p:sp>
         <p:nvSpPr>
-          <p:cNvPr id="1577828112" name="Text 15"/>
+          <p:cNvPr id="444557092" name="Text 15"/>
           <p:cNvSpPr/>
           <p:nvPr/>
         </p:nvSpPr>
@@ -15576,7 +15576,7 @@
       </p:sp>
       <p:sp>
         <p:nvSpPr>
-          <p:cNvPr id="273737969" name="Text 16"/>
+          <p:cNvPr id="1836096970" name="Text 16"/>
           <p:cNvSpPr/>
           <p:nvPr/>
         </p:nvSpPr>
@@ -15638,7 +15638,7 @@
       </p:sp>
       <p:sp>
         <p:nvSpPr>
-          <p:cNvPr id="935012986" name="Text 17"/>
+          <p:cNvPr id="194141053" name="Text 17"/>
           <p:cNvSpPr/>
           <p:nvPr/>
         </p:nvSpPr>
@@ -15678,7 +15678,7 @@
       </p:sp>
       <p:sp>
         <p:nvSpPr>
-          <p:cNvPr id="923688833" name="Text 18"/>
+          <p:cNvPr id="2008582489" name="Text 18"/>
           <p:cNvSpPr/>
           <p:nvPr/>
         </p:nvSpPr>
@@ -15718,7 +15718,7 @@
       </p:sp>
       <p:sp>
         <p:nvSpPr>
-          <p:cNvPr id="1989017945" name="Text 19"/>
+          <p:cNvPr id="2111904669" name="Text 19"/>
           <p:cNvSpPr/>
           <p:nvPr/>
         </p:nvSpPr>
@@ -15758,7 +15758,7 @@
       </p:sp>
       <p:sp>
         <p:nvSpPr>
-          <p:cNvPr id="342098500" name="Text 20"/>
+          <p:cNvPr id="823780024" name="Text 20"/>
           <p:cNvSpPr/>
           <p:nvPr/>
         </p:nvSpPr>
@@ -15820,7 +15820,7 @@
       </p:sp>
       <p:sp>
         <p:nvSpPr>
-          <p:cNvPr id="1532234787" name="Text 21"/>
+          <p:cNvPr id="1933844270" name="Text 21"/>
           <p:cNvSpPr/>
           <p:nvPr/>
         </p:nvSpPr>
@@ -15860,7 +15860,7 @@
       </p:sp>
       <p:sp>
         <p:nvSpPr>
-          <p:cNvPr id="1025123975" name="Text 22"/>
+          <p:cNvPr id="1624389890" name="Text 22"/>
           <p:cNvSpPr/>
           <p:nvPr/>
         </p:nvSpPr>
@@ -15900,7 +15900,7 @@
       </p:sp>
       <p:sp>
         <p:nvSpPr>
-          <p:cNvPr id="1164747125" name="Text 23"/>
+          <p:cNvPr id="485169964" name="Text 23"/>
           <p:cNvSpPr/>
           <p:nvPr/>
         </p:nvSpPr>
@@ -15929,7 +15929,7 @@
       </p:sp>
       <p:sp>
         <p:nvSpPr>
-          <p:cNvPr id="528608956" name="Text 24"/>
+          <p:cNvPr id="880557733" name="Text 24"/>
           <p:cNvSpPr/>
           <p:nvPr/>
         </p:nvSpPr>
@@ -15958,7 +15958,7 @@
       </p:sp>
       <p:sp>
         <p:nvSpPr>
-          <p:cNvPr id="737505904" name="Text 25"/>
+          <p:cNvPr id="1467880246" name="Text 25"/>
           <p:cNvSpPr/>
           <p:nvPr/>
         </p:nvSpPr>
@@ -16027,7 +16027,7 @@
       </p:grpSpPr>
       <p:sp>
         <p:nvSpPr>
-          <p:cNvPr id="1098383139" name="Text 0"/>
+          <p:cNvPr id="1616465608" name="Text 0"/>
           <p:cNvSpPr/>
           <p:nvPr/>
         </p:nvSpPr>
@@ -16089,7 +16089,7 @@
       </p:sp>
       <p:sp>
         <p:nvSpPr>
-          <p:cNvPr id="619736058" name="Text 1"/>
+          <p:cNvPr id="363591960" name="Text 1"/>
           <p:cNvSpPr/>
           <p:nvPr/>
         </p:nvSpPr>
@@ -16118,7 +16118,7 @@
       </p:sp>
       <p:sp>
         <p:nvSpPr>
-          <p:cNvPr id="1577645029" name="Text 2"/>
+          <p:cNvPr id="280467976" name="Text 2"/>
           <p:cNvSpPr/>
           <p:nvPr/>
         </p:nvSpPr>
@@ -16147,7 +16147,7 @@
       </p:sp>
       <p:sp>
         <p:nvSpPr>
-          <p:cNvPr id="273665243" name="Text 1"/>
+          <p:cNvPr id="1101399179" name="Text 1"/>
           <p:cNvSpPr/>
           <p:nvPr/>
         </p:nvSpPr>
@@ -16227,7 +16227,7 @@
       </p:grpSpPr>
       <p:sp>
         <p:nvSpPr>
-          <p:cNvPr id="1991367668" name="Text 0"/>
+          <p:cNvPr id="370146346" name="Text 0"/>
           <p:cNvSpPr/>
           <p:nvPr/>
         </p:nvSpPr>
@@ -16267,7 +16267,7 @@
       </p:sp>
       <p:sp>
         <p:nvSpPr>
-          <p:cNvPr id="2000650378" name="Shape 1"/>
+          <p:cNvPr id="175052078" name="Shape 1"/>
           <p:cNvSpPr/>
           <p:nvPr/>
         </p:nvSpPr>
@@ -16297,7 +16297,7 @@
       </p:sp>
       <p:sp>
         <p:nvSpPr>
-          <p:cNvPr id="1895423857" name="Shape 2"/>
+          <p:cNvPr id="1260698073" name="Shape 2"/>
           <p:cNvSpPr/>
           <p:nvPr/>
         </p:nvSpPr>
@@ -16332,7 +16332,7 @@
       </p:sp>
       <p:sp>
         <p:nvSpPr>
-          <p:cNvPr id="268940391" name="Text 3"/>
+          <p:cNvPr id="1719121782" name="Text 3"/>
           <p:cNvSpPr/>
           <p:nvPr/>
         </p:nvSpPr>
@@ -16372,7 +16372,7 @@
       </p:sp>
       <p:sp>
         <p:nvSpPr>
-          <p:cNvPr id="1107890406" name="Shape 4"/>
+          <p:cNvPr id="459819788" name="Shape 4"/>
           <p:cNvSpPr/>
           <p:nvPr/>
         </p:nvSpPr>
@@ -16407,7 +16407,7 @@
       </p:sp>
       <p:sp>
         <p:nvSpPr>
-          <p:cNvPr id="855727428" name="Text 5"/>
+          <p:cNvPr id="935896124" name="Text 5"/>
           <p:cNvSpPr/>
           <p:nvPr/>
         </p:nvSpPr>
@@ -16447,7 +16447,7 @@
       </p:sp>
       <p:sp>
         <p:nvSpPr>
-          <p:cNvPr id="1728231110" name="Shape 6"/>
+          <p:cNvPr id="68771805" name="Shape 6"/>
           <p:cNvSpPr/>
           <p:nvPr/>
         </p:nvSpPr>
@@ -16482,7 +16482,7 @@
       </p:sp>
       <p:sp>
         <p:nvSpPr>
-          <p:cNvPr id="1775270186" name="Text 7"/>
+          <p:cNvPr id="837461957" name="Text 7"/>
           <p:cNvSpPr/>
           <p:nvPr/>
         </p:nvSpPr>
@@ -16522,7 +16522,7 @@
       </p:sp>
       <p:sp>
         <p:nvSpPr>
-          <p:cNvPr id="872965948" name="Shape 8"/>
+          <p:cNvPr id="2068516429" name="Shape 8"/>
           <p:cNvSpPr/>
           <p:nvPr/>
         </p:nvSpPr>
@@ -16557,7 +16557,7 @@
       </p:sp>
       <p:sp>
         <p:nvSpPr>
-          <p:cNvPr id="1628237846" name="Text 9"/>
+          <p:cNvPr id="1032524085" name="Text 9"/>
           <p:cNvSpPr/>
           <p:nvPr/>
         </p:nvSpPr>
@@ -16597,7 +16597,7 @@
       </p:sp>
       <p:sp>
         <p:nvSpPr>
-          <p:cNvPr id="2044333791" name="Shape 10"/>
+          <p:cNvPr id="1894854265" name="Shape 10"/>
           <p:cNvSpPr/>
           <p:nvPr/>
         </p:nvSpPr>
@@ -16632,7 +16632,7 @@
       </p:sp>
       <p:sp>
         <p:nvSpPr>
-          <p:cNvPr id="1595979857" name="Text 11"/>
+          <p:cNvPr id="175558108" name="Text 11"/>
           <p:cNvSpPr/>
           <p:nvPr/>
         </p:nvSpPr>
@@ -16683,7 +16683,7 @@
       </p:sp>
       <p:sp>
         <p:nvSpPr>
-          <p:cNvPr id="315641068" name="Shape 12"/>
+          <p:cNvPr id="195361060" name="Shape 12"/>
           <p:cNvSpPr/>
           <p:nvPr/>
         </p:nvSpPr>
@@ -16718,7 +16718,7 @@
       </p:sp>
       <p:sp>
         <p:nvSpPr>
-          <p:cNvPr id="1858984854" name="Text 13"/>
+          <p:cNvPr id="339757777" name="Text 13"/>
           <p:cNvSpPr/>
           <p:nvPr/>
         </p:nvSpPr>
@@ -16758,7 +16758,7 @@
       </p:sp>
       <p:sp>
         <p:nvSpPr>
-          <p:cNvPr id="2071702848" name="Shape 14"/>
+          <p:cNvPr id="820490955" name="Shape 14"/>
           <p:cNvSpPr/>
           <p:nvPr/>
         </p:nvSpPr>
@@ -16793,7 +16793,7 @@
       </p:sp>
       <p:sp>
         <p:nvSpPr>
-          <p:cNvPr id="1744364552" name="Text 15"/>
+          <p:cNvPr id="1520542973" name="Text 15"/>
           <p:cNvSpPr/>
           <p:nvPr/>
         </p:nvSpPr>
@@ -16833,7 +16833,7 @@
       </p:sp>
       <p:sp>
         <p:nvSpPr>
-          <p:cNvPr id="859679778" name="Shape 16"/>
+          <p:cNvPr id="2103944274" name="Shape 16"/>
           <p:cNvSpPr/>
           <p:nvPr/>
         </p:nvSpPr>
@@ -16868,7 +16868,7 @@
       </p:sp>
       <p:sp>
         <p:nvSpPr>
-          <p:cNvPr id="604310073" name="Text 17"/>
+          <p:cNvPr id="1404969512" name="Text 17"/>
           <p:cNvSpPr/>
           <p:nvPr/>
         </p:nvSpPr>
@@ -16984,7 +16984,7 @@
       </p:sp>
       <p:sp>
         <p:nvSpPr>
-          <p:cNvPr id="899174146" name="Shape 18"/>
+          <p:cNvPr id="1890303727" name="Shape 18"/>
           <p:cNvSpPr/>
           <p:nvPr/>
         </p:nvSpPr>
@@ -17019,7 +17019,7 @@
       </p:sp>
       <p:sp>
         <p:nvSpPr>
-          <p:cNvPr id="1166726598" name="Text 19"/>
+          <p:cNvPr id="1288705526" name="Text 19"/>
           <p:cNvSpPr/>
           <p:nvPr/>
         </p:nvSpPr>
@@ -17070,7 +17070,7 @@
       </p:sp>
       <p:sp>
         <p:nvSpPr>
-          <p:cNvPr id="276814742" name="Shape 20"/>
+          <p:cNvPr id="1480881850" name="Shape 20"/>
           <p:cNvSpPr/>
           <p:nvPr/>
         </p:nvSpPr>
@@ -17105,7 +17105,7 @@
       </p:sp>
       <p:sp>
         <p:nvSpPr>
-          <p:cNvPr id="1262699013" name="Text 21"/>
+          <p:cNvPr id="1471078149" name="Text 21"/>
           <p:cNvSpPr/>
           <p:nvPr/>
         </p:nvSpPr>
@@ -17145,7 +17145,7 @@
       </p:sp>
       <p:sp>
         <p:nvSpPr>
-          <p:cNvPr id="1346816014" name="Shape 22"/>
+          <p:cNvPr id="708172871" name="Shape 22"/>
           <p:cNvSpPr/>
           <p:nvPr/>
         </p:nvSpPr>
@@ -17180,7 +17180,7 @@
       </p:sp>
       <p:sp>
         <p:nvSpPr>
-          <p:cNvPr id="526710619" name="Text 23"/>
+          <p:cNvPr id="689119752" name="Text 23"/>
           <p:cNvSpPr/>
           <p:nvPr/>
         </p:nvSpPr>
@@ -17220,7 +17220,7 @@
       </p:sp>
       <p:sp>
         <p:nvSpPr>
-          <p:cNvPr id="1675955335" name="Shape 24"/>
+          <p:cNvPr id="948338344" name="Shape 24"/>
           <p:cNvSpPr/>
           <p:nvPr/>
         </p:nvSpPr>
@@ -17255,7 +17255,7 @@
       </p:sp>
       <p:sp>
         <p:nvSpPr>
-          <p:cNvPr id="530345915" name="Text 25"/>
+          <p:cNvPr id="701355186" name="Text 25"/>
           <p:cNvSpPr/>
           <p:nvPr/>
         </p:nvSpPr>
@@ -17350,7 +17350,7 @@
       </p:sp>
       <p:sp>
         <p:nvSpPr>
-          <p:cNvPr id="1665574160" name="Shape 26"/>
+          <p:cNvPr id="635943062" name="Shape 26"/>
           <p:cNvSpPr/>
           <p:nvPr/>
         </p:nvSpPr>
@@ -17385,7 +17385,7 @@
       </p:sp>
       <p:sp>
         <p:nvSpPr>
-          <p:cNvPr id="1413122723" name="Text 27"/>
+          <p:cNvPr id="306292456" name="Text 27"/>
           <p:cNvSpPr/>
           <p:nvPr/>
         </p:nvSpPr>
@@ -17436,7 +17436,7 @@
       </p:sp>
       <p:sp>
         <p:nvSpPr>
-          <p:cNvPr id="744823054" name="Shape 28"/>
+          <p:cNvPr id="248532303" name="Shape 28"/>
           <p:cNvSpPr/>
           <p:nvPr/>
         </p:nvSpPr>
@@ -17471,7 +17471,7 @@
       </p:sp>
       <p:sp>
         <p:nvSpPr>
-          <p:cNvPr id="486835652" name="Text 29"/>
+          <p:cNvPr id="494290569" name="Text 29"/>
           <p:cNvSpPr/>
           <p:nvPr/>
         </p:nvSpPr>
@@ -17511,7 +17511,7 @@
       </p:sp>
       <p:sp>
         <p:nvSpPr>
-          <p:cNvPr id="250903888" name="Shape 30"/>
+          <p:cNvPr id="1426113234" name="Shape 30"/>
           <p:cNvSpPr/>
           <p:nvPr/>
         </p:nvSpPr>
@@ -17546,7 +17546,7 @@
       </p:sp>
       <p:sp>
         <p:nvSpPr>
-          <p:cNvPr id="1222167120" name="Text 31"/>
+          <p:cNvPr id="1737836688" name="Text 31"/>
           <p:cNvSpPr/>
           <p:nvPr/>
         </p:nvSpPr>
@@ -17586,7 +17586,7 @@
       </p:sp>
       <p:sp>
         <p:nvSpPr>
-          <p:cNvPr id="209717801" name="Shape 32"/>
+          <p:cNvPr id="34029844" name="Shape 32"/>
           <p:cNvSpPr/>
           <p:nvPr/>
         </p:nvSpPr>
@@ -17621,7 +17621,7 @@
       </p:sp>
       <p:sp>
         <p:nvSpPr>
-          <p:cNvPr id="1163556941" name="Text 33"/>
+          <p:cNvPr id="1781819250" name="Text 33"/>
           <p:cNvSpPr/>
           <p:nvPr/>
         </p:nvSpPr>
@@ -17672,7 +17672,7 @@
       </p:sp>
       <p:sp>
         <p:nvSpPr>
-          <p:cNvPr id="1350583074" name="Shape 34"/>
+          <p:cNvPr id="408836649" name="Shape 34"/>
           <p:cNvSpPr/>
           <p:nvPr/>
         </p:nvSpPr>
@@ -17707,7 +17707,7 @@
       </p:sp>
       <p:sp>
         <p:nvSpPr>
-          <p:cNvPr id="1160569138" name="Text 35"/>
+          <p:cNvPr id="261575352" name="Text 35"/>
           <p:cNvSpPr/>
           <p:nvPr/>
         </p:nvSpPr>
@@ -17747,7 +17747,7 @@
       </p:sp>
       <p:sp>
         <p:nvSpPr>
-          <p:cNvPr id="645155426" name="Shape 36"/>
+          <p:cNvPr id="1270258783" name="Shape 36"/>
           <p:cNvSpPr/>
           <p:nvPr/>
         </p:nvSpPr>
@@ -17782,7 +17782,7 @@
       </p:sp>
       <p:sp>
         <p:nvSpPr>
-          <p:cNvPr id="373941413" name="Text 37"/>
+          <p:cNvPr id="612482453" name="Text 37"/>
           <p:cNvSpPr/>
           <p:nvPr/>
         </p:nvSpPr>
@@ -17816,24 +17816,13 @@
               </a:rPr>
               <a:t>REST</a:t>
             </a:r>
-            <a:r>
-              <a:rPr lang="it-IT" sz="1100">
-                <a:solidFill>
-                  <a:srgbClr val="595959"/>
-                </a:solidFill>
-                <a:latin typeface="Calibri"/>
-                <a:ea typeface="Calibri"/>
-                <a:cs typeface="Calibri"/>
-              </a:rPr>
-              <a:t> async</a:t>
-            </a:r>
             <a:endParaRPr lang="en-US" sz="1100"/>
           </a:p>
         </p:txBody>
       </p:sp>
       <p:sp>
         <p:nvSpPr>
-          <p:cNvPr id="842330806" name="Shape 38"/>
+          <p:cNvPr id="1211207687" name="Shape 38"/>
           <p:cNvSpPr/>
           <p:nvPr/>
         </p:nvSpPr>
@@ -17868,7 +17857,7 @@
       </p:sp>
       <p:sp>
         <p:nvSpPr>
-          <p:cNvPr id="1770419986" name="Text 39"/>
+          <p:cNvPr id="1329414501" name="Text 39"/>
           <p:cNvSpPr/>
           <p:nvPr/>
         </p:nvSpPr>
@@ -17908,7 +17897,7 @@
       </p:sp>
       <p:sp>
         <p:nvSpPr>
-          <p:cNvPr id="558879650" name="Shape 40"/>
+          <p:cNvPr id="435991905" name="Shape 40"/>
           <p:cNvSpPr/>
           <p:nvPr/>
         </p:nvSpPr>
@@ -17943,7 +17932,7 @@
       </p:sp>
       <p:sp>
         <p:nvSpPr>
-          <p:cNvPr id="1136388467" name="Text 41"/>
+          <p:cNvPr id="1727218129" name="Text 41"/>
           <p:cNvSpPr/>
           <p:nvPr/>
         </p:nvSpPr>
@@ -17986,18 +17975,7 @@
                 <a:ea typeface="Calibri"/>
                 <a:cs typeface="Calibri"/>
               </a:rPr>
-              <a:t>- </a:t>
-            </a:r>
-            <a:r>
-              <a:rPr lang="en-US" sz="1100">
-                <a:solidFill>
-                  <a:srgbClr val="595959"/>
-                </a:solidFill>
-                <a:latin typeface="Calibri"/>
-                <a:ea typeface="Calibri"/>
-                <a:cs typeface="Calibri"/>
-              </a:rPr>
-              <a:t>same async model as Laboratorio</a:t>
+              <a:t>– </a:t>
             </a:r>
             <a:r>
               <a:rPr lang="it-IT" sz="1100">
@@ -18008,7 +17986,7 @@
                 <a:ea typeface="Calibri"/>
                 <a:cs typeface="Calibri"/>
               </a:rPr>
-              <a:t> Service.</a:t>
+              <a:t>Exams are already done, only the resulting images are sent.</a:t>
             </a:r>
             <a:endParaRPr lang="en-US" sz="1100"/>
           </a:p>
@@ -18016,7 +17994,7 @@
       </p:sp>
       <p:sp>
         <p:nvSpPr>
-          <p:cNvPr id="432627972" name="Text 42"/>
+          <p:cNvPr id="392129947" name="Text 42"/>
           <p:cNvSpPr/>
           <p:nvPr/>
         </p:nvSpPr>
@@ -18085,7 +18063,7 @@
       </p:grpSpPr>
       <p:sp>
         <p:nvSpPr>
-          <p:cNvPr id="1458725894" name="Text 0"/>
+          <p:cNvPr id="1746225592" name="Text 0"/>
           <p:cNvSpPr/>
           <p:nvPr/>
         </p:nvSpPr>
@@ -18125,7 +18103,7 @@
       </p:sp>
       <p:sp>
         <p:nvSpPr>
-          <p:cNvPr id="2097708445" name="Shape 1"/>
+          <p:cNvPr id="1937505551" name="Shape 1"/>
           <p:cNvSpPr/>
           <p:nvPr/>
         </p:nvSpPr>
@@ -18155,7 +18133,7 @@
       </p:sp>
       <p:sp>
         <p:nvSpPr>
-          <p:cNvPr id="1829470638" name="Shape 2"/>
+          <p:cNvPr id="1486806582" name="Shape 2"/>
           <p:cNvSpPr/>
           <p:nvPr/>
         </p:nvSpPr>
@@ -18190,7 +18168,7 @@
       </p:sp>
       <p:sp>
         <p:nvSpPr>
-          <p:cNvPr id="1704213276" name="Text 3"/>
+          <p:cNvPr id="109272324" name="Text 3"/>
           <p:cNvSpPr/>
           <p:nvPr/>
         </p:nvSpPr>
@@ -18230,7 +18208,7 @@
       </p:sp>
       <p:sp>
         <p:nvSpPr>
-          <p:cNvPr id="1310798287" name="Shape 4"/>
+          <p:cNvPr id="983519055" name="Shape 4"/>
           <p:cNvSpPr/>
           <p:nvPr/>
         </p:nvSpPr>
@@ -18265,7 +18243,7 @@
       </p:sp>
       <p:sp>
         <p:nvSpPr>
-          <p:cNvPr id="1776446068" name="Text 5"/>
+          <p:cNvPr id="1901909971" name="Text 5"/>
           <p:cNvSpPr/>
           <p:nvPr/>
         </p:nvSpPr>
@@ -18305,7 +18283,7 @@
       </p:sp>
       <p:sp>
         <p:nvSpPr>
-          <p:cNvPr id="1692948499" name="Shape 6"/>
+          <p:cNvPr id="718624972" name="Shape 6"/>
           <p:cNvSpPr/>
           <p:nvPr/>
         </p:nvSpPr>
@@ -18340,7 +18318,7 @@
       </p:sp>
       <p:sp>
         <p:nvSpPr>
-          <p:cNvPr id="1527936962" name="Text 7"/>
+          <p:cNvPr id="1717489136" name="Text 7"/>
           <p:cNvSpPr/>
           <p:nvPr/>
         </p:nvSpPr>
@@ -18380,7 +18358,7 @@
       </p:sp>
       <p:sp>
         <p:nvSpPr>
-          <p:cNvPr id="146450562" name="Shape 8"/>
+          <p:cNvPr id="2067453436" name="Shape 8"/>
           <p:cNvSpPr/>
           <p:nvPr/>
         </p:nvSpPr>
@@ -18415,7 +18393,7 @@
       </p:sp>
       <p:sp>
         <p:nvSpPr>
-          <p:cNvPr id="2017804515" name="Text 9"/>
+          <p:cNvPr id="7787552" name="Text 9"/>
           <p:cNvSpPr/>
           <p:nvPr/>
         </p:nvSpPr>
@@ -18455,7 +18433,7 @@
       </p:sp>
       <p:sp>
         <p:nvSpPr>
-          <p:cNvPr id="1851710657" name="Shape 10"/>
+          <p:cNvPr id="1031119483" name="Shape 10"/>
           <p:cNvSpPr/>
           <p:nvPr/>
         </p:nvSpPr>
@@ -18490,7 +18468,7 @@
       </p:sp>
       <p:sp>
         <p:nvSpPr>
-          <p:cNvPr id="943248749" name="Text 11"/>
+          <p:cNvPr id="1091378863" name="Text 11"/>
           <p:cNvSpPr/>
           <p:nvPr/>
         </p:nvSpPr>
@@ -18548,7 +18526,7 @@
       </p:sp>
       <p:sp>
         <p:nvSpPr>
-          <p:cNvPr id="1701708771" name="Shape 12"/>
+          <p:cNvPr id="1068608723" name="Shape 12"/>
           <p:cNvSpPr/>
           <p:nvPr/>
         </p:nvSpPr>
@@ -18583,7 +18561,7 @@
       </p:sp>
       <p:sp>
         <p:nvSpPr>
-          <p:cNvPr id="1057433080" name="Text 13"/>
+          <p:cNvPr id="768168248" name="Text 13"/>
           <p:cNvSpPr/>
           <p:nvPr/>
         </p:nvSpPr>
@@ -18623,7 +18601,7 @@
       </p:sp>
       <p:sp>
         <p:nvSpPr>
-          <p:cNvPr id="774918762" name="Shape 14"/>
+          <p:cNvPr id="1897880171" name="Shape 14"/>
           <p:cNvSpPr/>
           <p:nvPr/>
         </p:nvSpPr>
@@ -18658,7 +18636,7 @@
       </p:sp>
       <p:sp>
         <p:nvSpPr>
-          <p:cNvPr id="1495825899" name="Text 15"/>
+          <p:cNvPr id="927857644" name="Text 15"/>
           <p:cNvSpPr/>
           <p:nvPr/>
         </p:nvSpPr>
@@ -18760,7 +18738,7 @@
       </p:sp>
       <p:sp>
         <p:nvSpPr>
-          <p:cNvPr id="448807774" name="Shape 16"/>
+          <p:cNvPr id="329016977" name="Shape 16"/>
           <p:cNvSpPr/>
           <p:nvPr/>
         </p:nvSpPr>
@@ -18795,7 +18773,7 @@
       </p:sp>
       <p:sp>
         <p:nvSpPr>
-          <p:cNvPr id="962394464" name="Text 17"/>
+          <p:cNvPr id="1666592962" name="Text 17"/>
           <p:cNvSpPr/>
           <p:nvPr/>
         </p:nvSpPr>
@@ -19020,7 +18998,7 @@
       </p:sp>
       <p:sp>
         <p:nvSpPr>
-          <p:cNvPr id="499975514" name="Shape 18"/>
+          <p:cNvPr id="1128296764" name="Shape 18"/>
           <p:cNvSpPr/>
           <p:nvPr/>
         </p:nvSpPr>
@@ -19055,7 +19033,7 @@
       </p:sp>
       <p:sp>
         <p:nvSpPr>
-          <p:cNvPr id="468469552" name="Text 19"/>
+          <p:cNvPr id="736479318" name="Text 19"/>
           <p:cNvSpPr/>
           <p:nvPr/>
         </p:nvSpPr>
@@ -19113,7 +19091,7 @@
       </p:sp>
       <p:sp>
         <p:nvSpPr>
-          <p:cNvPr id="973835694" name="Shape 20"/>
+          <p:cNvPr id="1486941252" name="Shape 20"/>
           <p:cNvSpPr/>
           <p:nvPr/>
         </p:nvSpPr>
@@ -19148,7 +19126,7 @@
       </p:sp>
       <p:sp>
         <p:nvSpPr>
-          <p:cNvPr id="134332666" name="Text 21"/>
+          <p:cNvPr id="65356529" name="Text 21"/>
           <p:cNvSpPr/>
           <p:nvPr/>
         </p:nvSpPr>
@@ -19188,7 +19166,7 @@
       </p:sp>
       <p:sp>
         <p:nvSpPr>
-          <p:cNvPr id="1147797485" name="Shape 22"/>
+          <p:cNvPr id="12850482" name="Shape 22"/>
           <p:cNvSpPr/>
           <p:nvPr/>
         </p:nvSpPr>
@@ -19223,7 +19201,7 @@
       </p:sp>
       <p:sp>
         <p:nvSpPr>
-          <p:cNvPr id="2121505319" name="Text 23"/>
+          <p:cNvPr id="1042321193" name="Text 23"/>
           <p:cNvSpPr/>
           <p:nvPr/>
         </p:nvSpPr>
@@ -19325,7 +19303,7 @@
       </p:sp>
       <p:sp>
         <p:nvSpPr>
-          <p:cNvPr id="1582092092" name="Shape 24"/>
+          <p:cNvPr id="222447723" name="Shape 24"/>
           <p:cNvSpPr/>
           <p:nvPr/>
         </p:nvSpPr>
@@ -19360,7 +19338,7 @@
       </p:sp>
       <p:sp>
         <p:nvSpPr>
-          <p:cNvPr id="680633928" name="Text 25"/>
+          <p:cNvPr id="2031734248" name="Text 25"/>
           <p:cNvSpPr/>
           <p:nvPr/>
         </p:nvSpPr>
@@ -19455,7 +19433,7 @@
       </p:sp>
       <p:sp>
         <p:nvSpPr>
-          <p:cNvPr id="1471890208" name="Shape 26"/>
+          <p:cNvPr id="2075653385" name="Shape 26"/>
           <p:cNvSpPr/>
           <p:nvPr/>
         </p:nvSpPr>
@@ -19490,7 +19468,7 @@
       </p:sp>
       <p:sp>
         <p:nvSpPr>
-          <p:cNvPr id="717618246" name="Text 27"/>
+          <p:cNvPr id="1326442535" name="Text 27"/>
           <p:cNvSpPr/>
           <p:nvPr/>
         </p:nvSpPr>
@@ -19548,7 +19526,7 @@
       </p:sp>
       <p:sp>
         <p:nvSpPr>
-          <p:cNvPr id="176276464" name="Shape 28"/>
+          <p:cNvPr id="1996994213" name="Shape 28"/>
           <p:cNvSpPr/>
           <p:nvPr/>
         </p:nvSpPr>
@@ -19583,7 +19561,7 @@
       </p:sp>
       <p:sp>
         <p:nvSpPr>
-          <p:cNvPr id="1219470732" name="Text 29"/>
+          <p:cNvPr id="804941289" name="Text 29"/>
           <p:cNvSpPr/>
           <p:nvPr/>
         </p:nvSpPr>
@@ -19623,7 +19601,7 @@
       </p:sp>
       <p:sp>
         <p:nvSpPr>
-          <p:cNvPr id="1962946022" name="Shape 30"/>
+          <p:cNvPr id="1236487815" name="Shape 30"/>
           <p:cNvSpPr/>
           <p:nvPr/>
         </p:nvSpPr>
@@ -19658,7 +19636,7 @@
       </p:sp>
       <p:sp>
         <p:nvSpPr>
-          <p:cNvPr id="1099422827" name="Text 31"/>
+          <p:cNvPr id="360215457" name="Text 31"/>
           <p:cNvSpPr/>
           <p:nvPr/>
         </p:nvSpPr>
@@ -19748,7 +19726,7 @@
       </p:sp>
       <p:sp>
         <p:nvSpPr>
-          <p:cNvPr id="273236138" name="Shape 32"/>
+          <p:cNvPr id="779600126" name="Shape 32"/>
           <p:cNvSpPr/>
           <p:nvPr/>
         </p:nvSpPr>
@@ -19783,7 +19761,7 @@
       </p:sp>
       <p:sp>
         <p:nvSpPr>
-          <p:cNvPr id="192052362" name="Text 33"/>
+          <p:cNvPr id="1962521570" name="Text 33"/>
           <p:cNvSpPr/>
           <p:nvPr/>
         </p:nvSpPr>
@@ -20020,7 +19998,7 @@
       </p:sp>
       <p:sp>
         <p:nvSpPr>
-          <p:cNvPr id="1329106677" name="Text 34"/>
+          <p:cNvPr id="364593701" name="Text 34"/>
           <p:cNvSpPr/>
           <p:nvPr/>
         </p:nvSpPr>

--- a/docs/HealthSOA_Presentation.pptx
+++ b/docs/HealthSOA_Presentation.pptx
@@ -1,30 +1,30 @@
 
 <file path=ppt/presentation.xml><?xml version="1.0" encoding="utf-8"?>
-<p:presentation xmlns:a="http://schemas.openxmlformats.org/drawingml/2006/main" xmlns:r="http://schemas.openxmlformats.org/officeDocument/2006/relationships" xmlns:p="http://schemas.openxmlformats.org/presentationml/2006/main" xmlns:m="http://schemas.openxmlformats.org/officeDocument/2006/math" xmlns:w="http://schemas.openxmlformats.org/wordprocessingml/2006/main" autoCompressPictures="0" saveSubsetFonts="1">
+<p:presentation xmlns:a="http://schemas.openxmlformats.org/drawingml/2006/main" xmlns:r="http://schemas.openxmlformats.org/officeDocument/2006/relationships" xmlns:p="http://schemas.openxmlformats.org/presentationml/2006/main" saveSubsetFonts="1" autoCompressPictures="0">
   <p:sldMasterIdLst>
     <p:sldMasterId id="2147483648" r:id="rId1"/>
   </p:sldMasterIdLst>
   <p:notesMasterIdLst>
-    <p:notesMasterId r:id="rId21"/>
+    <p:notesMasterId r:id="rId19"/>
   </p:notesMasterIdLst>
   <p:sldIdLst>
-    <p:sldId id="256" r:id="rId4"/>
-    <p:sldId id="257" r:id="rId5"/>
-    <p:sldId id="258" r:id="rId6"/>
-    <p:sldId id="259" r:id="rId7"/>
-    <p:sldId id="260" r:id="rId8"/>
-    <p:sldId id="261" r:id="rId9"/>
-    <p:sldId id="262" r:id="rId10"/>
-    <p:sldId id="263" r:id="rId11"/>
-    <p:sldId id="264" r:id="rId12"/>
-    <p:sldId id="265" r:id="rId13"/>
-    <p:sldId id="266" r:id="rId14"/>
-    <p:sldId id="267" r:id="rId15"/>
-    <p:sldId id="268" r:id="rId16"/>
-    <p:sldId id="269" r:id="rId17"/>
-    <p:sldId id="270" r:id="rId18"/>
-    <p:sldId id="271" r:id="rId19"/>
-    <p:sldId id="272" r:id="rId20"/>
+    <p:sldId id="256" r:id="rId2"/>
+    <p:sldId id="257" r:id="rId3"/>
+    <p:sldId id="258" r:id="rId4"/>
+    <p:sldId id="259" r:id="rId5"/>
+    <p:sldId id="260" r:id="rId6"/>
+    <p:sldId id="261" r:id="rId7"/>
+    <p:sldId id="262" r:id="rId8"/>
+    <p:sldId id="263" r:id="rId9"/>
+    <p:sldId id="264" r:id="rId10"/>
+    <p:sldId id="265" r:id="rId11"/>
+    <p:sldId id="266" r:id="rId12"/>
+    <p:sldId id="267" r:id="rId13"/>
+    <p:sldId id="268" r:id="rId14"/>
+    <p:sldId id="269" r:id="rId15"/>
+    <p:sldId id="270" r:id="rId16"/>
+    <p:sldId id="271" r:id="rId17"/>
+    <p:sldId id="272" r:id="rId18"/>
   </p:sldIdLst>
   <p:sldSz cx="9144000" cy="5143500" type="screen16x9"/>
   <p:notesSz cx="5143500" cy="9144000"/>
@@ -120,12 +120,28 @@
       </a:defRPr>
     </a:lvl9pPr>
   </p:defaultTextStyle>
+  <p:extLst>
+    <p:ext uri="{EFAFB233-063F-42B5-8137-9DF3F51BA10A}">
+      <p15:sldGuideLst xmlns:p15="http://schemas.microsoft.com/office/powerpoint/2012/main">
+        <p15:guide id="1" pos="2880">
+          <p15:clr>
+            <a:srgbClr val="A4A3A4"/>
+          </p15:clr>
+        </p15:guide>
+        <p15:guide id="2" orient="horz" pos="1620">
+          <p15:clr>
+            <a:srgbClr val="A4A3A4"/>
+          </p15:clr>
+        </p15:guide>
+      </p15:sldGuideLst>
+    </p:ext>
+  </p:extLst>
 </p:presentation>
 </file>
 
 <file path=ppt/notesMasters/notesMaster1.xml><?xml version="1.0" encoding="utf-8"?>
 <p:notesMaster xmlns:a="http://schemas.openxmlformats.org/drawingml/2006/main" xmlns:r="http://schemas.openxmlformats.org/officeDocument/2006/relationships" xmlns:p="http://schemas.openxmlformats.org/presentationml/2006/main">
-  <p:cSld name="">
+  <p:cSld>
     <p:bg>
       <p:bgRef idx="1001">
         <a:schemeClr val="bg1"/>
@@ -244,8 +260,8 @@
 </file>
 
 <file path=ppt/notesSlides/notesSlide1.xml><?xml version="1.0" encoding="utf-8"?>
-<p:notes xmlns:a="http://schemas.openxmlformats.org/drawingml/2006/main" xmlns:r="http://schemas.openxmlformats.org/officeDocument/2006/relationships" xmlns:p="http://schemas.openxmlformats.org/presentationml/2006/main" xmlns:m="http://schemas.openxmlformats.org/officeDocument/2006/math" xmlns:w="http://schemas.openxmlformats.org/wordprocessingml/2006/main">
-  <p:cSld name="">
+<p:notes xmlns:a="http://schemas.openxmlformats.org/drawingml/2006/main" xmlns:r="http://schemas.openxmlformats.org/officeDocument/2006/relationships" xmlns:p="http://schemas.openxmlformats.org/presentationml/2006/main">
+  <p:cSld>
     <p:spTree>
       <p:nvGrpSpPr>
         <p:cNvPr id="1" name=""/>
@@ -264,7 +280,7 @@
         <p:nvSpPr>
           <p:cNvPr id="334693278" name="Slide Image Placeholder 1"/>
           <p:cNvSpPr>
-            <a:spLocks noChangeAspect="1" noGrp="1" noRot="1"/>
+            <a:spLocks noGrp="1" noRot="1" noChangeAspect="1"/>
           </p:cNvSpPr>
           <p:nvPr>
             <p:ph type="sldImg"/>
@@ -329,8 +345,8 @@
 </file>
 
 <file path=ppt/notesSlides/notesSlide10.xml><?xml version="1.0" encoding="utf-8"?>
-<p:notes xmlns:a="http://schemas.openxmlformats.org/drawingml/2006/main" xmlns:r="http://schemas.openxmlformats.org/officeDocument/2006/relationships" xmlns:p="http://schemas.openxmlformats.org/presentationml/2006/main" xmlns:m="http://schemas.openxmlformats.org/officeDocument/2006/math" xmlns:w="http://schemas.openxmlformats.org/wordprocessingml/2006/main">
-  <p:cSld name="">
+<p:notes xmlns:a="http://schemas.openxmlformats.org/drawingml/2006/main" xmlns:r="http://schemas.openxmlformats.org/officeDocument/2006/relationships" xmlns:p="http://schemas.openxmlformats.org/presentationml/2006/main">
+  <p:cSld>
     <p:spTree>
       <p:nvGrpSpPr>
         <p:cNvPr id="1" name=""/>
@@ -349,7 +365,7 @@
         <p:nvSpPr>
           <p:cNvPr id="5829018" name="Slide Image Placeholder 1"/>
           <p:cNvSpPr>
-            <a:spLocks noChangeAspect="1" noGrp="1" noRot="1"/>
+            <a:spLocks noGrp="1" noRot="1" noChangeAspect="1"/>
           </p:cNvSpPr>
           <p:nvPr>
             <p:ph type="sldImg"/>
@@ -391,7 +407,6 @@
               <a:rPr sz="1400"/>
               <a:t>the components I just described.</a:t>
             </a:r>
-            <a:endParaRPr sz="1400"/>
           </a:p>
           <a:p>
             <a:pPr marL="239821" indent="-239821">
@@ -405,11 +420,7 @@
             </a:r>
             <a:r>
               <a:rPr lang="it-IT" sz="1400"/>
-              <a:t>can see</a:t>
-            </a:r>
-            <a:r>
-              <a:rPr lang="it-IT" sz="1400"/>
-              <a:t> </a:t>
+              <a:t>can see </a:t>
             </a:r>
             <a:r>
               <a:rPr sz="1400"/>
@@ -445,17 +456,12 @@
             </a:r>
             <a:r>
               <a:rPr lang="it-IT" sz="1400"/>
-              <a:t>each one of them with all of their</a:t>
-            </a:r>
-            <a:r>
-              <a:rPr lang="it-IT" sz="1400"/>
-              <a:t> </a:t>
+              <a:t>each one of them with all of their </a:t>
             </a:r>
             <a:r>
               <a:rPr sz="1400"/>
               <a:t>attributes on screen.</a:t>
             </a:r>
-            <a:endParaRPr sz="1400"/>
           </a:p>
           <a:p>
             <a:pPr marL="239821" indent="-239821">
@@ -477,11 +483,7 @@
             </a:r>
             <a:r>
               <a:rPr lang="it-IT" sz="1400"/>
-              <a:t> </a:t>
-            </a:r>
-            <a:r>
-              <a:rPr lang="it-IT" sz="1400"/>
-              <a:t>T</a:t>
+              <a:t> T</a:t>
             </a:r>
             <a:r>
               <a:rPr sz="1400"/>
@@ -489,15 +491,7 @@
             </a:r>
             <a:r>
               <a:rPr lang="it-IT" sz="1400"/>
-              <a:t>composed</a:t>
-            </a:r>
-            <a:r>
-              <a:rPr lang="it-IT" sz="1400"/>
-              <a:t> data</a:t>
-            </a:r>
-            <a:r>
-              <a:rPr lang="it-IT" sz="1400"/>
-              <a:t>, respectively managed by the Diagnostic and Clinical aggregators.</a:t>
+              <a:t>composed data, respectively managed by the Diagnostic and Clinical aggregators.</a:t>
             </a:r>
             <a:endParaRPr sz="1400"/>
           </a:p>
@@ -565,13 +559,8 @@
             </a:r>
             <a:r>
               <a:rPr sz="1400"/>
-              <a:t> test value is criti</a:t>
-            </a:r>
-            <a:r>
-              <a:rPr sz="1400"/>
-              <a:t>cally bad, the system generates a warning flag.</a:t>
-            </a:r>
-            <a:endParaRPr sz="1400"/>
+              <a:t> test value is critically bad, the system generates a warning flag.</a:t>
+            </a:r>
           </a:p>
           <a:p>
             <a:pPr marL="239821" indent="-239821">
@@ -585,11 +574,7 @@
             </a:r>
             <a:r>
               <a:rPr lang="it-IT" sz="1400"/>
-              <a:t>, which gives</a:t>
-            </a:r>
-            <a:r>
-              <a:rPr lang="it-IT" sz="1400"/>
-              <a:t> to </a:t>
+              <a:t>, which gives to </a:t>
             </a:r>
             <a:r>
               <a:rPr sz="1400"/>
@@ -597,11 +582,7 @@
             </a:r>
             <a:r>
               <a:rPr lang="it-IT" sz="1400"/>
-              <a:t>, and it can assume 3 values</a:t>
-            </a:r>
-            <a:r>
-              <a:rPr lang="it-IT" sz="1400"/>
-              <a:t>: “</a:t>
+              <a:t>, and it can assume 3 values: “</a:t>
             </a:r>
             <a:r>
               <a:rPr sz="1400"/>
@@ -641,11 +622,7 @@
             </a:r>
             <a:r>
               <a:rPr lang="it-IT" sz="1400"/>
-              <a:t>”</a:t>
-            </a:r>
-            <a:r>
-              <a:rPr lang="it-IT" sz="1400"/>
-              <a:t>,</a:t>
+              <a:t>”,</a:t>
             </a:r>
             <a:r>
               <a:rPr sz="1400"/>
@@ -690,8 +667,8 @@
 </file>
 
 <file path=ppt/notesSlides/notesSlide11.xml><?xml version="1.0" encoding="utf-8"?>
-<p:notes xmlns:a="http://schemas.openxmlformats.org/drawingml/2006/main" xmlns:r="http://schemas.openxmlformats.org/officeDocument/2006/relationships" xmlns:p="http://schemas.openxmlformats.org/presentationml/2006/main" xmlns:m="http://schemas.openxmlformats.org/officeDocument/2006/math" xmlns:w="http://schemas.openxmlformats.org/wordprocessingml/2006/main">
-  <p:cSld name="">
+<p:notes xmlns:a="http://schemas.openxmlformats.org/drawingml/2006/main" xmlns:r="http://schemas.openxmlformats.org/officeDocument/2006/relationships" xmlns:p="http://schemas.openxmlformats.org/presentationml/2006/main">
+  <p:cSld>
     <p:spTree>
       <p:nvGrpSpPr>
         <p:cNvPr id="1" name=""/>
@@ -710,7 +687,7 @@
         <p:nvSpPr>
           <p:cNvPr id="2007319037" name="Slide Image Placeholder 1"/>
           <p:cNvSpPr>
-            <a:spLocks noChangeAspect="1" noGrp="1" noRot="1"/>
+            <a:spLocks noGrp="1" noRot="1" noChangeAspect="1"/>
           </p:cNvSpPr>
           <p:nvPr>
             <p:ph type="sldImg"/>
@@ -775,8 +752,8 @@
 </file>
 
 <file path=ppt/notesSlides/notesSlide12.xml><?xml version="1.0" encoding="utf-8"?>
-<p:notes xmlns:a="http://schemas.openxmlformats.org/drawingml/2006/main" xmlns:r="http://schemas.openxmlformats.org/officeDocument/2006/relationships" xmlns:p="http://schemas.openxmlformats.org/presentationml/2006/main" xmlns:m="http://schemas.openxmlformats.org/officeDocument/2006/math" xmlns:w="http://schemas.openxmlformats.org/wordprocessingml/2006/main">
-  <p:cSld name="">
+<p:notes xmlns:a="http://schemas.openxmlformats.org/drawingml/2006/main" xmlns:r="http://schemas.openxmlformats.org/officeDocument/2006/relationships" xmlns:p="http://schemas.openxmlformats.org/presentationml/2006/main">
+  <p:cSld>
     <p:spTree>
       <p:nvGrpSpPr>
         <p:cNvPr id="1" name=""/>
@@ -795,7 +772,7 @@
         <p:nvSpPr>
           <p:cNvPr id="1527010174" name="Slide Image Placeholder 1"/>
           <p:cNvSpPr>
-            <a:spLocks noChangeAspect="1" noGrp="1" noRot="1"/>
+            <a:spLocks noGrp="1" noRot="1" noChangeAspect="1"/>
           </p:cNvSpPr>
           <p:nvPr>
             <p:ph type="sldImg"/>
@@ -821,7 +798,147 @@
             <a:pPr>
               <a:defRPr/>
             </a:pPr>
-            <a:endParaRPr lang="en-US"/>
+            <a:r>
+              <a:rPr lang="it-IT" dirty="0"/>
+              <a:t>The goal of </a:t>
+            </a:r>
+            <a:r>
+              <a:rPr lang="it-IT" dirty="0" err="1"/>
+              <a:t>HealthSOA</a:t>
+            </a:r>
+            <a:r>
+              <a:rPr lang="it-IT" dirty="0"/>
+              <a:t> </a:t>
+            </a:r>
+            <a:r>
+              <a:rPr lang="it-IT" dirty="0" err="1"/>
+              <a:t>is</a:t>
+            </a:r>
+            <a:r>
+              <a:rPr lang="it-IT" dirty="0"/>
+              <a:t> to assist </a:t>
+            </a:r>
+            <a:r>
+              <a:rPr lang="it-IT" dirty="0" err="1"/>
+              <a:t>healthcare</a:t>
+            </a:r>
+            <a:r>
+              <a:rPr lang="it-IT" dirty="0"/>
+              <a:t> </a:t>
+            </a:r>
+            <a:r>
+              <a:rPr lang="it-IT" dirty="0" err="1"/>
+              <a:t>professionals</a:t>
+            </a:r>
+            <a:r>
+              <a:rPr lang="it-IT" dirty="0"/>
+              <a:t> in </a:t>
+            </a:r>
+            <a:r>
+              <a:rPr lang="it-IT" dirty="0" err="1"/>
+              <a:t>collecting</a:t>
+            </a:r>
+            <a:r>
+              <a:rPr lang="it-IT" dirty="0"/>
+              <a:t> and </a:t>
+            </a:r>
+            <a:r>
+              <a:rPr lang="it-IT" dirty="0" err="1"/>
+              <a:t>analysing</a:t>
+            </a:r>
+            <a:r>
+              <a:rPr lang="it-IT" dirty="0"/>
+              <a:t> </a:t>
+            </a:r>
+            <a:r>
+              <a:rPr lang="it-IT" dirty="0" err="1"/>
+              <a:t>all</a:t>
+            </a:r>
+            <a:r>
+              <a:rPr lang="it-IT" dirty="0"/>
+              <a:t> the clinical information </a:t>
+            </a:r>
+            <a:r>
+              <a:rPr lang="it-IT" dirty="0" err="1"/>
+              <a:t>required</a:t>
+            </a:r>
+            <a:r>
+              <a:rPr lang="it-IT" dirty="0"/>
+              <a:t> </a:t>
+            </a:r>
+            <a:r>
+              <a:rPr lang="it-IT" dirty="0" err="1"/>
+              <a:t>before</a:t>
+            </a:r>
+            <a:r>
+              <a:rPr lang="it-IT" dirty="0"/>
+              <a:t> a </a:t>
+            </a:r>
+            <a:r>
+              <a:rPr lang="it-IT" dirty="0" err="1"/>
+              <a:t>medical</a:t>
+            </a:r>
+            <a:r>
+              <a:rPr lang="it-IT" dirty="0"/>
+              <a:t> procedure. To </a:t>
+            </a:r>
+            <a:r>
+              <a:rPr lang="it-IT" dirty="0" err="1"/>
+              <a:t>achieve</a:t>
+            </a:r>
+            <a:r>
+              <a:rPr lang="it-IT" dirty="0"/>
+              <a:t> </a:t>
+            </a:r>
+            <a:r>
+              <a:rPr lang="it-IT" dirty="0" err="1"/>
+              <a:t>this</a:t>
+            </a:r>
+            <a:r>
+              <a:rPr lang="it-IT" dirty="0"/>
+              <a:t>, </a:t>
+            </a:r>
+            <a:r>
+              <a:rPr lang="it-IT" dirty="0" err="1"/>
+              <a:t>we</a:t>
+            </a:r>
+            <a:r>
+              <a:rPr lang="it-IT" dirty="0"/>
+              <a:t> </a:t>
+            </a:r>
+            <a:r>
+              <a:rPr lang="it-IT" dirty="0" err="1"/>
+              <a:t>identified</a:t>
+            </a:r>
+            <a:r>
+              <a:rPr lang="it-IT" dirty="0"/>
+              <a:t> </a:t>
+            </a:r>
+            <a:r>
+              <a:rPr lang="it-IT" dirty="0" err="1"/>
+              <a:t>four</a:t>
+            </a:r>
+            <a:r>
+              <a:rPr lang="it-IT" dirty="0"/>
+              <a:t> </a:t>
+            </a:r>
+            <a:r>
+              <a:rPr lang="it-IT" dirty="0" err="1"/>
+              <a:t>main</a:t>
+            </a:r>
+            <a:r>
+              <a:rPr lang="it-IT" dirty="0"/>
+              <a:t> use </a:t>
+            </a:r>
+            <a:r>
+              <a:rPr lang="it-IT" dirty="0" err="1"/>
+              <a:t>cases</a:t>
+            </a:r>
+            <a:r>
+              <a:rPr lang="it-IT" dirty="0"/>
+              <a:t>. </a:t>
+            </a:r>
+            <a:endParaRPr lang="en-US" dirty="0"/>
           </a:p>
         </p:txBody>
       </p:sp>
@@ -860,8 +977,8 @@
 </file>
 
 <file path=ppt/notesSlides/notesSlide13.xml><?xml version="1.0" encoding="utf-8"?>
-<p:notes xmlns:a="http://schemas.openxmlformats.org/drawingml/2006/main" xmlns:r="http://schemas.openxmlformats.org/officeDocument/2006/relationships" xmlns:p="http://schemas.openxmlformats.org/presentationml/2006/main" xmlns:m="http://schemas.openxmlformats.org/officeDocument/2006/math" xmlns:w="http://schemas.openxmlformats.org/wordprocessingml/2006/main">
-  <p:cSld name="">
+<p:notes xmlns:a="http://schemas.openxmlformats.org/drawingml/2006/main" xmlns:r="http://schemas.openxmlformats.org/officeDocument/2006/relationships" xmlns:p="http://schemas.openxmlformats.org/presentationml/2006/main">
+  <p:cSld>
     <p:spTree>
       <p:nvGrpSpPr>
         <p:cNvPr id="1" name=""/>
@@ -880,7 +997,7 @@
         <p:nvSpPr>
           <p:cNvPr id="1928051901" name="Slide Image Placeholder 1"/>
           <p:cNvSpPr>
-            <a:spLocks noChangeAspect="1" noGrp="1" noRot="1"/>
+            <a:spLocks noGrp="1" noRot="1" noChangeAspect="1"/>
           </p:cNvSpPr>
           <p:nvPr>
             <p:ph type="sldImg"/>
@@ -906,7 +1023,154 @@
             <a:pPr>
               <a:defRPr/>
             </a:pPr>
-            <a:endParaRPr/>
+            <a:r>
+              <a:rPr lang="it-IT" dirty="0"/>
+              <a:t>In </a:t>
+            </a:r>
+            <a:r>
+              <a:rPr lang="it-IT" dirty="0" err="1"/>
+              <a:t>this</a:t>
+            </a:r>
+            <a:r>
+              <a:rPr lang="it-IT" dirty="0"/>
+              <a:t> scenario, the </a:t>
+            </a:r>
+            <a:r>
+              <a:rPr lang="it-IT" dirty="0" err="1"/>
+              <a:t>physician</a:t>
+            </a:r>
+            <a:r>
+              <a:rPr lang="it-IT" dirty="0"/>
+              <a:t> </a:t>
+            </a:r>
+            <a:r>
+              <a:rPr lang="it-IT" dirty="0" err="1"/>
+              <a:t>requests</a:t>
+            </a:r>
+            <a:r>
+              <a:rPr lang="it-IT" dirty="0"/>
+              <a:t> a complete </a:t>
+            </a:r>
+            <a:r>
+              <a:rPr lang="it-IT" dirty="0" err="1"/>
+              <a:t>evaluation</a:t>
+            </a:r>
+            <a:r>
+              <a:rPr lang="it-IT" dirty="0"/>
+              <a:t> of a </a:t>
+            </a:r>
+            <a:r>
+              <a:rPr lang="it-IT" dirty="0" err="1"/>
+              <a:t>patient's</a:t>
+            </a:r>
+            <a:r>
+              <a:rPr lang="it-IT" dirty="0"/>
+              <a:t> </a:t>
+            </a:r>
+            <a:r>
+              <a:rPr lang="it-IT" dirty="0" err="1"/>
+              <a:t>suitability</a:t>
+            </a:r>
+            <a:r>
+              <a:rPr lang="it-IT" dirty="0"/>
+              <a:t> for a </a:t>
+            </a:r>
+            <a:r>
+              <a:rPr lang="it-IT" dirty="0" err="1"/>
+              <a:t>medical</a:t>
+            </a:r>
+            <a:r>
+              <a:rPr lang="it-IT" dirty="0"/>
+              <a:t> procedure or surgery. </a:t>
+            </a:r>
+          </a:p>
+          <a:p>
+            <a:pPr>
+              <a:defRPr/>
+            </a:pPr>
+            <a:endParaRPr lang="it-IT" dirty="0"/>
+          </a:p>
+          <a:p>
+            <a:pPr>
+              <a:defRPr/>
+            </a:pPr>
+            <a:r>
+              <a:rPr lang="it-IT" dirty="0"/>
+              <a:t>From a </a:t>
+            </a:r>
+            <a:r>
+              <a:rPr lang="it-IT" dirty="0" err="1"/>
+              <a:t>functional</a:t>
+            </a:r>
+            <a:r>
+              <a:rPr lang="it-IT" dirty="0"/>
+              <a:t> </a:t>
+            </a:r>
+            <a:r>
+              <a:rPr lang="it-IT" dirty="0" err="1"/>
+              <a:t>perspective</a:t>
+            </a:r>
+            <a:r>
+              <a:rPr lang="it-IT" dirty="0"/>
+              <a:t>, </a:t>
+            </a:r>
+            <a:r>
+              <a:rPr lang="it-IT" dirty="0" err="1"/>
+              <a:t>this</a:t>
+            </a:r>
+            <a:r>
+              <a:rPr lang="it-IT" dirty="0"/>
+              <a:t> use case </a:t>
+            </a:r>
+            <a:r>
+              <a:rPr lang="it-IT" dirty="0" err="1"/>
+              <a:t>transforms</a:t>
+            </a:r>
+            <a:r>
+              <a:rPr lang="it-IT" dirty="0"/>
+              <a:t> data coming from multiple sources </a:t>
+            </a:r>
+            <a:r>
+              <a:rPr lang="it-IT" dirty="0" err="1"/>
+              <a:t>into</a:t>
+            </a:r>
+            <a:r>
+              <a:rPr lang="it-IT" dirty="0"/>
+              <a:t> a single clinical </a:t>
+            </a:r>
+            <a:r>
+              <a:rPr lang="it-IT" dirty="0" err="1"/>
+              <a:t>assessment</a:t>
+            </a:r>
+            <a:r>
+              <a:rPr lang="it-IT" dirty="0"/>
+              <a:t> </a:t>
+            </a:r>
+            <a:r>
+              <a:rPr lang="it-IT" dirty="0" err="1"/>
+              <a:t>that</a:t>
+            </a:r>
+            <a:r>
+              <a:rPr lang="it-IT" dirty="0"/>
+              <a:t> </a:t>
+            </a:r>
+            <a:r>
+              <a:rPr lang="it-IT" dirty="0" err="1"/>
+              <a:t>is</a:t>
+            </a:r>
+            <a:r>
+              <a:rPr lang="it-IT" dirty="0"/>
+              <a:t> ready to support </a:t>
+            </a:r>
+            <a:r>
+              <a:rPr lang="it-IT" dirty="0" err="1"/>
+              <a:t>medical</a:t>
+            </a:r>
+            <a:r>
+              <a:rPr lang="it-IT" dirty="0"/>
+              <a:t> decision-making.</a:t>
+            </a:r>
+            <a:endParaRPr dirty="0"/>
           </a:p>
         </p:txBody>
       </p:sp>
@@ -945,8 +1209,8 @@
 </file>
 
 <file path=ppt/notesSlides/notesSlide14.xml><?xml version="1.0" encoding="utf-8"?>
-<p:notes xmlns:a="http://schemas.openxmlformats.org/drawingml/2006/main" xmlns:r="http://schemas.openxmlformats.org/officeDocument/2006/relationships" xmlns:p="http://schemas.openxmlformats.org/presentationml/2006/main" xmlns:m="http://schemas.openxmlformats.org/officeDocument/2006/math" xmlns:w="http://schemas.openxmlformats.org/wordprocessingml/2006/main">
-  <p:cSld name="">
+<p:notes xmlns:a="http://schemas.openxmlformats.org/drawingml/2006/main" xmlns:r="http://schemas.openxmlformats.org/officeDocument/2006/relationships" xmlns:p="http://schemas.openxmlformats.org/presentationml/2006/main">
+  <p:cSld>
     <p:spTree>
       <p:nvGrpSpPr>
         <p:cNvPr id="1" name=""/>
@@ -965,7 +1229,7 @@
         <p:nvSpPr>
           <p:cNvPr id="1368255645" name="Slide Image Placeholder 1"/>
           <p:cNvSpPr>
-            <a:spLocks noChangeAspect="1" noGrp="1" noRot="1"/>
+            <a:spLocks noGrp="1" noRot="1" noChangeAspect="1"/>
           </p:cNvSpPr>
           <p:nvPr>
             <p:ph type="sldImg"/>
@@ -991,7 +1255,210 @@
             <a:pPr>
               <a:defRPr/>
             </a:pPr>
-            <a:endParaRPr/>
+            <a:r>
+              <a:rPr lang="it-IT" dirty="0"/>
+              <a:t>In </a:t>
+            </a:r>
+            <a:r>
+              <a:rPr lang="it-IT" dirty="0" err="1"/>
+              <a:t>this</a:t>
+            </a:r>
+            <a:r>
+              <a:rPr lang="it-IT" dirty="0"/>
+              <a:t> scenario, the </a:t>
+            </a:r>
+            <a:r>
+              <a:rPr lang="it-IT" dirty="0" err="1"/>
+              <a:t>physician</a:t>
+            </a:r>
+            <a:r>
+              <a:rPr lang="it-IT" dirty="0"/>
+              <a:t> </a:t>
+            </a:r>
+            <a:r>
+              <a:rPr lang="it-IT" dirty="0" err="1"/>
+              <a:t>does</a:t>
+            </a:r>
+            <a:r>
+              <a:rPr lang="it-IT" dirty="0"/>
+              <a:t> </a:t>
+            </a:r>
+            <a:r>
+              <a:rPr lang="it-IT" dirty="0" err="1"/>
+              <a:t>not</a:t>
+            </a:r>
+            <a:r>
+              <a:rPr lang="it-IT" dirty="0"/>
+              <a:t> </a:t>
+            </a:r>
+            <a:r>
+              <a:rPr lang="it-IT" dirty="0" err="1"/>
+              <a:t>require</a:t>
+            </a:r>
+            <a:r>
+              <a:rPr lang="it-IT" dirty="0"/>
+              <a:t> a complete </a:t>
+            </a:r>
+            <a:r>
+              <a:rPr lang="it-IT" dirty="0" err="1"/>
+              <a:t>assessment</a:t>
+            </a:r>
+            <a:r>
+              <a:rPr lang="it-IT" dirty="0"/>
+              <a:t>, </a:t>
+            </a:r>
+            <a:r>
+              <a:rPr lang="it-IT" dirty="0" err="1"/>
+              <a:t>but</a:t>
+            </a:r>
+            <a:r>
+              <a:rPr lang="it-IT" dirty="0"/>
+              <a:t> </a:t>
+            </a:r>
+            <a:r>
+              <a:rPr lang="it-IT" dirty="0" err="1"/>
+              <a:t>simply</a:t>
+            </a:r>
+            <a:r>
+              <a:rPr lang="it-IT" dirty="0"/>
+              <a:t> </a:t>
+            </a:r>
+            <a:r>
+              <a:rPr lang="it-IT" dirty="0" err="1"/>
+              <a:t>wants</a:t>
+            </a:r>
+            <a:r>
+              <a:rPr lang="it-IT" dirty="0"/>
+              <a:t> to review the </a:t>
+            </a:r>
+            <a:r>
+              <a:rPr lang="it-IT" dirty="0" err="1"/>
+              <a:t>patient's</a:t>
+            </a:r>
+            <a:r>
+              <a:rPr lang="it-IT" dirty="0"/>
+              <a:t> </a:t>
+            </a:r>
+            <a:r>
+              <a:rPr lang="it-IT" dirty="0" err="1"/>
+              <a:t>medical</a:t>
+            </a:r>
+            <a:r>
+              <a:rPr lang="it-IT" dirty="0"/>
+              <a:t> background. </a:t>
+            </a:r>
+          </a:p>
+          <a:p>
+            <a:pPr>
+              <a:defRPr/>
+            </a:pPr>
+            <a:endParaRPr lang="it-IT" dirty="0"/>
+          </a:p>
+          <a:p>
+            <a:pPr>
+              <a:defRPr/>
+            </a:pPr>
+            <a:r>
+              <a:rPr lang="it-IT" dirty="0"/>
+              <a:t>From the end </a:t>
+            </a:r>
+            <a:r>
+              <a:rPr lang="it-IT" dirty="0" err="1"/>
+              <a:t>user's</a:t>
+            </a:r>
+            <a:r>
+              <a:rPr lang="it-IT" dirty="0"/>
+              <a:t> </a:t>
+            </a:r>
+            <a:r>
+              <a:rPr lang="it-IT" dirty="0" err="1"/>
+              <a:t>perspective</a:t>
+            </a:r>
+            <a:r>
+              <a:rPr lang="it-IT" dirty="0"/>
+              <a:t>, </a:t>
+            </a:r>
+            <a:r>
+              <a:rPr lang="it-IT" dirty="0" err="1"/>
+              <a:t>there</a:t>
+            </a:r>
+            <a:r>
+              <a:rPr lang="it-IT" dirty="0"/>
+              <a:t> </a:t>
+            </a:r>
+            <a:r>
+              <a:rPr lang="it-IT" dirty="0" err="1"/>
+              <a:t>is</a:t>
+            </a:r>
+            <a:r>
+              <a:rPr lang="it-IT" dirty="0"/>
+              <a:t> no </a:t>
+            </a:r>
+            <a:r>
+              <a:rPr lang="it-IT" dirty="0" err="1"/>
+              <a:t>need</a:t>
+            </a:r>
+            <a:r>
+              <a:rPr lang="it-IT" dirty="0"/>
+              <a:t> to query multiple systems </a:t>
+            </a:r>
+            <a:r>
+              <a:rPr lang="it-IT" dirty="0" err="1"/>
+              <a:t>separately</a:t>
+            </a:r>
+            <a:r>
+              <a:rPr lang="it-IT" dirty="0"/>
+              <a:t>: </a:t>
+            </a:r>
+            <a:r>
+              <a:rPr lang="it-IT" dirty="0" err="1"/>
+              <a:t>all</a:t>
+            </a:r>
+            <a:r>
+              <a:rPr lang="it-IT" dirty="0"/>
+              <a:t> </a:t>
+            </a:r>
+            <a:r>
+              <a:rPr lang="it-IT" dirty="0" err="1"/>
+              <a:t>relevant</a:t>
+            </a:r>
+            <a:r>
+              <a:rPr lang="it-IT" dirty="0"/>
+              <a:t> information </a:t>
+            </a:r>
+            <a:r>
+              <a:rPr lang="it-IT" dirty="0" err="1"/>
+              <a:t>is</a:t>
+            </a:r>
+            <a:r>
+              <a:rPr lang="it-IT" dirty="0"/>
+              <a:t> </a:t>
+            </a:r>
+            <a:r>
+              <a:rPr lang="it-IT" dirty="0" err="1"/>
+              <a:t>presented</a:t>
+            </a:r>
+            <a:r>
+              <a:rPr lang="it-IT" dirty="0"/>
+              <a:t> in a single, </a:t>
+            </a:r>
+            <a:r>
+              <a:rPr lang="it-IT" dirty="0" err="1"/>
+              <a:t>coherent</a:t>
+            </a:r>
+            <a:r>
+              <a:rPr lang="it-IT" dirty="0"/>
+              <a:t> </a:t>
+            </a:r>
+            <a:r>
+              <a:rPr lang="it-IT" dirty="0" err="1"/>
+              <a:t>view</a:t>
+            </a:r>
+            <a:r>
+              <a:rPr lang="it-IT" dirty="0"/>
+              <a:t>.</a:t>
+            </a:r>
+            <a:endParaRPr dirty="0"/>
           </a:p>
         </p:txBody>
       </p:sp>
@@ -1030,8 +1497,8 @@
 </file>
 
 <file path=ppt/notesSlides/notesSlide15.xml><?xml version="1.0" encoding="utf-8"?>
-<p:notes xmlns:a="http://schemas.openxmlformats.org/drawingml/2006/main" xmlns:r="http://schemas.openxmlformats.org/officeDocument/2006/relationships" xmlns:p="http://schemas.openxmlformats.org/presentationml/2006/main" xmlns:m="http://schemas.openxmlformats.org/officeDocument/2006/math" xmlns:w="http://schemas.openxmlformats.org/wordprocessingml/2006/main">
-  <p:cSld name="">
+<p:notes xmlns:a="http://schemas.openxmlformats.org/drawingml/2006/main" xmlns:r="http://schemas.openxmlformats.org/officeDocument/2006/relationships" xmlns:p="http://schemas.openxmlformats.org/presentationml/2006/main">
+  <p:cSld>
     <p:spTree>
       <p:nvGrpSpPr>
         <p:cNvPr id="1" name=""/>
@@ -1050,7 +1517,7 @@
         <p:nvSpPr>
           <p:cNvPr id="1354030178" name="Slide Image Placeholder 1"/>
           <p:cNvSpPr>
-            <a:spLocks noChangeAspect="1" noGrp="1" noRot="1"/>
+            <a:spLocks noGrp="1" noRot="1" noChangeAspect="1"/>
           </p:cNvSpPr>
           <p:nvPr>
             <p:ph type="sldImg"/>
@@ -1076,7 +1543,67 @@
             <a:pPr>
               <a:defRPr/>
             </a:pPr>
-            <a:endParaRPr/>
+            <a:r>
+              <a:rPr lang="it-IT" dirty="0"/>
+              <a:t>The </a:t>
+            </a:r>
+            <a:r>
+              <a:rPr lang="it-IT" dirty="0" err="1"/>
+              <a:t>physician</a:t>
+            </a:r>
+            <a:r>
+              <a:rPr lang="it-IT" dirty="0"/>
+              <a:t> can </a:t>
+            </a:r>
+            <a:r>
+              <a:rPr lang="it-IT" dirty="0" err="1"/>
+              <a:t>request</a:t>
+            </a:r>
+            <a:r>
+              <a:rPr lang="it-IT" dirty="0"/>
+              <a:t> a </a:t>
+            </a:r>
+            <a:r>
+              <a:rPr lang="it-IT" dirty="0" err="1"/>
+              <a:t>diagnostic</a:t>
+            </a:r>
+            <a:r>
+              <a:rPr lang="it-IT" dirty="0"/>
+              <a:t> panel, </a:t>
+            </a:r>
+            <a:r>
+              <a:rPr lang="it-IT" dirty="0" err="1"/>
+              <a:t>such</a:t>
+            </a:r>
+            <a:r>
+              <a:rPr lang="it-IT" dirty="0"/>
+              <a:t> </a:t>
+            </a:r>
+            <a:r>
+              <a:rPr lang="it-IT" dirty="0" err="1"/>
+              <a:t>as</a:t>
+            </a:r>
+            <a:r>
+              <a:rPr lang="it-IT" dirty="0"/>
+              <a:t> a </a:t>
+            </a:r>
+            <a:r>
+              <a:rPr lang="it-IT" dirty="0" err="1"/>
+              <a:t>renal</a:t>
+            </a:r>
+            <a:r>
+              <a:rPr lang="it-IT" dirty="0"/>
+              <a:t> or </a:t>
+            </a:r>
+            <a:r>
+              <a:rPr lang="it-IT" dirty="0" err="1"/>
+              <a:t>metabolic</a:t>
+            </a:r>
+            <a:r>
+              <a:rPr lang="it-IT" dirty="0"/>
+              <a:t> panel. </a:t>
+            </a:r>
+            <a:endParaRPr dirty="0"/>
           </a:p>
         </p:txBody>
       </p:sp>
@@ -1115,8 +1642,8 @@
 </file>
 
 <file path=ppt/notesSlides/notesSlide16.xml><?xml version="1.0" encoding="utf-8"?>
-<p:notes xmlns:a="http://schemas.openxmlformats.org/drawingml/2006/main" xmlns:r="http://schemas.openxmlformats.org/officeDocument/2006/relationships" xmlns:p="http://schemas.openxmlformats.org/presentationml/2006/main" xmlns:m="http://schemas.openxmlformats.org/officeDocument/2006/math" xmlns:w="http://schemas.openxmlformats.org/wordprocessingml/2006/main">
-  <p:cSld name="">
+<p:notes xmlns:a="http://schemas.openxmlformats.org/drawingml/2006/main" xmlns:r="http://schemas.openxmlformats.org/officeDocument/2006/relationships" xmlns:p="http://schemas.openxmlformats.org/presentationml/2006/main">
+  <p:cSld>
     <p:spTree>
       <p:nvGrpSpPr>
         <p:cNvPr id="1" name=""/>
@@ -1135,7 +1662,7 @@
         <p:nvSpPr>
           <p:cNvPr id="700367680" name="Slide Image Placeholder 1"/>
           <p:cNvSpPr>
-            <a:spLocks noChangeAspect="1" noGrp="1" noRot="1"/>
+            <a:spLocks noGrp="1" noRot="1" noChangeAspect="1"/>
           </p:cNvSpPr>
           <p:nvPr>
             <p:ph type="sldImg"/>
@@ -1161,7 +1688,51 @@
             <a:pPr>
               <a:defRPr/>
             </a:pPr>
-            <a:endParaRPr/>
+            <a:r>
+              <a:rPr lang="it-IT" dirty="0"/>
+              <a:t>In </a:t>
+            </a:r>
+            <a:r>
+              <a:rPr lang="it-IT" dirty="0" err="1"/>
+              <a:t>this</a:t>
+            </a:r>
+            <a:r>
+              <a:rPr lang="it-IT" dirty="0"/>
+              <a:t> scenario, the </a:t>
+            </a:r>
+            <a:r>
+              <a:rPr lang="it-IT" dirty="0" err="1"/>
+              <a:t>physician</a:t>
+            </a:r>
+            <a:r>
+              <a:rPr lang="it-IT" dirty="0"/>
+              <a:t> </a:t>
+            </a:r>
+            <a:r>
+              <a:rPr lang="it-IT" dirty="0" err="1"/>
+              <a:t>creates</a:t>
+            </a:r>
+            <a:r>
+              <a:rPr lang="it-IT" dirty="0"/>
+              <a:t> a new </a:t>
+            </a:r>
+            <a:r>
+              <a:rPr lang="it-IT" dirty="0" err="1"/>
+              <a:t>prescription</a:t>
+            </a:r>
+            <a:r>
+              <a:rPr lang="it-IT" dirty="0"/>
+              <a:t> for a </a:t>
+            </a:r>
+            <a:r>
+              <a:rPr lang="it-IT" dirty="0" err="1"/>
+              <a:t>patient</a:t>
+            </a:r>
+            <a:r>
+              <a:rPr lang="it-IT" dirty="0"/>
+              <a:t>.</a:t>
+            </a:r>
+            <a:endParaRPr dirty="0"/>
           </a:p>
         </p:txBody>
       </p:sp>
@@ -1200,8 +1771,8 @@
 </file>
 
 <file path=ppt/notesSlides/notesSlide17.xml><?xml version="1.0" encoding="utf-8"?>
-<p:notes xmlns:a="http://schemas.openxmlformats.org/drawingml/2006/main" xmlns:r="http://schemas.openxmlformats.org/officeDocument/2006/relationships" xmlns:p="http://schemas.openxmlformats.org/presentationml/2006/main" xmlns:m="http://schemas.openxmlformats.org/officeDocument/2006/math" xmlns:w="http://schemas.openxmlformats.org/wordprocessingml/2006/main">
-  <p:cSld name="">
+<p:notes xmlns:a="http://schemas.openxmlformats.org/drawingml/2006/main" xmlns:r="http://schemas.openxmlformats.org/officeDocument/2006/relationships" xmlns:p="http://schemas.openxmlformats.org/presentationml/2006/main">
+  <p:cSld>
     <p:spTree>
       <p:nvGrpSpPr>
         <p:cNvPr id="1" name=""/>
@@ -1220,7 +1791,7 @@
         <p:nvSpPr>
           <p:cNvPr id="1108187708" name="Slide Image Placeholder 1"/>
           <p:cNvSpPr>
-            <a:spLocks noChangeAspect="1" noGrp="1" noRot="1"/>
+            <a:spLocks noGrp="1" noRot="1" noChangeAspect="1"/>
           </p:cNvSpPr>
           <p:nvPr>
             <p:ph type="sldImg"/>
@@ -1246,7 +1817,331 @@
             <a:pPr>
               <a:defRPr/>
             </a:pPr>
-            <a:endParaRPr lang="en-US"/>
+            <a:r>
+              <a:rPr lang="it-IT" dirty="0"/>
+              <a:t>To conclude, </a:t>
+            </a:r>
+            <a:r>
+              <a:rPr lang="it-IT" dirty="0" err="1"/>
+              <a:t>this</a:t>
+            </a:r>
+            <a:r>
+              <a:rPr lang="it-IT" dirty="0"/>
+              <a:t> </a:t>
+            </a:r>
+            <a:r>
+              <a:rPr lang="it-IT" dirty="0" err="1"/>
+              <a:t>architecture</a:t>
+            </a:r>
+            <a:r>
+              <a:rPr lang="it-IT" dirty="0"/>
+              <a:t> </a:t>
+            </a:r>
+            <a:r>
+              <a:rPr lang="it-IT" dirty="0" err="1"/>
+              <a:t>has</a:t>
+            </a:r>
+            <a:r>
+              <a:rPr lang="it-IT" dirty="0"/>
+              <a:t> </a:t>
+            </a:r>
+            <a:r>
+              <a:rPr lang="it-IT" dirty="0" err="1"/>
+              <a:t>been</a:t>
+            </a:r>
+            <a:r>
+              <a:rPr lang="it-IT" dirty="0"/>
+              <a:t> </a:t>
+            </a:r>
+            <a:r>
+              <a:rPr lang="it-IT" dirty="0" err="1"/>
+              <a:t>built</a:t>
+            </a:r>
+            <a:r>
+              <a:rPr lang="it-IT" dirty="0"/>
+              <a:t> </a:t>
+            </a:r>
+            <a:r>
+              <a:rPr lang="it-IT" dirty="0" err="1"/>
+              <a:t>using</a:t>
+            </a:r>
+            <a:r>
+              <a:rPr lang="it-IT" dirty="0"/>
+              <a:t> </a:t>
+            </a:r>
+            <a:r>
+              <a:rPr lang="it-IT" dirty="0" err="1"/>
+              <a:t>technologies</a:t>
+            </a:r>
+            <a:r>
+              <a:rPr lang="it-IT" dirty="0"/>
+              <a:t> </a:t>
+            </a:r>
+            <a:r>
+              <a:rPr lang="it-IT" dirty="0" err="1"/>
+              <a:t>commonly</a:t>
+            </a:r>
+            <a:r>
+              <a:rPr lang="it-IT" dirty="0"/>
+              <a:t> </a:t>
+            </a:r>
+            <a:r>
+              <a:rPr lang="it-IT" dirty="0" err="1"/>
+              <a:t>adopted</a:t>
+            </a:r>
+            <a:r>
+              <a:rPr lang="it-IT" dirty="0"/>
+              <a:t> in </a:t>
+            </a:r>
+            <a:r>
+              <a:rPr lang="it-IT" dirty="0" err="1"/>
+              <a:t>modern</a:t>
+            </a:r>
+            <a:r>
+              <a:rPr lang="it-IT" dirty="0"/>
+              <a:t> </a:t>
+            </a:r>
+            <a:r>
+              <a:rPr lang="it-IT" dirty="0" err="1"/>
+              <a:t>microservice</a:t>
+            </a:r>
+            <a:r>
+              <a:rPr lang="it-IT" dirty="0"/>
+              <a:t> </a:t>
+            </a:r>
+            <a:r>
+              <a:rPr lang="it-IT" dirty="0" err="1"/>
+              <a:t>ecosystems</a:t>
+            </a:r>
+            <a:r>
+              <a:rPr lang="it-IT" dirty="0"/>
+              <a:t>. </a:t>
+            </a:r>
+            <a:r>
+              <a:rPr lang="it-IT" dirty="0" err="1"/>
+              <a:t>We</a:t>
+            </a:r>
+            <a:r>
+              <a:rPr lang="it-IT" dirty="0"/>
+              <a:t> </a:t>
+            </a:r>
+            <a:r>
+              <a:rPr lang="it-IT" dirty="0" err="1"/>
+              <a:t>used</a:t>
+            </a:r>
+            <a:r>
+              <a:rPr lang="it-IT" dirty="0"/>
+              <a:t> Java 17 and Spring Boot </a:t>
+            </a:r>
+            <a:r>
+              <a:rPr lang="it-IT" dirty="0" err="1"/>
+              <a:t>as</a:t>
+            </a:r>
+            <a:r>
+              <a:rPr lang="it-IT" dirty="0"/>
+              <a:t> the </a:t>
+            </a:r>
+            <a:r>
+              <a:rPr lang="it-IT" dirty="0" err="1"/>
+              <a:t>application</a:t>
+            </a:r>
+            <a:r>
+              <a:rPr lang="it-IT" dirty="0"/>
+              <a:t> </a:t>
+            </a:r>
+            <a:r>
+              <a:rPr lang="it-IT" dirty="0" err="1"/>
+              <a:t>foundation</a:t>
+            </a:r>
+            <a:r>
+              <a:rPr lang="it-IT" dirty="0"/>
+              <a:t>, Spring Cloud for service </a:t>
+            </a:r>
+            <a:r>
+              <a:rPr lang="it-IT" dirty="0" err="1"/>
+              <a:t>discovery</a:t>
+            </a:r>
+            <a:r>
+              <a:rPr lang="it-IT" dirty="0"/>
+              <a:t>, gateway management and inter-service </a:t>
+            </a:r>
+            <a:r>
+              <a:rPr lang="it-IT" dirty="0" err="1"/>
+              <a:t>communication</a:t>
+            </a:r>
+            <a:r>
+              <a:rPr lang="it-IT" dirty="0"/>
+              <a:t>, Apache CXF for SOAP </a:t>
+            </a:r>
+            <a:r>
+              <a:rPr lang="it-IT" dirty="0" err="1"/>
+              <a:t>integration</a:t>
+            </a:r>
+            <a:r>
+              <a:rPr lang="it-IT" dirty="0"/>
+              <a:t> with the Patient </a:t>
+            </a:r>
+            <a:r>
+              <a:rPr lang="it-IT" dirty="0" err="1"/>
+              <a:t>Registry</a:t>
+            </a:r>
+            <a:r>
+              <a:rPr lang="it-IT" dirty="0"/>
+              <a:t>, MySQL for data </a:t>
+            </a:r>
+            <a:r>
+              <a:rPr lang="it-IT" dirty="0" err="1"/>
+              <a:t>persistence</a:t>
+            </a:r>
+            <a:r>
+              <a:rPr lang="it-IT" dirty="0"/>
+              <a:t>, and Docker for deployment of the </a:t>
+            </a:r>
+            <a:r>
+              <a:rPr lang="it-IT" dirty="0" err="1"/>
+              <a:t>entire</a:t>
+            </a:r>
+            <a:r>
+              <a:rPr lang="it-IT" dirty="0"/>
+              <a:t> </a:t>
+            </a:r>
+            <a:r>
+              <a:rPr lang="it-IT" dirty="0" err="1"/>
+              <a:t>platform</a:t>
+            </a:r>
+            <a:r>
+              <a:rPr lang="it-IT" dirty="0"/>
+              <a:t>. </a:t>
+            </a:r>
+            <a:r>
+              <a:rPr lang="it-IT" dirty="0" err="1"/>
+              <a:t>Together</a:t>
+            </a:r>
+            <a:r>
+              <a:rPr lang="it-IT" dirty="0"/>
+              <a:t>, </a:t>
+            </a:r>
+            <a:r>
+              <a:rPr lang="it-IT" dirty="0" err="1"/>
+              <a:t>these</a:t>
+            </a:r>
+            <a:r>
+              <a:rPr lang="it-IT" dirty="0"/>
+              <a:t> </a:t>
+            </a:r>
+            <a:r>
+              <a:rPr lang="it-IT" dirty="0" err="1"/>
+              <a:t>technologies</a:t>
+            </a:r>
+            <a:r>
+              <a:rPr lang="it-IT" dirty="0"/>
+              <a:t> </a:t>
+            </a:r>
+            <a:r>
+              <a:rPr lang="it-IT" dirty="0" err="1"/>
+              <a:t>allowed</a:t>
+            </a:r>
+            <a:r>
+              <a:rPr lang="it-IT" dirty="0"/>
+              <a:t> </a:t>
+            </a:r>
+            <a:r>
+              <a:rPr lang="it-IT" dirty="0" err="1"/>
+              <a:t>us</a:t>
+            </a:r>
+            <a:r>
+              <a:rPr lang="it-IT" dirty="0"/>
+              <a:t> to build a </a:t>
+            </a:r>
+            <a:r>
+              <a:rPr lang="it-IT" dirty="0" err="1"/>
+              <a:t>platform</a:t>
+            </a:r>
+            <a:r>
+              <a:rPr lang="it-IT" dirty="0"/>
+              <a:t> </a:t>
+            </a:r>
+            <a:r>
+              <a:rPr lang="it-IT" dirty="0" err="1"/>
+              <a:t>capable</a:t>
+            </a:r>
+            <a:r>
+              <a:rPr lang="it-IT" dirty="0"/>
+              <a:t> of </a:t>
+            </a:r>
+            <a:r>
+              <a:rPr lang="it-IT" dirty="0" err="1"/>
+              <a:t>integrating</a:t>
+            </a:r>
+            <a:r>
+              <a:rPr lang="it-IT" dirty="0"/>
+              <a:t> clinical information coming from </a:t>
+            </a:r>
+            <a:r>
+              <a:rPr lang="it-IT" dirty="0" err="1"/>
+              <a:t>heterogeneous</a:t>
+            </a:r>
+            <a:r>
+              <a:rPr lang="it-IT" dirty="0"/>
+              <a:t> systems and </a:t>
+            </a:r>
+            <a:r>
+              <a:rPr lang="it-IT" dirty="0" err="1"/>
+              <a:t>presenting</a:t>
+            </a:r>
+            <a:r>
+              <a:rPr lang="it-IT" dirty="0"/>
+              <a:t> </a:t>
+            </a:r>
+            <a:r>
+              <a:rPr lang="it-IT" dirty="0" err="1"/>
+              <a:t>it</a:t>
+            </a:r>
+            <a:r>
+              <a:rPr lang="it-IT" dirty="0"/>
+              <a:t> to </a:t>
+            </a:r>
+            <a:r>
+              <a:rPr lang="it-IT" dirty="0" err="1"/>
+              <a:t>healthcare</a:t>
+            </a:r>
+            <a:r>
+              <a:rPr lang="it-IT" dirty="0"/>
+              <a:t> </a:t>
+            </a:r>
+            <a:r>
+              <a:rPr lang="it-IT" dirty="0" err="1"/>
+              <a:t>professionals</a:t>
+            </a:r>
+            <a:r>
+              <a:rPr lang="it-IT" dirty="0"/>
+              <a:t> </a:t>
+            </a:r>
+            <a:r>
+              <a:rPr lang="it-IT" dirty="0" err="1"/>
+              <a:t>through</a:t>
+            </a:r>
+            <a:r>
+              <a:rPr lang="it-IT" dirty="0"/>
+              <a:t> a single, </a:t>
+            </a:r>
+            <a:r>
+              <a:rPr lang="it-IT" dirty="0" err="1"/>
+              <a:t>consistent</a:t>
+            </a:r>
+            <a:r>
+              <a:rPr lang="it-IT" dirty="0"/>
+              <a:t>, and easy-to-use </a:t>
+            </a:r>
+            <a:r>
+              <a:rPr lang="it-IT" dirty="0" err="1"/>
+              <a:t>interface</a:t>
+            </a:r>
+            <a:r>
+              <a:rPr lang="it-IT" dirty="0"/>
+              <a:t>.</a:t>
+            </a:r>
+            <a:endParaRPr lang="en-US" dirty="0"/>
           </a:p>
         </p:txBody>
       </p:sp>
@@ -1285,8 +2180,8 @@
 </file>
 
 <file path=ppt/notesSlides/notesSlide2.xml><?xml version="1.0" encoding="utf-8"?>
-<p:notes xmlns:a="http://schemas.openxmlformats.org/drawingml/2006/main" xmlns:r="http://schemas.openxmlformats.org/officeDocument/2006/relationships" xmlns:p="http://schemas.openxmlformats.org/presentationml/2006/main" xmlns:m="http://schemas.openxmlformats.org/officeDocument/2006/math" xmlns:w="http://schemas.openxmlformats.org/wordprocessingml/2006/main">
-  <p:cSld name="">
+<p:notes xmlns:a="http://schemas.openxmlformats.org/drawingml/2006/main" xmlns:r="http://schemas.openxmlformats.org/officeDocument/2006/relationships" xmlns:p="http://schemas.openxmlformats.org/presentationml/2006/main">
+  <p:cSld>
     <p:spTree>
       <p:nvGrpSpPr>
         <p:cNvPr id="1" name=""/>
@@ -1305,7 +2200,7 @@
         <p:nvSpPr>
           <p:cNvPr id="1251358101" name="Slide Image Placeholder 1"/>
           <p:cNvSpPr>
-            <a:spLocks noChangeAspect="1" noGrp="1" noRot="1"/>
+            <a:spLocks noGrp="1" noRot="1" noChangeAspect="1"/>
           </p:cNvSpPr>
           <p:nvPr>
             <p:ph type="sldImg"/>
@@ -1370,8 +2265,8 @@
 </file>
 
 <file path=ppt/notesSlides/notesSlide3.xml><?xml version="1.0" encoding="utf-8"?>
-<p:notes xmlns:a="http://schemas.openxmlformats.org/drawingml/2006/main" xmlns:r="http://schemas.openxmlformats.org/officeDocument/2006/relationships" xmlns:p="http://schemas.openxmlformats.org/presentationml/2006/main" xmlns:m="http://schemas.openxmlformats.org/officeDocument/2006/math" xmlns:w="http://schemas.openxmlformats.org/wordprocessingml/2006/main">
-  <p:cSld name="">
+<p:notes xmlns:a="http://schemas.openxmlformats.org/drawingml/2006/main" xmlns:r="http://schemas.openxmlformats.org/officeDocument/2006/relationships" xmlns:p="http://schemas.openxmlformats.org/presentationml/2006/main">
+  <p:cSld>
     <p:spTree>
       <p:nvGrpSpPr>
         <p:cNvPr id="1" name=""/>
@@ -1390,7 +2285,7 @@
         <p:nvSpPr>
           <p:cNvPr id="502903208" name="Slide Image Placeholder 1"/>
           <p:cNvSpPr>
-            <a:spLocks noChangeAspect="1" noGrp="1" noRot="1"/>
+            <a:spLocks noGrp="1" noRot="1" noChangeAspect="1"/>
           </p:cNvSpPr>
           <p:nvPr>
             <p:ph type="sldImg"/>
@@ -1455,8 +2350,8 @@
 </file>
 
 <file path=ppt/notesSlides/notesSlide4.xml><?xml version="1.0" encoding="utf-8"?>
-<p:notes xmlns:a="http://schemas.openxmlformats.org/drawingml/2006/main" xmlns:r="http://schemas.openxmlformats.org/officeDocument/2006/relationships" xmlns:p="http://schemas.openxmlformats.org/presentationml/2006/main" xmlns:m="http://schemas.openxmlformats.org/officeDocument/2006/math" xmlns:w="http://schemas.openxmlformats.org/wordprocessingml/2006/main">
-  <p:cSld name="">
+<p:notes xmlns:a="http://schemas.openxmlformats.org/drawingml/2006/main" xmlns:r="http://schemas.openxmlformats.org/officeDocument/2006/relationships" xmlns:p="http://schemas.openxmlformats.org/presentationml/2006/main">
+  <p:cSld>
     <p:spTree>
       <p:nvGrpSpPr>
         <p:cNvPr id="1" name=""/>
@@ -1475,7 +2370,7 @@
         <p:nvSpPr>
           <p:cNvPr id="362545275" name="Slide Image Placeholder 1"/>
           <p:cNvSpPr>
-            <a:spLocks noChangeAspect="1" noGrp="1" noRot="1"/>
+            <a:spLocks noGrp="1" noRot="1" noChangeAspect="1"/>
           </p:cNvSpPr>
           <p:nvPr>
             <p:ph type="sldImg"/>
@@ -1540,8 +2435,8 @@
 </file>
 
 <file path=ppt/notesSlides/notesSlide5.xml><?xml version="1.0" encoding="utf-8"?>
-<p:notes xmlns:a="http://schemas.openxmlformats.org/drawingml/2006/main" xmlns:r="http://schemas.openxmlformats.org/officeDocument/2006/relationships" xmlns:p="http://schemas.openxmlformats.org/presentationml/2006/main" xmlns:m="http://schemas.openxmlformats.org/officeDocument/2006/math" xmlns:w="http://schemas.openxmlformats.org/wordprocessingml/2006/main">
-  <p:cSld name="">
+<p:notes xmlns:a="http://schemas.openxmlformats.org/drawingml/2006/main" xmlns:r="http://schemas.openxmlformats.org/officeDocument/2006/relationships" xmlns:p="http://schemas.openxmlformats.org/presentationml/2006/main">
+  <p:cSld>
     <p:spTree>
       <p:nvGrpSpPr>
         <p:cNvPr id="1" name=""/>
@@ -1560,7 +2455,7 @@
         <p:nvSpPr>
           <p:cNvPr id="1595805299" name="Slide Image Placeholder 1"/>
           <p:cNvSpPr>
-            <a:spLocks noChangeAspect="1" noGrp="1" noRot="1"/>
+            <a:spLocks noGrp="1" noRot="1" noChangeAspect="1"/>
           </p:cNvSpPr>
           <p:nvPr>
             <p:ph type="sldImg"/>
@@ -1625,8 +2520,8 @@
 </file>
 
 <file path=ppt/notesSlides/notesSlide6.xml><?xml version="1.0" encoding="utf-8"?>
-<p:notes xmlns:a="http://schemas.openxmlformats.org/drawingml/2006/main" xmlns:r="http://schemas.openxmlformats.org/officeDocument/2006/relationships" xmlns:p="http://schemas.openxmlformats.org/presentationml/2006/main" xmlns:m="http://schemas.openxmlformats.org/officeDocument/2006/math" xmlns:w="http://schemas.openxmlformats.org/wordprocessingml/2006/main">
-  <p:cSld name="">
+<p:notes xmlns:a="http://schemas.openxmlformats.org/drawingml/2006/main" xmlns:r="http://schemas.openxmlformats.org/officeDocument/2006/relationships" xmlns:p="http://schemas.openxmlformats.org/presentationml/2006/main">
+  <p:cSld>
     <p:spTree>
       <p:nvGrpSpPr>
         <p:cNvPr id="1" name=""/>
@@ -1645,7 +2540,7 @@
         <p:nvSpPr>
           <p:cNvPr id="54403413" name="Slide Image Placeholder 1"/>
           <p:cNvSpPr>
-            <a:spLocks noChangeAspect="1" noGrp="1" noRot="1"/>
+            <a:spLocks noGrp="1" noRot="1" noChangeAspect="1"/>
           </p:cNvSpPr>
           <p:nvPr>
             <p:ph type="sldImg"/>
@@ -1710,8 +2605,8 @@
 </file>
 
 <file path=ppt/notesSlides/notesSlide7.xml><?xml version="1.0" encoding="utf-8"?>
-<p:notes xmlns:a="http://schemas.openxmlformats.org/drawingml/2006/main" xmlns:r="http://schemas.openxmlformats.org/officeDocument/2006/relationships" xmlns:p="http://schemas.openxmlformats.org/presentationml/2006/main" xmlns:m="http://schemas.openxmlformats.org/officeDocument/2006/math" xmlns:w="http://schemas.openxmlformats.org/wordprocessingml/2006/main">
-  <p:cSld name="">
+<p:notes xmlns:a="http://schemas.openxmlformats.org/drawingml/2006/main" xmlns:r="http://schemas.openxmlformats.org/officeDocument/2006/relationships" xmlns:p="http://schemas.openxmlformats.org/presentationml/2006/main">
+  <p:cSld>
     <p:spTree>
       <p:nvGrpSpPr>
         <p:cNvPr id="1" name=""/>
@@ -1730,7 +2625,7 @@
         <p:nvSpPr>
           <p:cNvPr id="1288205320" name="Slide Image Placeholder 1"/>
           <p:cNvSpPr>
-            <a:spLocks noChangeAspect="1" noGrp="1" noRot="1"/>
+            <a:spLocks noGrp="1" noRot="1" noChangeAspect="1"/>
           </p:cNvSpPr>
           <p:nvPr>
             <p:ph type="sldImg"/>
@@ -1778,11 +2673,7 @@
             </a:r>
             <a:r>
               <a:rPr lang="it-IT" sz="1400"/>
-              <a:t>, w</a:t>
-            </a:r>
-            <a:r>
-              <a:rPr lang="it-IT" sz="1400"/>
-              <a:t>e’</a:t>
+              <a:t>, we’</a:t>
             </a:r>
             <a:r>
               <a:rPr sz="1400"/>
@@ -1835,8 +2726,8 @@
 </file>
 
 <file path=ppt/notesSlides/notesSlide8.xml><?xml version="1.0" encoding="utf-8"?>
-<p:notes xmlns:a="http://schemas.openxmlformats.org/drawingml/2006/main" xmlns:r="http://schemas.openxmlformats.org/officeDocument/2006/relationships" xmlns:p="http://schemas.openxmlformats.org/presentationml/2006/main" xmlns:m="http://schemas.openxmlformats.org/officeDocument/2006/math" xmlns:w="http://schemas.openxmlformats.org/wordprocessingml/2006/main">
-  <p:cSld name="">
+<p:notes xmlns:a="http://schemas.openxmlformats.org/drawingml/2006/main" xmlns:r="http://schemas.openxmlformats.org/officeDocument/2006/relationships" xmlns:p="http://schemas.openxmlformats.org/presentationml/2006/main">
+  <p:cSld>
     <p:spTree>
       <p:nvGrpSpPr>
         <p:cNvPr id="1" name=""/>
@@ -1855,7 +2746,7 @@
         <p:nvSpPr>
           <p:cNvPr id="1900562257" name="Slide Image Placeholder 1"/>
           <p:cNvSpPr>
-            <a:spLocks noChangeAspect="1" noGrp="1" noRot="1"/>
+            <a:spLocks noGrp="1" noRot="1" noChangeAspect="1"/>
           </p:cNvSpPr>
           <p:nvPr>
             <p:ph type="sldImg"/>
@@ -1909,7 +2800,6 @@
               <a:rPr sz="1400"/>
               <a:t>and has its own separate database to ensure decoupling.</a:t>
             </a:r>
-            <a:endParaRPr sz="1400"/>
           </a:p>
           <a:p>
             <a:pPr>
@@ -1997,11 +2887,7 @@
             </a:r>
             <a:r>
               <a:rPr lang="it-IT" sz="1400"/>
-              <a:t>Starting from the</a:t>
-            </a:r>
-            <a:r>
-              <a:rPr lang="it-IT" sz="1400"/>
-              <a:t> </a:t>
+              <a:t>Starting from the </a:t>
             </a:r>
             <a:r>
               <a:rPr sz="1400" b="1"/>
@@ -2212,8 +3098,8 @@
 </file>
 
 <file path=ppt/notesSlides/notesSlide9.xml><?xml version="1.0" encoding="utf-8"?>
-<p:notes xmlns:a="http://schemas.openxmlformats.org/drawingml/2006/main" xmlns:r="http://schemas.openxmlformats.org/officeDocument/2006/relationships" xmlns:p="http://schemas.openxmlformats.org/presentationml/2006/main" xmlns:m="http://schemas.openxmlformats.org/officeDocument/2006/math" xmlns:w="http://schemas.openxmlformats.org/wordprocessingml/2006/main">
-  <p:cSld name="">
+<p:notes xmlns:a="http://schemas.openxmlformats.org/drawingml/2006/main" xmlns:r="http://schemas.openxmlformats.org/officeDocument/2006/relationships" xmlns:p="http://schemas.openxmlformats.org/presentationml/2006/main">
+  <p:cSld>
     <p:spTree>
       <p:nvGrpSpPr>
         <p:cNvPr id="1" name=""/>
@@ -2232,7 +3118,7 @@
         <p:nvSpPr>
           <p:cNvPr id="1382429202" name="Slide Image Placeholder 1"/>
           <p:cNvSpPr>
-            <a:spLocks noChangeAspect="1" noGrp="1" noRot="1"/>
+            <a:spLocks noGrp="1" noRot="1" noChangeAspect="1"/>
           </p:cNvSpPr>
           <p:nvPr>
             <p:ph type="sldImg"/>
@@ -2260,11 +3146,7 @@
             </a:pPr>
             <a:r>
               <a:rPr lang="it-IT" sz="1400"/>
-              <a:t>Here are </a:t>
-            </a:r>
-            <a:r>
-              <a:rPr lang="it-IT" sz="1400"/>
-              <a:t>the</a:t>
+              <a:t>Here are the</a:t>
             </a:r>
             <a:r>
               <a:rPr sz="1400"/>
@@ -2272,11 +3154,7 @@
             </a:r>
             <a:r>
               <a:rPr lang="it-IT" sz="1400"/>
-              <a:t>, </a:t>
-            </a:r>
-            <a:r>
-              <a:rPr lang="it-IT" sz="1400"/>
-              <a:t>we use them t</a:t>
+              <a:t>, we use them t</a:t>
             </a:r>
             <a:r>
               <a:rPr sz="1400"/>
@@ -2290,7 +3168,6 @@
               <a:rPr sz="1400"/>
               <a:t> components do not just store data but they consume data from the providers and aggregate it.</a:t>
             </a:r>
-            <a:endParaRPr sz="1400"/>
           </a:p>
           <a:p>
             <a:pPr marL="239821" indent="-239821">
@@ -2376,11 +3253,7 @@
             </a:r>
             <a:r>
               <a:rPr lang="it-IT" sz="1400"/>
-              <a:t>unifying</a:t>
-            </a:r>
-            <a:r>
-              <a:rPr lang="it-IT" sz="1400"/>
-              <a:t> </a:t>
+              <a:t>unifying </a:t>
             </a:r>
             <a:r>
               <a:rPr sz="1400"/>
@@ -2402,7 +3275,6 @@
               <a:rPr sz="1400"/>
               <a:t> a full Clinical Profile of the patient.</a:t>
             </a:r>
-            <a:endParaRPr sz="1400"/>
           </a:p>
           <a:p>
             <a:pPr marL="239821" indent="-239821">
@@ -2464,11 +3336,7 @@
             </a:r>
             <a:r>
               <a:rPr sz="1400"/>
-              <a:t>business rules to </a:t>
-            </a:r>
-            <a:r>
-              <a:rPr sz="1400"/>
-              <a:t>generate</a:t>
+              <a:t>business rules to generate</a:t>
             </a:r>
             <a:r>
               <a:rPr lang="it-IT" sz="1400"/>
@@ -2517,7 +3385,7 @@
 </file>
 
 <file path=ppt/slideLayouts/slideLayout1.xml><?xml version="1.0" encoding="utf-8"?>
-<p:sldLayout xmlns:a="http://schemas.openxmlformats.org/drawingml/2006/main" xmlns:r="http://schemas.openxmlformats.org/officeDocument/2006/relationships" xmlns:p="http://schemas.openxmlformats.org/presentationml/2006/main" xmlns:m="http://schemas.openxmlformats.org/officeDocument/2006/math" xmlns:w="http://schemas.openxmlformats.org/wordprocessingml/2006/main" matchingName="" preserve="1" showMasterPhAnim="0" showMasterSp="1" userDrawn="1">
+<p:sldLayout xmlns:a="http://schemas.openxmlformats.org/drawingml/2006/main" xmlns:r="http://schemas.openxmlformats.org/officeDocument/2006/relationships" xmlns:p="http://schemas.openxmlformats.org/presentationml/2006/main" showMasterPhAnim="0" preserve="1" userDrawn="1">
   <p:cSld name="DEFAULT">
     <p:bg>
       <p:bgRef idx="1001">
@@ -2547,8 +3415,8 @@
 </file>
 
 <file path=ppt/slideMasters/slideMaster1.xml><?xml version="1.0" encoding="utf-8"?>
-<p:sldMaster xmlns:a="http://schemas.openxmlformats.org/drawingml/2006/main" xmlns:r="http://schemas.openxmlformats.org/officeDocument/2006/relationships" xmlns:p="http://schemas.openxmlformats.org/presentationml/2006/main" xmlns:m="http://schemas.openxmlformats.org/officeDocument/2006/math" xmlns:w="http://schemas.openxmlformats.org/wordprocessingml/2006/main" preserve="0">
-  <p:cSld name="">
+<p:sldMaster xmlns:a="http://schemas.openxmlformats.org/drawingml/2006/main" xmlns:r="http://schemas.openxmlformats.org/officeDocument/2006/relationships" xmlns:p="http://schemas.openxmlformats.org/presentationml/2006/main">
+  <p:cSld>
     <p:bg>
       <p:bgRef idx="1001">
         <a:schemeClr val="bg1"/>
@@ -2574,7 +3442,7 @@
   <p:sldLayoutIdLst>
     <p:sldLayoutId id="2147483649" r:id="rId1"/>
   </p:sldLayoutIdLst>
-  <p:hf dt="0" ftr="0" hdr="0" sldNum="0"/>
+  <p:hf sldNum="0" hdr="0" ftr="0" dt="0"/>
   <p:txStyles>
     <p:titleStyle>
       <a:lvl1pPr algn="ctr" defTabSz="914400" rtl="0">
@@ -2829,13 +3697,14 @@
 </file>
 
 <file path=ppt/slides/slide1.xml><?xml version="1.0" encoding="utf-8"?>
-<p:sld xmlns:a="http://schemas.openxmlformats.org/drawingml/2006/main" xmlns:r="http://schemas.openxmlformats.org/officeDocument/2006/relationships" xmlns:p="http://schemas.openxmlformats.org/presentationml/2006/main" xmlns:m="http://schemas.openxmlformats.org/officeDocument/2006/math" xmlns:w="http://schemas.openxmlformats.org/wordprocessingml/2006/main" xmlns:mc="http://schemas.openxmlformats.org/markup-compatibility/2006" showMasterPhAnim="0" showMasterSp="1" show="1">
+<p:sld xmlns:a="http://schemas.openxmlformats.org/drawingml/2006/main" xmlns:r="http://schemas.openxmlformats.org/officeDocument/2006/relationships" xmlns:p="http://schemas.openxmlformats.org/presentationml/2006/main" showMasterPhAnim="0">
   <p:cSld name="Slide 1">
     <p:bg>
-      <p:bgPr shadeToTitle="0">
+      <p:bgPr>
         <a:solidFill>
           <a:srgbClr val="1F4E79"/>
         </a:solidFill>
+        <a:effectLst/>
       </p:bgPr>
     </p:bg>
     <p:spTree>
@@ -3065,11 +3934,11 @@
   <p:clrMapOvr>
     <a:masterClrMapping/>
   </p:clrMapOvr>
-  <mc:AlternateContent xmlns:mc="http://schemas.openxmlformats.org/markup-compatibility/2006">
-    <mc:Choice xmlns:p159="http://schemas.microsoft.com/office/powerpoint/2015/09/main" xmlns:p14="http://schemas.microsoft.com/office/powerpoint/2010/main" Requires="p159">
-      <p:transition p14:dur="500" advClick="1"/>
+  <mc:AlternateContent xmlns:mc="http://schemas.openxmlformats.org/markup-compatibility/2006" xmlns:p159="http://schemas.microsoft.com/office/powerpoint/2015/09/main">
+    <mc:Choice Requires="p159">
+      <p:transition/>
     </mc:Choice>
-    <mc:Fallback>
+    <mc:Fallback xmlns:w="http://schemas.openxmlformats.org/wordprocessingml/2006/main" xmlns:m="http://schemas.openxmlformats.org/officeDocument/2006/math" xmlns="">
       <p:transition advClick="1"/>
     </mc:Fallback>
   </mc:AlternateContent>
@@ -3077,13 +3946,14 @@
 </file>
 
 <file path=ppt/slides/slide10.xml><?xml version="1.0" encoding="utf-8"?>
-<p:sld xmlns:a="http://schemas.openxmlformats.org/drawingml/2006/main" xmlns:r="http://schemas.openxmlformats.org/officeDocument/2006/relationships" xmlns:p="http://schemas.openxmlformats.org/presentationml/2006/main" xmlns:m="http://schemas.openxmlformats.org/officeDocument/2006/math" xmlns:w="http://schemas.openxmlformats.org/wordprocessingml/2006/main" xmlns:mc="http://schemas.openxmlformats.org/markup-compatibility/2006" showMasterPhAnim="0" showMasterSp="1" show="1">
+<p:sld xmlns:a="http://schemas.openxmlformats.org/drawingml/2006/main" xmlns:r="http://schemas.openxmlformats.org/officeDocument/2006/relationships" xmlns:p="http://schemas.openxmlformats.org/presentationml/2006/main" showMasterPhAnim="0">
   <p:cSld name="Slide 11">
     <p:bg>
-      <p:bgPr shadeToTitle="0">
+      <p:bgPr>
         <a:solidFill>
           <a:srgbClr val="F5F8FA"/>
         </a:solidFill>
+        <a:effectLst/>
       </p:bgPr>
     </p:bg>
     <p:spTree>
@@ -3575,18 +4445,7 @@
                 <a:ea typeface="Calibri"/>
                 <a:cs typeface="Calibri"/>
               </a:rPr>
-              <a:t>10 </a:t>
-            </a:r>
-            <a:r>
-              <a:rPr lang="it-IT" sz="900">
-                <a:solidFill>
-                  <a:srgbClr val="595959"/>
-                </a:solidFill>
-                <a:latin typeface="Calibri"/>
-                <a:ea typeface="Calibri"/>
-                <a:cs typeface="Calibri"/>
-              </a:rPr>
-              <a:t>c</a:t>
+              <a:t>10 c</a:t>
             </a:r>
             <a:r>
               <a:rPr lang="en-US" sz="900">
@@ -3823,18 +4682,7 @@
                 <a:ea typeface="Calibri"/>
                 <a:cs typeface="Calibri"/>
               </a:rPr>
-              <a:t> </a:t>
-            </a:r>
-            <a:r>
-              <a:rPr lang="it-IT" sz="900">
-                <a:solidFill>
-                  <a:srgbClr val="595959"/>
-                </a:solidFill>
-                <a:latin typeface="Calibri"/>
-                <a:ea typeface="Calibri"/>
-                <a:cs typeface="Calibri"/>
-              </a:rPr>
-              <a:t>n</a:t>
+              <a:t> n</a:t>
             </a:r>
             <a:r>
               <a:rPr lang="en-US" sz="900">
@@ -4114,51 +4962,7 @@
                 <a:ea typeface="Calibri"/>
                 <a:cs typeface="Calibri"/>
               </a:rPr>
-              <a:t>· </a:t>
-            </a:r>
-            <a:r>
-              <a:rPr lang="en-US" sz="900" b="0" i="0" u="none" strike="noStrike" cap="none" spc="0">
-                <a:solidFill>
-                  <a:srgbClr val="595959"/>
-                </a:solidFill>
-                <a:latin typeface="Calibri"/>
-                <a:ea typeface="Calibri"/>
-                <a:cs typeface="Calibri"/>
-              </a:rPr>
-              <a:t>d</a:t>
-            </a:r>
-            <a:r>
-              <a:rPr lang="en-US" sz="900" b="0" i="0" u="none" strike="noStrike" cap="none" spc="0">
-                <a:solidFill>
-                  <a:srgbClr val="595959"/>
-                </a:solidFill>
-                <a:latin typeface="Calibri"/>
-                <a:ea typeface="Calibri"/>
-                <a:cs typeface="Calibri"/>
-              </a:rPr>
-              <a:t>ate of creation </a:t>
-            </a:r>
-            <a:r>
-              <a:rPr lang="en-US" sz="900" b="0" i="0" u="none" strike="noStrike" cap="none" spc="0">
-                <a:solidFill>
-                  <a:srgbClr val="595959"/>
-                </a:solidFill>
-                <a:latin typeface="Calibri"/>
-                <a:ea typeface="Calibri"/>
-                <a:cs typeface="Calibri"/>
-              </a:rPr>
-              <a:t>· </a:t>
-            </a:r>
-            <a:r>
-              <a:rPr lang="en-US" sz="900" b="0" i="0" u="none" strike="noStrike" cap="none" spc="0">
-                <a:solidFill>
-                  <a:srgbClr val="595959"/>
-                </a:solidFill>
-                <a:latin typeface="Calibri"/>
-                <a:ea typeface="Calibri"/>
-                <a:cs typeface="Calibri"/>
-              </a:rPr>
-              <a:t>date of update</a:t>
+              <a:t>· date of creation · date of update</a:t>
             </a:r>
             <a:endParaRPr lang="en-US" sz="900" b="0" i="0" u="none" strike="noStrike" cap="none" spc="0">
               <a:solidFill>
@@ -4277,18 +5081,7 @@
                 <a:ea typeface="Calibri"/>
                 <a:cs typeface="Calibri"/>
               </a:rPr>
-              <a:t>erence </a:t>
-            </a:r>
-            <a:r>
-              <a:rPr lang="it-IT" sz="900">
-                <a:solidFill>
-                  <a:srgbClr val="595959"/>
-                </a:solidFill>
-                <a:latin typeface="Calibri"/>
-                <a:ea typeface="Calibri"/>
-                <a:cs typeface="Calibri"/>
-              </a:rPr>
-              <a:t>r</a:t>
+              <a:t>erence r</a:t>
             </a:r>
             <a:r>
               <a:rPr lang="en-US" sz="900">
@@ -4787,18 +5580,7 @@
                 <a:ea typeface="Calibri"/>
                 <a:cs typeface="Calibri"/>
               </a:rPr>
-              <a:t>)</a:t>
-            </a:r>
-            <a:r>
-              <a:rPr lang="it-IT" sz="850">
-                <a:solidFill>
-                  <a:srgbClr val="595959"/>
-                </a:solidFill>
-                <a:latin typeface="Calibri"/>
-                <a:ea typeface="Calibri"/>
-                <a:cs typeface="Calibri"/>
-              </a:rPr>
-              <a:t> </a:t>
+              <a:t>) </a:t>
             </a:r>
             <a:r>
               <a:rPr lang="en-US" sz="850" b="0" i="0" u="none" strike="noStrike" cap="none" spc="0">
@@ -5555,9 +6337,42 @@
                 <a:ea typeface="Calibri"/>
                 <a:cs typeface="Calibri"/>
               </a:rPr>
+              <a:t> c</a:t>
+            </a:r>
+            <a:r>
+              <a:rPr lang="en-US" sz="850">
+                <a:solidFill>
+                  <a:srgbClr val="595959"/>
+                </a:solidFill>
+                <a:latin typeface="Calibri"/>
+                <a:ea typeface="Calibri"/>
+                <a:cs typeface="Calibri"/>
+              </a:rPr>
+              <a:t>linicalProfile</a:t>
+            </a:r>
+            <a:r>
+              <a:rPr lang="it-IT" sz="850">
+                <a:solidFill>
+                  <a:srgbClr val="595959"/>
+                </a:solidFill>
+                <a:latin typeface="Calibri"/>
+                <a:ea typeface="Calibri"/>
+                <a:cs typeface="Calibri"/>
+              </a:rPr>
               <a:t> </a:t>
             </a:r>
             <a:r>
+              <a:rPr lang="en-US" sz="850" b="0" i="0" u="none" strike="noStrike" cap="none" spc="0">
+                <a:solidFill>
+                  <a:srgbClr val="595959"/>
+                </a:solidFill>
+                <a:latin typeface="Calibri"/>
+                <a:ea typeface="Calibri"/>
+                <a:cs typeface="Calibri"/>
+              </a:rPr>
+              <a:t>·</a:t>
+            </a:r>
+            <a:r>
               <a:rPr lang="it-IT" sz="850">
                 <a:solidFill>
                   <a:srgbClr val="595959"/>
@@ -5566,62 +6381,7 @@
                 <a:ea typeface="Calibri"/>
                 <a:cs typeface="Calibri"/>
               </a:rPr>
-              <a:t>c</a:t>
-            </a:r>
-            <a:r>
-              <a:rPr lang="en-US" sz="850">
-                <a:solidFill>
-                  <a:srgbClr val="595959"/>
-                </a:solidFill>
-                <a:latin typeface="Calibri"/>
-                <a:ea typeface="Calibri"/>
-                <a:cs typeface="Calibri"/>
-              </a:rPr>
-              <a:t>linicalProfile</a:t>
-            </a:r>
-            <a:r>
-              <a:rPr lang="it-IT" sz="850">
-                <a:solidFill>
-                  <a:srgbClr val="595959"/>
-                </a:solidFill>
-                <a:latin typeface="Calibri"/>
-                <a:ea typeface="Calibri"/>
-                <a:cs typeface="Calibri"/>
-              </a:rPr>
-              <a:t> </a:t>
-            </a:r>
-            <a:r>
-              <a:rPr lang="en-US" sz="850" b="0" i="0" u="none" strike="noStrike" cap="none" spc="0">
-                <a:solidFill>
-                  <a:srgbClr val="595959"/>
-                </a:solidFill>
-                <a:latin typeface="Calibri"/>
-                <a:ea typeface="Calibri"/>
-                <a:cs typeface="Calibri"/>
-              </a:rPr>
-              <a:t>·</a:t>
-            </a:r>
-            <a:r>
-              <a:rPr lang="it-IT" sz="850">
-                <a:solidFill>
-                  <a:srgbClr val="595959"/>
-                </a:solidFill>
-                <a:latin typeface="Calibri"/>
-                <a:ea typeface="Calibri"/>
-                <a:cs typeface="Calibri"/>
-              </a:rPr>
-              <a:t> </a:t>
-            </a:r>
-            <a:r>
-              <a:rPr lang="it-IT" sz="850">
-                <a:solidFill>
-                  <a:srgbClr val="595959"/>
-                </a:solidFill>
-                <a:latin typeface="Calibri"/>
-                <a:ea typeface="Calibri"/>
-                <a:cs typeface="Calibri"/>
-              </a:rPr>
-              <a:t>d</a:t>
+              <a:t> d</a:t>
             </a:r>
             <a:r>
               <a:rPr lang="en-US" sz="850">
@@ -5687,11 +6447,11 @@
   <p:clrMapOvr>
     <a:masterClrMapping/>
   </p:clrMapOvr>
-  <mc:AlternateContent xmlns:mc="http://schemas.openxmlformats.org/markup-compatibility/2006">
-    <mc:Choice xmlns:p159="http://schemas.microsoft.com/office/powerpoint/2015/09/main" xmlns:p14="http://schemas.microsoft.com/office/powerpoint/2010/main" Requires="p159">
-      <p:transition p14:dur="500" advClick="1"/>
+  <mc:AlternateContent xmlns:mc="http://schemas.openxmlformats.org/markup-compatibility/2006" xmlns:p159="http://schemas.microsoft.com/office/powerpoint/2015/09/main">
+    <mc:Choice Requires="p159">
+      <p:transition/>
     </mc:Choice>
-    <mc:Fallback>
+    <mc:Fallback xmlns:w="http://schemas.openxmlformats.org/wordprocessingml/2006/main" xmlns:m="http://schemas.openxmlformats.org/officeDocument/2006/math" xmlns="">
       <p:transition advClick="1"/>
     </mc:Fallback>
   </mc:AlternateContent>
@@ -5699,13 +6459,14 @@
 </file>
 
 <file path=ppt/slides/slide11.xml><?xml version="1.0" encoding="utf-8"?>
-<p:sld xmlns:a="http://schemas.openxmlformats.org/drawingml/2006/main" xmlns:r="http://schemas.openxmlformats.org/officeDocument/2006/relationships" xmlns:p="http://schemas.openxmlformats.org/presentationml/2006/main" xmlns:m="http://schemas.openxmlformats.org/officeDocument/2006/math" xmlns:w="http://schemas.openxmlformats.org/wordprocessingml/2006/main" xmlns:mc="http://schemas.openxmlformats.org/markup-compatibility/2006" showMasterPhAnim="0" showMasterSp="1" show="1">
+<p:sld xmlns:a="http://schemas.openxmlformats.org/drawingml/2006/main" xmlns:r="http://schemas.openxmlformats.org/officeDocument/2006/relationships" xmlns:p="http://schemas.openxmlformats.org/presentationml/2006/main" showMasterPhAnim="0">
   <p:cSld name="Slide 12">
     <p:bg>
-      <p:bgPr shadeToTitle="0">
+      <p:bgPr>
         <a:solidFill>
           <a:srgbClr val="1F4E79"/>
         </a:solidFill>
+        <a:effectLst/>
       </p:bgPr>
     </p:bg>
     <p:spTree>
@@ -5887,11 +6648,11 @@
   <p:clrMapOvr>
     <a:masterClrMapping/>
   </p:clrMapOvr>
-  <mc:AlternateContent xmlns:mc="http://schemas.openxmlformats.org/markup-compatibility/2006">
-    <mc:Choice xmlns:p159="http://schemas.microsoft.com/office/powerpoint/2015/09/main" xmlns:p14="http://schemas.microsoft.com/office/powerpoint/2010/main" Requires="p159">
-      <p:transition p14:dur="500" advClick="1"/>
+  <mc:AlternateContent xmlns:mc="http://schemas.openxmlformats.org/markup-compatibility/2006" xmlns:p159="http://schemas.microsoft.com/office/powerpoint/2015/09/main">
+    <mc:Choice Requires="p159">
+      <p:transition/>
     </mc:Choice>
-    <mc:Fallback>
+    <mc:Fallback xmlns:w="http://schemas.openxmlformats.org/wordprocessingml/2006/main" xmlns:m="http://schemas.openxmlformats.org/officeDocument/2006/math" xmlns="">
       <p:transition advClick="1"/>
     </mc:Fallback>
   </mc:AlternateContent>
@@ -5899,13 +6660,14 @@
 </file>
 
 <file path=ppt/slides/slide12.xml><?xml version="1.0" encoding="utf-8"?>
-<p:sld xmlns:a="http://schemas.openxmlformats.org/drawingml/2006/main" xmlns:r="http://schemas.openxmlformats.org/officeDocument/2006/relationships" xmlns:p="http://schemas.openxmlformats.org/presentationml/2006/main" xmlns:m="http://schemas.openxmlformats.org/officeDocument/2006/math" xmlns:w="http://schemas.openxmlformats.org/wordprocessingml/2006/main" xmlns:mc="http://schemas.openxmlformats.org/markup-compatibility/2006" showMasterPhAnim="0" showMasterSp="1" show="1">
+<p:sld xmlns:a="http://schemas.openxmlformats.org/drawingml/2006/main" xmlns:r="http://schemas.openxmlformats.org/officeDocument/2006/relationships" xmlns:p="http://schemas.openxmlformats.org/presentationml/2006/main" showMasterPhAnim="0">
   <p:cSld name="Slide 13">
     <p:bg>
-      <p:bgPr shadeToTitle="0">
+      <p:bgPr>
         <a:solidFill>
           <a:srgbClr val="F5F8FA"/>
         </a:solidFill>
+        <a:effectLst/>
       </p:bgPr>
     </p:bg>
     <p:spTree>
@@ -7713,11 +8475,11 @@
   <p:clrMapOvr>
     <a:masterClrMapping/>
   </p:clrMapOvr>
-  <mc:AlternateContent xmlns:mc="http://schemas.openxmlformats.org/markup-compatibility/2006">
-    <mc:Choice xmlns:p159="http://schemas.microsoft.com/office/powerpoint/2015/09/main" xmlns:p14="http://schemas.microsoft.com/office/powerpoint/2010/main" Requires="p159">
-      <p:transition p14:dur="500" advClick="1"/>
+  <mc:AlternateContent xmlns:mc="http://schemas.openxmlformats.org/markup-compatibility/2006" xmlns:p159="http://schemas.microsoft.com/office/powerpoint/2015/09/main">
+    <mc:Choice Requires="p159">
+      <p:transition/>
     </mc:Choice>
-    <mc:Fallback>
+    <mc:Fallback xmlns:w="http://schemas.openxmlformats.org/wordprocessingml/2006/main" xmlns:m="http://schemas.openxmlformats.org/officeDocument/2006/math" xmlns="">
       <p:transition advClick="1"/>
     </mc:Fallback>
   </mc:AlternateContent>
@@ -7725,8 +8487,8 @@
 </file>
 
 <file path=ppt/slides/slide13.xml><?xml version="1.0" encoding="utf-8"?>
-<p:sld xmlns:a="http://schemas.openxmlformats.org/drawingml/2006/main" xmlns:r="http://schemas.openxmlformats.org/officeDocument/2006/relationships" xmlns:p="http://schemas.openxmlformats.org/presentationml/2006/main" xmlns:m="http://schemas.openxmlformats.org/officeDocument/2006/math" xmlns:w="http://schemas.openxmlformats.org/wordprocessingml/2006/main" xmlns:mc="http://schemas.openxmlformats.org/markup-compatibility/2006" showMasterPhAnim="0" showMasterSp="1" show="1">
-  <p:cSld name="">
+<p:sld xmlns:a="http://schemas.openxmlformats.org/drawingml/2006/main" xmlns:r="http://schemas.openxmlformats.org/officeDocument/2006/relationships" xmlns:p="http://schemas.openxmlformats.org/presentationml/2006/main" showMasterPhAnim="0">
+  <p:cSld>
     <p:spTree>
       <p:nvGrpSpPr>
         <p:cNvPr id="1" name=""/>
@@ -8772,11 +9534,11 @@
   <p:clrMapOvr>
     <a:masterClrMapping/>
   </p:clrMapOvr>
-  <mc:AlternateContent xmlns:mc="http://schemas.openxmlformats.org/markup-compatibility/2006">
-    <mc:Choice xmlns:p159="http://schemas.microsoft.com/office/powerpoint/2015/09/main" xmlns:p14="http://schemas.microsoft.com/office/powerpoint/2010/main" Requires="p159">
-      <p:transition p14:dur="500" advClick="1"/>
+  <mc:AlternateContent xmlns:mc="http://schemas.openxmlformats.org/markup-compatibility/2006" xmlns:p159="http://schemas.microsoft.com/office/powerpoint/2015/09/main">
+    <mc:Choice Requires="p159">
+      <p:transition/>
     </mc:Choice>
-    <mc:Fallback>
+    <mc:Fallback xmlns:w="http://schemas.openxmlformats.org/wordprocessingml/2006/main" xmlns:m="http://schemas.openxmlformats.org/officeDocument/2006/math" xmlns="">
       <p:transition advClick="1"/>
     </mc:Fallback>
   </mc:AlternateContent>
@@ -8784,8 +9546,8 @@
 </file>
 
 <file path=ppt/slides/slide14.xml><?xml version="1.0" encoding="utf-8"?>
-<p:sld xmlns:a="http://schemas.openxmlformats.org/drawingml/2006/main" xmlns:r="http://schemas.openxmlformats.org/officeDocument/2006/relationships" xmlns:p="http://schemas.openxmlformats.org/presentationml/2006/main" xmlns:m="http://schemas.openxmlformats.org/officeDocument/2006/math" xmlns:w="http://schemas.openxmlformats.org/wordprocessingml/2006/main" xmlns:mc="http://schemas.openxmlformats.org/markup-compatibility/2006" showMasterPhAnim="0" showMasterSp="1" show="1">
-  <p:cSld name="">
+<p:sld xmlns:a="http://schemas.openxmlformats.org/drawingml/2006/main" xmlns:r="http://schemas.openxmlformats.org/officeDocument/2006/relationships" xmlns:p="http://schemas.openxmlformats.org/presentationml/2006/main" showMasterPhAnim="0">
+  <p:cSld>
     <p:spTree>
       <p:nvGrpSpPr>
         <p:cNvPr id="1" name=""/>
@@ -9434,16 +10196,7 @@
                 </a:solidFill>
                 <a:latin typeface="Calibri"/>
               </a:rPr>
-              <a:t>Anagrafe</a:t>
-            </a:r>
-            <a:r>
-              <a:rPr lang="en-US" sz="1400" b="1">
-                <a:solidFill>
-                  <a:srgbClr val="0F6E56"/>
-                </a:solidFill>
-                <a:latin typeface="Calibri"/>
-              </a:rPr>
-              <a:t> Service</a:t>
+              <a:t>Anagrafe Service</a:t>
             </a:r>
             <a:endParaRPr/>
           </a:p>
@@ -9652,11 +10405,11 @@
   <p:clrMapOvr>
     <a:masterClrMapping/>
   </p:clrMapOvr>
-  <mc:AlternateContent xmlns:mc="http://schemas.openxmlformats.org/markup-compatibility/2006">
-    <mc:Choice xmlns:p159="http://schemas.microsoft.com/office/powerpoint/2015/09/main" xmlns:p14="http://schemas.microsoft.com/office/powerpoint/2010/main" Requires="p159">
-      <p:transition p14:dur="500" advClick="1"/>
+  <mc:AlternateContent xmlns:mc="http://schemas.openxmlformats.org/markup-compatibility/2006" xmlns:p159="http://schemas.microsoft.com/office/powerpoint/2015/09/main">
+    <mc:Choice Requires="p159">
+      <p:transition/>
     </mc:Choice>
-    <mc:Fallback>
+    <mc:Fallback xmlns:w="http://schemas.openxmlformats.org/wordprocessingml/2006/main" xmlns:m="http://schemas.openxmlformats.org/officeDocument/2006/math" xmlns="">
       <p:transition advClick="1"/>
     </mc:Fallback>
   </mc:AlternateContent>
@@ -9664,8 +10417,8 @@
 </file>
 
 <file path=ppt/slides/slide15.xml><?xml version="1.0" encoding="utf-8"?>
-<p:sld xmlns:a="http://schemas.openxmlformats.org/drawingml/2006/main" xmlns:r="http://schemas.openxmlformats.org/officeDocument/2006/relationships" xmlns:p="http://schemas.openxmlformats.org/presentationml/2006/main" xmlns:m="http://schemas.openxmlformats.org/officeDocument/2006/math" xmlns:w="http://schemas.openxmlformats.org/wordprocessingml/2006/main" xmlns:mc="http://schemas.openxmlformats.org/markup-compatibility/2006" showMasterPhAnim="0" showMasterSp="1" show="1">
-  <p:cSld name="">
+<p:sld xmlns:a="http://schemas.openxmlformats.org/drawingml/2006/main" xmlns:r="http://schemas.openxmlformats.org/officeDocument/2006/relationships" xmlns:p="http://schemas.openxmlformats.org/presentationml/2006/main" showMasterPhAnim="0">
+  <p:cSld>
     <p:spTree>
       <p:nvGrpSpPr>
         <p:cNvPr id="1" name=""/>
@@ -10311,11 +11064,11 @@
   <p:clrMapOvr>
     <a:masterClrMapping/>
   </p:clrMapOvr>
-  <mc:AlternateContent xmlns:mc="http://schemas.openxmlformats.org/markup-compatibility/2006">
-    <mc:Choice xmlns:p159="http://schemas.microsoft.com/office/powerpoint/2015/09/main" xmlns:p14="http://schemas.microsoft.com/office/powerpoint/2010/main" Requires="p159">
-      <p:transition p14:dur="500" advClick="1"/>
+  <mc:AlternateContent xmlns:mc="http://schemas.openxmlformats.org/markup-compatibility/2006" xmlns:p159="http://schemas.microsoft.com/office/powerpoint/2015/09/main">
+    <mc:Choice Requires="p159">
+      <p:transition/>
     </mc:Choice>
-    <mc:Fallback>
+    <mc:Fallback xmlns:w="http://schemas.openxmlformats.org/wordprocessingml/2006/main" xmlns:m="http://schemas.openxmlformats.org/officeDocument/2006/math" xmlns="">
       <p:transition advClick="1"/>
     </mc:Fallback>
   </mc:AlternateContent>
@@ -10323,8 +11076,8 @@
 </file>
 
 <file path=ppt/slides/slide16.xml><?xml version="1.0" encoding="utf-8"?>
-<p:sld xmlns:a="http://schemas.openxmlformats.org/drawingml/2006/main" xmlns:r="http://schemas.openxmlformats.org/officeDocument/2006/relationships" xmlns:p="http://schemas.openxmlformats.org/presentationml/2006/main" xmlns:m="http://schemas.openxmlformats.org/officeDocument/2006/math" xmlns:w="http://schemas.openxmlformats.org/wordprocessingml/2006/main" xmlns:mc="http://schemas.openxmlformats.org/markup-compatibility/2006" showMasterPhAnim="0" showMasterSp="1" show="1">
-  <p:cSld name="">
+<p:sld xmlns:a="http://schemas.openxmlformats.org/drawingml/2006/main" xmlns:r="http://schemas.openxmlformats.org/officeDocument/2006/relationships" xmlns:p="http://schemas.openxmlformats.org/presentationml/2006/main" showMasterPhAnim="0">
+  <p:cSld>
     <p:spTree>
       <p:nvGrpSpPr>
         <p:cNvPr id="1" name=""/>
@@ -11231,11 +11984,11 @@
   <p:clrMapOvr>
     <a:masterClrMapping/>
   </p:clrMapOvr>
-  <mc:AlternateContent xmlns:mc="http://schemas.openxmlformats.org/markup-compatibility/2006">
-    <mc:Choice xmlns:p159="http://schemas.microsoft.com/office/powerpoint/2015/09/main" xmlns:p14="http://schemas.microsoft.com/office/powerpoint/2010/main" Requires="p159">
-      <p:transition p14:dur="500" advClick="1"/>
+  <mc:AlternateContent xmlns:mc="http://schemas.openxmlformats.org/markup-compatibility/2006" xmlns:p159="http://schemas.microsoft.com/office/powerpoint/2015/09/main">
+    <mc:Choice Requires="p159">
+      <p:transition/>
     </mc:Choice>
-    <mc:Fallback>
+    <mc:Fallback xmlns:w="http://schemas.openxmlformats.org/wordprocessingml/2006/main" xmlns:m="http://schemas.openxmlformats.org/officeDocument/2006/math" xmlns="">
       <p:transition advClick="1"/>
     </mc:Fallback>
   </mc:AlternateContent>
@@ -11243,13 +11996,14 @@
 </file>
 
 <file path=ppt/slides/slide17.xml><?xml version="1.0" encoding="utf-8"?>
-<p:sld xmlns:a="http://schemas.openxmlformats.org/drawingml/2006/main" xmlns:r="http://schemas.openxmlformats.org/officeDocument/2006/relationships" xmlns:p="http://schemas.openxmlformats.org/presentationml/2006/main" xmlns:m="http://schemas.openxmlformats.org/officeDocument/2006/math" xmlns:w="http://schemas.openxmlformats.org/wordprocessingml/2006/main" xmlns:mc="http://schemas.openxmlformats.org/markup-compatibility/2006" showMasterPhAnim="0" showMasterSp="1" show="1">
+<p:sld xmlns:a="http://schemas.openxmlformats.org/drawingml/2006/main" xmlns:r="http://schemas.openxmlformats.org/officeDocument/2006/relationships" xmlns:p="http://schemas.openxmlformats.org/presentationml/2006/main" showMasterPhAnim="0">
   <p:cSld name="Slide 16">
     <p:bg>
-      <p:bgPr shadeToTitle="0">
+      <p:bgPr>
         <a:solidFill>
           <a:srgbClr val="F5F8FA"/>
         </a:solidFill>
+        <a:effectLst/>
       </p:bgPr>
     </p:bg>
     <p:spTree>
@@ -12815,11 +13569,11 @@
   <p:clrMapOvr>
     <a:masterClrMapping/>
   </p:clrMapOvr>
-  <mc:AlternateContent xmlns:mc="http://schemas.openxmlformats.org/markup-compatibility/2006">
-    <mc:Choice xmlns:p159="http://schemas.microsoft.com/office/powerpoint/2015/09/main" xmlns:p14="http://schemas.microsoft.com/office/powerpoint/2010/main" Requires="p159">
-      <p:transition p14:dur="500" advClick="1"/>
+  <mc:AlternateContent xmlns:mc="http://schemas.openxmlformats.org/markup-compatibility/2006" xmlns:p159="http://schemas.microsoft.com/office/powerpoint/2015/09/main">
+    <mc:Choice Requires="p159">
+      <p:transition/>
     </mc:Choice>
-    <mc:Fallback>
+    <mc:Fallback xmlns:w="http://schemas.openxmlformats.org/wordprocessingml/2006/main" xmlns:m="http://schemas.openxmlformats.org/officeDocument/2006/math" xmlns="">
       <p:transition advClick="1"/>
     </mc:Fallback>
   </mc:AlternateContent>
@@ -12827,13 +13581,14 @@
 </file>
 
 <file path=ppt/slides/slide2.xml><?xml version="1.0" encoding="utf-8"?>
-<p:sld xmlns:a="http://schemas.openxmlformats.org/drawingml/2006/main" xmlns:r="http://schemas.openxmlformats.org/officeDocument/2006/relationships" xmlns:p="http://schemas.openxmlformats.org/presentationml/2006/main" xmlns:m="http://schemas.openxmlformats.org/officeDocument/2006/math" xmlns:w="http://schemas.openxmlformats.org/wordprocessingml/2006/main" xmlns:mc="http://schemas.openxmlformats.org/markup-compatibility/2006" showMasterPhAnim="0" showMasterSp="1" show="1">
+<p:sld xmlns:a="http://schemas.openxmlformats.org/drawingml/2006/main" xmlns:r="http://schemas.openxmlformats.org/officeDocument/2006/relationships" xmlns:p="http://schemas.openxmlformats.org/presentationml/2006/main" showMasterPhAnim="0">
   <p:cSld name="Slide 2">
     <p:bg>
-      <p:bgPr shadeToTitle="0">
+      <p:bgPr>
         <a:solidFill>
           <a:srgbClr val="1F4E79"/>
         </a:solidFill>
+        <a:effectLst/>
       </p:bgPr>
     </p:bg>
     <p:spTree>
@@ -12997,11 +13752,11 @@
   <p:clrMapOvr>
     <a:masterClrMapping/>
   </p:clrMapOvr>
-  <mc:AlternateContent xmlns:mc="http://schemas.openxmlformats.org/markup-compatibility/2006">
-    <mc:Choice xmlns:p159="http://schemas.microsoft.com/office/powerpoint/2015/09/main" xmlns:p14="http://schemas.microsoft.com/office/powerpoint/2010/main" Requires="p159">
-      <p:transition p14:dur="500" advClick="1"/>
+  <mc:AlternateContent xmlns:mc="http://schemas.openxmlformats.org/markup-compatibility/2006" xmlns:p159="http://schemas.microsoft.com/office/powerpoint/2015/09/main">
+    <mc:Choice Requires="p159">
+      <p:transition/>
     </mc:Choice>
-    <mc:Fallback>
+    <mc:Fallback xmlns:w="http://schemas.openxmlformats.org/wordprocessingml/2006/main" xmlns:m="http://schemas.openxmlformats.org/officeDocument/2006/math" xmlns="">
       <p:transition advClick="1"/>
     </mc:Fallback>
   </mc:AlternateContent>
@@ -13009,13 +13764,14 @@
 </file>
 
 <file path=ppt/slides/slide3.xml><?xml version="1.0" encoding="utf-8"?>
-<p:sld xmlns:a="http://schemas.openxmlformats.org/drawingml/2006/main" xmlns:r="http://schemas.openxmlformats.org/officeDocument/2006/relationships" xmlns:p="http://schemas.openxmlformats.org/presentationml/2006/main" xmlns:m="http://schemas.openxmlformats.org/officeDocument/2006/math" xmlns:w="http://schemas.openxmlformats.org/wordprocessingml/2006/main" xmlns:mc="http://schemas.openxmlformats.org/markup-compatibility/2006" showMasterPhAnim="0" showMasterSp="1" show="1">
+<p:sld xmlns:a="http://schemas.openxmlformats.org/drawingml/2006/main" xmlns:r="http://schemas.openxmlformats.org/officeDocument/2006/relationships" xmlns:p="http://schemas.openxmlformats.org/presentationml/2006/main" showMasterPhAnim="0">
   <p:cSld name="Slide 3">
     <p:bg>
-      <p:bgPr shadeToTitle="0">
+      <p:bgPr>
         <a:solidFill>
           <a:srgbClr val="F5F8FA"/>
         </a:solidFill>
+        <a:effectLst/>
       </p:bgPr>
     </p:bg>
     <p:spTree>
@@ -13731,11 +14487,11 @@
   <p:clrMapOvr>
     <a:masterClrMapping/>
   </p:clrMapOvr>
-  <mc:AlternateContent xmlns:mc="http://schemas.openxmlformats.org/markup-compatibility/2006">
-    <mc:Choice xmlns:p159="http://schemas.microsoft.com/office/powerpoint/2015/09/main" xmlns:p14="http://schemas.microsoft.com/office/powerpoint/2010/main" Requires="p159">
-      <p:transition p14:dur="500" advClick="1"/>
+  <mc:AlternateContent xmlns:mc="http://schemas.openxmlformats.org/markup-compatibility/2006" xmlns:p159="http://schemas.microsoft.com/office/powerpoint/2015/09/main">
+    <mc:Choice Requires="p159">
+      <p:transition/>
     </mc:Choice>
-    <mc:Fallback>
+    <mc:Fallback xmlns:w="http://schemas.openxmlformats.org/wordprocessingml/2006/main" xmlns:m="http://schemas.openxmlformats.org/officeDocument/2006/math" xmlns="">
       <p:transition advClick="1"/>
     </mc:Fallback>
   </mc:AlternateContent>
@@ -13743,13 +14499,14 @@
 </file>
 
 <file path=ppt/slides/slide4.xml><?xml version="1.0" encoding="utf-8"?>
-<p:sld xmlns:a="http://schemas.openxmlformats.org/drawingml/2006/main" xmlns:r="http://schemas.openxmlformats.org/officeDocument/2006/relationships" xmlns:p="http://schemas.openxmlformats.org/presentationml/2006/main" xmlns:m="http://schemas.openxmlformats.org/officeDocument/2006/math" xmlns:w="http://schemas.openxmlformats.org/wordprocessingml/2006/main" xmlns:mc="http://schemas.openxmlformats.org/markup-compatibility/2006" showMasterPhAnim="0" showMasterSp="1" show="1">
+<p:sld xmlns:a="http://schemas.openxmlformats.org/drawingml/2006/main" xmlns:r="http://schemas.openxmlformats.org/officeDocument/2006/relationships" xmlns:p="http://schemas.openxmlformats.org/presentationml/2006/main" showMasterPhAnim="0">
   <p:cSld name="Slide 4">
     <p:bg>
-      <p:bgPr shadeToTitle="0">
+      <p:bgPr>
         <a:solidFill>
           <a:srgbClr val="F5F8FA"/>
         </a:solidFill>
+        <a:effectLst/>
       </p:bgPr>
     </p:bg>
     <p:spTree>
@@ -13926,11 +14683,11 @@
   <p:clrMapOvr>
     <a:masterClrMapping/>
   </p:clrMapOvr>
-  <mc:AlternateContent xmlns:mc="http://schemas.openxmlformats.org/markup-compatibility/2006">
-    <mc:Choice xmlns:p159="http://schemas.microsoft.com/office/powerpoint/2015/09/main" xmlns:p14="http://schemas.microsoft.com/office/powerpoint/2010/main" Requires="p159">
-      <p:transition p14:dur="500" advClick="1"/>
+  <mc:AlternateContent xmlns:mc="http://schemas.openxmlformats.org/markup-compatibility/2006" xmlns:p159="http://schemas.microsoft.com/office/powerpoint/2015/09/main">
+    <mc:Choice Requires="p159">
+      <p:transition/>
     </mc:Choice>
-    <mc:Fallback>
+    <mc:Fallback xmlns:w="http://schemas.openxmlformats.org/wordprocessingml/2006/main" xmlns:m="http://schemas.openxmlformats.org/officeDocument/2006/math" xmlns="">
       <p:transition advClick="1"/>
     </mc:Fallback>
   </mc:AlternateContent>
@@ -13938,13 +14695,14 @@
 </file>
 
 <file path=ppt/slides/slide5.xml><?xml version="1.0" encoding="utf-8"?>
-<p:sld xmlns:a="http://schemas.openxmlformats.org/drawingml/2006/main" xmlns:r="http://schemas.openxmlformats.org/officeDocument/2006/relationships" xmlns:p="http://schemas.openxmlformats.org/presentationml/2006/main" xmlns:m="http://schemas.openxmlformats.org/officeDocument/2006/math" xmlns:w="http://schemas.openxmlformats.org/wordprocessingml/2006/main" xmlns:mc="http://schemas.openxmlformats.org/markup-compatibility/2006" showMasterPhAnim="0" showMasterSp="1" show="1">
+<p:sld xmlns:a="http://schemas.openxmlformats.org/drawingml/2006/main" xmlns:r="http://schemas.openxmlformats.org/officeDocument/2006/relationships" xmlns:p="http://schemas.openxmlformats.org/presentationml/2006/main" showMasterPhAnim="0">
   <p:cSld name="Slide 5">
     <p:bg>
-      <p:bgPr shadeToTitle="0">
+      <p:bgPr>
         <a:solidFill>
           <a:srgbClr val="F5F8FA"/>
         </a:solidFill>
+        <a:effectLst/>
       </p:bgPr>
     </p:bg>
     <p:spTree>
@@ -14886,11 +15644,11 @@
   <p:clrMapOvr>
     <a:masterClrMapping/>
   </p:clrMapOvr>
-  <mc:AlternateContent xmlns:mc="http://schemas.openxmlformats.org/markup-compatibility/2006">
-    <mc:Choice xmlns:p159="http://schemas.microsoft.com/office/powerpoint/2015/09/main" xmlns:p14="http://schemas.microsoft.com/office/powerpoint/2010/main" Requires="p159">
-      <p:transition p14:dur="500" advClick="1"/>
+  <mc:AlternateContent xmlns:mc="http://schemas.openxmlformats.org/markup-compatibility/2006" xmlns:p159="http://schemas.microsoft.com/office/powerpoint/2015/09/main">
+    <mc:Choice Requires="p159">
+      <p:transition/>
     </mc:Choice>
-    <mc:Fallback>
+    <mc:Fallback xmlns:w="http://schemas.openxmlformats.org/wordprocessingml/2006/main" xmlns:m="http://schemas.openxmlformats.org/officeDocument/2006/math" xmlns="">
       <p:transition advClick="1"/>
     </mc:Fallback>
   </mc:AlternateContent>
@@ -14898,13 +15656,14 @@
 </file>
 
 <file path=ppt/slides/slide6.xml><?xml version="1.0" encoding="utf-8"?>
-<p:sld xmlns:a="http://schemas.openxmlformats.org/drawingml/2006/main" xmlns:r="http://schemas.openxmlformats.org/officeDocument/2006/relationships" xmlns:p="http://schemas.openxmlformats.org/presentationml/2006/main" xmlns:m="http://schemas.openxmlformats.org/officeDocument/2006/math" xmlns:w="http://schemas.openxmlformats.org/wordprocessingml/2006/main" xmlns:mc="http://schemas.openxmlformats.org/markup-compatibility/2006" showMasterPhAnim="0" showMasterSp="1" show="1">
+<p:sld xmlns:a="http://schemas.openxmlformats.org/drawingml/2006/main" xmlns:r="http://schemas.openxmlformats.org/officeDocument/2006/relationships" xmlns:p="http://schemas.openxmlformats.org/presentationml/2006/main" showMasterPhAnim="0">
   <p:cSld name="Slide 6">
     <p:bg>
-      <p:bgPr shadeToTitle="0">
+      <p:bgPr>
         <a:solidFill>
           <a:srgbClr val="F5F8FA"/>
         </a:solidFill>
+        <a:effectLst/>
       </p:bgPr>
     </p:bg>
     <p:spTree>
@@ -15990,11 +16749,11 @@
   <p:clrMapOvr>
     <a:masterClrMapping/>
   </p:clrMapOvr>
-  <mc:AlternateContent xmlns:mc="http://schemas.openxmlformats.org/markup-compatibility/2006">
-    <mc:Choice xmlns:p159="http://schemas.microsoft.com/office/powerpoint/2015/09/main" xmlns:p14="http://schemas.microsoft.com/office/powerpoint/2010/main" Requires="p159">
-      <p:transition p14:dur="500" advClick="1"/>
+  <mc:AlternateContent xmlns:mc="http://schemas.openxmlformats.org/markup-compatibility/2006" xmlns:p159="http://schemas.microsoft.com/office/powerpoint/2015/09/main">
+    <mc:Choice Requires="p159">
+      <p:transition/>
     </mc:Choice>
-    <mc:Fallback>
+    <mc:Fallback xmlns:w="http://schemas.openxmlformats.org/wordprocessingml/2006/main" xmlns:m="http://schemas.openxmlformats.org/officeDocument/2006/math" xmlns="">
       <p:transition advClick="1"/>
     </mc:Fallback>
   </mc:AlternateContent>
@@ -16002,13 +16761,14 @@
 </file>
 
 <file path=ppt/slides/slide7.xml><?xml version="1.0" encoding="utf-8"?>
-<p:sld xmlns:a="http://schemas.openxmlformats.org/drawingml/2006/main" xmlns:r="http://schemas.openxmlformats.org/officeDocument/2006/relationships" xmlns:p="http://schemas.openxmlformats.org/presentationml/2006/main" xmlns:m="http://schemas.openxmlformats.org/officeDocument/2006/math" xmlns:w="http://schemas.openxmlformats.org/wordprocessingml/2006/main" xmlns:mc="http://schemas.openxmlformats.org/markup-compatibility/2006" showMasterPhAnim="0" showMasterSp="1" show="1">
+<p:sld xmlns:a="http://schemas.openxmlformats.org/drawingml/2006/main" xmlns:r="http://schemas.openxmlformats.org/officeDocument/2006/relationships" xmlns:p="http://schemas.openxmlformats.org/presentationml/2006/main" showMasterPhAnim="0">
   <p:cSld name="Slide 7">
     <p:bg>
-      <p:bgPr shadeToTitle="0">
+      <p:bgPr>
         <a:solidFill>
           <a:srgbClr val="1F4E79"/>
         </a:solidFill>
+        <a:effectLst/>
       </p:bgPr>
     </p:bg>
     <p:spTree>
@@ -16190,11 +16950,11 @@
   <p:clrMapOvr>
     <a:masterClrMapping/>
   </p:clrMapOvr>
-  <mc:AlternateContent xmlns:mc="http://schemas.openxmlformats.org/markup-compatibility/2006">
-    <mc:Choice xmlns:p159="http://schemas.microsoft.com/office/powerpoint/2015/09/main" xmlns:p14="http://schemas.microsoft.com/office/powerpoint/2010/main" Requires="p159">
-      <p:transition p14:dur="500" advClick="1"/>
+  <mc:AlternateContent xmlns:mc="http://schemas.openxmlformats.org/markup-compatibility/2006" xmlns:p159="http://schemas.microsoft.com/office/powerpoint/2015/09/main">
+    <mc:Choice Requires="p159">
+      <p:transition/>
     </mc:Choice>
-    <mc:Fallback>
+    <mc:Fallback xmlns:w="http://schemas.openxmlformats.org/wordprocessingml/2006/main" xmlns:m="http://schemas.openxmlformats.org/officeDocument/2006/math" xmlns="">
       <p:transition advClick="1"/>
     </mc:Fallback>
   </mc:AlternateContent>
@@ -16202,13 +16962,14 @@
 </file>
 
 <file path=ppt/slides/slide8.xml><?xml version="1.0" encoding="utf-8"?>
-<p:sld xmlns:a="http://schemas.openxmlformats.org/drawingml/2006/main" xmlns:r="http://schemas.openxmlformats.org/officeDocument/2006/relationships" xmlns:p="http://schemas.openxmlformats.org/presentationml/2006/main" xmlns:m="http://schemas.openxmlformats.org/officeDocument/2006/math" xmlns:w="http://schemas.openxmlformats.org/wordprocessingml/2006/main" xmlns:mc="http://schemas.openxmlformats.org/markup-compatibility/2006" showMasterPhAnim="0" showMasterSp="1" show="1">
+<p:sld xmlns:a="http://schemas.openxmlformats.org/drawingml/2006/main" xmlns:r="http://schemas.openxmlformats.org/officeDocument/2006/relationships" xmlns:p="http://schemas.openxmlformats.org/presentationml/2006/main" showMasterPhAnim="0">
   <p:cSld name="Slide 8">
     <p:bg>
-      <p:bgPr shadeToTitle="0">
+      <p:bgPr>
         <a:solidFill>
           <a:srgbClr val="F5F8FA"/>
         </a:solidFill>
+        <a:effectLst/>
       </p:bgPr>
     </p:bg>
     <p:spTree>
@@ -17645,18 +18406,18 @@
               <a:defRPr/>
             </a:pPr>
             <a:r>
-              <a:rPr lang="en-US" sz="1100">
-                <a:solidFill>
-                  <a:srgbClr val="595959"/>
-                </a:solidFill>
-                <a:latin typeface="Calibri"/>
-                <a:ea typeface="Calibri"/>
-                <a:cs typeface="Calibri"/>
-              </a:rPr>
-              <a:t>Active prescriptions per patient, drug interaction check endpoint</a:t>
-            </a:r>
-            <a:r>
-              <a:rPr lang="it-IT" sz="1100">
+              <a:rPr lang="en-US" sz="1100" dirty="0">
+                <a:solidFill>
+                  <a:srgbClr val="595959"/>
+                </a:solidFill>
+                <a:latin typeface="Calibri"/>
+                <a:ea typeface="Calibri"/>
+                <a:cs typeface="Calibri"/>
+              </a:rPr>
+              <a:t>Active prescriptions per patient, drug prescription endpoint</a:t>
+            </a:r>
+            <a:r>
+              <a:rPr lang="it-IT" sz="1100" dirty="0">
                 <a:solidFill>
                   <a:srgbClr val="595959"/>
                 </a:solidFill>
@@ -17666,7 +18427,7 @@
               </a:rPr>
               <a:t>.</a:t>
             </a:r>
-            <a:endParaRPr lang="en-US" sz="1100"/>
+            <a:endParaRPr lang="en-US" sz="1100" dirty="0"/>
           </a:p>
         </p:txBody>
       </p:sp>
@@ -17975,18 +18736,7 @@
                 <a:ea typeface="Calibri"/>
                 <a:cs typeface="Calibri"/>
               </a:rPr>
-              <a:t>– </a:t>
-            </a:r>
-            <a:r>
-              <a:rPr lang="it-IT" sz="1100">
-                <a:solidFill>
-                  <a:srgbClr val="595959"/>
-                </a:solidFill>
-                <a:latin typeface="Calibri"/>
-                <a:ea typeface="Calibri"/>
-                <a:cs typeface="Calibri"/>
-              </a:rPr>
-              <a:t>Exams are already done, only the resulting images are sent.</a:t>
+              <a:t>– Exams are already done, only the resulting images are sent.</a:t>
             </a:r>
             <a:endParaRPr lang="en-US" sz="1100"/>
           </a:p>
@@ -18026,11 +18776,11 @@
   <p:clrMapOvr>
     <a:masterClrMapping/>
   </p:clrMapOvr>
-  <mc:AlternateContent xmlns:mc="http://schemas.openxmlformats.org/markup-compatibility/2006">
-    <mc:Choice xmlns:p159="http://schemas.microsoft.com/office/powerpoint/2015/09/main" xmlns:p14="http://schemas.microsoft.com/office/powerpoint/2010/main" Requires="p159">
-      <p:transition p14:dur="500" advClick="1"/>
+  <mc:AlternateContent xmlns:mc="http://schemas.openxmlformats.org/markup-compatibility/2006" xmlns:p159="http://schemas.microsoft.com/office/powerpoint/2015/09/main">
+    <mc:Choice Requires="p159">
+      <p:transition/>
     </mc:Choice>
-    <mc:Fallback>
+    <mc:Fallback xmlns:w="http://schemas.openxmlformats.org/wordprocessingml/2006/main" xmlns:m="http://schemas.openxmlformats.org/officeDocument/2006/math" xmlns="">
       <p:transition advClick="1"/>
     </mc:Fallback>
   </mc:AlternateContent>
@@ -18038,13 +18788,14 @@
 </file>
 
 <file path=ppt/slides/slide9.xml><?xml version="1.0" encoding="utf-8"?>
-<p:sld xmlns:a="http://schemas.openxmlformats.org/drawingml/2006/main" xmlns:r="http://schemas.openxmlformats.org/officeDocument/2006/relationships" xmlns:p="http://schemas.openxmlformats.org/presentationml/2006/main" xmlns:m="http://schemas.openxmlformats.org/officeDocument/2006/math" xmlns:w="http://schemas.openxmlformats.org/wordprocessingml/2006/main" xmlns:mc="http://schemas.openxmlformats.org/markup-compatibility/2006" showMasterPhAnim="0" showMasterSp="1" show="1">
+<p:sld xmlns:a="http://schemas.openxmlformats.org/drawingml/2006/main" xmlns:r="http://schemas.openxmlformats.org/officeDocument/2006/relationships" xmlns:p="http://schemas.openxmlformats.org/presentationml/2006/main" showMasterPhAnim="0">
   <p:cSld name="Slide 9">
     <p:bg>
-      <p:bgPr shadeToTitle="0">
+      <p:bgPr>
         <a:solidFill>
           <a:srgbClr val="F5F8FA"/>
         </a:solidFill>
+        <a:effectLst/>
       </p:bgPr>
     </p:bg>
     <p:spTree>
@@ -18880,7 +19631,18 @@
                 <a:ea typeface="Calibri"/>
                 <a:cs typeface="Calibri"/>
               </a:rPr>
-              <a:t>TestResults</a:t>
+              <a:t>TestResults and ImagingReports</a:t>
+            </a:r>
+            <a:r>
+              <a:rPr lang="it-IT" sz="1050" b="0" i="0" u="none" strike="noStrike" cap="none" spc="0">
+                <a:solidFill>
+                  <a:srgbClr val="595959"/>
+                </a:solidFill>
+                <a:latin typeface="Calibri"/>
+                <a:ea typeface="Calibri"/>
+                <a:cs typeface="Calibri"/>
+              </a:rPr>
+              <a:t>, </a:t>
             </a:r>
             <a:r>
               <a:rPr sz="1050" b="0" i="0" u="none" strike="noStrike" cap="none" spc="0">
@@ -18891,7 +19653,18 @@
                 <a:ea typeface="Calibri"/>
                 <a:cs typeface="Calibri"/>
               </a:rPr>
-              <a:t> and </a:t>
+              <a:t>filtered by </a:t>
+            </a:r>
+            <a:r>
+              <a:rPr lang="it-IT" sz="1050" b="0" i="0" u="none" strike="noStrike" cap="none" spc="0">
+                <a:solidFill>
+                  <a:srgbClr val="595959"/>
+                </a:solidFill>
+                <a:latin typeface="Calibri"/>
+                <a:ea typeface="Calibri"/>
+                <a:cs typeface="Calibri"/>
+              </a:rPr>
+              <a:t>the </a:t>
             </a:r>
             <a:r>
               <a:rPr sz="1050" b="0" i="0" u="none" strike="noStrike" cap="none" spc="0">
@@ -18902,7 +19675,7 @@
                 <a:ea typeface="Calibri"/>
                 <a:cs typeface="Calibri"/>
               </a:rPr>
-              <a:t>ImagingReports</a:t>
+              <a:t>panel</a:t>
             </a:r>
             <a:r>
               <a:rPr lang="it-IT" sz="1050" b="0" i="0" u="none" strike="noStrike" cap="none" spc="0">
@@ -18913,84 +19686,7 @@
                 <a:ea typeface="Calibri"/>
                 <a:cs typeface="Calibri"/>
               </a:rPr>
-              <a:t>, </a:t>
-            </a:r>
-            <a:r>
-              <a:rPr sz="1050" b="0" i="0" u="none" strike="noStrike" cap="none" spc="0">
-                <a:solidFill>
-                  <a:srgbClr val="595959"/>
-                </a:solidFill>
-                <a:latin typeface="Calibri"/>
-                <a:ea typeface="Calibri"/>
-                <a:cs typeface="Calibri"/>
-              </a:rPr>
-              <a:t>filtered</a:t>
-            </a:r>
-            <a:r>
-              <a:rPr sz="1050" b="0" i="0" u="none" strike="noStrike" cap="none" spc="0">
-                <a:solidFill>
-                  <a:srgbClr val="595959"/>
-                </a:solidFill>
-                <a:latin typeface="Calibri"/>
-                <a:ea typeface="Calibri"/>
-                <a:cs typeface="Calibri"/>
-              </a:rPr>
-              <a:t> by </a:t>
-            </a:r>
-            <a:r>
-              <a:rPr lang="it-IT" sz="1050" b="0" i="0" u="none" strike="noStrike" cap="none" spc="0">
-                <a:solidFill>
-                  <a:srgbClr val="595959"/>
-                </a:solidFill>
-                <a:latin typeface="Calibri"/>
-                <a:ea typeface="Calibri"/>
-                <a:cs typeface="Calibri"/>
-              </a:rPr>
-              <a:t>the </a:t>
-            </a:r>
-            <a:r>
-              <a:rPr sz="1050" b="0" i="0" u="none" strike="noStrike" cap="none" spc="0">
-                <a:solidFill>
-                  <a:srgbClr val="595959"/>
-                </a:solidFill>
-                <a:latin typeface="Calibri"/>
-                <a:ea typeface="Calibri"/>
-                <a:cs typeface="Calibri"/>
-              </a:rPr>
-              <a:t>panel</a:t>
-            </a:r>
-            <a:r>
-              <a:rPr lang="it-IT" sz="1050" b="0" i="0" u="none" strike="noStrike" cap="none" spc="0">
-                <a:solidFill>
-                  <a:srgbClr val="595959"/>
-                </a:solidFill>
-                <a:latin typeface="Calibri"/>
-                <a:ea typeface="Calibri"/>
-                <a:cs typeface="Calibri"/>
-              </a:rPr>
-              <a:t> value, to build a Diagno</a:t>
-            </a:r>
-            <a:r>
-              <a:rPr lang="it-IT" sz="1050" b="0" i="0" u="none" strike="noStrike" cap="none" spc="0">
-                <a:solidFill>
-                  <a:srgbClr val="595959"/>
-                </a:solidFill>
-                <a:latin typeface="Calibri"/>
-                <a:ea typeface="Calibri"/>
-                <a:cs typeface="Calibri"/>
-              </a:rPr>
-              <a:t>stic</a:t>
-            </a:r>
-            <a:r>
-              <a:rPr lang="it-IT" sz="1050" b="0" i="0" u="none" strike="noStrike" cap="none" spc="0">
-                <a:solidFill>
-                  <a:srgbClr val="595959"/>
-                </a:solidFill>
-                <a:latin typeface="Calibri"/>
-                <a:ea typeface="Calibri"/>
-                <a:cs typeface="Calibri"/>
-              </a:rPr>
-              <a:t>Bundle.</a:t>
+              <a:t> value, to build a DiagnosticBundle.</a:t>
             </a:r>
             <a:endParaRPr lang="en-US" sz="1050"/>
           </a:p>
@@ -19688,14 +20384,6 @@
               </a:rPr>
               <a:t>Diagnostic Aggregator (REST)</a:t>
             </a:r>
-            <a:endParaRPr lang="en-US" sz="1050">
-              <a:solidFill>
-                <a:srgbClr val="595959"/>
-              </a:solidFill>
-              <a:latin typeface="Calibri"/>
-              <a:ea typeface="Calibri"/>
-              <a:cs typeface="Calibri"/>
-            </a:endParaRPr>
           </a:p>
           <a:p>
             <a:pPr marL="0" indent="0">
@@ -19835,7 +20523,59 @@
                 <a:ea typeface="Calibri"/>
                 <a:cs typeface="Calibri"/>
               </a:rPr>
-              <a:t>omplete fitness </a:t>
+              <a:t>omplete fitness assessment for a patient</a:t>
+            </a:r>
+            <a:r>
+              <a:rPr lang="it-IT" sz="1050">
+                <a:solidFill>
+                  <a:srgbClr val="595959"/>
+                </a:solidFill>
+                <a:latin typeface="Calibri"/>
+                <a:ea typeface="Calibri"/>
+                <a:cs typeface="Calibri"/>
+              </a:rPr>
+              <a:t>, done with p</a:t>
+            </a:r>
+            <a:r>
+              <a:rPr lang="en-US" sz="1050">
+                <a:solidFill>
+                  <a:srgbClr val="595959"/>
+                </a:solidFill>
+                <a:latin typeface="Calibri"/>
+                <a:ea typeface="Calibri"/>
+                <a:cs typeface="Calibri"/>
+              </a:rPr>
+              <a:t>arallel orchestration</a:t>
+            </a:r>
+            <a:r>
+              <a:rPr lang="it-IT" sz="1050">
+                <a:solidFill>
+                  <a:srgbClr val="595959"/>
+                </a:solidFill>
+                <a:latin typeface="Calibri"/>
+                <a:ea typeface="Calibri"/>
+                <a:cs typeface="Calibri"/>
+              </a:rPr>
+              <a:t> - </a:t>
+            </a:r>
+            <a:r>
+              <a:rPr>
+                <a:solidFill>
+                  <a:srgbClr val="595959"/>
+                </a:solidFill>
+              </a:rPr>
+              <a:t> </a:t>
+            </a:r>
+            <a:r>
+              <a:rPr lang="it-IT" sz="1050" b="0" i="0" u="none" strike="noStrike" cap="none" spc="0">
+                <a:solidFill>
+                  <a:srgbClr val="595959"/>
+                </a:solidFill>
+                <a:latin typeface="Calibri"/>
+                <a:ea typeface="Calibri"/>
+                <a:cs typeface="Calibri"/>
+              </a:rPr>
+              <a:t>results </a:t>
             </a:r>
             <a:r>
               <a:rPr lang="en-US" sz="1050" b="0" i="0" u="none" strike="noStrike" cap="none" spc="0">
@@ -19846,7 +20586,18 @@
                 <a:ea typeface="Calibri"/>
                 <a:cs typeface="Calibri"/>
               </a:rPr>
-              <a:t>assessment</a:t>
+              <a:t>cross-reference</a:t>
+            </a:r>
+            <a:r>
+              <a:rPr lang="it-IT" sz="1050" b="0" i="0" u="none" strike="noStrike" cap="none" spc="0">
+                <a:solidFill>
+                  <a:srgbClr val="595959"/>
+                </a:solidFill>
+                <a:latin typeface="Calibri"/>
+                <a:ea typeface="Calibri"/>
+                <a:cs typeface="Calibri"/>
+              </a:rPr>
+              <a:t>d into </a:t>
             </a:r>
             <a:r>
               <a:rPr lang="en-US" sz="1050" b="0" i="0" u="none" strike="noStrike" cap="none" spc="0">
@@ -19857,136 +20608,7 @@
                 <a:ea typeface="Calibri"/>
                 <a:cs typeface="Calibri"/>
               </a:rPr>
-              <a:t> for a </a:t>
-            </a:r>
-            <a:r>
-              <a:rPr lang="en-US" sz="1050" b="0" i="0" u="none" strike="noStrike" cap="none" spc="0">
-                <a:solidFill>
-                  <a:srgbClr val="595959"/>
-                </a:solidFill>
-                <a:latin typeface="Calibri"/>
-                <a:ea typeface="Calibri"/>
-                <a:cs typeface="Calibri"/>
-              </a:rPr>
-              <a:t>patient</a:t>
-            </a:r>
-            <a:r>
-              <a:rPr lang="it-IT" sz="1050">
-                <a:solidFill>
-                  <a:srgbClr val="595959"/>
-                </a:solidFill>
-                <a:latin typeface="Calibri"/>
-                <a:ea typeface="Calibri"/>
-                <a:cs typeface="Calibri"/>
-              </a:rPr>
-              <a:t>, done with </a:t>
-            </a:r>
-            <a:r>
-              <a:rPr lang="it-IT" sz="1050">
-                <a:solidFill>
-                  <a:srgbClr val="595959"/>
-                </a:solidFill>
-                <a:latin typeface="Calibri"/>
-                <a:ea typeface="Calibri"/>
-                <a:cs typeface="Calibri"/>
-              </a:rPr>
-              <a:t>p</a:t>
-            </a:r>
-            <a:r>
-              <a:rPr lang="en-US" sz="1050">
-                <a:solidFill>
-                  <a:srgbClr val="595959"/>
-                </a:solidFill>
-                <a:latin typeface="Calibri"/>
-                <a:ea typeface="Calibri"/>
-                <a:cs typeface="Calibri"/>
-              </a:rPr>
-              <a:t>arallel orchestration</a:t>
-            </a:r>
-            <a:r>
-              <a:rPr lang="it-IT" sz="1050">
-                <a:solidFill>
-                  <a:srgbClr val="595959"/>
-                </a:solidFill>
-                <a:latin typeface="Calibri"/>
-                <a:ea typeface="Calibri"/>
-                <a:cs typeface="Calibri"/>
-              </a:rPr>
-              <a:t> - </a:t>
-            </a:r>
-            <a:r>
-              <a:rPr>
-                <a:solidFill>
-                  <a:srgbClr val="595959"/>
-                </a:solidFill>
-              </a:rPr>
-              <a:t> </a:t>
-            </a:r>
-            <a:r>
-              <a:rPr lang="it-IT" sz="1050" b="0" i="0" u="none" strike="noStrike" cap="none" spc="0">
-                <a:solidFill>
-                  <a:srgbClr val="595959"/>
-                </a:solidFill>
-                <a:latin typeface="Calibri"/>
-                <a:ea typeface="Calibri"/>
-                <a:cs typeface="Calibri"/>
-              </a:rPr>
-              <a:t>results </a:t>
-            </a:r>
-            <a:r>
-              <a:rPr lang="en-US" sz="1050" b="0" i="0" u="none" strike="noStrike" cap="none" spc="0">
-                <a:solidFill>
-                  <a:srgbClr val="595959"/>
-                </a:solidFill>
-                <a:latin typeface="Calibri"/>
-                <a:ea typeface="Calibri"/>
-                <a:cs typeface="Calibri"/>
-              </a:rPr>
-              <a:t>cross-</a:t>
-            </a:r>
-            <a:r>
-              <a:rPr lang="en-US" sz="1050" b="0" i="0" u="none" strike="noStrike" cap="none" spc="0">
-                <a:solidFill>
-                  <a:srgbClr val="595959"/>
-                </a:solidFill>
-                <a:latin typeface="Calibri"/>
-                <a:ea typeface="Calibri"/>
-                <a:cs typeface="Calibri"/>
-              </a:rPr>
-              <a:t>reference</a:t>
-            </a:r>
-            <a:r>
-              <a:rPr lang="it-IT" sz="1050" b="0" i="0" u="none" strike="noStrike" cap="none" spc="0">
-                <a:solidFill>
-                  <a:srgbClr val="595959"/>
-                </a:solidFill>
-                <a:latin typeface="Calibri"/>
-                <a:ea typeface="Calibri"/>
-                <a:cs typeface="Calibri"/>
-              </a:rPr>
-              <a:t>d into </a:t>
-            </a:r>
-            <a:r>
-              <a:rPr lang="en-US" sz="1050" b="0" i="0" u="none" strike="noStrike" cap="none" spc="0">
-                <a:solidFill>
-                  <a:srgbClr val="595959"/>
-                </a:solidFill>
-                <a:latin typeface="Calibri"/>
-                <a:ea typeface="Calibri"/>
-                <a:cs typeface="Calibri"/>
-              </a:rPr>
-              <a:t>a </a:t>
-            </a:r>
-            <a:r>
-              <a:rPr lang="en-US" sz="1050" b="0" i="0" u="none" strike="noStrike" cap="none" spc="0">
-                <a:solidFill>
-                  <a:srgbClr val="595959"/>
-                </a:solidFill>
-                <a:latin typeface="Calibri"/>
-                <a:ea typeface="Calibri"/>
-                <a:cs typeface="Calibri"/>
-              </a:rPr>
-              <a:t>FitnessReport</a:t>
+              <a:t>a FitnessReport</a:t>
             </a:r>
             <a:r>
               <a:rPr lang="it-IT" sz="1050"/>
@@ -20030,11 +20652,11 @@
   <p:clrMapOvr>
     <a:masterClrMapping/>
   </p:clrMapOvr>
-  <mc:AlternateContent xmlns:mc="http://schemas.openxmlformats.org/markup-compatibility/2006">
-    <mc:Choice xmlns:p159="http://schemas.microsoft.com/office/powerpoint/2015/09/main" xmlns:p14="http://schemas.microsoft.com/office/powerpoint/2010/main" Requires="p159">
-      <p:transition p14:dur="500" advClick="1"/>
+  <mc:AlternateContent xmlns:mc="http://schemas.openxmlformats.org/markup-compatibility/2006" xmlns:p159="http://schemas.microsoft.com/office/powerpoint/2015/09/main">
+    <mc:Choice Requires="p159">
+      <p:transition/>
     </mc:Choice>
-    <mc:Fallback>
+    <mc:Fallback xmlns:w="http://schemas.openxmlformats.org/wordprocessingml/2006/main" xmlns:m="http://schemas.openxmlformats.org/officeDocument/2006/math" xmlns="">
       <p:transition advClick="1"/>
     </mc:Fallback>
   </mc:AlternateContent>
@@ -20042,7 +20664,7 @@
 </file>
 
 <file path=ppt/theme/theme1.xml><?xml version="1.0" encoding="utf-8"?>
-<a:theme xmlns:a="http://schemas.openxmlformats.org/drawingml/2006/main" xmlns:r="http://schemas.openxmlformats.org/officeDocument/2006/relationships" xmlns:p="http://schemas.openxmlformats.org/presentationml/2006/main" name="Office Theme">
+<a:theme xmlns:a="http://schemas.openxmlformats.org/drawingml/2006/main" name="Office Theme">
   <a:themeElements>
     <a:clrScheme name="Office">
       <a:dk1>
@@ -20233,11 +20855,12 @@
     </a:fmtScheme>
   </a:themeElements>
   <a:objectDefaults/>
+  <a:extraClrSchemeLst/>
 </a:theme>
 </file>
 
 <file path=ppt/theme/theme2.xml><?xml version="1.0" encoding="utf-8"?>
-<a:theme xmlns:a="http://schemas.openxmlformats.org/drawingml/2006/main" xmlns:r="http://schemas.openxmlformats.org/officeDocument/2006/relationships" xmlns:p="http://schemas.openxmlformats.org/presentationml/2006/main" name="Tema di Office">
+<a:theme xmlns:a="http://schemas.openxmlformats.org/drawingml/2006/main" name="Tema di Office">
   <a:themeElements>
     <a:clrScheme name="Office">
       <a:dk1>
@@ -20448,5 +21071,6 @@
       </a:style>
     </a:lnDef>
   </a:objectDefaults>
+  <a:extraClrSchemeLst/>
 </a:theme>
 </file>
--- a/docs/HealthSOA_Presentation.pptx
+++ b/docs/HealthSOA_Presentation.pptx
@@ -1,30 +1,30 @@
 
 <file path=ppt/presentation.xml><?xml version="1.0" encoding="utf-8"?>
-<p:presentation xmlns:a="http://schemas.openxmlformats.org/drawingml/2006/main" xmlns:r="http://schemas.openxmlformats.org/officeDocument/2006/relationships" xmlns:p="http://schemas.openxmlformats.org/presentationml/2006/main" saveSubsetFonts="1" autoCompressPictures="0">
+<p:presentation xmlns:a="http://schemas.openxmlformats.org/drawingml/2006/main" xmlns:r="http://schemas.openxmlformats.org/officeDocument/2006/relationships" xmlns:p="http://schemas.openxmlformats.org/presentationml/2006/main" xmlns:m="http://schemas.openxmlformats.org/officeDocument/2006/math" xmlns:w="http://schemas.openxmlformats.org/wordprocessingml/2006/main" autoCompressPictures="0" saveSubsetFonts="1">
   <p:sldMasterIdLst>
     <p:sldMasterId id="2147483648" r:id="rId1"/>
   </p:sldMasterIdLst>
   <p:notesMasterIdLst>
-    <p:notesMasterId r:id="rId19"/>
+    <p:notesMasterId r:id="rId21"/>
   </p:notesMasterIdLst>
   <p:sldIdLst>
-    <p:sldId id="256" r:id="rId2"/>
-    <p:sldId id="257" r:id="rId3"/>
-    <p:sldId id="258" r:id="rId4"/>
-    <p:sldId id="259" r:id="rId5"/>
-    <p:sldId id="260" r:id="rId6"/>
-    <p:sldId id="261" r:id="rId7"/>
-    <p:sldId id="262" r:id="rId8"/>
-    <p:sldId id="263" r:id="rId9"/>
-    <p:sldId id="264" r:id="rId10"/>
-    <p:sldId id="265" r:id="rId11"/>
-    <p:sldId id="266" r:id="rId12"/>
-    <p:sldId id="267" r:id="rId13"/>
-    <p:sldId id="268" r:id="rId14"/>
-    <p:sldId id="269" r:id="rId15"/>
-    <p:sldId id="270" r:id="rId16"/>
-    <p:sldId id="271" r:id="rId17"/>
-    <p:sldId id="272" r:id="rId18"/>
+    <p:sldId id="256" r:id="rId4"/>
+    <p:sldId id="257" r:id="rId5"/>
+    <p:sldId id="258" r:id="rId6"/>
+    <p:sldId id="259" r:id="rId7"/>
+    <p:sldId id="260" r:id="rId8"/>
+    <p:sldId id="261" r:id="rId9"/>
+    <p:sldId id="262" r:id="rId10"/>
+    <p:sldId id="263" r:id="rId11"/>
+    <p:sldId id="264" r:id="rId12"/>
+    <p:sldId id="265" r:id="rId13"/>
+    <p:sldId id="266" r:id="rId14"/>
+    <p:sldId id="267" r:id="rId15"/>
+    <p:sldId id="268" r:id="rId16"/>
+    <p:sldId id="269" r:id="rId17"/>
+    <p:sldId id="270" r:id="rId18"/>
+    <p:sldId id="271" r:id="rId19"/>
+    <p:sldId id="272" r:id="rId20"/>
   </p:sldIdLst>
   <p:sldSz cx="9144000" cy="5143500" type="screen16x9"/>
   <p:notesSz cx="5143500" cy="9144000"/>
@@ -120,28 +120,12 @@
       </a:defRPr>
     </a:lvl9pPr>
   </p:defaultTextStyle>
-  <p:extLst>
-    <p:ext uri="{EFAFB233-063F-42B5-8137-9DF3F51BA10A}">
-      <p15:sldGuideLst xmlns:p15="http://schemas.microsoft.com/office/powerpoint/2012/main">
-        <p15:guide id="1" pos="2880">
-          <p15:clr>
-            <a:srgbClr val="A4A3A4"/>
-          </p15:clr>
-        </p15:guide>
-        <p15:guide id="2" orient="horz" pos="1620">
-          <p15:clr>
-            <a:srgbClr val="A4A3A4"/>
-          </p15:clr>
-        </p15:guide>
-      </p15:sldGuideLst>
-    </p:ext>
-  </p:extLst>
 </p:presentation>
 </file>
 
 <file path=ppt/notesMasters/notesMaster1.xml><?xml version="1.0" encoding="utf-8"?>
 <p:notesMaster xmlns:a="http://schemas.openxmlformats.org/drawingml/2006/main" xmlns:r="http://schemas.openxmlformats.org/officeDocument/2006/relationships" xmlns:p="http://schemas.openxmlformats.org/presentationml/2006/main">
-  <p:cSld>
+  <p:cSld name="">
     <p:bg>
       <p:bgRef idx="1001">
         <a:schemeClr val="bg1"/>
@@ -260,8 +244,8 @@
 </file>
 
 <file path=ppt/notesSlides/notesSlide1.xml><?xml version="1.0" encoding="utf-8"?>
-<p:notes xmlns:a="http://schemas.openxmlformats.org/drawingml/2006/main" xmlns:r="http://schemas.openxmlformats.org/officeDocument/2006/relationships" xmlns:p="http://schemas.openxmlformats.org/presentationml/2006/main">
-  <p:cSld>
+<p:notes xmlns:a="http://schemas.openxmlformats.org/drawingml/2006/main" xmlns:r="http://schemas.openxmlformats.org/officeDocument/2006/relationships" xmlns:p="http://schemas.openxmlformats.org/presentationml/2006/main" xmlns:m="http://schemas.openxmlformats.org/officeDocument/2006/math" xmlns:w="http://schemas.openxmlformats.org/wordprocessingml/2006/main">
+  <p:cSld name="">
     <p:spTree>
       <p:nvGrpSpPr>
         <p:cNvPr id="1" name=""/>
@@ -278,9 +262,9 @@
       </p:grpSpPr>
       <p:sp>
         <p:nvSpPr>
-          <p:cNvPr id="334693278" name="Slide Image Placeholder 1"/>
+          <p:cNvPr id="143421495" name="Slide Image Placeholder 1"/>
           <p:cNvSpPr>
-            <a:spLocks noGrp="1" noRot="1" noChangeAspect="1"/>
+            <a:spLocks noChangeAspect="1" noGrp="1" noRot="1"/>
           </p:cNvSpPr>
           <p:nvPr>
             <p:ph type="sldImg"/>
@@ -290,7 +274,7 @@
       </p:sp>
       <p:sp>
         <p:nvSpPr>
-          <p:cNvPr id="723563794" name="Notes Placeholder 2"/>
+          <p:cNvPr id="2057027429" name="Notes Placeholder 2"/>
           <p:cNvSpPr>
             <a:spLocks noGrp="1"/>
           </p:cNvSpPr>
@@ -312,7 +296,7 @@
       </p:sp>
       <p:sp>
         <p:nvSpPr>
-          <p:cNvPr id="1074709343" name="Slide Number Placeholder 3"/>
+          <p:cNvPr id="484594176" name="Slide Number Placeholder 3"/>
           <p:cNvSpPr>
             <a:spLocks noGrp="1"/>
           </p:cNvSpPr>
@@ -345,8 +329,8 @@
 </file>
 
 <file path=ppt/notesSlides/notesSlide10.xml><?xml version="1.0" encoding="utf-8"?>
-<p:notes xmlns:a="http://schemas.openxmlformats.org/drawingml/2006/main" xmlns:r="http://schemas.openxmlformats.org/officeDocument/2006/relationships" xmlns:p="http://schemas.openxmlformats.org/presentationml/2006/main">
-  <p:cSld>
+<p:notes xmlns:a="http://schemas.openxmlformats.org/drawingml/2006/main" xmlns:r="http://schemas.openxmlformats.org/officeDocument/2006/relationships" xmlns:p="http://schemas.openxmlformats.org/presentationml/2006/main" xmlns:m="http://schemas.openxmlformats.org/officeDocument/2006/math" xmlns:w="http://schemas.openxmlformats.org/wordprocessingml/2006/main">
+  <p:cSld name="">
     <p:spTree>
       <p:nvGrpSpPr>
         <p:cNvPr id="1" name=""/>
@@ -363,9 +347,9 @@
       </p:grpSpPr>
       <p:sp>
         <p:nvSpPr>
-          <p:cNvPr id="5829018" name="Slide Image Placeholder 1"/>
+          <p:cNvPr id="1888680311" name="Slide Image Placeholder 1"/>
           <p:cNvSpPr>
-            <a:spLocks noGrp="1" noRot="1" noChangeAspect="1"/>
+            <a:spLocks noChangeAspect="1" noGrp="1" noRot="1"/>
           </p:cNvSpPr>
           <p:nvPr>
             <p:ph type="sldImg"/>
@@ -375,7 +359,7 @@
       </p:sp>
       <p:sp>
         <p:nvSpPr>
-          <p:cNvPr id="1266786754" name="Notes Placeholder 2"/>
+          <p:cNvPr id="954600550" name="Notes Placeholder 2"/>
           <p:cNvSpPr>
             <a:spLocks noGrp="1"/>
           </p:cNvSpPr>
@@ -397,7 +381,11 @@
             </a:r>
             <a:r>
               <a:rPr sz="1400"/>
-              <a:t>et’s look at our Key Data Structures to see how our data is managed by </a:t>
+              <a:t>et’s look at our Key Data Structures to see how our data is managed </a:t>
+            </a:r>
+            <a:r>
+              <a:rPr lang="it-IT" sz="1400"/>
+              <a:t>throughout </a:t>
             </a:r>
             <a:r>
               <a:rPr lang="it-IT" sz="1400"/>
@@ -407,6 +395,7 @@
               <a:rPr sz="1400"/>
               <a:t>the components I just described.</a:t>
             </a:r>
+            <a:endParaRPr/>
           </a:p>
           <a:p>
             <a:pPr marL="239821" indent="-239821">
@@ -436,7 +425,15 @@
             </a:r>
             <a:r>
               <a:rPr sz="1400"/>
-              <a:t>hese are the simple data units managed by our providers, such as patient</a:t>
+              <a:t>hese are the simple data units managed by our </a:t>
+            </a:r>
+            <a:r>
+              <a:rPr lang="it-IT" sz="1400"/>
+              <a:t>individual p</a:t>
+            </a:r>
+            <a:r>
+              <a:rPr sz="1400"/>
+              <a:t>roviders, such as patient</a:t>
             </a:r>
             <a:r>
               <a:rPr lang="it-IT" sz="1400"/>
@@ -452,16 +449,37 @@
             </a:r>
             <a:r>
               <a:rPr sz="1400"/>
-              <a:t>measurements, </a:t>
+              <a:t>measurements</a:t>
             </a:r>
             <a:r>
               <a:rPr lang="it-IT" sz="1400"/>
-              <a:t>each one of them with all of their </a:t>
+              <a:t>;</a:t>
             </a:r>
             <a:r>
               <a:rPr sz="1400"/>
-              <a:t>attributes on screen.</a:t>
-            </a:r>
+              <a:t> </a:t>
+            </a:r>
+            <a:r>
+              <a:rPr lang="it-IT" sz="1400"/>
+              <a:t>each one of them comes with their own set of </a:t>
+            </a:r>
+            <a:r>
+              <a:rPr sz="1400"/>
+              <a:t>attributes</a:t>
+            </a:r>
+            <a:r>
+              <a:rPr lang="it-IT" sz="1400"/>
+              <a:t>, which </a:t>
+            </a:r>
+            <a:r>
+              <a:rPr lang="it-IT" sz="1400"/>
+              <a:t>you can see o</a:t>
+            </a:r>
+            <a:r>
+              <a:rPr sz="1400"/>
+              <a:t>n screen.</a:t>
+            </a:r>
+            <a:endParaRPr/>
           </a:p>
           <a:p>
             <a:pPr marL="239821" indent="-239821">
@@ -561,6 +579,7 @@
               <a:rPr sz="1400"/>
               <a:t> test value is critically bad, the system generates a warning flag.</a:t>
             </a:r>
+            <a:endParaRPr/>
           </a:p>
           <a:p>
             <a:pPr marL="239821" indent="-239821">
@@ -570,15 +589,43 @@
             </a:pPr>
             <a:r>
               <a:rPr sz="1400"/>
-              <a:t>All of this information is packed into the final Fitness Report</a:t>
+              <a:t>All of this information</a:t>
             </a:r>
             <a:r>
               <a:rPr lang="it-IT" sz="1400"/>
-              <a:t>, which gives to </a:t>
+              <a:t>s</a:t>
             </a:r>
             <a:r>
               <a:rPr sz="1400"/>
-              <a:t>the doctor a clear evaluation summary</a:t>
+              <a:t> </a:t>
+            </a:r>
+            <a:r>
+              <a:rPr lang="it-IT" sz="1400"/>
+              <a:t>are</a:t>
+            </a:r>
+            <a:r>
+              <a:rPr sz="1400"/>
+              <a:t> packed into the final Fitness Report</a:t>
+            </a:r>
+            <a:r>
+              <a:rPr lang="it-IT" sz="1400"/>
+              <a:t>, which gives </a:t>
+            </a:r>
+            <a:r>
+              <a:rPr sz="1400"/>
+              <a:t>the doctor a clear </a:t>
+            </a:r>
+            <a:r>
+              <a:rPr lang="it-IT" sz="1400"/>
+              <a:t>and complete e</a:t>
+            </a:r>
+            <a:r>
+              <a:rPr sz="1400"/>
+              <a:t>valuation summary</a:t>
+            </a:r>
+            <a:r>
+              <a:rPr lang="it-IT" sz="1400"/>
+              <a:t> of the patient</a:t>
             </a:r>
             <a:r>
               <a:rPr lang="it-IT" sz="1400"/>
@@ -634,7 +681,7 @@
       </p:sp>
       <p:sp>
         <p:nvSpPr>
-          <p:cNvPr id="1740447021" name="Slide Number Placeholder 3"/>
+          <p:cNvPr id="1344961240" name="Slide Number Placeholder 3"/>
           <p:cNvSpPr>
             <a:spLocks noGrp="1"/>
           </p:cNvSpPr>
@@ -667,8 +714,8 @@
 </file>
 
 <file path=ppt/notesSlides/notesSlide11.xml><?xml version="1.0" encoding="utf-8"?>
-<p:notes xmlns:a="http://schemas.openxmlformats.org/drawingml/2006/main" xmlns:r="http://schemas.openxmlformats.org/officeDocument/2006/relationships" xmlns:p="http://schemas.openxmlformats.org/presentationml/2006/main">
-  <p:cSld>
+<p:notes xmlns:a="http://schemas.openxmlformats.org/drawingml/2006/main" xmlns:r="http://schemas.openxmlformats.org/officeDocument/2006/relationships" xmlns:p="http://schemas.openxmlformats.org/presentationml/2006/main" xmlns:m="http://schemas.openxmlformats.org/officeDocument/2006/math" xmlns:w="http://schemas.openxmlformats.org/wordprocessingml/2006/main">
+  <p:cSld name="">
     <p:spTree>
       <p:nvGrpSpPr>
         <p:cNvPr id="1" name=""/>
@@ -685,9 +732,9 @@
       </p:grpSpPr>
       <p:sp>
         <p:nvSpPr>
-          <p:cNvPr id="2007319037" name="Slide Image Placeholder 1"/>
+          <p:cNvPr id="1673178514" name="Slide Image Placeholder 1"/>
           <p:cNvSpPr>
-            <a:spLocks noGrp="1" noRot="1" noChangeAspect="1"/>
+            <a:spLocks noChangeAspect="1" noGrp="1" noRot="1"/>
           </p:cNvSpPr>
           <p:nvPr>
             <p:ph type="sldImg"/>
@@ -697,7 +744,7 @@
       </p:sp>
       <p:sp>
         <p:nvSpPr>
-          <p:cNvPr id="1019216178" name="Notes Placeholder 2"/>
+          <p:cNvPr id="1243528157" name="Notes Placeholder 2"/>
           <p:cNvSpPr>
             <a:spLocks noGrp="1"/>
           </p:cNvSpPr>
@@ -719,7 +766,7 @@
       </p:sp>
       <p:sp>
         <p:nvSpPr>
-          <p:cNvPr id="1432829086" name="Slide Number Placeholder 3"/>
+          <p:cNvPr id="709027062" name="Slide Number Placeholder 3"/>
           <p:cNvSpPr>
             <a:spLocks noGrp="1"/>
           </p:cNvSpPr>
@@ -752,8 +799,8 @@
 </file>
 
 <file path=ppt/notesSlides/notesSlide12.xml><?xml version="1.0" encoding="utf-8"?>
-<p:notes xmlns:a="http://schemas.openxmlformats.org/drawingml/2006/main" xmlns:r="http://schemas.openxmlformats.org/officeDocument/2006/relationships" xmlns:p="http://schemas.openxmlformats.org/presentationml/2006/main">
-  <p:cSld>
+<p:notes xmlns:a="http://schemas.openxmlformats.org/drawingml/2006/main" xmlns:r="http://schemas.openxmlformats.org/officeDocument/2006/relationships" xmlns:p="http://schemas.openxmlformats.org/presentationml/2006/main" xmlns:m="http://schemas.openxmlformats.org/officeDocument/2006/math" xmlns:w="http://schemas.openxmlformats.org/wordprocessingml/2006/main">
+  <p:cSld name="">
     <p:spTree>
       <p:nvGrpSpPr>
         <p:cNvPr id="1" name=""/>
@@ -770,9 +817,9 @@
       </p:grpSpPr>
       <p:sp>
         <p:nvSpPr>
-          <p:cNvPr id="1527010174" name="Slide Image Placeholder 1"/>
+          <p:cNvPr id="369665188" name="Slide Image Placeholder 1"/>
           <p:cNvSpPr>
-            <a:spLocks noGrp="1" noRot="1" noChangeAspect="1"/>
+            <a:spLocks noChangeAspect="1" noGrp="1" noRot="1"/>
           </p:cNvSpPr>
           <p:nvPr>
             <p:ph type="sldImg"/>
@@ -782,7 +829,7 @@
       </p:sp>
       <p:sp>
         <p:nvSpPr>
-          <p:cNvPr id="1074528870" name="Notes Placeholder 2"/>
+          <p:cNvPr id="960215414" name="Notes Placeholder 2"/>
           <p:cNvSpPr>
             <a:spLocks noGrp="1"/>
           </p:cNvSpPr>
@@ -799,152 +846,152 @@
               <a:defRPr/>
             </a:pPr>
             <a:r>
-              <a:rPr lang="it-IT" dirty="0"/>
+              <a:rPr lang="it-IT"/>
               <a:t>The goal of </a:t>
             </a:r>
             <a:r>
-              <a:rPr lang="it-IT" dirty="0" err="1"/>
+              <a:rPr lang="it-IT"/>
               <a:t>HealthSOA</a:t>
             </a:r>
             <a:r>
-              <a:rPr lang="it-IT" dirty="0"/>
+              <a:rPr lang="it-IT"/>
               <a:t> </a:t>
             </a:r>
             <a:r>
-              <a:rPr lang="it-IT" dirty="0" err="1"/>
+              <a:rPr lang="it-IT"/>
               <a:t>is</a:t>
             </a:r>
             <a:r>
-              <a:rPr lang="it-IT" dirty="0"/>
+              <a:rPr lang="it-IT"/>
               <a:t> to assist </a:t>
             </a:r>
             <a:r>
-              <a:rPr lang="it-IT" dirty="0" err="1"/>
+              <a:rPr lang="it-IT"/>
               <a:t>healthcare</a:t>
             </a:r>
             <a:r>
-              <a:rPr lang="it-IT" dirty="0"/>
+              <a:rPr lang="it-IT"/>
               <a:t> </a:t>
             </a:r>
             <a:r>
-              <a:rPr lang="it-IT" dirty="0" err="1"/>
+              <a:rPr lang="it-IT"/>
               <a:t>professionals</a:t>
             </a:r>
             <a:r>
-              <a:rPr lang="it-IT" dirty="0"/>
+              <a:rPr lang="it-IT"/>
               <a:t> in </a:t>
             </a:r>
             <a:r>
-              <a:rPr lang="it-IT" dirty="0" err="1"/>
+              <a:rPr lang="it-IT"/>
               <a:t>collecting</a:t>
             </a:r>
             <a:r>
-              <a:rPr lang="it-IT" dirty="0"/>
+              <a:rPr lang="it-IT"/>
               <a:t> and </a:t>
             </a:r>
             <a:r>
-              <a:rPr lang="it-IT" dirty="0" err="1"/>
+              <a:rPr lang="it-IT"/>
               <a:t>analysing</a:t>
             </a:r>
             <a:r>
-              <a:rPr lang="it-IT" dirty="0"/>
+              <a:rPr lang="it-IT"/>
               <a:t> </a:t>
             </a:r>
             <a:r>
-              <a:rPr lang="it-IT" dirty="0" err="1"/>
+              <a:rPr lang="it-IT"/>
               <a:t>all</a:t>
             </a:r>
             <a:r>
-              <a:rPr lang="it-IT" dirty="0"/>
+              <a:rPr lang="it-IT"/>
               <a:t> the clinical information </a:t>
             </a:r>
             <a:r>
-              <a:rPr lang="it-IT" dirty="0" err="1"/>
+              <a:rPr lang="it-IT"/>
               <a:t>required</a:t>
             </a:r>
             <a:r>
-              <a:rPr lang="it-IT" dirty="0"/>
+              <a:rPr lang="it-IT"/>
               <a:t> </a:t>
             </a:r>
             <a:r>
-              <a:rPr lang="it-IT" dirty="0" err="1"/>
+              <a:rPr lang="it-IT"/>
               <a:t>before</a:t>
             </a:r>
             <a:r>
-              <a:rPr lang="it-IT" dirty="0"/>
+              <a:rPr lang="it-IT"/>
               <a:t> a </a:t>
             </a:r>
             <a:r>
-              <a:rPr lang="it-IT" dirty="0" err="1"/>
+              <a:rPr lang="it-IT"/>
               <a:t>medical</a:t>
             </a:r>
             <a:r>
-              <a:rPr lang="it-IT" dirty="0"/>
+              <a:rPr lang="it-IT"/>
               <a:t> procedure. To </a:t>
             </a:r>
             <a:r>
-              <a:rPr lang="it-IT" dirty="0" err="1"/>
+              <a:rPr lang="it-IT"/>
               <a:t>achieve</a:t>
             </a:r>
             <a:r>
-              <a:rPr lang="it-IT" dirty="0"/>
+              <a:rPr lang="it-IT"/>
               <a:t> </a:t>
             </a:r>
             <a:r>
-              <a:rPr lang="it-IT" dirty="0" err="1"/>
+              <a:rPr lang="it-IT"/>
               <a:t>this</a:t>
             </a:r>
             <a:r>
-              <a:rPr lang="it-IT" dirty="0"/>
+              <a:rPr lang="it-IT"/>
               <a:t>, </a:t>
             </a:r>
             <a:r>
-              <a:rPr lang="it-IT" dirty="0" err="1"/>
+              <a:rPr lang="it-IT"/>
               <a:t>we</a:t>
             </a:r>
             <a:r>
-              <a:rPr lang="it-IT" dirty="0"/>
+              <a:rPr lang="it-IT"/>
               <a:t> </a:t>
             </a:r>
             <a:r>
-              <a:rPr lang="it-IT" dirty="0" err="1"/>
+              <a:rPr lang="it-IT"/>
               <a:t>identified</a:t>
             </a:r>
             <a:r>
-              <a:rPr lang="it-IT" dirty="0"/>
+              <a:rPr lang="it-IT"/>
               <a:t> </a:t>
             </a:r>
             <a:r>
-              <a:rPr lang="it-IT" dirty="0" err="1"/>
+              <a:rPr lang="it-IT"/>
               <a:t>four</a:t>
             </a:r>
             <a:r>
-              <a:rPr lang="it-IT" dirty="0"/>
+              <a:rPr lang="it-IT"/>
               <a:t> </a:t>
             </a:r>
             <a:r>
-              <a:rPr lang="it-IT" dirty="0" err="1"/>
+              <a:rPr lang="it-IT"/>
               <a:t>main</a:t>
             </a:r>
             <a:r>
-              <a:rPr lang="it-IT" dirty="0"/>
+              <a:rPr lang="it-IT"/>
               <a:t> use </a:t>
             </a:r>
             <a:r>
-              <a:rPr lang="it-IT" dirty="0" err="1"/>
+              <a:rPr lang="it-IT"/>
               <a:t>cases</a:t>
             </a:r>
             <a:r>
-              <a:rPr lang="it-IT" dirty="0"/>
+              <a:rPr lang="it-IT"/>
               <a:t>. </a:t>
             </a:r>
-            <a:endParaRPr lang="en-US" dirty="0"/>
-          </a:p>
-        </p:txBody>
-      </p:sp>
-      <p:sp>
-        <p:nvSpPr>
-          <p:cNvPr id="1823016142" name="Slide Number Placeholder 3"/>
+            <a:endParaRPr lang="en-US"/>
+          </a:p>
+        </p:txBody>
+      </p:sp>
+      <p:sp>
+        <p:nvSpPr>
+          <p:cNvPr id="966184620" name="Slide Number Placeholder 3"/>
           <p:cNvSpPr>
             <a:spLocks noGrp="1"/>
           </p:cNvSpPr>
@@ -977,8 +1024,8 @@
 </file>
 
 <file path=ppt/notesSlides/notesSlide13.xml><?xml version="1.0" encoding="utf-8"?>
-<p:notes xmlns:a="http://schemas.openxmlformats.org/drawingml/2006/main" xmlns:r="http://schemas.openxmlformats.org/officeDocument/2006/relationships" xmlns:p="http://schemas.openxmlformats.org/presentationml/2006/main">
-  <p:cSld>
+<p:notes xmlns:a="http://schemas.openxmlformats.org/drawingml/2006/main" xmlns:r="http://schemas.openxmlformats.org/officeDocument/2006/relationships" xmlns:p="http://schemas.openxmlformats.org/presentationml/2006/main" xmlns:m="http://schemas.openxmlformats.org/officeDocument/2006/math" xmlns:w="http://schemas.openxmlformats.org/wordprocessingml/2006/main">
+  <p:cSld name="">
     <p:spTree>
       <p:nvGrpSpPr>
         <p:cNvPr id="1" name=""/>
@@ -995,9 +1042,9 @@
       </p:grpSpPr>
       <p:sp>
         <p:nvSpPr>
-          <p:cNvPr id="1928051901" name="Slide Image Placeholder 1"/>
+          <p:cNvPr id="1233374714" name="Slide Image Placeholder 1"/>
           <p:cNvSpPr>
-            <a:spLocks noGrp="1" noRot="1" noChangeAspect="1"/>
+            <a:spLocks noChangeAspect="1" noGrp="1" noRot="1"/>
           </p:cNvSpPr>
           <p:nvPr>
             <p:ph type="sldImg"/>
@@ -1007,7 +1054,7 @@
       </p:sp>
       <p:sp>
         <p:nvSpPr>
-          <p:cNvPr id="1854810482" name="Notes Placeholder 2"/>
+          <p:cNvPr id="692961978" name="Notes Placeholder 2"/>
           <p:cNvSpPr>
             <a:spLocks noGrp="1"/>
           </p:cNvSpPr>
@@ -1024,159 +1071,160 @@
               <a:defRPr/>
             </a:pPr>
             <a:r>
-              <a:rPr lang="it-IT" dirty="0"/>
+              <a:rPr lang="it-IT"/>
               <a:t>In </a:t>
             </a:r>
             <a:r>
-              <a:rPr lang="it-IT" dirty="0" err="1"/>
+              <a:rPr lang="it-IT"/>
               <a:t>this</a:t>
             </a:r>
             <a:r>
-              <a:rPr lang="it-IT" dirty="0"/>
+              <a:rPr lang="it-IT"/>
               <a:t> scenario, the </a:t>
             </a:r>
             <a:r>
-              <a:rPr lang="it-IT" dirty="0" err="1"/>
+              <a:rPr lang="it-IT"/>
               <a:t>physician</a:t>
             </a:r>
             <a:r>
-              <a:rPr lang="it-IT" dirty="0"/>
+              <a:rPr lang="it-IT"/>
               <a:t> </a:t>
             </a:r>
             <a:r>
-              <a:rPr lang="it-IT" dirty="0" err="1"/>
+              <a:rPr lang="it-IT"/>
               <a:t>requests</a:t>
             </a:r>
             <a:r>
-              <a:rPr lang="it-IT" dirty="0"/>
+              <a:rPr lang="it-IT"/>
               <a:t> a complete </a:t>
             </a:r>
             <a:r>
-              <a:rPr lang="it-IT" dirty="0" err="1"/>
+              <a:rPr lang="it-IT"/>
               <a:t>evaluation</a:t>
             </a:r>
             <a:r>
-              <a:rPr lang="it-IT" dirty="0"/>
+              <a:rPr lang="it-IT"/>
               <a:t> of a </a:t>
             </a:r>
             <a:r>
-              <a:rPr lang="it-IT" dirty="0" err="1"/>
+              <a:rPr lang="it-IT"/>
               <a:t>patient's</a:t>
             </a:r>
             <a:r>
-              <a:rPr lang="it-IT" dirty="0"/>
+              <a:rPr lang="it-IT"/>
               <a:t> </a:t>
             </a:r>
             <a:r>
-              <a:rPr lang="it-IT" dirty="0" err="1"/>
+              <a:rPr lang="it-IT"/>
               <a:t>suitability</a:t>
             </a:r>
             <a:r>
-              <a:rPr lang="it-IT" dirty="0"/>
+              <a:rPr lang="it-IT"/>
               <a:t> for a </a:t>
             </a:r>
             <a:r>
-              <a:rPr lang="it-IT" dirty="0" err="1"/>
+              <a:rPr lang="it-IT"/>
               <a:t>medical</a:t>
             </a:r>
             <a:r>
-              <a:rPr lang="it-IT" dirty="0"/>
+              <a:rPr lang="it-IT"/>
               <a:t> procedure or surgery. </a:t>
             </a:r>
+            <a:endParaRPr/>
           </a:p>
           <a:p>
             <a:pPr>
               <a:defRPr/>
             </a:pPr>
-            <a:endParaRPr lang="it-IT" dirty="0"/>
+            <a:endParaRPr lang="it-IT"/>
           </a:p>
           <a:p>
             <a:pPr>
               <a:defRPr/>
             </a:pPr>
             <a:r>
-              <a:rPr lang="it-IT" dirty="0"/>
+              <a:rPr lang="it-IT"/>
               <a:t>From a </a:t>
             </a:r>
             <a:r>
-              <a:rPr lang="it-IT" dirty="0" err="1"/>
+              <a:rPr lang="it-IT"/>
               <a:t>functional</a:t>
             </a:r>
             <a:r>
-              <a:rPr lang="it-IT" dirty="0"/>
+              <a:rPr lang="it-IT"/>
               <a:t> </a:t>
             </a:r>
             <a:r>
-              <a:rPr lang="it-IT" dirty="0" err="1"/>
+              <a:rPr lang="it-IT"/>
               <a:t>perspective</a:t>
             </a:r>
             <a:r>
-              <a:rPr lang="it-IT" dirty="0"/>
+              <a:rPr lang="it-IT"/>
               <a:t>, </a:t>
             </a:r>
             <a:r>
-              <a:rPr lang="it-IT" dirty="0" err="1"/>
+              <a:rPr lang="it-IT"/>
               <a:t>this</a:t>
             </a:r>
             <a:r>
-              <a:rPr lang="it-IT" dirty="0"/>
+              <a:rPr lang="it-IT"/>
               <a:t> use case </a:t>
             </a:r>
             <a:r>
-              <a:rPr lang="it-IT" dirty="0" err="1"/>
+              <a:rPr lang="it-IT"/>
               <a:t>transforms</a:t>
             </a:r>
             <a:r>
-              <a:rPr lang="it-IT" dirty="0"/>
+              <a:rPr lang="it-IT"/>
               <a:t> data coming from multiple sources </a:t>
             </a:r>
             <a:r>
-              <a:rPr lang="it-IT" dirty="0" err="1"/>
+              <a:rPr lang="it-IT"/>
               <a:t>into</a:t>
             </a:r>
             <a:r>
-              <a:rPr lang="it-IT" dirty="0"/>
+              <a:rPr lang="it-IT"/>
               <a:t> a single clinical </a:t>
             </a:r>
             <a:r>
-              <a:rPr lang="it-IT" dirty="0" err="1"/>
+              <a:rPr lang="it-IT"/>
               <a:t>assessment</a:t>
             </a:r>
             <a:r>
-              <a:rPr lang="it-IT" dirty="0"/>
+              <a:rPr lang="it-IT"/>
               <a:t> </a:t>
             </a:r>
             <a:r>
-              <a:rPr lang="it-IT" dirty="0" err="1"/>
+              <a:rPr lang="it-IT"/>
               <a:t>that</a:t>
             </a:r>
             <a:r>
-              <a:rPr lang="it-IT" dirty="0"/>
+              <a:rPr lang="it-IT"/>
               <a:t> </a:t>
             </a:r>
             <a:r>
-              <a:rPr lang="it-IT" dirty="0" err="1"/>
+              <a:rPr lang="it-IT"/>
               <a:t>is</a:t>
             </a:r>
             <a:r>
-              <a:rPr lang="it-IT" dirty="0"/>
+              <a:rPr lang="it-IT"/>
               <a:t> ready to support </a:t>
             </a:r>
             <a:r>
-              <a:rPr lang="it-IT" dirty="0" err="1"/>
+              <a:rPr lang="it-IT"/>
               <a:t>medical</a:t>
             </a:r>
             <a:r>
-              <a:rPr lang="it-IT" dirty="0"/>
+              <a:rPr lang="it-IT"/>
               <a:t> decision-making.</a:t>
             </a:r>
-            <a:endParaRPr dirty="0"/>
-          </a:p>
-        </p:txBody>
-      </p:sp>
-      <p:sp>
-        <p:nvSpPr>
-          <p:cNvPr id="1774813182" name="Slide Number Placeholder 3"/>
+            <a:endParaRPr/>
+          </a:p>
+        </p:txBody>
+      </p:sp>
+      <p:sp>
+        <p:nvSpPr>
+          <p:cNvPr id="1502021206" name="Slide Number Placeholder 3"/>
           <p:cNvSpPr>
             <a:spLocks noGrp="1"/>
           </p:cNvSpPr>
@@ -1209,8 +1257,8 @@
 </file>
 
 <file path=ppt/notesSlides/notesSlide14.xml><?xml version="1.0" encoding="utf-8"?>
-<p:notes xmlns:a="http://schemas.openxmlformats.org/drawingml/2006/main" xmlns:r="http://schemas.openxmlformats.org/officeDocument/2006/relationships" xmlns:p="http://schemas.openxmlformats.org/presentationml/2006/main">
-  <p:cSld>
+<p:notes xmlns:a="http://schemas.openxmlformats.org/drawingml/2006/main" xmlns:r="http://schemas.openxmlformats.org/officeDocument/2006/relationships" xmlns:p="http://schemas.openxmlformats.org/presentationml/2006/main" xmlns:m="http://schemas.openxmlformats.org/officeDocument/2006/math" xmlns:w="http://schemas.openxmlformats.org/wordprocessingml/2006/main">
+  <p:cSld name="">
     <p:spTree>
       <p:nvGrpSpPr>
         <p:cNvPr id="1" name=""/>
@@ -1227,9 +1275,9 @@
       </p:grpSpPr>
       <p:sp>
         <p:nvSpPr>
-          <p:cNvPr id="1368255645" name="Slide Image Placeholder 1"/>
+          <p:cNvPr id="822763164" name="Slide Image Placeholder 1"/>
           <p:cNvSpPr>
-            <a:spLocks noGrp="1" noRot="1" noChangeAspect="1"/>
+            <a:spLocks noChangeAspect="1" noGrp="1" noRot="1"/>
           </p:cNvSpPr>
           <p:nvPr>
             <p:ph type="sldImg"/>
@@ -1239,7 +1287,7 @@
       </p:sp>
       <p:sp>
         <p:nvSpPr>
-          <p:cNvPr id="2066397538" name="Notes Placeholder 2"/>
+          <p:cNvPr id="1372981883" name="Notes Placeholder 2"/>
           <p:cNvSpPr>
             <a:spLocks noGrp="1"/>
           </p:cNvSpPr>
@@ -1256,215 +1304,216 @@
               <a:defRPr/>
             </a:pPr>
             <a:r>
-              <a:rPr lang="it-IT" dirty="0"/>
+              <a:rPr lang="it-IT"/>
               <a:t>In </a:t>
             </a:r>
             <a:r>
-              <a:rPr lang="it-IT" dirty="0" err="1"/>
+              <a:rPr lang="it-IT"/>
               <a:t>this</a:t>
             </a:r>
             <a:r>
-              <a:rPr lang="it-IT" dirty="0"/>
+              <a:rPr lang="it-IT"/>
               <a:t> scenario, the </a:t>
             </a:r>
             <a:r>
-              <a:rPr lang="it-IT" dirty="0" err="1"/>
+              <a:rPr lang="it-IT"/>
               <a:t>physician</a:t>
             </a:r>
             <a:r>
-              <a:rPr lang="it-IT" dirty="0"/>
+              <a:rPr lang="it-IT"/>
               <a:t> </a:t>
             </a:r>
             <a:r>
-              <a:rPr lang="it-IT" dirty="0" err="1"/>
+              <a:rPr lang="it-IT"/>
               <a:t>does</a:t>
             </a:r>
             <a:r>
-              <a:rPr lang="it-IT" dirty="0"/>
+              <a:rPr lang="it-IT"/>
               <a:t> </a:t>
             </a:r>
             <a:r>
-              <a:rPr lang="it-IT" dirty="0" err="1"/>
+              <a:rPr lang="it-IT"/>
               <a:t>not</a:t>
             </a:r>
             <a:r>
-              <a:rPr lang="it-IT" dirty="0"/>
+              <a:rPr lang="it-IT"/>
               <a:t> </a:t>
             </a:r>
             <a:r>
-              <a:rPr lang="it-IT" dirty="0" err="1"/>
+              <a:rPr lang="it-IT"/>
               <a:t>require</a:t>
             </a:r>
             <a:r>
-              <a:rPr lang="it-IT" dirty="0"/>
+              <a:rPr lang="it-IT"/>
               <a:t> a complete </a:t>
             </a:r>
             <a:r>
-              <a:rPr lang="it-IT" dirty="0" err="1"/>
+              <a:rPr lang="it-IT"/>
               <a:t>assessment</a:t>
             </a:r>
             <a:r>
-              <a:rPr lang="it-IT" dirty="0"/>
+              <a:rPr lang="it-IT"/>
               <a:t>, </a:t>
             </a:r>
             <a:r>
-              <a:rPr lang="it-IT" dirty="0" err="1"/>
+              <a:rPr lang="it-IT"/>
               <a:t>but</a:t>
             </a:r>
             <a:r>
-              <a:rPr lang="it-IT" dirty="0"/>
+              <a:rPr lang="it-IT"/>
               <a:t> </a:t>
             </a:r>
             <a:r>
-              <a:rPr lang="it-IT" dirty="0" err="1"/>
+              <a:rPr lang="it-IT"/>
               <a:t>simply</a:t>
             </a:r>
             <a:r>
-              <a:rPr lang="it-IT" dirty="0"/>
+              <a:rPr lang="it-IT"/>
               <a:t> </a:t>
             </a:r>
             <a:r>
-              <a:rPr lang="it-IT" dirty="0" err="1"/>
+              <a:rPr lang="it-IT"/>
               <a:t>wants</a:t>
             </a:r>
             <a:r>
-              <a:rPr lang="it-IT" dirty="0"/>
+              <a:rPr lang="it-IT"/>
               <a:t> to review the </a:t>
             </a:r>
             <a:r>
-              <a:rPr lang="it-IT" dirty="0" err="1"/>
+              <a:rPr lang="it-IT"/>
               <a:t>patient's</a:t>
             </a:r>
             <a:r>
-              <a:rPr lang="it-IT" dirty="0"/>
+              <a:rPr lang="it-IT"/>
               <a:t> </a:t>
             </a:r>
             <a:r>
-              <a:rPr lang="it-IT" dirty="0" err="1"/>
+              <a:rPr lang="it-IT"/>
               <a:t>medical</a:t>
             </a:r>
             <a:r>
-              <a:rPr lang="it-IT" dirty="0"/>
+              <a:rPr lang="it-IT"/>
               <a:t> background. </a:t>
             </a:r>
+            <a:endParaRPr/>
           </a:p>
           <a:p>
             <a:pPr>
               <a:defRPr/>
             </a:pPr>
-            <a:endParaRPr lang="it-IT" dirty="0"/>
+            <a:endParaRPr lang="it-IT"/>
           </a:p>
           <a:p>
             <a:pPr>
               <a:defRPr/>
             </a:pPr>
             <a:r>
-              <a:rPr lang="it-IT" dirty="0"/>
+              <a:rPr lang="it-IT"/>
               <a:t>From the end </a:t>
             </a:r>
             <a:r>
-              <a:rPr lang="it-IT" dirty="0" err="1"/>
+              <a:rPr lang="it-IT"/>
               <a:t>user's</a:t>
             </a:r>
             <a:r>
-              <a:rPr lang="it-IT" dirty="0"/>
+              <a:rPr lang="it-IT"/>
               <a:t> </a:t>
             </a:r>
             <a:r>
-              <a:rPr lang="it-IT" dirty="0" err="1"/>
+              <a:rPr lang="it-IT"/>
               <a:t>perspective</a:t>
             </a:r>
             <a:r>
-              <a:rPr lang="it-IT" dirty="0"/>
+              <a:rPr lang="it-IT"/>
               <a:t>, </a:t>
             </a:r>
             <a:r>
-              <a:rPr lang="it-IT" dirty="0" err="1"/>
+              <a:rPr lang="it-IT"/>
               <a:t>there</a:t>
             </a:r>
             <a:r>
-              <a:rPr lang="it-IT" dirty="0"/>
+              <a:rPr lang="it-IT"/>
               <a:t> </a:t>
             </a:r>
             <a:r>
-              <a:rPr lang="it-IT" dirty="0" err="1"/>
+              <a:rPr lang="it-IT"/>
               <a:t>is</a:t>
             </a:r>
             <a:r>
-              <a:rPr lang="it-IT" dirty="0"/>
+              <a:rPr lang="it-IT"/>
               <a:t> no </a:t>
             </a:r>
             <a:r>
-              <a:rPr lang="it-IT" dirty="0" err="1"/>
+              <a:rPr lang="it-IT"/>
               <a:t>need</a:t>
             </a:r>
             <a:r>
-              <a:rPr lang="it-IT" dirty="0"/>
+              <a:rPr lang="it-IT"/>
               <a:t> to query multiple systems </a:t>
             </a:r>
             <a:r>
-              <a:rPr lang="it-IT" dirty="0" err="1"/>
+              <a:rPr lang="it-IT"/>
               <a:t>separately</a:t>
             </a:r>
             <a:r>
-              <a:rPr lang="it-IT" dirty="0"/>
+              <a:rPr lang="it-IT"/>
               <a:t>: </a:t>
             </a:r>
             <a:r>
-              <a:rPr lang="it-IT" dirty="0" err="1"/>
+              <a:rPr lang="it-IT"/>
               <a:t>all</a:t>
             </a:r>
             <a:r>
-              <a:rPr lang="it-IT" dirty="0"/>
+              <a:rPr lang="it-IT"/>
               <a:t> </a:t>
             </a:r>
             <a:r>
-              <a:rPr lang="it-IT" dirty="0" err="1"/>
+              <a:rPr lang="it-IT"/>
               <a:t>relevant</a:t>
             </a:r>
             <a:r>
-              <a:rPr lang="it-IT" dirty="0"/>
+              <a:rPr lang="it-IT"/>
               <a:t> information </a:t>
             </a:r>
             <a:r>
-              <a:rPr lang="it-IT" dirty="0" err="1"/>
+              <a:rPr lang="it-IT"/>
               <a:t>is</a:t>
             </a:r>
             <a:r>
-              <a:rPr lang="it-IT" dirty="0"/>
+              <a:rPr lang="it-IT"/>
               <a:t> </a:t>
             </a:r>
             <a:r>
-              <a:rPr lang="it-IT" dirty="0" err="1"/>
+              <a:rPr lang="it-IT"/>
               <a:t>presented</a:t>
             </a:r>
             <a:r>
-              <a:rPr lang="it-IT" dirty="0"/>
+              <a:rPr lang="it-IT"/>
               <a:t> in a single, </a:t>
             </a:r>
             <a:r>
-              <a:rPr lang="it-IT" dirty="0" err="1"/>
+              <a:rPr lang="it-IT"/>
               <a:t>coherent</a:t>
             </a:r>
             <a:r>
-              <a:rPr lang="it-IT" dirty="0"/>
+              <a:rPr lang="it-IT"/>
               <a:t> </a:t>
             </a:r>
             <a:r>
-              <a:rPr lang="it-IT" dirty="0" err="1"/>
+              <a:rPr lang="it-IT"/>
               <a:t>view</a:t>
             </a:r>
             <a:r>
-              <a:rPr lang="it-IT" dirty="0"/>
+              <a:rPr lang="it-IT"/>
               <a:t>.</a:t>
             </a:r>
-            <a:endParaRPr dirty="0"/>
-          </a:p>
-        </p:txBody>
-      </p:sp>
-      <p:sp>
-        <p:nvSpPr>
-          <p:cNvPr id="964123621" name="Slide Number Placeholder 3"/>
+            <a:endParaRPr/>
+          </a:p>
+        </p:txBody>
+      </p:sp>
+      <p:sp>
+        <p:nvSpPr>
+          <p:cNvPr id="854177272" name="Slide Number Placeholder 3"/>
           <p:cNvSpPr>
             <a:spLocks noGrp="1"/>
           </p:cNvSpPr>
@@ -1497,8 +1546,8 @@
 </file>
 
 <file path=ppt/notesSlides/notesSlide15.xml><?xml version="1.0" encoding="utf-8"?>
-<p:notes xmlns:a="http://schemas.openxmlformats.org/drawingml/2006/main" xmlns:r="http://schemas.openxmlformats.org/officeDocument/2006/relationships" xmlns:p="http://schemas.openxmlformats.org/presentationml/2006/main">
-  <p:cSld>
+<p:notes xmlns:a="http://schemas.openxmlformats.org/drawingml/2006/main" xmlns:r="http://schemas.openxmlformats.org/officeDocument/2006/relationships" xmlns:p="http://schemas.openxmlformats.org/presentationml/2006/main" xmlns:m="http://schemas.openxmlformats.org/officeDocument/2006/math" xmlns:w="http://schemas.openxmlformats.org/wordprocessingml/2006/main">
+  <p:cSld name="">
     <p:spTree>
       <p:nvGrpSpPr>
         <p:cNvPr id="1" name=""/>
@@ -1515,9 +1564,9 @@
       </p:grpSpPr>
       <p:sp>
         <p:nvSpPr>
-          <p:cNvPr id="1354030178" name="Slide Image Placeholder 1"/>
+          <p:cNvPr id="2052349464" name="Slide Image Placeholder 1"/>
           <p:cNvSpPr>
-            <a:spLocks noGrp="1" noRot="1" noChangeAspect="1"/>
+            <a:spLocks noChangeAspect="1" noGrp="1" noRot="1"/>
           </p:cNvSpPr>
           <p:nvPr>
             <p:ph type="sldImg"/>
@@ -1527,7 +1576,7 @@
       </p:sp>
       <p:sp>
         <p:nvSpPr>
-          <p:cNvPr id="523626013" name="Notes Placeholder 2"/>
+          <p:cNvPr id="1676528282" name="Notes Placeholder 2"/>
           <p:cNvSpPr>
             <a:spLocks noGrp="1"/>
           </p:cNvSpPr>
@@ -1544,72 +1593,72 @@
               <a:defRPr/>
             </a:pPr>
             <a:r>
-              <a:rPr lang="it-IT" dirty="0"/>
+              <a:rPr lang="it-IT"/>
               <a:t>The </a:t>
             </a:r>
             <a:r>
-              <a:rPr lang="it-IT" dirty="0" err="1"/>
+              <a:rPr lang="it-IT"/>
               <a:t>physician</a:t>
             </a:r>
             <a:r>
-              <a:rPr lang="it-IT" dirty="0"/>
+              <a:rPr lang="it-IT"/>
               <a:t> can </a:t>
             </a:r>
             <a:r>
-              <a:rPr lang="it-IT" dirty="0" err="1"/>
+              <a:rPr lang="it-IT"/>
               <a:t>request</a:t>
             </a:r>
             <a:r>
-              <a:rPr lang="it-IT" dirty="0"/>
+              <a:rPr lang="it-IT"/>
               <a:t> a </a:t>
             </a:r>
             <a:r>
-              <a:rPr lang="it-IT" dirty="0" err="1"/>
+              <a:rPr lang="it-IT"/>
               <a:t>diagnostic</a:t>
             </a:r>
             <a:r>
-              <a:rPr lang="it-IT" dirty="0"/>
+              <a:rPr lang="it-IT"/>
               <a:t> panel, </a:t>
             </a:r>
             <a:r>
-              <a:rPr lang="it-IT" dirty="0" err="1"/>
+              <a:rPr lang="it-IT"/>
               <a:t>such</a:t>
             </a:r>
             <a:r>
-              <a:rPr lang="it-IT" dirty="0"/>
+              <a:rPr lang="it-IT"/>
               <a:t> </a:t>
             </a:r>
             <a:r>
-              <a:rPr lang="it-IT" dirty="0" err="1"/>
+              <a:rPr lang="it-IT"/>
               <a:t>as</a:t>
             </a:r>
             <a:r>
-              <a:rPr lang="it-IT" dirty="0"/>
+              <a:rPr lang="it-IT"/>
               <a:t> a </a:t>
             </a:r>
             <a:r>
-              <a:rPr lang="it-IT" dirty="0" err="1"/>
+              <a:rPr lang="it-IT"/>
               <a:t>renal</a:t>
             </a:r>
             <a:r>
-              <a:rPr lang="it-IT" dirty="0"/>
+              <a:rPr lang="it-IT"/>
               <a:t> or </a:t>
             </a:r>
             <a:r>
-              <a:rPr lang="it-IT" dirty="0" err="1"/>
+              <a:rPr lang="it-IT"/>
               <a:t>metabolic</a:t>
             </a:r>
             <a:r>
-              <a:rPr lang="it-IT" dirty="0"/>
+              <a:rPr lang="it-IT"/>
               <a:t> panel. </a:t>
             </a:r>
-            <a:endParaRPr dirty="0"/>
-          </a:p>
-        </p:txBody>
-      </p:sp>
-      <p:sp>
-        <p:nvSpPr>
-          <p:cNvPr id="835117002" name="Slide Number Placeholder 3"/>
+            <a:endParaRPr/>
+          </a:p>
+        </p:txBody>
+      </p:sp>
+      <p:sp>
+        <p:nvSpPr>
+          <p:cNvPr id="1915865136" name="Slide Number Placeholder 3"/>
           <p:cNvSpPr>
             <a:spLocks noGrp="1"/>
           </p:cNvSpPr>
@@ -1642,8 +1691,8 @@
 </file>
 
 <file path=ppt/notesSlides/notesSlide16.xml><?xml version="1.0" encoding="utf-8"?>
-<p:notes xmlns:a="http://schemas.openxmlformats.org/drawingml/2006/main" xmlns:r="http://schemas.openxmlformats.org/officeDocument/2006/relationships" xmlns:p="http://schemas.openxmlformats.org/presentationml/2006/main">
-  <p:cSld>
+<p:notes xmlns:a="http://schemas.openxmlformats.org/drawingml/2006/main" xmlns:r="http://schemas.openxmlformats.org/officeDocument/2006/relationships" xmlns:p="http://schemas.openxmlformats.org/presentationml/2006/main" xmlns:m="http://schemas.openxmlformats.org/officeDocument/2006/math" xmlns:w="http://schemas.openxmlformats.org/wordprocessingml/2006/main">
+  <p:cSld name="">
     <p:spTree>
       <p:nvGrpSpPr>
         <p:cNvPr id="1" name=""/>
@@ -1660,9 +1709,9 @@
       </p:grpSpPr>
       <p:sp>
         <p:nvSpPr>
-          <p:cNvPr id="700367680" name="Slide Image Placeholder 1"/>
+          <p:cNvPr id="268727454" name="Slide Image Placeholder 1"/>
           <p:cNvSpPr>
-            <a:spLocks noGrp="1" noRot="1" noChangeAspect="1"/>
+            <a:spLocks noChangeAspect="1" noGrp="1" noRot="1"/>
           </p:cNvSpPr>
           <p:nvPr>
             <p:ph type="sldImg"/>
@@ -1672,7 +1721,7 @@
       </p:sp>
       <p:sp>
         <p:nvSpPr>
-          <p:cNvPr id="1073414701" name="Notes Placeholder 2"/>
+          <p:cNvPr id="611441305" name="Notes Placeholder 2"/>
           <p:cNvSpPr>
             <a:spLocks noGrp="1"/>
           </p:cNvSpPr>
@@ -1689,56 +1738,56 @@
               <a:defRPr/>
             </a:pPr>
             <a:r>
-              <a:rPr lang="it-IT" dirty="0"/>
+              <a:rPr lang="it-IT"/>
               <a:t>In </a:t>
             </a:r>
             <a:r>
-              <a:rPr lang="it-IT" dirty="0" err="1"/>
+              <a:rPr lang="it-IT"/>
               <a:t>this</a:t>
             </a:r>
             <a:r>
-              <a:rPr lang="it-IT" dirty="0"/>
+              <a:rPr lang="it-IT"/>
               <a:t> scenario, the </a:t>
             </a:r>
             <a:r>
-              <a:rPr lang="it-IT" dirty="0" err="1"/>
+              <a:rPr lang="it-IT"/>
               <a:t>physician</a:t>
             </a:r>
             <a:r>
-              <a:rPr lang="it-IT" dirty="0"/>
+              <a:rPr lang="it-IT"/>
               <a:t> </a:t>
             </a:r>
             <a:r>
-              <a:rPr lang="it-IT" dirty="0" err="1"/>
+              <a:rPr lang="it-IT"/>
               <a:t>creates</a:t>
             </a:r>
             <a:r>
-              <a:rPr lang="it-IT" dirty="0"/>
+              <a:rPr lang="it-IT"/>
               <a:t> a new </a:t>
             </a:r>
             <a:r>
-              <a:rPr lang="it-IT" dirty="0" err="1"/>
+              <a:rPr lang="it-IT"/>
               <a:t>prescription</a:t>
             </a:r>
             <a:r>
-              <a:rPr lang="it-IT" dirty="0"/>
+              <a:rPr lang="it-IT"/>
               <a:t> for a </a:t>
             </a:r>
             <a:r>
-              <a:rPr lang="it-IT" dirty="0" err="1"/>
+              <a:rPr lang="it-IT"/>
               <a:t>patient</a:t>
             </a:r>
             <a:r>
-              <a:rPr lang="it-IT" dirty="0"/>
+              <a:rPr lang="it-IT"/>
               <a:t>.</a:t>
             </a:r>
-            <a:endParaRPr dirty="0"/>
-          </a:p>
-        </p:txBody>
-      </p:sp>
-      <p:sp>
-        <p:nvSpPr>
-          <p:cNvPr id="482636732" name="Slide Number Placeholder 3"/>
+            <a:endParaRPr/>
+          </a:p>
+        </p:txBody>
+      </p:sp>
+      <p:sp>
+        <p:nvSpPr>
+          <p:cNvPr id="1367343927" name="Slide Number Placeholder 3"/>
           <p:cNvSpPr>
             <a:spLocks noGrp="1"/>
           </p:cNvSpPr>
@@ -1771,8 +1820,8 @@
 </file>
 
 <file path=ppt/notesSlides/notesSlide17.xml><?xml version="1.0" encoding="utf-8"?>
-<p:notes xmlns:a="http://schemas.openxmlformats.org/drawingml/2006/main" xmlns:r="http://schemas.openxmlformats.org/officeDocument/2006/relationships" xmlns:p="http://schemas.openxmlformats.org/presentationml/2006/main">
-  <p:cSld>
+<p:notes xmlns:a="http://schemas.openxmlformats.org/drawingml/2006/main" xmlns:r="http://schemas.openxmlformats.org/officeDocument/2006/relationships" xmlns:p="http://schemas.openxmlformats.org/presentationml/2006/main" xmlns:m="http://schemas.openxmlformats.org/officeDocument/2006/math" xmlns:w="http://schemas.openxmlformats.org/wordprocessingml/2006/main">
+  <p:cSld name="">
     <p:spTree>
       <p:nvGrpSpPr>
         <p:cNvPr id="1" name=""/>
@@ -1789,9 +1838,9 @@
       </p:grpSpPr>
       <p:sp>
         <p:nvSpPr>
-          <p:cNvPr id="1108187708" name="Slide Image Placeholder 1"/>
+          <p:cNvPr id="18063562" name="Slide Image Placeholder 1"/>
           <p:cNvSpPr>
-            <a:spLocks noGrp="1" noRot="1" noChangeAspect="1"/>
+            <a:spLocks noChangeAspect="1" noGrp="1" noRot="1"/>
           </p:cNvSpPr>
           <p:nvPr>
             <p:ph type="sldImg"/>
@@ -1801,7 +1850,7 @@
       </p:sp>
       <p:sp>
         <p:nvSpPr>
-          <p:cNvPr id="1840440046" name="Notes Placeholder 2"/>
+          <p:cNvPr id="1696457355" name="Notes Placeholder 2"/>
           <p:cNvSpPr>
             <a:spLocks noGrp="1"/>
           </p:cNvSpPr>
@@ -1818,336 +1867,336 @@
               <a:defRPr/>
             </a:pPr>
             <a:r>
-              <a:rPr lang="it-IT" dirty="0"/>
+              <a:rPr lang="it-IT"/>
               <a:t>To conclude, </a:t>
             </a:r>
             <a:r>
-              <a:rPr lang="it-IT" dirty="0" err="1"/>
+              <a:rPr lang="it-IT"/>
               <a:t>this</a:t>
             </a:r>
             <a:r>
-              <a:rPr lang="it-IT" dirty="0"/>
+              <a:rPr lang="it-IT"/>
               <a:t> </a:t>
             </a:r>
             <a:r>
-              <a:rPr lang="it-IT" dirty="0" err="1"/>
+              <a:rPr lang="it-IT"/>
               <a:t>architecture</a:t>
             </a:r>
             <a:r>
-              <a:rPr lang="it-IT" dirty="0"/>
+              <a:rPr lang="it-IT"/>
               <a:t> </a:t>
             </a:r>
             <a:r>
-              <a:rPr lang="it-IT" dirty="0" err="1"/>
+              <a:rPr lang="it-IT"/>
               <a:t>has</a:t>
             </a:r>
             <a:r>
-              <a:rPr lang="it-IT" dirty="0"/>
+              <a:rPr lang="it-IT"/>
               <a:t> </a:t>
             </a:r>
             <a:r>
-              <a:rPr lang="it-IT" dirty="0" err="1"/>
+              <a:rPr lang="it-IT"/>
               <a:t>been</a:t>
             </a:r>
             <a:r>
-              <a:rPr lang="it-IT" dirty="0"/>
+              <a:rPr lang="it-IT"/>
               <a:t> </a:t>
             </a:r>
             <a:r>
-              <a:rPr lang="it-IT" dirty="0" err="1"/>
+              <a:rPr lang="it-IT"/>
               <a:t>built</a:t>
             </a:r>
             <a:r>
-              <a:rPr lang="it-IT" dirty="0"/>
+              <a:rPr lang="it-IT"/>
               <a:t> </a:t>
             </a:r>
             <a:r>
-              <a:rPr lang="it-IT" dirty="0" err="1"/>
+              <a:rPr lang="it-IT"/>
               <a:t>using</a:t>
             </a:r>
             <a:r>
-              <a:rPr lang="it-IT" dirty="0"/>
+              <a:rPr lang="it-IT"/>
               <a:t> </a:t>
             </a:r>
             <a:r>
-              <a:rPr lang="it-IT" dirty="0" err="1"/>
+              <a:rPr lang="it-IT"/>
               <a:t>technologies</a:t>
             </a:r>
             <a:r>
-              <a:rPr lang="it-IT" dirty="0"/>
+              <a:rPr lang="it-IT"/>
               <a:t> </a:t>
             </a:r>
             <a:r>
-              <a:rPr lang="it-IT" dirty="0" err="1"/>
+              <a:rPr lang="it-IT"/>
               <a:t>commonly</a:t>
             </a:r>
             <a:r>
-              <a:rPr lang="it-IT" dirty="0"/>
+              <a:rPr lang="it-IT"/>
               <a:t> </a:t>
             </a:r>
             <a:r>
-              <a:rPr lang="it-IT" dirty="0" err="1"/>
+              <a:rPr lang="it-IT"/>
               <a:t>adopted</a:t>
             </a:r>
             <a:r>
-              <a:rPr lang="it-IT" dirty="0"/>
+              <a:rPr lang="it-IT"/>
               <a:t> in </a:t>
             </a:r>
             <a:r>
-              <a:rPr lang="it-IT" dirty="0" err="1"/>
+              <a:rPr lang="it-IT"/>
               <a:t>modern</a:t>
             </a:r>
             <a:r>
-              <a:rPr lang="it-IT" dirty="0"/>
+              <a:rPr lang="it-IT"/>
               <a:t> </a:t>
             </a:r>
             <a:r>
-              <a:rPr lang="it-IT" dirty="0" err="1"/>
+              <a:rPr lang="it-IT"/>
               <a:t>microservice</a:t>
             </a:r>
             <a:r>
-              <a:rPr lang="it-IT" dirty="0"/>
+              <a:rPr lang="it-IT"/>
               <a:t> </a:t>
             </a:r>
             <a:r>
-              <a:rPr lang="it-IT" dirty="0" err="1"/>
+              <a:rPr lang="it-IT"/>
               <a:t>ecosystems</a:t>
             </a:r>
             <a:r>
-              <a:rPr lang="it-IT" dirty="0"/>
+              <a:rPr lang="it-IT"/>
               <a:t>. </a:t>
             </a:r>
             <a:r>
-              <a:rPr lang="it-IT" dirty="0" err="1"/>
+              <a:rPr lang="it-IT"/>
               <a:t>We</a:t>
             </a:r>
             <a:r>
-              <a:rPr lang="it-IT" dirty="0"/>
+              <a:rPr lang="it-IT"/>
               <a:t> </a:t>
             </a:r>
             <a:r>
-              <a:rPr lang="it-IT" dirty="0" err="1"/>
+              <a:rPr lang="it-IT"/>
               <a:t>used</a:t>
             </a:r>
             <a:r>
-              <a:rPr lang="it-IT" dirty="0"/>
+              <a:rPr lang="it-IT"/>
               <a:t> Java 17 and Spring Boot </a:t>
             </a:r>
             <a:r>
-              <a:rPr lang="it-IT" dirty="0" err="1"/>
+              <a:rPr lang="it-IT"/>
               <a:t>as</a:t>
             </a:r>
             <a:r>
-              <a:rPr lang="it-IT" dirty="0"/>
+              <a:rPr lang="it-IT"/>
               <a:t> the </a:t>
             </a:r>
             <a:r>
-              <a:rPr lang="it-IT" dirty="0" err="1"/>
+              <a:rPr lang="it-IT"/>
               <a:t>application</a:t>
             </a:r>
             <a:r>
-              <a:rPr lang="it-IT" dirty="0"/>
+              <a:rPr lang="it-IT"/>
               <a:t> </a:t>
             </a:r>
             <a:r>
-              <a:rPr lang="it-IT" dirty="0" err="1"/>
+              <a:rPr lang="it-IT"/>
               <a:t>foundation</a:t>
             </a:r>
             <a:r>
-              <a:rPr lang="it-IT" dirty="0"/>
+              <a:rPr lang="it-IT"/>
               <a:t>, Spring Cloud for service </a:t>
             </a:r>
             <a:r>
-              <a:rPr lang="it-IT" dirty="0" err="1"/>
+              <a:rPr lang="it-IT"/>
               <a:t>discovery</a:t>
             </a:r>
             <a:r>
-              <a:rPr lang="it-IT" dirty="0"/>
+              <a:rPr lang="it-IT"/>
               <a:t>, gateway management and inter-service </a:t>
             </a:r>
             <a:r>
-              <a:rPr lang="it-IT" dirty="0" err="1"/>
+              <a:rPr lang="it-IT"/>
               <a:t>communication</a:t>
             </a:r>
             <a:r>
-              <a:rPr lang="it-IT" dirty="0"/>
+              <a:rPr lang="it-IT"/>
               <a:t>, Apache CXF for SOAP </a:t>
             </a:r>
             <a:r>
-              <a:rPr lang="it-IT" dirty="0" err="1"/>
+              <a:rPr lang="it-IT"/>
               <a:t>integration</a:t>
             </a:r>
             <a:r>
-              <a:rPr lang="it-IT" dirty="0"/>
+              <a:rPr lang="it-IT"/>
               <a:t> with the Patient </a:t>
             </a:r>
             <a:r>
-              <a:rPr lang="it-IT" dirty="0" err="1"/>
+              <a:rPr lang="it-IT"/>
               <a:t>Registry</a:t>
             </a:r>
             <a:r>
-              <a:rPr lang="it-IT" dirty="0"/>
+              <a:rPr lang="it-IT"/>
               <a:t>, MySQL for data </a:t>
             </a:r>
             <a:r>
-              <a:rPr lang="it-IT" dirty="0" err="1"/>
+              <a:rPr lang="it-IT"/>
               <a:t>persistence</a:t>
             </a:r>
             <a:r>
-              <a:rPr lang="it-IT" dirty="0"/>
+              <a:rPr lang="it-IT"/>
               <a:t>, and Docker for deployment of the </a:t>
             </a:r>
             <a:r>
-              <a:rPr lang="it-IT" dirty="0" err="1"/>
+              <a:rPr lang="it-IT"/>
               <a:t>entire</a:t>
             </a:r>
             <a:r>
-              <a:rPr lang="it-IT" dirty="0"/>
+              <a:rPr lang="it-IT"/>
               <a:t> </a:t>
             </a:r>
             <a:r>
-              <a:rPr lang="it-IT" dirty="0" err="1"/>
+              <a:rPr lang="it-IT"/>
               <a:t>platform</a:t>
             </a:r>
             <a:r>
-              <a:rPr lang="it-IT" dirty="0"/>
+              <a:rPr lang="it-IT"/>
               <a:t>. </a:t>
             </a:r>
             <a:r>
-              <a:rPr lang="it-IT" dirty="0" err="1"/>
+              <a:rPr lang="it-IT"/>
               <a:t>Together</a:t>
             </a:r>
             <a:r>
-              <a:rPr lang="it-IT" dirty="0"/>
+              <a:rPr lang="it-IT"/>
               <a:t>, </a:t>
             </a:r>
             <a:r>
-              <a:rPr lang="it-IT" dirty="0" err="1"/>
+              <a:rPr lang="it-IT"/>
               <a:t>these</a:t>
             </a:r>
             <a:r>
-              <a:rPr lang="it-IT" dirty="0"/>
+              <a:rPr lang="it-IT"/>
               <a:t> </a:t>
             </a:r>
             <a:r>
-              <a:rPr lang="it-IT" dirty="0" err="1"/>
+              <a:rPr lang="it-IT"/>
               <a:t>technologies</a:t>
             </a:r>
             <a:r>
-              <a:rPr lang="it-IT" dirty="0"/>
+              <a:rPr lang="it-IT"/>
               <a:t> </a:t>
             </a:r>
             <a:r>
-              <a:rPr lang="it-IT" dirty="0" err="1"/>
+              <a:rPr lang="it-IT"/>
               <a:t>allowed</a:t>
             </a:r>
             <a:r>
-              <a:rPr lang="it-IT" dirty="0"/>
+              <a:rPr lang="it-IT"/>
               <a:t> </a:t>
             </a:r>
             <a:r>
-              <a:rPr lang="it-IT" dirty="0" err="1"/>
+              <a:rPr lang="it-IT"/>
               <a:t>us</a:t>
             </a:r>
             <a:r>
-              <a:rPr lang="it-IT" dirty="0"/>
+              <a:rPr lang="it-IT"/>
               <a:t> to build a </a:t>
             </a:r>
             <a:r>
-              <a:rPr lang="it-IT" dirty="0" err="1"/>
+              <a:rPr lang="it-IT"/>
               <a:t>platform</a:t>
             </a:r>
             <a:r>
-              <a:rPr lang="it-IT" dirty="0"/>
+              <a:rPr lang="it-IT"/>
               <a:t> </a:t>
             </a:r>
             <a:r>
-              <a:rPr lang="it-IT" dirty="0" err="1"/>
+              <a:rPr lang="it-IT"/>
               <a:t>capable</a:t>
             </a:r>
             <a:r>
-              <a:rPr lang="it-IT" dirty="0"/>
+              <a:rPr lang="it-IT"/>
               <a:t> of </a:t>
             </a:r>
             <a:r>
-              <a:rPr lang="it-IT" dirty="0" err="1"/>
+              <a:rPr lang="it-IT"/>
               <a:t>integrating</a:t>
             </a:r>
             <a:r>
-              <a:rPr lang="it-IT" dirty="0"/>
+              <a:rPr lang="it-IT"/>
               <a:t> clinical information coming from </a:t>
             </a:r>
             <a:r>
-              <a:rPr lang="it-IT" dirty="0" err="1"/>
+              <a:rPr lang="it-IT"/>
               <a:t>heterogeneous</a:t>
             </a:r>
             <a:r>
-              <a:rPr lang="it-IT" dirty="0"/>
+              <a:rPr lang="it-IT"/>
               <a:t> systems and </a:t>
             </a:r>
             <a:r>
-              <a:rPr lang="it-IT" dirty="0" err="1"/>
+              <a:rPr lang="it-IT"/>
               <a:t>presenting</a:t>
             </a:r>
             <a:r>
-              <a:rPr lang="it-IT" dirty="0"/>
+              <a:rPr lang="it-IT"/>
               <a:t> </a:t>
             </a:r>
             <a:r>
-              <a:rPr lang="it-IT" dirty="0" err="1"/>
+              <a:rPr lang="it-IT"/>
               <a:t>it</a:t>
             </a:r>
             <a:r>
-              <a:rPr lang="it-IT" dirty="0"/>
+              <a:rPr lang="it-IT"/>
               <a:t> to </a:t>
             </a:r>
             <a:r>
-              <a:rPr lang="it-IT" dirty="0" err="1"/>
+              <a:rPr lang="it-IT"/>
               <a:t>healthcare</a:t>
             </a:r>
             <a:r>
-              <a:rPr lang="it-IT" dirty="0"/>
+              <a:rPr lang="it-IT"/>
               <a:t> </a:t>
             </a:r>
             <a:r>
-              <a:rPr lang="it-IT" dirty="0" err="1"/>
+              <a:rPr lang="it-IT"/>
               <a:t>professionals</a:t>
             </a:r>
             <a:r>
-              <a:rPr lang="it-IT" dirty="0"/>
+              <a:rPr lang="it-IT"/>
               <a:t> </a:t>
             </a:r>
             <a:r>
-              <a:rPr lang="it-IT" dirty="0" err="1"/>
+              <a:rPr lang="it-IT"/>
               <a:t>through</a:t>
             </a:r>
             <a:r>
-              <a:rPr lang="it-IT" dirty="0"/>
+              <a:rPr lang="it-IT"/>
               <a:t> a single, </a:t>
             </a:r>
             <a:r>
-              <a:rPr lang="it-IT" dirty="0" err="1"/>
+              <a:rPr lang="it-IT"/>
               <a:t>consistent</a:t>
             </a:r>
             <a:r>
-              <a:rPr lang="it-IT" dirty="0"/>
+              <a:rPr lang="it-IT"/>
               <a:t>, and easy-to-use </a:t>
             </a:r>
             <a:r>
-              <a:rPr lang="it-IT" dirty="0" err="1"/>
+              <a:rPr lang="it-IT"/>
               <a:t>interface</a:t>
             </a:r>
             <a:r>
-              <a:rPr lang="it-IT" dirty="0"/>
+              <a:rPr lang="it-IT"/>
               <a:t>.</a:t>
             </a:r>
-            <a:endParaRPr lang="en-US" dirty="0"/>
-          </a:p>
-        </p:txBody>
-      </p:sp>
-      <p:sp>
-        <p:nvSpPr>
-          <p:cNvPr id="390629624" name="Slide Number Placeholder 3"/>
+            <a:endParaRPr lang="en-US"/>
+          </a:p>
+        </p:txBody>
+      </p:sp>
+      <p:sp>
+        <p:nvSpPr>
+          <p:cNvPr id="526612146" name="Slide Number Placeholder 3"/>
           <p:cNvSpPr>
             <a:spLocks noGrp="1"/>
           </p:cNvSpPr>
@@ -2180,8 +2229,8 @@
 </file>
 
 <file path=ppt/notesSlides/notesSlide2.xml><?xml version="1.0" encoding="utf-8"?>
-<p:notes xmlns:a="http://schemas.openxmlformats.org/drawingml/2006/main" xmlns:r="http://schemas.openxmlformats.org/officeDocument/2006/relationships" xmlns:p="http://schemas.openxmlformats.org/presentationml/2006/main">
-  <p:cSld>
+<p:notes xmlns:a="http://schemas.openxmlformats.org/drawingml/2006/main" xmlns:r="http://schemas.openxmlformats.org/officeDocument/2006/relationships" xmlns:p="http://schemas.openxmlformats.org/presentationml/2006/main" xmlns:m="http://schemas.openxmlformats.org/officeDocument/2006/math" xmlns:w="http://schemas.openxmlformats.org/wordprocessingml/2006/main">
+  <p:cSld name="">
     <p:spTree>
       <p:nvGrpSpPr>
         <p:cNvPr id="1" name=""/>
@@ -2198,9 +2247,9 @@
       </p:grpSpPr>
       <p:sp>
         <p:nvSpPr>
-          <p:cNvPr id="1251358101" name="Slide Image Placeholder 1"/>
+          <p:cNvPr id="837657963" name="Slide Image Placeholder 1"/>
           <p:cNvSpPr>
-            <a:spLocks noGrp="1" noRot="1" noChangeAspect="1"/>
+            <a:spLocks noChangeAspect="1" noGrp="1" noRot="1"/>
           </p:cNvSpPr>
           <p:nvPr>
             <p:ph type="sldImg"/>
@@ -2210,7 +2259,7 @@
       </p:sp>
       <p:sp>
         <p:nvSpPr>
-          <p:cNvPr id="1761548745" name="Notes Placeholder 2"/>
+          <p:cNvPr id="1440343693" name="Notes Placeholder 2"/>
           <p:cNvSpPr>
             <a:spLocks noGrp="1"/>
           </p:cNvSpPr>
@@ -2232,7 +2281,7 @@
       </p:sp>
       <p:sp>
         <p:nvSpPr>
-          <p:cNvPr id="632449751" name="Slide Number Placeholder 3"/>
+          <p:cNvPr id="593036489" name="Slide Number Placeholder 3"/>
           <p:cNvSpPr>
             <a:spLocks noGrp="1"/>
           </p:cNvSpPr>
@@ -2265,8 +2314,8 @@
 </file>
 
 <file path=ppt/notesSlides/notesSlide3.xml><?xml version="1.0" encoding="utf-8"?>
-<p:notes xmlns:a="http://schemas.openxmlformats.org/drawingml/2006/main" xmlns:r="http://schemas.openxmlformats.org/officeDocument/2006/relationships" xmlns:p="http://schemas.openxmlformats.org/presentationml/2006/main">
-  <p:cSld>
+<p:notes xmlns:a="http://schemas.openxmlformats.org/drawingml/2006/main" xmlns:r="http://schemas.openxmlformats.org/officeDocument/2006/relationships" xmlns:p="http://schemas.openxmlformats.org/presentationml/2006/main" xmlns:m="http://schemas.openxmlformats.org/officeDocument/2006/math" xmlns:w="http://schemas.openxmlformats.org/wordprocessingml/2006/main">
+  <p:cSld name="">
     <p:spTree>
       <p:nvGrpSpPr>
         <p:cNvPr id="1" name=""/>
@@ -2283,9 +2332,9 @@
       </p:grpSpPr>
       <p:sp>
         <p:nvSpPr>
-          <p:cNvPr id="502903208" name="Slide Image Placeholder 1"/>
+          <p:cNvPr id="1065650982" name="Slide Image Placeholder 1"/>
           <p:cNvSpPr>
-            <a:spLocks noGrp="1" noRot="1" noChangeAspect="1"/>
+            <a:spLocks noChangeAspect="1" noGrp="1" noRot="1"/>
           </p:cNvSpPr>
           <p:nvPr>
             <p:ph type="sldImg"/>
@@ -2295,7 +2344,7 @@
       </p:sp>
       <p:sp>
         <p:nvSpPr>
-          <p:cNvPr id="1228858584" name="Notes Placeholder 2"/>
+          <p:cNvPr id="1990868566" name="Notes Placeholder 2"/>
           <p:cNvSpPr>
             <a:spLocks noGrp="1"/>
           </p:cNvSpPr>
@@ -2317,7 +2366,7 @@
       </p:sp>
       <p:sp>
         <p:nvSpPr>
-          <p:cNvPr id="682396296" name="Slide Number Placeholder 3"/>
+          <p:cNvPr id="1629138428" name="Slide Number Placeholder 3"/>
           <p:cNvSpPr>
             <a:spLocks noGrp="1"/>
           </p:cNvSpPr>
@@ -2350,8 +2399,8 @@
 </file>
 
 <file path=ppt/notesSlides/notesSlide4.xml><?xml version="1.0" encoding="utf-8"?>
-<p:notes xmlns:a="http://schemas.openxmlformats.org/drawingml/2006/main" xmlns:r="http://schemas.openxmlformats.org/officeDocument/2006/relationships" xmlns:p="http://schemas.openxmlformats.org/presentationml/2006/main">
-  <p:cSld>
+<p:notes xmlns:a="http://schemas.openxmlformats.org/drawingml/2006/main" xmlns:r="http://schemas.openxmlformats.org/officeDocument/2006/relationships" xmlns:p="http://schemas.openxmlformats.org/presentationml/2006/main" xmlns:m="http://schemas.openxmlformats.org/officeDocument/2006/math" xmlns:w="http://schemas.openxmlformats.org/wordprocessingml/2006/main">
+  <p:cSld name="">
     <p:spTree>
       <p:nvGrpSpPr>
         <p:cNvPr id="1" name=""/>
@@ -2368,9 +2417,9 @@
       </p:grpSpPr>
       <p:sp>
         <p:nvSpPr>
-          <p:cNvPr id="362545275" name="Slide Image Placeholder 1"/>
+          <p:cNvPr id="935858681" name="Slide Image Placeholder 1"/>
           <p:cNvSpPr>
-            <a:spLocks noGrp="1" noRot="1" noChangeAspect="1"/>
+            <a:spLocks noChangeAspect="1" noGrp="1" noRot="1"/>
           </p:cNvSpPr>
           <p:nvPr>
             <p:ph type="sldImg"/>
@@ -2380,7 +2429,7 @@
       </p:sp>
       <p:sp>
         <p:nvSpPr>
-          <p:cNvPr id="413829793" name="Notes Placeholder 2"/>
+          <p:cNvPr id="1917676067" name="Notes Placeholder 2"/>
           <p:cNvSpPr>
             <a:spLocks noGrp="1"/>
           </p:cNvSpPr>
@@ -2402,7 +2451,7 @@
       </p:sp>
       <p:sp>
         <p:nvSpPr>
-          <p:cNvPr id="2083457807" name="Slide Number Placeholder 3"/>
+          <p:cNvPr id="1436361782" name="Slide Number Placeholder 3"/>
           <p:cNvSpPr>
             <a:spLocks noGrp="1"/>
           </p:cNvSpPr>
@@ -2435,8 +2484,8 @@
 </file>
 
 <file path=ppt/notesSlides/notesSlide5.xml><?xml version="1.0" encoding="utf-8"?>
-<p:notes xmlns:a="http://schemas.openxmlformats.org/drawingml/2006/main" xmlns:r="http://schemas.openxmlformats.org/officeDocument/2006/relationships" xmlns:p="http://schemas.openxmlformats.org/presentationml/2006/main">
-  <p:cSld>
+<p:notes xmlns:a="http://schemas.openxmlformats.org/drawingml/2006/main" xmlns:r="http://schemas.openxmlformats.org/officeDocument/2006/relationships" xmlns:p="http://schemas.openxmlformats.org/presentationml/2006/main" xmlns:m="http://schemas.openxmlformats.org/officeDocument/2006/math" xmlns:w="http://schemas.openxmlformats.org/wordprocessingml/2006/main">
+  <p:cSld name="">
     <p:spTree>
       <p:nvGrpSpPr>
         <p:cNvPr id="1" name=""/>
@@ -2453,9 +2502,9 @@
       </p:grpSpPr>
       <p:sp>
         <p:nvSpPr>
-          <p:cNvPr id="1595805299" name="Slide Image Placeholder 1"/>
+          <p:cNvPr id="39198250" name="Slide Image Placeholder 1"/>
           <p:cNvSpPr>
-            <a:spLocks noGrp="1" noRot="1" noChangeAspect="1"/>
+            <a:spLocks noChangeAspect="1" noGrp="1" noRot="1"/>
           </p:cNvSpPr>
           <p:nvPr>
             <p:ph type="sldImg"/>
@@ -2465,7 +2514,7 @@
       </p:sp>
       <p:sp>
         <p:nvSpPr>
-          <p:cNvPr id="1777477327" name="Notes Placeholder 2"/>
+          <p:cNvPr id="1724897465" name="Notes Placeholder 2"/>
           <p:cNvSpPr>
             <a:spLocks noGrp="1"/>
           </p:cNvSpPr>
@@ -2487,7 +2536,7 @@
       </p:sp>
       <p:sp>
         <p:nvSpPr>
-          <p:cNvPr id="937172823" name="Slide Number Placeholder 3"/>
+          <p:cNvPr id="1695647150" name="Slide Number Placeholder 3"/>
           <p:cNvSpPr>
             <a:spLocks noGrp="1"/>
           </p:cNvSpPr>
@@ -2520,8 +2569,8 @@
 </file>
 
 <file path=ppt/notesSlides/notesSlide6.xml><?xml version="1.0" encoding="utf-8"?>
-<p:notes xmlns:a="http://schemas.openxmlformats.org/drawingml/2006/main" xmlns:r="http://schemas.openxmlformats.org/officeDocument/2006/relationships" xmlns:p="http://schemas.openxmlformats.org/presentationml/2006/main">
-  <p:cSld>
+<p:notes xmlns:a="http://schemas.openxmlformats.org/drawingml/2006/main" xmlns:r="http://schemas.openxmlformats.org/officeDocument/2006/relationships" xmlns:p="http://schemas.openxmlformats.org/presentationml/2006/main" xmlns:m="http://schemas.openxmlformats.org/officeDocument/2006/math" xmlns:w="http://schemas.openxmlformats.org/wordprocessingml/2006/main">
+  <p:cSld name="">
     <p:spTree>
       <p:nvGrpSpPr>
         <p:cNvPr id="1" name=""/>
@@ -2538,9 +2587,9 @@
       </p:grpSpPr>
       <p:sp>
         <p:nvSpPr>
-          <p:cNvPr id="54403413" name="Slide Image Placeholder 1"/>
+          <p:cNvPr id="993378388" name="Slide Image Placeholder 1"/>
           <p:cNvSpPr>
-            <a:spLocks noGrp="1" noRot="1" noChangeAspect="1"/>
+            <a:spLocks noChangeAspect="1" noGrp="1" noRot="1"/>
           </p:cNvSpPr>
           <p:nvPr>
             <p:ph type="sldImg"/>
@@ -2550,7 +2599,7 @@
       </p:sp>
       <p:sp>
         <p:nvSpPr>
-          <p:cNvPr id="424308723" name="Notes Placeholder 2"/>
+          <p:cNvPr id="1155472845" name="Notes Placeholder 2"/>
           <p:cNvSpPr>
             <a:spLocks noGrp="1"/>
           </p:cNvSpPr>
@@ -2572,7 +2621,7 @@
       </p:sp>
       <p:sp>
         <p:nvSpPr>
-          <p:cNvPr id="1967267635" name="Slide Number Placeholder 3"/>
+          <p:cNvPr id="1352799116" name="Slide Number Placeholder 3"/>
           <p:cNvSpPr>
             <a:spLocks noGrp="1"/>
           </p:cNvSpPr>
@@ -2605,8 +2654,8 @@
 </file>
 
 <file path=ppt/notesSlides/notesSlide7.xml><?xml version="1.0" encoding="utf-8"?>
-<p:notes xmlns:a="http://schemas.openxmlformats.org/drawingml/2006/main" xmlns:r="http://schemas.openxmlformats.org/officeDocument/2006/relationships" xmlns:p="http://schemas.openxmlformats.org/presentationml/2006/main">
-  <p:cSld>
+<p:notes xmlns:a="http://schemas.openxmlformats.org/drawingml/2006/main" xmlns:r="http://schemas.openxmlformats.org/officeDocument/2006/relationships" xmlns:p="http://schemas.openxmlformats.org/presentationml/2006/main" xmlns:m="http://schemas.openxmlformats.org/officeDocument/2006/math" xmlns:w="http://schemas.openxmlformats.org/wordprocessingml/2006/main">
+  <p:cSld name="">
     <p:spTree>
       <p:nvGrpSpPr>
         <p:cNvPr id="1" name=""/>
@@ -2623,9 +2672,9 @@
       </p:grpSpPr>
       <p:sp>
         <p:nvSpPr>
-          <p:cNvPr id="1288205320" name="Slide Image Placeholder 1"/>
+          <p:cNvPr id="1964512296" name="Slide Image Placeholder 1"/>
           <p:cNvSpPr>
-            <a:spLocks noGrp="1" noRot="1" noChangeAspect="1"/>
+            <a:spLocks noChangeAspect="1" noGrp="1" noRot="1"/>
           </p:cNvSpPr>
           <p:nvPr>
             <p:ph type="sldImg"/>
@@ -2635,7 +2684,7 @@
       </p:sp>
       <p:sp>
         <p:nvSpPr>
-          <p:cNvPr id="1932362724" name="Notes Placeholder 2"/>
+          <p:cNvPr id="1616743408" name="Notes Placeholder 2"/>
           <p:cNvSpPr>
             <a:spLocks noGrp="1"/>
           </p:cNvSpPr>
@@ -2693,7 +2742,7 @@
       </p:sp>
       <p:sp>
         <p:nvSpPr>
-          <p:cNvPr id="432381480" name="Slide Number Placeholder 3"/>
+          <p:cNvPr id="1876963142" name="Slide Number Placeholder 3"/>
           <p:cNvSpPr>
             <a:spLocks noGrp="1"/>
           </p:cNvSpPr>
@@ -2726,8 +2775,8 @@
 </file>
 
 <file path=ppt/notesSlides/notesSlide8.xml><?xml version="1.0" encoding="utf-8"?>
-<p:notes xmlns:a="http://schemas.openxmlformats.org/drawingml/2006/main" xmlns:r="http://schemas.openxmlformats.org/officeDocument/2006/relationships" xmlns:p="http://schemas.openxmlformats.org/presentationml/2006/main">
-  <p:cSld>
+<p:notes xmlns:a="http://schemas.openxmlformats.org/drawingml/2006/main" xmlns:r="http://schemas.openxmlformats.org/officeDocument/2006/relationships" xmlns:p="http://schemas.openxmlformats.org/presentationml/2006/main" xmlns:m="http://schemas.openxmlformats.org/officeDocument/2006/math" xmlns:w="http://schemas.openxmlformats.org/wordprocessingml/2006/main">
+  <p:cSld name="">
     <p:spTree>
       <p:nvGrpSpPr>
         <p:cNvPr id="1" name=""/>
@@ -2744,9 +2793,9 @@
       </p:grpSpPr>
       <p:sp>
         <p:nvSpPr>
-          <p:cNvPr id="1900562257" name="Slide Image Placeholder 1"/>
+          <p:cNvPr id="760826049" name="Slide Image Placeholder 1"/>
           <p:cNvSpPr>
-            <a:spLocks noGrp="1" noRot="1" noChangeAspect="1"/>
+            <a:spLocks noChangeAspect="1" noGrp="1" noRot="1"/>
           </p:cNvSpPr>
           <p:nvPr>
             <p:ph type="sldImg"/>
@@ -2756,7 +2805,7 @@
       </p:sp>
       <p:sp>
         <p:nvSpPr>
-          <p:cNvPr id="1917729818" name="Notes Placeholder 2"/>
+          <p:cNvPr id="816791106" name="Notes Placeholder 2"/>
           <p:cNvSpPr>
             <a:spLocks noGrp="1"/>
           </p:cNvSpPr>
@@ -2800,6 +2849,7 @@
               <a:rPr sz="1400"/>
               <a:t>and has its own separate database to ensure decoupling.</a:t>
             </a:r>
+            <a:endParaRPr/>
           </a:p>
           <a:p>
             <a:pPr>
@@ -2969,7 +3019,103 @@
               <a:rPr sz="1400"/>
               <a:t>.</a:t>
             </a:r>
-            <a:endParaRPr/>
+            <a:endParaRPr sz="1400"/>
+          </a:p>
+          <a:p>
+            <a:pPr marL="239820" indent="-239820">
+              <a:buFont typeface="Arial"/>
+              <a:buChar char="•"/>
+              <a:defRPr/>
+            </a:pPr>
+            <a:r>
+              <a:rPr lang="it-IT" sz="1400" b="0" i="0" u="none" strike="noStrike" cap="none" spc="0">
+                <a:solidFill>
+                  <a:schemeClr val="tx1"/>
+                </a:solidFill>
+                <a:latin typeface="Aptos"/>
+                <a:ea typeface="Arial"/>
+                <a:cs typeface="Arial"/>
+              </a:rPr>
+              <a:t>T</a:t>
+            </a:r>
+            <a:r>
+              <a:rPr lang="en-US" sz="1400" b="0" i="0" u="none" strike="noStrike" cap="none" spc="0">
+                <a:solidFill>
+                  <a:schemeClr val="tx1"/>
+                </a:solidFill>
+                <a:latin typeface="+mn-lt"/>
+                <a:ea typeface="+mn-ea"/>
+                <a:cs typeface="+mn-cs"/>
+              </a:rPr>
+              <a:t>he </a:t>
+            </a:r>
+            <a:r>
+              <a:rPr lang="en-US" sz="1400" b="1" i="0" u="none" strike="noStrike" cap="none" spc="0">
+                <a:solidFill>
+                  <a:schemeClr val="tx1"/>
+                </a:solidFill>
+                <a:latin typeface="+mn-lt"/>
+                <a:ea typeface="+mn-ea"/>
+                <a:cs typeface="+mn-cs"/>
+              </a:rPr>
+              <a:t>Farmacia Service</a:t>
+            </a:r>
+            <a:r>
+              <a:rPr lang="en-US" sz="1400" b="0" i="0" u="none" strike="noStrike" cap="none" spc="0">
+                <a:solidFill>
+                  <a:schemeClr val="tx1"/>
+                </a:solidFill>
+                <a:latin typeface="+mn-lt"/>
+                <a:ea typeface="+mn-ea"/>
+                <a:cs typeface="+mn-cs"/>
+              </a:rPr>
+              <a:t> manages active drug prescriptions and includes a</a:t>
+            </a:r>
+            <a:r>
+              <a:rPr lang="it-IT" sz="1400" b="0" i="0" u="none" strike="noStrike" cap="none" spc="0">
+                <a:solidFill>
+                  <a:schemeClr val="tx1"/>
+                </a:solidFill>
+                <a:latin typeface="+mn-lt"/>
+                <a:ea typeface="+mn-ea"/>
+                <a:cs typeface="+mn-cs"/>
+              </a:rPr>
+              <a:t>n endpoint </a:t>
+            </a:r>
+            <a:r>
+              <a:rPr lang="en-US" sz="1400" b="0" i="0" u="none" strike="noStrike" cap="none" spc="0">
+                <a:solidFill>
+                  <a:schemeClr val="tx1"/>
+                </a:solidFill>
+                <a:latin typeface="+mn-lt"/>
+                <a:ea typeface="+mn-ea"/>
+                <a:cs typeface="+mn-cs"/>
+              </a:rPr>
+              <a:t>t</a:t>
+            </a:r>
+            <a:r>
+              <a:rPr lang="it-IT" sz="1400" b="0" i="0" u="none" strike="noStrike" cap="none" spc="0">
+                <a:solidFill>
+                  <a:schemeClr val="tx1"/>
+                </a:solidFill>
+                <a:latin typeface="Aptos"/>
+                <a:ea typeface="Arial"/>
+                <a:cs typeface="Arial"/>
+              </a:rPr>
+              <a:t>o add a new drug prescription for a patient in need</a:t>
+            </a:r>
+            <a:r>
+              <a:rPr lang="en-US" sz="1400" b="0" i="0" u="none" strike="noStrike" cap="none" spc="0">
+                <a:solidFill>
+                  <a:schemeClr val="tx1"/>
+                </a:solidFill>
+                <a:latin typeface="Aptos"/>
+                <a:ea typeface="Arial"/>
+                <a:cs typeface="Arial"/>
+              </a:rPr>
+              <a:t>.</a:t>
+            </a:r>
+            <a:endParaRPr sz="1400"/>
           </a:p>
           <a:p>
             <a:pPr marL="239821" indent="-239821">
@@ -2978,20 +3124,24 @@
               <a:defRPr/>
             </a:pPr>
             <a:r>
-              <a:rPr sz="1400"/>
-              <a:t>The </a:t>
+              <a:rPr lang="it-IT" sz="1400"/>
+              <a:t>Finally we have the </a:t>
             </a:r>
             <a:r>
               <a:rPr sz="1400" b="1"/>
               <a:t>Imaging Service</a:t>
             </a:r>
             <a:r>
+              <a:rPr lang="it-IT" sz="1400"/>
+              <a:t>, which </a:t>
+            </a:r>
+            <a:r>
               <a:rPr sz="1400"/>
-              <a:t> works </a:t>
+              <a:t>works </a:t>
             </a:r>
             <a:r>
               <a:rPr lang="it-IT" sz="1400"/>
-              <a:t>in a similar way to Laboratorio Service</a:t>
+              <a:t>in a similar way to the Laboratorio Service</a:t>
             </a:r>
             <a:r>
               <a:rPr sz="1400"/>
@@ -3020,34 +3170,6 @@
             <a:endParaRPr sz="1400"/>
           </a:p>
           <a:p>
-            <a:pPr marL="239821" indent="-239821">
-              <a:buFont typeface="Arial"/>
-              <a:buChar char="•"/>
-              <a:defRPr/>
-            </a:pPr>
-            <a:r>
-              <a:rPr sz="1400"/>
-              <a:t>Finally, the </a:t>
-            </a:r>
-            <a:r>
-              <a:rPr sz="1400" b="1"/>
-              <a:t>Farmacia Service</a:t>
-            </a:r>
-            <a:r>
-              <a:rPr sz="1400"/>
-              <a:t> manages active drug prescriptions and includes a</a:t>
-            </a:r>
-            <a:r>
-              <a:rPr lang="it-IT" sz="1400"/>
-              <a:t>n endpoint </a:t>
-            </a:r>
-            <a:r>
-              <a:rPr sz="1400"/>
-              <a:t>to check for dangerous drug interactions.</a:t>
-            </a:r>
-            <a:endParaRPr/>
-          </a:p>
-          <a:p>
             <a:pPr>
               <a:defRPr/>
             </a:pPr>
@@ -3065,7 +3187,7 @@
       </p:sp>
       <p:sp>
         <p:nvSpPr>
-          <p:cNvPr id="729589978" name="Slide Number Placeholder 3"/>
+          <p:cNvPr id="1982081915" name="Slide Number Placeholder 3"/>
           <p:cNvSpPr>
             <a:spLocks noGrp="1"/>
           </p:cNvSpPr>
@@ -3098,8 +3220,8 @@
 </file>
 
 <file path=ppt/notesSlides/notesSlide9.xml><?xml version="1.0" encoding="utf-8"?>
-<p:notes xmlns:a="http://schemas.openxmlformats.org/drawingml/2006/main" xmlns:r="http://schemas.openxmlformats.org/officeDocument/2006/relationships" xmlns:p="http://schemas.openxmlformats.org/presentationml/2006/main">
-  <p:cSld>
+<p:notes xmlns:a="http://schemas.openxmlformats.org/drawingml/2006/main" xmlns:r="http://schemas.openxmlformats.org/officeDocument/2006/relationships" xmlns:p="http://schemas.openxmlformats.org/presentationml/2006/main" xmlns:m="http://schemas.openxmlformats.org/officeDocument/2006/math" xmlns:w="http://schemas.openxmlformats.org/wordprocessingml/2006/main">
+  <p:cSld name="">
     <p:spTree>
       <p:nvGrpSpPr>
         <p:cNvPr id="1" name=""/>
@@ -3116,9 +3238,9 @@
       </p:grpSpPr>
       <p:sp>
         <p:nvSpPr>
-          <p:cNvPr id="1382429202" name="Slide Image Placeholder 1"/>
+          <p:cNvPr id="299932051" name="Slide Image Placeholder 1"/>
           <p:cNvSpPr>
-            <a:spLocks noGrp="1" noRot="1" noChangeAspect="1"/>
+            <a:spLocks noChangeAspect="1" noGrp="1" noRot="1"/>
           </p:cNvSpPr>
           <p:nvPr>
             <p:ph type="sldImg"/>
@@ -3128,7 +3250,7 @@
       </p:sp>
       <p:sp>
         <p:nvSpPr>
-          <p:cNvPr id="658866955" name="Notes Placeholder 2"/>
+          <p:cNvPr id="935807703" name="Notes Placeholder 2"/>
           <p:cNvSpPr>
             <a:spLocks noGrp="1"/>
           </p:cNvSpPr>
@@ -3168,6 +3290,7 @@
               <a:rPr sz="1400"/>
               <a:t> components do not just store data but they consume data from the providers and aggregate it.</a:t>
             </a:r>
+            <a:endParaRPr/>
           </a:p>
           <a:p>
             <a:pPr marL="239821" indent="-239821">
@@ -3275,6 +3398,7 @@
               <a:rPr sz="1400"/>
               <a:t> a full Clinical Profile of the patient.</a:t>
             </a:r>
+            <a:endParaRPr/>
           </a:p>
           <a:p>
             <a:pPr marL="239821" indent="-239821">
@@ -3328,7 +3452,15 @@
             </a:r>
             <a:r>
               <a:rPr sz="1400"/>
-              <a:t>applies </a:t>
+              <a:t>appl</a:t>
+            </a:r>
+            <a:r>
+              <a:rPr lang="it-IT" sz="1400"/>
+              <a:t>ying</a:t>
+            </a:r>
+            <a:r>
+              <a:rPr sz="1400"/>
+              <a:t> </a:t>
             </a:r>
             <a:r>
               <a:rPr lang="it-IT" sz="1400"/>
@@ -3336,7 +3468,15 @@
             </a:r>
             <a:r>
               <a:rPr sz="1400"/>
-              <a:t>business rules to generate</a:t>
+              <a:t>business </a:t>
+            </a:r>
+            <a:r>
+              <a:rPr lang="it-IT" sz="1400"/>
+              <a:t>logic </a:t>
+            </a:r>
+            <a:r>
+              <a:rPr sz="1400"/>
+              <a:t>to generate</a:t>
             </a:r>
             <a:r>
               <a:rPr lang="it-IT" sz="1400"/>
@@ -3352,7 +3492,7 @@
       </p:sp>
       <p:sp>
         <p:nvSpPr>
-          <p:cNvPr id="1917116148" name="Slide Number Placeholder 3"/>
+          <p:cNvPr id="1269182466" name="Slide Number Placeholder 3"/>
           <p:cNvSpPr>
             <a:spLocks noGrp="1"/>
           </p:cNvSpPr>
@@ -3385,7 +3525,7 @@
 </file>
 
 <file path=ppt/slideLayouts/slideLayout1.xml><?xml version="1.0" encoding="utf-8"?>
-<p:sldLayout xmlns:a="http://schemas.openxmlformats.org/drawingml/2006/main" xmlns:r="http://schemas.openxmlformats.org/officeDocument/2006/relationships" xmlns:p="http://schemas.openxmlformats.org/presentationml/2006/main" showMasterPhAnim="0" preserve="1" userDrawn="1">
+<p:sldLayout xmlns:a="http://schemas.openxmlformats.org/drawingml/2006/main" xmlns:r="http://schemas.openxmlformats.org/officeDocument/2006/relationships" xmlns:p="http://schemas.openxmlformats.org/presentationml/2006/main" xmlns:m="http://schemas.openxmlformats.org/officeDocument/2006/math" xmlns:w="http://schemas.openxmlformats.org/wordprocessingml/2006/main" matchingName="" preserve="1" showMasterPhAnim="0" showMasterSp="1" userDrawn="1">
   <p:cSld name="DEFAULT">
     <p:bg>
       <p:bgRef idx="1001">
@@ -3415,8 +3555,8 @@
 </file>
 
 <file path=ppt/slideMasters/slideMaster1.xml><?xml version="1.0" encoding="utf-8"?>
-<p:sldMaster xmlns:a="http://schemas.openxmlformats.org/drawingml/2006/main" xmlns:r="http://schemas.openxmlformats.org/officeDocument/2006/relationships" xmlns:p="http://schemas.openxmlformats.org/presentationml/2006/main">
-  <p:cSld>
+<p:sldMaster xmlns:a="http://schemas.openxmlformats.org/drawingml/2006/main" xmlns:r="http://schemas.openxmlformats.org/officeDocument/2006/relationships" xmlns:p="http://schemas.openxmlformats.org/presentationml/2006/main" xmlns:m="http://schemas.openxmlformats.org/officeDocument/2006/math" xmlns:w="http://schemas.openxmlformats.org/wordprocessingml/2006/main" preserve="0">
+  <p:cSld name="">
     <p:bg>
       <p:bgRef idx="1001">
         <a:schemeClr val="bg1"/>
@@ -3442,7 +3582,7 @@
   <p:sldLayoutIdLst>
     <p:sldLayoutId id="2147483649" r:id="rId1"/>
   </p:sldLayoutIdLst>
-  <p:hf sldNum="0" hdr="0" ftr="0" dt="0"/>
+  <p:hf dt="0" ftr="0" hdr="0" sldNum="0"/>
   <p:txStyles>
     <p:titleStyle>
       <a:lvl1pPr algn="ctr" defTabSz="914400" rtl="0">
@@ -3697,14 +3837,13 @@
 </file>
 
 <file path=ppt/slides/slide1.xml><?xml version="1.0" encoding="utf-8"?>
-<p:sld xmlns:a="http://schemas.openxmlformats.org/drawingml/2006/main" xmlns:r="http://schemas.openxmlformats.org/officeDocument/2006/relationships" xmlns:p="http://schemas.openxmlformats.org/presentationml/2006/main" showMasterPhAnim="0">
+<p:sld xmlns:a="http://schemas.openxmlformats.org/drawingml/2006/main" xmlns:r="http://schemas.openxmlformats.org/officeDocument/2006/relationships" xmlns:p="http://schemas.openxmlformats.org/presentationml/2006/main" xmlns:m="http://schemas.openxmlformats.org/officeDocument/2006/math" xmlns:w="http://schemas.openxmlformats.org/wordprocessingml/2006/main" xmlns:mc="http://schemas.openxmlformats.org/markup-compatibility/2006" showMasterPhAnim="0" showMasterSp="1" show="1">
   <p:cSld name="Slide 1">
     <p:bg>
-      <p:bgPr>
+      <p:bgPr shadeToTitle="0">
         <a:solidFill>
           <a:srgbClr val="1F4E79"/>
         </a:solidFill>
-        <a:effectLst/>
       </p:bgPr>
     </p:bg>
     <p:spTree>
@@ -3723,7 +3862,7 @@
       </p:grpSpPr>
       <p:sp>
         <p:nvSpPr>
-          <p:cNvPr id="957745164" name="Shape 0"/>
+          <p:cNvPr id="1001680498" name="Shape 0"/>
           <p:cNvSpPr/>
           <p:nvPr/>
         </p:nvSpPr>
@@ -3753,7 +3892,7 @@
       </p:sp>
       <p:sp>
         <p:nvSpPr>
-          <p:cNvPr id="1419513447" name="Text 1"/>
+          <p:cNvPr id="1263577699" name="Text 1"/>
           <p:cNvSpPr/>
           <p:nvPr/>
         </p:nvSpPr>
@@ -3793,7 +3932,7 @@
       </p:sp>
       <p:sp>
         <p:nvSpPr>
-          <p:cNvPr id="112793722" name="Text 2"/>
+          <p:cNvPr id="88647427" name="Text 2"/>
           <p:cNvSpPr/>
           <p:nvPr/>
         </p:nvSpPr>
@@ -3851,7 +3990,7 @@
       </p:sp>
       <p:sp>
         <p:nvSpPr>
-          <p:cNvPr id="1955276649" name="Text 3"/>
+          <p:cNvPr id="196049230" name="Text 3"/>
           <p:cNvSpPr/>
           <p:nvPr/>
         </p:nvSpPr>
@@ -3891,7 +4030,7 @@
       </p:sp>
       <p:sp>
         <p:nvSpPr>
-          <p:cNvPr id="1337536795" name="Text 4"/>
+          <p:cNvPr id="571035560" name="Text 4"/>
           <p:cNvSpPr/>
           <p:nvPr/>
         </p:nvSpPr>
@@ -3934,11 +4073,11 @@
   <p:clrMapOvr>
     <a:masterClrMapping/>
   </p:clrMapOvr>
-  <mc:AlternateContent xmlns:mc="http://schemas.openxmlformats.org/markup-compatibility/2006" xmlns:p159="http://schemas.microsoft.com/office/powerpoint/2015/09/main">
-    <mc:Choice Requires="p159">
-      <p:transition/>
+  <mc:AlternateContent xmlns:mc="http://schemas.openxmlformats.org/markup-compatibility/2006">
+    <mc:Choice xmlns:p159="http://schemas.microsoft.com/office/powerpoint/2015/09/main" xmlns:p14="http://schemas.microsoft.com/office/powerpoint/2010/main" Requires="p159">
+      <p:transition p14:dur="500" advClick="1"/>
     </mc:Choice>
-    <mc:Fallback xmlns:w="http://schemas.openxmlformats.org/wordprocessingml/2006/main" xmlns:m="http://schemas.openxmlformats.org/officeDocument/2006/math" xmlns="">
+    <mc:Fallback>
       <p:transition advClick="1"/>
     </mc:Fallback>
   </mc:AlternateContent>
@@ -3946,14 +4085,13 @@
 </file>
 
 <file path=ppt/slides/slide10.xml><?xml version="1.0" encoding="utf-8"?>
-<p:sld xmlns:a="http://schemas.openxmlformats.org/drawingml/2006/main" xmlns:r="http://schemas.openxmlformats.org/officeDocument/2006/relationships" xmlns:p="http://schemas.openxmlformats.org/presentationml/2006/main" showMasterPhAnim="0">
+<p:sld xmlns:a="http://schemas.openxmlformats.org/drawingml/2006/main" xmlns:r="http://schemas.openxmlformats.org/officeDocument/2006/relationships" xmlns:p="http://schemas.openxmlformats.org/presentationml/2006/main" xmlns:m="http://schemas.openxmlformats.org/officeDocument/2006/math" xmlns:w="http://schemas.openxmlformats.org/wordprocessingml/2006/main" xmlns:mc="http://schemas.openxmlformats.org/markup-compatibility/2006" showMasterPhAnim="0" showMasterSp="1" show="1">
   <p:cSld name="Slide 11">
     <p:bg>
-      <p:bgPr>
+      <p:bgPr shadeToTitle="0">
         <a:solidFill>
           <a:srgbClr val="F5F8FA"/>
         </a:solidFill>
-        <a:effectLst/>
       </p:bgPr>
     </p:bg>
     <p:spTree>
@@ -3972,7 +4110,7 @@
       </p:grpSpPr>
       <p:sp>
         <p:nvSpPr>
-          <p:cNvPr id="131847374" name="Text 0"/>
+          <p:cNvPr id="1233991200" name="Text 0"/>
           <p:cNvSpPr/>
           <p:nvPr/>
         </p:nvSpPr>
@@ -4012,7 +4150,7 @@
       </p:sp>
       <p:sp>
         <p:nvSpPr>
-          <p:cNvPr id="2137556125" name="Shape 1"/>
+          <p:cNvPr id="1262840049" name="Shape 1"/>
           <p:cNvSpPr/>
           <p:nvPr/>
         </p:nvSpPr>
@@ -4042,7 +4180,7 @@
       </p:sp>
       <p:sp>
         <p:nvSpPr>
-          <p:cNvPr id="680087060" name="Shape 2"/>
+          <p:cNvPr id="660339612" name="Shape 2"/>
           <p:cNvSpPr/>
           <p:nvPr/>
         </p:nvSpPr>
@@ -4077,7 +4215,7 @@
       </p:sp>
       <p:sp>
         <p:nvSpPr>
-          <p:cNvPr id="1191118332" name="Text 3"/>
+          <p:cNvPr id="1108930245" name="Text 3"/>
           <p:cNvSpPr/>
           <p:nvPr/>
         </p:nvSpPr>
@@ -4117,7 +4255,7 @@
       </p:sp>
       <p:sp>
         <p:nvSpPr>
-          <p:cNvPr id="1325316868" name="Text 4"/>
+          <p:cNvPr id="1655852413" name="Text 4"/>
           <p:cNvSpPr/>
           <p:nvPr/>
         </p:nvSpPr>
@@ -4157,7 +4295,7 @@
       </p:sp>
       <p:sp>
         <p:nvSpPr>
-          <p:cNvPr id="1670157430" name="Text 5"/>
+          <p:cNvPr id="1434065232" name="Text 5"/>
           <p:cNvSpPr/>
           <p:nvPr/>
         </p:nvSpPr>
@@ -4362,7 +4500,7 @@
       </p:sp>
       <p:sp>
         <p:nvSpPr>
-          <p:cNvPr id="718084211" name="Text 6"/>
+          <p:cNvPr id="1268672606" name="Text 6"/>
           <p:cNvSpPr/>
           <p:nvPr/>
         </p:nvSpPr>
@@ -4402,7 +4540,7 @@
       </p:sp>
       <p:sp>
         <p:nvSpPr>
-          <p:cNvPr id="886733041" name="Text 7"/>
+          <p:cNvPr id="1733863690" name="Text 7"/>
           <p:cNvSpPr/>
           <p:nvPr/>
         </p:nvSpPr>
@@ -4486,7 +4624,7 @@
       </p:sp>
       <p:sp>
         <p:nvSpPr>
-          <p:cNvPr id="1594125820" name="Text 8"/>
+          <p:cNvPr id="701706919" name="Text 8"/>
           <p:cNvSpPr/>
           <p:nvPr/>
         </p:nvSpPr>
@@ -4526,7 +4664,7 @@
       </p:sp>
       <p:sp>
         <p:nvSpPr>
-          <p:cNvPr id="761286737" name="Text 9"/>
+          <p:cNvPr id="1171873151" name="Text 9"/>
           <p:cNvSpPr/>
           <p:nvPr/>
         </p:nvSpPr>
@@ -4599,7 +4737,7 @@
       </p:sp>
       <p:sp>
         <p:nvSpPr>
-          <p:cNvPr id="1903468509" name="Text 10"/>
+          <p:cNvPr id="1737807860" name="Text 10"/>
           <p:cNvSpPr/>
           <p:nvPr/>
         </p:nvSpPr>
@@ -4639,7 +4777,7 @@
       </p:sp>
       <p:sp>
         <p:nvSpPr>
-          <p:cNvPr id="115460444" name="Text 11"/>
+          <p:cNvPr id="1025717049" name="Text 11"/>
           <p:cNvSpPr/>
           <p:nvPr/>
         </p:nvSpPr>
@@ -4778,7 +4916,7 @@
       </p:sp>
       <p:sp>
         <p:nvSpPr>
-          <p:cNvPr id="147024531" name="Text 12"/>
+          <p:cNvPr id="1015425191" name="Text 12"/>
           <p:cNvSpPr/>
           <p:nvPr/>
         </p:nvSpPr>
@@ -4840,7 +4978,7 @@
       </p:sp>
       <p:sp>
         <p:nvSpPr>
-          <p:cNvPr id="1664330928" name="Text 13"/>
+          <p:cNvPr id="2096287312" name="Text 13"/>
           <p:cNvSpPr/>
           <p:nvPr/>
         </p:nvSpPr>
@@ -4976,7 +5114,7 @@
       </p:sp>
       <p:sp>
         <p:nvSpPr>
-          <p:cNvPr id="1992890284" name="Text 14"/>
+          <p:cNvPr id="1607751013" name="Text 14"/>
           <p:cNvSpPr/>
           <p:nvPr/>
         </p:nvSpPr>
@@ -5016,7 +5154,7 @@
       </p:sp>
       <p:sp>
         <p:nvSpPr>
-          <p:cNvPr id="2109959783" name="Text 15"/>
+          <p:cNvPr id="916114535" name="Text 15"/>
           <p:cNvSpPr/>
           <p:nvPr/>
         </p:nvSpPr>
@@ -5133,7 +5271,7 @@
       </p:sp>
       <p:sp>
         <p:nvSpPr>
-          <p:cNvPr id="1701322343" name="Text 16"/>
+          <p:cNvPr id="121289305" name="Text 16"/>
           <p:cNvSpPr/>
           <p:nvPr/>
         </p:nvSpPr>
@@ -5195,7 +5333,7 @@
       </p:sp>
       <p:sp>
         <p:nvSpPr>
-          <p:cNvPr id="1128807738" name="Text 17"/>
+          <p:cNvPr id="1610053179" name="Text 17"/>
           <p:cNvSpPr/>
           <p:nvPr/>
         </p:nvSpPr>
@@ -5389,7 +5527,7 @@
       </p:sp>
       <p:sp>
         <p:nvSpPr>
-          <p:cNvPr id="1159709559" name="Shape 18"/>
+          <p:cNvPr id="1128353869" name="Shape 18"/>
           <p:cNvSpPr/>
           <p:nvPr/>
         </p:nvSpPr>
@@ -5424,7 +5562,7 @@
       </p:sp>
       <p:sp>
         <p:nvSpPr>
-          <p:cNvPr id="526301823" name="Text 19"/>
+          <p:cNvPr id="12105649" name="Text 19"/>
           <p:cNvSpPr/>
           <p:nvPr/>
         </p:nvSpPr>
@@ -5464,7 +5602,7 @@
       </p:sp>
       <p:sp>
         <p:nvSpPr>
-          <p:cNvPr id="439593587" name="Text 20"/>
+          <p:cNvPr id="1069730383" name="Text 20"/>
           <p:cNvSpPr/>
           <p:nvPr/>
         </p:nvSpPr>
@@ -5526,7 +5664,7 @@
       </p:sp>
       <p:sp>
         <p:nvSpPr>
-          <p:cNvPr id="1538956681" name="Text 21"/>
+          <p:cNvPr id="640904433" name="Text 21"/>
           <p:cNvSpPr/>
           <p:nvPr/>
         </p:nvSpPr>
@@ -5621,7 +5759,7 @@
       </p:sp>
       <p:sp>
         <p:nvSpPr>
-          <p:cNvPr id="298263151" name="Text 22"/>
+          <p:cNvPr id="1690215363" name="Text 22"/>
           <p:cNvSpPr/>
           <p:nvPr/>
         </p:nvSpPr>
@@ -5683,7 +5821,7 @@
       </p:sp>
       <p:sp>
         <p:nvSpPr>
-          <p:cNvPr id="348936049" name="Text 23"/>
+          <p:cNvPr id="2040475850" name="Text 23"/>
           <p:cNvSpPr/>
           <p:nvPr/>
         </p:nvSpPr>
@@ -5855,7 +5993,7 @@
       </p:sp>
       <p:sp>
         <p:nvSpPr>
-          <p:cNvPr id="1889142803" name="Text 24"/>
+          <p:cNvPr id="2063115433" name="Text 24"/>
           <p:cNvSpPr/>
           <p:nvPr/>
         </p:nvSpPr>
@@ -5917,7 +6055,7 @@
       </p:sp>
       <p:sp>
         <p:nvSpPr>
-          <p:cNvPr id="1627524843" name="Text 25"/>
+          <p:cNvPr id="211508331" name="Text 25"/>
           <p:cNvSpPr/>
           <p:nvPr/>
         </p:nvSpPr>
@@ -6082,7 +6220,7 @@
       </p:sp>
       <p:sp>
         <p:nvSpPr>
-          <p:cNvPr id="1634535085" name="Text 26"/>
+          <p:cNvPr id="281911381" name="Text 26"/>
           <p:cNvSpPr/>
           <p:nvPr/>
         </p:nvSpPr>
@@ -6144,7 +6282,7 @@
       </p:sp>
       <p:sp>
         <p:nvSpPr>
-          <p:cNvPr id="1930249170" name="Text 27"/>
+          <p:cNvPr id="923128653" name="Text 27"/>
           <p:cNvSpPr/>
           <p:nvPr/>
         </p:nvSpPr>
@@ -6447,11 +6585,11 @@
   <p:clrMapOvr>
     <a:masterClrMapping/>
   </p:clrMapOvr>
-  <mc:AlternateContent xmlns:mc="http://schemas.openxmlformats.org/markup-compatibility/2006" xmlns:p159="http://schemas.microsoft.com/office/powerpoint/2015/09/main">
-    <mc:Choice Requires="p159">
-      <p:transition/>
+  <mc:AlternateContent xmlns:mc="http://schemas.openxmlformats.org/markup-compatibility/2006">
+    <mc:Choice xmlns:p159="http://schemas.microsoft.com/office/powerpoint/2015/09/main" xmlns:p14="http://schemas.microsoft.com/office/powerpoint/2010/main" Requires="p159">
+      <p:transition p14:dur="500" advClick="1"/>
     </mc:Choice>
-    <mc:Fallback xmlns:w="http://schemas.openxmlformats.org/wordprocessingml/2006/main" xmlns:m="http://schemas.openxmlformats.org/officeDocument/2006/math" xmlns="">
+    <mc:Fallback>
       <p:transition advClick="1"/>
     </mc:Fallback>
   </mc:AlternateContent>
@@ -6459,14 +6597,13 @@
 </file>
 
 <file path=ppt/slides/slide11.xml><?xml version="1.0" encoding="utf-8"?>
-<p:sld xmlns:a="http://schemas.openxmlformats.org/drawingml/2006/main" xmlns:r="http://schemas.openxmlformats.org/officeDocument/2006/relationships" xmlns:p="http://schemas.openxmlformats.org/presentationml/2006/main" showMasterPhAnim="0">
+<p:sld xmlns:a="http://schemas.openxmlformats.org/drawingml/2006/main" xmlns:r="http://schemas.openxmlformats.org/officeDocument/2006/relationships" xmlns:p="http://schemas.openxmlformats.org/presentationml/2006/main" xmlns:m="http://schemas.openxmlformats.org/officeDocument/2006/math" xmlns:w="http://schemas.openxmlformats.org/wordprocessingml/2006/main" xmlns:mc="http://schemas.openxmlformats.org/markup-compatibility/2006" showMasterPhAnim="0" showMasterSp="1" show="1">
   <p:cSld name="Slide 12">
     <p:bg>
-      <p:bgPr>
+      <p:bgPr shadeToTitle="0">
         <a:solidFill>
           <a:srgbClr val="1F4E79"/>
         </a:solidFill>
-        <a:effectLst/>
       </p:bgPr>
     </p:bg>
     <p:spTree>
@@ -6485,7 +6622,7 @@
       </p:grpSpPr>
       <p:sp>
         <p:nvSpPr>
-          <p:cNvPr id="2055051946" name="Text 0"/>
+          <p:cNvPr id="831842956" name="Text 0"/>
           <p:cNvSpPr/>
           <p:nvPr/>
         </p:nvSpPr>
@@ -6547,7 +6684,7 @@
       </p:sp>
       <p:sp>
         <p:nvSpPr>
-          <p:cNvPr id="2003933322" name="Text 1"/>
+          <p:cNvPr id="1648448136" name="Text 1"/>
           <p:cNvSpPr/>
           <p:nvPr/>
         </p:nvSpPr>
@@ -6576,7 +6713,7 @@
       </p:sp>
       <p:sp>
         <p:nvSpPr>
-          <p:cNvPr id="235280107" name="Text 2"/>
+          <p:cNvPr id="1989449795" name="Text 2"/>
           <p:cNvSpPr/>
           <p:nvPr/>
         </p:nvSpPr>
@@ -6605,7 +6742,7 @@
       </p:sp>
       <p:sp>
         <p:nvSpPr>
-          <p:cNvPr id="14985771" name="Text 1"/>
+          <p:cNvPr id="1236482933" name="Text 1"/>
           <p:cNvSpPr/>
           <p:nvPr/>
         </p:nvSpPr>
@@ -6648,11 +6785,11 @@
   <p:clrMapOvr>
     <a:masterClrMapping/>
   </p:clrMapOvr>
-  <mc:AlternateContent xmlns:mc="http://schemas.openxmlformats.org/markup-compatibility/2006" xmlns:p159="http://schemas.microsoft.com/office/powerpoint/2015/09/main">
-    <mc:Choice Requires="p159">
-      <p:transition/>
+  <mc:AlternateContent xmlns:mc="http://schemas.openxmlformats.org/markup-compatibility/2006">
+    <mc:Choice xmlns:p159="http://schemas.microsoft.com/office/powerpoint/2015/09/main" xmlns:p14="http://schemas.microsoft.com/office/powerpoint/2010/main" Requires="p159">
+      <p:transition p14:dur="500" advClick="1"/>
     </mc:Choice>
-    <mc:Fallback xmlns:w="http://schemas.openxmlformats.org/wordprocessingml/2006/main" xmlns:m="http://schemas.openxmlformats.org/officeDocument/2006/math" xmlns="">
+    <mc:Fallback>
       <p:transition advClick="1"/>
     </mc:Fallback>
   </mc:AlternateContent>
@@ -6660,14 +6797,13 @@
 </file>
 
 <file path=ppt/slides/slide12.xml><?xml version="1.0" encoding="utf-8"?>
-<p:sld xmlns:a="http://schemas.openxmlformats.org/drawingml/2006/main" xmlns:r="http://schemas.openxmlformats.org/officeDocument/2006/relationships" xmlns:p="http://schemas.openxmlformats.org/presentationml/2006/main" showMasterPhAnim="0">
+<p:sld xmlns:a="http://schemas.openxmlformats.org/drawingml/2006/main" xmlns:r="http://schemas.openxmlformats.org/officeDocument/2006/relationships" xmlns:p="http://schemas.openxmlformats.org/presentationml/2006/main" xmlns:m="http://schemas.openxmlformats.org/officeDocument/2006/math" xmlns:w="http://schemas.openxmlformats.org/wordprocessingml/2006/main" xmlns:mc="http://schemas.openxmlformats.org/markup-compatibility/2006" showMasterPhAnim="0" showMasterSp="1" show="1">
   <p:cSld name="Slide 13">
     <p:bg>
-      <p:bgPr>
+      <p:bgPr shadeToTitle="0">
         <a:solidFill>
           <a:srgbClr val="F5F8FA"/>
         </a:solidFill>
-        <a:effectLst/>
       </p:bgPr>
     </p:bg>
     <p:spTree>
@@ -6686,7 +6822,7 @@
       </p:grpSpPr>
       <p:sp>
         <p:nvSpPr>
-          <p:cNvPr id="1952025056" name="Text 0"/>
+          <p:cNvPr id="1316412404" name="Text 0"/>
           <p:cNvSpPr/>
           <p:nvPr/>
         </p:nvSpPr>
@@ -6726,7 +6862,7 @@
       </p:sp>
       <p:sp>
         <p:nvSpPr>
-          <p:cNvPr id="1021384031" name="Shape 1"/>
+          <p:cNvPr id="1791291841" name="Shape 1"/>
           <p:cNvSpPr/>
           <p:nvPr/>
         </p:nvSpPr>
@@ -6756,7 +6892,7 @@
       </p:sp>
       <p:sp>
         <p:nvSpPr>
-          <p:cNvPr id="691337330" name="Shape 2"/>
+          <p:cNvPr id="1900323394" name="Shape 2"/>
           <p:cNvSpPr/>
           <p:nvPr/>
         </p:nvSpPr>
@@ -6791,7 +6927,7 @@
       </p:sp>
       <p:sp>
         <p:nvSpPr>
-          <p:cNvPr id="1920729173" name="Text 3"/>
+          <p:cNvPr id="1870592422" name="Text 3"/>
           <p:cNvSpPr/>
           <p:nvPr/>
         </p:nvSpPr>
@@ -6831,7 +6967,7 @@
       </p:sp>
       <p:sp>
         <p:nvSpPr>
-          <p:cNvPr id="1253027048" name="Shape 4"/>
+          <p:cNvPr id="25675824" name="Shape 4"/>
           <p:cNvSpPr/>
           <p:nvPr/>
         </p:nvSpPr>
@@ -6866,7 +7002,7 @@
       </p:sp>
       <p:sp>
         <p:nvSpPr>
-          <p:cNvPr id="473526277" name="Text 5"/>
+          <p:cNvPr id="1633713999" name="Text 5"/>
           <p:cNvSpPr/>
           <p:nvPr/>
         </p:nvSpPr>
@@ -6906,7 +7042,7 @@
       </p:sp>
       <p:sp>
         <p:nvSpPr>
-          <p:cNvPr id="75932926" name="Shape 6"/>
+          <p:cNvPr id="1549556474" name="Shape 6"/>
           <p:cNvSpPr/>
           <p:nvPr/>
         </p:nvSpPr>
@@ -6941,7 +7077,7 @@
       </p:sp>
       <p:sp>
         <p:nvSpPr>
-          <p:cNvPr id="1810921141" name="Text 7"/>
+          <p:cNvPr id="57408873" name="Text 7"/>
           <p:cNvSpPr/>
           <p:nvPr/>
         </p:nvSpPr>
@@ -6981,7 +7117,7 @@
       </p:sp>
       <p:sp>
         <p:nvSpPr>
-          <p:cNvPr id="1486102034" name="Shape 8"/>
+          <p:cNvPr id="364282683" name="Shape 8"/>
           <p:cNvSpPr/>
           <p:nvPr/>
         </p:nvSpPr>
@@ -7016,7 +7152,7 @@
       </p:sp>
       <p:sp>
         <p:nvSpPr>
-          <p:cNvPr id="272161934" name="Text 9"/>
+          <p:cNvPr id="488412708" name="Text 9"/>
           <p:cNvSpPr/>
           <p:nvPr/>
         </p:nvSpPr>
@@ -7056,7 +7192,7 @@
       </p:sp>
       <p:sp>
         <p:nvSpPr>
-          <p:cNvPr id="522801725" name="Shape 10"/>
+          <p:cNvPr id="1084308281" name="Shape 10"/>
           <p:cNvSpPr/>
           <p:nvPr/>
         </p:nvSpPr>
@@ -7091,7 +7227,7 @@
       </p:sp>
       <p:sp>
         <p:nvSpPr>
-          <p:cNvPr id="1903523318" name="Text 11"/>
+          <p:cNvPr id="1036095295" name="Text 11"/>
           <p:cNvSpPr/>
           <p:nvPr/>
         </p:nvSpPr>
@@ -7131,7 +7267,7 @@
       </p:sp>
       <p:sp>
         <p:nvSpPr>
-          <p:cNvPr id="1314626706" name="Shape 12"/>
+          <p:cNvPr id="13270722" name="Shape 12"/>
           <p:cNvSpPr/>
           <p:nvPr/>
         </p:nvSpPr>
@@ -7166,7 +7302,7 @@
       </p:sp>
       <p:sp>
         <p:nvSpPr>
-          <p:cNvPr id="2077297217" name="Text 13"/>
+          <p:cNvPr id="654217867" name="Text 13"/>
           <p:cNvSpPr/>
           <p:nvPr/>
         </p:nvSpPr>
@@ -7224,7 +7360,7 @@
       </p:sp>
       <p:sp>
         <p:nvSpPr>
-          <p:cNvPr id="789014618" name="Shape 14"/>
+          <p:cNvPr id="1429172386" name="Shape 14"/>
           <p:cNvSpPr/>
           <p:nvPr/>
         </p:nvSpPr>
@@ -7259,7 +7395,7 @@
       </p:sp>
       <p:sp>
         <p:nvSpPr>
-          <p:cNvPr id="832696397" name="Text 15"/>
+          <p:cNvPr id="75100566" name="Text 15"/>
           <p:cNvSpPr/>
           <p:nvPr/>
         </p:nvSpPr>
@@ -7317,7 +7453,7 @@
       </p:sp>
       <p:sp>
         <p:nvSpPr>
-          <p:cNvPr id="348355898" name="Shape 16"/>
+          <p:cNvPr id="414449621" name="Shape 16"/>
           <p:cNvSpPr/>
           <p:nvPr/>
         </p:nvSpPr>
@@ -7352,7 +7488,7 @@
       </p:sp>
       <p:sp>
         <p:nvSpPr>
-          <p:cNvPr id="1064252173" name="Text 17"/>
+          <p:cNvPr id="1121031970" name="Text 17"/>
           <p:cNvSpPr/>
           <p:nvPr/>
         </p:nvSpPr>
@@ -7410,7 +7546,7 @@
       </p:sp>
       <p:sp>
         <p:nvSpPr>
-          <p:cNvPr id="314756233" name="Shape 18"/>
+          <p:cNvPr id="576072509" name="Shape 18"/>
           <p:cNvSpPr/>
           <p:nvPr/>
         </p:nvSpPr>
@@ -7445,7 +7581,7 @@
       </p:sp>
       <p:sp>
         <p:nvSpPr>
-          <p:cNvPr id="233481160" name="Text 19"/>
+          <p:cNvPr id="106976169" name="Text 19"/>
           <p:cNvSpPr/>
           <p:nvPr/>
         </p:nvSpPr>
@@ -7485,7 +7621,7 @@
       </p:sp>
       <p:sp>
         <p:nvSpPr>
-          <p:cNvPr id="2118415004" name="Shape 20"/>
+          <p:cNvPr id="1863076824" name="Shape 20"/>
           <p:cNvSpPr/>
           <p:nvPr/>
         </p:nvSpPr>
@@ -7520,7 +7656,7 @@
       </p:sp>
       <p:sp>
         <p:nvSpPr>
-          <p:cNvPr id="421333666" name="Text 21"/>
+          <p:cNvPr id="1107424926" name="Text 21"/>
           <p:cNvSpPr/>
           <p:nvPr/>
         </p:nvSpPr>
@@ -7578,7 +7714,7 @@
       </p:sp>
       <p:sp>
         <p:nvSpPr>
-          <p:cNvPr id="567553336" name="Shape 22"/>
+          <p:cNvPr id="1615850724" name="Shape 22"/>
           <p:cNvSpPr/>
           <p:nvPr/>
         </p:nvSpPr>
@@ -7613,7 +7749,7 @@
       </p:sp>
       <p:sp>
         <p:nvSpPr>
-          <p:cNvPr id="1286713247" name="Text 23"/>
+          <p:cNvPr id="1120051762" name="Text 23"/>
           <p:cNvSpPr/>
           <p:nvPr/>
         </p:nvSpPr>
@@ -7671,7 +7807,7 @@
       </p:sp>
       <p:sp>
         <p:nvSpPr>
-          <p:cNvPr id="249215135" name="Shape 24"/>
+          <p:cNvPr id="1086147319" name="Shape 24"/>
           <p:cNvSpPr/>
           <p:nvPr/>
         </p:nvSpPr>
@@ -7706,7 +7842,7 @@
       </p:sp>
       <p:sp>
         <p:nvSpPr>
-          <p:cNvPr id="1480215555" name="Text 25"/>
+          <p:cNvPr id="1517635538" name="Text 25"/>
           <p:cNvSpPr/>
           <p:nvPr/>
         </p:nvSpPr>
@@ -7764,7 +7900,7 @@
       </p:sp>
       <p:sp>
         <p:nvSpPr>
-          <p:cNvPr id="2022485336" name="Shape 26"/>
+          <p:cNvPr id="2035834831" name="Shape 26"/>
           <p:cNvSpPr/>
           <p:nvPr/>
         </p:nvSpPr>
@@ -7799,7 +7935,7 @@
       </p:sp>
       <p:sp>
         <p:nvSpPr>
-          <p:cNvPr id="1848937077" name="Text 27"/>
+          <p:cNvPr id="110072020" name="Text 27"/>
           <p:cNvSpPr/>
           <p:nvPr/>
         </p:nvSpPr>
@@ -7839,7 +7975,7 @@
       </p:sp>
       <p:sp>
         <p:nvSpPr>
-          <p:cNvPr id="1846376369" name="Shape 28"/>
+          <p:cNvPr id="1993924737" name="Shape 28"/>
           <p:cNvSpPr/>
           <p:nvPr/>
         </p:nvSpPr>
@@ -7874,7 +8010,7 @@
       </p:sp>
       <p:sp>
         <p:nvSpPr>
-          <p:cNvPr id="1311274543" name="Text 29"/>
+          <p:cNvPr id="30346798" name="Text 29"/>
           <p:cNvSpPr/>
           <p:nvPr/>
         </p:nvSpPr>
@@ -7932,7 +8068,7 @@
       </p:sp>
       <p:sp>
         <p:nvSpPr>
-          <p:cNvPr id="61876493" name="Shape 30"/>
+          <p:cNvPr id="274416394" name="Shape 30"/>
           <p:cNvSpPr/>
           <p:nvPr/>
         </p:nvSpPr>
@@ -7967,7 +8103,7 @@
       </p:sp>
       <p:sp>
         <p:nvSpPr>
-          <p:cNvPr id="883421092" name="Text 31"/>
+          <p:cNvPr id="67462540" name="Text 31"/>
           <p:cNvSpPr/>
           <p:nvPr/>
         </p:nvSpPr>
@@ -8025,7 +8161,7 @@
       </p:sp>
       <p:sp>
         <p:nvSpPr>
-          <p:cNvPr id="1549276971" name="Shape 32"/>
+          <p:cNvPr id="715009581" name="Shape 32"/>
           <p:cNvSpPr/>
           <p:nvPr/>
         </p:nvSpPr>
@@ -8060,7 +8196,7 @@
       </p:sp>
       <p:sp>
         <p:nvSpPr>
-          <p:cNvPr id="685513421" name="Text 33"/>
+          <p:cNvPr id="2079380411" name="Text 33"/>
           <p:cNvSpPr/>
           <p:nvPr/>
         </p:nvSpPr>
@@ -8118,7 +8254,7 @@
       </p:sp>
       <p:sp>
         <p:nvSpPr>
-          <p:cNvPr id="607899001" name="Shape 34"/>
+          <p:cNvPr id="1876261012" name="Shape 34"/>
           <p:cNvSpPr/>
           <p:nvPr/>
         </p:nvSpPr>
@@ -8153,7 +8289,7 @@
       </p:sp>
       <p:sp>
         <p:nvSpPr>
-          <p:cNvPr id="1661318975" name="Text 35"/>
+          <p:cNvPr id="1679742266" name="Text 35"/>
           <p:cNvSpPr/>
           <p:nvPr/>
         </p:nvSpPr>
@@ -8193,7 +8329,7 @@
       </p:sp>
       <p:sp>
         <p:nvSpPr>
-          <p:cNvPr id="248161501" name="Shape 36"/>
+          <p:cNvPr id="1902578005" name="Shape 36"/>
           <p:cNvSpPr/>
           <p:nvPr/>
         </p:nvSpPr>
@@ -8228,7 +8364,7 @@
       </p:sp>
       <p:sp>
         <p:nvSpPr>
-          <p:cNvPr id="1266584464" name="Text 37"/>
+          <p:cNvPr id="288932969" name="Text 37"/>
           <p:cNvSpPr/>
           <p:nvPr/>
         </p:nvSpPr>
@@ -8286,7 +8422,7 @@
       </p:sp>
       <p:sp>
         <p:nvSpPr>
-          <p:cNvPr id="1492377677" name="Shape 38"/>
+          <p:cNvPr id="2108881117" name="Shape 38"/>
           <p:cNvSpPr/>
           <p:nvPr/>
         </p:nvSpPr>
@@ -8321,7 +8457,7 @@
       </p:sp>
       <p:sp>
         <p:nvSpPr>
-          <p:cNvPr id="1560376079" name="Text 39"/>
+          <p:cNvPr id="1592649360" name="Text 39"/>
           <p:cNvSpPr/>
           <p:nvPr/>
         </p:nvSpPr>
@@ -8379,7 +8515,7 @@
       </p:sp>
       <p:sp>
         <p:nvSpPr>
-          <p:cNvPr id="1626812102" name="Shape 40"/>
+          <p:cNvPr id="2066642325" name="Shape 40"/>
           <p:cNvSpPr/>
           <p:nvPr/>
         </p:nvSpPr>
@@ -8414,7 +8550,7 @@
       </p:sp>
       <p:sp>
         <p:nvSpPr>
-          <p:cNvPr id="551966093" name="Text 41"/>
+          <p:cNvPr id="1959777740" name="Text 41"/>
           <p:cNvSpPr/>
           <p:nvPr/>
         </p:nvSpPr>
@@ -8475,11 +8611,11 @@
   <p:clrMapOvr>
     <a:masterClrMapping/>
   </p:clrMapOvr>
-  <mc:AlternateContent xmlns:mc="http://schemas.openxmlformats.org/markup-compatibility/2006" xmlns:p159="http://schemas.microsoft.com/office/powerpoint/2015/09/main">
-    <mc:Choice Requires="p159">
-      <p:transition/>
+  <mc:AlternateContent xmlns:mc="http://schemas.openxmlformats.org/markup-compatibility/2006">
+    <mc:Choice xmlns:p159="http://schemas.microsoft.com/office/powerpoint/2015/09/main" xmlns:p14="http://schemas.microsoft.com/office/powerpoint/2010/main" Requires="p159">
+      <p:transition p14:dur="500" advClick="1"/>
     </mc:Choice>
-    <mc:Fallback xmlns:w="http://schemas.openxmlformats.org/wordprocessingml/2006/main" xmlns:m="http://schemas.openxmlformats.org/officeDocument/2006/math" xmlns="">
+    <mc:Fallback>
       <p:transition advClick="1"/>
     </mc:Fallback>
   </mc:AlternateContent>
@@ -8487,8 +8623,8 @@
 </file>
 
 <file path=ppt/slides/slide13.xml><?xml version="1.0" encoding="utf-8"?>
-<p:sld xmlns:a="http://schemas.openxmlformats.org/drawingml/2006/main" xmlns:r="http://schemas.openxmlformats.org/officeDocument/2006/relationships" xmlns:p="http://schemas.openxmlformats.org/presentationml/2006/main" showMasterPhAnim="0">
-  <p:cSld>
+<p:sld xmlns:a="http://schemas.openxmlformats.org/drawingml/2006/main" xmlns:r="http://schemas.openxmlformats.org/officeDocument/2006/relationships" xmlns:p="http://schemas.openxmlformats.org/presentationml/2006/main" xmlns:m="http://schemas.openxmlformats.org/officeDocument/2006/math" xmlns:w="http://schemas.openxmlformats.org/wordprocessingml/2006/main" xmlns:mc="http://schemas.openxmlformats.org/markup-compatibility/2006" showMasterPhAnim="0" showMasterSp="1" show="1">
+  <p:cSld name="">
     <p:spTree>
       <p:nvGrpSpPr>
         <p:cNvPr id="1" name=""/>
@@ -8505,7 +8641,7 @@
       </p:grpSpPr>
       <p:sp>
         <p:nvSpPr>
-          <p:cNvPr id="1724422908" name="Title"/>
+          <p:cNvPr id="1322424359" name="Title"/>
           <p:cNvSpPr/>
           <p:nvPr/>
         </p:nvSpPr>
@@ -8545,7 +8681,7 @@
       </p:sp>
       <p:sp>
         <p:nvSpPr>
-          <p:cNvPr id="204397218" name="ScenCard"/>
+          <p:cNvPr id="472570585" name="ScenCard"/>
           <p:cNvSpPr/>
           <p:nvPr/>
         </p:nvSpPr>
@@ -8637,7 +8773,7 @@
       </p:sp>
       <p:sp>
         <p:nvSpPr>
-          <p:cNvPr id="1027789461" name="Bar201"/>
+          <p:cNvPr id="63547453" name="Bar201"/>
           <p:cNvSpPr/>
           <p:nvPr/>
         </p:nvSpPr>
@@ -8667,7 +8803,7 @@
       </p:sp>
       <p:sp>
         <p:nvSpPr>
-          <p:cNvPr id="1974855329" name="Badge210"/>
+          <p:cNvPr id="347975130" name="Badge210"/>
           <p:cNvSpPr/>
           <p:nvPr/>
         </p:nvSpPr>
@@ -8709,7 +8845,7 @@
       </p:sp>
       <p:sp>
         <p:nvSpPr>
-          <p:cNvPr id="178468896" name="Badge211"/>
+          <p:cNvPr id="515888417" name="Badge211"/>
           <p:cNvSpPr/>
           <p:nvPr/>
         </p:nvSpPr>
@@ -8751,7 +8887,7 @@
       </p:sp>
       <p:sp>
         <p:nvSpPr>
-          <p:cNvPr id="1834907050" name="Badge212"/>
+          <p:cNvPr id="1744733485" name="Badge212"/>
           <p:cNvSpPr/>
           <p:nvPr/>
         </p:nvSpPr>
@@ -8793,7 +8929,7 @@
       </p:sp>
       <p:sp>
         <p:nvSpPr>
-          <p:cNvPr id="415075463" name="RepLbl"/>
+          <p:cNvPr id="584578004" name="RepLbl"/>
           <p:cNvSpPr/>
           <p:nvPr/>
         </p:nvSpPr>
@@ -8837,7 +8973,7 @@
       </p:sp>
       <p:sp>
         <p:nvSpPr>
-          <p:cNvPr id="425028407" name="Bar300"/>
+          <p:cNvPr id="1440222285" name="Bar300"/>
           <p:cNvSpPr/>
           <p:nvPr/>
         </p:nvSpPr>
@@ -8867,7 +9003,7 @@
       </p:sp>
       <p:sp>
         <p:nvSpPr>
-          <p:cNvPr id="1830424554" name="Item0"/>
+          <p:cNvPr id="1175473360" name="Item0"/>
           <p:cNvSpPr/>
           <p:nvPr/>
         </p:nvSpPr>
@@ -8920,7 +9056,7 @@
       </p:sp>
       <p:sp>
         <p:nvSpPr>
-          <p:cNvPr id="1585409575" name="Bar310"/>
+          <p:cNvPr id="370099329" name="Bar310"/>
           <p:cNvSpPr/>
           <p:nvPr/>
         </p:nvSpPr>
@@ -8950,7 +9086,7 @@
       </p:sp>
       <p:sp>
         <p:nvSpPr>
-          <p:cNvPr id="1144026917" name="Item1"/>
+          <p:cNvPr id="1185603420" name="Item1"/>
           <p:cNvSpPr/>
           <p:nvPr/>
         </p:nvSpPr>
@@ -9003,7 +9139,7 @@
       </p:sp>
       <p:sp>
         <p:nvSpPr>
-          <p:cNvPr id="1714208993" name="Bar320"/>
+          <p:cNvPr id="1612274784" name="Bar320"/>
           <p:cNvSpPr/>
           <p:nvPr/>
         </p:nvSpPr>
@@ -9033,7 +9169,7 @@
       </p:sp>
       <p:sp>
         <p:nvSpPr>
-          <p:cNvPr id="495863985" name="Item2"/>
+          <p:cNvPr id="1221099455" name="Item2"/>
           <p:cNvSpPr/>
           <p:nvPr/>
         </p:nvSpPr>
@@ -9086,7 +9222,7 @@
       </p:sp>
       <p:sp>
         <p:nvSpPr>
-          <p:cNvPr id="1597143911" name="Bar330"/>
+          <p:cNvPr id="1276482801" name="Bar330"/>
           <p:cNvSpPr/>
           <p:nvPr/>
         </p:nvSpPr>
@@ -9116,7 +9252,7 @@
       </p:sp>
       <p:sp>
         <p:nvSpPr>
-          <p:cNvPr id="735070040" name="Item3"/>
+          <p:cNvPr id="391700422" name="Item3"/>
           <p:cNvSpPr/>
           <p:nvPr/>
         </p:nvSpPr>
@@ -9169,7 +9305,7 @@
       </p:sp>
       <p:sp>
         <p:nvSpPr>
-          <p:cNvPr id="939999941" name="Bar340"/>
+          <p:cNvPr id="1541146510" name="Bar340"/>
           <p:cNvSpPr/>
           <p:nvPr/>
         </p:nvSpPr>
@@ -9199,7 +9335,7 @@
       </p:sp>
       <p:sp>
         <p:nvSpPr>
-          <p:cNvPr id="1955951461" name="Item4"/>
+          <p:cNvPr id="1944056769" name="Item4"/>
           <p:cNvSpPr/>
           <p:nvPr/>
         </p:nvSpPr>
@@ -9252,7 +9388,7 @@
       </p:sp>
       <p:sp>
         <p:nvSpPr>
-          <p:cNvPr id="1889586287" name="Bar350"/>
+          <p:cNvPr id="1127672868" name="Bar350"/>
           <p:cNvSpPr/>
           <p:nvPr/>
         </p:nvSpPr>
@@ -9282,7 +9418,7 @@
       </p:sp>
       <p:sp>
         <p:nvSpPr>
-          <p:cNvPr id="2015654094" name="Item5"/>
+          <p:cNvPr id="93455572" name="Item5"/>
           <p:cNvSpPr/>
           <p:nvPr/>
         </p:nvSpPr>
@@ -9335,7 +9471,7 @@
       </p:sp>
       <p:sp>
         <p:nvSpPr>
-          <p:cNvPr id="52608156" name="Bar360"/>
+          <p:cNvPr id="7156613" name="Bar360"/>
           <p:cNvSpPr/>
           <p:nvPr/>
         </p:nvSpPr>
@@ -9365,7 +9501,7 @@
       </p:sp>
       <p:sp>
         <p:nvSpPr>
-          <p:cNvPr id="2136402326" name="Item6"/>
+          <p:cNvPr id="255083647" name="Item6"/>
           <p:cNvSpPr/>
           <p:nvPr/>
         </p:nvSpPr>
@@ -9418,7 +9554,7 @@
       </p:sp>
       <p:sp>
         <p:nvSpPr>
-          <p:cNvPr id="1235032826" name="Bar370"/>
+          <p:cNvPr id="1240883445" name="Bar370"/>
           <p:cNvSpPr/>
           <p:nvPr/>
         </p:nvSpPr>
@@ -9448,7 +9584,7 @@
       </p:sp>
       <p:sp>
         <p:nvSpPr>
-          <p:cNvPr id="375724230" name="Item7"/>
+          <p:cNvPr id="2016959706" name="Item7"/>
           <p:cNvSpPr/>
           <p:nvPr/>
         </p:nvSpPr>
@@ -9501,7 +9637,7 @@
       </p:sp>
       <p:sp>
         <p:nvSpPr>
-          <p:cNvPr id="545919216" name="Shape 1"/>
+          <p:cNvPr id="672705446" name="Shape 1"/>
           <p:cNvSpPr/>
           <p:nvPr/>
         </p:nvSpPr>
@@ -9534,11 +9670,11 @@
   <p:clrMapOvr>
     <a:masterClrMapping/>
   </p:clrMapOvr>
-  <mc:AlternateContent xmlns:mc="http://schemas.openxmlformats.org/markup-compatibility/2006" xmlns:p159="http://schemas.microsoft.com/office/powerpoint/2015/09/main">
-    <mc:Choice Requires="p159">
-      <p:transition/>
+  <mc:AlternateContent xmlns:mc="http://schemas.openxmlformats.org/markup-compatibility/2006">
+    <mc:Choice xmlns:p159="http://schemas.microsoft.com/office/powerpoint/2015/09/main" xmlns:p14="http://schemas.microsoft.com/office/powerpoint/2010/main" Requires="p159">
+      <p:transition p14:dur="500" advClick="1"/>
     </mc:Choice>
-    <mc:Fallback xmlns:w="http://schemas.openxmlformats.org/wordprocessingml/2006/main" xmlns:m="http://schemas.openxmlformats.org/officeDocument/2006/math" xmlns="">
+    <mc:Fallback>
       <p:transition advClick="1"/>
     </mc:Fallback>
   </mc:AlternateContent>
@@ -9546,8 +9682,8 @@
 </file>
 
 <file path=ppt/slides/slide14.xml><?xml version="1.0" encoding="utf-8"?>
-<p:sld xmlns:a="http://schemas.openxmlformats.org/drawingml/2006/main" xmlns:r="http://schemas.openxmlformats.org/officeDocument/2006/relationships" xmlns:p="http://schemas.openxmlformats.org/presentationml/2006/main" showMasterPhAnim="0">
-  <p:cSld>
+<p:sld xmlns:a="http://schemas.openxmlformats.org/drawingml/2006/main" xmlns:r="http://schemas.openxmlformats.org/officeDocument/2006/relationships" xmlns:p="http://schemas.openxmlformats.org/presentationml/2006/main" xmlns:m="http://schemas.openxmlformats.org/officeDocument/2006/math" xmlns:w="http://schemas.openxmlformats.org/wordprocessingml/2006/main" xmlns:mc="http://schemas.openxmlformats.org/markup-compatibility/2006" showMasterPhAnim="0" showMasterSp="1" show="1">
+  <p:cSld name="">
     <p:spTree>
       <p:nvGrpSpPr>
         <p:cNvPr id="1" name=""/>
@@ -9564,7 +9700,7 @@
       </p:grpSpPr>
       <p:sp>
         <p:nvSpPr>
-          <p:cNvPr id="1868681599" name="Title"/>
+          <p:cNvPr id="531707531" name="Title"/>
           <p:cNvSpPr/>
           <p:nvPr/>
         </p:nvSpPr>
@@ -9604,7 +9740,7 @@
       </p:sp>
       <p:sp>
         <p:nvSpPr>
-          <p:cNvPr id="1140428880" name="Intro"/>
+          <p:cNvPr id="335929380" name="Intro"/>
           <p:cNvSpPr/>
           <p:nvPr/>
         </p:nvSpPr>
@@ -9664,7 +9800,7 @@
       </p:sp>
       <p:sp>
         <p:nvSpPr>
-          <p:cNvPr id="1467143748" name="Bar201"/>
+          <p:cNvPr id="1494795731" name="Bar201"/>
           <p:cNvSpPr/>
           <p:nvPr/>
         </p:nvSpPr>
@@ -9694,7 +9830,7 @@
       </p:sp>
       <p:sp>
         <p:nvSpPr>
-          <p:cNvPr id="95966380" name="CPLbl"/>
+          <p:cNvPr id="385253786" name="CPLbl"/>
           <p:cNvSpPr/>
           <p:nvPr/>
         </p:nvSpPr>
@@ -9738,7 +9874,7 @@
       </p:sp>
       <p:sp>
         <p:nvSpPr>
-          <p:cNvPr id="1882278904" name="Bar220"/>
+          <p:cNvPr id="1818579605" name="Bar220"/>
           <p:cNvSpPr/>
           <p:nvPr/>
         </p:nvSpPr>
@@ -9768,7 +9904,7 @@
       </p:sp>
       <p:sp>
         <p:nvSpPr>
-          <p:cNvPr id="2022937949" name="CP0"/>
+          <p:cNvPr id="1789061288" name="CP0"/>
           <p:cNvSpPr/>
           <p:nvPr/>
         </p:nvSpPr>
@@ -9839,7 +9975,7 @@
       </p:sp>
       <p:sp>
         <p:nvSpPr>
-          <p:cNvPr id="1990898482" name="Bar230"/>
+          <p:cNvPr id="748459000" name="Bar230"/>
           <p:cNvSpPr/>
           <p:nvPr/>
         </p:nvSpPr>
@@ -9869,7 +10005,7 @@
       </p:sp>
       <p:sp>
         <p:nvSpPr>
-          <p:cNvPr id="1919480267" name="CP1"/>
+          <p:cNvPr id="1788136854" name="CP1"/>
           <p:cNvSpPr/>
           <p:nvPr/>
         </p:nvSpPr>
@@ -9958,7 +10094,7 @@
       </p:sp>
       <p:sp>
         <p:nvSpPr>
-          <p:cNvPr id="1922477869" name="Bar240"/>
+          <p:cNvPr id="1785465931" name="Bar240"/>
           <p:cNvSpPr/>
           <p:nvPr/>
         </p:nvSpPr>
@@ -9988,7 +10124,7 @@
       </p:sp>
       <p:sp>
         <p:nvSpPr>
-          <p:cNvPr id="178183464" name="CP2"/>
+          <p:cNvPr id="651786623" name="CP2"/>
           <p:cNvSpPr/>
           <p:nvPr/>
         </p:nvSpPr>
@@ -10059,7 +10195,7 @@
       </p:sp>
       <p:sp>
         <p:nvSpPr>
-          <p:cNvPr id="1703821285" name="Bar250"/>
+          <p:cNvPr id="178767188" name="Bar250"/>
           <p:cNvSpPr/>
           <p:nvPr/>
         </p:nvSpPr>
@@ -10089,7 +10225,7 @@
       </p:sp>
       <p:sp>
         <p:nvSpPr>
-          <p:cNvPr id="577284513" name="CP3"/>
+          <p:cNvPr id="1100492837" name="CP3"/>
           <p:cNvSpPr/>
           <p:nvPr/>
         </p:nvSpPr>
@@ -10160,7 +10296,7 @@
       </p:sp>
       <p:sp>
         <p:nvSpPr>
-          <p:cNvPr id="1242798587" name="AnaSource"/>
+          <p:cNvPr id="1607269361" name="AnaSource"/>
           <p:cNvSpPr/>
           <p:nvPr/>
         </p:nvSpPr>
@@ -10236,7 +10372,7 @@
       </p:sp>
       <p:sp>
         <p:nvSpPr>
-          <p:cNvPr id="2055385961" name="Bar301"/>
+          <p:cNvPr id="596723804" name="Bar301"/>
           <p:cNvSpPr/>
           <p:nvPr/>
         </p:nvSpPr>
@@ -10266,7 +10402,7 @@
       </p:sp>
       <p:sp>
         <p:nvSpPr>
-          <p:cNvPr id="2029057849" name="FarmSource"/>
+          <p:cNvPr id="1975240587" name="FarmSource"/>
           <p:cNvSpPr/>
           <p:nvPr/>
         </p:nvSpPr>
@@ -10342,7 +10478,7 @@
       </p:sp>
       <p:sp>
         <p:nvSpPr>
-          <p:cNvPr id="231931231" name="Bar311"/>
+          <p:cNvPr id="1715236454" name="Bar311"/>
           <p:cNvSpPr/>
           <p:nvPr/>
         </p:nvSpPr>
@@ -10372,7 +10508,7 @@
       </p:sp>
       <p:sp>
         <p:nvSpPr>
-          <p:cNvPr id="1539108736" name="Shape 1"/>
+          <p:cNvPr id="218024447" name="Shape 1"/>
           <p:cNvSpPr/>
           <p:nvPr/>
         </p:nvSpPr>
@@ -10405,11 +10541,11 @@
   <p:clrMapOvr>
     <a:masterClrMapping/>
   </p:clrMapOvr>
-  <mc:AlternateContent xmlns:mc="http://schemas.openxmlformats.org/markup-compatibility/2006" xmlns:p159="http://schemas.microsoft.com/office/powerpoint/2015/09/main">
-    <mc:Choice Requires="p159">
-      <p:transition/>
+  <mc:AlternateContent xmlns:mc="http://schemas.openxmlformats.org/markup-compatibility/2006">
+    <mc:Choice xmlns:p159="http://schemas.microsoft.com/office/powerpoint/2015/09/main" xmlns:p14="http://schemas.microsoft.com/office/powerpoint/2010/main" Requires="p159">
+      <p:transition p14:dur="500" advClick="1"/>
     </mc:Choice>
-    <mc:Fallback xmlns:w="http://schemas.openxmlformats.org/wordprocessingml/2006/main" xmlns:m="http://schemas.openxmlformats.org/officeDocument/2006/math" xmlns="">
+    <mc:Fallback>
       <p:transition advClick="1"/>
     </mc:Fallback>
   </mc:AlternateContent>
@@ -10417,8 +10553,8 @@
 </file>
 
 <file path=ppt/slides/slide15.xml><?xml version="1.0" encoding="utf-8"?>
-<p:sld xmlns:a="http://schemas.openxmlformats.org/drawingml/2006/main" xmlns:r="http://schemas.openxmlformats.org/officeDocument/2006/relationships" xmlns:p="http://schemas.openxmlformats.org/presentationml/2006/main" showMasterPhAnim="0">
-  <p:cSld>
+<p:sld xmlns:a="http://schemas.openxmlformats.org/drawingml/2006/main" xmlns:r="http://schemas.openxmlformats.org/officeDocument/2006/relationships" xmlns:p="http://schemas.openxmlformats.org/presentationml/2006/main" xmlns:m="http://schemas.openxmlformats.org/officeDocument/2006/math" xmlns:w="http://schemas.openxmlformats.org/wordprocessingml/2006/main" xmlns:mc="http://schemas.openxmlformats.org/markup-compatibility/2006" showMasterPhAnim="0" showMasterSp="1" show="1">
+  <p:cSld name="">
     <p:spTree>
       <p:nvGrpSpPr>
         <p:cNvPr id="1" name=""/>
@@ -10435,7 +10571,7 @@
       </p:grpSpPr>
       <p:sp>
         <p:nvSpPr>
-          <p:cNvPr id="575326499" name="Title"/>
+          <p:cNvPr id="1907713265" name="Title"/>
           <p:cNvSpPr/>
           <p:nvPr/>
         </p:nvSpPr>
@@ -10475,7 +10611,7 @@
       </p:sp>
       <p:sp>
         <p:nvSpPr>
-          <p:cNvPr id="25953993" name="Badge200"/>
+          <p:cNvPr id="2006819558" name="Badge200"/>
           <p:cNvSpPr/>
           <p:nvPr/>
         </p:nvSpPr>
@@ -10517,7 +10653,7 @@
       </p:sp>
       <p:sp>
         <p:nvSpPr>
-          <p:cNvPr id="878201385" name="P1"/>
+          <p:cNvPr id="1084577481" name="P1"/>
           <p:cNvSpPr/>
           <p:nvPr/>
         </p:nvSpPr>
@@ -10625,7 +10761,7 @@
       </p:sp>
       <p:sp>
         <p:nvSpPr>
-          <p:cNvPr id="1929516839" name="Bar202"/>
+          <p:cNvPr id="1945702100" name="Bar202"/>
           <p:cNvSpPr/>
           <p:nvPr/>
         </p:nvSpPr>
@@ -10655,7 +10791,7 @@
       </p:sp>
       <p:sp>
         <p:nvSpPr>
-          <p:cNvPr id="1781577733" name="Badge210"/>
+          <p:cNvPr id="1089690136" name="Badge210"/>
           <p:cNvSpPr/>
           <p:nvPr/>
         </p:nvSpPr>
@@ -10697,7 +10833,7 @@
       </p:sp>
       <p:sp>
         <p:nvSpPr>
-          <p:cNvPr id="29191181" name="P2"/>
+          <p:cNvPr id="721247781" name="P2"/>
           <p:cNvSpPr/>
           <p:nvPr/>
         </p:nvSpPr>
@@ -10821,7 +10957,7 @@
       </p:sp>
       <p:sp>
         <p:nvSpPr>
-          <p:cNvPr id="569810369" name="Bar212"/>
+          <p:cNvPr id="702532238" name="Bar212"/>
           <p:cNvSpPr/>
           <p:nvPr/>
         </p:nvSpPr>
@@ -10851,7 +10987,7 @@
       </p:sp>
       <p:sp>
         <p:nvSpPr>
-          <p:cNvPr id="222364054" name="Badge220"/>
+          <p:cNvPr id="344172030" name="Badge220"/>
           <p:cNvSpPr/>
           <p:nvPr/>
         </p:nvSpPr>
@@ -10893,7 +11029,7 @@
       </p:sp>
       <p:sp>
         <p:nvSpPr>
-          <p:cNvPr id="1864247687" name="P3"/>
+          <p:cNvPr id="1775974803" name="P3"/>
           <p:cNvSpPr/>
           <p:nvPr/>
         </p:nvSpPr>
@@ -11001,7 +11137,7 @@
       </p:sp>
       <p:sp>
         <p:nvSpPr>
-          <p:cNvPr id="1306511378" name="Bar222"/>
+          <p:cNvPr id="988981933" name="Bar222"/>
           <p:cNvSpPr/>
           <p:nvPr/>
         </p:nvSpPr>
@@ -11031,7 +11167,7 @@
       </p:sp>
       <p:sp>
         <p:nvSpPr>
-          <p:cNvPr id="1285891651" name="Shape 1"/>
+          <p:cNvPr id="1455405392" name="Shape 1"/>
           <p:cNvSpPr/>
           <p:nvPr/>
         </p:nvSpPr>
@@ -11064,11 +11200,11 @@
   <p:clrMapOvr>
     <a:masterClrMapping/>
   </p:clrMapOvr>
-  <mc:AlternateContent xmlns:mc="http://schemas.openxmlformats.org/markup-compatibility/2006" xmlns:p159="http://schemas.microsoft.com/office/powerpoint/2015/09/main">
-    <mc:Choice Requires="p159">
-      <p:transition/>
+  <mc:AlternateContent xmlns:mc="http://schemas.openxmlformats.org/markup-compatibility/2006">
+    <mc:Choice xmlns:p159="http://schemas.microsoft.com/office/powerpoint/2015/09/main" xmlns:p14="http://schemas.microsoft.com/office/powerpoint/2010/main" Requires="p159">
+      <p:transition p14:dur="500" advClick="1"/>
     </mc:Choice>
-    <mc:Fallback xmlns:w="http://schemas.openxmlformats.org/wordprocessingml/2006/main" xmlns:m="http://schemas.openxmlformats.org/officeDocument/2006/math" xmlns="">
+    <mc:Fallback>
       <p:transition advClick="1"/>
     </mc:Fallback>
   </mc:AlternateContent>
@@ -11076,8 +11212,8 @@
 </file>
 
 <file path=ppt/slides/slide16.xml><?xml version="1.0" encoding="utf-8"?>
-<p:sld xmlns:a="http://schemas.openxmlformats.org/drawingml/2006/main" xmlns:r="http://schemas.openxmlformats.org/officeDocument/2006/relationships" xmlns:p="http://schemas.openxmlformats.org/presentationml/2006/main" showMasterPhAnim="0">
-  <p:cSld>
+<p:sld xmlns:a="http://schemas.openxmlformats.org/drawingml/2006/main" xmlns:r="http://schemas.openxmlformats.org/officeDocument/2006/relationships" xmlns:p="http://schemas.openxmlformats.org/presentationml/2006/main" xmlns:m="http://schemas.openxmlformats.org/officeDocument/2006/math" xmlns:w="http://schemas.openxmlformats.org/wordprocessingml/2006/main" xmlns:mc="http://schemas.openxmlformats.org/markup-compatibility/2006" showMasterPhAnim="0" showMasterSp="1" show="1">
+  <p:cSld name="">
     <p:spTree>
       <p:nvGrpSpPr>
         <p:cNvPr id="1" name=""/>
@@ -11094,7 +11230,7 @@
       </p:grpSpPr>
       <p:sp>
         <p:nvSpPr>
-          <p:cNvPr id="272429126" name="Title"/>
+          <p:cNvPr id="1118119672" name="Title"/>
           <p:cNvSpPr/>
           <p:nvPr/>
         </p:nvSpPr>
@@ -11134,7 +11270,7 @@
       </p:sp>
       <p:sp>
         <p:nvSpPr>
-          <p:cNvPr id="732291632" name="Sub"/>
+          <p:cNvPr id="861743395" name="Sub"/>
           <p:cNvSpPr/>
           <p:nvPr/>
         </p:nvSpPr>
@@ -11174,7 +11310,7 @@
       </p:sp>
       <p:sp>
         <p:nvSpPr>
-          <p:cNvPr id="794666655" name="Scenario"/>
+          <p:cNvPr id="17458263" name="Scenario"/>
           <p:cNvSpPr/>
           <p:nvPr/>
         </p:nvSpPr>
@@ -11282,7 +11418,7 @@
       </p:sp>
       <p:sp>
         <p:nvSpPr>
-          <p:cNvPr id="1814618674" name="Bar201"/>
+          <p:cNvPr id="1080611668" name="Bar201"/>
           <p:cNvSpPr/>
           <p:nvPr/>
         </p:nvSpPr>
@@ -11312,7 +11448,7 @@
       </p:sp>
       <p:sp>
         <p:nvSpPr>
-          <p:cNvPr id="767229316" name="ReqLbl"/>
+          <p:cNvPr id="1894233231" name="ReqLbl"/>
           <p:cNvSpPr/>
           <p:nvPr/>
         </p:nvSpPr>
@@ -11356,7 +11492,7 @@
       </p:sp>
       <p:sp>
         <p:nvSpPr>
-          <p:cNvPr id="251699905" name="Bar220"/>
+          <p:cNvPr id="35351916" name="Bar220"/>
           <p:cNvSpPr/>
           <p:nvPr/>
         </p:nvSpPr>
@@ -11386,7 +11522,7 @@
       </p:sp>
       <p:sp>
         <p:nvSpPr>
-          <p:cNvPr id="565738074" name="Req0"/>
+          <p:cNvPr id="748744619" name="Req0"/>
           <p:cNvSpPr/>
           <p:nvPr/>
         </p:nvSpPr>
@@ -11457,7 +11593,7 @@
       </p:sp>
       <p:sp>
         <p:nvSpPr>
-          <p:cNvPr id="434371286" name="Bar230"/>
+          <p:cNvPr id="1171683520" name="Bar230"/>
           <p:cNvSpPr/>
           <p:nvPr/>
         </p:nvSpPr>
@@ -11487,7 +11623,7 @@
       </p:sp>
       <p:sp>
         <p:nvSpPr>
-          <p:cNvPr id="2026923635" name="Req1"/>
+          <p:cNvPr id="848086437" name="Req1"/>
           <p:cNvSpPr/>
           <p:nvPr/>
         </p:nvSpPr>
@@ -11558,7 +11694,7 @@
       </p:sp>
       <p:sp>
         <p:nvSpPr>
-          <p:cNvPr id="871970449" name="Bar240"/>
+          <p:cNvPr id="1759928799" name="Bar240"/>
           <p:cNvSpPr/>
           <p:nvPr/>
         </p:nvSpPr>
@@ -11588,7 +11724,7 @@
       </p:sp>
       <p:sp>
         <p:nvSpPr>
-          <p:cNvPr id="372759391" name="Req2"/>
+          <p:cNvPr id="476746485" name="Req2"/>
           <p:cNvSpPr/>
           <p:nvPr/>
         </p:nvSpPr>
@@ -11659,7 +11795,7 @@
       </p:sp>
       <p:sp>
         <p:nvSpPr>
-          <p:cNvPr id="1264866459" name="Bar250"/>
+          <p:cNvPr id="1545047482" name="Bar250"/>
           <p:cNvSpPr/>
           <p:nvPr/>
         </p:nvSpPr>
@@ -11689,7 +11825,7 @@
       </p:sp>
       <p:sp>
         <p:nvSpPr>
-          <p:cNvPr id="726506058" name="Req3"/>
+          <p:cNvPr id="210778938" name="Req3"/>
           <p:cNvSpPr/>
           <p:nvPr/>
         </p:nvSpPr>
@@ -11760,7 +11896,7 @@
       </p:sp>
       <p:sp>
         <p:nvSpPr>
-          <p:cNvPr id="194780076" name="Bar260"/>
+          <p:cNvPr id="1699669507" name="Bar260"/>
           <p:cNvSpPr/>
           <p:nvPr/>
         </p:nvSpPr>
@@ -11790,7 +11926,7 @@
       </p:sp>
       <p:sp>
         <p:nvSpPr>
-          <p:cNvPr id="1668360633" name="Req4"/>
+          <p:cNvPr id="906704184" name="Req4"/>
           <p:cNvSpPr/>
           <p:nvPr/>
         </p:nvSpPr>
@@ -11861,7 +11997,7 @@
       </p:sp>
       <p:sp>
         <p:nvSpPr>
-          <p:cNvPr id="1659365323" name="ResLbl"/>
+          <p:cNvPr id="323955401" name="ResLbl"/>
           <p:cNvSpPr/>
           <p:nvPr/>
         </p:nvSpPr>
@@ -11921,7 +12057,7 @@
       </p:sp>
       <p:sp>
         <p:nvSpPr>
-          <p:cNvPr id="919671354" name="Bar271"/>
+          <p:cNvPr id="513902870" name="Bar271"/>
           <p:cNvSpPr/>
           <p:nvPr/>
         </p:nvSpPr>
@@ -11951,7 +12087,7 @@
       </p:sp>
       <p:sp>
         <p:nvSpPr>
-          <p:cNvPr id="651324361" name="Shape 1"/>
+          <p:cNvPr id="594121056" name="Shape 1"/>
           <p:cNvSpPr/>
           <p:nvPr/>
         </p:nvSpPr>
@@ -11984,11 +12120,11 @@
   <p:clrMapOvr>
     <a:masterClrMapping/>
   </p:clrMapOvr>
-  <mc:AlternateContent xmlns:mc="http://schemas.openxmlformats.org/markup-compatibility/2006" xmlns:p159="http://schemas.microsoft.com/office/powerpoint/2015/09/main">
-    <mc:Choice Requires="p159">
-      <p:transition/>
+  <mc:AlternateContent xmlns:mc="http://schemas.openxmlformats.org/markup-compatibility/2006">
+    <mc:Choice xmlns:p159="http://schemas.microsoft.com/office/powerpoint/2015/09/main" xmlns:p14="http://schemas.microsoft.com/office/powerpoint/2010/main" Requires="p159">
+      <p:transition p14:dur="500" advClick="1"/>
     </mc:Choice>
-    <mc:Fallback xmlns:w="http://schemas.openxmlformats.org/wordprocessingml/2006/main" xmlns:m="http://schemas.openxmlformats.org/officeDocument/2006/math" xmlns="">
+    <mc:Fallback>
       <p:transition advClick="1"/>
     </mc:Fallback>
   </mc:AlternateContent>
@@ -11996,14 +12132,13 @@
 </file>
 
 <file path=ppt/slides/slide17.xml><?xml version="1.0" encoding="utf-8"?>
-<p:sld xmlns:a="http://schemas.openxmlformats.org/drawingml/2006/main" xmlns:r="http://schemas.openxmlformats.org/officeDocument/2006/relationships" xmlns:p="http://schemas.openxmlformats.org/presentationml/2006/main" showMasterPhAnim="0">
+<p:sld xmlns:a="http://schemas.openxmlformats.org/drawingml/2006/main" xmlns:r="http://schemas.openxmlformats.org/officeDocument/2006/relationships" xmlns:p="http://schemas.openxmlformats.org/presentationml/2006/main" xmlns:m="http://schemas.openxmlformats.org/officeDocument/2006/math" xmlns:w="http://schemas.openxmlformats.org/wordprocessingml/2006/main" xmlns:mc="http://schemas.openxmlformats.org/markup-compatibility/2006" showMasterPhAnim="0" showMasterSp="1" show="1">
   <p:cSld name="Slide 16">
     <p:bg>
-      <p:bgPr>
+      <p:bgPr shadeToTitle="0">
         <a:solidFill>
           <a:srgbClr val="F5F8FA"/>
         </a:solidFill>
-        <a:effectLst/>
       </p:bgPr>
     </p:bg>
     <p:spTree>
@@ -12022,7 +12157,7 @@
       </p:grpSpPr>
       <p:sp>
         <p:nvSpPr>
-          <p:cNvPr id="1084980441" name="Text 0"/>
+          <p:cNvPr id="674605017" name="Text 0"/>
           <p:cNvSpPr/>
           <p:nvPr/>
         </p:nvSpPr>
@@ -12062,7 +12197,7 @@
       </p:sp>
       <p:sp>
         <p:nvSpPr>
-          <p:cNvPr id="333238327" name="Shape 1"/>
+          <p:cNvPr id="699237564" name="Shape 1"/>
           <p:cNvSpPr/>
           <p:nvPr/>
         </p:nvSpPr>
@@ -12092,7 +12227,7 @@
       </p:sp>
       <p:sp>
         <p:nvSpPr>
-          <p:cNvPr id="866008298" name="Shape 2"/>
+          <p:cNvPr id="142948093" name="Shape 2"/>
           <p:cNvSpPr/>
           <p:nvPr/>
         </p:nvSpPr>
@@ -12127,7 +12262,7 @@
       </p:sp>
       <p:sp>
         <p:nvSpPr>
-          <p:cNvPr id="1483277173" name="Text 3"/>
+          <p:cNvPr id="1601800832" name="Text 3"/>
           <p:cNvSpPr/>
           <p:nvPr/>
         </p:nvSpPr>
@@ -12167,7 +12302,7 @@
       </p:sp>
       <p:sp>
         <p:nvSpPr>
-          <p:cNvPr id="321387175" name="Text 4"/>
+          <p:cNvPr id="2084829211" name="Text 4"/>
           <p:cNvSpPr/>
           <p:nvPr/>
         </p:nvSpPr>
@@ -12207,7 +12342,7 @@
       </p:sp>
       <p:sp>
         <p:nvSpPr>
-          <p:cNvPr id="1792217205" name="Text 5"/>
+          <p:cNvPr id="198707337" name="Text 5"/>
           <p:cNvSpPr/>
           <p:nvPr/>
         </p:nvSpPr>
@@ -12247,7 +12382,7 @@
       </p:sp>
       <p:sp>
         <p:nvSpPr>
-          <p:cNvPr id="721417858" name="Text 6"/>
+          <p:cNvPr id="319222945" name="Text 6"/>
           <p:cNvSpPr/>
           <p:nvPr/>
         </p:nvSpPr>
@@ -12287,7 +12422,7 @@
       </p:sp>
       <p:sp>
         <p:nvSpPr>
-          <p:cNvPr id="49059321" name="Text 7"/>
+          <p:cNvPr id="2090929754" name="Text 7"/>
           <p:cNvSpPr/>
           <p:nvPr/>
         </p:nvSpPr>
@@ -12327,7 +12462,7 @@
       </p:sp>
       <p:sp>
         <p:nvSpPr>
-          <p:cNvPr id="2030495927" name="Text 8"/>
+          <p:cNvPr id="968935808" name="Text 8"/>
           <p:cNvSpPr/>
           <p:nvPr/>
         </p:nvSpPr>
@@ -12367,7 +12502,7 @@
       </p:sp>
       <p:sp>
         <p:nvSpPr>
-          <p:cNvPr id="1422511919" name="Text 9"/>
+          <p:cNvPr id="1520244159" name="Text 9"/>
           <p:cNvSpPr/>
           <p:nvPr/>
         </p:nvSpPr>
@@ -12407,7 +12542,7 @@
       </p:sp>
       <p:sp>
         <p:nvSpPr>
-          <p:cNvPr id="2096332356" name="Text 10"/>
+          <p:cNvPr id="1093103287" name="Text 10"/>
           <p:cNvSpPr/>
           <p:nvPr/>
         </p:nvSpPr>
@@ -12447,7 +12582,7 @@
       </p:sp>
       <p:sp>
         <p:nvSpPr>
-          <p:cNvPr id="2013434564" name="Text 11"/>
+          <p:cNvPr id="1294038728" name="Text 11"/>
           <p:cNvSpPr/>
           <p:nvPr/>
         </p:nvSpPr>
@@ -12509,7 +12644,7 @@
       </p:sp>
       <p:sp>
         <p:nvSpPr>
-          <p:cNvPr id="905922035" name="Text 12"/>
+          <p:cNvPr id="1880009143" name="Text 12"/>
           <p:cNvSpPr/>
           <p:nvPr/>
         </p:nvSpPr>
@@ -12549,7 +12684,7 @@
       </p:sp>
       <p:sp>
         <p:nvSpPr>
-          <p:cNvPr id="413620988" name="Text 13"/>
+          <p:cNvPr id="1613875394" name="Text 13"/>
           <p:cNvSpPr/>
           <p:nvPr/>
         </p:nvSpPr>
@@ -12589,7 +12724,7 @@
       </p:sp>
       <p:sp>
         <p:nvSpPr>
-          <p:cNvPr id="559749752" name="Text 14"/>
+          <p:cNvPr id="660933427" name="Text 14"/>
           <p:cNvSpPr/>
           <p:nvPr/>
         </p:nvSpPr>
@@ -12629,7 +12764,7 @@
       </p:sp>
       <p:sp>
         <p:nvSpPr>
-          <p:cNvPr id="796655424" name="Text 15"/>
+          <p:cNvPr id="639562616" name="Text 15"/>
           <p:cNvSpPr/>
           <p:nvPr/>
         </p:nvSpPr>
@@ -12669,7 +12804,7 @@
       </p:sp>
       <p:sp>
         <p:nvSpPr>
-          <p:cNvPr id="1847716724" name="Text 16"/>
+          <p:cNvPr id="1663025588" name="Text 16"/>
           <p:cNvSpPr/>
           <p:nvPr/>
         </p:nvSpPr>
@@ -12709,7 +12844,7 @@
       </p:sp>
       <p:sp>
         <p:nvSpPr>
-          <p:cNvPr id="1488905443" name="Text 17"/>
+          <p:cNvPr id="839372522" name="Text 17"/>
           <p:cNvSpPr/>
           <p:nvPr/>
         </p:nvSpPr>
@@ -12749,7 +12884,7 @@
       </p:sp>
       <p:sp>
         <p:nvSpPr>
-          <p:cNvPr id="1432138741" name="Text 18"/>
+          <p:cNvPr id="1769270317" name="Text 18"/>
           <p:cNvSpPr/>
           <p:nvPr/>
         </p:nvSpPr>
@@ -12789,7 +12924,7 @@
       </p:sp>
       <p:sp>
         <p:nvSpPr>
-          <p:cNvPr id="1198148959" name="Text 19"/>
+          <p:cNvPr id="1272510687" name="Text 19"/>
           <p:cNvSpPr/>
           <p:nvPr/>
         </p:nvSpPr>
@@ -12851,7 +12986,7 @@
       </p:sp>
       <p:sp>
         <p:nvSpPr>
-          <p:cNvPr id="1590169495" name="Shape 20"/>
+          <p:cNvPr id="236388434" name="Shape 20"/>
           <p:cNvSpPr/>
           <p:nvPr/>
         </p:nvSpPr>
@@ -12886,7 +13021,7 @@
       </p:sp>
       <p:sp>
         <p:nvSpPr>
-          <p:cNvPr id="889808219" name="Text 21"/>
+          <p:cNvPr id="1646681699" name="Text 21"/>
           <p:cNvSpPr/>
           <p:nvPr/>
         </p:nvSpPr>
@@ -12926,7 +13061,7 @@
       </p:sp>
       <p:sp>
         <p:nvSpPr>
-          <p:cNvPr id="1498539066" name="Text 22"/>
+          <p:cNvPr id="127726118" name="Text 22"/>
           <p:cNvSpPr/>
           <p:nvPr/>
         </p:nvSpPr>
@@ -12966,7 +13101,7 @@
       </p:sp>
       <p:sp>
         <p:nvSpPr>
-          <p:cNvPr id="728869698" name="Text 23"/>
+          <p:cNvPr id="33549465" name="Text 23"/>
           <p:cNvSpPr/>
           <p:nvPr/>
         </p:nvSpPr>
@@ -13006,7 +13141,7 @@
       </p:sp>
       <p:sp>
         <p:nvSpPr>
-          <p:cNvPr id="1595193990" name="Text 24"/>
+          <p:cNvPr id="418449537" name="Text 24"/>
           <p:cNvSpPr/>
           <p:nvPr/>
         </p:nvSpPr>
@@ -13046,7 +13181,7 @@
       </p:sp>
       <p:sp>
         <p:nvSpPr>
-          <p:cNvPr id="1662932179" name="Text 25"/>
+          <p:cNvPr id="1305178895" name="Text 25"/>
           <p:cNvSpPr/>
           <p:nvPr/>
         </p:nvSpPr>
@@ -13086,7 +13221,7 @@
       </p:sp>
       <p:sp>
         <p:nvSpPr>
-          <p:cNvPr id="1874014832" name="Text 26"/>
+          <p:cNvPr id="778204752" name="Text 26"/>
           <p:cNvSpPr/>
           <p:nvPr/>
         </p:nvSpPr>
@@ -13126,7 +13261,7 @@
       </p:sp>
       <p:sp>
         <p:nvSpPr>
-          <p:cNvPr id="2117966298" name="Text 27"/>
+          <p:cNvPr id="1161742834" name="Text 27"/>
           <p:cNvSpPr/>
           <p:nvPr/>
         </p:nvSpPr>
@@ -13166,7 +13301,7 @@
       </p:sp>
       <p:sp>
         <p:nvSpPr>
-          <p:cNvPr id="744791851" name="Text 28"/>
+          <p:cNvPr id="482639252" name="Text 28"/>
           <p:cNvSpPr/>
           <p:nvPr/>
         </p:nvSpPr>
@@ -13206,7 +13341,7 @@
       </p:sp>
       <p:sp>
         <p:nvSpPr>
-          <p:cNvPr id="866198386" name="Text 29"/>
+          <p:cNvPr id="354522544" name="Text 29"/>
           <p:cNvSpPr/>
           <p:nvPr/>
         </p:nvSpPr>
@@ -13246,7 +13381,7 @@
       </p:sp>
       <p:sp>
         <p:nvSpPr>
-          <p:cNvPr id="1009849347" name="Text 30"/>
+          <p:cNvPr id="1236914341" name="Text 30"/>
           <p:cNvSpPr/>
           <p:nvPr/>
         </p:nvSpPr>
@@ -13286,7 +13421,7 @@
       </p:sp>
       <p:sp>
         <p:nvSpPr>
-          <p:cNvPr id="1412941927" name="Text 31"/>
+          <p:cNvPr id="506813685" name="Text 31"/>
           <p:cNvSpPr/>
           <p:nvPr/>
         </p:nvSpPr>
@@ -13326,7 +13461,7 @@
       </p:sp>
       <p:sp>
         <p:nvSpPr>
-          <p:cNvPr id="780563061" name="Text 32"/>
+          <p:cNvPr id="1351178228" name="Text 32"/>
           <p:cNvSpPr/>
           <p:nvPr/>
         </p:nvSpPr>
@@ -13366,7 +13501,7 @@
       </p:sp>
       <p:sp>
         <p:nvSpPr>
-          <p:cNvPr id="521087871" name="Text 33"/>
+          <p:cNvPr id="122426909" name="Text 33"/>
           <p:cNvSpPr/>
           <p:nvPr/>
         </p:nvSpPr>
@@ -13406,7 +13541,7 @@
       </p:sp>
       <p:sp>
         <p:nvSpPr>
-          <p:cNvPr id="1503602723" name="Text 34"/>
+          <p:cNvPr id="2640472" name="Text 34"/>
           <p:cNvSpPr/>
           <p:nvPr/>
         </p:nvSpPr>
@@ -13446,7 +13581,7 @@
       </p:sp>
       <p:sp>
         <p:nvSpPr>
-          <p:cNvPr id="1700143982" name="Text 35"/>
+          <p:cNvPr id="2144170809" name="Text 35"/>
           <p:cNvSpPr/>
           <p:nvPr/>
         </p:nvSpPr>
@@ -13486,7 +13621,7 @@
       </p:sp>
       <p:sp>
         <p:nvSpPr>
-          <p:cNvPr id="1438413903" name="Text 36"/>
+          <p:cNvPr id="1440243213" name="Text 36"/>
           <p:cNvSpPr/>
           <p:nvPr/>
         </p:nvSpPr>
@@ -13526,7 +13661,7 @@
       </p:sp>
       <p:sp>
         <p:nvSpPr>
-          <p:cNvPr id="1863198634" name="Text 37"/>
+          <p:cNvPr id="1127311544" name="Text 37"/>
           <p:cNvSpPr/>
           <p:nvPr/>
         </p:nvSpPr>
@@ -13569,11 +13704,11 @@
   <p:clrMapOvr>
     <a:masterClrMapping/>
   </p:clrMapOvr>
-  <mc:AlternateContent xmlns:mc="http://schemas.openxmlformats.org/markup-compatibility/2006" xmlns:p159="http://schemas.microsoft.com/office/powerpoint/2015/09/main">
-    <mc:Choice Requires="p159">
-      <p:transition/>
+  <mc:AlternateContent xmlns:mc="http://schemas.openxmlformats.org/markup-compatibility/2006">
+    <mc:Choice xmlns:p159="http://schemas.microsoft.com/office/powerpoint/2015/09/main" xmlns:p14="http://schemas.microsoft.com/office/powerpoint/2010/main" Requires="p159">
+      <p:transition p14:dur="500" advClick="1"/>
     </mc:Choice>
-    <mc:Fallback xmlns:w="http://schemas.openxmlformats.org/wordprocessingml/2006/main" xmlns:m="http://schemas.openxmlformats.org/officeDocument/2006/math" xmlns="">
+    <mc:Fallback>
       <p:transition advClick="1"/>
     </mc:Fallback>
   </mc:AlternateContent>
@@ -13581,14 +13716,13 @@
 </file>
 
 <file path=ppt/slides/slide2.xml><?xml version="1.0" encoding="utf-8"?>
-<p:sld xmlns:a="http://schemas.openxmlformats.org/drawingml/2006/main" xmlns:r="http://schemas.openxmlformats.org/officeDocument/2006/relationships" xmlns:p="http://schemas.openxmlformats.org/presentationml/2006/main" showMasterPhAnim="0">
+<p:sld xmlns:a="http://schemas.openxmlformats.org/drawingml/2006/main" xmlns:r="http://schemas.openxmlformats.org/officeDocument/2006/relationships" xmlns:p="http://schemas.openxmlformats.org/presentationml/2006/main" xmlns:m="http://schemas.openxmlformats.org/officeDocument/2006/math" xmlns:w="http://schemas.openxmlformats.org/wordprocessingml/2006/main" xmlns:mc="http://schemas.openxmlformats.org/markup-compatibility/2006" showMasterPhAnim="0" showMasterSp="1" show="1">
   <p:cSld name="Slide 2">
     <p:bg>
-      <p:bgPr>
+      <p:bgPr shadeToTitle="0">
         <a:solidFill>
           <a:srgbClr val="1F4E79"/>
         </a:solidFill>
-        <a:effectLst/>
       </p:bgPr>
     </p:bg>
     <p:spTree>
@@ -13607,7 +13741,7 @@
       </p:grpSpPr>
       <p:sp>
         <p:nvSpPr>
-          <p:cNvPr id="70825708" name="Text 0"/>
+          <p:cNvPr id="1552376672" name="Text 0"/>
           <p:cNvSpPr/>
           <p:nvPr/>
         </p:nvSpPr>
@@ -13669,7 +13803,7 @@
       </p:sp>
       <p:sp>
         <p:nvSpPr>
-          <p:cNvPr id="1367794536" name="Text 1"/>
+          <p:cNvPr id="1386307585" name="Text 1"/>
           <p:cNvSpPr/>
           <p:nvPr/>
         </p:nvSpPr>
@@ -13709,7 +13843,7 @@
       </p:sp>
       <p:sp>
         <p:nvSpPr>
-          <p:cNvPr id="501967184" name="Text 2"/>
+          <p:cNvPr id="518260027" name="Text 2"/>
           <p:cNvSpPr/>
           <p:nvPr/>
         </p:nvSpPr>
@@ -13752,11 +13886,11 @@
   <p:clrMapOvr>
     <a:masterClrMapping/>
   </p:clrMapOvr>
-  <mc:AlternateContent xmlns:mc="http://schemas.openxmlformats.org/markup-compatibility/2006" xmlns:p159="http://schemas.microsoft.com/office/powerpoint/2015/09/main">
-    <mc:Choice Requires="p159">
-      <p:transition/>
+  <mc:AlternateContent xmlns:mc="http://schemas.openxmlformats.org/markup-compatibility/2006">
+    <mc:Choice xmlns:p159="http://schemas.microsoft.com/office/powerpoint/2015/09/main" xmlns:p14="http://schemas.microsoft.com/office/powerpoint/2010/main" Requires="p159">
+      <p:transition p14:dur="500" advClick="1"/>
     </mc:Choice>
-    <mc:Fallback xmlns:w="http://schemas.openxmlformats.org/wordprocessingml/2006/main" xmlns:m="http://schemas.openxmlformats.org/officeDocument/2006/math" xmlns="">
+    <mc:Fallback>
       <p:transition advClick="1"/>
     </mc:Fallback>
   </mc:AlternateContent>
@@ -13764,14 +13898,13 @@
 </file>
 
 <file path=ppt/slides/slide3.xml><?xml version="1.0" encoding="utf-8"?>
-<p:sld xmlns:a="http://schemas.openxmlformats.org/drawingml/2006/main" xmlns:r="http://schemas.openxmlformats.org/officeDocument/2006/relationships" xmlns:p="http://schemas.openxmlformats.org/presentationml/2006/main" showMasterPhAnim="0">
+<p:sld xmlns:a="http://schemas.openxmlformats.org/drawingml/2006/main" xmlns:r="http://schemas.openxmlformats.org/officeDocument/2006/relationships" xmlns:p="http://schemas.openxmlformats.org/presentationml/2006/main" xmlns:m="http://schemas.openxmlformats.org/officeDocument/2006/math" xmlns:w="http://schemas.openxmlformats.org/wordprocessingml/2006/main" xmlns:mc="http://schemas.openxmlformats.org/markup-compatibility/2006" showMasterPhAnim="0" showMasterSp="1" show="1">
   <p:cSld name="Slide 3">
     <p:bg>
-      <p:bgPr>
+      <p:bgPr shadeToTitle="0">
         <a:solidFill>
           <a:srgbClr val="F5F8FA"/>
         </a:solidFill>
-        <a:effectLst/>
       </p:bgPr>
     </p:bg>
     <p:spTree>
@@ -13790,7 +13923,7 @@
       </p:grpSpPr>
       <p:sp>
         <p:nvSpPr>
-          <p:cNvPr id="1689217766" name="Text 0"/>
+          <p:cNvPr id="1976707558" name="Text 0"/>
           <p:cNvSpPr/>
           <p:nvPr/>
         </p:nvSpPr>
@@ -13830,7 +13963,7 @@
       </p:sp>
       <p:sp>
         <p:nvSpPr>
-          <p:cNvPr id="62703146" name="Shape 1"/>
+          <p:cNvPr id="1791842270" name="Shape 1"/>
           <p:cNvSpPr/>
           <p:nvPr/>
         </p:nvSpPr>
@@ -13860,7 +13993,7 @@
       </p:sp>
       <p:sp>
         <p:nvSpPr>
-          <p:cNvPr id="332809763" name="Shape 2"/>
+          <p:cNvPr id="829553369" name="Shape 2"/>
           <p:cNvSpPr/>
           <p:nvPr/>
         </p:nvSpPr>
@@ -13895,7 +14028,7 @@
       </p:sp>
       <p:sp>
         <p:nvSpPr>
-          <p:cNvPr id="717612818" name="Shape 3"/>
+          <p:cNvPr id="1012394088" name="Shape 3"/>
           <p:cNvSpPr/>
           <p:nvPr/>
         </p:nvSpPr>
@@ -13925,7 +14058,7 @@
       </p:sp>
       <p:sp>
         <p:nvSpPr>
-          <p:cNvPr id="956933044" name="Text 4"/>
+          <p:cNvPr id="288202701" name="Text 4"/>
           <p:cNvSpPr/>
           <p:nvPr/>
         </p:nvSpPr>
@@ -13965,7 +14098,7 @@
       </p:sp>
       <p:sp>
         <p:nvSpPr>
-          <p:cNvPr id="321071507" name="Text 5"/>
+          <p:cNvPr id="1127033891" name="Text 5"/>
           <p:cNvSpPr/>
           <p:nvPr/>
         </p:nvSpPr>
@@ -14027,7 +14160,7 @@
       </p:sp>
       <p:sp>
         <p:nvSpPr>
-          <p:cNvPr id="1952491662" name="Shape 6"/>
+          <p:cNvPr id="617374911" name="Shape 6"/>
           <p:cNvSpPr/>
           <p:nvPr/>
         </p:nvSpPr>
@@ -14062,7 +14195,7 @@
       </p:sp>
       <p:sp>
         <p:nvSpPr>
-          <p:cNvPr id="390575094" name="Shape 7"/>
+          <p:cNvPr id="1030465786" name="Shape 7"/>
           <p:cNvSpPr/>
           <p:nvPr/>
         </p:nvSpPr>
@@ -14092,7 +14225,7 @@
       </p:sp>
       <p:sp>
         <p:nvSpPr>
-          <p:cNvPr id="1681114873" name="Text 8"/>
+          <p:cNvPr id="184662169" name="Text 8"/>
           <p:cNvSpPr/>
           <p:nvPr/>
         </p:nvSpPr>
@@ -14132,7 +14265,7 @@
       </p:sp>
       <p:sp>
         <p:nvSpPr>
-          <p:cNvPr id="2124738382" name="Text 9"/>
+          <p:cNvPr id="1566163890" name="Text 9"/>
           <p:cNvSpPr/>
           <p:nvPr/>
         </p:nvSpPr>
@@ -14172,7 +14305,7 @@
       </p:sp>
       <p:sp>
         <p:nvSpPr>
-          <p:cNvPr id="1730341385" name="Shape 10"/>
+          <p:cNvPr id="674642447" name="Shape 10"/>
           <p:cNvSpPr/>
           <p:nvPr/>
         </p:nvSpPr>
@@ -14207,7 +14340,7 @@
       </p:sp>
       <p:sp>
         <p:nvSpPr>
-          <p:cNvPr id="1530854464" name="Shape 11"/>
+          <p:cNvPr id="1255044786" name="Shape 11"/>
           <p:cNvSpPr/>
           <p:nvPr/>
         </p:nvSpPr>
@@ -14237,7 +14370,7 @@
       </p:sp>
       <p:sp>
         <p:nvSpPr>
-          <p:cNvPr id="886366172" name="Text 12"/>
+          <p:cNvPr id="1001607249" name="Text 12"/>
           <p:cNvSpPr/>
           <p:nvPr/>
         </p:nvSpPr>
@@ -14277,7 +14410,7 @@
       </p:sp>
       <p:sp>
         <p:nvSpPr>
-          <p:cNvPr id="1085189321" name="Text 13"/>
+          <p:cNvPr id="1896712232" name="Text 13"/>
           <p:cNvSpPr/>
           <p:nvPr/>
         </p:nvSpPr>
@@ -14317,7 +14450,7 @@
       </p:sp>
       <p:sp>
         <p:nvSpPr>
-          <p:cNvPr id="1851638565" name="Shape 14"/>
+          <p:cNvPr id="406701696" name="Shape 14"/>
           <p:cNvSpPr/>
           <p:nvPr/>
         </p:nvSpPr>
@@ -14352,7 +14485,7 @@
       </p:sp>
       <p:sp>
         <p:nvSpPr>
-          <p:cNvPr id="2122729063" name="Shape 15"/>
+          <p:cNvPr id="505104624" name="Shape 15"/>
           <p:cNvSpPr/>
           <p:nvPr/>
         </p:nvSpPr>
@@ -14382,7 +14515,7 @@
       </p:sp>
       <p:sp>
         <p:nvSpPr>
-          <p:cNvPr id="1317684366" name="Text 16"/>
+          <p:cNvPr id="602150048" name="Text 16"/>
           <p:cNvSpPr/>
           <p:nvPr/>
         </p:nvSpPr>
@@ -14422,7 +14555,7 @@
       </p:sp>
       <p:sp>
         <p:nvSpPr>
-          <p:cNvPr id="1175995587" name="Text 17"/>
+          <p:cNvPr id="1148008199" name="Text 17"/>
           <p:cNvSpPr/>
           <p:nvPr/>
         </p:nvSpPr>
@@ -14487,11 +14620,11 @@
   <p:clrMapOvr>
     <a:masterClrMapping/>
   </p:clrMapOvr>
-  <mc:AlternateContent xmlns:mc="http://schemas.openxmlformats.org/markup-compatibility/2006" xmlns:p159="http://schemas.microsoft.com/office/powerpoint/2015/09/main">
-    <mc:Choice Requires="p159">
-      <p:transition/>
+  <mc:AlternateContent xmlns:mc="http://schemas.openxmlformats.org/markup-compatibility/2006">
+    <mc:Choice xmlns:p159="http://schemas.microsoft.com/office/powerpoint/2015/09/main" xmlns:p14="http://schemas.microsoft.com/office/powerpoint/2010/main" Requires="p159">
+      <p:transition p14:dur="500" advClick="1"/>
     </mc:Choice>
-    <mc:Fallback xmlns:w="http://schemas.openxmlformats.org/wordprocessingml/2006/main" xmlns:m="http://schemas.openxmlformats.org/officeDocument/2006/math" xmlns="">
+    <mc:Fallback>
       <p:transition advClick="1"/>
     </mc:Fallback>
   </mc:AlternateContent>
@@ -14499,14 +14632,13 @@
 </file>
 
 <file path=ppt/slides/slide4.xml><?xml version="1.0" encoding="utf-8"?>
-<p:sld xmlns:a="http://schemas.openxmlformats.org/drawingml/2006/main" xmlns:r="http://schemas.openxmlformats.org/officeDocument/2006/relationships" xmlns:p="http://schemas.openxmlformats.org/presentationml/2006/main" showMasterPhAnim="0">
+<p:sld xmlns:a="http://schemas.openxmlformats.org/drawingml/2006/main" xmlns:r="http://schemas.openxmlformats.org/officeDocument/2006/relationships" xmlns:p="http://schemas.openxmlformats.org/presentationml/2006/main" xmlns:m="http://schemas.openxmlformats.org/officeDocument/2006/math" xmlns:w="http://schemas.openxmlformats.org/wordprocessingml/2006/main" xmlns:mc="http://schemas.openxmlformats.org/markup-compatibility/2006" showMasterPhAnim="0" showMasterSp="1" show="1">
   <p:cSld name="Slide 4">
     <p:bg>
-      <p:bgPr>
+      <p:bgPr shadeToTitle="0">
         <a:solidFill>
           <a:srgbClr val="F5F8FA"/>
         </a:solidFill>
-        <a:effectLst/>
       </p:bgPr>
     </p:bg>
     <p:spTree>
@@ -14525,7 +14657,7 @@
       </p:grpSpPr>
       <p:sp>
         <p:nvSpPr>
-          <p:cNvPr id="1026415183" name="Text 0"/>
+          <p:cNvPr id="538260411" name="Text 0"/>
           <p:cNvSpPr/>
           <p:nvPr/>
         </p:nvSpPr>
@@ -14565,7 +14697,7 @@
       </p:sp>
       <p:sp>
         <p:nvSpPr>
-          <p:cNvPr id="808524785" name="Text 24"/>
+          <p:cNvPr id="5969041" name="Text 24"/>
           <p:cNvSpPr/>
           <p:nvPr/>
         </p:nvSpPr>
@@ -14594,7 +14726,7 @@
       </p:sp>
       <p:sp>
         <p:nvSpPr>
-          <p:cNvPr id="74208601" name="Text 30"/>
+          <p:cNvPr id="495729428" name="Text 30"/>
           <p:cNvSpPr/>
           <p:nvPr/>
         </p:nvSpPr>
@@ -14623,7 +14755,7 @@
       </p:sp>
       <p:pic>
         <p:nvPicPr>
-          <p:cNvPr id="1504138775" name="Immagine 41"/>
+          <p:cNvPr id="1971805484" name="Immagine 41"/>
           <p:cNvPicPr>
             <a:picLocks noChangeAspect="1"/>
           </p:cNvPicPr>
@@ -14650,7 +14782,7 @@
       </p:pic>
       <p:sp>
         <p:nvSpPr>
-          <p:cNvPr id="1566032785" name="Shape 1"/>
+          <p:cNvPr id="1517764329" name="Shape 1"/>
           <p:cNvSpPr/>
           <p:nvPr/>
         </p:nvSpPr>
@@ -14683,11 +14815,11 @@
   <p:clrMapOvr>
     <a:masterClrMapping/>
   </p:clrMapOvr>
-  <mc:AlternateContent xmlns:mc="http://schemas.openxmlformats.org/markup-compatibility/2006" xmlns:p159="http://schemas.microsoft.com/office/powerpoint/2015/09/main">
-    <mc:Choice Requires="p159">
-      <p:transition/>
+  <mc:AlternateContent xmlns:mc="http://schemas.openxmlformats.org/markup-compatibility/2006">
+    <mc:Choice xmlns:p159="http://schemas.microsoft.com/office/powerpoint/2015/09/main" xmlns:p14="http://schemas.microsoft.com/office/powerpoint/2010/main" Requires="p159">
+      <p:transition p14:dur="500" advClick="1"/>
     </mc:Choice>
-    <mc:Fallback xmlns:w="http://schemas.openxmlformats.org/wordprocessingml/2006/main" xmlns:m="http://schemas.openxmlformats.org/officeDocument/2006/math" xmlns="">
+    <mc:Fallback>
       <p:transition advClick="1"/>
     </mc:Fallback>
   </mc:AlternateContent>
@@ -14695,14 +14827,13 @@
 </file>
 
 <file path=ppt/slides/slide5.xml><?xml version="1.0" encoding="utf-8"?>
-<p:sld xmlns:a="http://schemas.openxmlformats.org/drawingml/2006/main" xmlns:r="http://schemas.openxmlformats.org/officeDocument/2006/relationships" xmlns:p="http://schemas.openxmlformats.org/presentationml/2006/main" showMasterPhAnim="0">
+<p:sld xmlns:a="http://schemas.openxmlformats.org/drawingml/2006/main" xmlns:r="http://schemas.openxmlformats.org/officeDocument/2006/relationships" xmlns:p="http://schemas.openxmlformats.org/presentationml/2006/main" xmlns:m="http://schemas.openxmlformats.org/officeDocument/2006/math" xmlns:w="http://schemas.openxmlformats.org/wordprocessingml/2006/main" xmlns:mc="http://schemas.openxmlformats.org/markup-compatibility/2006" showMasterPhAnim="0" showMasterSp="1" show="1">
   <p:cSld name="Slide 5">
     <p:bg>
-      <p:bgPr>
+      <p:bgPr shadeToTitle="0">
         <a:solidFill>
           <a:srgbClr val="F5F8FA"/>
         </a:solidFill>
-        <a:effectLst/>
       </p:bgPr>
     </p:bg>
     <p:spTree>
@@ -14721,7 +14852,7 @@
       </p:grpSpPr>
       <p:sp>
         <p:nvSpPr>
-          <p:cNvPr id="1197620112" name="Text 0"/>
+          <p:cNvPr id="1570540864" name="Text 0"/>
           <p:cNvSpPr/>
           <p:nvPr/>
         </p:nvSpPr>
@@ -14761,7 +14892,7 @@
       </p:sp>
       <p:sp>
         <p:nvSpPr>
-          <p:cNvPr id="1326310714" name="Shape 1"/>
+          <p:cNvPr id="1163214619" name="Shape 1"/>
           <p:cNvSpPr/>
           <p:nvPr/>
         </p:nvSpPr>
@@ -14791,7 +14922,7 @@
       </p:sp>
       <p:sp>
         <p:nvSpPr>
-          <p:cNvPr id="31893726" name="Shape 2"/>
+          <p:cNvPr id="1889007958" name="Shape 2"/>
           <p:cNvSpPr/>
           <p:nvPr/>
         </p:nvSpPr>
@@ -14826,7 +14957,7 @@
       </p:sp>
       <p:sp>
         <p:nvSpPr>
-          <p:cNvPr id="2022696462" name="Text 3"/>
+          <p:cNvPr id="511965862" name="Text 3"/>
           <p:cNvSpPr/>
           <p:nvPr/>
         </p:nvSpPr>
@@ -14866,7 +14997,7 @@
       </p:sp>
       <p:sp>
         <p:nvSpPr>
-          <p:cNvPr id="729065759" name="Shape 4"/>
+          <p:cNvPr id="721912147" name="Shape 4"/>
           <p:cNvSpPr/>
           <p:nvPr/>
         </p:nvSpPr>
@@ -14896,7 +15027,7 @@
       </p:sp>
       <p:sp>
         <p:nvSpPr>
-          <p:cNvPr id="630781031" name="Text 5"/>
+          <p:cNvPr id="561485750" name="Text 5"/>
           <p:cNvSpPr/>
           <p:nvPr/>
         </p:nvSpPr>
@@ -14936,7 +15067,7 @@
       </p:sp>
       <p:sp>
         <p:nvSpPr>
-          <p:cNvPr id="179566774" name="Text 6"/>
+          <p:cNvPr id="1538807204" name="Text 6"/>
           <p:cNvSpPr/>
           <p:nvPr/>
         </p:nvSpPr>
@@ -14976,7 +15107,7 @@
       </p:sp>
       <p:sp>
         <p:nvSpPr>
-          <p:cNvPr id="468570463" name="Text 7"/>
+          <p:cNvPr id="215376443" name="Text 7"/>
           <p:cNvSpPr/>
           <p:nvPr/>
         </p:nvSpPr>
@@ -15038,7 +15169,7 @@
       </p:sp>
       <p:sp>
         <p:nvSpPr>
-          <p:cNvPr id="1484132550" name="Text 8"/>
+          <p:cNvPr id="356947453" name="Text 8"/>
           <p:cNvSpPr/>
           <p:nvPr/>
         </p:nvSpPr>
@@ -15078,7 +15209,7 @@
       </p:sp>
       <p:sp>
         <p:nvSpPr>
-          <p:cNvPr id="166989186" name="Shape 9"/>
+          <p:cNvPr id="892018433" name="Shape 9"/>
           <p:cNvSpPr/>
           <p:nvPr/>
         </p:nvSpPr>
@@ -15113,7 +15244,7 @@
       </p:sp>
       <p:sp>
         <p:nvSpPr>
-          <p:cNvPr id="1096763448" name="Text 10"/>
+          <p:cNvPr id="815579429" name="Text 10"/>
           <p:cNvSpPr/>
           <p:nvPr/>
         </p:nvSpPr>
@@ -15153,7 +15284,7 @@
       </p:sp>
       <p:sp>
         <p:nvSpPr>
-          <p:cNvPr id="1565240535" name="Shape 11"/>
+          <p:cNvPr id="1332309894" name="Shape 11"/>
           <p:cNvSpPr/>
           <p:nvPr/>
         </p:nvSpPr>
@@ -15183,7 +15314,7 @@
       </p:sp>
       <p:sp>
         <p:nvSpPr>
-          <p:cNvPr id="1243981433" name="Text 12"/>
+          <p:cNvPr id="349906188" name="Text 12"/>
           <p:cNvSpPr/>
           <p:nvPr/>
         </p:nvSpPr>
@@ -15223,7 +15354,7 @@
       </p:sp>
       <p:sp>
         <p:nvSpPr>
-          <p:cNvPr id="874732665" name="Text 13"/>
+          <p:cNvPr id="692936434" name="Text 13"/>
           <p:cNvSpPr/>
           <p:nvPr/>
         </p:nvSpPr>
@@ -15285,7 +15416,7 @@
       </p:sp>
       <p:sp>
         <p:nvSpPr>
-          <p:cNvPr id="686187129" name="Text 14"/>
+          <p:cNvPr id="1610361815" name="Text 14"/>
           <p:cNvSpPr/>
           <p:nvPr/>
         </p:nvSpPr>
@@ -15325,7 +15456,7 @@
       </p:sp>
       <p:sp>
         <p:nvSpPr>
-          <p:cNvPr id="1292157611" name="Text 15"/>
+          <p:cNvPr id="23692453" name="Text 15"/>
           <p:cNvSpPr/>
           <p:nvPr/>
         </p:nvSpPr>
@@ -15365,7 +15496,7 @@
       </p:sp>
       <p:sp>
         <p:nvSpPr>
-          <p:cNvPr id="1878846985" name="Shape 16"/>
+          <p:cNvPr id="253437401" name="Shape 16"/>
           <p:cNvSpPr/>
           <p:nvPr/>
         </p:nvSpPr>
@@ -15400,7 +15531,7 @@
       </p:sp>
       <p:sp>
         <p:nvSpPr>
-          <p:cNvPr id="1378861419" name="Text 17"/>
+          <p:cNvPr id="1442905222" name="Text 17"/>
           <p:cNvSpPr/>
           <p:nvPr/>
         </p:nvSpPr>
@@ -15440,7 +15571,7 @@
       </p:sp>
       <p:sp>
         <p:nvSpPr>
-          <p:cNvPr id="2090059345" name="Shape 18"/>
+          <p:cNvPr id="169813531" name="Shape 18"/>
           <p:cNvSpPr/>
           <p:nvPr/>
         </p:nvSpPr>
@@ -15470,7 +15601,7 @@
       </p:sp>
       <p:sp>
         <p:nvSpPr>
-          <p:cNvPr id="1979603525" name="Text 19"/>
+          <p:cNvPr id="2131093773" name="Text 19"/>
           <p:cNvSpPr/>
           <p:nvPr/>
         </p:nvSpPr>
@@ -15510,7 +15641,7 @@
       </p:sp>
       <p:sp>
         <p:nvSpPr>
-          <p:cNvPr id="1236029111" name="Text 20"/>
+          <p:cNvPr id="1119896451" name="Text 20"/>
           <p:cNvSpPr/>
           <p:nvPr/>
         </p:nvSpPr>
@@ -15572,7 +15703,7 @@
       </p:sp>
       <p:sp>
         <p:nvSpPr>
-          <p:cNvPr id="1480185824" name="Text 21"/>
+          <p:cNvPr id="116394309" name="Text 21"/>
           <p:cNvSpPr/>
           <p:nvPr/>
         </p:nvSpPr>
@@ -15612,7 +15743,7 @@
       </p:sp>
       <p:sp>
         <p:nvSpPr>
-          <p:cNvPr id="560972177" name="Text 22"/>
+          <p:cNvPr id="1747336326" name="Text 22"/>
           <p:cNvSpPr/>
           <p:nvPr/>
         </p:nvSpPr>
@@ -15644,11 +15775,11 @@
   <p:clrMapOvr>
     <a:masterClrMapping/>
   </p:clrMapOvr>
-  <mc:AlternateContent xmlns:mc="http://schemas.openxmlformats.org/markup-compatibility/2006" xmlns:p159="http://schemas.microsoft.com/office/powerpoint/2015/09/main">
-    <mc:Choice Requires="p159">
-      <p:transition/>
+  <mc:AlternateContent xmlns:mc="http://schemas.openxmlformats.org/markup-compatibility/2006">
+    <mc:Choice xmlns:p159="http://schemas.microsoft.com/office/powerpoint/2015/09/main" xmlns:p14="http://schemas.microsoft.com/office/powerpoint/2010/main" Requires="p159">
+      <p:transition p14:dur="500" advClick="1"/>
     </mc:Choice>
-    <mc:Fallback xmlns:w="http://schemas.openxmlformats.org/wordprocessingml/2006/main" xmlns:m="http://schemas.openxmlformats.org/officeDocument/2006/math" xmlns="">
+    <mc:Fallback>
       <p:transition advClick="1"/>
     </mc:Fallback>
   </mc:AlternateContent>
@@ -15656,14 +15787,13 @@
 </file>
 
 <file path=ppt/slides/slide6.xml><?xml version="1.0" encoding="utf-8"?>
-<p:sld xmlns:a="http://schemas.openxmlformats.org/drawingml/2006/main" xmlns:r="http://schemas.openxmlformats.org/officeDocument/2006/relationships" xmlns:p="http://schemas.openxmlformats.org/presentationml/2006/main" showMasterPhAnim="0">
+<p:sld xmlns:a="http://schemas.openxmlformats.org/drawingml/2006/main" xmlns:r="http://schemas.openxmlformats.org/officeDocument/2006/relationships" xmlns:p="http://schemas.openxmlformats.org/presentationml/2006/main" xmlns:m="http://schemas.openxmlformats.org/officeDocument/2006/math" xmlns:w="http://schemas.openxmlformats.org/wordprocessingml/2006/main" xmlns:mc="http://schemas.openxmlformats.org/markup-compatibility/2006" showMasterPhAnim="0" showMasterSp="1" show="1">
   <p:cSld name="Slide 6">
     <p:bg>
-      <p:bgPr>
+      <p:bgPr shadeToTitle="0">
         <a:solidFill>
           <a:srgbClr val="F5F8FA"/>
         </a:solidFill>
-        <a:effectLst/>
       </p:bgPr>
     </p:bg>
     <p:spTree>
@@ -15682,7 +15812,7 @@
       </p:grpSpPr>
       <p:sp>
         <p:nvSpPr>
-          <p:cNvPr id="1886448971" name="Text 0"/>
+          <p:cNvPr id="1295679287" name="Text 0"/>
           <p:cNvSpPr/>
           <p:nvPr/>
         </p:nvSpPr>
@@ -15722,7 +15852,7 @@
       </p:sp>
       <p:sp>
         <p:nvSpPr>
-          <p:cNvPr id="723011967" name="Shape 1"/>
+          <p:cNvPr id="100995167" name="Shape 1"/>
           <p:cNvSpPr/>
           <p:nvPr/>
         </p:nvSpPr>
@@ -15752,7 +15882,7 @@
       </p:sp>
       <p:sp>
         <p:nvSpPr>
-          <p:cNvPr id="1026311" name="Shape 2"/>
+          <p:cNvPr id="853429531" name="Shape 2"/>
           <p:cNvSpPr/>
           <p:nvPr/>
         </p:nvSpPr>
@@ -15787,7 +15917,7 @@
       </p:sp>
       <p:sp>
         <p:nvSpPr>
-          <p:cNvPr id="28147540" name="Text 3"/>
+          <p:cNvPr id="191138837" name="Text 3"/>
           <p:cNvSpPr/>
           <p:nvPr/>
         </p:nvSpPr>
@@ -15827,7 +15957,7 @@
       </p:sp>
       <p:sp>
         <p:nvSpPr>
-          <p:cNvPr id="1541723198" name="Text 4"/>
+          <p:cNvPr id="472913564" name="Text 4"/>
           <p:cNvSpPr/>
           <p:nvPr/>
         </p:nvSpPr>
@@ -15867,7 +15997,7 @@
       </p:sp>
       <p:sp>
         <p:nvSpPr>
-          <p:cNvPr id="1779607353" name="Text 5"/>
+          <p:cNvPr id="1787537927" name="Text 5"/>
           <p:cNvSpPr/>
           <p:nvPr/>
         </p:nvSpPr>
@@ -15929,7 +16059,7 @@
       </p:sp>
       <p:sp>
         <p:nvSpPr>
-          <p:cNvPr id="1220317585" name="Text 6"/>
+          <p:cNvPr id="1611265031" name="Text 6"/>
           <p:cNvSpPr/>
           <p:nvPr/>
         </p:nvSpPr>
@@ -15969,7 +16099,7 @@
       </p:sp>
       <p:sp>
         <p:nvSpPr>
-          <p:cNvPr id="141158084" name="Text 7"/>
+          <p:cNvPr id="1504787105" name="Text 7"/>
           <p:cNvSpPr/>
           <p:nvPr/>
         </p:nvSpPr>
@@ -16009,7 +16139,7 @@
       </p:sp>
       <p:sp>
         <p:nvSpPr>
-          <p:cNvPr id="1140621748" name="Text 8"/>
+          <p:cNvPr id="1296932958" name="Text 8"/>
           <p:cNvSpPr/>
           <p:nvPr/>
         </p:nvSpPr>
@@ -16049,7 +16179,7 @@
       </p:sp>
       <p:sp>
         <p:nvSpPr>
-          <p:cNvPr id="71966449" name="Text 9"/>
+          <p:cNvPr id="1138750190" name="Text 9"/>
           <p:cNvSpPr/>
           <p:nvPr/>
         </p:nvSpPr>
@@ -16111,7 +16241,7 @@
       </p:sp>
       <p:sp>
         <p:nvSpPr>
-          <p:cNvPr id="882421602" name="Text 10"/>
+          <p:cNvPr id="1674730539" name="Text 10"/>
           <p:cNvSpPr/>
           <p:nvPr/>
         </p:nvSpPr>
@@ -16151,7 +16281,7 @@
       </p:sp>
       <p:sp>
         <p:nvSpPr>
-          <p:cNvPr id="1885066637" name="Text 11"/>
+          <p:cNvPr id="143891122" name="Text 11"/>
           <p:cNvSpPr/>
           <p:nvPr/>
         </p:nvSpPr>
@@ -16191,7 +16321,7 @@
       </p:sp>
       <p:sp>
         <p:nvSpPr>
-          <p:cNvPr id="1475900742" name="Text 12"/>
+          <p:cNvPr id="1675431414" name="Text 12"/>
           <p:cNvSpPr/>
           <p:nvPr/>
         </p:nvSpPr>
@@ -16220,7 +16350,7 @@
       </p:sp>
       <p:sp>
         <p:nvSpPr>
-          <p:cNvPr id="2081137157" name="Shape 13"/>
+          <p:cNvPr id="657933065" name="Shape 13"/>
           <p:cNvSpPr/>
           <p:nvPr/>
         </p:nvSpPr>
@@ -16255,7 +16385,7 @@
       </p:sp>
       <p:sp>
         <p:nvSpPr>
-          <p:cNvPr id="1505168977" name="Text 14"/>
+          <p:cNvPr id="1184076871" name="Text 14"/>
           <p:cNvSpPr/>
           <p:nvPr/>
         </p:nvSpPr>
@@ -16295,7 +16425,7 @@
       </p:sp>
       <p:sp>
         <p:nvSpPr>
-          <p:cNvPr id="444557092" name="Text 15"/>
+          <p:cNvPr id="1679578190" name="Text 15"/>
           <p:cNvSpPr/>
           <p:nvPr/>
         </p:nvSpPr>
@@ -16335,7 +16465,7 @@
       </p:sp>
       <p:sp>
         <p:nvSpPr>
-          <p:cNvPr id="1836096970" name="Text 16"/>
+          <p:cNvPr id="643095534" name="Text 16"/>
           <p:cNvSpPr/>
           <p:nvPr/>
         </p:nvSpPr>
@@ -16397,7 +16527,7 @@
       </p:sp>
       <p:sp>
         <p:nvSpPr>
-          <p:cNvPr id="194141053" name="Text 17"/>
+          <p:cNvPr id="2030186418" name="Text 17"/>
           <p:cNvSpPr/>
           <p:nvPr/>
         </p:nvSpPr>
@@ -16437,7 +16567,7 @@
       </p:sp>
       <p:sp>
         <p:nvSpPr>
-          <p:cNvPr id="2008582489" name="Text 18"/>
+          <p:cNvPr id="1908667858" name="Text 18"/>
           <p:cNvSpPr/>
           <p:nvPr/>
         </p:nvSpPr>
@@ -16477,7 +16607,7 @@
       </p:sp>
       <p:sp>
         <p:nvSpPr>
-          <p:cNvPr id="2111904669" name="Text 19"/>
+          <p:cNvPr id="322996487" name="Text 19"/>
           <p:cNvSpPr/>
           <p:nvPr/>
         </p:nvSpPr>
@@ -16517,7 +16647,7 @@
       </p:sp>
       <p:sp>
         <p:nvSpPr>
-          <p:cNvPr id="823780024" name="Text 20"/>
+          <p:cNvPr id="1827032674" name="Text 20"/>
           <p:cNvSpPr/>
           <p:nvPr/>
         </p:nvSpPr>
@@ -16579,7 +16709,7 @@
       </p:sp>
       <p:sp>
         <p:nvSpPr>
-          <p:cNvPr id="1933844270" name="Text 21"/>
+          <p:cNvPr id="1289690706" name="Text 21"/>
           <p:cNvSpPr/>
           <p:nvPr/>
         </p:nvSpPr>
@@ -16619,7 +16749,7 @@
       </p:sp>
       <p:sp>
         <p:nvSpPr>
-          <p:cNvPr id="1624389890" name="Text 22"/>
+          <p:cNvPr id="1504419904" name="Text 22"/>
           <p:cNvSpPr/>
           <p:nvPr/>
         </p:nvSpPr>
@@ -16659,7 +16789,7 @@
       </p:sp>
       <p:sp>
         <p:nvSpPr>
-          <p:cNvPr id="485169964" name="Text 23"/>
+          <p:cNvPr id="917318175" name="Text 23"/>
           <p:cNvSpPr/>
           <p:nvPr/>
         </p:nvSpPr>
@@ -16688,7 +16818,7 @@
       </p:sp>
       <p:sp>
         <p:nvSpPr>
-          <p:cNvPr id="880557733" name="Text 24"/>
+          <p:cNvPr id="1907365039" name="Text 24"/>
           <p:cNvSpPr/>
           <p:nvPr/>
         </p:nvSpPr>
@@ -16717,7 +16847,7 @@
       </p:sp>
       <p:sp>
         <p:nvSpPr>
-          <p:cNvPr id="1467880246" name="Text 25"/>
+          <p:cNvPr id="250952738" name="Text 25"/>
           <p:cNvSpPr/>
           <p:nvPr/>
         </p:nvSpPr>
@@ -16749,11 +16879,11 @@
   <p:clrMapOvr>
     <a:masterClrMapping/>
   </p:clrMapOvr>
-  <mc:AlternateContent xmlns:mc="http://schemas.openxmlformats.org/markup-compatibility/2006" xmlns:p159="http://schemas.microsoft.com/office/powerpoint/2015/09/main">
-    <mc:Choice Requires="p159">
-      <p:transition/>
+  <mc:AlternateContent xmlns:mc="http://schemas.openxmlformats.org/markup-compatibility/2006">
+    <mc:Choice xmlns:p159="http://schemas.microsoft.com/office/powerpoint/2015/09/main" xmlns:p14="http://schemas.microsoft.com/office/powerpoint/2010/main" Requires="p159">
+      <p:transition p14:dur="500" advClick="1"/>
     </mc:Choice>
-    <mc:Fallback xmlns:w="http://schemas.openxmlformats.org/wordprocessingml/2006/main" xmlns:m="http://schemas.openxmlformats.org/officeDocument/2006/math" xmlns="">
+    <mc:Fallback>
       <p:transition advClick="1"/>
     </mc:Fallback>
   </mc:AlternateContent>
@@ -16761,14 +16891,13 @@
 </file>
 
 <file path=ppt/slides/slide7.xml><?xml version="1.0" encoding="utf-8"?>
-<p:sld xmlns:a="http://schemas.openxmlformats.org/drawingml/2006/main" xmlns:r="http://schemas.openxmlformats.org/officeDocument/2006/relationships" xmlns:p="http://schemas.openxmlformats.org/presentationml/2006/main" showMasterPhAnim="0">
+<p:sld xmlns:a="http://schemas.openxmlformats.org/drawingml/2006/main" xmlns:r="http://schemas.openxmlformats.org/officeDocument/2006/relationships" xmlns:p="http://schemas.openxmlformats.org/presentationml/2006/main" xmlns:m="http://schemas.openxmlformats.org/officeDocument/2006/math" xmlns:w="http://schemas.openxmlformats.org/wordprocessingml/2006/main" xmlns:mc="http://schemas.openxmlformats.org/markup-compatibility/2006" showMasterPhAnim="0" showMasterSp="1" show="1">
   <p:cSld name="Slide 7">
     <p:bg>
-      <p:bgPr>
+      <p:bgPr shadeToTitle="0">
         <a:solidFill>
           <a:srgbClr val="1F4E79"/>
         </a:solidFill>
-        <a:effectLst/>
       </p:bgPr>
     </p:bg>
     <p:spTree>
@@ -16787,7 +16916,7 @@
       </p:grpSpPr>
       <p:sp>
         <p:nvSpPr>
-          <p:cNvPr id="1616465608" name="Text 0"/>
+          <p:cNvPr id="1365008924" name="Text 0"/>
           <p:cNvSpPr/>
           <p:nvPr/>
         </p:nvSpPr>
@@ -16849,7 +16978,7 @@
       </p:sp>
       <p:sp>
         <p:nvSpPr>
-          <p:cNvPr id="363591960" name="Text 1"/>
+          <p:cNvPr id="927964101" name="Text 1"/>
           <p:cNvSpPr/>
           <p:nvPr/>
         </p:nvSpPr>
@@ -16878,7 +17007,7 @@
       </p:sp>
       <p:sp>
         <p:nvSpPr>
-          <p:cNvPr id="280467976" name="Text 2"/>
+          <p:cNvPr id="1544278830" name="Text 2"/>
           <p:cNvSpPr/>
           <p:nvPr/>
         </p:nvSpPr>
@@ -16907,7 +17036,7 @@
       </p:sp>
       <p:sp>
         <p:nvSpPr>
-          <p:cNvPr id="1101399179" name="Text 1"/>
+          <p:cNvPr id="1977713392" name="Text 1"/>
           <p:cNvSpPr/>
           <p:nvPr/>
         </p:nvSpPr>
@@ -16950,11 +17079,11 @@
   <p:clrMapOvr>
     <a:masterClrMapping/>
   </p:clrMapOvr>
-  <mc:AlternateContent xmlns:mc="http://schemas.openxmlformats.org/markup-compatibility/2006" xmlns:p159="http://schemas.microsoft.com/office/powerpoint/2015/09/main">
-    <mc:Choice Requires="p159">
-      <p:transition/>
+  <mc:AlternateContent xmlns:mc="http://schemas.openxmlformats.org/markup-compatibility/2006">
+    <mc:Choice xmlns:p159="http://schemas.microsoft.com/office/powerpoint/2015/09/main" xmlns:p14="http://schemas.microsoft.com/office/powerpoint/2010/main" Requires="p159">
+      <p:transition p14:dur="500" advClick="1"/>
     </mc:Choice>
-    <mc:Fallback xmlns:w="http://schemas.openxmlformats.org/wordprocessingml/2006/main" xmlns:m="http://schemas.openxmlformats.org/officeDocument/2006/math" xmlns="">
+    <mc:Fallback>
       <p:transition advClick="1"/>
     </mc:Fallback>
   </mc:AlternateContent>
@@ -16962,14 +17091,13 @@
 </file>
 
 <file path=ppt/slides/slide8.xml><?xml version="1.0" encoding="utf-8"?>
-<p:sld xmlns:a="http://schemas.openxmlformats.org/drawingml/2006/main" xmlns:r="http://schemas.openxmlformats.org/officeDocument/2006/relationships" xmlns:p="http://schemas.openxmlformats.org/presentationml/2006/main" showMasterPhAnim="0">
+<p:sld xmlns:a="http://schemas.openxmlformats.org/drawingml/2006/main" xmlns:r="http://schemas.openxmlformats.org/officeDocument/2006/relationships" xmlns:p="http://schemas.openxmlformats.org/presentationml/2006/main" xmlns:m="http://schemas.openxmlformats.org/officeDocument/2006/math" xmlns:w="http://schemas.openxmlformats.org/wordprocessingml/2006/main" xmlns:mc="http://schemas.openxmlformats.org/markup-compatibility/2006" showMasterPhAnim="0" showMasterSp="1" show="1">
   <p:cSld name="Slide 8">
     <p:bg>
-      <p:bgPr>
+      <p:bgPr shadeToTitle="0">
         <a:solidFill>
           <a:srgbClr val="F5F8FA"/>
         </a:solidFill>
-        <a:effectLst/>
       </p:bgPr>
     </p:bg>
     <p:spTree>
@@ -16988,7 +17116,7 @@
       </p:grpSpPr>
       <p:sp>
         <p:nvSpPr>
-          <p:cNvPr id="370146346" name="Text 0"/>
+          <p:cNvPr id="435673907" name="Text 0"/>
           <p:cNvSpPr/>
           <p:nvPr/>
         </p:nvSpPr>
@@ -17028,7 +17156,7 @@
       </p:sp>
       <p:sp>
         <p:nvSpPr>
-          <p:cNvPr id="175052078" name="Shape 1"/>
+          <p:cNvPr id="1937544678" name="Shape 1"/>
           <p:cNvSpPr/>
           <p:nvPr/>
         </p:nvSpPr>
@@ -17058,7 +17186,7 @@
       </p:sp>
       <p:sp>
         <p:nvSpPr>
-          <p:cNvPr id="1260698073" name="Shape 2"/>
+          <p:cNvPr id="983262824" name="Shape 2"/>
           <p:cNvSpPr/>
           <p:nvPr/>
         </p:nvSpPr>
@@ -17093,7 +17221,7 @@
       </p:sp>
       <p:sp>
         <p:nvSpPr>
-          <p:cNvPr id="1719121782" name="Text 3"/>
+          <p:cNvPr id="1102135753" name="Text 3"/>
           <p:cNvSpPr/>
           <p:nvPr/>
         </p:nvSpPr>
@@ -17133,7 +17261,7 @@
       </p:sp>
       <p:sp>
         <p:nvSpPr>
-          <p:cNvPr id="459819788" name="Shape 4"/>
+          <p:cNvPr id="851301026" name="Shape 4"/>
           <p:cNvSpPr/>
           <p:nvPr/>
         </p:nvSpPr>
@@ -17168,7 +17296,7 @@
       </p:sp>
       <p:sp>
         <p:nvSpPr>
-          <p:cNvPr id="935896124" name="Text 5"/>
+          <p:cNvPr id="1157422877" name="Text 5"/>
           <p:cNvSpPr/>
           <p:nvPr/>
         </p:nvSpPr>
@@ -17208,7 +17336,7 @@
       </p:sp>
       <p:sp>
         <p:nvSpPr>
-          <p:cNvPr id="68771805" name="Shape 6"/>
+          <p:cNvPr id="106880910" name="Shape 6"/>
           <p:cNvSpPr/>
           <p:nvPr/>
         </p:nvSpPr>
@@ -17243,7 +17371,7 @@
       </p:sp>
       <p:sp>
         <p:nvSpPr>
-          <p:cNvPr id="837461957" name="Text 7"/>
+          <p:cNvPr id="756580403" name="Text 7"/>
           <p:cNvSpPr/>
           <p:nvPr/>
         </p:nvSpPr>
@@ -17283,7 +17411,7 @@
       </p:sp>
       <p:sp>
         <p:nvSpPr>
-          <p:cNvPr id="2068516429" name="Shape 8"/>
+          <p:cNvPr id="1476613979" name="Shape 8"/>
           <p:cNvSpPr/>
           <p:nvPr/>
         </p:nvSpPr>
@@ -17318,7 +17446,7 @@
       </p:sp>
       <p:sp>
         <p:nvSpPr>
-          <p:cNvPr id="1032524085" name="Text 9"/>
+          <p:cNvPr id="66418052" name="Text 9"/>
           <p:cNvSpPr/>
           <p:nvPr/>
         </p:nvSpPr>
@@ -17358,7 +17486,7 @@
       </p:sp>
       <p:sp>
         <p:nvSpPr>
-          <p:cNvPr id="1894854265" name="Shape 10"/>
+          <p:cNvPr id="811971050" name="Shape 10"/>
           <p:cNvSpPr/>
           <p:nvPr/>
         </p:nvSpPr>
@@ -17393,7 +17521,7 @@
       </p:sp>
       <p:sp>
         <p:nvSpPr>
-          <p:cNvPr id="175558108" name="Text 11"/>
+          <p:cNvPr id="1936937954" name="Text 11"/>
           <p:cNvSpPr/>
           <p:nvPr/>
         </p:nvSpPr>
@@ -17444,7 +17572,7 @@
       </p:sp>
       <p:sp>
         <p:nvSpPr>
-          <p:cNvPr id="195361060" name="Shape 12"/>
+          <p:cNvPr id="534809011" name="Shape 12"/>
           <p:cNvSpPr/>
           <p:nvPr/>
         </p:nvSpPr>
@@ -17479,7 +17607,7 @@
       </p:sp>
       <p:sp>
         <p:nvSpPr>
-          <p:cNvPr id="339757777" name="Text 13"/>
+          <p:cNvPr id="619580916" name="Text 13"/>
           <p:cNvSpPr/>
           <p:nvPr/>
         </p:nvSpPr>
@@ -17511,7 +17639,7 @@
                 <a:ea typeface="Calibri"/>
                 <a:cs typeface="Calibri"/>
               </a:rPr>
-              <a:t>SOAP (CXF)</a:t>
+              <a:t>SOAP</a:t>
             </a:r>
             <a:endParaRPr lang="en-US" sz="1100"/>
           </a:p>
@@ -17519,7 +17647,7 @@
       </p:sp>
       <p:sp>
         <p:nvSpPr>
-          <p:cNvPr id="820490955" name="Shape 14"/>
+          <p:cNvPr id="210367161" name="Shape 14"/>
           <p:cNvSpPr/>
           <p:nvPr/>
         </p:nvSpPr>
@@ -17554,7 +17682,7 @@
       </p:sp>
       <p:sp>
         <p:nvSpPr>
-          <p:cNvPr id="1520542973" name="Text 15"/>
+          <p:cNvPr id="1221770848" name="Text 15"/>
           <p:cNvSpPr/>
           <p:nvPr/>
         </p:nvSpPr>
@@ -17594,7 +17722,7 @@
       </p:sp>
       <p:sp>
         <p:nvSpPr>
-          <p:cNvPr id="2103944274" name="Shape 16"/>
+          <p:cNvPr id="674370369" name="Shape 16"/>
           <p:cNvSpPr/>
           <p:nvPr/>
         </p:nvSpPr>
@@ -17629,7 +17757,7 @@
       </p:sp>
       <p:sp>
         <p:nvSpPr>
-          <p:cNvPr id="1404969512" name="Text 17"/>
+          <p:cNvPr id="575800672" name="Text 17"/>
           <p:cNvSpPr/>
           <p:nvPr/>
         </p:nvSpPr>
@@ -17745,7 +17873,7 @@
       </p:sp>
       <p:sp>
         <p:nvSpPr>
-          <p:cNvPr id="1890303727" name="Shape 18"/>
+          <p:cNvPr id="1146488293" name="Shape 18"/>
           <p:cNvSpPr/>
           <p:nvPr/>
         </p:nvSpPr>
@@ -17780,7 +17908,7 @@
       </p:sp>
       <p:sp>
         <p:nvSpPr>
-          <p:cNvPr id="1288705526" name="Text 19"/>
+          <p:cNvPr id="1019689391" name="Text 19"/>
           <p:cNvSpPr/>
           <p:nvPr/>
         </p:nvSpPr>
@@ -17831,7 +17959,7 @@
       </p:sp>
       <p:sp>
         <p:nvSpPr>
-          <p:cNvPr id="1480881850" name="Shape 20"/>
+          <p:cNvPr id="459428788" name="Shape 20"/>
           <p:cNvSpPr/>
           <p:nvPr/>
         </p:nvSpPr>
@@ -17866,7 +17994,7 @@
       </p:sp>
       <p:sp>
         <p:nvSpPr>
-          <p:cNvPr id="1471078149" name="Text 21"/>
+          <p:cNvPr id="602097132" name="Text 21"/>
           <p:cNvSpPr/>
           <p:nvPr/>
         </p:nvSpPr>
@@ -17906,7 +18034,7 @@
       </p:sp>
       <p:sp>
         <p:nvSpPr>
-          <p:cNvPr id="708172871" name="Shape 22"/>
+          <p:cNvPr id="660957213" name="Shape 22"/>
           <p:cNvSpPr/>
           <p:nvPr/>
         </p:nvSpPr>
@@ -17941,7 +18069,7 @@
       </p:sp>
       <p:sp>
         <p:nvSpPr>
-          <p:cNvPr id="689119752" name="Text 23"/>
+          <p:cNvPr id="1591144421" name="Text 23"/>
           <p:cNvSpPr/>
           <p:nvPr/>
         </p:nvSpPr>
@@ -17981,7 +18109,7 @@
       </p:sp>
       <p:sp>
         <p:nvSpPr>
-          <p:cNvPr id="948338344" name="Shape 24"/>
+          <p:cNvPr id="618511656" name="Shape 24"/>
           <p:cNvSpPr/>
           <p:nvPr/>
         </p:nvSpPr>
@@ -18016,7 +18144,7 @@
       </p:sp>
       <p:sp>
         <p:nvSpPr>
-          <p:cNvPr id="701355186" name="Text 25"/>
+          <p:cNvPr id="743082279" name="Text 25"/>
           <p:cNvSpPr/>
           <p:nvPr/>
         </p:nvSpPr>
@@ -18111,7 +18239,7 @@
       </p:sp>
       <p:sp>
         <p:nvSpPr>
-          <p:cNvPr id="635943062" name="Shape 26"/>
+          <p:cNvPr id="1264921289" name="Shape 26"/>
           <p:cNvSpPr/>
           <p:nvPr/>
         </p:nvSpPr>
@@ -18146,7 +18274,7 @@
       </p:sp>
       <p:sp>
         <p:nvSpPr>
-          <p:cNvPr id="306292456" name="Text 27"/>
+          <p:cNvPr id="1672474686" name="Text 27"/>
           <p:cNvSpPr/>
           <p:nvPr/>
         </p:nvSpPr>
@@ -18197,7 +18325,7 @@
       </p:sp>
       <p:sp>
         <p:nvSpPr>
-          <p:cNvPr id="248532303" name="Shape 28"/>
+          <p:cNvPr id="1584691338" name="Shape 28"/>
           <p:cNvSpPr/>
           <p:nvPr/>
         </p:nvSpPr>
@@ -18232,7 +18360,7 @@
       </p:sp>
       <p:sp>
         <p:nvSpPr>
-          <p:cNvPr id="494290569" name="Text 29"/>
+          <p:cNvPr id="2003996369" name="Text 29"/>
           <p:cNvSpPr/>
           <p:nvPr/>
         </p:nvSpPr>
@@ -18272,7 +18400,7 @@
       </p:sp>
       <p:sp>
         <p:nvSpPr>
-          <p:cNvPr id="1426113234" name="Shape 30"/>
+          <p:cNvPr id="1831820317" name="Shape 30"/>
           <p:cNvSpPr/>
           <p:nvPr/>
         </p:nvSpPr>
@@ -18307,7 +18435,7 @@
       </p:sp>
       <p:sp>
         <p:nvSpPr>
-          <p:cNvPr id="1737836688" name="Text 31"/>
+          <p:cNvPr id="1212462168" name="Text 31"/>
           <p:cNvSpPr/>
           <p:nvPr/>
         </p:nvSpPr>
@@ -18347,7 +18475,7 @@
       </p:sp>
       <p:sp>
         <p:nvSpPr>
-          <p:cNvPr id="34029844" name="Shape 32"/>
+          <p:cNvPr id="1577357621" name="Shape 32"/>
           <p:cNvSpPr/>
           <p:nvPr/>
         </p:nvSpPr>
@@ -18382,7 +18510,7 @@
       </p:sp>
       <p:sp>
         <p:nvSpPr>
-          <p:cNvPr id="1781819250" name="Text 33"/>
+          <p:cNvPr id="702716076" name="Text 33"/>
           <p:cNvSpPr/>
           <p:nvPr/>
         </p:nvSpPr>
@@ -18406,7 +18534,7 @@
               <a:defRPr/>
             </a:pPr>
             <a:r>
-              <a:rPr lang="en-US" sz="1100" dirty="0">
+              <a:rPr lang="en-US" sz="1100">
                 <a:solidFill>
                   <a:srgbClr val="595959"/>
                 </a:solidFill>
@@ -18417,7 +18545,7 @@
               <a:t>Active prescriptions per patient, drug prescription endpoint</a:t>
             </a:r>
             <a:r>
-              <a:rPr lang="it-IT" sz="1100" dirty="0">
+              <a:rPr lang="it-IT" sz="1100">
                 <a:solidFill>
                   <a:srgbClr val="595959"/>
                 </a:solidFill>
@@ -18427,13 +18555,13 @@
               </a:rPr>
               <a:t>.</a:t>
             </a:r>
-            <a:endParaRPr lang="en-US" sz="1100" dirty="0"/>
-          </a:p>
-        </p:txBody>
-      </p:sp>
-      <p:sp>
-        <p:nvSpPr>
-          <p:cNvPr id="408836649" name="Shape 34"/>
+            <a:endParaRPr lang="en-US" sz="1100"/>
+          </a:p>
+        </p:txBody>
+      </p:sp>
+      <p:sp>
+        <p:nvSpPr>
+          <p:cNvPr id="899423450" name="Shape 34"/>
           <p:cNvSpPr/>
           <p:nvPr/>
         </p:nvSpPr>
@@ -18468,7 +18596,7 @@
       </p:sp>
       <p:sp>
         <p:nvSpPr>
-          <p:cNvPr id="261575352" name="Text 35"/>
+          <p:cNvPr id="1199253477" name="Text 35"/>
           <p:cNvSpPr/>
           <p:nvPr/>
         </p:nvSpPr>
@@ -18508,7 +18636,7 @@
       </p:sp>
       <p:sp>
         <p:nvSpPr>
-          <p:cNvPr id="1270258783" name="Shape 36"/>
+          <p:cNvPr id="1073479881" name="Shape 36"/>
           <p:cNvSpPr/>
           <p:nvPr/>
         </p:nvSpPr>
@@ -18543,7 +18671,7 @@
       </p:sp>
       <p:sp>
         <p:nvSpPr>
-          <p:cNvPr id="612482453" name="Text 37"/>
+          <p:cNvPr id="422609489" name="Text 37"/>
           <p:cNvSpPr/>
           <p:nvPr/>
         </p:nvSpPr>
@@ -18583,7 +18711,7 @@
       </p:sp>
       <p:sp>
         <p:nvSpPr>
-          <p:cNvPr id="1211207687" name="Shape 38"/>
+          <p:cNvPr id="399347273" name="Shape 38"/>
           <p:cNvSpPr/>
           <p:nvPr/>
         </p:nvSpPr>
@@ -18618,7 +18746,7 @@
       </p:sp>
       <p:sp>
         <p:nvSpPr>
-          <p:cNvPr id="1329414501" name="Text 39"/>
+          <p:cNvPr id="1600436390" name="Text 39"/>
           <p:cNvSpPr/>
           <p:nvPr/>
         </p:nvSpPr>
@@ -18658,7 +18786,7 @@
       </p:sp>
       <p:sp>
         <p:nvSpPr>
-          <p:cNvPr id="435991905" name="Shape 40"/>
+          <p:cNvPr id="1703416593" name="Shape 40"/>
           <p:cNvSpPr/>
           <p:nvPr/>
         </p:nvSpPr>
@@ -18693,7 +18821,7 @@
       </p:sp>
       <p:sp>
         <p:nvSpPr>
-          <p:cNvPr id="1727218129" name="Text 41"/>
+          <p:cNvPr id="2060268771" name="Text 41"/>
           <p:cNvSpPr/>
           <p:nvPr/>
         </p:nvSpPr>
@@ -18744,7 +18872,7 @@
       </p:sp>
       <p:sp>
         <p:nvSpPr>
-          <p:cNvPr id="392129947" name="Text 42"/>
+          <p:cNvPr id="1592109320" name="Text 42"/>
           <p:cNvSpPr/>
           <p:nvPr/>
         </p:nvSpPr>
@@ -18776,11 +18904,11 @@
   <p:clrMapOvr>
     <a:masterClrMapping/>
   </p:clrMapOvr>
-  <mc:AlternateContent xmlns:mc="http://schemas.openxmlformats.org/markup-compatibility/2006" xmlns:p159="http://schemas.microsoft.com/office/powerpoint/2015/09/main">
-    <mc:Choice Requires="p159">
-      <p:transition/>
+  <mc:AlternateContent xmlns:mc="http://schemas.openxmlformats.org/markup-compatibility/2006">
+    <mc:Choice xmlns:p159="http://schemas.microsoft.com/office/powerpoint/2015/09/main" xmlns:p14="http://schemas.microsoft.com/office/powerpoint/2010/main" Requires="p159">
+      <p:transition p14:dur="500" advClick="1"/>
     </mc:Choice>
-    <mc:Fallback xmlns:w="http://schemas.openxmlformats.org/wordprocessingml/2006/main" xmlns:m="http://schemas.openxmlformats.org/officeDocument/2006/math" xmlns="">
+    <mc:Fallback>
       <p:transition advClick="1"/>
     </mc:Fallback>
   </mc:AlternateContent>
@@ -18788,14 +18916,13 @@
 </file>
 
 <file path=ppt/slides/slide9.xml><?xml version="1.0" encoding="utf-8"?>
-<p:sld xmlns:a="http://schemas.openxmlformats.org/drawingml/2006/main" xmlns:r="http://schemas.openxmlformats.org/officeDocument/2006/relationships" xmlns:p="http://schemas.openxmlformats.org/presentationml/2006/main" showMasterPhAnim="0">
+<p:sld xmlns:a="http://schemas.openxmlformats.org/drawingml/2006/main" xmlns:r="http://schemas.openxmlformats.org/officeDocument/2006/relationships" xmlns:p="http://schemas.openxmlformats.org/presentationml/2006/main" xmlns:m="http://schemas.openxmlformats.org/officeDocument/2006/math" xmlns:w="http://schemas.openxmlformats.org/wordprocessingml/2006/main" xmlns:mc="http://schemas.openxmlformats.org/markup-compatibility/2006" showMasterPhAnim="0" showMasterSp="1" show="1">
   <p:cSld name="Slide 9">
     <p:bg>
-      <p:bgPr>
+      <p:bgPr shadeToTitle="0">
         <a:solidFill>
           <a:srgbClr val="F5F8FA"/>
         </a:solidFill>
-        <a:effectLst/>
       </p:bgPr>
     </p:bg>
     <p:spTree>
@@ -18814,7 +18941,7 @@
       </p:grpSpPr>
       <p:sp>
         <p:nvSpPr>
-          <p:cNvPr id="1746225592" name="Text 0"/>
+          <p:cNvPr id="1539449644" name="Text 0"/>
           <p:cNvSpPr/>
           <p:nvPr/>
         </p:nvSpPr>
@@ -18854,7 +18981,7 @@
       </p:sp>
       <p:sp>
         <p:nvSpPr>
-          <p:cNvPr id="1937505551" name="Shape 1"/>
+          <p:cNvPr id="2108430366" name="Shape 1"/>
           <p:cNvSpPr/>
           <p:nvPr/>
         </p:nvSpPr>
@@ -18884,7 +19011,7 @@
       </p:sp>
       <p:sp>
         <p:nvSpPr>
-          <p:cNvPr id="1486806582" name="Shape 2"/>
+          <p:cNvPr id="1102504583" name="Shape 2"/>
           <p:cNvSpPr/>
           <p:nvPr/>
         </p:nvSpPr>
@@ -18919,7 +19046,7 @@
       </p:sp>
       <p:sp>
         <p:nvSpPr>
-          <p:cNvPr id="109272324" name="Text 3"/>
+          <p:cNvPr id="658605944" name="Text 3"/>
           <p:cNvSpPr/>
           <p:nvPr/>
         </p:nvSpPr>
@@ -18959,7 +19086,7 @@
       </p:sp>
       <p:sp>
         <p:nvSpPr>
-          <p:cNvPr id="983519055" name="Shape 4"/>
+          <p:cNvPr id="1697257677" name="Shape 4"/>
           <p:cNvSpPr/>
           <p:nvPr/>
         </p:nvSpPr>
@@ -18994,7 +19121,7 @@
       </p:sp>
       <p:sp>
         <p:nvSpPr>
-          <p:cNvPr id="1901909971" name="Text 5"/>
+          <p:cNvPr id="2016261657" name="Text 5"/>
           <p:cNvSpPr/>
           <p:nvPr/>
         </p:nvSpPr>
@@ -19034,7 +19161,7 @@
       </p:sp>
       <p:sp>
         <p:nvSpPr>
-          <p:cNvPr id="718624972" name="Shape 6"/>
+          <p:cNvPr id="1731998769" name="Shape 6"/>
           <p:cNvSpPr/>
           <p:nvPr/>
         </p:nvSpPr>
@@ -19069,7 +19196,7 @@
       </p:sp>
       <p:sp>
         <p:nvSpPr>
-          <p:cNvPr id="1717489136" name="Text 7"/>
+          <p:cNvPr id="721099967" name="Text 7"/>
           <p:cNvSpPr/>
           <p:nvPr/>
         </p:nvSpPr>
@@ -19109,7 +19236,7 @@
       </p:sp>
       <p:sp>
         <p:nvSpPr>
-          <p:cNvPr id="2067453436" name="Shape 8"/>
+          <p:cNvPr id="468068113" name="Shape 8"/>
           <p:cNvSpPr/>
           <p:nvPr/>
         </p:nvSpPr>
@@ -19144,7 +19271,7 @@
       </p:sp>
       <p:sp>
         <p:nvSpPr>
-          <p:cNvPr id="7787552" name="Text 9"/>
+          <p:cNvPr id="1685144396" name="Text 9"/>
           <p:cNvSpPr/>
           <p:nvPr/>
         </p:nvSpPr>
@@ -19184,7 +19311,7 @@
       </p:sp>
       <p:sp>
         <p:nvSpPr>
-          <p:cNvPr id="1031119483" name="Shape 10"/>
+          <p:cNvPr id="1100502685" name="Shape 10"/>
           <p:cNvSpPr/>
           <p:nvPr/>
         </p:nvSpPr>
@@ -19219,7 +19346,7 @@
       </p:sp>
       <p:sp>
         <p:nvSpPr>
-          <p:cNvPr id="1091378863" name="Text 11"/>
+          <p:cNvPr id="769827024" name="Text 11"/>
           <p:cNvSpPr/>
           <p:nvPr/>
         </p:nvSpPr>
@@ -19277,7 +19404,7 @@
       </p:sp>
       <p:sp>
         <p:nvSpPr>
-          <p:cNvPr id="1068608723" name="Shape 12"/>
+          <p:cNvPr id="1342923224" name="Shape 12"/>
           <p:cNvSpPr/>
           <p:nvPr/>
         </p:nvSpPr>
@@ -19312,7 +19439,7 @@
       </p:sp>
       <p:sp>
         <p:nvSpPr>
-          <p:cNvPr id="768168248" name="Text 13"/>
+          <p:cNvPr id="83885557" name="Text 13"/>
           <p:cNvSpPr/>
           <p:nvPr/>
         </p:nvSpPr>
@@ -19352,7 +19479,7 @@
       </p:sp>
       <p:sp>
         <p:nvSpPr>
-          <p:cNvPr id="1897880171" name="Shape 14"/>
+          <p:cNvPr id="881201625" name="Shape 14"/>
           <p:cNvSpPr/>
           <p:nvPr/>
         </p:nvSpPr>
@@ -19387,7 +19514,7 @@
       </p:sp>
       <p:sp>
         <p:nvSpPr>
-          <p:cNvPr id="927857644" name="Text 15"/>
+          <p:cNvPr id="864919599" name="Text 15"/>
           <p:cNvSpPr/>
           <p:nvPr/>
         </p:nvSpPr>
@@ -19481,7 +19608,7 @@
                 <a:ea typeface="Calibri"/>
                 <a:cs typeface="Calibri"/>
               </a:rPr>
-              <a:t>(REST async)</a:t>
+              <a:t>(REST)</a:t>
             </a:r>
             <a:endParaRPr lang="en-US" sz="1050"/>
           </a:p>
@@ -19489,7 +19616,7 @@
       </p:sp>
       <p:sp>
         <p:nvSpPr>
-          <p:cNvPr id="329016977" name="Shape 16"/>
+          <p:cNvPr id="1148981620" name="Shape 16"/>
           <p:cNvSpPr/>
           <p:nvPr/>
         </p:nvSpPr>
@@ -19524,7 +19651,7 @@
       </p:sp>
       <p:sp>
         <p:nvSpPr>
-          <p:cNvPr id="1666592962" name="Text 17"/>
+          <p:cNvPr id="2106493675" name="Text 17"/>
           <p:cNvSpPr/>
           <p:nvPr/>
         </p:nvSpPr>
@@ -19694,7 +19821,7 @@
       </p:sp>
       <p:sp>
         <p:nvSpPr>
-          <p:cNvPr id="1128296764" name="Shape 18"/>
+          <p:cNvPr id="1816735343" name="Shape 18"/>
           <p:cNvSpPr/>
           <p:nvPr/>
         </p:nvSpPr>
@@ -19729,7 +19856,7 @@
       </p:sp>
       <p:sp>
         <p:nvSpPr>
-          <p:cNvPr id="736479318" name="Text 19"/>
+          <p:cNvPr id="1285659609" name="Text 19"/>
           <p:cNvSpPr/>
           <p:nvPr/>
         </p:nvSpPr>
@@ -19787,7 +19914,7 @@
       </p:sp>
       <p:sp>
         <p:nvSpPr>
-          <p:cNvPr id="1486941252" name="Shape 20"/>
+          <p:cNvPr id="1606072847" name="Shape 20"/>
           <p:cNvSpPr/>
           <p:nvPr/>
         </p:nvSpPr>
@@ -19822,7 +19949,7 @@
       </p:sp>
       <p:sp>
         <p:nvSpPr>
-          <p:cNvPr id="65356529" name="Text 21"/>
+          <p:cNvPr id="1397083392" name="Text 21"/>
           <p:cNvSpPr/>
           <p:nvPr/>
         </p:nvSpPr>
@@ -19862,7 +19989,7 @@
       </p:sp>
       <p:sp>
         <p:nvSpPr>
-          <p:cNvPr id="12850482" name="Shape 22"/>
+          <p:cNvPr id="411678913" name="Shape 22"/>
           <p:cNvSpPr/>
           <p:nvPr/>
         </p:nvSpPr>
@@ -19897,7 +20024,7 @@
       </p:sp>
       <p:sp>
         <p:nvSpPr>
-          <p:cNvPr id="1042321193" name="Text 23"/>
+          <p:cNvPr id="1144390720" name="Text 23"/>
           <p:cNvSpPr/>
           <p:nvPr/>
         </p:nvSpPr>
@@ -19951,7 +20078,7 @@
                 <a:ea typeface="Calibri"/>
                 <a:cs typeface="Calibri"/>
               </a:rPr>
-              <a:t>(SOAP/CXF) +</a:t>
+              <a:t>(SOAP) +</a:t>
             </a:r>
             <a:endParaRPr lang="en-US" sz="1050"/>
           </a:p>
@@ -19999,7 +20126,7 @@
       </p:sp>
       <p:sp>
         <p:nvSpPr>
-          <p:cNvPr id="222447723" name="Shape 24"/>
+          <p:cNvPr id="1486380805" name="Shape 24"/>
           <p:cNvSpPr/>
           <p:nvPr/>
         </p:nvSpPr>
@@ -20034,7 +20161,7 @@
       </p:sp>
       <p:sp>
         <p:nvSpPr>
-          <p:cNvPr id="2031734248" name="Text 25"/>
+          <p:cNvPr id="1547652796" name="Text 25"/>
           <p:cNvSpPr/>
           <p:nvPr/>
         </p:nvSpPr>
@@ -20129,7 +20256,7 @@
       </p:sp>
       <p:sp>
         <p:nvSpPr>
-          <p:cNvPr id="2075653385" name="Shape 26"/>
+          <p:cNvPr id="1032179660" name="Shape 26"/>
           <p:cNvSpPr/>
           <p:nvPr/>
         </p:nvSpPr>
@@ -20164,7 +20291,7 @@
       </p:sp>
       <p:sp>
         <p:nvSpPr>
-          <p:cNvPr id="1326442535" name="Text 27"/>
+          <p:cNvPr id="1141488817" name="Text 27"/>
           <p:cNvSpPr/>
           <p:nvPr/>
         </p:nvSpPr>
@@ -20222,7 +20349,7 @@
       </p:sp>
       <p:sp>
         <p:nvSpPr>
-          <p:cNvPr id="1996994213" name="Shape 28"/>
+          <p:cNvPr id="134671867" name="Shape 28"/>
           <p:cNvSpPr/>
           <p:nvPr/>
         </p:nvSpPr>
@@ -20257,7 +20384,7 @@
       </p:sp>
       <p:sp>
         <p:nvSpPr>
-          <p:cNvPr id="804941289" name="Text 29"/>
+          <p:cNvPr id="519815671" name="Text 29"/>
           <p:cNvSpPr/>
           <p:nvPr/>
         </p:nvSpPr>
@@ -20297,7 +20424,7 @@
       </p:sp>
       <p:sp>
         <p:nvSpPr>
-          <p:cNvPr id="1236487815" name="Shape 30"/>
+          <p:cNvPr id="1068209612" name="Shape 30"/>
           <p:cNvSpPr/>
           <p:nvPr/>
         </p:nvSpPr>
@@ -20332,7 +20459,7 @@
       </p:sp>
       <p:sp>
         <p:nvSpPr>
-          <p:cNvPr id="360215457" name="Text 31"/>
+          <p:cNvPr id="260580758" name="Text 31"/>
           <p:cNvSpPr/>
           <p:nvPr/>
         </p:nvSpPr>
@@ -20384,6 +20511,7 @@
               </a:rPr>
               <a:t>Diagnostic Aggregator (REST)</a:t>
             </a:r>
+            <a:endParaRPr/>
           </a:p>
           <a:p>
             <a:pPr marL="0" indent="0">
@@ -20414,7 +20542,7 @@
       </p:sp>
       <p:sp>
         <p:nvSpPr>
-          <p:cNvPr id="779600126" name="Shape 32"/>
+          <p:cNvPr id="1695094221" name="Shape 32"/>
           <p:cNvSpPr/>
           <p:nvPr/>
         </p:nvSpPr>
@@ -20449,7 +20577,7 @@
       </p:sp>
       <p:sp>
         <p:nvSpPr>
-          <p:cNvPr id="1962521570" name="Text 33"/>
+          <p:cNvPr id="1714199446" name="Text 33"/>
           <p:cNvSpPr/>
           <p:nvPr/>
         </p:nvSpPr>
@@ -20620,7 +20748,7 @@
       </p:sp>
       <p:sp>
         <p:nvSpPr>
-          <p:cNvPr id="364593701" name="Text 34"/>
+          <p:cNvPr id="2048467288" name="Text 34"/>
           <p:cNvSpPr/>
           <p:nvPr/>
         </p:nvSpPr>
@@ -20652,11 +20780,11 @@
   <p:clrMapOvr>
     <a:masterClrMapping/>
   </p:clrMapOvr>
-  <mc:AlternateContent xmlns:mc="http://schemas.openxmlformats.org/markup-compatibility/2006" xmlns:p159="http://schemas.microsoft.com/office/powerpoint/2015/09/main">
-    <mc:Choice Requires="p159">
-      <p:transition/>
+  <mc:AlternateContent xmlns:mc="http://schemas.openxmlformats.org/markup-compatibility/2006">
+    <mc:Choice xmlns:p159="http://schemas.microsoft.com/office/powerpoint/2015/09/main" xmlns:p14="http://schemas.microsoft.com/office/powerpoint/2010/main" Requires="p159">
+      <p:transition p14:dur="500" advClick="1"/>
     </mc:Choice>
-    <mc:Fallback xmlns:w="http://schemas.openxmlformats.org/wordprocessingml/2006/main" xmlns:m="http://schemas.openxmlformats.org/officeDocument/2006/math" xmlns="">
+    <mc:Fallback>
       <p:transition advClick="1"/>
     </mc:Fallback>
   </mc:AlternateContent>
@@ -20664,7 +20792,7 @@
 </file>
 
 <file path=ppt/theme/theme1.xml><?xml version="1.0" encoding="utf-8"?>
-<a:theme xmlns:a="http://schemas.openxmlformats.org/drawingml/2006/main" name="Office Theme">
+<a:theme xmlns:a="http://schemas.openxmlformats.org/drawingml/2006/main" xmlns:r="http://schemas.openxmlformats.org/officeDocument/2006/relationships" xmlns:p="http://schemas.openxmlformats.org/presentationml/2006/main" name="Office Theme">
   <a:themeElements>
     <a:clrScheme name="Office">
       <a:dk1>
@@ -20855,12 +20983,11 @@
     </a:fmtScheme>
   </a:themeElements>
   <a:objectDefaults/>
-  <a:extraClrSchemeLst/>
 </a:theme>
 </file>
 
 <file path=ppt/theme/theme2.xml><?xml version="1.0" encoding="utf-8"?>
-<a:theme xmlns:a="http://schemas.openxmlformats.org/drawingml/2006/main" name="Tema di Office">
+<a:theme xmlns:a="http://schemas.openxmlformats.org/drawingml/2006/main" xmlns:r="http://schemas.openxmlformats.org/officeDocument/2006/relationships" xmlns:p="http://schemas.openxmlformats.org/presentationml/2006/main" name="Tema di Office">
   <a:themeElements>
     <a:clrScheme name="Office">
       <a:dk1>
@@ -21071,6 +21198,5 @@
       </a:style>
     </a:lnDef>
   </a:objectDefaults>
-  <a:extraClrSchemeLst/>
 </a:theme>
 </file>